--- a/slides/pptx/week-02.pptx
+++ b/slides/pptx/week-02.pptx
@@ -12,9 +12,10 @@
     <p:sldId id="260" r:id="rId6"/>
     <p:sldId id="261" r:id="rId7"/>
     <p:sldId id="262" r:id="rId8"/>
+    <p:sldId id="263" r:id="rId9"/>
   </p:sldIdLst>
   <p:notesMasterIdLst>
-    <p:notesMasterId r:id="rId9"/>
+    <p:notesMasterId r:id="rId10"/>
   </p:notesMasterIdLst>
   <p:sldSz cx="12191695" cy="6858000"/>
   <p:notesSz cx="6858000" cy="12191695"/>
@@ -1078,6 +1079,94 @@
 </p:notes>
 </file>
 
+<file path=ppt/notesSlides/notesSlide8.xml><?xml version="1.0" encoding="utf-8"?>
+<p:notes xmlns:a="http://schemas.openxmlformats.org/drawingml/2006/main" xmlns:r="http://schemas.openxmlformats.org/officeDocument/2006/relationships" xmlns:p="http://schemas.openxmlformats.org/presentationml/2006/main">
+  <p:cSld>
+    <p:spTree>
+      <p:nvGrpSpPr>
+        <p:cNvPr id="1" name=""/>
+        <p:cNvGrpSpPr/>
+        <p:nvPr/>
+      </p:nvGrpSpPr>
+      <p:grpSpPr>
+        <a:xfrm>
+          <a:off x="0" y="0"/>
+          <a:ext cx="0" cy="0"/>
+          <a:chOff x="0" y="0"/>
+          <a:chExt cx="0" cy="0"/>
+        </a:xfrm>
+      </p:grpSpPr>
+      <p:sp>
+        <p:nvSpPr>
+          <p:cNvPr id="2" name="Slide Image Placeholder 1"/>
+          <p:cNvSpPr>
+            <a:spLocks noGrp="1" noRot="1" noChangeAspect="1"/>
+          </p:cNvSpPr>
+          <p:nvPr>
+            <p:ph type="sldImg"/>
+          </p:nvPr>
+        </p:nvSpPr>
+        <p:spPr/>
+      </p:sp>
+      <p:sp>
+        <p:nvSpPr>
+          <p:cNvPr id="3" name="Notes Placeholder 2"/>
+          <p:cNvSpPr>
+            <a:spLocks noGrp="1"/>
+          </p:cNvSpPr>
+          <p:nvPr>
+            <p:ph type="body" idx="1"/>
+          </p:nvPr>
+        </p:nvSpPr>
+        <p:spPr/>
+        <p:txBody>
+          <a:bodyPr/>
+          <a:lstStyle/>
+          <a:p>
+            <a:r>
+              <a:rPr lang="en-US" dirty="0"/>
+              <a:t/>
+            </a:r>
+            <a:endParaRPr lang="en-US" dirty="0"/>
+          </a:p>
+        </p:txBody>
+      </p:sp>
+      <p:sp>
+        <p:nvSpPr>
+          <p:cNvPr id="4" name="Slide Number Placeholder 3"/>
+          <p:cNvSpPr>
+            <a:spLocks noGrp="1"/>
+          </p:cNvSpPr>
+          <p:nvPr>
+            <p:ph type="sldNum" sz="quarter" idx="10"/>
+          </p:nvPr>
+        </p:nvSpPr>
+        <p:spPr/>
+        <p:txBody>
+          <a:bodyPr/>
+          <a:lstStyle/>
+          <a:p>
+            <a:fld id="{F7021451-1387-4CA6-816F-3879F97B5CBC}" type="slidenum">
+              <a:rPr lang="en-US"/>
+              <a:t>8</a:t>
+            </a:fld>
+            <a:endParaRPr lang="en-US"/>
+          </a:p>
+        </p:txBody>
+      </p:sp>
+    </p:spTree>
+    <p:extLst>
+      <p:ext uri="{BB962C8B-B14F-4D97-AF65-F5344CB8AC3E}">
+        <p14:creationId xmlns:p14="http://schemas.microsoft.com/office/powerpoint/2010/main" val="1024086991"/>
+      </p:ext>
+    </p:extLst>
+  </p:cSld>
+  <p:clrMapOvr>
+    <a:masterClrMapping/>
+  </p:clrMapOvr>
+</p:notes>
+</file>
+
 <file path=ppt/slideLayouts/slideLayout1.xml><?xml version="1.0" encoding="utf-8"?>
 <p:sldLayout xmlns:a="http://schemas.openxmlformats.org/drawingml/2006/main" xmlns:r="http://schemas.openxmlformats.org/officeDocument/2006/relationships" xmlns:p="http://schemas.openxmlformats.org/presentationml/2006/main" preserve="1">
   <p:cSld name="DEFAULT">
@@ -4396,6 +4485,548 @@
 <file path=ppt/slides/slide7.xml><?xml version="1.0" encoding="utf-8"?>
 <p:sld xmlns:a="http://schemas.openxmlformats.org/drawingml/2006/main" xmlns:r="http://schemas.openxmlformats.org/officeDocument/2006/relationships" xmlns:p="http://schemas.openxmlformats.org/presentationml/2006/main">
   <p:cSld name="Slide 7">
+    <p:bg>
+      <p:bgPr>
+        <a:solidFill>
+          <a:srgbClr val="FFFFFF"/>
+        </a:solidFill>
+      </p:bgPr>
+    </p:bg>
+    <p:spTree>
+      <p:nvGrpSpPr>
+        <p:cNvPr id="1" name=""/>
+        <p:cNvGrpSpPr/>
+        <p:nvPr/>
+      </p:nvGrpSpPr>
+      <p:grpSpPr>
+        <a:xfrm>
+          <a:off x="0" y="0"/>
+          <a:ext cx="0" cy="0"/>
+          <a:chOff x="0" y="0"/>
+          <a:chExt cx="0" cy="0"/>
+        </a:xfrm>
+      </p:grpSpPr>
+      <p:sp>
+        <p:nvSpPr>
+          <p:cNvPr id="2" name="Text 0"/>
+          <p:cNvSpPr/>
+          <p:nvPr/>
+        </p:nvSpPr>
+        <p:spPr>
+          <a:xfrm>
+            <a:off x="640080" y="640080"/>
+            <a:ext cx="10058400" cy="320040"/>
+          </a:xfrm>
+          <a:prstGeom prst="rect">
+            <a:avLst/>
+          </a:prstGeom>
+          <a:noFill/>
+          <a:ln/>
+        </p:spPr>
+        <p:txBody>
+          <a:bodyPr wrap="square" rtlCol="0" anchor="ctr"/>
+          <a:lstStyle/>
+          <a:p>
+            <a:pPr indent="0" marL="0">
+              <a:buNone/>
+            </a:pPr>
+            <a:r>
+              <a:rPr lang="en-US" sz="1300" b="1" spc="300" kern="0" dirty="0">
+                <a:solidFill>
+                  <a:srgbClr val="7A3B2E"/>
+                </a:solidFill>
+                <a:latin typeface="Calibri" pitchFamily="34" charset="0"/>
+                <a:ea typeface="Calibri" pitchFamily="34" charset="-122"/>
+                <a:cs typeface="Calibri" pitchFamily="34" charset="-120"/>
+              </a:rPr>
+              <a:t>HOW THIS WEEK CONNECTS</a:t>
+            </a:r>
+            <a:endParaRPr lang="en-US" sz="1300" dirty="0"/>
+          </a:p>
+        </p:txBody>
+      </p:sp>
+      <p:sp>
+        <p:nvSpPr>
+          <p:cNvPr id="3" name="Text 1"/>
+          <p:cNvSpPr/>
+          <p:nvPr/>
+        </p:nvSpPr>
+        <p:spPr>
+          <a:xfrm>
+            <a:off x="640080" y="987552"/>
+            <a:ext cx="10058400" cy="640080"/>
+          </a:xfrm>
+          <a:prstGeom prst="rect">
+            <a:avLst/>
+          </a:prstGeom>
+          <a:noFill/>
+          <a:ln/>
+        </p:spPr>
+        <p:txBody>
+          <a:bodyPr wrap="square" rtlCol="0" anchor="ctr"/>
+          <a:lstStyle/>
+          <a:p>
+            <a:pPr indent="0" marL="0">
+              <a:buNone/>
+            </a:pPr>
+            <a:r>
+              <a:rPr lang="en-US" sz="2800" b="1" dirty="0">
+                <a:solidFill>
+                  <a:srgbClr val="1A1A1A"/>
+                </a:solidFill>
+                <a:latin typeface="Cambria" pitchFamily="34" charset="0"/>
+                <a:ea typeface="Cambria" pitchFamily="34" charset="-122"/>
+                <a:cs typeface="Cambria" pitchFamily="34" charset="-120"/>
+              </a:rPr>
+              <a:t>The course's through-lines</a:t>
+            </a:r>
+            <a:endParaRPr lang="en-US" sz="2800" dirty="0"/>
+          </a:p>
+        </p:txBody>
+      </p:sp>
+      <p:sp>
+        <p:nvSpPr>
+          <p:cNvPr id="4" name="Shape 2"/>
+          <p:cNvSpPr/>
+          <p:nvPr/>
+        </p:nvSpPr>
+        <p:spPr>
+          <a:xfrm>
+            <a:off x="640080" y="2057400"/>
+            <a:ext cx="457200" cy="457200"/>
+          </a:xfrm>
+          <a:prstGeom prst="roundRect">
+            <a:avLst>
+              <a:gd name="adj" fmla="val 16000"/>
+            </a:avLst>
+          </a:prstGeom>
+          <a:solidFill>
+            <a:srgbClr val="7A3B2E"/>
+          </a:solidFill>
+          <a:ln/>
+        </p:spPr>
+      </p:sp>
+      <p:sp>
+        <p:nvSpPr>
+          <p:cNvPr id="5" name="Text 3"/>
+          <p:cNvSpPr/>
+          <p:nvPr/>
+        </p:nvSpPr>
+        <p:spPr>
+          <a:xfrm>
+            <a:off x="640080" y="2057400"/>
+            <a:ext cx="457200" cy="457200"/>
+          </a:xfrm>
+          <a:prstGeom prst="rect">
+            <a:avLst/>
+          </a:prstGeom>
+          <a:noFill/>
+          <a:ln/>
+        </p:spPr>
+        <p:txBody>
+          <a:bodyPr wrap="square" rtlCol="0" anchor="ctr"/>
+          <a:lstStyle/>
+          <a:p>
+            <a:pPr algn="ctr" indent="0" marL="0">
+              <a:buNone/>
+            </a:pPr>
+            <a:r>
+              <a:rPr lang="en-US" sz="2000" b="1" dirty="0">
+                <a:solidFill>
+                  <a:srgbClr val="FFFFFF"/>
+                </a:solidFill>
+                <a:latin typeface="Cambria" pitchFamily="34" charset="0"/>
+                <a:ea typeface="Cambria" pitchFamily="34" charset="-122"/>
+                <a:cs typeface="Cambria" pitchFamily="34" charset="-120"/>
+              </a:rPr>
+              <a:t>1</a:t>
+            </a:r>
+            <a:endParaRPr lang="en-US" sz="2000" dirty="0"/>
+          </a:p>
+        </p:txBody>
+      </p:sp>
+      <p:sp>
+        <p:nvSpPr>
+          <p:cNvPr id="6" name="Text 4"/>
+          <p:cNvSpPr/>
+          <p:nvPr/>
+        </p:nvSpPr>
+        <p:spPr>
+          <a:xfrm>
+            <a:off x="1371600" y="2020824"/>
+            <a:ext cx="10332720" cy="411480"/>
+          </a:xfrm>
+          <a:prstGeom prst="rect">
+            <a:avLst/>
+          </a:prstGeom>
+          <a:noFill/>
+          <a:ln/>
+        </p:spPr>
+        <p:txBody>
+          <a:bodyPr wrap="square" rtlCol="0" anchor="ctr"/>
+          <a:lstStyle/>
+          <a:p>
+            <a:pPr indent="0" marL="0">
+              <a:buNone/>
+            </a:pPr>
+            <a:r>
+              <a:rPr lang="en-US" sz="1900" b="1" dirty="0">
+                <a:solidFill>
+                  <a:srgbClr val="7A3B2E"/>
+                </a:solidFill>
+                <a:latin typeface="Cambria" pitchFamily="34" charset="0"/>
+                <a:ea typeface="Cambria" pitchFamily="34" charset="-122"/>
+                <a:cs typeface="Cambria" pitchFamily="34" charset="-120"/>
+              </a:rPr>
+              <a:t>Beyond counting</a:t>
+            </a:r>
+            <a:endParaRPr lang="en-US" sz="1900" dirty="0"/>
+          </a:p>
+        </p:txBody>
+      </p:sp>
+      <p:sp>
+        <p:nvSpPr>
+          <p:cNvPr id="7" name="Text 5"/>
+          <p:cNvSpPr/>
+          <p:nvPr/>
+        </p:nvSpPr>
+        <p:spPr>
+          <a:xfrm>
+            <a:off x="1371600" y="2441448"/>
+            <a:ext cx="10332720" cy="914400"/>
+          </a:xfrm>
+          <a:prstGeom prst="rect">
+            <a:avLst/>
+          </a:prstGeom>
+          <a:noFill/>
+          <a:ln/>
+        </p:spPr>
+        <p:txBody>
+          <a:bodyPr wrap="square" rtlCol="0" anchor="t">
+            <a:spAutoFit/>
+          </a:bodyPr>
+          <a:lstStyle/>
+          <a:p>
+            <a:pPr indent="0" marL="0">
+              <a:lnSpc>
+                <a:spcPct val="112000"/>
+              </a:lnSpc>
+              <a:buNone/>
+            </a:pPr>
+            <a:r>
+              <a:rPr lang="en-US" sz="1450" dirty="0">
+                <a:solidFill>
+                  <a:srgbClr val="1A1A1A"/>
+                </a:solidFill>
+                <a:latin typeface="Calibri" pitchFamily="34" charset="0"/>
+                <a:ea typeface="Calibri" pitchFamily="34" charset="-122"/>
+                <a:cs typeface="Calibri" pitchFamily="34" charset="-120"/>
+              </a:rPr>
+              <a:t>Counting is the honest floor, with no notion of meaning. This sets up the Week 5 payoff.</a:t>
+            </a:r>
+            <a:endParaRPr lang="en-US" sz="1450" dirty="0"/>
+          </a:p>
+        </p:txBody>
+      </p:sp>
+      <p:sp>
+        <p:nvSpPr>
+          <p:cNvPr id="8" name="Shape 6"/>
+          <p:cNvSpPr/>
+          <p:nvPr/>
+        </p:nvSpPr>
+        <p:spPr>
+          <a:xfrm>
+            <a:off x="640080" y="3520440"/>
+            <a:ext cx="457200" cy="457200"/>
+          </a:xfrm>
+          <a:prstGeom prst="roundRect">
+            <a:avLst>
+              <a:gd name="adj" fmla="val 16000"/>
+            </a:avLst>
+          </a:prstGeom>
+          <a:solidFill>
+            <a:srgbClr val="3F6F5F"/>
+          </a:solidFill>
+          <a:ln/>
+        </p:spPr>
+      </p:sp>
+      <p:sp>
+        <p:nvSpPr>
+          <p:cNvPr id="9" name="Text 7"/>
+          <p:cNvSpPr/>
+          <p:nvPr/>
+        </p:nvSpPr>
+        <p:spPr>
+          <a:xfrm>
+            <a:off x="640080" y="3520440"/>
+            <a:ext cx="457200" cy="457200"/>
+          </a:xfrm>
+          <a:prstGeom prst="rect">
+            <a:avLst/>
+          </a:prstGeom>
+          <a:noFill/>
+          <a:ln/>
+        </p:spPr>
+        <p:txBody>
+          <a:bodyPr wrap="square" rtlCol="0" anchor="ctr"/>
+          <a:lstStyle/>
+          <a:p>
+            <a:pPr algn="ctr" indent="0" marL="0">
+              <a:buNone/>
+            </a:pPr>
+            <a:r>
+              <a:rPr lang="en-US" sz="2000" b="1" dirty="0">
+                <a:solidFill>
+                  <a:srgbClr val="FFFFFF"/>
+                </a:solidFill>
+                <a:latin typeface="Cambria" pitchFamily="34" charset="0"/>
+                <a:ea typeface="Cambria" pitchFamily="34" charset="-122"/>
+                <a:cs typeface="Cambria" pitchFamily="34" charset="-120"/>
+              </a:rPr>
+              <a:t>2</a:t>
+            </a:r>
+            <a:endParaRPr lang="en-US" sz="2000" dirty="0"/>
+          </a:p>
+        </p:txBody>
+      </p:sp>
+      <p:sp>
+        <p:nvSpPr>
+          <p:cNvPr id="10" name="Text 8"/>
+          <p:cNvSpPr/>
+          <p:nvPr/>
+        </p:nvSpPr>
+        <p:spPr>
+          <a:xfrm>
+            <a:off x="1371600" y="3483864"/>
+            <a:ext cx="10332720" cy="411480"/>
+          </a:xfrm>
+          <a:prstGeom prst="rect">
+            <a:avLst/>
+          </a:prstGeom>
+          <a:noFill/>
+          <a:ln/>
+        </p:spPr>
+        <p:txBody>
+          <a:bodyPr wrap="square" rtlCol="0" anchor="ctr"/>
+          <a:lstStyle/>
+          <a:p>
+            <a:pPr indent="0" marL="0">
+              <a:buNone/>
+            </a:pPr>
+            <a:r>
+              <a:rPr lang="en-US" sz="1900" b="1" dirty="0">
+                <a:solidFill>
+                  <a:srgbClr val="3F6F5F"/>
+                </a:solidFill>
+                <a:latin typeface="Cambria" pitchFamily="34" charset="0"/>
+                <a:ea typeface="Cambria" pitchFamily="34" charset="-122"/>
+                <a:cs typeface="Cambria" pitchFamily="34" charset="-120"/>
+              </a:rPr>
+              <a:t>Every count is a choice</a:t>
+            </a:r>
+            <a:endParaRPr lang="en-US" sz="1900" dirty="0"/>
+          </a:p>
+        </p:txBody>
+      </p:sp>
+      <p:sp>
+        <p:nvSpPr>
+          <p:cNvPr id="11" name="Text 9"/>
+          <p:cNvSpPr/>
+          <p:nvPr/>
+        </p:nvSpPr>
+        <p:spPr>
+          <a:xfrm>
+            <a:off x="1371600" y="3904488"/>
+            <a:ext cx="10332720" cy="914400"/>
+          </a:xfrm>
+          <a:prstGeom prst="rect">
+            <a:avLst/>
+          </a:prstGeom>
+          <a:noFill/>
+          <a:ln/>
+        </p:spPr>
+        <p:txBody>
+          <a:bodyPr wrap="square" rtlCol="0" anchor="t">
+            <a:spAutoFit/>
+          </a:bodyPr>
+          <a:lstStyle/>
+          <a:p>
+            <a:pPr indent="0" marL="0">
+              <a:lnSpc>
+                <a:spcPct val="112000"/>
+              </a:lnSpc>
+              <a:buNone/>
+            </a:pPr>
+            <a:r>
+              <a:rPr lang="en-US" sz="1450" dirty="0">
+                <a:solidFill>
+                  <a:srgbClr val="1A1A1A"/>
+                </a:solidFill>
+                <a:latin typeface="Calibri" pitchFamily="34" charset="0"/>
+                <a:ea typeface="Calibri" pitchFamily="34" charset="-122"/>
+                <a:cs typeface="Calibri" pitchFamily="34" charset="-120"/>
+              </a:rPr>
+              <a:t>Tokens, stemming, the corpus, the chart's axis, each hides a decision you made.</a:t>
+            </a:r>
+            <a:endParaRPr lang="en-US" sz="1450" dirty="0"/>
+          </a:p>
+        </p:txBody>
+      </p:sp>
+      <p:sp>
+        <p:nvSpPr>
+          <p:cNvPr id="12" name="Shape 10"/>
+          <p:cNvSpPr/>
+          <p:nvPr/>
+        </p:nvSpPr>
+        <p:spPr>
+          <a:xfrm>
+            <a:off x="640080" y="4983480"/>
+            <a:ext cx="457200" cy="457200"/>
+          </a:xfrm>
+          <a:prstGeom prst="roundRect">
+            <a:avLst>
+              <a:gd name="adj" fmla="val 16000"/>
+            </a:avLst>
+          </a:prstGeom>
+          <a:solidFill>
+            <a:srgbClr val="B9852F"/>
+          </a:solidFill>
+          <a:ln/>
+        </p:spPr>
+      </p:sp>
+      <p:sp>
+        <p:nvSpPr>
+          <p:cNvPr id="13" name="Text 11"/>
+          <p:cNvSpPr/>
+          <p:nvPr/>
+        </p:nvSpPr>
+        <p:spPr>
+          <a:xfrm>
+            <a:off x="640080" y="4983480"/>
+            <a:ext cx="457200" cy="457200"/>
+          </a:xfrm>
+          <a:prstGeom prst="rect">
+            <a:avLst/>
+          </a:prstGeom>
+          <a:noFill/>
+          <a:ln/>
+        </p:spPr>
+        <p:txBody>
+          <a:bodyPr wrap="square" rtlCol="0" anchor="ctr"/>
+          <a:lstStyle/>
+          <a:p>
+            <a:pPr algn="ctr" indent="0" marL="0">
+              <a:buNone/>
+            </a:pPr>
+            <a:r>
+              <a:rPr lang="en-US" sz="2000" b="1" dirty="0">
+                <a:solidFill>
+                  <a:srgbClr val="FFFFFF"/>
+                </a:solidFill>
+                <a:latin typeface="Cambria" pitchFamily="34" charset="0"/>
+                <a:ea typeface="Cambria" pitchFamily="34" charset="-122"/>
+                <a:cs typeface="Cambria" pitchFamily="34" charset="-120"/>
+              </a:rPr>
+              <a:t>3</a:t>
+            </a:r>
+            <a:endParaRPr lang="en-US" sz="2000" dirty="0"/>
+          </a:p>
+        </p:txBody>
+      </p:sp>
+      <p:sp>
+        <p:nvSpPr>
+          <p:cNvPr id="14" name="Text 12"/>
+          <p:cNvSpPr/>
+          <p:nvPr/>
+        </p:nvSpPr>
+        <p:spPr>
+          <a:xfrm>
+            <a:off x="1371600" y="4946904"/>
+            <a:ext cx="10332720" cy="411480"/>
+          </a:xfrm>
+          <a:prstGeom prst="rect">
+            <a:avLst/>
+          </a:prstGeom>
+          <a:noFill/>
+          <a:ln/>
+        </p:spPr>
+        <p:txBody>
+          <a:bodyPr wrap="square" rtlCol="0" anchor="ctr"/>
+          <a:lstStyle/>
+          <a:p>
+            <a:pPr indent="0" marL="0">
+              <a:buNone/>
+            </a:pPr>
+            <a:r>
+              <a:rPr lang="en-US" sz="1900" b="1" dirty="0">
+                <a:solidFill>
+                  <a:srgbClr val="B9852F"/>
+                </a:solidFill>
+                <a:latin typeface="Cambria" pitchFamily="34" charset="0"/>
+                <a:ea typeface="Cambria" pitchFamily="34" charset="-122"/>
+                <a:cs typeface="Cambria" pitchFamily="34" charset="-120"/>
+              </a:rPr>
+              <a:t>Images are culture too</a:t>
+            </a:r>
+            <a:endParaRPr lang="en-US" sz="1900" dirty="0"/>
+          </a:p>
+        </p:txBody>
+      </p:sp>
+      <p:sp>
+        <p:nvSpPr>
+          <p:cNvPr id="15" name="Text 13"/>
+          <p:cNvSpPr/>
+          <p:nvPr/>
+        </p:nvSpPr>
+        <p:spPr>
+          <a:xfrm>
+            <a:off x="1371600" y="5367528"/>
+            <a:ext cx="10332720" cy="914400"/>
+          </a:xfrm>
+          <a:prstGeom prst="rect">
+            <a:avLst/>
+          </a:prstGeom>
+          <a:noFill/>
+          <a:ln/>
+        </p:spPr>
+        <p:txBody>
+          <a:bodyPr wrap="square" rtlCol="0" anchor="t">
+            <a:spAutoFit/>
+          </a:bodyPr>
+          <a:lstStyle/>
+          <a:p>
+            <a:pPr indent="0" marL="0">
+              <a:lnSpc>
+                <a:spcPct val="112000"/>
+              </a:lnSpc>
+              <a:buNone/>
+            </a:pPr>
+            <a:r>
+              <a:rPr lang="en-US" sz="1450" dirty="0">
+                <a:solidFill>
+                  <a:srgbClr val="1A1A1A"/>
+                </a:solidFill>
+                <a:latin typeface="Calibri" pitchFamily="34" charset="0"/>
+                <a:ea typeface="Calibri" pitchFamily="34" charset="-122"/>
+                <a:cs typeface="Calibri" pitchFamily="34" charset="-120"/>
+              </a:rPr>
+              <a:t>Count a painting's color and brightness, the same skill as words.</a:t>
+            </a:r>
+            <a:endParaRPr lang="en-US" sz="1450" dirty="0"/>
+          </a:p>
+        </p:txBody>
+      </p:sp>
+    </p:spTree>
+  </p:cSld>
+  <p:clrMapOvr>
+    <a:masterClrMapping/>
+  </p:clrMapOvr>
+</p:sld>
+</file>
+
+<file path=ppt/slides/slide8.xml><?xml version="1.0" encoding="utf-8"?>
+<p:sld xmlns:a="http://schemas.openxmlformats.org/drawingml/2006/main" xmlns:r="http://schemas.openxmlformats.org/officeDocument/2006/relationships" xmlns:p="http://schemas.openxmlformats.org/presentationml/2006/main">
+  <p:cSld name="Slide 8">
     <p:bg>
       <p:bgPr>
         <a:solidFill>

--- a/slides/pptx/week-02.pptx
+++ b/slides/pptx/week-02.pptx
@@ -1652,7 +1652,7 @@
                 <a:ea typeface="Calibri" pitchFamily="34" charset="-122"/>
                 <a:cs typeface="Calibri" pitchFamily="34" charset="-120"/>
               </a:rPr>
-              <a:t>Put a famous PNAS paper on trial, build a word-counter by hand, watch the same sentence get counted three ways, and count an image too.</a:t>
+              <a:t>Put a famous PNAS paper on trial, build a word-counter by hand, watch the same sentence get counted three ways, and find an artist's signature vocabulary with nothing but counting.</a:t>
             </a:r>
             <a:endParaRPr lang="en-US" sz="1600" dirty="0"/>
           </a:p>
@@ -2992,11 +2992,11 @@
         <p:spPr>
           <a:xfrm>
             <a:off x="640080" y="1572768"/>
-            <a:ext cx="868680" cy="338328"/>
+            <a:ext cx="868680" cy="388112"/>
           </a:xfrm>
           <a:prstGeom prst="roundRect">
             <a:avLst>
-              <a:gd name="adj" fmla="val 16216"/>
+              <a:gd name="adj" fmla="val 14136"/>
             </a:avLst>
           </a:prstGeom>
           <a:solidFill>
@@ -3014,7 +3014,7 @@
         <p:spPr>
           <a:xfrm>
             <a:off x="640080" y="1572768"/>
-            <a:ext cx="868680" cy="338328"/>
+            <a:ext cx="868680" cy="388112"/>
           </a:xfrm>
           <a:prstGeom prst="rect">
             <a:avLst/>
@@ -3053,7 +3053,7 @@
         <p:spPr>
           <a:xfrm>
             <a:off x="1691640" y="1554480"/>
-            <a:ext cx="9646920" cy="448056"/>
+            <a:ext cx="9646920" cy="497840"/>
           </a:xfrm>
           <a:prstGeom prst="rect">
             <a:avLst/>
@@ -3093,12 +3093,12 @@
         </p:nvSpPr>
         <p:spPr>
           <a:xfrm>
-            <a:off x="640080" y="2020824"/>
-            <a:ext cx="868680" cy="338328"/>
+            <a:off x="640080" y="2070608"/>
+            <a:ext cx="868680" cy="388112"/>
           </a:xfrm>
           <a:prstGeom prst="roundRect">
             <a:avLst>
-              <a:gd name="adj" fmla="val 16216"/>
+              <a:gd name="adj" fmla="val 14136"/>
             </a:avLst>
           </a:prstGeom>
           <a:solidFill>
@@ -3115,8 +3115,8 @@
         </p:nvSpPr>
         <p:spPr>
           <a:xfrm>
-            <a:off x="640080" y="2020824"/>
-            <a:ext cx="868680" cy="338328"/>
+            <a:off x="640080" y="2070608"/>
+            <a:ext cx="868680" cy="388112"/>
           </a:xfrm>
           <a:prstGeom prst="rect">
             <a:avLst/>
@@ -3154,8 +3154,8 @@
         </p:nvSpPr>
         <p:spPr>
           <a:xfrm>
-            <a:off x="1691640" y="2002536"/>
-            <a:ext cx="9646920" cy="448056"/>
+            <a:off x="1691640" y="2052320"/>
+            <a:ext cx="9646920" cy="497840"/>
           </a:xfrm>
           <a:prstGeom prst="rect">
             <a:avLst/>
@@ -3195,12 +3195,12 @@
         </p:nvSpPr>
         <p:spPr>
           <a:xfrm>
-            <a:off x="640080" y="2468880"/>
-            <a:ext cx="868680" cy="338328"/>
+            <a:off x="640080" y="2568448"/>
+            <a:ext cx="868680" cy="388112"/>
           </a:xfrm>
           <a:prstGeom prst="roundRect">
             <a:avLst>
-              <a:gd name="adj" fmla="val 16216"/>
+              <a:gd name="adj" fmla="val 14136"/>
             </a:avLst>
           </a:prstGeom>
           <a:solidFill>
@@ -3217,8 +3217,8 @@
         </p:nvSpPr>
         <p:spPr>
           <a:xfrm>
-            <a:off x="640080" y="2468880"/>
-            <a:ext cx="868680" cy="338328"/>
+            <a:off x="640080" y="2568448"/>
+            <a:ext cx="868680" cy="388112"/>
           </a:xfrm>
           <a:prstGeom prst="rect">
             <a:avLst/>
@@ -3256,8 +3256,8 @@
         </p:nvSpPr>
         <p:spPr>
           <a:xfrm>
-            <a:off x="1691640" y="2450592"/>
-            <a:ext cx="9646920" cy="448056"/>
+            <a:off x="1691640" y="2550160"/>
+            <a:ext cx="9646920" cy="497840"/>
           </a:xfrm>
           <a:prstGeom prst="rect">
             <a:avLst/>
@@ -3297,12 +3297,12 @@
         </p:nvSpPr>
         <p:spPr>
           <a:xfrm>
-            <a:off x="640080" y="2916936"/>
-            <a:ext cx="868680" cy="338328"/>
+            <a:off x="640080" y="3066288"/>
+            <a:ext cx="868680" cy="388112"/>
           </a:xfrm>
           <a:prstGeom prst="roundRect">
             <a:avLst>
-              <a:gd name="adj" fmla="val 16216"/>
+              <a:gd name="adj" fmla="val 14136"/>
             </a:avLst>
           </a:prstGeom>
           <a:solidFill>
@@ -3319,8 +3319,8 @@
         </p:nvSpPr>
         <p:spPr>
           <a:xfrm>
-            <a:off x="640080" y="2916936"/>
-            <a:ext cx="868680" cy="338328"/>
+            <a:off x="640080" y="3066288"/>
+            <a:ext cx="868680" cy="388112"/>
           </a:xfrm>
           <a:prstGeom prst="rect">
             <a:avLst/>
@@ -3358,8 +3358,8 @@
         </p:nvSpPr>
         <p:spPr>
           <a:xfrm>
-            <a:off x="1691640" y="2898648"/>
-            <a:ext cx="9646920" cy="448056"/>
+            <a:off x="1691640" y="3048000"/>
+            <a:ext cx="9646920" cy="497840"/>
           </a:xfrm>
           <a:prstGeom prst="rect">
             <a:avLst/>
@@ -3399,12 +3399,12 @@
         </p:nvSpPr>
         <p:spPr>
           <a:xfrm>
-            <a:off x="640080" y="3364992"/>
-            <a:ext cx="868680" cy="338328"/>
+            <a:off x="640080" y="3564128"/>
+            <a:ext cx="868680" cy="388112"/>
           </a:xfrm>
           <a:prstGeom prst="roundRect">
             <a:avLst>
-              <a:gd name="adj" fmla="val 16216"/>
+              <a:gd name="adj" fmla="val 14136"/>
             </a:avLst>
           </a:prstGeom>
           <a:solidFill>
@@ -3421,8 +3421,8 @@
         </p:nvSpPr>
         <p:spPr>
           <a:xfrm>
-            <a:off x="640080" y="3364992"/>
-            <a:ext cx="868680" cy="338328"/>
+            <a:off x="640080" y="3564128"/>
+            <a:ext cx="868680" cy="388112"/>
           </a:xfrm>
           <a:prstGeom prst="rect">
             <a:avLst/>
@@ -3460,8 +3460,8 @@
         </p:nvSpPr>
         <p:spPr>
           <a:xfrm>
-            <a:off x="1691640" y="3346704"/>
-            <a:ext cx="9646920" cy="448056"/>
+            <a:off x="1691640" y="3545840"/>
+            <a:ext cx="9646920" cy="497840"/>
           </a:xfrm>
           <a:prstGeom prst="rect">
             <a:avLst/>
@@ -3501,12 +3501,12 @@
         </p:nvSpPr>
         <p:spPr>
           <a:xfrm>
-            <a:off x="640080" y="3813048"/>
-            <a:ext cx="868680" cy="338328"/>
+            <a:off x="640080" y="4061968"/>
+            <a:ext cx="868680" cy="388112"/>
           </a:xfrm>
           <a:prstGeom prst="roundRect">
             <a:avLst>
-              <a:gd name="adj" fmla="val 16216"/>
+              <a:gd name="adj" fmla="val 14136"/>
             </a:avLst>
           </a:prstGeom>
           <a:solidFill>
@@ -3523,8 +3523,8 @@
         </p:nvSpPr>
         <p:spPr>
           <a:xfrm>
-            <a:off x="640080" y="3813048"/>
-            <a:ext cx="868680" cy="338328"/>
+            <a:off x="640080" y="4061968"/>
+            <a:ext cx="868680" cy="388112"/>
           </a:xfrm>
           <a:prstGeom prst="rect">
             <a:avLst/>
@@ -3562,8 +3562,8 @@
         </p:nvSpPr>
         <p:spPr>
           <a:xfrm>
-            <a:off x="1691640" y="3794760"/>
-            <a:ext cx="9646920" cy="448056"/>
+            <a:off x="1691640" y="4043680"/>
+            <a:ext cx="9646920" cy="497840"/>
           </a:xfrm>
           <a:prstGeom prst="rect">
             <a:avLst/>
@@ -3603,12 +3603,12 @@
         </p:nvSpPr>
         <p:spPr>
           <a:xfrm>
-            <a:off x="640080" y="4261104"/>
-            <a:ext cx="868680" cy="338328"/>
+            <a:off x="640080" y="4559808"/>
+            <a:ext cx="868680" cy="388112"/>
           </a:xfrm>
           <a:prstGeom prst="roundRect">
             <a:avLst>
-              <a:gd name="adj" fmla="val 16216"/>
+              <a:gd name="adj" fmla="val 14136"/>
             </a:avLst>
           </a:prstGeom>
           <a:solidFill>
@@ -3625,8 +3625,8 @@
         </p:nvSpPr>
         <p:spPr>
           <a:xfrm>
-            <a:off x="640080" y="4261104"/>
-            <a:ext cx="868680" cy="338328"/>
+            <a:off x="640080" y="4559808"/>
+            <a:ext cx="868680" cy="388112"/>
           </a:xfrm>
           <a:prstGeom prst="rect">
             <a:avLst/>
@@ -3664,8 +3664,8 @@
         </p:nvSpPr>
         <p:spPr>
           <a:xfrm>
-            <a:off x="1691640" y="4242816"/>
-            <a:ext cx="9646920" cy="448056"/>
+            <a:off x="1691640" y="4541520"/>
+            <a:ext cx="9646920" cy="497840"/>
           </a:xfrm>
           <a:prstGeom prst="rect">
             <a:avLst/>
@@ -3705,12 +3705,12 @@
         </p:nvSpPr>
         <p:spPr>
           <a:xfrm>
-            <a:off x="640080" y="4709160"/>
-            <a:ext cx="868680" cy="338328"/>
+            <a:off x="640080" y="5057648"/>
+            <a:ext cx="868680" cy="388112"/>
           </a:xfrm>
           <a:prstGeom prst="roundRect">
             <a:avLst>
-              <a:gd name="adj" fmla="val 16216"/>
+              <a:gd name="adj" fmla="val 14136"/>
             </a:avLst>
           </a:prstGeom>
           <a:solidFill>
@@ -3727,8 +3727,8 @@
         </p:nvSpPr>
         <p:spPr>
           <a:xfrm>
-            <a:off x="640080" y="4709160"/>
-            <a:ext cx="868680" cy="338328"/>
+            <a:off x="640080" y="5057648"/>
+            <a:ext cx="868680" cy="388112"/>
           </a:xfrm>
           <a:prstGeom prst="rect">
             <a:avLst/>
@@ -3766,8 +3766,8 @@
         </p:nvSpPr>
         <p:spPr>
           <a:xfrm>
-            <a:off x="1691640" y="4690872"/>
-            <a:ext cx="9646920" cy="448056"/>
+            <a:off x="1691640" y="5039360"/>
+            <a:ext cx="9646920" cy="497840"/>
           </a:xfrm>
           <a:prstGeom prst="rect">
             <a:avLst/>
@@ -3807,12 +3807,12 @@
         </p:nvSpPr>
         <p:spPr>
           <a:xfrm>
-            <a:off x="640080" y="5157216"/>
-            <a:ext cx="868680" cy="338328"/>
+            <a:off x="640080" y="5555488"/>
+            <a:ext cx="868680" cy="388112"/>
           </a:xfrm>
           <a:prstGeom prst="roundRect">
             <a:avLst>
-              <a:gd name="adj" fmla="val 16216"/>
+              <a:gd name="adj" fmla="val 14136"/>
             </a:avLst>
           </a:prstGeom>
           <a:solidFill>
@@ -3829,8 +3829,8 @@
         </p:nvSpPr>
         <p:spPr>
           <a:xfrm>
-            <a:off x="640080" y="5157216"/>
-            <a:ext cx="868680" cy="338328"/>
+            <a:off x="640080" y="5555488"/>
+            <a:ext cx="868680" cy="388112"/>
           </a:xfrm>
           <a:prstGeom prst="rect">
             <a:avLst/>
@@ -3854,7 +3854,7 @@
                 <a:ea typeface="Calibri" pitchFamily="34" charset="-122"/>
                 <a:cs typeface="Calibri" pitchFamily="34" charset="-120"/>
               </a:rPr>
-              <a:t>1:45</a:t>
+              <a:t>1:50</a:t>
             </a:r>
             <a:endParaRPr lang="en-US" sz="1100" dirty="0"/>
           </a:p>
@@ -3868,110 +3868,8 @@
         </p:nvSpPr>
         <p:spPr>
           <a:xfrm>
-            <a:off x="1691640" y="5138928"/>
-            <a:ext cx="9646920" cy="448056"/>
-          </a:xfrm>
-          <a:prstGeom prst="rect">
-            <a:avLst/>
-          </a:prstGeom>
-          <a:noFill/>
-          <a:ln/>
-        </p:spPr>
-        <p:txBody>
-          <a:bodyPr wrap="square" rtlCol="0" anchor="ctr">
-            <a:spAutoFit/>
-          </a:bodyPr>
-          <a:lstStyle/>
-          <a:p>
-            <a:pPr indent="0" marL="0">
-              <a:buNone/>
-            </a:pPr>
-            <a:r>
-              <a:rPr lang="en-US" sz="1100" dirty="0">
-                <a:solidFill>
-                  <a:srgbClr val="1A1A1A"/>
-                </a:solidFill>
-                <a:latin typeface="Calibri" pitchFamily="34" charset="0"/>
-                <a:ea typeface="Calibri" pitchFamily="34" charset="-122"/>
-                <a:cs typeface="Calibri" pitchFamily="34" charset="-120"/>
-              </a:rPr>
-              <a:t>Counting images: average color, a brightness histogram, a "darkest album cover" ranking. What you choose to count is the same kind of decision as stop-words.</a:t>
-            </a:r>
-            <a:endParaRPr lang="en-US" sz="1100" dirty="0"/>
-          </a:p>
-        </p:txBody>
-      </p:sp>
-      <p:sp>
-        <p:nvSpPr>
-          <p:cNvPr id="30" name="Shape 28"/>
-          <p:cNvSpPr/>
-          <p:nvPr/>
-        </p:nvSpPr>
-        <p:spPr>
-          <a:xfrm>
-            <a:off x="640080" y="5605272"/>
-            <a:ext cx="868680" cy="338328"/>
-          </a:xfrm>
-          <a:prstGeom prst="roundRect">
-            <a:avLst>
-              <a:gd name="adj" fmla="val 16216"/>
-            </a:avLst>
-          </a:prstGeom>
-          <a:solidFill>
-            <a:srgbClr val="7A3B2E"/>
-          </a:solidFill>
-          <a:ln/>
-        </p:spPr>
-      </p:sp>
-      <p:sp>
-        <p:nvSpPr>
-          <p:cNvPr id="31" name="Text 29"/>
-          <p:cNvSpPr/>
-          <p:nvPr/>
-        </p:nvSpPr>
-        <p:spPr>
-          <a:xfrm>
-            <a:off x="640080" y="5605272"/>
-            <a:ext cx="868680" cy="338328"/>
-          </a:xfrm>
-          <a:prstGeom prst="rect">
-            <a:avLst/>
-          </a:prstGeom>
-          <a:noFill/>
-          <a:ln/>
-        </p:spPr>
-        <p:txBody>
-          <a:bodyPr wrap="square" rtlCol="0" anchor="ctr"/>
-          <a:lstStyle/>
-          <a:p>
-            <a:pPr algn="ctr" indent="0" marL="0">
-              <a:buNone/>
-            </a:pPr>
-            <a:r>
-              <a:rPr lang="en-US" sz="1100" b="1" dirty="0">
-                <a:solidFill>
-                  <a:srgbClr val="FFFFFF"/>
-                </a:solidFill>
-                <a:latin typeface="Calibri" pitchFamily="34" charset="0"/>
-                <a:ea typeface="Calibri" pitchFamily="34" charset="-122"/>
-                <a:cs typeface="Calibri" pitchFamily="34" charset="-120"/>
-              </a:rPr>
-              <a:t>1:50</a:t>
-            </a:r>
-            <a:endParaRPr lang="en-US" sz="1100" dirty="0"/>
-          </a:p>
-        </p:txBody>
-      </p:sp>
-      <p:sp>
-        <p:nvSpPr>
-          <p:cNvPr id="32" name="Text 30"/>
-          <p:cNvSpPr/>
-          <p:nvPr/>
-        </p:nvSpPr>
-        <p:spPr>
-          <a:xfrm>
-            <a:off x="1691640" y="5586984"/>
-            <a:ext cx="9646920" cy="448056"/>
+            <a:off x="1691640" y="5537200"/>
+            <a:ext cx="9646920" cy="497840"/>
           </a:xfrm>
           <a:prstGeom prst="rect">
             <a:avLst/>
@@ -4966,7 +4864,7 @@
                 <a:ea typeface="Cambria" pitchFamily="34" charset="-122"/>
                 <a:cs typeface="Cambria" pitchFamily="34" charset="-120"/>
               </a:rPr>
-              <a:t>Images are culture too</a:t>
+              <a:t>The corpus is a choice</a:t>
             </a:r>
             <a:endParaRPr lang="en-US" sz="1900" dirty="0"/>
           </a:p>
@@ -5010,7 +4908,7 @@
                 <a:ea typeface="Calibri" pitchFamily="34" charset="-122"/>
                 <a:cs typeface="Calibri" pitchFamily="34" charset="-120"/>
               </a:rPr>
-              <a:t>Count a painting's color and brightness, the same skill as words.</a:t>
+              <a:t>The same counter on lyrics, a subreddit, and a novel gives three different "commons."</a:t>
             </a:r>
             <a:endParaRPr lang="en-US" sz="1450" dirty="0"/>
           </a:p>

--- a/slides/pptx/week-02.pptx
+++ b/slides/pptx/week-02.pptx
@@ -1652,7 +1652,7 @@
                 <a:ea typeface="Calibri" pitchFamily="34" charset="-122"/>
                 <a:cs typeface="Calibri" pitchFamily="34" charset="-120"/>
               </a:rPr>
-              <a:t>Put a famous PNAS paper on trial, build a word-counter by hand, watch the same sentence get counted three ways, and find an artist's signature vocabulary with nothing but counting.</a:t>
+              <a:t>Put a famous PNAS paper on trial, find the words that make a voice distinctive (the method behind Week 1's featured study), and learn the one statistics move the course needs: the shuffle test for whether a difference is real.</a:t>
             </a:r>
             <a:endParaRPr lang="en-US" sz="1600" dirty="0"/>
           </a:p>
@@ -1691,7 +1691,7 @@
                 <a:ea typeface="Calibri" pitchFamily="34" charset="-122"/>
                 <a:cs typeface="Calibri" pitchFamily="34" charset="-120"/>
               </a:rPr>
-              <a:t>Tool / method:  Counting, and every count hides a choice</a:t>
+              <a:t>Tool / method:  Advanced counting: baselines, keyness, and the shuffle test</a:t>
             </a:r>
             <a:endParaRPr lang="en-US" sz="1200" dirty="0"/>
           </a:p>
@@ -2656,7 +2656,7 @@
                 <a:ea typeface="Calibri" pitchFamily="34" charset="-122"/>
                 <a:cs typeface="Calibri" pitchFamily="34" charset="-120"/>
               </a:rPr>
-              <a:t>Counting, and every count hides a choice</a:t>
+              <a:t>Advanced counting: baselines, keyness, and the shuffle test</a:t>
             </a:r>
             <a:endParaRPr lang="en-US" sz="1500" dirty="0"/>
           </a:p>
@@ -2992,11 +2992,11 @@
         <p:spPr>
           <a:xfrm>
             <a:off x="640080" y="1572768"/>
-            <a:ext cx="868680" cy="388112"/>
+            <a:ext cx="868680" cy="338328"/>
           </a:xfrm>
           <a:prstGeom prst="roundRect">
             <a:avLst>
-              <a:gd name="adj" fmla="val 14136"/>
+              <a:gd name="adj" fmla="val 16216"/>
             </a:avLst>
           </a:prstGeom>
           <a:solidFill>
@@ -3014,7 +3014,7 @@
         <p:spPr>
           <a:xfrm>
             <a:off x="640080" y="1572768"/>
-            <a:ext cx="868680" cy="388112"/>
+            <a:ext cx="868680" cy="338328"/>
           </a:xfrm>
           <a:prstGeom prst="rect">
             <a:avLst/>
@@ -3053,7 +3053,7 @@
         <p:spPr>
           <a:xfrm>
             <a:off x="1691640" y="1554480"/>
-            <a:ext cx="9646920" cy="497840"/>
+            <a:ext cx="9646920" cy="448056"/>
           </a:xfrm>
           <a:prstGeom prst="rect">
             <a:avLst/>
@@ -3093,12 +3093,12 @@
         </p:nvSpPr>
         <p:spPr>
           <a:xfrm>
-            <a:off x="640080" y="2070608"/>
-            <a:ext cx="868680" cy="388112"/>
+            <a:off x="640080" y="2020824"/>
+            <a:ext cx="868680" cy="338328"/>
           </a:xfrm>
           <a:prstGeom prst="roundRect">
             <a:avLst>
-              <a:gd name="adj" fmla="val 14136"/>
+              <a:gd name="adj" fmla="val 16216"/>
             </a:avLst>
           </a:prstGeom>
           <a:solidFill>
@@ -3115,8 +3115,8 @@
         </p:nvSpPr>
         <p:spPr>
           <a:xfrm>
-            <a:off x="640080" y="2070608"/>
-            <a:ext cx="868680" cy="388112"/>
+            <a:off x="640080" y="2020824"/>
+            <a:ext cx="868680" cy="338328"/>
           </a:xfrm>
           <a:prstGeom prst="rect">
             <a:avLst/>
@@ -3154,8 +3154,8 @@
         </p:nvSpPr>
         <p:spPr>
           <a:xfrm>
-            <a:off x="1691640" y="2052320"/>
-            <a:ext cx="9646920" cy="497840"/>
+            <a:off x="1691640" y="2002536"/>
+            <a:ext cx="9646920" cy="448056"/>
           </a:xfrm>
           <a:prstGeom prst="rect">
             <a:avLst/>
@@ -3195,12 +3195,12 @@
         </p:nvSpPr>
         <p:spPr>
           <a:xfrm>
-            <a:off x="640080" y="2568448"/>
-            <a:ext cx="868680" cy="388112"/>
+            <a:off x="640080" y="2468880"/>
+            <a:ext cx="868680" cy="338328"/>
           </a:xfrm>
           <a:prstGeom prst="roundRect">
             <a:avLst>
-              <a:gd name="adj" fmla="val 14136"/>
+              <a:gd name="adj" fmla="val 16216"/>
             </a:avLst>
           </a:prstGeom>
           <a:solidFill>
@@ -3217,8 +3217,8 @@
         </p:nvSpPr>
         <p:spPr>
           <a:xfrm>
-            <a:off x="640080" y="2568448"/>
-            <a:ext cx="868680" cy="388112"/>
+            <a:off x="640080" y="2468880"/>
+            <a:ext cx="868680" cy="338328"/>
           </a:xfrm>
           <a:prstGeom prst="rect">
             <a:avLst/>
@@ -3256,8 +3256,8 @@
         </p:nvSpPr>
         <p:spPr>
           <a:xfrm>
-            <a:off x="1691640" y="2550160"/>
-            <a:ext cx="9646920" cy="497840"/>
+            <a:off x="1691640" y="2450592"/>
+            <a:ext cx="9646920" cy="448056"/>
           </a:xfrm>
           <a:prstGeom prst="rect">
             <a:avLst/>
@@ -3297,12 +3297,12 @@
         </p:nvSpPr>
         <p:spPr>
           <a:xfrm>
-            <a:off x="640080" y="3066288"/>
-            <a:ext cx="868680" cy="388112"/>
+            <a:off x="640080" y="2916936"/>
+            <a:ext cx="868680" cy="338328"/>
           </a:xfrm>
           <a:prstGeom prst="roundRect">
             <a:avLst>
-              <a:gd name="adj" fmla="val 14136"/>
+              <a:gd name="adj" fmla="val 16216"/>
             </a:avLst>
           </a:prstGeom>
           <a:solidFill>
@@ -3319,8 +3319,8 @@
         </p:nvSpPr>
         <p:spPr>
           <a:xfrm>
-            <a:off x="640080" y="3066288"/>
-            <a:ext cx="868680" cy="388112"/>
+            <a:off x="640080" y="2916936"/>
+            <a:ext cx="868680" cy="338328"/>
           </a:xfrm>
           <a:prstGeom prst="rect">
             <a:avLst/>
@@ -3358,8 +3358,8 @@
         </p:nvSpPr>
         <p:spPr>
           <a:xfrm>
-            <a:off x="1691640" y="3048000"/>
-            <a:ext cx="9646920" cy="497840"/>
+            <a:off x="1691640" y="2898648"/>
+            <a:ext cx="9646920" cy="448056"/>
           </a:xfrm>
           <a:prstGeom prst="rect">
             <a:avLst/>
@@ -3399,12 +3399,12 @@
         </p:nvSpPr>
         <p:spPr>
           <a:xfrm>
-            <a:off x="640080" y="3564128"/>
-            <a:ext cx="868680" cy="388112"/>
+            <a:off x="640080" y="3364992"/>
+            <a:ext cx="868680" cy="338328"/>
           </a:xfrm>
           <a:prstGeom prst="roundRect">
             <a:avLst>
-              <a:gd name="adj" fmla="val 14136"/>
+              <a:gd name="adj" fmla="val 16216"/>
             </a:avLst>
           </a:prstGeom>
           <a:solidFill>
@@ -3421,8 +3421,8 @@
         </p:nvSpPr>
         <p:spPr>
           <a:xfrm>
-            <a:off x="640080" y="3564128"/>
-            <a:ext cx="868680" cy="388112"/>
+            <a:off x="640080" y="3364992"/>
+            <a:ext cx="868680" cy="338328"/>
           </a:xfrm>
           <a:prstGeom prst="rect">
             <a:avLst/>
@@ -3460,8 +3460,8 @@
         </p:nvSpPr>
         <p:spPr>
           <a:xfrm>
-            <a:off x="1691640" y="3545840"/>
-            <a:ext cx="9646920" cy="497840"/>
+            <a:off x="1691640" y="3346704"/>
+            <a:ext cx="9646920" cy="448056"/>
           </a:xfrm>
           <a:prstGeom prst="rect">
             <a:avLst/>
@@ -3501,12 +3501,12 @@
         </p:nvSpPr>
         <p:spPr>
           <a:xfrm>
-            <a:off x="640080" y="4061968"/>
-            <a:ext cx="868680" cy="388112"/>
+            <a:off x="640080" y="3813048"/>
+            <a:ext cx="868680" cy="338328"/>
           </a:xfrm>
           <a:prstGeom prst="roundRect">
             <a:avLst>
-              <a:gd name="adj" fmla="val 14136"/>
+              <a:gd name="adj" fmla="val 16216"/>
             </a:avLst>
           </a:prstGeom>
           <a:solidFill>
@@ -3523,8 +3523,8 @@
         </p:nvSpPr>
         <p:spPr>
           <a:xfrm>
-            <a:off x="640080" y="4061968"/>
-            <a:ext cx="868680" cy="388112"/>
+            <a:off x="640080" y="3813048"/>
+            <a:ext cx="868680" cy="338328"/>
           </a:xfrm>
           <a:prstGeom prst="rect">
             <a:avLst/>
@@ -3562,8 +3562,8 @@
         </p:nvSpPr>
         <p:spPr>
           <a:xfrm>
-            <a:off x="1691640" y="4043680"/>
-            <a:ext cx="9646920" cy="497840"/>
+            <a:off x="1691640" y="3794760"/>
+            <a:ext cx="9646920" cy="448056"/>
           </a:xfrm>
           <a:prstGeom prst="rect">
             <a:avLst/>
@@ -3603,12 +3603,12 @@
         </p:nvSpPr>
         <p:spPr>
           <a:xfrm>
-            <a:off x="640080" y="4559808"/>
-            <a:ext cx="868680" cy="388112"/>
+            <a:off x="640080" y="4261104"/>
+            <a:ext cx="868680" cy="338328"/>
           </a:xfrm>
           <a:prstGeom prst="roundRect">
             <a:avLst>
-              <a:gd name="adj" fmla="val 14136"/>
+              <a:gd name="adj" fmla="val 16216"/>
             </a:avLst>
           </a:prstGeom>
           <a:solidFill>
@@ -3625,8 +3625,8 @@
         </p:nvSpPr>
         <p:spPr>
           <a:xfrm>
-            <a:off x="640080" y="4559808"/>
-            <a:ext cx="868680" cy="388112"/>
+            <a:off x="640080" y="4261104"/>
+            <a:ext cx="868680" cy="338328"/>
           </a:xfrm>
           <a:prstGeom prst="rect">
             <a:avLst/>
@@ -3664,8 +3664,8 @@
         </p:nvSpPr>
         <p:spPr>
           <a:xfrm>
-            <a:off x="1691640" y="4541520"/>
-            <a:ext cx="9646920" cy="497840"/>
+            <a:off x="1691640" y="4242816"/>
+            <a:ext cx="9646920" cy="448056"/>
           </a:xfrm>
           <a:prstGeom prst="rect">
             <a:avLst/>
@@ -3705,12 +3705,12 @@
         </p:nvSpPr>
         <p:spPr>
           <a:xfrm>
-            <a:off x="640080" y="5057648"/>
-            <a:ext cx="868680" cy="388112"/>
+            <a:off x="640080" y="4709160"/>
+            <a:ext cx="868680" cy="338328"/>
           </a:xfrm>
           <a:prstGeom prst="roundRect">
             <a:avLst>
-              <a:gd name="adj" fmla="val 14136"/>
+              <a:gd name="adj" fmla="val 16216"/>
             </a:avLst>
           </a:prstGeom>
           <a:solidFill>
@@ -3727,8 +3727,8 @@
         </p:nvSpPr>
         <p:spPr>
           <a:xfrm>
-            <a:off x="640080" y="5057648"/>
-            <a:ext cx="868680" cy="388112"/>
+            <a:off x="640080" y="4709160"/>
+            <a:ext cx="868680" cy="338328"/>
           </a:xfrm>
           <a:prstGeom prst="rect">
             <a:avLst/>
@@ -3766,8 +3766,8 @@
         </p:nvSpPr>
         <p:spPr>
           <a:xfrm>
-            <a:off x="1691640" y="5039360"/>
-            <a:ext cx="9646920" cy="497840"/>
+            <a:off x="1691640" y="4690872"/>
+            <a:ext cx="9646920" cy="448056"/>
           </a:xfrm>
           <a:prstGeom prst="rect">
             <a:avLst/>
@@ -3793,7 +3793,7 @@
                 <a:ea typeface="Calibri" pitchFamily="34" charset="-122"/>
                 <a:cs typeface="Calibri" pitchFamily="34" charset="-120"/>
               </a:rPr>
-              <a:t>Cross-corpus counting: the same counter on a lyrics slice, a subreddit, and a novel. The corpus choice changes what "common" means.</a:t>
+              <a:t>Keyness, the She Giggles, He Gallops move: a log-odds ratio between two corpora finds the words one voice uses far more than a baseline, exactly the method behind Week 1's featured piece. The corpus pair is a choice too: artist vs. pop, lyrics vs. subreddit vs. novel.</a:t>
             </a:r>
             <a:endParaRPr lang="en-US" sz="1100" dirty="0"/>
           </a:p>
@@ -3807,12 +3807,12 @@
         </p:nvSpPr>
         <p:spPr>
           <a:xfrm>
-            <a:off x="640080" y="5555488"/>
-            <a:ext cx="868680" cy="388112"/>
+            <a:off x="640080" y="5157216"/>
+            <a:ext cx="868680" cy="338328"/>
           </a:xfrm>
           <a:prstGeom prst="roundRect">
             <a:avLst>
-              <a:gd name="adj" fmla="val 14136"/>
+              <a:gd name="adj" fmla="val 16216"/>
             </a:avLst>
           </a:prstGeom>
           <a:solidFill>
@@ -3829,8 +3829,8 @@
         </p:nvSpPr>
         <p:spPr>
           <a:xfrm>
-            <a:off x="640080" y="5555488"/>
-            <a:ext cx="868680" cy="388112"/>
+            <a:off x="640080" y="5157216"/>
+            <a:ext cx="868680" cy="338328"/>
           </a:xfrm>
           <a:prstGeom prst="rect">
             <a:avLst/>
@@ -3854,6 +3854,108 @@
                 <a:ea typeface="Calibri" pitchFamily="34" charset="-122"/>
                 <a:cs typeface="Calibri" pitchFamily="34" charset="-120"/>
               </a:rPr>
+              <a:t>1:42</a:t>
+            </a:r>
+            <a:endParaRPr lang="en-US" sz="1100" dirty="0"/>
+          </a:p>
+        </p:txBody>
+      </p:sp>
+      <p:sp>
+        <p:nvSpPr>
+          <p:cNvPr id="29" name="Text 27"/>
+          <p:cNvSpPr/>
+          <p:nvPr/>
+        </p:nvSpPr>
+        <p:spPr>
+          <a:xfrm>
+            <a:off x="1691640" y="5138928"/>
+            <a:ext cx="9646920" cy="448056"/>
+          </a:xfrm>
+          <a:prstGeom prst="rect">
+            <a:avLst/>
+          </a:prstGeom>
+          <a:noFill/>
+          <a:ln/>
+        </p:spPr>
+        <p:txBody>
+          <a:bodyPr wrap="square" rtlCol="0" anchor="ctr">
+            <a:spAutoFit/>
+          </a:bodyPr>
+          <a:lstStyle/>
+          <a:p>
+            <a:pPr indent="0" marL="0">
+              <a:buNone/>
+            </a:pPr>
+            <a:r>
+              <a:rPr lang="en-US" sz="1100" dirty="0">
+                <a:solidFill>
+                  <a:srgbClr val="1A1A1A"/>
+                </a:solidFill>
+                <a:latin typeface="Calibri" pitchFamily="34" charset="0"/>
+                <a:ea typeface="Calibri" pitchFamily="34" charset="-122"/>
+                <a:cs typeface="Calibri" pitchFamily="34" charset="-120"/>
+              </a:rPr>
+              <a:t>Is the difference real? The shuffle test: shuffle the labels, recount, a thousand times. If chance alone often makes a gap this big, don't trust it; if it almost never does, you have a finding. Real-but-tiny is still tiny.</a:t>
+            </a:r>
+            <a:endParaRPr lang="en-US" sz="1100" dirty="0"/>
+          </a:p>
+        </p:txBody>
+      </p:sp>
+      <p:sp>
+        <p:nvSpPr>
+          <p:cNvPr id="30" name="Shape 28"/>
+          <p:cNvSpPr/>
+          <p:nvPr/>
+        </p:nvSpPr>
+        <p:spPr>
+          <a:xfrm>
+            <a:off x="640080" y="5605272"/>
+            <a:ext cx="868680" cy="338328"/>
+          </a:xfrm>
+          <a:prstGeom prst="roundRect">
+            <a:avLst>
+              <a:gd name="adj" fmla="val 16216"/>
+            </a:avLst>
+          </a:prstGeom>
+          <a:solidFill>
+            <a:srgbClr val="7A3B2E"/>
+          </a:solidFill>
+          <a:ln/>
+        </p:spPr>
+      </p:sp>
+      <p:sp>
+        <p:nvSpPr>
+          <p:cNvPr id="31" name="Text 29"/>
+          <p:cNvSpPr/>
+          <p:nvPr/>
+        </p:nvSpPr>
+        <p:spPr>
+          <a:xfrm>
+            <a:off x="640080" y="5605272"/>
+            <a:ext cx="868680" cy="338328"/>
+          </a:xfrm>
+          <a:prstGeom prst="rect">
+            <a:avLst/>
+          </a:prstGeom>
+          <a:noFill/>
+          <a:ln/>
+        </p:spPr>
+        <p:txBody>
+          <a:bodyPr wrap="square" rtlCol="0" anchor="ctr"/>
+          <a:lstStyle/>
+          <a:p>
+            <a:pPr algn="ctr" indent="0" marL="0">
+              <a:buNone/>
+            </a:pPr>
+            <a:r>
+              <a:rPr lang="en-US" sz="1100" b="1" dirty="0">
+                <a:solidFill>
+                  <a:srgbClr val="FFFFFF"/>
+                </a:solidFill>
+                <a:latin typeface="Calibri" pitchFamily="34" charset="0"/>
+                <a:ea typeface="Calibri" pitchFamily="34" charset="-122"/>
+                <a:cs typeface="Calibri" pitchFamily="34" charset="-120"/>
+              </a:rPr>
               <a:t>1:50</a:t>
             </a:r>
             <a:endParaRPr lang="en-US" sz="1100" dirty="0"/>
@@ -3862,14 +3964,14 @@
       </p:sp>
       <p:sp>
         <p:nvSpPr>
-          <p:cNvPr id="29" name="Text 27"/>
-          <p:cNvSpPr/>
-          <p:nvPr/>
-        </p:nvSpPr>
-        <p:spPr>
-          <a:xfrm>
-            <a:off x="1691640" y="5537200"/>
-            <a:ext cx="9646920" cy="497840"/>
+          <p:cNvPr id="32" name="Text 30"/>
+          <p:cNvSpPr/>
+          <p:nvPr/>
+        </p:nvSpPr>
+        <p:spPr>
+          <a:xfrm>
+            <a:off x="1691640" y="5586984"/>
+            <a:ext cx="9646920" cy="448056"/>
           </a:xfrm>
           <a:prstGeom prst="rect">
             <a:avLst/>
@@ -4266,7 +4368,7 @@
                 <a:ea typeface="Calibri" pitchFamily="34" charset="-122"/>
                 <a:cs typeface="Calibri" pitchFamily="34" charset="-120"/>
               </a:rPr>
-              <a:t>Count something in a text you love; one chart; one sentence naming a choice you made.</a:t>
+              <a:t>Count something in a text you love; one chart; one sentence naming a choice. Comparing two things? Shuffle-test it.</a:t>
             </a:r>
             <a:endParaRPr lang="en-US" sz="1400" dirty="0"/>
           </a:p>
@@ -4864,7 +4966,7 @@
                 <a:ea typeface="Cambria" pitchFamily="34" charset="-122"/>
                 <a:cs typeface="Cambria" pitchFamily="34" charset="-120"/>
               </a:rPr>
-              <a:t>The corpus is a choice</a:t>
+              <a:t>Is the difference real?</a:t>
             </a:r>
             <a:endParaRPr lang="en-US" sz="1900" dirty="0"/>
           </a:p>
@@ -4908,7 +5010,7 @@
                 <a:ea typeface="Calibri" pitchFamily="34" charset="-122"/>
                 <a:cs typeface="Calibri" pitchFamily="34" charset="-120"/>
               </a:rPr>
-              <a:t>The same counter on lyrics, a subreddit, and a novel gives three different "commons."</a:t>
+              <a:t>Shuffle the labels and count again, a thousand times; if chance often beats your gap, don't trust it.</a:t>
             </a:r>
             <a:endParaRPr lang="en-US" sz="1450" dirty="0"/>
           </a:p>

--- a/slides/pptx/week-02.pptx
+++ b/slides/pptx/week-02.pptx
@@ -13,9 +13,13 @@
     <p:sldId id="261" r:id="rId7"/>
     <p:sldId id="262" r:id="rId8"/>
     <p:sldId id="263" r:id="rId9"/>
+    <p:sldId id="264" r:id="rId10"/>
+    <p:sldId id="265" r:id="rId11"/>
+    <p:sldId id="266" r:id="rId12"/>
+    <p:sldId id="267" r:id="rId13"/>
   </p:sldIdLst>
   <p:notesMasterIdLst>
-    <p:notesMasterId r:id="rId10"/>
+    <p:notesMasterId r:id="rId14"/>
   </p:notesMasterIdLst>
   <p:sldSz cx="12191695" cy="6858000"/>
   <p:notesSz cx="6858000" cy="12191695"/>
@@ -551,6 +555,270 @@
 </p:notes>
 </file>
 
+<file path=ppt/notesSlides/notesSlide10.xml><?xml version="1.0" encoding="utf-8"?>
+<p:notes xmlns:a="http://schemas.openxmlformats.org/drawingml/2006/main" xmlns:r="http://schemas.openxmlformats.org/officeDocument/2006/relationships" xmlns:p="http://schemas.openxmlformats.org/presentationml/2006/main">
+  <p:cSld>
+    <p:spTree>
+      <p:nvGrpSpPr>
+        <p:cNvPr id="1" name=""/>
+        <p:cNvGrpSpPr/>
+        <p:nvPr/>
+      </p:nvGrpSpPr>
+      <p:grpSpPr>
+        <a:xfrm>
+          <a:off x="0" y="0"/>
+          <a:ext cx="0" cy="0"/>
+          <a:chOff x="0" y="0"/>
+          <a:chExt cx="0" cy="0"/>
+        </a:xfrm>
+      </p:grpSpPr>
+      <p:sp>
+        <p:nvSpPr>
+          <p:cNvPr id="2" name="Slide Image Placeholder 1"/>
+          <p:cNvSpPr>
+            <a:spLocks noGrp="1" noRot="1" noChangeAspect="1"/>
+          </p:cNvSpPr>
+          <p:nvPr>
+            <p:ph type="sldImg"/>
+          </p:nvPr>
+        </p:nvSpPr>
+        <p:spPr/>
+      </p:sp>
+      <p:sp>
+        <p:nvSpPr>
+          <p:cNvPr id="3" name="Notes Placeholder 2"/>
+          <p:cNvSpPr>
+            <a:spLocks noGrp="1"/>
+          </p:cNvSpPr>
+          <p:nvPr>
+            <p:ph type="body" idx="1"/>
+          </p:nvPr>
+        </p:nvSpPr>
+        <p:spPr/>
+        <p:txBody>
+          <a:bodyPr/>
+          <a:lstStyle/>
+          <a:p>
+            <a:r>
+              <a:rPr lang="en-US" dirty="0"/>
+              <a:t/>
+            </a:r>
+            <a:endParaRPr lang="en-US" dirty="0"/>
+          </a:p>
+        </p:txBody>
+      </p:sp>
+      <p:sp>
+        <p:nvSpPr>
+          <p:cNvPr id="4" name="Slide Number Placeholder 3"/>
+          <p:cNvSpPr>
+            <a:spLocks noGrp="1"/>
+          </p:cNvSpPr>
+          <p:nvPr>
+            <p:ph type="sldNum" sz="quarter" idx="10"/>
+          </p:nvPr>
+        </p:nvSpPr>
+        <p:spPr/>
+        <p:txBody>
+          <a:bodyPr/>
+          <a:lstStyle/>
+          <a:p>
+            <a:fld id="{F7021451-1387-4CA6-816F-3879F97B5CBC}" type="slidenum">
+              <a:rPr lang="en-US"/>
+              <a:t>10</a:t>
+            </a:fld>
+            <a:endParaRPr lang="en-US"/>
+          </a:p>
+        </p:txBody>
+      </p:sp>
+    </p:spTree>
+    <p:extLst>
+      <p:ext uri="{BB962C8B-B14F-4D97-AF65-F5344CB8AC3E}">
+        <p14:creationId xmlns:p14="http://schemas.microsoft.com/office/powerpoint/2010/main" val="1024086991"/>
+      </p:ext>
+    </p:extLst>
+  </p:cSld>
+  <p:clrMapOvr>
+    <a:masterClrMapping/>
+  </p:clrMapOvr>
+</p:notes>
+</file>
+
+<file path=ppt/notesSlides/notesSlide11.xml><?xml version="1.0" encoding="utf-8"?>
+<p:notes xmlns:a="http://schemas.openxmlformats.org/drawingml/2006/main" xmlns:r="http://schemas.openxmlformats.org/officeDocument/2006/relationships" xmlns:p="http://schemas.openxmlformats.org/presentationml/2006/main">
+  <p:cSld>
+    <p:spTree>
+      <p:nvGrpSpPr>
+        <p:cNvPr id="1" name=""/>
+        <p:cNvGrpSpPr/>
+        <p:nvPr/>
+      </p:nvGrpSpPr>
+      <p:grpSpPr>
+        <a:xfrm>
+          <a:off x="0" y="0"/>
+          <a:ext cx="0" cy="0"/>
+          <a:chOff x="0" y="0"/>
+          <a:chExt cx="0" cy="0"/>
+        </a:xfrm>
+      </p:grpSpPr>
+      <p:sp>
+        <p:nvSpPr>
+          <p:cNvPr id="2" name="Slide Image Placeholder 1"/>
+          <p:cNvSpPr>
+            <a:spLocks noGrp="1" noRot="1" noChangeAspect="1"/>
+          </p:cNvSpPr>
+          <p:nvPr>
+            <p:ph type="sldImg"/>
+          </p:nvPr>
+        </p:nvSpPr>
+        <p:spPr/>
+      </p:sp>
+      <p:sp>
+        <p:nvSpPr>
+          <p:cNvPr id="3" name="Notes Placeholder 2"/>
+          <p:cNvSpPr>
+            <a:spLocks noGrp="1"/>
+          </p:cNvSpPr>
+          <p:nvPr>
+            <p:ph type="body" idx="1"/>
+          </p:nvPr>
+        </p:nvSpPr>
+        <p:spPr/>
+        <p:txBody>
+          <a:bodyPr/>
+          <a:lstStyle/>
+          <a:p>
+            <a:r>
+              <a:rPr lang="en-US" dirty="0"/>
+              <a:t/>
+            </a:r>
+            <a:endParaRPr lang="en-US" dirty="0"/>
+          </a:p>
+        </p:txBody>
+      </p:sp>
+      <p:sp>
+        <p:nvSpPr>
+          <p:cNvPr id="4" name="Slide Number Placeholder 3"/>
+          <p:cNvSpPr>
+            <a:spLocks noGrp="1"/>
+          </p:cNvSpPr>
+          <p:nvPr>
+            <p:ph type="sldNum" sz="quarter" idx="10"/>
+          </p:nvPr>
+        </p:nvSpPr>
+        <p:spPr/>
+        <p:txBody>
+          <a:bodyPr/>
+          <a:lstStyle/>
+          <a:p>
+            <a:fld id="{F7021451-1387-4CA6-816F-3879F97B5CBC}" type="slidenum">
+              <a:rPr lang="en-US"/>
+              <a:t>11</a:t>
+            </a:fld>
+            <a:endParaRPr lang="en-US"/>
+          </a:p>
+        </p:txBody>
+      </p:sp>
+    </p:spTree>
+    <p:extLst>
+      <p:ext uri="{BB962C8B-B14F-4D97-AF65-F5344CB8AC3E}">
+        <p14:creationId xmlns:p14="http://schemas.microsoft.com/office/powerpoint/2010/main" val="1024086991"/>
+      </p:ext>
+    </p:extLst>
+  </p:cSld>
+  <p:clrMapOvr>
+    <a:masterClrMapping/>
+  </p:clrMapOvr>
+</p:notes>
+</file>
+
+<file path=ppt/notesSlides/notesSlide12.xml><?xml version="1.0" encoding="utf-8"?>
+<p:notes xmlns:a="http://schemas.openxmlformats.org/drawingml/2006/main" xmlns:r="http://schemas.openxmlformats.org/officeDocument/2006/relationships" xmlns:p="http://schemas.openxmlformats.org/presentationml/2006/main">
+  <p:cSld>
+    <p:spTree>
+      <p:nvGrpSpPr>
+        <p:cNvPr id="1" name=""/>
+        <p:cNvGrpSpPr/>
+        <p:nvPr/>
+      </p:nvGrpSpPr>
+      <p:grpSpPr>
+        <a:xfrm>
+          <a:off x="0" y="0"/>
+          <a:ext cx="0" cy="0"/>
+          <a:chOff x="0" y="0"/>
+          <a:chExt cx="0" cy="0"/>
+        </a:xfrm>
+      </p:grpSpPr>
+      <p:sp>
+        <p:nvSpPr>
+          <p:cNvPr id="2" name="Slide Image Placeholder 1"/>
+          <p:cNvSpPr>
+            <a:spLocks noGrp="1" noRot="1" noChangeAspect="1"/>
+          </p:cNvSpPr>
+          <p:nvPr>
+            <p:ph type="sldImg"/>
+          </p:nvPr>
+        </p:nvSpPr>
+        <p:spPr/>
+      </p:sp>
+      <p:sp>
+        <p:nvSpPr>
+          <p:cNvPr id="3" name="Notes Placeholder 2"/>
+          <p:cNvSpPr>
+            <a:spLocks noGrp="1"/>
+          </p:cNvSpPr>
+          <p:nvPr>
+            <p:ph type="body" idx="1"/>
+          </p:nvPr>
+        </p:nvSpPr>
+        <p:spPr/>
+        <p:txBody>
+          <a:bodyPr/>
+          <a:lstStyle/>
+          <a:p>
+            <a:r>
+              <a:rPr lang="en-US" dirty="0"/>
+              <a:t/>
+            </a:r>
+            <a:endParaRPr lang="en-US" dirty="0"/>
+          </a:p>
+        </p:txBody>
+      </p:sp>
+      <p:sp>
+        <p:nvSpPr>
+          <p:cNvPr id="4" name="Slide Number Placeholder 3"/>
+          <p:cNvSpPr>
+            <a:spLocks noGrp="1"/>
+          </p:cNvSpPr>
+          <p:nvPr>
+            <p:ph type="sldNum" sz="quarter" idx="10"/>
+          </p:nvPr>
+        </p:nvSpPr>
+        <p:spPr/>
+        <p:txBody>
+          <a:bodyPr/>
+          <a:lstStyle/>
+          <a:p>
+            <a:fld id="{F7021451-1387-4CA6-816F-3879F97B5CBC}" type="slidenum">
+              <a:rPr lang="en-US"/>
+              <a:t>12</a:t>
+            </a:fld>
+            <a:endParaRPr lang="en-US"/>
+          </a:p>
+        </p:txBody>
+      </p:sp>
+    </p:spTree>
+    <p:extLst>
+      <p:ext uri="{BB962C8B-B14F-4D97-AF65-F5344CB8AC3E}">
+        <p14:creationId xmlns:p14="http://schemas.microsoft.com/office/powerpoint/2010/main" val="1024086991"/>
+      </p:ext>
+    </p:extLst>
+  </p:cSld>
+  <p:clrMapOvr>
+    <a:masterClrMapping/>
+  </p:clrMapOvr>
+</p:notes>
+</file>
+
 <file path=ppt/notesSlides/notesSlide2.xml><?xml version="1.0" encoding="utf-8"?>
 <p:notes xmlns:a="http://schemas.openxmlformats.org/drawingml/2006/main" xmlns:r="http://schemas.openxmlformats.org/officeDocument/2006/relationships" xmlns:p="http://schemas.openxmlformats.org/presentationml/2006/main">
   <p:cSld>
@@ -1149,6 +1417,94 @@
             <a:fld id="{F7021451-1387-4CA6-816F-3879F97B5CBC}" type="slidenum">
               <a:rPr lang="en-US"/>
               <a:t>8</a:t>
+            </a:fld>
+            <a:endParaRPr lang="en-US"/>
+          </a:p>
+        </p:txBody>
+      </p:sp>
+    </p:spTree>
+    <p:extLst>
+      <p:ext uri="{BB962C8B-B14F-4D97-AF65-F5344CB8AC3E}">
+        <p14:creationId xmlns:p14="http://schemas.microsoft.com/office/powerpoint/2010/main" val="1024086991"/>
+      </p:ext>
+    </p:extLst>
+  </p:cSld>
+  <p:clrMapOvr>
+    <a:masterClrMapping/>
+  </p:clrMapOvr>
+</p:notes>
+</file>
+
+<file path=ppt/notesSlides/notesSlide9.xml><?xml version="1.0" encoding="utf-8"?>
+<p:notes xmlns:a="http://schemas.openxmlformats.org/drawingml/2006/main" xmlns:r="http://schemas.openxmlformats.org/officeDocument/2006/relationships" xmlns:p="http://schemas.openxmlformats.org/presentationml/2006/main">
+  <p:cSld>
+    <p:spTree>
+      <p:nvGrpSpPr>
+        <p:cNvPr id="1" name=""/>
+        <p:cNvGrpSpPr/>
+        <p:nvPr/>
+      </p:nvGrpSpPr>
+      <p:grpSpPr>
+        <a:xfrm>
+          <a:off x="0" y="0"/>
+          <a:ext cx="0" cy="0"/>
+          <a:chOff x="0" y="0"/>
+          <a:chExt cx="0" cy="0"/>
+        </a:xfrm>
+      </p:grpSpPr>
+      <p:sp>
+        <p:nvSpPr>
+          <p:cNvPr id="2" name="Slide Image Placeholder 1"/>
+          <p:cNvSpPr>
+            <a:spLocks noGrp="1" noRot="1" noChangeAspect="1"/>
+          </p:cNvSpPr>
+          <p:nvPr>
+            <p:ph type="sldImg"/>
+          </p:nvPr>
+        </p:nvSpPr>
+        <p:spPr/>
+      </p:sp>
+      <p:sp>
+        <p:nvSpPr>
+          <p:cNvPr id="3" name="Notes Placeholder 2"/>
+          <p:cNvSpPr>
+            <a:spLocks noGrp="1"/>
+          </p:cNvSpPr>
+          <p:nvPr>
+            <p:ph type="body" idx="1"/>
+          </p:nvPr>
+        </p:nvSpPr>
+        <p:spPr/>
+        <p:txBody>
+          <a:bodyPr/>
+          <a:lstStyle/>
+          <a:p>
+            <a:r>
+              <a:rPr lang="en-US" dirty="0"/>
+              <a:t/>
+            </a:r>
+            <a:endParaRPr lang="en-US" dirty="0"/>
+          </a:p>
+        </p:txBody>
+      </p:sp>
+      <p:sp>
+        <p:nvSpPr>
+          <p:cNvPr id="4" name="Slide Number Placeholder 3"/>
+          <p:cNvSpPr>
+            <a:spLocks noGrp="1"/>
+          </p:cNvSpPr>
+          <p:nvPr>
+            <p:ph type="sldNum" sz="quarter" idx="10"/>
+          </p:nvPr>
+        </p:nvSpPr>
+        <p:spPr/>
+        <p:txBody>
+          <a:bodyPr/>
+          <a:lstStyle/>
+          <a:p>
+            <a:fld id="{F7021451-1387-4CA6-816F-3879F97B5CBC}" type="slidenum">
+              <a:rPr lang="en-US"/>
+              <a:t>9</a:t>
             </a:fld>
             <a:endParaRPr lang="en-US"/>
           </a:p>
@@ -2025,6 +2381,1453 @@
 </p:sld>
 </file>
 
+<file path=ppt/slides/slide10.xml><?xml version="1.0" encoding="utf-8"?>
+<p:sld xmlns:a="http://schemas.openxmlformats.org/drawingml/2006/main" xmlns:r="http://schemas.openxmlformats.org/officeDocument/2006/relationships" xmlns:p="http://schemas.openxmlformats.org/presentationml/2006/main">
+  <p:cSld name="Slide 10">
+    <p:bg>
+      <p:bgPr>
+        <a:solidFill>
+          <a:srgbClr val="FFFFFF"/>
+        </a:solidFill>
+      </p:bgPr>
+    </p:bg>
+    <p:spTree>
+      <p:nvGrpSpPr>
+        <p:cNvPr id="1" name=""/>
+        <p:cNvGrpSpPr/>
+        <p:nvPr/>
+      </p:nvGrpSpPr>
+      <p:grpSpPr>
+        <a:xfrm>
+          <a:off x="0" y="0"/>
+          <a:ext cx="0" cy="0"/>
+          <a:chOff x="0" y="0"/>
+          <a:chExt cx="0" cy="0"/>
+        </a:xfrm>
+      </p:grpSpPr>
+      <p:sp>
+        <p:nvSpPr>
+          <p:cNvPr id="2" name="Text 0"/>
+          <p:cNvSpPr/>
+          <p:nvPr/>
+        </p:nvSpPr>
+        <p:spPr>
+          <a:xfrm>
+            <a:off x="640080" y="640080"/>
+            <a:ext cx="10058400" cy="731520"/>
+          </a:xfrm>
+          <a:prstGeom prst="rect">
+            <a:avLst/>
+          </a:prstGeom>
+          <a:noFill/>
+          <a:ln/>
+        </p:spPr>
+        <p:txBody>
+          <a:bodyPr wrap="square" rtlCol="0" anchor="ctr"/>
+          <a:lstStyle/>
+          <a:p>
+            <a:pPr indent="0" marL="0">
+              <a:buNone/>
+            </a:pPr>
+            <a:r>
+              <a:rPr lang="en-US" sz="3000" b="1" dirty="0">
+                <a:solidFill>
+                  <a:srgbClr val="1A1A1A"/>
+                </a:solidFill>
+                <a:latin typeface="Cambria" pitchFamily="34" charset="0"/>
+                <a:ea typeface="Cambria" pitchFamily="34" charset="-122"/>
+                <a:cs typeface="Cambria" pitchFamily="34" charset="-120"/>
+              </a:rPr>
+              <a:t>Reading &amp; homework</a:t>
+            </a:r>
+            <a:endParaRPr lang="en-US" sz="3000" dirty="0"/>
+          </a:p>
+        </p:txBody>
+      </p:sp>
+      <p:sp>
+        <p:nvSpPr>
+          <p:cNvPr id="3" name="Shape 1"/>
+          <p:cNvSpPr/>
+          <p:nvPr/>
+        </p:nvSpPr>
+        <p:spPr>
+          <a:xfrm>
+            <a:off x="640080" y="1810512"/>
+            <a:ext cx="219456" cy="219456"/>
+          </a:xfrm>
+          <a:prstGeom prst="ellipse">
+            <a:avLst/>
+          </a:prstGeom>
+          <a:solidFill>
+            <a:srgbClr val="7A3B2E"/>
+          </a:solidFill>
+          <a:ln/>
+        </p:spPr>
+      </p:sp>
+      <p:sp>
+        <p:nvSpPr>
+          <p:cNvPr id="4" name="Text 2"/>
+          <p:cNvSpPr/>
+          <p:nvPr/>
+        </p:nvSpPr>
+        <p:spPr>
+          <a:xfrm>
+            <a:off x="1051560" y="1737360"/>
+            <a:ext cx="10424160" cy="365760"/>
+          </a:xfrm>
+          <a:prstGeom prst="rect">
+            <a:avLst/>
+          </a:prstGeom>
+          <a:noFill/>
+          <a:ln/>
+        </p:spPr>
+        <p:txBody>
+          <a:bodyPr wrap="square" rtlCol="0" anchor="ctr"/>
+          <a:lstStyle/>
+          <a:p>
+            <a:pPr indent="0" marL="0">
+              <a:buNone/>
+            </a:pPr>
+            <a:r>
+              <a:rPr lang="en-US" sz="1500" b="1" dirty="0">
+                <a:solidFill>
+                  <a:srgbClr val="7A3B2E"/>
+                </a:solidFill>
+                <a:latin typeface="Calibri" pitchFamily="34" charset="0"/>
+                <a:ea typeface="Calibri" pitchFamily="34" charset="-122"/>
+                <a:cs typeface="Calibri" pitchFamily="34" charset="-120"/>
+              </a:rPr>
+              <a:t>Reading</a:t>
+            </a:r>
+            <a:endParaRPr lang="en-US" sz="1500" dirty="0"/>
+          </a:p>
+        </p:txBody>
+      </p:sp>
+      <p:sp>
+        <p:nvSpPr>
+          <p:cNvPr id="5" name="Text 3"/>
+          <p:cNvSpPr/>
+          <p:nvPr/>
+        </p:nvSpPr>
+        <p:spPr>
+          <a:xfrm>
+            <a:off x="1051560" y="2121408"/>
+            <a:ext cx="10424160" cy="731520"/>
+          </a:xfrm>
+          <a:prstGeom prst="rect">
+            <a:avLst/>
+          </a:prstGeom>
+          <a:noFill/>
+          <a:ln/>
+        </p:spPr>
+        <p:txBody>
+          <a:bodyPr wrap="square" rtlCol="0" anchor="t">
+            <a:spAutoFit/>
+          </a:bodyPr>
+          <a:lstStyle/>
+          <a:p>
+            <a:pPr indent="0" marL="0">
+              <a:buNone/>
+            </a:pPr>
+            <a:r>
+              <a:rPr lang="en-US" sz="1400" dirty="0">
+                <a:solidFill>
+                  <a:srgbClr val="1A1A1A"/>
+                </a:solidFill>
+                <a:latin typeface="Calibri" pitchFamily="34" charset="0"/>
+                <a:ea typeface="Calibri" pitchFamily="34" charset="-122"/>
+                <a:cs typeface="Calibri" pitchFamily="34" charset="-120"/>
+              </a:rPr>
+              <a:t>Wolfram, What Is ChatGPT Doing (opening sections only)</a:t>
+            </a:r>
+            <a:endParaRPr lang="en-US" sz="1400" dirty="0"/>
+          </a:p>
+        </p:txBody>
+      </p:sp>
+      <p:sp>
+        <p:nvSpPr>
+          <p:cNvPr id="6" name="Shape 4"/>
+          <p:cNvSpPr/>
+          <p:nvPr/>
+        </p:nvSpPr>
+        <p:spPr>
+          <a:xfrm>
+            <a:off x="640080" y="2953512"/>
+            <a:ext cx="219456" cy="219456"/>
+          </a:xfrm>
+          <a:prstGeom prst="ellipse">
+            <a:avLst/>
+          </a:prstGeom>
+          <a:solidFill>
+            <a:srgbClr val="3F6F5F"/>
+          </a:solidFill>
+          <a:ln/>
+        </p:spPr>
+      </p:sp>
+      <p:sp>
+        <p:nvSpPr>
+          <p:cNvPr id="7" name="Text 5"/>
+          <p:cNvSpPr/>
+          <p:nvPr/>
+        </p:nvSpPr>
+        <p:spPr>
+          <a:xfrm>
+            <a:off x="1051560" y="2880360"/>
+            <a:ext cx="10424160" cy="365760"/>
+          </a:xfrm>
+          <a:prstGeom prst="rect">
+            <a:avLst/>
+          </a:prstGeom>
+          <a:noFill/>
+          <a:ln/>
+        </p:spPr>
+        <p:txBody>
+          <a:bodyPr wrap="square" rtlCol="0" anchor="ctr"/>
+          <a:lstStyle/>
+          <a:p>
+            <a:pPr indent="0" marL="0">
+              <a:buNone/>
+            </a:pPr>
+            <a:r>
+              <a:rPr lang="en-US" sz="1500" b="1" dirty="0">
+                <a:solidFill>
+                  <a:srgbClr val="3F6F5F"/>
+                </a:solidFill>
+                <a:latin typeface="Calibri" pitchFamily="34" charset="0"/>
+                <a:ea typeface="Calibri" pitchFamily="34" charset="-122"/>
+                <a:cs typeface="Calibri" pitchFamily="34" charset="-120"/>
+              </a:rPr>
+              <a:t>Supplement</a:t>
+            </a:r>
+            <a:endParaRPr lang="en-US" sz="1500" dirty="0"/>
+          </a:p>
+        </p:txBody>
+      </p:sp>
+      <p:sp>
+        <p:nvSpPr>
+          <p:cNvPr id="8" name="Text 6"/>
+          <p:cNvSpPr/>
+          <p:nvPr/>
+        </p:nvSpPr>
+        <p:spPr>
+          <a:xfrm>
+            <a:off x="1051560" y="3264408"/>
+            <a:ext cx="10424160" cy="731520"/>
+          </a:xfrm>
+          <a:prstGeom prst="rect">
+            <a:avLst/>
+          </a:prstGeom>
+          <a:noFill/>
+          <a:ln/>
+        </p:spPr>
+        <p:txBody>
+          <a:bodyPr wrap="square" rtlCol="0" anchor="t">
+            <a:spAutoFit/>
+          </a:bodyPr>
+          <a:lstStyle/>
+          <a:p>
+            <a:pPr indent="0" marL="0">
+              <a:buNone/>
+            </a:pPr>
+            <a:r>
+              <a:rPr lang="en-US" sz="1400" dirty="0">
+                <a:solidFill>
+                  <a:srgbClr val="1A1A1A"/>
+                </a:solidFill>
+                <a:latin typeface="Calibri" pitchFamily="34" charset="0"/>
+                <a:ea typeface="Calibri" pitchFamily="34" charset="-122"/>
+                <a:cs typeface="Calibri" pitchFamily="34" charset="-120"/>
+              </a:rPr>
+              <a:t>Zipf's law, the straight line in every text</a:t>
+            </a:r>
+            <a:endParaRPr lang="en-US" sz="1400" dirty="0"/>
+          </a:p>
+        </p:txBody>
+      </p:sp>
+      <p:sp>
+        <p:nvSpPr>
+          <p:cNvPr id="9" name="Shape 7"/>
+          <p:cNvSpPr/>
+          <p:nvPr/>
+        </p:nvSpPr>
+        <p:spPr>
+          <a:xfrm>
+            <a:off x="640080" y="4096512"/>
+            <a:ext cx="219456" cy="219456"/>
+          </a:xfrm>
+          <a:prstGeom prst="ellipse">
+            <a:avLst/>
+          </a:prstGeom>
+          <a:solidFill>
+            <a:srgbClr val="B9852F"/>
+          </a:solidFill>
+          <a:ln/>
+        </p:spPr>
+      </p:sp>
+      <p:sp>
+        <p:nvSpPr>
+          <p:cNvPr id="10" name="Text 8"/>
+          <p:cNvSpPr/>
+          <p:nvPr/>
+        </p:nvSpPr>
+        <p:spPr>
+          <a:xfrm>
+            <a:off x="1051560" y="4023360"/>
+            <a:ext cx="10424160" cy="365760"/>
+          </a:xfrm>
+          <a:prstGeom prst="rect">
+            <a:avLst/>
+          </a:prstGeom>
+          <a:noFill/>
+          <a:ln/>
+        </p:spPr>
+        <p:txBody>
+          <a:bodyPr wrap="square" rtlCol="0" anchor="ctr"/>
+          <a:lstStyle/>
+          <a:p>
+            <a:pPr indent="0" marL="0">
+              <a:buNone/>
+            </a:pPr>
+            <a:r>
+              <a:rPr lang="en-US" sz="1500" b="1" dirty="0">
+                <a:solidFill>
+                  <a:srgbClr val="B9852F"/>
+                </a:solidFill>
+                <a:latin typeface="Calibri" pitchFamily="34" charset="0"/>
+                <a:ea typeface="Calibri" pitchFamily="34" charset="-122"/>
+                <a:cs typeface="Calibri" pitchFamily="34" charset="-120"/>
+              </a:rPr>
+              <a:t>Sketch</a:t>
+            </a:r>
+            <a:endParaRPr lang="en-US" sz="1500" dirty="0"/>
+          </a:p>
+        </p:txBody>
+      </p:sp>
+      <p:sp>
+        <p:nvSpPr>
+          <p:cNvPr id="11" name="Text 9"/>
+          <p:cNvSpPr/>
+          <p:nvPr/>
+        </p:nvSpPr>
+        <p:spPr>
+          <a:xfrm>
+            <a:off x="1051560" y="4407408"/>
+            <a:ext cx="10424160" cy="731520"/>
+          </a:xfrm>
+          <a:prstGeom prst="rect">
+            <a:avLst/>
+          </a:prstGeom>
+          <a:noFill/>
+          <a:ln/>
+        </p:spPr>
+        <p:txBody>
+          <a:bodyPr wrap="square" rtlCol="0" anchor="t">
+            <a:spAutoFit/>
+          </a:bodyPr>
+          <a:lstStyle/>
+          <a:p>
+            <a:pPr indent="0" marL="0">
+              <a:buNone/>
+            </a:pPr>
+            <a:r>
+              <a:rPr lang="en-US" sz="1400" dirty="0">
+                <a:solidFill>
+                  <a:srgbClr val="1A1A1A"/>
+                </a:solidFill>
+                <a:latin typeface="Calibri" pitchFamily="34" charset="0"/>
+                <a:ea typeface="Calibri" pitchFamily="34" charset="-122"/>
+                <a:cs typeface="Calibri" pitchFamily="34" charset="-120"/>
+              </a:rPr>
+              <a:t>Count something in a text you love; one chart; one sentence naming a choice. Comparing two things? Shuffle-test it.</a:t>
+            </a:r>
+            <a:endParaRPr lang="en-US" sz="1400" dirty="0"/>
+          </a:p>
+        </p:txBody>
+      </p:sp>
+      <p:sp>
+        <p:nvSpPr>
+          <p:cNvPr id="12" name="Shape 10"/>
+          <p:cNvSpPr/>
+          <p:nvPr/>
+        </p:nvSpPr>
+        <p:spPr>
+          <a:xfrm>
+            <a:off x="640080" y="5239512"/>
+            <a:ext cx="219456" cy="219456"/>
+          </a:xfrm>
+          <a:prstGeom prst="ellipse">
+            <a:avLst/>
+          </a:prstGeom>
+          <a:solidFill>
+            <a:srgbClr val="7A3B2E"/>
+          </a:solidFill>
+          <a:ln/>
+        </p:spPr>
+      </p:sp>
+      <p:sp>
+        <p:nvSpPr>
+          <p:cNvPr id="13" name="Text 11"/>
+          <p:cNvSpPr/>
+          <p:nvPr/>
+        </p:nvSpPr>
+        <p:spPr>
+          <a:xfrm>
+            <a:off x="1051560" y="5166360"/>
+            <a:ext cx="10424160" cy="365760"/>
+          </a:xfrm>
+          <a:prstGeom prst="rect">
+            <a:avLst/>
+          </a:prstGeom>
+          <a:noFill/>
+          <a:ln/>
+        </p:spPr>
+        <p:txBody>
+          <a:bodyPr wrap="square" rtlCol="0" anchor="ctr"/>
+          <a:lstStyle/>
+          <a:p>
+            <a:pPr indent="0" marL="0">
+              <a:buNone/>
+            </a:pPr>
+            <a:r>
+              <a:rPr lang="en-US" sz="1500" b="1" dirty="0">
+                <a:solidFill>
+                  <a:srgbClr val="7A3B2E"/>
+                </a:solidFill>
+                <a:latin typeface="Calibri" pitchFamily="34" charset="0"/>
+                <a:ea typeface="Calibri" pitchFamily="34" charset="-122"/>
+                <a:cs typeface="Calibri" pitchFamily="34" charset="-120"/>
+              </a:rPr>
+              <a:t>Check (AI closed)</a:t>
+            </a:r>
+            <a:endParaRPr lang="en-US" sz="1500" dirty="0"/>
+          </a:p>
+        </p:txBody>
+      </p:sp>
+      <p:sp>
+        <p:nvSpPr>
+          <p:cNvPr id="14" name="Text 12"/>
+          <p:cNvSpPr/>
+          <p:nvPr/>
+        </p:nvSpPr>
+        <p:spPr>
+          <a:xfrm>
+            <a:off x="1051560" y="5550408"/>
+            <a:ext cx="10424160" cy="731520"/>
+          </a:xfrm>
+          <a:prstGeom prst="rect">
+            <a:avLst/>
+          </a:prstGeom>
+          <a:noFill/>
+          <a:ln/>
+        </p:spPr>
+        <p:txBody>
+          <a:bodyPr wrap="square" rtlCol="0" anchor="t">
+            <a:spAutoFit/>
+          </a:bodyPr>
+          <a:lstStyle/>
+          <a:p>
+            <a:pPr indent="0" marL="0">
+              <a:buNone/>
+            </a:pPr>
+            <a:r>
+              <a:rPr lang="en-US" sz="1400" dirty="0">
+                <a:solidFill>
+                  <a:srgbClr val="1A1A1A"/>
+                </a:solidFill>
+                <a:latin typeface="Calibri" pitchFamily="34" charset="0"/>
+                <a:ea typeface="Calibri" pitchFamily="34" charset="-122"/>
+                <a:cs typeface="Calibri" pitchFamily="34" charset="-120"/>
+              </a:rPr>
+              <a:t>Explain it: why two tokenizers split a sentence differently, and what your stemming choice changed. (Competencies 3, 5.)</a:t>
+            </a:r>
+            <a:endParaRPr lang="en-US" sz="1400" dirty="0"/>
+          </a:p>
+        </p:txBody>
+      </p:sp>
+    </p:spTree>
+  </p:cSld>
+  <p:clrMapOvr>
+    <a:masterClrMapping/>
+  </p:clrMapOvr>
+</p:sld>
+</file>
+
+<file path=ppt/slides/slide11.xml><?xml version="1.0" encoding="utf-8"?>
+<p:sld xmlns:a="http://schemas.openxmlformats.org/drawingml/2006/main" xmlns:r="http://schemas.openxmlformats.org/officeDocument/2006/relationships" xmlns:p="http://schemas.openxmlformats.org/presentationml/2006/main">
+  <p:cSld name="Slide 11">
+    <p:bg>
+      <p:bgPr>
+        <a:solidFill>
+          <a:srgbClr val="FFFFFF"/>
+        </a:solidFill>
+      </p:bgPr>
+    </p:bg>
+    <p:spTree>
+      <p:nvGrpSpPr>
+        <p:cNvPr id="1" name=""/>
+        <p:cNvGrpSpPr/>
+        <p:nvPr/>
+      </p:nvGrpSpPr>
+      <p:grpSpPr>
+        <a:xfrm>
+          <a:off x="0" y="0"/>
+          <a:ext cx="0" cy="0"/>
+          <a:chOff x="0" y="0"/>
+          <a:chExt cx="0" cy="0"/>
+        </a:xfrm>
+      </p:grpSpPr>
+      <p:sp>
+        <p:nvSpPr>
+          <p:cNvPr id="2" name="Text 0"/>
+          <p:cNvSpPr/>
+          <p:nvPr/>
+        </p:nvSpPr>
+        <p:spPr>
+          <a:xfrm>
+            <a:off x="640080" y="640080"/>
+            <a:ext cx="10058400" cy="320040"/>
+          </a:xfrm>
+          <a:prstGeom prst="rect">
+            <a:avLst/>
+          </a:prstGeom>
+          <a:noFill/>
+          <a:ln/>
+        </p:spPr>
+        <p:txBody>
+          <a:bodyPr wrap="square" rtlCol="0" anchor="ctr"/>
+          <a:lstStyle/>
+          <a:p>
+            <a:pPr indent="0" marL="0">
+              <a:buNone/>
+            </a:pPr>
+            <a:r>
+              <a:rPr lang="en-US" sz="1300" b="1" spc="300" kern="0" dirty="0">
+                <a:solidFill>
+                  <a:srgbClr val="7A3B2E"/>
+                </a:solidFill>
+                <a:latin typeface="Calibri" pitchFamily="34" charset="0"/>
+                <a:ea typeface="Calibri" pitchFamily="34" charset="-122"/>
+                <a:cs typeface="Calibri" pitchFamily="34" charset="-120"/>
+              </a:rPr>
+              <a:t>HOW THIS WEEK CONNECTS</a:t>
+            </a:r>
+            <a:endParaRPr lang="en-US" sz="1300" dirty="0"/>
+          </a:p>
+        </p:txBody>
+      </p:sp>
+      <p:sp>
+        <p:nvSpPr>
+          <p:cNvPr id="3" name="Text 1"/>
+          <p:cNvSpPr/>
+          <p:nvPr/>
+        </p:nvSpPr>
+        <p:spPr>
+          <a:xfrm>
+            <a:off x="640080" y="987552"/>
+            <a:ext cx="10058400" cy="640080"/>
+          </a:xfrm>
+          <a:prstGeom prst="rect">
+            <a:avLst/>
+          </a:prstGeom>
+          <a:noFill/>
+          <a:ln/>
+        </p:spPr>
+        <p:txBody>
+          <a:bodyPr wrap="square" rtlCol="0" anchor="ctr"/>
+          <a:lstStyle/>
+          <a:p>
+            <a:pPr indent="0" marL="0">
+              <a:buNone/>
+            </a:pPr>
+            <a:r>
+              <a:rPr lang="en-US" sz="2800" b="1" dirty="0">
+                <a:solidFill>
+                  <a:srgbClr val="1A1A1A"/>
+                </a:solidFill>
+                <a:latin typeface="Cambria" pitchFamily="34" charset="0"/>
+                <a:ea typeface="Cambria" pitchFamily="34" charset="-122"/>
+                <a:cs typeface="Cambria" pitchFamily="34" charset="-120"/>
+              </a:rPr>
+              <a:t>The course's through-lines</a:t>
+            </a:r>
+            <a:endParaRPr lang="en-US" sz="2800" dirty="0"/>
+          </a:p>
+        </p:txBody>
+      </p:sp>
+      <p:sp>
+        <p:nvSpPr>
+          <p:cNvPr id="4" name="Shape 2"/>
+          <p:cNvSpPr/>
+          <p:nvPr/>
+        </p:nvSpPr>
+        <p:spPr>
+          <a:xfrm>
+            <a:off x="640080" y="2057400"/>
+            <a:ext cx="457200" cy="457200"/>
+          </a:xfrm>
+          <a:prstGeom prst="roundRect">
+            <a:avLst>
+              <a:gd name="adj" fmla="val 16000"/>
+            </a:avLst>
+          </a:prstGeom>
+          <a:solidFill>
+            <a:srgbClr val="7A3B2E"/>
+          </a:solidFill>
+          <a:ln/>
+        </p:spPr>
+      </p:sp>
+      <p:sp>
+        <p:nvSpPr>
+          <p:cNvPr id="5" name="Text 3"/>
+          <p:cNvSpPr/>
+          <p:nvPr/>
+        </p:nvSpPr>
+        <p:spPr>
+          <a:xfrm>
+            <a:off x="640080" y="2057400"/>
+            <a:ext cx="457200" cy="457200"/>
+          </a:xfrm>
+          <a:prstGeom prst="rect">
+            <a:avLst/>
+          </a:prstGeom>
+          <a:noFill/>
+          <a:ln/>
+        </p:spPr>
+        <p:txBody>
+          <a:bodyPr wrap="square" rtlCol="0" anchor="ctr"/>
+          <a:lstStyle/>
+          <a:p>
+            <a:pPr algn="ctr" indent="0" marL="0">
+              <a:buNone/>
+            </a:pPr>
+            <a:r>
+              <a:rPr lang="en-US" sz="2000" b="1" dirty="0">
+                <a:solidFill>
+                  <a:srgbClr val="FFFFFF"/>
+                </a:solidFill>
+                <a:latin typeface="Cambria" pitchFamily="34" charset="0"/>
+                <a:ea typeface="Cambria" pitchFamily="34" charset="-122"/>
+                <a:cs typeface="Cambria" pitchFamily="34" charset="-120"/>
+              </a:rPr>
+              <a:t>1</a:t>
+            </a:r>
+            <a:endParaRPr lang="en-US" sz="2000" dirty="0"/>
+          </a:p>
+        </p:txBody>
+      </p:sp>
+      <p:sp>
+        <p:nvSpPr>
+          <p:cNvPr id="6" name="Text 4"/>
+          <p:cNvSpPr/>
+          <p:nvPr/>
+        </p:nvSpPr>
+        <p:spPr>
+          <a:xfrm>
+            <a:off x="1371600" y="2020824"/>
+            <a:ext cx="10332720" cy="411480"/>
+          </a:xfrm>
+          <a:prstGeom prst="rect">
+            <a:avLst/>
+          </a:prstGeom>
+          <a:noFill/>
+          <a:ln/>
+        </p:spPr>
+        <p:txBody>
+          <a:bodyPr wrap="square" rtlCol="0" anchor="ctr"/>
+          <a:lstStyle/>
+          <a:p>
+            <a:pPr indent="0" marL="0">
+              <a:buNone/>
+            </a:pPr>
+            <a:r>
+              <a:rPr lang="en-US" sz="1900" b="1" dirty="0">
+                <a:solidFill>
+                  <a:srgbClr val="7A3B2E"/>
+                </a:solidFill>
+                <a:latin typeface="Cambria" pitchFamily="34" charset="0"/>
+                <a:ea typeface="Cambria" pitchFamily="34" charset="-122"/>
+                <a:cs typeface="Cambria" pitchFamily="34" charset="-120"/>
+              </a:rPr>
+              <a:t>Beyond counting</a:t>
+            </a:r>
+            <a:endParaRPr lang="en-US" sz="1900" dirty="0"/>
+          </a:p>
+        </p:txBody>
+      </p:sp>
+      <p:sp>
+        <p:nvSpPr>
+          <p:cNvPr id="7" name="Text 5"/>
+          <p:cNvSpPr/>
+          <p:nvPr/>
+        </p:nvSpPr>
+        <p:spPr>
+          <a:xfrm>
+            <a:off x="1371600" y="2441448"/>
+            <a:ext cx="10332720" cy="914400"/>
+          </a:xfrm>
+          <a:prstGeom prst="rect">
+            <a:avLst/>
+          </a:prstGeom>
+          <a:noFill/>
+          <a:ln/>
+        </p:spPr>
+        <p:txBody>
+          <a:bodyPr wrap="square" rtlCol="0" anchor="t">
+            <a:spAutoFit/>
+          </a:bodyPr>
+          <a:lstStyle/>
+          <a:p>
+            <a:pPr indent="0" marL="0">
+              <a:lnSpc>
+                <a:spcPct val="112000"/>
+              </a:lnSpc>
+              <a:buNone/>
+            </a:pPr>
+            <a:r>
+              <a:rPr lang="en-US" sz="1450" dirty="0">
+                <a:solidFill>
+                  <a:srgbClr val="1A1A1A"/>
+                </a:solidFill>
+                <a:latin typeface="Calibri" pitchFamily="34" charset="0"/>
+                <a:ea typeface="Calibri" pitchFamily="34" charset="-122"/>
+                <a:cs typeface="Calibri" pitchFamily="34" charset="-120"/>
+              </a:rPr>
+              <a:t>Counting is the honest floor, with no notion of meaning. This sets up the Week 5 payoff.</a:t>
+            </a:r>
+            <a:endParaRPr lang="en-US" sz="1450" dirty="0"/>
+          </a:p>
+        </p:txBody>
+      </p:sp>
+      <p:sp>
+        <p:nvSpPr>
+          <p:cNvPr id="8" name="Shape 6"/>
+          <p:cNvSpPr/>
+          <p:nvPr/>
+        </p:nvSpPr>
+        <p:spPr>
+          <a:xfrm>
+            <a:off x="640080" y="3520440"/>
+            <a:ext cx="457200" cy="457200"/>
+          </a:xfrm>
+          <a:prstGeom prst="roundRect">
+            <a:avLst>
+              <a:gd name="adj" fmla="val 16000"/>
+            </a:avLst>
+          </a:prstGeom>
+          <a:solidFill>
+            <a:srgbClr val="3F6F5F"/>
+          </a:solidFill>
+          <a:ln/>
+        </p:spPr>
+      </p:sp>
+      <p:sp>
+        <p:nvSpPr>
+          <p:cNvPr id="9" name="Text 7"/>
+          <p:cNvSpPr/>
+          <p:nvPr/>
+        </p:nvSpPr>
+        <p:spPr>
+          <a:xfrm>
+            <a:off x="640080" y="3520440"/>
+            <a:ext cx="457200" cy="457200"/>
+          </a:xfrm>
+          <a:prstGeom prst="rect">
+            <a:avLst/>
+          </a:prstGeom>
+          <a:noFill/>
+          <a:ln/>
+        </p:spPr>
+        <p:txBody>
+          <a:bodyPr wrap="square" rtlCol="0" anchor="ctr"/>
+          <a:lstStyle/>
+          <a:p>
+            <a:pPr algn="ctr" indent="0" marL="0">
+              <a:buNone/>
+            </a:pPr>
+            <a:r>
+              <a:rPr lang="en-US" sz="2000" b="1" dirty="0">
+                <a:solidFill>
+                  <a:srgbClr val="FFFFFF"/>
+                </a:solidFill>
+                <a:latin typeface="Cambria" pitchFamily="34" charset="0"/>
+                <a:ea typeface="Cambria" pitchFamily="34" charset="-122"/>
+                <a:cs typeface="Cambria" pitchFamily="34" charset="-120"/>
+              </a:rPr>
+              <a:t>2</a:t>
+            </a:r>
+            <a:endParaRPr lang="en-US" sz="2000" dirty="0"/>
+          </a:p>
+        </p:txBody>
+      </p:sp>
+      <p:sp>
+        <p:nvSpPr>
+          <p:cNvPr id="10" name="Text 8"/>
+          <p:cNvSpPr/>
+          <p:nvPr/>
+        </p:nvSpPr>
+        <p:spPr>
+          <a:xfrm>
+            <a:off x="1371600" y="3483864"/>
+            <a:ext cx="10332720" cy="411480"/>
+          </a:xfrm>
+          <a:prstGeom prst="rect">
+            <a:avLst/>
+          </a:prstGeom>
+          <a:noFill/>
+          <a:ln/>
+        </p:spPr>
+        <p:txBody>
+          <a:bodyPr wrap="square" rtlCol="0" anchor="ctr"/>
+          <a:lstStyle/>
+          <a:p>
+            <a:pPr indent="0" marL="0">
+              <a:buNone/>
+            </a:pPr>
+            <a:r>
+              <a:rPr lang="en-US" sz="1900" b="1" dirty="0">
+                <a:solidFill>
+                  <a:srgbClr val="3F6F5F"/>
+                </a:solidFill>
+                <a:latin typeface="Cambria" pitchFamily="34" charset="0"/>
+                <a:ea typeface="Cambria" pitchFamily="34" charset="-122"/>
+                <a:cs typeface="Cambria" pitchFamily="34" charset="-120"/>
+              </a:rPr>
+              <a:t>Every count is a choice</a:t>
+            </a:r>
+            <a:endParaRPr lang="en-US" sz="1900" dirty="0"/>
+          </a:p>
+        </p:txBody>
+      </p:sp>
+      <p:sp>
+        <p:nvSpPr>
+          <p:cNvPr id="11" name="Text 9"/>
+          <p:cNvSpPr/>
+          <p:nvPr/>
+        </p:nvSpPr>
+        <p:spPr>
+          <a:xfrm>
+            <a:off x="1371600" y="3904488"/>
+            <a:ext cx="10332720" cy="914400"/>
+          </a:xfrm>
+          <a:prstGeom prst="rect">
+            <a:avLst/>
+          </a:prstGeom>
+          <a:noFill/>
+          <a:ln/>
+        </p:spPr>
+        <p:txBody>
+          <a:bodyPr wrap="square" rtlCol="0" anchor="t">
+            <a:spAutoFit/>
+          </a:bodyPr>
+          <a:lstStyle/>
+          <a:p>
+            <a:pPr indent="0" marL="0">
+              <a:lnSpc>
+                <a:spcPct val="112000"/>
+              </a:lnSpc>
+              <a:buNone/>
+            </a:pPr>
+            <a:r>
+              <a:rPr lang="en-US" sz="1450" dirty="0">
+                <a:solidFill>
+                  <a:srgbClr val="1A1A1A"/>
+                </a:solidFill>
+                <a:latin typeface="Calibri" pitchFamily="34" charset="0"/>
+                <a:ea typeface="Calibri" pitchFamily="34" charset="-122"/>
+                <a:cs typeface="Calibri" pitchFamily="34" charset="-120"/>
+              </a:rPr>
+              <a:t>Tokens, stemming, the corpus, the chart's axis, each hides a decision you made.</a:t>
+            </a:r>
+            <a:endParaRPr lang="en-US" sz="1450" dirty="0"/>
+          </a:p>
+        </p:txBody>
+      </p:sp>
+      <p:sp>
+        <p:nvSpPr>
+          <p:cNvPr id="12" name="Shape 10"/>
+          <p:cNvSpPr/>
+          <p:nvPr/>
+        </p:nvSpPr>
+        <p:spPr>
+          <a:xfrm>
+            <a:off x="640080" y="4983480"/>
+            <a:ext cx="457200" cy="457200"/>
+          </a:xfrm>
+          <a:prstGeom prst="roundRect">
+            <a:avLst>
+              <a:gd name="adj" fmla="val 16000"/>
+            </a:avLst>
+          </a:prstGeom>
+          <a:solidFill>
+            <a:srgbClr val="B9852F"/>
+          </a:solidFill>
+          <a:ln/>
+        </p:spPr>
+      </p:sp>
+      <p:sp>
+        <p:nvSpPr>
+          <p:cNvPr id="13" name="Text 11"/>
+          <p:cNvSpPr/>
+          <p:nvPr/>
+        </p:nvSpPr>
+        <p:spPr>
+          <a:xfrm>
+            <a:off x="640080" y="4983480"/>
+            <a:ext cx="457200" cy="457200"/>
+          </a:xfrm>
+          <a:prstGeom prst="rect">
+            <a:avLst/>
+          </a:prstGeom>
+          <a:noFill/>
+          <a:ln/>
+        </p:spPr>
+        <p:txBody>
+          <a:bodyPr wrap="square" rtlCol="0" anchor="ctr"/>
+          <a:lstStyle/>
+          <a:p>
+            <a:pPr algn="ctr" indent="0" marL="0">
+              <a:buNone/>
+            </a:pPr>
+            <a:r>
+              <a:rPr lang="en-US" sz="2000" b="1" dirty="0">
+                <a:solidFill>
+                  <a:srgbClr val="FFFFFF"/>
+                </a:solidFill>
+                <a:latin typeface="Cambria" pitchFamily="34" charset="0"/>
+                <a:ea typeface="Cambria" pitchFamily="34" charset="-122"/>
+                <a:cs typeface="Cambria" pitchFamily="34" charset="-120"/>
+              </a:rPr>
+              <a:t>3</a:t>
+            </a:r>
+            <a:endParaRPr lang="en-US" sz="2000" dirty="0"/>
+          </a:p>
+        </p:txBody>
+      </p:sp>
+      <p:sp>
+        <p:nvSpPr>
+          <p:cNvPr id="14" name="Text 12"/>
+          <p:cNvSpPr/>
+          <p:nvPr/>
+        </p:nvSpPr>
+        <p:spPr>
+          <a:xfrm>
+            <a:off x="1371600" y="4946904"/>
+            <a:ext cx="10332720" cy="411480"/>
+          </a:xfrm>
+          <a:prstGeom prst="rect">
+            <a:avLst/>
+          </a:prstGeom>
+          <a:noFill/>
+          <a:ln/>
+        </p:spPr>
+        <p:txBody>
+          <a:bodyPr wrap="square" rtlCol="0" anchor="ctr"/>
+          <a:lstStyle/>
+          <a:p>
+            <a:pPr indent="0" marL="0">
+              <a:buNone/>
+            </a:pPr>
+            <a:r>
+              <a:rPr lang="en-US" sz="1900" b="1" dirty="0">
+                <a:solidFill>
+                  <a:srgbClr val="B9852F"/>
+                </a:solidFill>
+                <a:latin typeface="Cambria" pitchFamily="34" charset="0"/>
+                <a:ea typeface="Cambria" pitchFamily="34" charset="-122"/>
+                <a:cs typeface="Cambria" pitchFamily="34" charset="-120"/>
+              </a:rPr>
+              <a:t>Is the difference real?</a:t>
+            </a:r>
+            <a:endParaRPr lang="en-US" sz="1900" dirty="0"/>
+          </a:p>
+        </p:txBody>
+      </p:sp>
+      <p:sp>
+        <p:nvSpPr>
+          <p:cNvPr id="15" name="Text 13"/>
+          <p:cNvSpPr/>
+          <p:nvPr/>
+        </p:nvSpPr>
+        <p:spPr>
+          <a:xfrm>
+            <a:off x="1371600" y="5367528"/>
+            <a:ext cx="10332720" cy="914400"/>
+          </a:xfrm>
+          <a:prstGeom prst="rect">
+            <a:avLst/>
+          </a:prstGeom>
+          <a:noFill/>
+          <a:ln/>
+        </p:spPr>
+        <p:txBody>
+          <a:bodyPr wrap="square" rtlCol="0" anchor="t">
+            <a:spAutoFit/>
+          </a:bodyPr>
+          <a:lstStyle/>
+          <a:p>
+            <a:pPr indent="0" marL="0">
+              <a:lnSpc>
+                <a:spcPct val="112000"/>
+              </a:lnSpc>
+              <a:buNone/>
+            </a:pPr>
+            <a:r>
+              <a:rPr lang="en-US" sz="1450" dirty="0">
+                <a:solidFill>
+                  <a:srgbClr val="1A1A1A"/>
+                </a:solidFill>
+                <a:latin typeface="Calibri" pitchFamily="34" charset="0"/>
+                <a:ea typeface="Calibri" pitchFamily="34" charset="-122"/>
+                <a:cs typeface="Calibri" pitchFamily="34" charset="-120"/>
+              </a:rPr>
+              <a:t>Shuffle the labels and count again, a thousand times; if chance often beats your gap, don't trust it.</a:t>
+            </a:r>
+            <a:endParaRPr lang="en-US" sz="1450" dirty="0"/>
+          </a:p>
+        </p:txBody>
+      </p:sp>
+    </p:spTree>
+  </p:cSld>
+  <p:clrMapOvr>
+    <a:masterClrMapping/>
+  </p:clrMapOvr>
+</p:sld>
+</file>
+
+<file path=ppt/slides/slide12.xml><?xml version="1.0" encoding="utf-8"?>
+<p:sld xmlns:a="http://schemas.openxmlformats.org/drawingml/2006/main" xmlns:r="http://schemas.openxmlformats.org/officeDocument/2006/relationships" xmlns:p="http://schemas.openxmlformats.org/presentationml/2006/main">
+  <p:cSld name="Slide 12">
+    <p:bg>
+      <p:bgPr>
+        <a:solidFill>
+          <a:srgbClr val="4E261D"/>
+        </a:solidFill>
+      </p:bgPr>
+    </p:bg>
+    <p:spTree>
+      <p:nvGrpSpPr>
+        <p:cNvPr id="1" name=""/>
+        <p:cNvGrpSpPr/>
+        <p:nvPr/>
+      </p:nvGrpSpPr>
+      <p:grpSpPr>
+        <a:xfrm>
+          <a:off x="0" y="0"/>
+          <a:ext cx="0" cy="0"/>
+          <a:chOff x="0" y="0"/>
+          <a:chExt cx="0" cy="0"/>
+        </a:xfrm>
+      </p:grpSpPr>
+      <p:sp>
+        <p:nvSpPr>
+          <p:cNvPr id="2" name="Text 0"/>
+          <p:cNvSpPr/>
+          <p:nvPr/>
+        </p:nvSpPr>
+        <p:spPr>
+          <a:xfrm>
+            <a:off x="640080" y="1005840"/>
+            <a:ext cx="8229600" cy="320040"/>
+          </a:xfrm>
+          <a:prstGeom prst="rect">
+            <a:avLst/>
+          </a:prstGeom>
+          <a:noFill/>
+          <a:ln/>
+        </p:spPr>
+        <p:txBody>
+          <a:bodyPr wrap="square" rtlCol="0" anchor="ctr"/>
+          <a:lstStyle/>
+          <a:p>
+            <a:pPr indent="0" marL="0">
+              <a:buNone/>
+            </a:pPr>
+            <a:r>
+              <a:rPr lang="en-US" sz="1300" b="1" spc="300" kern="0" dirty="0">
+                <a:solidFill>
+                  <a:srgbClr val="B9852F"/>
+                </a:solidFill>
+                <a:latin typeface="Calibri" pitchFamily="34" charset="0"/>
+                <a:ea typeface="Calibri" pitchFamily="34" charset="-122"/>
+                <a:cs typeface="Calibri" pitchFamily="34" charset="-120"/>
+              </a:rPr>
+              <a:t>THE CHECK, AI CLOSED</a:t>
+            </a:r>
+            <a:endParaRPr lang="en-US" sz="1300" dirty="0"/>
+          </a:p>
+        </p:txBody>
+      </p:sp>
+      <p:sp>
+        <p:nvSpPr>
+          <p:cNvPr id="3" name="Text 1"/>
+          <p:cNvSpPr/>
+          <p:nvPr/>
+        </p:nvSpPr>
+        <p:spPr>
+          <a:xfrm>
+            <a:off x="640080" y="1645920"/>
+            <a:ext cx="8686800" cy="3108960"/>
+          </a:xfrm>
+          <a:prstGeom prst="rect">
+            <a:avLst/>
+          </a:prstGeom>
+          <a:noFill/>
+          <a:ln/>
+        </p:spPr>
+        <p:txBody>
+          <a:bodyPr wrap="square" rtlCol="0" anchor="t">
+            <a:spAutoFit/>
+          </a:bodyPr>
+          <a:lstStyle/>
+          <a:p>
+            <a:pPr indent="0" marL="0">
+              <a:lnSpc>
+                <a:spcPct val="115000"/>
+              </a:lnSpc>
+              <a:buNone/>
+            </a:pPr>
+            <a:r>
+              <a:rPr lang="en-US" sz="2600" dirty="0">
+                <a:solidFill>
+                  <a:srgbClr val="FFFFFF"/>
+                </a:solidFill>
+                <a:latin typeface="Cambria" pitchFamily="34" charset="0"/>
+                <a:ea typeface="Cambria" pitchFamily="34" charset="-122"/>
+                <a:cs typeface="Cambria" pitchFamily="34" charset="-120"/>
+              </a:rPr>
+              <a:t>Explain it: why two tokenizers split a sentence differently, and what your stemming choice changed. (Competencies 3, 5.)</a:t>
+            </a:r>
+            <a:endParaRPr lang="en-US" sz="2600" dirty="0"/>
+          </a:p>
+        </p:txBody>
+      </p:sp>
+      <p:sp>
+        <p:nvSpPr>
+          <p:cNvPr id="4" name="Text 2"/>
+          <p:cNvSpPr/>
+          <p:nvPr/>
+        </p:nvSpPr>
+        <p:spPr>
+          <a:xfrm>
+            <a:off x="640080" y="6126480"/>
+            <a:ext cx="7315200" cy="365760"/>
+          </a:xfrm>
+          <a:prstGeom prst="rect">
+            <a:avLst/>
+          </a:prstGeom>
+          <a:noFill/>
+          <a:ln/>
+        </p:spPr>
+        <p:txBody>
+          <a:bodyPr wrap="square" rtlCol="0" anchor="ctr"/>
+          <a:lstStyle/>
+          <a:p>
+            <a:pPr indent="0" marL="0">
+              <a:buNone/>
+            </a:pPr>
+            <a:r>
+              <a:rPr lang="en-US" sz="1200" dirty="0">
+                <a:solidFill>
+                  <a:srgbClr val="E8DCD6"/>
+                </a:solidFill>
+                <a:latin typeface="Calibri" pitchFamily="34" charset="0"/>
+                <a:ea typeface="Calibri" pitchFamily="34" charset="-122"/>
+                <a:cs typeface="Calibri" pitchFamily="34" charset="-120"/>
+              </a:rPr>
+              <a:t>Culture as Data  ·  Week 2</a:t>
+            </a:r>
+            <a:endParaRPr lang="en-US" sz="1200" dirty="0"/>
+          </a:p>
+        </p:txBody>
+      </p:sp>
+      <p:sp>
+        <p:nvSpPr>
+          <p:cNvPr id="5" name="Shape 3"/>
+          <p:cNvSpPr/>
+          <p:nvPr/>
+        </p:nvSpPr>
+        <p:spPr>
+          <a:xfrm>
+            <a:off x="11295847" y="5368090"/>
+            <a:ext cx="79937" cy="79937"/>
+          </a:xfrm>
+          <a:prstGeom prst="ellipse">
+            <a:avLst/>
+          </a:prstGeom>
+          <a:solidFill>
+            <a:srgbClr val="7A3B2E"/>
+          </a:solidFill>
+          <a:ln/>
+        </p:spPr>
+      </p:sp>
+      <p:sp>
+        <p:nvSpPr>
+          <p:cNvPr id="6" name="Shape 4"/>
+          <p:cNvSpPr/>
+          <p:nvPr/>
+        </p:nvSpPr>
+        <p:spPr>
+          <a:xfrm>
+            <a:off x="11348430" y="5402430"/>
+            <a:ext cx="71327" cy="71327"/>
+          </a:xfrm>
+          <a:prstGeom prst="ellipse">
+            <a:avLst/>
+          </a:prstGeom>
+          <a:solidFill>
+            <a:srgbClr val="3F6F5F"/>
+          </a:solidFill>
+          <a:ln/>
+        </p:spPr>
+      </p:sp>
+      <p:sp>
+        <p:nvSpPr>
+          <p:cNvPr id="7" name="Shape 5"/>
+          <p:cNvSpPr/>
+          <p:nvPr/>
+        </p:nvSpPr>
+        <p:spPr>
+          <a:xfrm>
+            <a:off x="9759326" y="5722309"/>
+            <a:ext cx="97642" cy="97642"/>
+          </a:xfrm>
+          <a:prstGeom prst="ellipse">
+            <a:avLst/>
+          </a:prstGeom>
+          <a:solidFill>
+            <a:srgbClr val="B9852F"/>
+          </a:solidFill>
+          <a:ln/>
+        </p:spPr>
+      </p:sp>
+      <p:sp>
+        <p:nvSpPr>
+          <p:cNvPr id="8" name="Shape 6"/>
+          <p:cNvSpPr/>
+          <p:nvPr/>
+        </p:nvSpPr>
+        <p:spPr>
+          <a:xfrm>
+            <a:off x="10155655" y="5314266"/>
+            <a:ext cx="72014" cy="72014"/>
+          </a:xfrm>
+          <a:prstGeom prst="ellipse">
+            <a:avLst/>
+          </a:prstGeom>
+          <a:solidFill>
+            <a:srgbClr val="7A3B2E"/>
+          </a:solidFill>
+          <a:ln/>
+        </p:spPr>
+      </p:sp>
+      <p:sp>
+        <p:nvSpPr>
+          <p:cNvPr id="9" name="Shape 7"/>
+          <p:cNvSpPr/>
+          <p:nvPr/>
+        </p:nvSpPr>
+        <p:spPr>
+          <a:xfrm>
+            <a:off x="11043898" y="4902202"/>
+            <a:ext cx="72167" cy="72167"/>
+          </a:xfrm>
+          <a:prstGeom prst="ellipse">
+            <a:avLst/>
+          </a:prstGeom>
+          <a:solidFill>
+            <a:srgbClr val="3F6F5F"/>
+          </a:solidFill>
+          <a:ln/>
+        </p:spPr>
+      </p:sp>
+      <p:sp>
+        <p:nvSpPr>
+          <p:cNvPr id="10" name="Shape 8"/>
+          <p:cNvSpPr/>
+          <p:nvPr/>
+        </p:nvSpPr>
+        <p:spPr>
+          <a:xfrm>
+            <a:off x="10930534" y="5210016"/>
+            <a:ext cx="66097" cy="66097"/>
+          </a:xfrm>
+          <a:prstGeom prst="ellipse">
+            <a:avLst/>
+          </a:prstGeom>
+          <a:solidFill>
+            <a:srgbClr val="B9852F"/>
+          </a:solidFill>
+          <a:ln/>
+        </p:spPr>
+      </p:sp>
+      <p:sp>
+        <p:nvSpPr>
+          <p:cNvPr id="11" name="Shape 9"/>
+          <p:cNvSpPr/>
+          <p:nvPr/>
+        </p:nvSpPr>
+        <p:spPr>
+          <a:xfrm>
+            <a:off x="10882363" y="5224248"/>
+            <a:ext cx="76664" cy="76664"/>
+          </a:xfrm>
+          <a:prstGeom prst="ellipse">
+            <a:avLst/>
+          </a:prstGeom>
+          <a:solidFill>
+            <a:srgbClr val="7A3B2E"/>
+          </a:solidFill>
+          <a:ln/>
+        </p:spPr>
+      </p:sp>
+      <p:sp>
+        <p:nvSpPr>
+          <p:cNvPr id="12" name="Shape 10"/>
+          <p:cNvSpPr/>
+          <p:nvPr/>
+        </p:nvSpPr>
+        <p:spPr>
+          <a:xfrm>
+            <a:off x="9405866" y="5668799"/>
+            <a:ext cx="71864" cy="71864"/>
+          </a:xfrm>
+          <a:prstGeom prst="ellipse">
+            <a:avLst/>
+          </a:prstGeom>
+          <a:solidFill>
+            <a:srgbClr val="3F6F5F"/>
+          </a:solidFill>
+          <a:ln/>
+        </p:spPr>
+      </p:sp>
+      <p:sp>
+        <p:nvSpPr>
+          <p:cNvPr id="13" name="Shape 11"/>
+          <p:cNvSpPr/>
+          <p:nvPr/>
+        </p:nvSpPr>
+        <p:spPr>
+          <a:xfrm>
+            <a:off x="10128162" y="5530208"/>
+            <a:ext cx="74557" cy="74557"/>
+          </a:xfrm>
+          <a:prstGeom prst="ellipse">
+            <a:avLst/>
+          </a:prstGeom>
+          <a:solidFill>
+            <a:srgbClr val="B9852F"/>
+          </a:solidFill>
+          <a:ln/>
+        </p:spPr>
+      </p:sp>
+      <p:sp>
+        <p:nvSpPr>
+          <p:cNvPr id="14" name="Shape 12"/>
+          <p:cNvSpPr/>
+          <p:nvPr/>
+        </p:nvSpPr>
+        <p:spPr>
+          <a:xfrm>
+            <a:off x="11555732" y="5532375"/>
+            <a:ext cx="52740" cy="52740"/>
+          </a:xfrm>
+          <a:prstGeom prst="ellipse">
+            <a:avLst/>
+          </a:prstGeom>
+          <a:solidFill>
+            <a:srgbClr val="7A3B2E"/>
+          </a:solidFill>
+          <a:ln/>
+        </p:spPr>
+      </p:sp>
+      <p:sp>
+        <p:nvSpPr>
+          <p:cNvPr id="15" name="Shape 13"/>
+          <p:cNvSpPr/>
+          <p:nvPr/>
+        </p:nvSpPr>
+        <p:spPr>
+          <a:xfrm>
+            <a:off x="9634734" y="4661840"/>
+            <a:ext cx="84135" cy="84135"/>
+          </a:xfrm>
+          <a:prstGeom prst="ellipse">
+            <a:avLst/>
+          </a:prstGeom>
+          <a:solidFill>
+            <a:srgbClr val="3F6F5F"/>
+          </a:solidFill>
+          <a:ln/>
+        </p:spPr>
+      </p:sp>
+      <p:sp>
+        <p:nvSpPr>
+          <p:cNvPr id="16" name="Shape 14"/>
+          <p:cNvSpPr/>
+          <p:nvPr/>
+        </p:nvSpPr>
+        <p:spPr>
+          <a:xfrm>
+            <a:off x="10552610" y="5379864"/>
+            <a:ext cx="81875" cy="81875"/>
+          </a:xfrm>
+          <a:prstGeom prst="ellipse">
+            <a:avLst/>
+          </a:prstGeom>
+          <a:solidFill>
+            <a:srgbClr val="B9852F"/>
+          </a:solidFill>
+          <a:ln/>
+        </p:spPr>
+      </p:sp>
+      <p:sp>
+        <p:nvSpPr>
+          <p:cNvPr id="17" name="Shape 15"/>
+          <p:cNvSpPr/>
+          <p:nvPr/>
+        </p:nvSpPr>
+        <p:spPr>
+          <a:xfrm>
+            <a:off x="10255520" y="4935626"/>
+            <a:ext cx="68820" cy="68820"/>
+          </a:xfrm>
+          <a:prstGeom prst="ellipse">
+            <a:avLst/>
+          </a:prstGeom>
+          <a:solidFill>
+            <a:srgbClr val="7A3B2E"/>
+          </a:solidFill>
+          <a:ln/>
+        </p:spPr>
+      </p:sp>
+      <p:sp>
+        <p:nvSpPr>
+          <p:cNvPr id="18" name="Shape 16"/>
+          <p:cNvSpPr/>
+          <p:nvPr/>
+        </p:nvSpPr>
+        <p:spPr>
+          <a:xfrm>
+            <a:off x="9810262" y="5790387"/>
+            <a:ext cx="67830" cy="67830"/>
+          </a:xfrm>
+          <a:prstGeom prst="ellipse">
+            <a:avLst/>
+          </a:prstGeom>
+          <a:solidFill>
+            <a:srgbClr val="3F6F5F"/>
+          </a:solidFill>
+          <a:ln/>
+        </p:spPr>
+      </p:sp>
+    </p:spTree>
+  </p:cSld>
+  <p:clrMapOvr>
+    <a:masterClrMapping/>
+  </p:clrMapOvr>
+</p:sld>
+</file>
+
 <file path=ppt/slides/slide2.xml><?xml version="1.0" encoding="utf-8"?>
 <p:sld xmlns:a="http://schemas.openxmlformats.org/drawingml/2006/main" xmlns:r="http://schemas.openxmlformats.org/officeDocument/2006/relationships" xmlns:p="http://schemas.openxmlformats.org/presentationml/2006/main">
   <p:cSld name="Slide 2">
@@ -2461,14 +4264,34 @@
       </p:grpSpPr>
       <p:sp>
         <p:nvSpPr>
-          <p:cNvPr id="2" name="Text 0"/>
-          <p:cNvSpPr/>
-          <p:nvPr/>
-        </p:nvSpPr>
-        <p:spPr>
-          <a:xfrm>
-            <a:off x="640080" y="731520"/>
-            <a:ext cx="10058400" cy="731520"/>
+          <p:cNvPr id="2" name="Shape 0"/>
+          <p:cNvSpPr/>
+          <p:nvPr/>
+        </p:nvSpPr>
+        <p:spPr>
+          <a:xfrm>
+            <a:off x="0" y="0"/>
+            <a:ext cx="164592" cy="6858000"/>
+          </a:xfrm>
+          <a:prstGeom prst="rect">
+            <a:avLst/>
+          </a:prstGeom>
+          <a:solidFill>
+            <a:srgbClr val="7A3B2E"/>
+          </a:solidFill>
+          <a:ln/>
+        </p:spPr>
+      </p:sp>
+      <p:sp>
+        <p:nvSpPr>
+          <p:cNvPr id="3" name="Text 1"/>
+          <p:cNvSpPr/>
+          <p:nvPr/>
+        </p:nvSpPr>
+        <p:spPr>
+          <a:xfrm>
+            <a:off x="640080" y="640080"/>
+            <a:ext cx="10058400" cy="320040"/>
           </a:xfrm>
           <a:prstGeom prst="rect">
             <a:avLst/>
@@ -2478,6 +4301,47 @@
         </p:spPr>
         <p:txBody>
           <a:bodyPr wrap="square" rtlCol="0" anchor="ctr"/>
+          <a:lstStyle/>
+          <a:p>
+            <a:pPr indent="0" marL="0">
+              <a:buNone/>
+            </a:pPr>
+            <a:r>
+              <a:rPr lang="en-US" sz="1200" b="1" spc="300" kern="0" dirty="0">
+                <a:solidFill>
+                  <a:srgbClr val="7A3B2E"/>
+                </a:solidFill>
+                <a:latin typeface="Calibri" pitchFamily="34" charset="0"/>
+                <a:ea typeface="Calibri" pitchFamily="34" charset="-122"/>
+                <a:cs typeface="Calibri" pitchFamily="34" charset="-120"/>
+              </a:rPr>
+              <a:t>WEEK 2 · THE MATERIAL</a:t>
+            </a:r>
+            <a:endParaRPr lang="en-US" sz="1200" dirty="0"/>
+          </a:p>
+        </p:txBody>
+      </p:sp>
+      <p:sp>
+        <p:nvSpPr>
+          <p:cNvPr id="4" name="Text 2"/>
+          <p:cNvSpPr/>
+          <p:nvPr/>
+        </p:nvSpPr>
+        <p:spPr>
+          <a:xfrm>
+            <a:off x="640080" y="1005840"/>
+            <a:ext cx="10881360" cy="914400"/>
+          </a:xfrm>
+          <a:prstGeom prst="rect">
+            <a:avLst/>
+          </a:prstGeom>
+          <a:noFill/>
+          <a:ln/>
+        </p:spPr>
+        <p:txBody>
+          <a:bodyPr wrap="square" rtlCol="0" anchor="t">
+            <a:spAutoFit/>
+          </a:bodyPr>
           <a:lstStyle/>
           <a:p>
             <a:pPr indent="0" marL="0">
@@ -2492,7 +4356,7 @@
                 <a:ea typeface="Cambria" pitchFamily="34" charset="-122"/>
                 <a:cs typeface="Cambria" pitchFamily="34" charset="-120"/>
               </a:rPr>
-              <a:t>Three modes today</a:t>
+              <a:t>The trial: Bollen et al. v. Schmidt</a:t>
             </a:r>
             <a:endParaRPr lang="en-US" sz="3000" dirty="0"/>
           </a:p>
@@ -2500,134 +4364,98 @@
       </p:sp>
       <p:sp>
         <p:nvSpPr>
-          <p:cNvPr id="3" name="Text 1"/>
-          <p:cNvSpPr/>
-          <p:nvPr/>
-        </p:nvSpPr>
-        <p:spPr>
-          <a:xfrm>
-            <a:off x="640080" y="1417320"/>
-            <a:ext cx="10058400" cy="365760"/>
-          </a:xfrm>
-          <a:prstGeom prst="rect">
-            <a:avLst/>
-          </a:prstGeom>
-          <a:noFill/>
-          <a:ln/>
-        </p:spPr>
-        <p:txBody>
-          <a:bodyPr wrap="square" rtlCol="0" anchor="ctr"/>
+          <p:cNvPr id="5" name="Shape 3"/>
+          <p:cNvSpPr/>
+          <p:nvPr/>
+        </p:nvSpPr>
+        <p:spPr>
+          <a:xfrm>
+            <a:off x="640080" y="2331720"/>
+            <a:ext cx="201168" cy="201168"/>
+          </a:xfrm>
+          <a:prstGeom prst="ellipse">
+            <a:avLst/>
+          </a:prstGeom>
+          <a:solidFill>
+            <a:srgbClr val="7A3B2E"/>
+          </a:solidFill>
+          <a:ln/>
+        </p:spPr>
+      </p:sp>
+      <p:sp>
+        <p:nvSpPr>
+          <p:cNvPr id="6" name="Text 4"/>
+          <p:cNvSpPr/>
+          <p:nvPr/>
+        </p:nvSpPr>
+        <p:spPr>
+          <a:xfrm>
+            <a:off x="1097280" y="2240280"/>
+            <a:ext cx="10607040" cy="1017270"/>
+          </a:xfrm>
+          <a:prstGeom prst="rect">
+            <a:avLst/>
+          </a:prstGeom>
+          <a:noFill/>
+          <a:ln/>
+        </p:spPr>
+        <p:txBody>
+          <a:bodyPr wrap="square" rtlCol="0" anchor="t">
+            <a:spAutoFit/>
+          </a:bodyPr>
           <a:lstStyle/>
           <a:p>
             <a:pPr indent="0" marL="0">
-              <a:buNone/>
-            </a:pPr>
-            <a:r>
-              <a:rPr lang="en-US" sz="1400" i="1" dirty="0">
-                <a:solidFill>
-                  <a:srgbClr val="6B6B63"/>
+              <a:lnSpc>
+                <a:spcPct val="112000"/>
+              </a:lnSpc>
+              <a:buNone/>
+            </a:pPr>
+            <a:r>
+              <a:rPr lang="en-US" sz="1650" dirty="0">
+                <a:solidFill>
+                  <a:srgbClr val="1A1A1A"/>
                 </a:solidFill>
                 <a:latin typeface="Calibri" pitchFamily="34" charset="0"/>
                 <a:ea typeface="Calibri" pitchFamily="34" charset="-122"/>
                 <a:cs typeface="Calibri" pitchFamily="34" charset="-120"/>
               </a:rPr>
-              <a:t>about a third of the session each</a:t>
-            </a:r>
-            <a:endParaRPr lang="en-US" sz="1400" dirty="0"/>
-          </a:p>
-        </p:txBody>
-      </p:sp>
-      <p:sp>
-        <p:nvSpPr>
-          <p:cNvPr id="4" name="Shape 2"/>
-          <p:cNvSpPr/>
-          <p:nvPr/>
-        </p:nvSpPr>
-        <p:spPr>
-          <a:xfrm>
-            <a:off x="640080" y="2194560"/>
-            <a:ext cx="3383280" cy="3291840"/>
-          </a:xfrm>
-          <a:prstGeom prst="roundRect">
-            <a:avLst>
-              <a:gd name="adj" fmla="val 3333"/>
-            </a:avLst>
-          </a:prstGeom>
-          <a:solidFill>
-            <a:srgbClr val="F4EEE8"/>
-          </a:solidFill>
-          <a:ln/>
-        </p:spPr>
-      </p:sp>
-      <p:sp>
-        <p:nvSpPr>
-          <p:cNvPr id="5" name="Shape 3"/>
-          <p:cNvSpPr/>
-          <p:nvPr/>
-        </p:nvSpPr>
-        <p:spPr>
-          <a:xfrm>
-            <a:off x="1051560" y="2606040"/>
-            <a:ext cx="548640" cy="548640"/>
+              <a:t>The claim (PNAS 2021): phrases of distorted thinking ("I am a failure," "everyone hates me") surge in Google Books after 2000. A hockey stick.</a:t>
+            </a:r>
+            <a:endParaRPr lang="en-US" sz="1650" dirty="0"/>
+          </a:p>
+        </p:txBody>
+      </p:sp>
+      <p:sp>
+        <p:nvSpPr>
+          <p:cNvPr id="7" name="Shape 5"/>
+          <p:cNvSpPr/>
+          <p:nvPr/>
+        </p:nvSpPr>
+        <p:spPr>
+          <a:xfrm>
+            <a:off x="640080" y="3348990"/>
+            <a:ext cx="201168" cy="201168"/>
           </a:xfrm>
           <a:prstGeom prst="ellipse">
             <a:avLst/>
           </a:prstGeom>
           <a:solidFill>
-            <a:srgbClr val="7A3B2E"/>
-          </a:solidFill>
-          <a:ln/>
-        </p:spPr>
-      </p:sp>
-      <p:sp>
-        <p:nvSpPr>
-          <p:cNvPr id="6" name="Text 4"/>
-          <p:cNvSpPr/>
-          <p:nvPr/>
-        </p:nvSpPr>
-        <p:spPr>
-          <a:xfrm>
-            <a:off x="1005840" y="3383280"/>
-            <a:ext cx="2651760" cy="548640"/>
-          </a:xfrm>
-          <a:prstGeom prst="rect">
-            <a:avLst/>
-          </a:prstGeom>
-          <a:noFill/>
-          <a:ln/>
-        </p:spPr>
-        <p:txBody>
-          <a:bodyPr wrap="square" rtlCol="0" anchor="ctr"/>
-          <a:lstStyle/>
-          <a:p>
-            <a:pPr indent="0" marL="0">
-              <a:buNone/>
-            </a:pPr>
-            <a:r>
-              <a:rPr lang="en-US" sz="2100" b="1" dirty="0">
-                <a:solidFill>
-                  <a:srgbClr val="1A1A1A"/>
-                </a:solidFill>
-                <a:latin typeface="Cambria" pitchFamily="34" charset="0"/>
-                <a:ea typeface="Cambria" pitchFamily="34" charset="-122"/>
-                <a:cs typeface="Cambria" pitchFamily="34" charset="-120"/>
-              </a:rPr>
-              <a:t>Lecture / demo</a:t>
-            </a:r>
-            <a:endParaRPr lang="en-US" sz="2100" dirty="0"/>
-          </a:p>
-        </p:txBody>
-      </p:sp>
-      <p:sp>
-        <p:nvSpPr>
-          <p:cNvPr id="7" name="Text 5"/>
-          <p:cNvSpPr/>
-          <p:nvPr/>
-        </p:nvSpPr>
-        <p:spPr>
-          <a:xfrm>
-            <a:off x="1005840" y="3977640"/>
-            <a:ext cx="2651760" cy="1371600"/>
+            <a:srgbClr val="3F6F5F"/>
+          </a:solidFill>
+          <a:ln/>
+        </p:spPr>
+      </p:sp>
+      <p:sp>
+        <p:nvSpPr>
+          <p:cNvPr id="8" name="Text 6"/>
+          <p:cNvSpPr/>
+          <p:nvPr/>
+        </p:nvSpPr>
+        <p:spPr>
+          <a:xfrm>
+            <a:off x="1097280" y="3257550"/>
+            <a:ext cx="10607040" cy="1017270"/>
           </a:xfrm>
           <a:prstGeom prst="rect">
             <a:avLst/>
@@ -2643,12 +4471,12 @@
           <a:p>
             <a:pPr indent="0" marL="0">
               <a:lnSpc>
-                <a:spcPct val="115000"/>
+                <a:spcPct val="112000"/>
               </a:lnSpc>
               <a:buNone/>
             </a:pPr>
             <a:r>
-              <a:rPr lang="en-US" sz="1500" dirty="0">
+              <a:rPr lang="en-US" sz="1650" dirty="0">
                 <a:solidFill>
                   <a:srgbClr val="1A1A1A"/>
                 </a:solidFill>
@@ -2656,33 +4484,11 @@
                 <a:ea typeface="Calibri" pitchFamily="34" charset="-122"/>
                 <a:cs typeface="Calibri" pitchFamily="34" charset="-120"/>
               </a:rPr>
-              <a:t>Advanced counting: baselines, keyness, and the shuffle test</a:t>
-            </a:r>
-            <a:endParaRPr lang="en-US" sz="1500" dirty="0"/>
-          </a:p>
-        </p:txBody>
-      </p:sp>
-      <p:sp>
-        <p:nvSpPr>
-          <p:cNvPr id="8" name="Shape 6"/>
-          <p:cNvSpPr/>
-          <p:nvPr/>
-        </p:nvSpPr>
-        <p:spPr>
-          <a:xfrm>
-            <a:off x="4526280" y="2194560"/>
-            <a:ext cx="3383280" cy="3291840"/>
-          </a:xfrm>
-          <a:prstGeom prst="roundRect">
-            <a:avLst>
-              <a:gd name="adj" fmla="val 3333"/>
-            </a:avLst>
-          </a:prstGeom>
-          <a:solidFill>
-            <a:srgbClr val="F4EEE8"/>
-          </a:solidFill>
-          <a:ln/>
-        </p:spPr>
+              <a:t>The objection: Google scanned more fiction after 2000. Maybe the surge is novels, not distress.</a:t>
+            </a:r>
+            <a:endParaRPr lang="en-US" sz="1650" dirty="0"/>
+          </a:p>
+        </p:txBody>
       </p:sp>
       <p:sp>
         <p:nvSpPr>
@@ -2692,14 +4498,14 @@
         </p:nvSpPr>
         <p:spPr>
           <a:xfrm>
-            <a:off x="4937760" y="2606040"/>
-            <a:ext cx="548640" cy="548640"/>
+            <a:off x="640080" y="4366260"/>
+            <a:ext cx="201168" cy="201168"/>
           </a:xfrm>
           <a:prstGeom prst="ellipse">
             <a:avLst/>
           </a:prstGeom>
           <a:solidFill>
-            <a:srgbClr val="3F6F5F"/>
+            <a:srgbClr val="B9852F"/>
           </a:solidFill>
           <a:ln/>
         </p:spPr>
@@ -2712,47 +4518,8 @@
         </p:nvSpPr>
         <p:spPr>
           <a:xfrm>
-            <a:off x="4892040" y="3383280"/>
-            <a:ext cx="2651760" cy="548640"/>
-          </a:xfrm>
-          <a:prstGeom prst="rect">
-            <a:avLst/>
-          </a:prstGeom>
-          <a:noFill/>
-          <a:ln/>
-        </p:spPr>
-        <p:txBody>
-          <a:bodyPr wrap="square" rtlCol="0" anchor="ctr"/>
-          <a:lstStyle/>
-          <a:p>
-            <a:pPr indent="0" marL="0">
-              <a:buNone/>
-            </a:pPr>
-            <a:r>
-              <a:rPr lang="en-US" sz="2100" b="1" dirty="0">
-                <a:solidFill>
-                  <a:srgbClr val="1A1A1A"/>
-                </a:solidFill>
-                <a:latin typeface="Cambria" pitchFamily="34" charset="0"/>
-                <a:ea typeface="Cambria" pitchFamily="34" charset="-122"/>
-                <a:cs typeface="Cambria" pitchFamily="34" charset="-120"/>
-              </a:rPr>
-              <a:t>Workshop</a:t>
-            </a:r>
-            <a:endParaRPr lang="en-US" sz="2100" dirty="0"/>
-          </a:p>
-        </p:txBody>
-      </p:sp>
-      <p:sp>
-        <p:nvSpPr>
-          <p:cNvPr id="11" name="Text 9"/>
-          <p:cNvSpPr/>
-          <p:nvPr/>
-        </p:nvSpPr>
-        <p:spPr>
-          <a:xfrm>
-            <a:off x="4892040" y="3977640"/>
-            <a:ext cx="2651760" cy="1371600"/>
+            <a:off x="1097280" y="4274820"/>
+            <a:ext cx="10607040" cy="1017270"/>
           </a:xfrm>
           <a:prstGeom prst="rect">
             <a:avLst/>
@@ -2768,12 +4535,12 @@
           <a:p>
             <a:pPr indent="0" marL="0">
               <a:lnSpc>
-                <a:spcPct val="115000"/>
+                <a:spcPct val="112000"/>
               </a:lnSpc>
               <a:buNone/>
             </a:pPr>
             <a:r>
-              <a:rPr lang="en-US" sz="1500" dirty="0">
+              <a:rPr lang="en-US" sz="1650" dirty="0">
                 <a:solidFill>
                   <a:srgbClr val="1A1A1A"/>
                 </a:solidFill>
@@ -2781,103 +4548,42 @@
                 <a:ea typeface="Calibri" pitchFamily="34" charset="-122"/>
                 <a:cs typeface="Calibri" pitchFamily="34" charset="-120"/>
               </a:rPr>
-              <a:t>Build hands-on on your own data.</a:t>
-            </a:r>
-            <a:endParaRPr lang="en-US" sz="1500" dirty="0"/>
-          </a:p>
-        </p:txBody>
-      </p:sp>
-      <p:sp>
-        <p:nvSpPr>
-          <p:cNvPr id="12" name="Shape 10"/>
-          <p:cNvSpPr/>
-          <p:nvPr/>
-        </p:nvSpPr>
-        <p:spPr>
-          <a:xfrm>
-            <a:off x="8412480" y="2194560"/>
-            <a:ext cx="3383280" cy="3291840"/>
-          </a:xfrm>
-          <a:prstGeom prst="roundRect">
-            <a:avLst>
-              <a:gd name="adj" fmla="val 3333"/>
-            </a:avLst>
-          </a:prstGeom>
-          <a:solidFill>
-            <a:srgbClr val="F4EEE8"/>
-          </a:solidFill>
-          <a:ln/>
-        </p:spPr>
-      </p:sp>
-      <p:sp>
-        <p:nvSpPr>
-          <p:cNvPr id="13" name="Shape 11"/>
-          <p:cNvSpPr/>
-          <p:nvPr/>
-        </p:nvSpPr>
-        <p:spPr>
-          <a:xfrm>
-            <a:off x="8823960" y="2606040"/>
-            <a:ext cx="548640" cy="548640"/>
+              <a:t>The rebuttal: the authors deleted the entire fiction corpus and re-ran the analysis. The pattern largely held.</a:t>
+            </a:r>
+            <a:endParaRPr lang="en-US" sz="1650" dirty="0"/>
+          </a:p>
+        </p:txBody>
+      </p:sp>
+      <p:sp>
+        <p:nvSpPr>
+          <p:cNvPr id="11" name="Shape 9"/>
+          <p:cNvSpPr/>
+          <p:nvPr/>
+        </p:nvSpPr>
+        <p:spPr>
+          <a:xfrm>
+            <a:off x="640080" y="5383530"/>
+            <a:ext cx="201168" cy="201168"/>
           </a:xfrm>
           <a:prstGeom prst="ellipse">
             <a:avLst/>
           </a:prstGeom>
           <a:solidFill>
-            <a:srgbClr val="B9852F"/>
-          </a:solidFill>
-          <a:ln/>
-        </p:spPr>
-      </p:sp>
-      <p:sp>
-        <p:nvSpPr>
-          <p:cNvPr id="14" name="Text 12"/>
-          <p:cNvSpPr/>
-          <p:nvPr/>
-        </p:nvSpPr>
-        <p:spPr>
-          <a:xfrm>
-            <a:off x="8778240" y="3383280"/>
-            <a:ext cx="2651760" cy="548640"/>
-          </a:xfrm>
-          <a:prstGeom prst="rect">
-            <a:avLst/>
-          </a:prstGeom>
-          <a:noFill/>
-          <a:ln/>
-        </p:spPr>
-        <p:txBody>
-          <a:bodyPr wrap="square" rtlCol="0" anchor="ctr"/>
-          <a:lstStyle/>
-          <a:p>
-            <a:pPr indent="0" marL="0">
-              <a:buNone/>
-            </a:pPr>
-            <a:r>
-              <a:rPr lang="en-US" sz="2100" b="1" dirty="0">
-                <a:solidFill>
-                  <a:srgbClr val="1A1A1A"/>
-                </a:solidFill>
-                <a:latin typeface="Cambria" pitchFamily="34" charset="0"/>
-                <a:ea typeface="Cambria" pitchFamily="34" charset="-122"/>
-                <a:cs typeface="Cambria" pitchFamily="34" charset="-120"/>
-              </a:rPr>
-              <a:t>Discussion</a:t>
-            </a:r>
-            <a:endParaRPr lang="en-US" sz="2100" dirty="0"/>
-          </a:p>
-        </p:txBody>
-      </p:sp>
-      <p:sp>
-        <p:nvSpPr>
-          <p:cNvPr id="15" name="Text 13"/>
-          <p:cNvSpPr/>
-          <p:nvPr/>
-        </p:nvSpPr>
-        <p:spPr>
-          <a:xfrm>
-            <a:off x="8778240" y="3977640"/>
-            <a:ext cx="2651760" cy="1371600"/>
+            <a:srgbClr val="7A3B2E"/>
+          </a:solidFill>
+          <a:ln/>
+        </p:spPr>
+      </p:sp>
+      <p:sp>
+        <p:nvSpPr>
+          <p:cNvPr id="12" name="Text 10"/>
+          <p:cNvSpPr/>
+          <p:nvPr/>
+        </p:nvSpPr>
+        <p:spPr>
+          <a:xfrm>
+            <a:off x="1097280" y="5292090"/>
+            <a:ext cx="10607040" cy="1017270"/>
           </a:xfrm>
           <a:prstGeom prst="rect">
             <a:avLst/>
@@ -2893,12 +4599,12 @@
           <a:p>
             <a:pPr indent="0" marL="0">
               <a:lnSpc>
-                <a:spcPct val="115000"/>
+                <a:spcPct val="112000"/>
               </a:lnSpc>
               <a:buNone/>
             </a:pPr>
             <a:r>
-              <a:rPr lang="en-US" sz="1500" dirty="0">
+              <a:rPr lang="en-US" sz="1650" dirty="0">
                 <a:solidFill>
                   <a:srgbClr val="1A1A1A"/>
                 </a:solidFill>
@@ -2906,9 +4612,9 @@
                 <a:ea typeface="Calibri" pitchFamily="34" charset="-122"/>
                 <a:cs typeface="Calibri" pitchFamily="34" charset="-120"/>
               </a:rPr>
-              <a:t>Interrogate the study, debate it, or critique each other's work.</a:t>
-            </a:r>
-            <a:endParaRPr lang="en-US" sz="1500" dirty="0"/>
+              <a:t>The move to steal: answer "your corpus is biased" with a test, not an argument.</a:t>
+            </a:r>
+            <a:endParaRPr lang="en-US" sz="1650" dirty="0"/>
           </a:p>
         </p:txBody>
       </p:sp>
@@ -2946,14 +4652,34 @@
       </p:grpSpPr>
       <p:sp>
         <p:nvSpPr>
-          <p:cNvPr id="2" name="Text 0"/>
+          <p:cNvPr id="2" name="Shape 0"/>
+          <p:cNvSpPr/>
+          <p:nvPr/>
+        </p:nvSpPr>
+        <p:spPr>
+          <a:xfrm>
+            <a:off x="0" y="0"/>
+            <a:ext cx="164592" cy="6858000"/>
+          </a:xfrm>
+          <a:prstGeom prst="rect">
+            <a:avLst/>
+          </a:prstGeom>
+          <a:solidFill>
+            <a:srgbClr val="3F6F5F"/>
+          </a:solidFill>
+          <a:ln/>
+        </p:spPr>
+      </p:sp>
+      <p:sp>
+        <p:nvSpPr>
+          <p:cNvPr id="3" name="Text 1"/>
           <p:cNvSpPr/>
           <p:nvPr/>
         </p:nvSpPr>
         <p:spPr>
           <a:xfrm>
             <a:off x="640080" y="640080"/>
-            <a:ext cx="10058400" cy="731520"/>
+            <a:ext cx="10058400" cy="320040"/>
           </a:xfrm>
           <a:prstGeom prst="rect">
             <a:avLst/>
@@ -2963,6 +4689,47 @@
         </p:spPr>
         <p:txBody>
           <a:bodyPr wrap="square" rtlCol="0" anchor="ctr"/>
+          <a:lstStyle/>
+          <a:p>
+            <a:pPr indent="0" marL="0">
+              <a:buNone/>
+            </a:pPr>
+            <a:r>
+              <a:rPr lang="en-US" sz="1200" b="1" spc="300" kern="0" dirty="0">
+                <a:solidFill>
+                  <a:srgbClr val="3F6F5F"/>
+                </a:solidFill>
+                <a:latin typeface="Calibri" pitchFamily="34" charset="0"/>
+                <a:ea typeface="Calibri" pitchFamily="34" charset="-122"/>
+                <a:cs typeface="Calibri" pitchFamily="34" charset="-120"/>
+              </a:rPr>
+              <a:t>WEEK 2 · THE MATERIAL</a:t>
+            </a:r>
+            <a:endParaRPr lang="en-US" sz="1200" dirty="0"/>
+          </a:p>
+        </p:txBody>
+      </p:sp>
+      <p:sp>
+        <p:nvSpPr>
+          <p:cNvPr id="4" name="Text 2"/>
+          <p:cNvSpPr/>
+          <p:nvPr/>
+        </p:nvSpPr>
+        <p:spPr>
+          <a:xfrm>
+            <a:off x="640080" y="1005840"/>
+            <a:ext cx="10881360" cy="914400"/>
+          </a:xfrm>
+          <a:prstGeom prst="rect">
+            <a:avLst/>
+          </a:prstGeom>
+          <a:noFill/>
+          <a:ln/>
+        </p:spPr>
+        <p:txBody>
+          <a:bodyPr wrap="square" rtlCol="0" anchor="t">
+            <a:spAutoFit/>
+          </a:bodyPr>
           <a:lstStyle/>
           <a:p>
             <a:pPr indent="0" marL="0">
@@ -2977,7 +4744,7 @@
                 <a:ea typeface="Cambria" pitchFamily="34" charset="-122"/>
                 <a:cs typeface="Cambria" pitchFamily="34" charset="-120"/>
               </a:rPr>
-              <a:t>The session</a:t>
+              <a:t>What counts as a word?</a:t>
             </a:r>
             <a:endParaRPr lang="en-US" sz="3000" dirty="0"/>
           </a:p>
@@ -2985,19 +4752,17 @@
       </p:sp>
       <p:sp>
         <p:nvSpPr>
-          <p:cNvPr id="3" name="Shape 1"/>
-          <p:cNvSpPr/>
-          <p:nvPr/>
-        </p:nvSpPr>
-        <p:spPr>
-          <a:xfrm>
-            <a:off x="640080" y="1572768"/>
-            <a:ext cx="868680" cy="338328"/>
-          </a:xfrm>
-          <a:prstGeom prst="roundRect">
-            <a:avLst>
-              <a:gd name="adj" fmla="val 16216"/>
-            </a:avLst>
+          <p:cNvPr id="5" name="Shape 3"/>
+          <p:cNvSpPr/>
+          <p:nvPr/>
+        </p:nvSpPr>
+        <p:spPr>
+          <a:xfrm>
+            <a:off x="640080" y="2331720"/>
+            <a:ext cx="201168" cy="201168"/>
+          </a:xfrm>
+          <a:prstGeom prst="ellipse">
+            <a:avLst/>
           </a:prstGeom>
           <a:solidFill>
             <a:srgbClr val="7A3B2E"/>
@@ -3007,71 +4772,99 @@
       </p:sp>
       <p:sp>
         <p:nvSpPr>
-          <p:cNvPr id="4" name="Text 2"/>
-          <p:cNvSpPr/>
-          <p:nvPr/>
-        </p:nvSpPr>
-        <p:spPr>
-          <a:xfrm>
-            <a:off x="640080" y="1572768"/>
-            <a:ext cx="868680" cy="338328"/>
-          </a:xfrm>
-          <a:prstGeom prst="rect">
-            <a:avLst/>
-          </a:prstGeom>
-          <a:noFill/>
-          <a:ln/>
-        </p:spPr>
-        <p:txBody>
-          <a:bodyPr wrap="square" rtlCol="0" anchor="ctr"/>
-          <a:lstStyle/>
-          <a:p>
-            <a:pPr algn="ctr" indent="0" marL="0">
-              <a:buNone/>
-            </a:pPr>
-            <a:r>
-              <a:rPr lang="en-US" sz="1100" b="1" dirty="0">
-                <a:solidFill>
-                  <a:srgbClr val="FFFFFF"/>
+          <p:cNvPr id="6" name="Text 4"/>
+          <p:cNvSpPr/>
+          <p:nvPr/>
+        </p:nvSpPr>
+        <p:spPr>
+          <a:xfrm>
+            <a:off x="1097280" y="2240280"/>
+            <a:ext cx="10607040" cy="1017270"/>
+          </a:xfrm>
+          <a:prstGeom prst="rect">
+            <a:avLst/>
+          </a:prstGeom>
+          <a:noFill/>
+          <a:ln/>
+        </p:spPr>
+        <p:txBody>
+          <a:bodyPr wrap="square" rtlCol="0" anchor="t">
+            <a:spAutoFit/>
+          </a:bodyPr>
+          <a:lstStyle/>
+          <a:p>
+            <a:pPr indent="0" marL="0">
+              <a:lnSpc>
+                <a:spcPct val="112000"/>
+              </a:lnSpc>
+              <a:buNone/>
+            </a:pPr>
+            <a:r>
+              <a:rPr lang="en-US" sz="1650" dirty="0">
+                <a:solidFill>
+                  <a:srgbClr val="1A1A1A"/>
                 </a:solidFill>
                 <a:latin typeface="Calibri" pitchFamily="34" charset="0"/>
                 <a:ea typeface="Calibri" pitchFamily="34" charset="-122"/>
                 <a:cs typeface="Calibri" pitchFamily="34" charset="-120"/>
               </a:rPr>
-              <a:t>0:00</a:t>
-            </a:r>
-            <a:endParaRPr lang="en-US" sz="1100" dirty="0"/>
-          </a:p>
-        </p:txBody>
-      </p:sp>
-      <p:sp>
-        <p:nvSpPr>
-          <p:cNvPr id="5" name="Text 3"/>
-          <p:cNvSpPr/>
-          <p:nvPr/>
-        </p:nvSpPr>
-        <p:spPr>
-          <a:xfrm>
-            <a:off x="1691640" y="1554480"/>
-            <a:ext cx="9646920" cy="448056"/>
-          </a:xfrm>
-          <a:prstGeom prst="rect">
-            <a:avLst/>
-          </a:prstGeom>
-          <a:noFill/>
-          <a:ln/>
-        </p:spPr>
-        <p:txBody>
-          <a:bodyPr wrap="square" rtlCol="0" anchor="ctr">
+              <a:t>Two tokenizers shatter the same sentence differently: "don't" becomes one chip, two, or three.</a:t>
+            </a:r>
+            <a:endParaRPr lang="en-US" sz="1650" dirty="0"/>
+          </a:p>
+        </p:txBody>
+      </p:sp>
+      <p:sp>
+        <p:nvSpPr>
+          <p:cNvPr id="7" name="Shape 5"/>
+          <p:cNvSpPr/>
+          <p:nvPr/>
+        </p:nvSpPr>
+        <p:spPr>
+          <a:xfrm>
+            <a:off x="640080" y="3348990"/>
+            <a:ext cx="201168" cy="201168"/>
+          </a:xfrm>
+          <a:prstGeom prst="ellipse">
+            <a:avLst/>
+          </a:prstGeom>
+          <a:solidFill>
+            <a:srgbClr val="3F6F5F"/>
+          </a:solidFill>
+          <a:ln/>
+        </p:spPr>
+      </p:sp>
+      <p:sp>
+        <p:nvSpPr>
+          <p:cNvPr id="8" name="Text 6"/>
+          <p:cNvSpPr/>
+          <p:nvPr/>
+        </p:nvSpPr>
+        <p:spPr>
+          <a:xfrm>
+            <a:off x="1097280" y="3257550"/>
+            <a:ext cx="10607040" cy="1017270"/>
+          </a:xfrm>
+          <a:prstGeom prst="rect">
+            <a:avLst/>
+          </a:prstGeom>
+          <a:noFill/>
+          <a:ln/>
+        </p:spPr>
+        <p:txBody>
+          <a:bodyPr wrap="square" rtlCol="0" anchor="t">
             <a:spAutoFit/>
           </a:bodyPr>
           <a:lstStyle/>
           <a:p>
             <a:pPr indent="0" marL="0">
-              <a:buNone/>
-            </a:pPr>
-            <a:r>
-              <a:rPr lang="en-US" sz="1100" dirty="0">
+              <a:lnSpc>
+                <a:spcPct val="112000"/>
+              </a:lnSpc>
+              <a:buNone/>
+            </a:pPr>
+            <a:r>
+              <a:rPr lang="en-US" sz="1650" dirty="0">
                 <a:solidFill>
                   <a:srgbClr val="1A1A1A"/>
                 </a:solidFill>
@@ -3079,101 +4872,127 @@
                 <a:ea typeface="Calibri" pitchFamily="34" charset="-122"/>
                 <a:cs typeface="Calibri" pitchFamily="34" charset="-120"/>
               </a:rPr>
-              <a:t>Warm-up retrieval.</a:t>
-            </a:r>
-            <a:endParaRPr lang="en-US" sz="1100" dirty="0"/>
-          </a:p>
-        </p:txBody>
-      </p:sp>
-      <p:sp>
-        <p:nvSpPr>
-          <p:cNvPr id="6" name="Shape 4"/>
-          <p:cNvSpPr/>
-          <p:nvPr/>
-        </p:nvSpPr>
-        <p:spPr>
-          <a:xfrm>
-            <a:off x="640080" y="2020824"/>
-            <a:ext cx="868680" cy="338328"/>
-          </a:xfrm>
-          <a:prstGeom prst="roundRect">
-            <a:avLst>
-              <a:gd name="adj" fmla="val 16216"/>
-            </a:avLst>
-          </a:prstGeom>
-          <a:solidFill>
-            <a:srgbClr val="7A3B2E"/>
-          </a:solidFill>
-          <a:ln/>
-        </p:spPr>
-      </p:sp>
-      <p:sp>
-        <p:nvSpPr>
-          <p:cNvPr id="7" name="Text 5"/>
-          <p:cNvSpPr/>
-          <p:nvPr/>
-        </p:nvSpPr>
-        <p:spPr>
-          <a:xfrm>
-            <a:off x="640080" y="2020824"/>
-            <a:ext cx="868680" cy="338328"/>
-          </a:xfrm>
-          <a:prstGeom prst="rect">
-            <a:avLst/>
-          </a:prstGeom>
-          <a:noFill/>
-          <a:ln/>
-        </p:spPr>
-        <p:txBody>
-          <a:bodyPr wrap="square" rtlCol="0" anchor="ctr"/>
-          <a:lstStyle/>
-          <a:p>
-            <a:pPr algn="ctr" indent="0" marL="0">
-              <a:buNone/>
-            </a:pPr>
-            <a:r>
-              <a:rPr lang="en-US" sz="1100" b="1" dirty="0">
-                <a:solidFill>
-                  <a:srgbClr val="FFFFFF"/>
+              <a:t>Models never see words. They see tokens, and the split is a design decision.</a:t>
+            </a:r>
+            <a:endParaRPr lang="en-US" sz="1650" dirty="0"/>
+          </a:p>
+        </p:txBody>
+      </p:sp>
+      <p:sp>
+        <p:nvSpPr>
+          <p:cNvPr id="9" name="Shape 7"/>
+          <p:cNvSpPr/>
+          <p:nvPr/>
+        </p:nvSpPr>
+        <p:spPr>
+          <a:xfrm>
+            <a:off x="640080" y="4366260"/>
+            <a:ext cx="201168" cy="201168"/>
+          </a:xfrm>
+          <a:prstGeom prst="ellipse">
+            <a:avLst/>
+          </a:prstGeom>
+          <a:solidFill>
+            <a:srgbClr val="B9852F"/>
+          </a:solidFill>
+          <a:ln/>
+        </p:spPr>
+      </p:sp>
+      <p:sp>
+        <p:nvSpPr>
+          <p:cNvPr id="10" name="Text 8"/>
+          <p:cNvSpPr/>
+          <p:nvPr/>
+        </p:nvSpPr>
+        <p:spPr>
+          <a:xfrm>
+            <a:off x="1097280" y="4274820"/>
+            <a:ext cx="10607040" cy="1017270"/>
+          </a:xfrm>
+          <a:prstGeom prst="rect">
+            <a:avLst/>
+          </a:prstGeom>
+          <a:noFill/>
+          <a:ln/>
+        </p:spPr>
+        <p:txBody>
+          <a:bodyPr wrap="square" rtlCol="0" anchor="t">
+            <a:spAutoFit/>
+          </a:bodyPr>
+          <a:lstStyle/>
+          <a:p>
+            <a:pPr indent="0" marL="0">
+              <a:lnSpc>
+                <a:spcPct val="112000"/>
+              </a:lnSpc>
+              <a:buNone/>
+            </a:pPr>
+            <a:r>
+              <a:rPr lang="en-US" sz="1650" dirty="0">
+                <a:solidFill>
+                  <a:srgbClr val="1A1A1A"/>
                 </a:solidFill>
                 <a:latin typeface="Calibri" pitchFamily="34" charset="0"/>
                 <a:ea typeface="Calibri" pitchFamily="34" charset="-122"/>
                 <a:cs typeface="Calibri" pitchFamily="34" charset="-120"/>
               </a:rPr>
-              <a:t>0:05</a:t>
-            </a:r>
-            <a:endParaRPr lang="en-US" sz="1100" dirty="0"/>
-          </a:p>
-        </p:txBody>
-      </p:sp>
-      <p:sp>
-        <p:nvSpPr>
-          <p:cNvPr id="8" name="Text 6"/>
-          <p:cNvSpPr/>
-          <p:nvPr/>
-        </p:nvSpPr>
-        <p:spPr>
-          <a:xfrm>
-            <a:off x="1691640" y="2002536"/>
-            <a:ext cx="9646920" cy="448056"/>
-          </a:xfrm>
-          <a:prstGeom prst="rect">
-            <a:avLst/>
-          </a:prstGeom>
-          <a:noFill/>
-          <a:ln/>
-        </p:spPr>
-        <p:txBody>
-          <a:bodyPr wrap="square" rtlCol="0" anchor="ctr">
+              <a:t>Your hand-count argument about run/running is the same decision, made with highlighters.</a:t>
+            </a:r>
+            <a:endParaRPr lang="en-US" sz="1650" dirty="0"/>
+          </a:p>
+        </p:txBody>
+      </p:sp>
+      <p:sp>
+        <p:nvSpPr>
+          <p:cNvPr id="11" name="Shape 9"/>
+          <p:cNvSpPr/>
+          <p:nvPr/>
+        </p:nvSpPr>
+        <p:spPr>
+          <a:xfrm>
+            <a:off x="640080" y="5383530"/>
+            <a:ext cx="201168" cy="201168"/>
+          </a:xfrm>
+          <a:prstGeom prst="ellipse">
+            <a:avLst/>
+          </a:prstGeom>
+          <a:solidFill>
+            <a:srgbClr val="7A3B2E"/>
+          </a:solidFill>
+          <a:ln/>
+        </p:spPr>
+      </p:sp>
+      <p:sp>
+        <p:nvSpPr>
+          <p:cNvPr id="12" name="Text 10"/>
+          <p:cNvSpPr/>
+          <p:nvPr/>
+        </p:nvSpPr>
+        <p:spPr>
+          <a:xfrm>
+            <a:off x="1097280" y="5292090"/>
+            <a:ext cx="10607040" cy="1017270"/>
+          </a:xfrm>
+          <a:prstGeom prst="rect">
+            <a:avLst/>
+          </a:prstGeom>
+          <a:noFill/>
+          <a:ln/>
+        </p:spPr>
+        <p:txBody>
+          <a:bodyPr wrap="square" rtlCol="0" anchor="t">
             <a:spAutoFit/>
           </a:bodyPr>
           <a:lstStyle/>
           <a:p>
             <a:pPr indent="0" marL="0">
-              <a:buNone/>
-            </a:pPr>
-            <a:r>
-              <a:rPr lang="en-US" sz="1100" dirty="0">
+              <a:lnSpc>
+                <a:spcPct val="112000"/>
+              </a:lnSpc>
+              <a:buNone/>
+            </a:pPr>
+            <a:r>
+              <a:rPr lang="en-US" sz="1650" dirty="0">
                 <a:solidFill>
                   <a:srgbClr val="1A1A1A"/>
                 </a:solidFill>
@@ -3181,825 +5000,9 @@
                 <a:ea typeface="Calibri" pitchFamily="34" charset="-122"/>
                 <a:cs typeface="Calibri" pitchFamily="34" charset="-120"/>
               </a:rPr>
-              <a:t>The trial: claim, objection, re-run-without-fiction rebuttal, "interpret with care." One named choice is the chart: the hockey-stick shape depends on its y-axis and smoothing.</a:t>
-            </a:r>
-            <a:endParaRPr lang="en-US" sz="1100" dirty="0"/>
-          </a:p>
-        </p:txBody>
-      </p:sp>
-      <p:sp>
-        <p:nvSpPr>
-          <p:cNvPr id="9" name="Shape 7"/>
-          <p:cNvSpPr/>
-          <p:nvPr/>
-        </p:nvSpPr>
-        <p:spPr>
-          <a:xfrm>
-            <a:off x="640080" y="2468880"/>
-            <a:ext cx="868680" cy="338328"/>
-          </a:xfrm>
-          <a:prstGeom prst="roundRect">
-            <a:avLst>
-              <a:gd name="adj" fmla="val 16216"/>
-            </a:avLst>
-          </a:prstGeom>
-          <a:solidFill>
-            <a:srgbClr val="7A3B2E"/>
-          </a:solidFill>
-          <a:ln/>
-        </p:spPr>
-      </p:sp>
-      <p:sp>
-        <p:nvSpPr>
-          <p:cNvPr id="10" name="Text 8"/>
-          <p:cNvSpPr/>
-          <p:nvPr/>
-        </p:nvSpPr>
-        <p:spPr>
-          <a:xfrm>
-            <a:off x="640080" y="2468880"/>
-            <a:ext cx="868680" cy="338328"/>
-          </a:xfrm>
-          <a:prstGeom prst="rect">
-            <a:avLst/>
-          </a:prstGeom>
-          <a:noFill/>
-          <a:ln/>
-        </p:spPr>
-        <p:txBody>
-          <a:bodyPr wrap="square" rtlCol="0" anchor="ctr"/>
-          <a:lstStyle/>
-          <a:p>
-            <a:pPr algn="ctr" indent="0" marL="0">
-              <a:buNone/>
-            </a:pPr>
-            <a:r>
-              <a:rPr lang="en-US" sz="1100" b="1" dirty="0">
-                <a:solidFill>
-                  <a:srgbClr val="FFFFFF"/>
-                </a:solidFill>
-                <a:latin typeface="Calibri" pitchFamily="34" charset="0"/>
-                <a:ea typeface="Calibri" pitchFamily="34" charset="-122"/>
-                <a:cs typeface="Calibri" pitchFamily="34" charset="-120"/>
-              </a:rPr>
-              <a:t>0:25</a:t>
-            </a:r>
-            <a:endParaRPr lang="en-US" sz="1100" dirty="0"/>
-          </a:p>
-        </p:txBody>
-      </p:sp>
-      <p:sp>
-        <p:nvSpPr>
-          <p:cNvPr id="11" name="Text 9"/>
-          <p:cNvSpPr/>
-          <p:nvPr/>
-        </p:nvSpPr>
-        <p:spPr>
-          <a:xfrm>
-            <a:off x="1691640" y="2450592"/>
-            <a:ext cx="9646920" cy="448056"/>
-          </a:xfrm>
-          <a:prstGeom prst="rect">
-            <a:avLst/>
-          </a:prstGeom>
-          <a:noFill/>
-          <a:ln/>
-        </p:spPr>
-        <p:txBody>
-          <a:bodyPr wrap="square" rtlCol="0" anchor="ctr">
-            <a:spAutoFit/>
-          </a:bodyPr>
-          <a:lstStyle/>
-          <a:p>
-            <a:pPr indent="0" marL="0">
-              <a:buNone/>
-            </a:pPr>
-            <a:r>
-              <a:rPr lang="en-US" sz="1100" dirty="0">
-                <a:solidFill>
-                  <a:srgbClr val="1A1A1A"/>
-                </a:solidFill>
-                <a:latin typeface="Calibri" pitchFamily="34" charset="0"/>
-                <a:ea typeface="Calibri" pitchFamily="34" charset="-122"/>
-                <a:cs typeface="Calibri" pitchFamily="34" charset="-120"/>
-              </a:rPr>
-              <a:t>Delight beat: an artist's signature vocabulary, the words they use far more than a pop baseline. No caveats.</a:t>
-            </a:r>
-            <a:endParaRPr lang="en-US" sz="1100" dirty="0"/>
-          </a:p>
-        </p:txBody>
-      </p:sp>
-      <p:sp>
-        <p:nvSpPr>
-          <p:cNvPr id="12" name="Shape 10"/>
-          <p:cNvSpPr/>
-          <p:nvPr/>
-        </p:nvSpPr>
-        <p:spPr>
-          <a:xfrm>
-            <a:off x="640080" y="2916936"/>
-            <a:ext cx="868680" cy="338328"/>
-          </a:xfrm>
-          <a:prstGeom prst="roundRect">
-            <a:avLst>
-              <a:gd name="adj" fmla="val 16216"/>
-            </a:avLst>
-          </a:prstGeom>
-          <a:solidFill>
-            <a:srgbClr val="7A3B2E"/>
-          </a:solidFill>
-          <a:ln/>
-        </p:spPr>
-      </p:sp>
-      <p:sp>
-        <p:nvSpPr>
-          <p:cNvPr id="13" name="Text 11"/>
-          <p:cNvSpPr/>
-          <p:nvPr/>
-        </p:nvSpPr>
-        <p:spPr>
-          <a:xfrm>
-            <a:off x="640080" y="2916936"/>
-            <a:ext cx="868680" cy="338328"/>
-          </a:xfrm>
-          <a:prstGeom prst="rect">
-            <a:avLst/>
-          </a:prstGeom>
-          <a:noFill/>
-          <a:ln/>
-        </p:spPr>
-        <p:txBody>
-          <a:bodyPr wrap="square" rtlCol="0" anchor="ctr"/>
-          <a:lstStyle/>
-          <a:p>
-            <a:pPr algn="ctr" indent="0" marL="0">
-              <a:buNone/>
-            </a:pPr>
-            <a:r>
-              <a:rPr lang="en-US" sz="1100" b="1" dirty="0">
-                <a:solidFill>
-                  <a:srgbClr val="FFFFFF"/>
-                </a:solidFill>
-                <a:latin typeface="Calibri" pitchFamily="34" charset="0"/>
-                <a:ea typeface="Calibri" pitchFamily="34" charset="-122"/>
-                <a:cs typeface="Calibri" pitchFamily="34" charset="-120"/>
-              </a:rPr>
-              <a:t>0:30</a:t>
-            </a:r>
-            <a:endParaRPr lang="en-US" sz="1100" dirty="0"/>
-          </a:p>
-        </p:txBody>
-      </p:sp>
-      <p:sp>
-        <p:nvSpPr>
-          <p:cNvPr id="14" name="Text 12"/>
-          <p:cNvSpPr/>
-          <p:nvPr/>
-        </p:nvSpPr>
-        <p:spPr>
-          <a:xfrm>
-            <a:off x="1691640" y="2898648"/>
-            <a:ext cx="9646920" cy="448056"/>
-          </a:xfrm>
-          <a:prstGeom prst="rect">
-            <a:avLst/>
-          </a:prstGeom>
-          <a:noFill/>
-          <a:ln/>
-        </p:spPr>
-        <p:txBody>
-          <a:bodyPr wrap="square" rtlCol="0" anchor="ctr">
-            <a:spAutoFit/>
-          </a:bodyPr>
-          <a:lstStyle/>
-          <a:p>
-            <a:pPr indent="0" marL="0">
-              <a:buNone/>
-            </a:pPr>
-            <a:r>
-              <a:rPr lang="en-US" sz="1100" dirty="0">
-                <a:solidFill>
-                  <a:srgbClr val="1A1A1A"/>
-                </a:solidFill>
-                <a:latin typeface="Calibri" pitchFamily="34" charset="0"/>
-                <a:ea typeface="Calibri" pitchFamily="34" charset="-122"/>
-                <a:cs typeface="Calibri" pitchFamily="34" charset="-120"/>
-              </a:rPr>
-              <a:t>Hand-built bag-of-words: two authors, highlighters, argue about merging run/running. Counting requires defining.</a:t>
-            </a:r>
-            <a:endParaRPr lang="en-US" sz="1100" dirty="0"/>
-          </a:p>
-        </p:txBody>
-      </p:sp>
-      <p:sp>
-        <p:nvSpPr>
-          <p:cNvPr id="15" name="Shape 13"/>
-          <p:cNvSpPr/>
-          <p:nvPr/>
-        </p:nvSpPr>
-        <p:spPr>
-          <a:xfrm>
-            <a:off x="640080" y="3364992"/>
-            <a:ext cx="868680" cy="338328"/>
-          </a:xfrm>
-          <a:prstGeom prst="roundRect">
-            <a:avLst>
-              <a:gd name="adj" fmla="val 16216"/>
-            </a:avLst>
-          </a:prstGeom>
-          <a:solidFill>
-            <a:srgbClr val="7A3B2E"/>
-          </a:solidFill>
-          <a:ln/>
-        </p:spPr>
-      </p:sp>
-      <p:sp>
-        <p:nvSpPr>
-          <p:cNvPr id="16" name="Text 14"/>
-          <p:cNvSpPr/>
-          <p:nvPr/>
-        </p:nvSpPr>
-        <p:spPr>
-          <a:xfrm>
-            <a:off x="640080" y="3364992"/>
-            <a:ext cx="868680" cy="338328"/>
-          </a:xfrm>
-          <a:prstGeom prst="rect">
-            <a:avLst/>
-          </a:prstGeom>
-          <a:noFill/>
-          <a:ln/>
-        </p:spPr>
-        <p:txBody>
-          <a:bodyPr wrap="square" rtlCol="0" anchor="ctr"/>
-          <a:lstStyle/>
-          <a:p>
-            <a:pPr algn="ctr" indent="0" marL="0">
-              <a:buNone/>
-            </a:pPr>
-            <a:r>
-              <a:rPr lang="en-US" sz="1100" b="1" dirty="0">
-                <a:solidFill>
-                  <a:srgbClr val="FFFFFF"/>
-                </a:solidFill>
-                <a:latin typeface="Calibri" pitchFamily="34" charset="0"/>
-                <a:ea typeface="Calibri" pitchFamily="34" charset="-122"/>
-                <a:cs typeface="Calibri" pitchFamily="34" charset="-120"/>
-              </a:rPr>
-              <a:t>0:55</a:t>
-            </a:r>
-            <a:endParaRPr lang="en-US" sz="1100" dirty="0"/>
-          </a:p>
-        </p:txBody>
-      </p:sp>
-      <p:sp>
-        <p:nvSpPr>
-          <p:cNvPr id="17" name="Text 15"/>
-          <p:cNvSpPr/>
-          <p:nvPr/>
-        </p:nvSpPr>
-        <p:spPr>
-          <a:xfrm>
-            <a:off x="1691640" y="3346704"/>
-            <a:ext cx="9646920" cy="448056"/>
-          </a:xfrm>
-          <a:prstGeom prst="rect">
-            <a:avLst/>
-          </a:prstGeom>
-          <a:noFill/>
-          <a:ln/>
-        </p:spPr>
-        <p:txBody>
-          <a:bodyPr wrap="square" rtlCol="0" anchor="ctr">
-            <a:spAutoFit/>
-          </a:bodyPr>
-          <a:lstStyle/>
-          <a:p>
-            <a:pPr indent="0" marL="0">
-              <a:buNone/>
-            </a:pPr>
-            <a:r>
-              <a:rPr lang="en-US" sz="1100" dirty="0">
-                <a:solidFill>
-                  <a:srgbClr val="1A1A1A"/>
-                </a:solidFill>
-                <a:latin typeface="Calibri" pitchFamily="34" charset="0"/>
-                <a:ea typeface="Calibri" pitchFamily="34" charset="-122"/>
-                <a:cs typeface="Calibri" pitchFamily="34" charset="-120"/>
-              </a:rPr>
-              <a:t>What counts as a word? Paste a sentence into two tokenizer playgrounds and watch it shatter differently. Models see tokens, not words.</a:t>
-            </a:r>
-            <a:endParaRPr lang="en-US" sz="1100" dirty="0"/>
-          </a:p>
-        </p:txBody>
-      </p:sp>
-      <p:sp>
-        <p:nvSpPr>
-          <p:cNvPr id="18" name="Shape 16"/>
-          <p:cNvSpPr/>
-          <p:nvPr/>
-        </p:nvSpPr>
-        <p:spPr>
-          <a:xfrm>
-            <a:off x="640080" y="3813048"/>
-            <a:ext cx="868680" cy="338328"/>
-          </a:xfrm>
-          <a:prstGeom prst="roundRect">
-            <a:avLst>
-              <a:gd name="adj" fmla="val 16216"/>
-            </a:avLst>
-          </a:prstGeom>
-          <a:solidFill>
-            <a:srgbClr val="7A3B2E"/>
-          </a:solidFill>
-          <a:ln/>
-        </p:spPr>
-      </p:sp>
-      <p:sp>
-        <p:nvSpPr>
-          <p:cNvPr id="19" name="Text 17"/>
-          <p:cNvSpPr/>
-          <p:nvPr/>
-        </p:nvSpPr>
-        <p:spPr>
-          <a:xfrm>
-            <a:off x="640080" y="3813048"/>
-            <a:ext cx="868680" cy="338328"/>
-          </a:xfrm>
-          <a:prstGeom prst="rect">
-            <a:avLst/>
-          </a:prstGeom>
-          <a:noFill/>
-          <a:ln/>
-        </p:spPr>
-        <p:txBody>
-          <a:bodyPr wrap="square" rtlCol="0" anchor="ctr"/>
-          <a:lstStyle/>
-          <a:p>
-            <a:pPr algn="ctr" indent="0" marL="0">
-              <a:buNone/>
-            </a:pPr>
-            <a:r>
-              <a:rPr lang="en-US" sz="1100" b="1" dirty="0">
-                <a:solidFill>
-                  <a:srgbClr val="FFFFFF"/>
-                </a:solidFill>
-                <a:latin typeface="Calibri" pitchFamily="34" charset="0"/>
-                <a:ea typeface="Calibri" pitchFamily="34" charset="-122"/>
-                <a:cs typeface="Calibri" pitchFamily="34" charset="-120"/>
-              </a:rPr>
-              <a:t>1:05</a:t>
-            </a:r>
-            <a:endParaRPr lang="en-US" sz="1100" dirty="0"/>
-          </a:p>
-        </p:txBody>
-      </p:sp>
-      <p:sp>
-        <p:nvSpPr>
-          <p:cNvPr id="20" name="Text 18"/>
-          <p:cNvSpPr/>
-          <p:nvPr/>
-        </p:nvSpPr>
-        <p:spPr>
-          <a:xfrm>
-            <a:off x="1691640" y="3794760"/>
-            <a:ext cx="9646920" cy="448056"/>
-          </a:xfrm>
-          <a:prstGeom prst="rect">
-            <a:avLst/>
-          </a:prstGeom>
-          <a:noFill/>
-          <a:ln/>
-        </p:spPr>
-        <p:txBody>
-          <a:bodyPr wrap="square" rtlCol="0" anchor="ctr">
-            <a:spAutoFit/>
-          </a:bodyPr>
-          <a:lstStyle/>
-          <a:p>
-            <a:pPr indent="0" marL="0">
-              <a:buNone/>
-            </a:pPr>
-            <a:r>
-              <a:rPr lang="en-US" sz="1100" dirty="0">
-                <a:solidFill>
-                  <a:srgbClr val="1A1A1A"/>
-                </a:solidFill>
-                <a:latin typeface="Calibri" pitchFamily="34" charset="0"/>
-                <a:ea typeface="Calibri" pitchFamily="34" charset="-122"/>
-                <a:cs typeface="Calibri" pitchFamily="34" charset="-120"/>
-              </a:rPr>
-              <a:t>Break</a:t>
-            </a:r>
-            <a:endParaRPr lang="en-US" sz="1100" dirty="0"/>
-          </a:p>
-        </p:txBody>
-      </p:sp>
-      <p:sp>
-        <p:nvSpPr>
-          <p:cNvPr id="21" name="Shape 19"/>
-          <p:cNvSpPr/>
-          <p:nvPr/>
-        </p:nvSpPr>
-        <p:spPr>
-          <a:xfrm>
-            <a:off x="640080" y="4261104"/>
-            <a:ext cx="868680" cy="338328"/>
-          </a:xfrm>
-          <a:prstGeom prst="roundRect">
-            <a:avLst>
-              <a:gd name="adj" fmla="val 16216"/>
-            </a:avLst>
-          </a:prstGeom>
-          <a:solidFill>
-            <a:srgbClr val="7A3B2E"/>
-          </a:solidFill>
-          <a:ln/>
-        </p:spPr>
-      </p:sp>
-      <p:sp>
-        <p:nvSpPr>
-          <p:cNvPr id="22" name="Text 20"/>
-          <p:cNvSpPr/>
-          <p:nvPr/>
-        </p:nvSpPr>
-        <p:spPr>
-          <a:xfrm>
-            <a:off x="640080" y="4261104"/>
-            <a:ext cx="868680" cy="338328"/>
-          </a:xfrm>
-          <a:prstGeom prst="rect">
-            <a:avLst/>
-          </a:prstGeom>
-          <a:noFill/>
-          <a:ln/>
-        </p:spPr>
-        <p:txBody>
-          <a:bodyPr wrap="square" rtlCol="0" anchor="ctr"/>
-          <a:lstStyle/>
-          <a:p>
-            <a:pPr algn="ctr" indent="0" marL="0">
-              <a:buNone/>
-            </a:pPr>
-            <a:r>
-              <a:rPr lang="en-US" sz="1100" b="1" dirty="0">
-                <a:solidFill>
-                  <a:srgbClr val="FFFFFF"/>
-                </a:solidFill>
-                <a:latin typeface="Calibri" pitchFamily="34" charset="0"/>
-                <a:ea typeface="Calibri" pitchFamily="34" charset="-122"/>
-                <a:cs typeface="Calibri" pitchFamily="34" charset="-120"/>
-              </a:rPr>
-              <a:t>1:15</a:t>
-            </a:r>
-            <a:endParaRPr lang="en-US" sz="1100" dirty="0"/>
-          </a:p>
-        </p:txBody>
-      </p:sp>
-      <p:sp>
-        <p:nvSpPr>
-          <p:cNvPr id="23" name="Text 21"/>
-          <p:cNvSpPr/>
-          <p:nvPr/>
-        </p:nvSpPr>
-        <p:spPr>
-          <a:xfrm>
-            <a:off x="1691640" y="4242816"/>
-            <a:ext cx="9646920" cy="448056"/>
-          </a:xfrm>
-          <a:prstGeom prst="rect">
-            <a:avLst/>
-          </a:prstGeom>
-          <a:noFill/>
-          <a:ln/>
-        </p:spPr>
-        <p:txBody>
-          <a:bodyPr wrap="square" rtlCol="0" anchor="ctr">
-            <a:spAutoFit/>
-          </a:bodyPr>
-          <a:lstStyle/>
-          <a:p>
-            <a:pPr indent="0" marL="0">
-              <a:buNone/>
-            </a:pPr>
-            <a:r>
-              <a:rPr lang="en-US" sz="1100" dirty="0">
-                <a:solidFill>
-                  <a:srgbClr val="1A1A1A"/>
-                </a:solidFill>
-                <a:latin typeface="Calibri" pitchFamily="34" charset="0"/>
-                <a:ea typeface="Calibri" pitchFamily="34" charset="-122"/>
-                <a:cs typeface="Calibri" pitchFamily="34" charset="-120"/>
-              </a:rPr>
-              <a:t>tf-idf: the AI scales your hand count; stop-words dominate, which motivates "common here, rare overall."</a:t>
-            </a:r>
-            <a:endParaRPr lang="en-US" sz="1100" dirty="0"/>
-          </a:p>
-        </p:txBody>
-      </p:sp>
-      <p:sp>
-        <p:nvSpPr>
-          <p:cNvPr id="24" name="Shape 22"/>
-          <p:cNvSpPr/>
-          <p:nvPr/>
-        </p:nvSpPr>
-        <p:spPr>
-          <a:xfrm>
-            <a:off x="640080" y="4709160"/>
-            <a:ext cx="868680" cy="338328"/>
-          </a:xfrm>
-          <a:prstGeom prst="roundRect">
-            <a:avLst>
-              <a:gd name="adj" fmla="val 16216"/>
-            </a:avLst>
-          </a:prstGeom>
-          <a:solidFill>
-            <a:srgbClr val="7A3B2E"/>
-          </a:solidFill>
-          <a:ln/>
-        </p:spPr>
-      </p:sp>
-      <p:sp>
-        <p:nvSpPr>
-          <p:cNvPr id="25" name="Text 23"/>
-          <p:cNvSpPr/>
-          <p:nvPr/>
-        </p:nvSpPr>
-        <p:spPr>
-          <a:xfrm>
-            <a:off x="640080" y="4709160"/>
-            <a:ext cx="868680" cy="338328"/>
-          </a:xfrm>
-          <a:prstGeom prst="rect">
-            <a:avLst/>
-          </a:prstGeom>
-          <a:noFill/>
-          <a:ln/>
-        </p:spPr>
-        <p:txBody>
-          <a:bodyPr wrap="square" rtlCol="0" anchor="ctr"/>
-          <a:lstStyle/>
-          <a:p>
-            <a:pPr algn="ctr" indent="0" marL="0">
-              <a:buNone/>
-            </a:pPr>
-            <a:r>
-              <a:rPr lang="en-US" sz="1100" b="1" dirty="0">
-                <a:solidFill>
-                  <a:srgbClr val="FFFFFF"/>
-                </a:solidFill>
-                <a:latin typeface="Calibri" pitchFamily="34" charset="0"/>
-                <a:ea typeface="Calibri" pitchFamily="34" charset="-122"/>
-                <a:cs typeface="Calibri" pitchFamily="34" charset="-120"/>
-              </a:rPr>
-              <a:t>1:30</a:t>
-            </a:r>
-            <a:endParaRPr lang="en-US" sz="1100" dirty="0"/>
-          </a:p>
-        </p:txBody>
-      </p:sp>
-      <p:sp>
-        <p:nvSpPr>
-          <p:cNvPr id="26" name="Text 24"/>
-          <p:cNvSpPr/>
-          <p:nvPr/>
-        </p:nvSpPr>
-        <p:spPr>
-          <a:xfrm>
-            <a:off x="1691640" y="4690872"/>
-            <a:ext cx="9646920" cy="448056"/>
-          </a:xfrm>
-          <a:prstGeom prst="rect">
-            <a:avLst/>
-          </a:prstGeom>
-          <a:noFill/>
-          <a:ln/>
-        </p:spPr>
-        <p:txBody>
-          <a:bodyPr wrap="square" rtlCol="0" anchor="ctr">
-            <a:spAutoFit/>
-          </a:bodyPr>
-          <a:lstStyle/>
-          <a:p>
-            <a:pPr indent="0" marL="0">
-              <a:buNone/>
-            </a:pPr>
-            <a:r>
-              <a:rPr lang="en-US" sz="1100" dirty="0">
-                <a:solidFill>
-                  <a:srgbClr val="1A1A1A"/>
-                </a:solidFill>
-                <a:latin typeface="Calibri" pitchFamily="34" charset="0"/>
-                <a:ea typeface="Calibri" pitchFamily="34" charset="-122"/>
-                <a:cs typeface="Calibri" pitchFamily="34" charset="-120"/>
-              </a:rPr>
-              <a:t>Keyness, the She Giggles, He Gallops move: a log-odds ratio between two corpora finds the words one voice uses far more than a baseline, exactly the method behind Week 1's featured piece. The corpus pair is a choice too: artist vs. pop, lyrics vs. subreddit vs. novel.</a:t>
-            </a:r>
-            <a:endParaRPr lang="en-US" sz="1100" dirty="0"/>
-          </a:p>
-        </p:txBody>
-      </p:sp>
-      <p:sp>
-        <p:nvSpPr>
-          <p:cNvPr id="27" name="Shape 25"/>
-          <p:cNvSpPr/>
-          <p:nvPr/>
-        </p:nvSpPr>
-        <p:spPr>
-          <a:xfrm>
-            <a:off x="640080" y="5157216"/>
-            <a:ext cx="868680" cy="338328"/>
-          </a:xfrm>
-          <a:prstGeom prst="roundRect">
-            <a:avLst>
-              <a:gd name="adj" fmla="val 16216"/>
-            </a:avLst>
-          </a:prstGeom>
-          <a:solidFill>
-            <a:srgbClr val="7A3B2E"/>
-          </a:solidFill>
-          <a:ln/>
-        </p:spPr>
-      </p:sp>
-      <p:sp>
-        <p:nvSpPr>
-          <p:cNvPr id="28" name="Text 26"/>
-          <p:cNvSpPr/>
-          <p:nvPr/>
-        </p:nvSpPr>
-        <p:spPr>
-          <a:xfrm>
-            <a:off x="640080" y="5157216"/>
-            <a:ext cx="868680" cy="338328"/>
-          </a:xfrm>
-          <a:prstGeom prst="rect">
-            <a:avLst/>
-          </a:prstGeom>
-          <a:noFill/>
-          <a:ln/>
-        </p:spPr>
-        <p:txBody>
-          <a:bodyPr wrap="square" rtlCol="0" anchor="ctr"/>
-          <a:lstStyle/>
-          <a:p>
-            <a:pPr algn="ctr" indent="0" marL="0">
-              <a:buNone/>
-            </a:pPr>
-            <a:r>
-              <a:rPr lang="en-US" sz="1100" b="1" dirty="0">
-                <a:solidFill>
-                  <a:srgbClr val="FFFFFF"/>
-                </a:solidFill>
-                <a:latin typeface="Calibri" pitchFamily="34" charset="0"/>
-                <a:ea typeface="Calibri" pitchFamily="34" charset="-122"/>
-                <a:cs typeface="Calibri" pitchFamily="34" charset="-120"/>
-              </a:rPr>
-              <a:t>1:42</a:t>
-            </a:r>
-            <a:endParaRPr lang="en-US" sz="1100" dirty="0"/>
-          </a:p>
-        </p:txBody>
-      </p:sp>
-      <p:sp>
-        <p:nvSpPr>
-          <p:cNvPr id="29" name="Text 27"/>
-          <p:cNvSpPr/>
-          <p:nvPr/>
-        </p:nvSpPr>
-        <p:spPr>
-          <a:xfrm>
-            <a:off x="1691640" y="5138928"/>
-            <a:ext cx="9646920" cy="448056"/>
-          </a:xfrm>
-          <a:prstGeom prst="rect">
-            <a:avLst/>
-          </a:prstGeom>
-          <a:noFill/>
-          <a:ln/>
-        </p:spPr>
-        <p:txBody>
-          <a:bodyPr wrap="square" rtlCol="0" anchor="ctr">
-            <a:spAutoFit/>
-          </a:bodyPr>
-          <a:lstStyle/>
-          <a:p>
-            <a:pPr indent="0" marL="0">
-              <a:buNone/>
-            </a:pPr>
-            <a:r>
-              <a:rPr lang="en-US" sz="1100" dirty="0">
-                <a:solidFill>
-                  <a:srgbClr val="1A1A1A"/>
-                </a:solidFill>
-                <a:latin typeface="Calibri" pitchFamily="34" charset="0"/>
-                <a:ea typeface="Calibri" pitchFamily="34" charset="-122"/>
-                <a:cs typeface="Calibri" pitchFamily="34" charset="-120"/>
-              </a:rPr>
-              <a:t>Is the difference real? The shuffle test: shuffle the labels, recount, a thousand times. If chance alone often makes a gap this big, don't trust it; if it almost never does, you have a finding. Real-but-tiny is still tiny.</a:t>
-            </a:r>
-            <a:endParaRPr lang="en-US" sz="1100" dirty="0"/>
-          </a:p>
-        </p:txBody>
-      </p:sp>
-      <p:sp>
-        <p:nvSpPr>
-          <p:cNvPr id="30" name="Shape 28"/>
-          <p:cNvSpPr/>
-          <p:nvPr/>
-        </p:nvSpPr>
-        <p:spPr>
-          <a:xfrm>
-            <a:off x="640080" y="5605272"/>
-            <a:ext cx="868680" cy="338328"/>
-          </a:xfrm>
-          <a:prstGeom prst="roundRect">
-            <a:avLst>
-              <a:gd name="adj" fmla="val 16216"/>
-            </a:avLst>
-          </a:prstGeom>
-          <a:solidFill>
-            <a:srgbClr val="7A3B2E"/>
-          </a:solidFill>
-          <a:ln/>
-        </p:spPr>
-      </p:sp>
-      <p:sp>
-        <p:nvSpPr>
-          <p:cNvPr id="31" name="Text 29"/>
-          <p:cNvSpPr/>
-          <p:nvPr/>
-        </p:nvSpPr>
-        <p:spPr>
-          <a:xfrm>
-            <a:off x="640080" y="5605272"/>
-            <a:ext cx="868680" cy="338328"/>
-          </a:xfrm>
-          <a:prstGeom prst="rect">
-            <a:avLst/>
-          </a:prstGeom>
-          <a:noFill/>
-          <a:ln/>
-        </p:spPr>
-        <p:txBody>
-          <a:bodyPr wrap="square" rtlCol="0" anchor="ctr"/>
-          <a:lstStyle/>
-          <a:p>
-            <a:pPr algn="ctr" indent="0" marL="0">
-              <a:buNone/>
-            </a:pPr>
-            <a:r>
-              <a:rPr lang="en-US" sz="1100" b="1" dirty="0">
-                <a:solidFill>
-                  <a:srgbClr val="FFFFFF"/>
-                </a:solidFill>
-                <a:latin typeface="Calibri" pitchFamily="34" charset="0"/>
-                <a:ea typeface="Calibri" pitchFamily="34" charset="-122"/>
-                <a:cs typeface="Calibri" pitchFamily="34" charset="-120"/>
-              </a:rPr>
-              <a:t>1:50</a:t>
-            </a:r>
-            <a:endParaRPr lang="en-US" sz="1100" dirty="0"/>
-          </a:p>
-        </p:txBody>
-      </p:sp>
-      <p:sp>
-        <p:nvSpPr>
-          <p:cNvPr id="32" name="Text 30"/>
-          <p:cNvSpPr/>
-          <p:nvPr/>
-        </p:nvSpPr>
-        <p:spPr>
-          <a:xfrm>
-            <a:off x="1691640" y="5586984"/>
-            <a:ext cx="9646920" cy="448056"/>
-          </a:xfrm>
-          <a:prstGeom prst="rect">
-            <a:avLst/>
-          </a:prstGeom>
-          <a:noFill/>
-          <a:ln/>
-        </p:spPr>
-        <p:txBody>
-          <a:bodyPr wrap="square" rtlCol="0" anchor="ctr">
-            <a:spAutoFit/>
-          </a:bodyPr>
-          <a:lstStyle/>
-          <a:p>
-            <a:pPr indent="0" marL="0">
-              <a:buNone/>
-            </a:pPr>
-            <a:r>
-              <a:rPr lang="en-US" sz="1100" dirty="0">
-                <a:solidFill>
-                  <a:srgbClr val="1A1A1A"/>
-                </a:solidFill>
-                <a:latin typeface="Calibri" pitchFamily="34" charset="0"/>
-                <a:ea typeface="Calibri" pitchFamily="34" charset="-122"/>
-                <a:cs typeface="Calibri" pitchFamily="34" charset="-120"/>
-              </a:rPr>
-              <a:t>Gemini-free check and check-out.</a:t>
-            </a:r>
-            <a:endParaRPr lang="en-US" sz="1100" dirty="0"/>
+              <a:t>tf-idf: down-weight what is common everywhere. "Common here, rare overall" is what characterizes a text.</a:t>
+            </a:r>
+            <a:endParaRPr lang="en-US" sz="1650" dirty="0"/>
           </a:p>
         </p:txBody>
       </p:sp>
@@ -4037,14 +5040,34 @@
       </p:grpSpPr>
       <p:sp>
         <p:nvSpPr>
-          <p:cNvPr id="2" name="Text 0"/>
+          <p:cNvPr id="2" name="Shape 0"/>
+          <p:cNvSpPr/>
+          <p:nvPr/>
+        </p:nvSpPr>
+        <p:spPr>
+          <a:xfrm>
+            <a:off x="0" y="0"/>
+            <a:ext cx="164592" cy="6858000"/>
+          </a:xfrm>
+          <a:prstGeom prst="rect">
+            <a:avLst/>
+          </a:prstGeom>
+          <a:solidFill>
+            <a:srgbClr val="B9852F"/>
+          </a:solidFill>
+          <a:ln/>
+        </p:spPr>
+      </p:sp>
+      <p:sp>
+        <p:nvSpPr>
+          <p:cNvPr id="3" name="Text 1"/>
           <p:cNvSpPr/>
           <p:nvPr/>
         </p:nvSpPr>
         <p:spPr>
           <a:xfrm>
             <a:off x="640080" y="640080"/>
-            <a:ext cx="10058400" cy="731520"/>
+            <a:ext cx="10058400" cy="320040"/>
           </a:xfrm>
           <a:prstGeom prst="rect">
             <a:avLst/>
@@ -4054,6 +5077,47 @@
         </p:spPr>
         <p:txBody>
           <a:bodyPr wrap="square" rtlCol="0" anchor="ctr"/>
+          <a:lstStyle/>
+          <a:p>
+            <a:pPr indent="0" marL="0">
+              <a:buNone/>
+            </a:pPr>
+            <a:r>
+              <a:rPr lang="en-US" sz="1200" b="1" spc="300" kern="0" dirty="0">
+                <a:solidFill>
+                  <a:srgbClr val="B9852F"/>
+                </a:solidFill>
+                <a:latin typeface="Calibri" pitchFamily="34" charset="0"/>
+                <a:ea typeface="Calibri" pitchFamily="34" charset="-122"/>
+                <a:cs typeface="Calibri" pitchFamily="34" charset="-120"/>
+              </a:rPr>
+              <a:t>WEEK 2 · THE MATERIAL</a:t>
+            </a:r>
+            <a:endParaRPr lang="en-US" sz="1200" dirty="0"/>
+          </a:p>
+        </p:txBody>
+      </p:sp>
+      <p:sp>
+        <p:nvSpPr>
+          <p:cNvPr id="4" name="Text 2"/>
+          <p:cNvSpPr/>
+          <p:nvPr/>
+        </p:nvSpPr>
+        <p:spPr>
+          <a:xfrm>
+            <a:off x="640080" y="1005840"/>
+            <a:ext cx="10881360" cy="914400"/>
+          </a:xfrm>
+          <a:prstGeom prst="rect">
+            <a:avLst/>
+          </a:prstGeom>
+          <a:noFill/>
+          <a:ln/>
+        </p:spPr>
+        <p:txBody>
+          <a:bodyPr wrap="square" rtlCol="0" anchor="t">
+            <a:spAutoFit/>
+          </a:bodyPr>
           <a:lstStyle/>
           <a:p>
             <a:pPr indent="0" marL="0">
@@ -4068,7 +5132,7 @@
                 <a:ea typeface="Cambria" pitchFamily="34" charset="-122"/>
                 <a:cs typeface="Cambria" pitchFamily="34" charset="-120"/>
               </a:rPr>
-              <a:t>Reading &amp; homework</a:t>
+              <a:t>Keyness: distinctively hers</a:t>
             </a:r>
             <a:endParaRPr lang="en-US" sz="3000" dirty="0"/>
           </a:p>
@@ -4076,14 +5140,14 @@
       </p:sp>
       <p:sp>
         <p:nvSpPr>
-          <p:cNvPr id="3" name="Shape 1"/>
-          <p:cNvSpPr/>
-          <p:nvPr/>
-        </p:nvSpPr>
-        <p:spPr>
-          <a:xfrm>
-            <a:off x="640080" y="1810512"/>
-            <a:ext cx="219456" cy="219456"/>
+          <p:cNvPr id="5" name="Shape 3"/>
+          <p:cNvSpPr/>
+          <p:nvPr/>
+        </p:nvSpPr>
+        <p:spPr>
+          <a:xfrm>
+            <a:off x="640080" y="2331720"/>
+            <a:ext cx="201168" cy="201168"/>
           </a:xfrm>
           <a:prstGeom prst="ellipse">
             <a:avLst/>
@@ -4096,53 +5160,78 @@
       </p:sp>
       <p:sp>
         <p:nvSpPr>
-          <p:cNvPr id="4" name="Text 2"/>
-          <p:cNvSpPr/>
-          <p:nvPr/>
-        </p:nvSpPr>
-        <p:spPr>
-          <a:xfrm>
-            <a:off x="1051560" y="1737360"/>
-            <a:ext cx="10424160" cy="365760"/>
-          </a:xfrm>
-          <a:prstGeom prst="rect">
-            <a:avLst/>
-          </a:prstGeom>
-          <a:noFill/>
-          <a:ln/>
-        </p:spPr>
-        <p:txBody>
-          <a:bodyPr wrap="square" rtlCol="0" anchor="ctr"/>
+          <p:cNvPr id="6" name="Text 4"/>
+          <p:cNvSpPr/>
+          <p:nvPr/>
+        </p:nvSpPr>
+        <p:spPr>
+          <a:xfrm>
+            <a:off x="1097280" y="2240280"/>
+            <a:ext cx="10607040" cy="1017270"/>
+          </a:xfrm>
+          <a:prstGeom prst="rect">
+            <a:avLst/>
+          </a:prstGeom>
+          <a:noFill/>
+          <a:ln/>
+        </p:spPr>
+        <p:txBody>
+          <a:bodyPr wrap="square" rtlCol="0" anchor="t">
+            <a:spAutoFit/>
+          </a:bodyPr>
           <a:lstStyle/>
           <a:p>
             <a:pPr indent="0" marL="0">
-              <a:buNone/>
-            </a:pPr>
-            <a:r>
-              <a:rPr lang="en-US" sz="1500" b="1" dirty="0">
-                <a:solidFill>
-                  <a:srgbClr val="7A3B2E"/>
+              <a:lnSpc>
+                <a:spcPct val="112000"/>
+              </a:lnSpc>
+              <a:buNone/>
+            </a:pPr>
+            <a:r>
+              <a:rPr lang="en-US" sz="1650" dirty="0">
+                <a:solidFill>
+                  <a:srgbClr val="1A1A1A"/>
                 </a:solidFill>
                 <a:latin typeface="Calibri" pitchFamily="34" charset="0"/>
                 <a:ea typeface="Calibri" pitchFamily="34" charset="-122"/>
                 <a:cs typeface="Calibri" pitchFamily="34" charset="-120"/>
               </a:rPr>
-              <a:t>Reading</a:t>
-            </a:r>
-            <a:endParaRPr lang="en-US" sz="1500" dirty="0"/>
-          </a:p>
-        </p:txBody>
-      </p:sp>
-      <p:sp>
-        <p:nvSpPr>
-          <p:cNvPr id="5" name="Text 3"/>
-          <p:cNvSpPr/>
-          <p:nvPr/>
-        </p:nvSpPr>
-        <p:spPr>
-          <a:xfrm>
-            <a:off x="1051560" y="2121408"/>
-            <a:ext cx="10424160" cy="731520"/>
+              <a:t>For every word: how much likelier is it in corpus A than corpus B? A log-odds ratio, smoothed so rare words don't explode.</a:t>
+            </a:r>
+            <a:endParaRPr lang="en-US" sz="1650" dirty="0"/>
+          </a:p>
+        </p:txBody>
+      </p:sp>
+      <p:sp>
+        <p:nvSpPr>
+          <p:cNvPr id="7" name="Shape 5"/>
+          <p:cNvSpPr/>
+          <p:nvPr/>
+        </p:nvSpPr>
+        <p:spPr>
+          <a:xfrm>
+            <a:off x="640080" y="3348990"/>
+            <a:ext cx="201168" cy="201168"/>
+          </a:xfrm>
+          <a:prstGeom prst="ellipse">
+            <a:avLst/>
+          </a:prstGeom>
+          <a:solidFill>
+            <a:srgbClr val="3F6F5F"/>
+          </a:solidFill>
+          <a:ln/>
+        </p:spPr>
+      </p:sp>
+      <p:sp>
+        <p:nvSpPr>
+          <p:cNvPr id="8" name="Text 6"/>
+          <p:cNvSpPr/>
+          <p:nvPr/>
+        </p:nvSpPr>
+        <p:spPr>
+          <a:xfrm>
+            <a:off x="1097280" y="3257550"/>
+            <a:ext cx="10607040" cy="1017270"/>
           </a:xfrm>
           <a:prstGeom prst="rect">
             <a:avLst/>
@@ -4157,10 +5246,13 @@
           <a:lstStyle/>
           <a:p>
             <a:pPr indent="0" marL="0">
-              <a:buNone/>
-            </a:pPr>
-            <a:r>
-              <a:rPr lang="en-US" sz="1400" dirty="0">
+              <a:lnSpc>
+                <a:spcPct val="112000"/>
+              </a:lnSpc>
+              <a:buNone/>
+            </a:pPr>
+            <a:r>
+              <a:rPr lang="en-US" sz="1650" dirty="0">
                 <a:solidFill>
                   <a:srgbClr val="1A1A1A"/>
                 </a:solidFill>
@@ -4168,81 +5260,106 @@
                 <a:ea typeface="Calibri" pitchFamily="34" charset="-122"/>
                 <a:cs typeface="Calibri" pitchFamily="34" charset="-120"/>
               </a:rPr>
-              <a:t>Wolfram, What Is ChatGPT Doing (opening sections only)</a:t>
-            </a:r>
-            <a:endParaRPr lang="en-US" sz="1400" dirty="0"/>
-          </a:p>
-        </p:txBody>
-      </p:sp>
-      <p:sp>
-        <p:nvSpPr>
-          <p:cNvPr id="6" name="Shape 4"/>
-          <p:cNvSpPr/>
-          <p:nvPr/>
-        </p:nvSpPr>
-        <p:spPr>
-          <a:xfrm>
-            <a:off x="640080" y="2953512"/>
-            <a:ext cx="219456" cy="219456"/>
+              <a:t>Strongly positive = distinctively A. Strongly negative = distinctively B. The middle is shared language.</a:t>
+            </a:r>
+            <a:endParaRPr lang="en-US" sz="1650" dirty="0"/>
+          </a:p>
+        </p:txBody>
+      </p:sp>
+      <p:sp>
+        <p:nvSpPr>
+          <p:cNvPr id="9" name="Shape 7"/>
+          <p:cNvSpPr/>
+          <p:nvPr/>
+        </p:nvSpPr>
+        <p:spPr>
+          <a:xfrm>
+            <a:off x="640080" y="4366260"/>
+            <a:ext cx="201168" cy="201168"/>
           </a:xfrm>
           <a:prstGeom prst="ellipse">
             <a:avLst/>
           </a:prstGeom>
           <a:solidFill>
-            <a:srgbClr val="3F6F5F"/>
-          </a:solidFill>
-          <a:ln/>
-        </p:spPr>
-      </p:sp>
-      <p:sp>
-        <p:nvSpPr>
-          <p:cNvPr id="7" name="Text 5"/>
-          <p:cNvSpPr/>
-          <p:nvPr/>
-        </p:nvSpPr>
-        <p:spPr>
-          <a:xfrm>
-            <a:off x="1051560" y="2880360"/>
-            <a:ext cx="10424160" cy="365760"/>
-          </a:xfrm>
-          <a:prstGeom prst="rect">
-            <a:avLst/>
-          </a:prstGeom>
-          <a:noFill/>
-          <a:ln/>
-        </p:spPr>
-        <p:txBody>
-          <a:bodyPr wrap="square" rtlCol="0" anchor="ctr"/>
+            <a:srgbClr val="B9852F"/>
+          </a:solidFill>
+          <a:ln/>
+        </p:spPr>
+      </p:sp>
+      <p:sp>
+        <p:nvSpPr>
+          <p:cNvPr id="10" name="Text 8"/>
+          <p:cNvSpPr/>
+          <p:nvPr/>
+        </p:nvSpPr>
+        <p:spPr>
+          <a:xfrm>
+            <a:off x="1097280" y="4274820"/>
+            <a:ext cx="10607040" cy="1017270"/>
+          </a:xfrm>
+          <a:prstGeom prst="rect">
+            <a:avLst/>
+          </a:prstGeom>
+          <a:noFill/>
+          <a:ln/>
+        </p:spPr>
+        <p:txBody>
+          <a:bodyPr wrap="square" rtlCol="0" anchor="t">
+            <a:spAutoFit/>
+          </a:bodyPr>
           <a:lstStyle/>
           <a:p>
             <a:pPr indent="0" marL="0">
-              <a:buNone/>
-            </a:pPr>
-            <a:r>
-              <a:rPr lang="en-US" sz="1500" b="1" dirty="0">
-                <a:solidFill>
-                  <a:srgbClr val="3F6F5F"/>
+              <a:lnSpc>
+                <a:spcPct val="112000"/>
+              </a:lnSpc>
+              <a:buNone/>
+            </a:pPr>
+            <a:r>
+              <a:rPr lang="en-US" sz="1650" dirty="0">
+                <a:solidFill>
+                  <a:srgbClr val="1A1A1A"/>
                 </a:solidFill>
                 <a:latin typeface="Calibri" pitchFamily="34" charset="0"/>
                 <a:ea typeface="Calibri" pitchFamily="34" charset="-122"/>
                 <a:cs typeface="Calibri" pitchFamily="34" charset="-120"/>
               </a:rPr>
-              <a:t>Supplement</a:t>
-            </a:r>
-            <a:endParaRPr lang="en-US" sz="1500" dirty="0"/>
-          </a:p>
-        </p:txBody>
-      </p:sp>
-      <p:sp>
-        <p:nvSpPr>
-          <p:cNvPr id="8" name="Text 6"/>
-          <p:cNvSpPr/>
-          <p:nvPr/>
-        </p:nvSpPr>
-        <p:spPr>
-          <a:xfrm>
-            <a:off x="1051560" y="3264408"/>
-            <a:ext cx="10424160" cy="731520"/>
+              <a:t>She Giggles, He Gallops IS this method: verbs after "she" vs. "he" in 2,000 screenplays. Women snuggle, giggle, squeal; men gallop, strap, shoot.</a:t>
+            </a:r>
+            <a:endParaRPr lang="en-US" sz="1650" dirty="0"/>
+          </a:p>
+        </p:txBody>
+      </p:sp>
+      <p:sp>
+        <p:nvSpPr>
+          <p:cNvPr id="11" name="Shape 9"/>
+          <p:cNvSpPr/>
+          <p:nvPr/>
+        </p:nvSpPr>
+        <p:spPr>
+          <a:xfrm>
+            <a:off x="640080" y="5383530"/>
+            <a:ext cx="201168" cy="201168"/>
+          </a:xfrm>
+          <a:prstGeom prst="ellipse">
+            <a:avLst/>
+          </a:prstGeom>
+          <a:solidFill>
+            <a:srgbClr val="7A3B2E"/>
+          </a:solidFill>
+          <a:ln/>
+        </p:spPr>
+      </p:sp>
+      <p:sp>
+        <p:nvSpPr>
+          <p:cNvPr id="12" name="Text 10"/>
+          <p:cNvSpPr/>
+          <p:nvPr/>
+        </p:nvSpPr>
+        <p:spPr>
+          <a:xfrm>
+            <a:off x="1097280" y="5292090"/>
+            <a:ext cx="10607040" cy="1017270"/>
           </a:xfrm>
           <a:prstGeom prst="rect">
             <a:avLst/>
@@ -4257,10 +5374,13 @@
           <a:lstStyle/>
           <a:p>
             <a:pPr indent="0" marL="0">
-              <a:buNone/>
-            </a:pPr>
-            <a:r>
-              <a:rPr lang="en-US" sz="1400" dirty="0">
+              <a:lnSpc>
+                <a:spcPct val="112000"/>
+              </a:lnSpc>
+              <a:buNone/>
+            </a:pPr>
+            <a:r>
+              <a:rPr lang="en-US" sz="1650" dirty="0">
                 <a:solidFill>
                   <a:srgbClr val="1A1A1A"/>
                 </a:solidFill>
@@ -4268,209 +5388,9 @@
                 <a:ea typeface="Calibri" pitchFamily="34" charset="-122"/>
                 <a:cs typeface="Calibri" pitchFamily="34" charset="-120"/>
               </a:rPr>
-              <a:t>Zipf's law, the straight line in every text</a:t>
-            </a:r>
-            <a:endParaRPr lang="en-US" sz="1400" dirty="0"/>
-          </a:p>
-        </p:txBody>
-      </p:sp>
-      <p:sp>
-        <p:nvSpPr>
-          <p:cNvPr id="9" name="Shape 7"/>
-          <p:cNvSpPr/>
-          <p:nvPr/>
-        </p:nvSpPr>
-        <p:spPr>
-          <a:xfrm>
-            <a:off x="640080" y="4096512"/>
-            <a:ext cx="219456" cy="219456"/>
-          </a:xfrm>
-          <a:prstGeom prst="ellipse">
-            <a:avLst/>
-          </a:prstGeom>
-          <a:solidFill>
-            <a:srgbClr val="B9852F"/>
-          </a:solidFill>
-          <a:ln/>
-        </p:spPr>
-      </p:sp>
-      <p:sp>
-        <p:nvSpPr>
-          <p:cNvPr id="10" name="Text 8"/>
-          <p:cNvSpPr/>
-          <p:nvPr/>
-        </p:nvSpPr>
-        <p:spPr>
-          <a:xfrm>
-            <a:off x="1051560" y="4023360"/>
-            <a:ext cx="10424160" cy="365760"/>
-          </a:xfrm>
-          <a:prstGeom prst="rect">
-            <a:avLst/>
-          </a:prstGeom>
-          <a:noFill/>
-          <a:ln/>
-        </p:spPr>
-        <p:txBody>
-          <a:bodyPr wrap="square" rtlCol="0" anchor="ctr"/>
-          <a:lstStyle/>
-          <a:p>
-            <a:pPr indent="0" marL="0">
-              <a:buNone/>
-            </a:pPr>
-            <a:r>
-              <a:rPr lang="en-US" sz="1500" b="1" dirty="0">
-                <a:solidFill>
-                  <a:srgbClr val="B9852F"/>
-                </a:solidFill>
-                <a:latin typeface="Calibri" pitchFamily="34" charset="0"/>
-                <a:ea typeface="Calibri" pitchFamily="34" charset="-122"/>
-                <a:cs typeface="Calibri" pitchFamily="34" charset="-120"/>
-              </a:rPr>
-              <a:t>Sketch</a:t>
-            </a:r>
-            <a:endParaRPr lang="en-US" sz="1500" dirty="0"/>
-          </a:p>
-        </p:txBody>
-      </p:sp>
-      <p:sp>
-        <p:nvSpPr>
-          <p:cNvPr id="11" name="Text 9"/>
-          <p:cNvSpPr/>
-          <p:nvPr/>
-        </p:nvSpPr>
-        <p:spPr>
-          <a:xfrm>
-            <a:off x="1051560" y="4407408"/>
-            <a:ext cx="10424160" cy="731520"/>
-          </a:xfrm>
-          <a:prstGeom prst="rect">
-            <a:avLst/>
-          </a:prstGeom>
-          <a:noFill/>
-          <a:ln/>
-        </p:spPr>
-        <p:txBody>
-          <a:bodyPr wrap="square" rtlCol="0" anchor="t">
-            <a:spAutoFit/>
-          </a:bodyPr>
-          <a:lstStyle/>
-          <a:p>
-            <a:pPr indent="0" marL="0">
-              <a:buNone/>
-            </a:pPr>
-            <a:r>
-              <a:rPr lang="en-US" sz="1400" dirty="0">
-                <a:solidFill>
-                  <a:srgbClr val="1A1A1A"/>
-                </a:solidFill>
-                <a:latin typeface="Calibri" pitchFamily="34" charset="0"/>
-                <a:ea typeface="Calibri" pitchFamily="34" charset="-122"/>
-                <a:cs typeface="Calibri" pitchFamily="34" charset="-120"/>
-              </a:rPr>
-              <a:t>Count something in a text you love; one chart; one sentence naming a choice. Comparing two things? Shuffle-test it.</a:t>
-            </a:r>
-            <a:endParaRPr lang="en-US" sz="1400" dirty="0"/>
-          </a:p>
-        </p:txBody>
-      </p:sp>
-      <p:sp>
-        <p:nvSpPr>
-          <p:cNvPr id="12" name="Shape 10"/>
-          <p:cNvSpPr/>
-          <p:nvPr/>
-        </p:nvSpPr>
-        <p:spPr>
-          <a:xfrm>
-            <a:off x="640080" y="5239512"/>
-            <a:ext cx="219456" cy="219456"/>
-          </a:xfrm>
-          <a:prstGeom prst="ellipse">
-            <a:avLst/>
-          </a:prstGeom>
-          <a:solidFill>
-            <a:srgbClr val="7A3B2E"/>
-          </a:solidFill>
-          <a:ln/>
-        </p:spPr>
-      </p:sp>
-      <p:sp>
-        <p:nvSpPr>
-          <p:cNvPr id="13" name="Text 11"/>
-          <p:cNvSpPr/>
-          <p:nvPr/>
-        </p:nvSpPr>
-        <p:spPr>
-          <a:xfrm>
-            <a:off x="1051560" y="5166360"/>
-            <a:ext cx="10424160" cy="365760"/>
-          </a:xfrm>
-          <a:prstGeom prst="rect">
-            <a:avLst/>
-          </a:prstGeom>
-          <a:noFill/>
-          <a:ln/>
-        </p:spPr>
-        <p:txBody>
-          <a:bodyPr wrap="square" rtlCol="0" anchor="ctr"/>
-          <a:lstStyle/>
-          <a:p>
-            <a:pPr indent="0" marL="0">
-              <a:buNone/>
-            </a:pPr>
-            <a:r>
-              <a:rPr lang="en-US" sz="1500" b="1" dirty="0">
-                <a:solidFill>
-                  <a:srgbClr val="7A3B2E"/>
-                </a:solidFill>
-                <a:latin typeface="Calibri" pitchFamily="34" charset="0"/>
-                <a:ea typeface="Calibri" pitchFamily="34" charset="-122"/>
-                <a:cs typeface="Calibri" pitchFamily="34" charset="-120"/>
-              </a:rPr>
-              <a:t>Check (AI closed)</a:t>
-            </a:r>
-            <a:endParaRPr lang="en-US" sz="1500" dirty="0"/>
-          </a:p>
-        </p:txBody>
-      </p:sp>
-      <p:sp>
-        <p:nvSpPr>
-          <p:cNvPr id="14" name="Text 12"/>
-          <p:cNvSpPr/>
-          <p:nvPr/>
-        </p:nvSpPr>
-        <p:spPr>
-          <a:xfrm>
-            <a:off x="1051560" y="5550408"/>
-            <a:ext cx="10424160" cy="731520"/>
-          </a:xfrm>
-          <a:prstGeom prst="rect">
-            <a:avLst/>
-          </a:prstGeom>
-          <a:noFill/>
-          <a:ln/>
-        </p:spPr>
-        <p:txBody>
-          <a:bodyPr wrap="square" rtlCol="0" anchor="t">
-            <a:spAutoFit/>
-          </a:bodyPr>
-          <a:lstStyle/>
-          <a:p>
-            <a:pPr indent="0" marL="0">
-              <a:buNone/>
-            </a:pPr>
-            <a:r>
-              <a:rPr lang="en-US" sz="1400" dirty="0">
-                <a:solidFill>
-                  <a:srgbClr val="1A1A1A"/>
-                </a:solidFill>
-                <a:latin typeface="Calibri" pitchFamily="34" charset="0"/>
-                <a:ea typeface="Calibri" pitchFamily="34" charset="-122"/>
-                <a:cs typeface="Calibri" pitchFamily="34" charset="-120"/>
-              </a:rPr>
-              <a:t>Explain it: why two tokenizers split a sentence differently, and what your stemming choice changed. (Competencies 3, 5.)</a:t>
-            </a:r>
-            <a:endParaRPr lang="en-US" sz="1400" dirty="0"/>
+              <a:t>The corpus pair is a choice: this artist against pop, this subreddit against a novel. Different pair, different "distinctive."</a:t>
+            </a:r>
+            <a:endParaRPr lang="en-US" sz="1650" dirty="0"/>
           </a:p>
         </p:txBody>
       </p:sp>
@@ -4508,7 +5428,27 @@
       </p:grpSpPr>
       <p:sp>
         <p:nvSpPr>
-          <p:cNvPr id="2" name="Text 0"/>
+          <p:cNvPr id="2" name="Shape 0"/>
+          <p:cNvSpPr/>
+          <p:nvPr/>
+        </p:nvSpPr>
+        <p:spPr>
+          <a:xfrm>
+            <a:off x="0" y="0"/>
+            <a:ext cx="164592" cy="6858000"/>
+          </a:xfrm>
+          <a:prstGeom prst="rect">
+            <a:avLst/>
+          </a:prstGeom>
+          <a:solidFill>
+            <a:srgbClr val="7A3B2E"/>
+          </a:solidFill>
+          <a:ln/>
+        </p:spPr>
+      </p:sp>
+      <p:sp>
+        <p:nvSpPr>
+          <p:cNvPr id="3" name="Text 1"/>
           <p:cNvSpPr/>
           <p:nvPr/>
         </p:nvSpPr>
@@ -4531,7 +5471,7 @@
               <a:buNone/>
             </a:pPr>
             <a:r>
-              <a:rPr lang="en-US" sz="1300" b="1" spc="300" kern="0" dirty="0">
+              <a:rPr lang="en-US" sz="1200" b="1" spc="300" kern="0" dirty="0">
                 <a:solidFill>
                   <a:srgbClr val="7A3B2E"/>
                 </a:solidFill>
@@ -4539,38 +5479,40 @@
                 <a:ea typeface="Calibri" pitchFamily="34" charset="-122"/>
                 <a:cs typeface="Calibri" pitchFamily="34" charset="-120"/>
               </a:rPr>
-              <a:t>HOW THIS WEEK CONNECTS</a:t>
-            </a:r>
-            <a:endParaRPr lang="en-US" sz="1300" dirty="0"/>
-          </a:p>
-        </p:txBody>
-      </p:sp>
-      <p:sp>
-        <p:nvSpPr>
-          <p:cNvPr id="3" name="Text 1"/>
-          <p:cNvSpPr/>
-          <p:nvPr/>
-        </p:nvSpPr>
-        <p:spPr>
-          <a:xfrm>
-            <a:off x="640080" y="987552"/>
-            <a:ext cx="10058400" cy="640080"/>
-          </a:xfrm>
-          <a:prstGeom prst="rect">
-            <a:avLst/>
-          </a:prstGeom>
-          <a:noFill/>
-          <a:ln/>
-        </p:spPr>
-        <p:txBody>
-          <a:bodyPr wrap="square" rtlCol="0" anchor="ctr"/>
+              <a:t>WEEK 2 · THE MATERIAL</a:t>
+            </a:r>
+            <a:endParaRPr lang="en-US" sz="1200" dirty="0"/>
+          </a:p>
+        </p:txBody>
+      </p:sp>
+      <p:sp>
+        <p:nvSpPr>
+          <p:cNvPr id="4" name="Text 2"/>
+          <p:cNvSpPr/>
+          <p:nvPr/>
+        </p:nvSpPr>
+        <p:spPr>
+          <a:xfrm>
+            <a:off x="640080" y="1005840"/>
+            <a:ext cx="10881360" cy="914400"/>
+          </a:xfrm>
+          <a:prstGeom prst="rect">
+            <a:avLst/>
+          </a:prstGeom>
+          <a:noFill/>
+          <a:ln/>
+        </p:spPr>
+        <p:txBody>
+          <a:bodyPr wrap="square" rtlCol="0" anchor="t">
+            <a:spAutoFit/>
+          </a:bodyPr>
           <a:lstStyle/>
           <a:p>
             <a:pPr indent="0" marL="0">
               <a:buNone/>
             </a:pPr>
             <a:r>
-              <a:rPr lang="en-US" sz="2800" b="1" dirty="0">
+              <a:rPr lang="en-US" sz="3000" b="1" dirty="0">
                 <a:solidFill>
                   <a:srgbClr val="1A1A1A"/>
                 </a:solidFill>
@@ -4578,27 +5520,25 @@
                 <a:ea typeface="Cambria" pitchFamily="34" charset="-122"/>
                 <a:cs typeface="Cambria" pitchFamily="34" charset="-120"/>
               </a:rPr>
-              <a:t>The course's through-lines</a:t>
-            </a:r>
-            <a:endParaRPr lang="en-US" sz="2800" dirty="0"/>
-          </a:p>
-        </p:txBody>
-      </p:sp>
-      <p:sp>
-        <p:nvSpPr>
-          <p:cNvPr id="4" name="Shape 2"/>
-          <p:cNvSpPr/>
-          <p:nvPr/>
-        </p:nvSpPr>
-        <p:spPr>
-          <a:xfrm>
-            <a:off x="640080" y="2057400"/>
-            <a:ext cx="457200" cy="457200"/>
-          </a:xfrm>
-          <a:prstGeom prst="roundRect">
-            <a:avLst>
-              <a:gd name="adj" fmla="val 16000"/>
-            </a:avLst>
+              <a:t>The shuffle test: is the gap real?</a:t>
+            </a:r>
+            <a:endParaRPr lang="en-US" sz="3000" dirty="0"/>
+          </a:p>
+        </p:txBody>
+      </p:sp>
+      <p:sp>
+        <p:nvSpPr>
+          <p:cNvPr id="5" name="Shape 3"/>
+          <p:cNvSpPr/>
+          <p:nvPr/>
+        </p:nvSpPr>
+        <p:spPr>
+          <a:xfrm>
+            <a:off x="640080" y="2331720"/>
+            <a:ext cx="201168" cy="201168"/>
+          </a:xfrm>
+          <a:prstGeom prst="ellipse">
+            <a:avLst/>
           </a:prstGeom>
           <a:solidFill>
             <a:srgbClr val="7A3B2E"/>
@@ -4608,92 +5548,14 @@
       </p:sp>
       <p:sp>
         <p:nvSpPr>
-          <p:cNvPr id="5" name="Text 3"/>
-          <p:cNvSpPr/>
-          <p:nvPr/>
-        </p:nvSpPr>
-        <p:spPr>
-          <a:xfrm>
-            <a:off x="640080" y="2057400"/>
-            <a:ext cx="457200" cy="457200"/>
-          </a:xfrm>
-          <a:prstGeom prst="rect">
-            <a:avLst/>
-          </a:prstGeom>
-          <a:noFill/>
-          <a:ln/>
-        </p:spPr>
-        <p:txBody>
-          <a:bodyPr wrap="square" rtlCol="0" anchor="ctr"/>
-          <a:lstStyle/>
-          <a:p>
-            <a:pPr algn="ctr" indent="0" marL="0">
-              <a:buNone/>
-            </a:pPr>
-            <a:r>
-              <a:rPr lang="en-US" sz="2000" b="1" dirty="0">
-                <a:solidFill>
-                  <a:srgbClr val="FFFFFF"/>
-                </a:solidFill>
-                <a:latin typeface="Cambria" pitchFamily="34" charset="0"/>
-                <a:ea typeface="Cambria" pitchFamily="34" charset="-122"/>
-                <a:cs typeface="Cambria" pitchFamily="34" charset="-120"/>
-              </a:rPr>
-              <a:t>1</a:t>
-            </a:r>
-            <a:endParaRPr lang="en-US" sz="2000" dirty="0"/>
-          </a:p>
-        </p:txBody>
-      </p:sp>
-      <p:sp>
-        <p:nvSpPr>
           <p:cNvPr id="6" name="Text 4"/>
           <p:cNvSpPr/>
           <p:nvPr/>
         </p:nvSpPr>
         <p:spPr>
           <a:xfrm>
-            <a:off x="1371600" y="2020824"/>
-            <a:ext cx="10332720" cy="411480"/>
-          </a:xfrm>
-          <a:prstGeom prst="rect">
-            <a:avLst/>
-          </a:prstGeom>
-          <a:noFill/>
-          <a:ln/>
-        </p:spPr>
-        <p:txBody>
-          <a:bodyPr wrap="square" rtlCol="0" anchor="ctr"/>
-          <a:lstStyle/>
-          <a:p>
-            <a:pPr indent="0" marL="0">
-              <a:buNone/>
-            </a:pPr>
-            <a:r>
-              <a:rPr lang="en-US" sz="1900" b="1" dirty="0">
-                <a:solidFill>
-                  <a:srgbClr val="7A3B2E"/>
-                </a:solidFill>
-                <a:latin typeface="Cambria" pitchFamily="34" charset="0"/>
-                <a:ea typeface="Cambria" pitchFamily="34" charset="-122"/>
-                <a:cs typeface="Cambria" pitchFamily="34" charset="-120"/>
-              </a:rPr>
-              <a:t>Beyond counting</a:t>
-            </a:r>
-            <a:endParaRPr lang="en-US" sz="1900" dirty="0"/>
-          </a:p>
-        </p:txBody>
-      </p:sp>
-      <p:sp>
-        <p:nvSpPr>
-          <p:cNvPr id="7" name="Text 5"/>
-          <p:cNvSpPr/>
-          <p:nvPr/>
-        </p:nvSpPr>
-        <p:spPr>
-          <a:xfrm>
-            <a:off x="1371600" y="2441448"/>
-            <a:ext cx="10332720" cy="914400"/>
+            <a:off x="1097280" y="2240280"/>
+            <a:ext cx="10607040" cy="1017270"/>
           </a:xfrm>
           <a:prstGeom prst="rect">
             <a:avLst/>
@@ -4714,7 +5576,7 @@
               <a:buNone/>
             </a:pPr>
             <a:r>
-              <a:rPr lang="en-US" sz="1450" dirty="0">
+              <a:rPr lang="en-US" sz="1650" dirty="0">
                 <a:solidFill>
                   <a:srgbClr val="1A1A1A"/>
                 </a:solidFill>
@@ -4722,27 +5584,25 @@
                 <a:ea typeface="Calibri" pitchFamily="34" charset="-122"/>
                 <a:cs typeface="Calibri" pitchFamily="34" charset="-120"/>
               </a:rPr>
-              <a:t>Counting is the honest floor, with no notion of meaning. This sets up the Week 5 payoff.</a:t>
-            </a:r>
-            <a:endParaRPr lang="en-US" sz="1450" dirty="0"/>
-          </a:p>
-        </p:txBody>
-      </p:sp>
-      <p:sp>
-        <p:nvSpPr>
-          <p:cNvPr id="8" name="Shape 6"/>
-          <p:cNvSpPr/>
-          <p:nvPr/>
-        </p:nvSpPr>
-        <p:spPr>
-          <a:xfrm>
-            <a:off x="640080" y="3520440"/>
-            <a:ext cx="457200" cy="457200"/>
-          </a:xfrm>
-          <a:prstGeom prst="roundRect">
-            <a:avLst>
-              <a:gd name="adj" fmla="val 16000"/>
-            </a:avLst>
+              <a:t>The question chance asks: could randomly dealt labels produce a gap this big?</a:t>
+            </a:r>
+            <a:endParaRPr lang="en-US" sz="1650" dirty="0"/>
+          </a:p>
+        </p:txBody>
+      </p:sp>
+      <p:sp>
+        <p:nvSpPr>
+          <p:cNvPr id="7" name="Shape 5"/>
+          <p:cNvSpPr/>
+          <p:nvPr/>
+        </p:nvSpPr>
+        <p:spPr>
+          <a:xfrm>
+            <a:off x="640080" y="3348990"/>
+            <a:ext cx="201168" cy="201168"/>
+          </a:xfrm>
+          <a:prstGeom prst="ellipse">
+            <a:avLst/>
           </a:prstGeom>
           <a:solidFill>
             <a:srgbClr val="3F6F5F"/>
@@ -4752,92 +5612,14 @@
       </p:sp>
       <p:sp>
         <p:nvSpPr>
-          <p:cNvPr id="9" name="Text 7"/>
-          <p:cNvSpPr/>
-          <p:nvPr/>
-        </p:nvSpPr>
-        <p:spPr>
-          <a:xfrm>
-            <a:off x="640080" y="3520440"/>
-            <a:ext cx="457200" cy="457200"/>
-          </a:xfrm>
-          <a:prstGeom prst="rect">
-            <a:avLst/>
-          </a:prstGeom>
-          <a:noFill/>
-          <a:ln/>
-        </p:spPr>
-        <p:txBody>
-          <a:bodyPr wrap="square" rtlCol="0" anchor="ctr"/>
-          <a:lstStyle/>
-          <a:p>
-            <a:pPr algn="ctr" indent="0" marL="0">
-              <a:buNone/>
-            </a:pPr>
-            <a:r>
-              <a:rPr lang="en-US" sz="2000" b="1" dirty="0">
-                <a:solidFill>
-                  <a:srgbClr val="FFFFFF"/>
-                </a:solidFill>
-                <a:latin typeface="Cambria" pitchFamily="34" charset="0"/>
-                <a:ea typeface="Cambria" pitchFamily="34" charset="-122"/>
-                <a:cs typeface="Cambria" pitchFamily="34" charset="-120"/>
-              </a:rPr>
-              <a:t>2</a:t>
-            </a:r>
-            <a:endParaRPr lang="en-US" sz="2000" dirty="0"/>
-          </a:p>
-        </p:txBody>
-      </p:sp>
-      <p:sp>
-        <p:nvSpPr>
-          <p:cNvPr id="10" name="Text 8"/>
-          <p:cNvSpPr/>
-          <p:nvPr/>
-        </p:nvSpPr>
-        <p:spPr>
-          <a:xfrm>
-            <a:off x="1371600" y="3483864"/>
-            <a:ext cx="10332720" cy="411480"/>
-          </a:xfrm>
-          <a:prstGeom prst="rect">
-            <a:avLst/>
-          </a:prstGeom>
-          <a:noFill/>
-          <a:ln/>
-        </p:spPr>
-        <p:txBody>
-          <a:bodyPr wrap="square" rtlCol="0" anchor="ctr"/>
-          <a:lstStyle/>
-          <a:p>
-            <a:pPr indent="0" marL="0">
-              <a:buNone/>
-            </a:pPr>
-            <a:r>
-              <a:rPr lang="en-US" sz="1900" b="1" dirty="0">
-                <a:solidFill>
-                  <a:srgbClr val="3F6F5F"/>
-                </a:solidFill>
-                <a:latin typeface="Cambria" pitchFamily="34" charset="0"/>
-                <a:ea typeface="Cambria" pitchFamily="34" charset="-122"/>
-                <a:cs typeface="Cambria" pitchFamily="34" charset="-120"/>
-              </a:rPr>
-              <a:t>Every count is a choice</a:t>
-            </a:r>
-            <a:endParaRPr lang="en-US" sz="1900" dirty="0"/>
-          </a:p>
-        </p:txBody>
-      </p:sp>
-      <p:sp>
-        <p:nvSpPr>
-          <p:cNvPr id="11" name="Text 9"/>
-          <p:cNvSpPr/>
-          <p:nvPr/>
-        </p:nvSpPr>
-        <p:spPr>
-          <a:xfrm>
-            <a:off x="1371600" y="3904488"/>
-            <a:ext cx="10332720" cy="914400"/>
+          <p:cNvPr id="8" name="Text 6"/>
+          <p:cNvSpPr/>
+          <p:nvPr/>
+        </p:nvSpPr>
+        <p:spPr>
+          <a:xfrm>
+            <a:off x="1097280" y="3257550"/>
+            <a:ext cx="10607040" cy="1017270"/>
           </a:xfrm>
           <a:prstGeom prst="rect">
             <a:avLst/>
@@ -4858,7 +5640,7 @@
               <a:buNone/>
             </a:pPr>
             <a:r>
-              <a:rPr lang="en-US" sz="1450" dirty="0">
+              <a:rPr lang="en-US" sz="1650" dirty="0">
                 <a:solidFill>
                   <a:srgbClr val="1A1A1A"/>
                 </a:solidFill>
@@ -4866,27 +5648,25 @@
                 <a:ea typeface="Calibri" pitchFamily="34" charset="-122"/>
                 <a:cs typeface="Calibri" pitchFamily="34" charset="-120"/>
               </a:rPr>
-              <a:t>Tokens, stemming, the corpus, the chart's axis, each hides a decision you made.</a:t>
-            </a:r>
-            <a:endParaRPr lang="en-US" sz="1450" dirty="0"/>
-          </a:p>
-        </p:txBody>
-      </p:sp>
-      <p:sp>
-        <p:nvSpPr>
-          <p:cNvPr id="12" name="Shape 10"/>
-          <p:cNvSpPr/>
-          <p:nvPr/>
-        </p:nvSpPr>
-        <p:spPr>
-          <a:xfrm>
-            <a:off x="640080" y="4983480"/>
-            <a:ext cx="457200" cy="457200"/>
-          </a:xfrm>
-          <a:prstGeom prst="roundRect">
-            <a:avLst>
-              <a:gd name="adj" fmla="val 16000"/>
-            </a:avLst>
+              <a:t>Shuffle the labels, recount, 1,000 times. Mark where the real gap lands in that pile.</a:t>
+            </a:r>
+            <a:endParaRPr lang="en-US" sz="1650" dirty="0"/>
+          </a:p>
+        </p:txBody>
+      </p:sp>
+      <p:sp>
+        <p:nvSpPr>
+          <p:cNvPr id="9" name="Shape 7"/>
+          <p:cNvSpPr/>
+          <p:nvPr/>
+        </p:nvSpPr>
+        <p:spPr>
+          <a:xfrm>
+            <a:off x="640080" y="4366260"/>
+            <a:ext cx="201168" cy="201168"/>
+          </a:xfrm>
+          <a:prstGeom prst="ellipse">
+            <a:avLst/>
           </a:prstGeom>
           <a:solidFill>
             <a:srgbClr val="B9852F"/>
@@ -4896,92 +5676,14 @@
       </p:sp>
       <p:sp>
         <p:nvSpPr>
-          <p:cNvPr id="13" name="Text 11"/>
-          <p:cNvSpPr/>
-          <p:nvPr/>
-        </p:nvSpPr>
-        <p:spPr>
-          <a:xfrm>
-            <a:off x="640080" y="4983480"/>
-            <a:ext cx="457200" cy="457200"/>
-          </a:xfrm>
-          <a:prstGeom prst="rect">
-            <a:avLst/>
-          </a:prstGeom>
-          <a:noFill/>
-          <a:ln/>
-        </p:spPr>
-        <p:txBody>
-          <a:bodyPr wrap="square" rtlCol="0" anchor="ctr"/>
-          <a:lstStyle/>
-          <a:p>
-            <a:pPr algn="ctr" indent="0" marL="0">
-              <a:buNone/>
-            </a:pPr>
-            <a:r>
-              <a:rPr lang="en-US" sz="2000" b="1" dirty="0">
-                <a:solidFill>
-                  <a:srgbClr val="FFFFFF"/>
-                </a:solidFill>
-                <a:latin typeface="Cambria" pitchFamily="34" charset="0"/>
-                <a:ea typeface="Cambria" pitchFamily="34" charset="-122"/>
-                <a:cs typeface="Cambria" pitchFamily="34" charset="-120"/>
-              </a:rPr>
-              <a:t>3</a:t>
-            </a:r>
-            <a:endParaRPr lang="en-US" sz="2000" dirty="0"/>
-          </a:p>
-        </p:txBody>
-      </p:sp>
-      <p:sp>
-        <p:nvSpPr>
-          <p:cNvPr id="14" name="Text 12"/>
-          <p:cNvSpPr/>
-          <p:nvPr/>
-        </p:nvSpPr>
-        <p:spPr>
-          <a:xfrm>
-            <a:off x="1371600" y="4946904"/>
-            <a:ext cx="10332720" cy="411480"/>
-          </a:xfrm>
-          <a:prstGeom prst="rect">
-            <a:avLst/>
-          </a:prstGeom>
-          <a:noFill/>
-          <a:ln/>
-        </p:spPr>
-        <p:txBody>
-          <a:bodyPr wrap="square" rtlCol="0" anchor="ctr"/>
-          <a:lstStyle/>
-          <a:p>
-            <a:pPr indent="0" marL="0">
-              <a:buNone/>
-            </a:pPr>
-            <a:r>
-              <a:rPr lang="en-US" sz="1900" b="1" dirty="0">
-                <a:solidFill>
-                  <a:srgbClr val="B9852F"/>
-                </a:solidFill>
-                <a:latin typeface="Cambria" pitchFamily="34" charset="0"/>
-                <a:ea typeface="Cambria" pitchFamily="34" charset="-122"/>
-                <a:cs typeface="Cambria" pitchFamily="34" charset="-120"/>
-              </a:rPr>
-              <a:t>Is the difference real?</a:t>
-            </a:r>
-            <a:endParaRPr lang="en-US" sz="1900" dirty="0"/>
-          </a:p>
-        </p:txBody>
-      </p:sp>
-      <p:sp>
-        <p:nvSpPr>
-          <p:cNvPr id="15" name="Text 13"/>
-          <p:cNvSpPr/>
-          <p:nvPr/>
-        </p:nvSpPr>
-        <p:spPr>
-          <a:xfrm>
-            <a:off x="1371600" y="5367528"/>
-            <a:ext cx="10332720" cy="914400"/>
+          <p:cNvPr id="10" name="Text 8"/>
+          <p:cNvSpPr/>
+          <p:nvPr/>
+        </p:nvSpPr>
+        <p:spPr>
+          <a:xfrm>
+            <a:off x="1097280" y="4274820"/>
+            <a:ext cx="10607040" cy="1017270"/>
           </a:xfrm>
           <a:prstGeom prst="rect">
             <a:avLst/>
@@ -5002,7 +5704,7 @@
               <a:buNone/>
             </a:pPr>
             <a:r>
-              <a:rPr lang="en-US" sz="1450" dirty="0">
+              <a:rPr lang="en-US" sz="1650" dirty="0">
                 <a:solidFill>
                   <a:srgbClr val="1A1A1A"/>
                 </a:solidFill>
@@ -5010,9 +5712,73 @@
                 <a:ea typeface="Calibri" pitchFamily="34" charset="-122"/>
                 <a:cs typeface="Calibri" pitchFamily="34" charset="-120"/>
               </a:rPr>
-              <a:t>Shuffle the labels and count again, a thousand times; if chance often beats your gap, don't trust it.</a:t>
-            </a:r>
-            <a:endParaRPr lang="en-US" sz="1450" dirty="0"/>
+              <a:t>Chance rarely matches it: a finding. Chance matches it often: a coincidence.</a:t>
+            </a:r>
+            <a:endParaRPr lang="en-US" sz="1650" dirty="0"/>
+          </a:p>
+        </p:txBody>
+      </p:sp>
+      <p:sp>
+        <p:nvSpPr>
+          <p:cNvPr id="11" name="Shape 9"/>
+          <p:cNvSpPr/>
+          <p:nvPr/>
+        </p:nvSpPr>
+        <p:spPr>
+          <a:xfrm>
+            <a:off x="640080" y="5383530"/>
+            <a:ext cx="201168" cy="201168"/>
+          </a:xfrm>
+          <a:prstGeom prst="ellipse">
+            <a:avLst/>
+          </a:prstGeom>
+          <a:solidFill>
+            <a:srgbClr val="7A3B2E"/>
+          </a:solidFill>
+          <a:ln/>
+        </p:spPr>
+      </p:sp>
+      <p:sp>
+        <p:nvSpPr>
+          <p:cNvPr id="12" name="Text 10"/>
+          <p:cNvSpPr/>
+          <p:nvPr/>
+        </p:nvSpPr>
+        <p:spPr>
+          <a:xfrm>
+            <a:off x="1097280" y="5292090"/>
+            <a:ext cx="10607040" cy="1017270"/>
+          </a:xfrm>
+          <a:prstGeom prst="rect">
+            <a:avLst/>
+          </a:prstGeom>
+          <a:noFill/>
+          <a:ln/>
+        </p:spPr>
+        <p:txBody>
+          <a:bodyPr wrap="square" rtlCol="0" anchor="t">
+            <a:spAutoFit/>
+          </a:bodyPr>
+          <a:lstStyle/>
+          <a:p>
+            <a:pPr indent="0" marL="0">
+              <a:lnSpc>
+                <a:spcPct val="112000"/>
+              </a:lnSpc>
+              <a:buNone/>
+            </a:pPr>
+            <a:r>
+              <a:rPr lang="en-US" sz="1650" dirty="0">
+                <a:solidFill>
+                  <a:srgbClr val="1A1A1A"/>
+                </a:solidFill>
+                <a:latin typeface="Calibri" pitchFamily="34" charset="0"/>
+                <a:ea typeface="Calibri" pitchFamily="34" charset="-122"/>
+                <a:cs typeface="Calibri" pitchFamily="34" charset="-120"/>
+              </a:rPr>
+              <a:t>It says "probably not chance." It never says "big enough to matter." Effect size is your argument to make.</a:t>
+            </a:r>
+            <a:endParaRPr lang="en-US" sz="1650" dirty="0"/>
           </a:p>
         </p:txBody>
       </p:sp>
@@ -5030,7 +5796,7 @@
     <p:bg>
       <p:bgPr>
         <a:solidFill>
-          <a:srgbClr val="4E261D"/>
+          <a:srgbClr val="FFFFFF"/>
         </a:solidFill>
       </p:bgPr>
     </p:bg>
@@ -5056,8 +5822,8 @@
         </p:nvSpPr>
         <p:spPr>
           <a:xfrm>
-            <a:off x="640080" y="1005840"/>
-            <a:ext cx="8229600" cy="320040"/>
+            <a:off x="640080" y="731520"/>
+            <a:ext cx="10058400" cy="731520"/>
           </a:xfrm>
           <a:prstGeom prst="rect">
             <a:avLst/>
@@ -5073,30 +5839,150 @@
               <a:buNone/>
             </a:pPr>
             <a:r>
-              <a:rPr lang="en-US" sz="1300" b="1" spc="300" kern="0" dirty="0">
-                <a:solidFill>
-                  <a:srgbClr val="B9852F"/>
+              <a:rPr lang="en-US" sz="3000" b="1" dirty="0">
+                <a:solidFill>
+                  <a:srgbClr val="1A1A1A"/>
+                </a:solidFill>
+                <a:latin typeface="Cambria" pitchFamily="34" charset="0"/>
+                <a:ea typeface="Cambria" pitchFamily="34" charset="-122"/>
+                <a:cs typeface="Cambria" pitchFamily="34" charset="-120"/>
+              </a:rPr>
+              <a:t>Three modes today</a:t>
+            </a:r>
+            <a:endParaRPr lang="en-US" sz="3000" dirty="0"/>
+          </a:p>
+        </p:txBody>
+      </p:sp>
+      <p:sp>
+        <p:nvSpPr>
+          <p:cNvPr id="3" name="Text 1"/>
+          <p:cNvSpPr/>
+          <p:nvPr/>
+        </p:nvSpPr>
+        <p:spPr>
+          <a:xfrm>
+            <a:off x="640080" y="1417320"/>
+            <a:ext cx="10058400" cy="365760"/>
+          </a:xfrm>
+          <a:prstGeom prst="rect">
+            <a:avLst/>
+          </a:prstGeom>
+          <a:noFill/>
+          <a:ln/>
+        </p:spPr>
+        <p:txBody>
+          <a:bodyPr wrap="square" rtlCol="0" anchor="ctr"/>
+          <a:lstStyle/>
+          <a:p>
+            <a:pPr indent="0" marL="0">
+              <a:buNone/>
+            </a:pPr>
+            <a:r>
+              <a:rPr lang="en-US" sz="1400" i="1" dirty="0">
+                <a:solidFill>
+                  <a:srgbClr val="6B6B63"/>
                 </a:solidFill>
                 <a:latin typeface="Calibri" pitchFamily="34" charset="0"/>
                 <a:ea typeface="Calibri" pitchFamily="34" charset="-122"/>
                 <a:cs typeface="Calibri" pitchFamily="34" charset="-120"/>
               </a:rPr>
-              <a:t>THE CHECK, AI CLOSED</a:t>
-            </a:r>
-            <a:endParaRPr lang="en-US" sz="1300" dirty="0"/>
-          </a:p>
-        </p:txBody>
-      </p:sp>
-      <p:sp>
-        <p:nvSpPr>
-          <p:cNvPr id="3" name="Text 1"/>
-          <p:cNvSpPr/>
-          <p:nvPr/>
-        </p:nvSpPr>
-        <p:spPr>
-          <a:xfrm>
-            <a:off x="640080" y="1645920"/>
-            <a:ext cx="8686800" cy="3108960"/>
+              <a:t>about a third of the session each</a:t>
+            </a:r>
+            <a:endParaRPr lang="en-US" sz="1400" dirty="0"/>
+          </a:p>
+        </p:txBody>
+      </p:sp>
+      <p:sp>
+        <p:nvSpPr>
+          <p:cNvPr id="4" name="Shape 2"/>
+          <p:cNvSpPr/>
+          <p:nvPr/>
+        </p:nvSpPr>
+        <p:spPr>
+          <a:xfrm>
+            <a:off x="640080" y="2194560"/>
+            <a:ext cx="3383280" cy="3291840"/>
+          </a:xfrm>
+          <a:prstGeom prst="roundRect">
+            <a:avLst>
+              <a:gd name="adj" fmla="val 3333"/>
+            </a:avLst>
+          </a:prstGeom>
+          <a:solidFill>
+            <a:srgbClr val="F4EEE8"/>
+          </a:solidFill>
+          <a:ln/>
+        </p:spPr>
+      </p:sp>
+      <p:sp>
+        <p:nvSpPr>
+          <p:cNvPr id="5" name="Shape 3"/>
+          <p:cNvSpPr/>
+          <p:nvPr/>
+        </p:nvSpPr>
+        <p:spPr>
+          <a:xfrm>
+            <a:off x="1051560" y="2606040"/>
+            <a:ext cx="548640" cy="548640"/>
+          </a:xfrm>
+          <a:prstGeom prst="ellipse">
+            <a:avLst/>
+          </a:prstGeom>
+          <a:solidFill>
+            <a:srgbClr val="7A3B2E"/>
+          </a:solidFill>
+          <a:ln/>
+        </p:spPr>
+      </p:sp>
+      <p:sp>
+        <p:nvSpPr>
+          <p:cNvPr id="6" name="Text 4"/>
+          <p:cNvSpPr/>
+          <p:nvPr/>
+        </p:nvSpPr>
+        <p:spPr>
+          <a:xfrm>
+            <a:off x="1005840" y="3383280"/>
+            <a:ext cx="2651760" cy="548640"/>
+          </a:xfrm>
+          <a:prstGeom prst="rect">
+            <a:avLst/>
+          </a:prstGeom>
+          <a:noFill/>
+          <a:ln/>
+        </p:spPr>
+        <p:txBody>
+          <a:bodyPr wrap="square" rtlCol="0" anchor="ctr"/>
+          <a:lstStyle/>
+          <a:p>
+            <a:pPr indent="0" marL="0">
+              <a:buNone/>
+            </a:pPr>
+            <a:r>
+              <a:rPr lang="en-US" sz="2100" b="1" dirty="0">
+                <a:solidFill>
+                  <a:srgbClr val="1A1A1A"/>
+                </a:solidFill>
+                <a:latin typeface="Cambria" pitchFamily="34" charset="0"/>
+                <a:ea typeface="Cambria" pitchFamily="34" charset="-122"/>
+                <a:cs typeface="Cambria" pitchFamily="34" charset="-120"/>
+              </a:rPr>
+              <a:t>Lecture / demo</a:t>
+            </a:r>
+            <a:endParaRPr lang="en-US" sz="2100" dirty="0"/>
+          </a:p>
+        </p:txBody>
+      </p:sp>
+      <p:sp>
+        <p:nvSpPr>
+          <p:cNvPr id="7" name="Text 5"/>
+          <p:cNvSpPr/>
+          <p:nvPr/>
+        </p:nvSpPr>
+        <p:spPr>
+          <a:xfrm>
+            <a:off x="1005840" y="3977640"/>
+            <a:ext cx="2651760" cy="1371600"/>
           </a:xfrm>
           <a:prstGeom prst="rect">
             <a:avLst/>
@@ -5117,74 +6003,358 @@
               <a:buNone/>
             </a:pPr>
             <a:r>
-              <a:rPr lang="en-US" sz="2600" dirty="0">
-                <a:solidFill>
-                  <a:srgbClr val="FFFFFF"/>
+              <a:rPr lang="en-US" sz="1500" dirty="0">
+                <a:solidFill>
+                  <a:srgbClr val="1A1A1A"/>
+                </a:solidFill>
+                <a:latin typeface="Calibri" pitchFamily="34" charset="0"/>
+                <a:ea typeface="Calibri" pitchFamily="34" charset="-122"/>
+                <a:cs typeface="Calibri" pitchFamily="34" charset="-120"/>
+              </a:rPr>
+              <a:t>Advanced counting: baselines, keyness, and the shuffle test</a:t>
+            </a:r>
+            <a:endParaRPr lang="en-US" sz="1500" dirty="0"/>
+          </a:p>
+        </p:txBody>
+      </p:sp>
+      <p:sp>
+        <p:nvSpPr>
+          <p:cNvPr id="8" name="Shape 6"/>
+          <p:cNvSpPr/>
+          <p:nvPr/>
+        </p:nvSpPr>
+        <p:spPr>
+          <a:xfrm>
+            <a:off x="4526280" y="2194560"/>
+            <a:ext cx="3383280" cy="3291840"/>
+          </a:xfrm>
+          <a:prstGeom prst="roundRect">
+            <a:avLst>
+              <a:gd name="adj" fmla="val 3333"/>
+            </a:avLst>
+          </a:prstGeom>
+          <a:solidFill>
+            <a:srgbClr val="F4EEE8"/>
+          </a:solidFill>
+          <a:ln/>
+        </p:spPr>
+      </p:sp>
+      <p:sp>
+        <p:nvSpPr>
+          <p:cNvPr id="9" name="Shape 7"/>
+          <p:cNvSpPr/>
+          <p:nvPr/>
+        </p:nvSpPr>
+        <p:spPr>
+          <a:xfrm>
+            <a:off x="4937760" y="2606040"/>
+            <a:ext cx="548640" cy="548640"/>
+          </a:xfrm>
+          <a:prstGeom prst="ellipse">
+            <a:avLst/>
+          </a:prstGeom>
+          <a:solidFill>
+            <a:srgbClr val="3F6F5F"/>
+          </a:solidFill>
+          <a:ln/>
+        </p:spPr>
+      </p:sp>
+      <p:sp>
+        <p:nvSpPr>
+          <p:cNvPr id="10" name="Text 8"/>
+          <p:cNvSpPr/>
+          <p:nvPr/>
+        </p:nvSpPr>
+        <p:spPr>
+          <a:xfrm>
+            <a:off x="4892040" y="3383280"/>
+            <a:ext cx="2651760" cy="548640"/>
+          </a:xfrm>
+          <a:prstGeom prst="rect">
+            <a:avLst/>
+          </a:prstGeom>
+          <a:noFill/>
+          <a:ln/>
+        </p:spPr>
+        <p:txBody>
+          <a:bodyPr wrap="square" rtlCol="0" anchor="ctr"/>
+          <a:lstStyle/>
+          <a:p>
+            <a:pPr indent="0" marL="0">
+              <a:buNone/>
+            </a:pPr>
+            <a:r>
+              <a:rPr lang="en-US" sz="2100" b="1" dirty="0">
+                <a:solidFill>
+                  <a:srgbClr val="1A1A1A"/>
                 </a:solidFill>
                 <a:latin typeface="Cambria" pitchFamily="34" charset="0"/>
                 <a:ea typeface="Cambria" pitchFamily="34" charset="-122"/>
                 <a:cs typeface="Cambria" pitchFamily="34" charset="-120"/>
               </a:rPr>
-              <a:t>Explain it: why two tokenizers split a sentence differently, and what your stemming choice changed. (Competencies 3, 5.)</a:t>
-            </a:r>
-            <a:endParaRPr lang="en-US" sz="2600" dirty="0"/>
-          </a:p>
-        </p:txBody>
-      </p:sp>
-      <p:sp>
-        <p:nvSpPr>
-          <p:cNvPr id="4" name="Text 2"/>
-          <p:cNvSpPr/>
-          <p:nvPr/>
-        </p:nvSpPr>
-        <p:spPr>
-          <a:xfrm>
-            <a:off x="640080" y="6126480"/>
-            <a:ext cx="7315200" cy="365760"/>
-          </a:xfrm>
-          <a:prstGeom prst="rect">
-            <a:avLst/>
-          </a:prstGeom>
-          <a:noFill/>
-          <a:ln/>
-        </p:spPr>
-        <p:txBody>
-          <a:bodyPr wrap="square" rtlCol="0" anchor="ctr"/>
+              <a:t>Workshop</a:t>
+            </a:r>
+            <a:endParaRPr lang="en-US" sz="2100" dirty="0"/>
+          </a:p>
+        </p:txBody>
+      </p:sp>
+      <p:sp>
+        <p:nvSpPr>
+          <p:cNvPr id="11" name="Text 9"/>
+          <p:cNvSpPr/>
+          <p:nvPr/>
+        </p:nvSpPr>
+        <p:spPr>
+          <a:xfrm>
+            <a:off x="4892040" y="3977640"/>
+            <a:ext cx="2651760" cy="1371600"/>
+          </a:xfrm>
+          <a:prstGeom prst="rect">
+            <a:avLst/>
+          </a:prstGeom>
+          <a:noFill/>
+          <a:ln/>
+        </p:spPr>
+        <p:txBody>
+          <a:bodyPr wrap="square" rtlCol="0" anchor="t">
+            <a:spAutoFit/>
+          </a:bodyPr>
           <a:lstStyle/>
           <a:p>
             <a:pPr indent="0" marL="0">
-              <a:buNone/>
-            </a:pPr>
-            <a:r>
-              <a:rPr lang="en-US" sz="1200" dirty="0">
-                <a:solidFill>
-                  <a:srgbClr val="E8DCD6"/>
+              <a:lnSpc>
+                <a:spcPct val="115000"/>
+              </a:lnSpc>
+              <a:buNone/>
+            </a:pPr>
+            <a:r>
+              <a:rPr lang="en-US" sz="1500" dirty="0">
+                <a:solidFill>
+                  <a:srgbClr val="1A1A1A"/>
                 </a:solidFill>
                 <a:latin typeface="Calibri" pitchFamily="34" charset="0"/>
                 <a:ea typeface="Calibri" pitchFamily="34" charset="-122"/>
                 <a:cs typeface="Calibri" pitchFamily="34" charset="-120"/>
               </a:rPr>
-              <a:t>Culture as Data  ·  Week 2</a:t>
-            </a:r>
-            <a:endParaRPr lang="en-US" sz="1200" dirty="0"/>
-          </a:p>
-        </p:txBody>
-      </p:sp>
-      <p:sp>
-        <p:nvSpPr>
-          <p:cNvPr id="5" name="Shape 3"/>
-          <p:cNvSpPr/>
-          <p:nvPr/>
-        </p:nvSpPr>
-        <p:spPr>
-          <a:xfrm>
-            <a:off x="11295847" y="5368090"/>
-            <a:ext cx="79937" cy="79937"/>
+              <a:t>Build hands-on on your own data.</a:t>
+            </a:r>
+            <a:endParaRPr lang="en-US" sz="1500" dirty="0"/>
+          </a:p>
+        </p:txBody>
+      </p:sp>
+      <p:sp>
+        <p:nvSpPr>
+          <p:cNvPr id="12" name="Shape 10"/>
+          <p:cNvSpPr/>
+          <p:nvPr/>
+        </p:nvSpPr>
+        <p:spPr>
+          <a:xfrm>
+            <a:off x="8412480" y="2194560"/>
+            <a:ext cx="3383280" cy="3291840"/>
+          </a:xfrm>
+          <a:prstGeom prst="roundRect">
+            <a:avLst>
+              <a:gd name="adj" fmla="val 3333"/>
+            </a:avLst>
+          </a:prstGeom>
+          <a:solidFill>
+            <a:srgbClr val="F4EEE8"/>
+          </a:solidFill>
+          <a:ln/>
+        </p:spPr>
+      </p:sp>
+      <p:sp>
+        <p:nvSpPr>
+          <p:cNvPr id="13" name="Shape 11"/>
+          <p:cNvSpPr/>
+          <p:nvPr/>
+        </p:nvSpPr>
+        <p:spPr>
+          <a:xfrm>
+            <a:off x="8823960" y="2606040"/>
+            <a:ext cx="548640" cy="548640"/>
           </a:xfrm>
           <a:prstGeom prst="ellipse">
             <a:avLst/>
           </a:prstGeom>
           <a:solidFill>
+            <a:srgbClr val="B9852F"/>
+          </a:solidFill>
+          <a:ln/>
+        </p:spPr>
+      </p:sp>
+      <p:sp>
+        <p:nvSpPr>
+          <p:cNvPr id="14" name="Text 12"/>
+          <p:cNvSpPr/>
+          <p:nvPr/>
+        </p:nvSpPr>
+        <p:spPr>
+          <a:xfrm>
+            <a:off x="8778240" y="3383280"/>
+            <a:ext cx="2651760" cy="548640"/>
+          </a:xfrm>
+          <a:prstGeom prst="rect">
+            <a:avLst/>
+          </a:prstGeom>
+          <a:noFill/>
+          <a:ln/>
+        </p:spPr>
+        <p:txBody>
+          <a:bodyPr wrap="square" rtlCol="0" anchor="ctr"/>
+          <a:lstStyle/>
+          <a:p>
+            <a:pPr indent="0" marL="0">
+              <a:buNone/>
+            </a:pPr>
+            <a:r>
+              <a:rPr lang="en-US" sz="2100" b="1" dirty="0">
+                <a:solidFill>
+                  <a:srgbClr val="1A1A1A"/>
+                </a:solidFill>
+                <a:latin typeface="Cambria" pitchFamily="34" charset="0"/>
+                <a:ea typeface="Cambria" pitchFamily="34" charset="-122"/>
+                <a:cs typeface="Cambria" pitchFamily="34" charset="-120"/>
+              </a:rPr>
+              <a:t>Discussion</a:t>
+            </a:r>
+            <a:endParaRPr lang="en-US" sz="2100" dirty="0"/>
+          </a:p>
+        </p:txBody>
+      </p:sp>
+      <p:sp>
+        <p:nvSpPr>
+          <p:cNvPr id="15" name="Text 13"/>
+          <p:cNvSpPr/>
+          <p:nvPr/>
+        </p:nvSpPr>
+        <p:spPr>
+          <a:xfrm>
+            <a:off x="8778240" y="3977640"/>
+            <a:ext cx="2651760" cy="1371600"/>
+          </a:xfrm>
+          <a:prstGeom prst="rect">
+            <a:avLst/>
+          </a:prstGeom>
+          <a:noFill/>
+          <a:ln/>
+        </p:spPr>
+        <p:txBody>
+          <a:bodyPr wrap="square" rtlCol="0" anchor="t">
+            <a:spAutoFit/>
+          </a:bodyPr>
+          <a:lstStyle/>
+          <a:p>
+            <a:pPr indent="0" marL="0">
+              <a:lnSpc>
+                <a:spcPct val="115000"/>
+              </a:lnSpc>
+              <a:buNone/>
+            </a:pPr>
+            <a:r>
+              <a:rPr lang="en-US" sz="1500" dirty="0">
+                <a:solidFill>
+                  <a:srgbClr val="1A1A1A"/>
+                </a:solidFill>
+                <a:latin typeface="Calibri" pitchFamily="34" charset="0"/>
+                <a:ea typeface="Calibri" pitchFamily="34" charset="-122"/>
+                <a:cs typeface="Calibri" pitchFamily="34" charset="-120"/>
+              </a:rPr>
+              <a:t>Interrogate the study, debate it, or critique each other's work.</a:t>
+            </a:r>
+            <a:endParaRPr lang="en-US" sz="1500" dirty="0"/>
+          </a:p>
+        </p:txBody>
+      </p:sp>
+    </p:spTree>
+  </p:cSld>
+  <p:clrMapOvr>
+    <a:masterClrMapping/>
+  </p:clrMapOvr>
+</p:sld>
+</file>
+
+<file path=ppt/slides/slide9.xml><?xml version="1.0" encoding="utf-8"?>
+<p:sld xmlns:a="http://schemas.openxmlformats.org/drawingml/2006/main" xmlns:r="http://schemas.openxmlformats.org/officeDocument/2006/relationships" xmlns:p="http://schemas.openxmlformats.org/presentationml/2006/main">
+  <p:cSld name="Slide 9">
+    <p:bg>
+      <p:bgPr>
+        <a:solidFill>
+          <a:srgbClr val="FFFFFF"/>
+        </a:solidFill>
+      </p:bgPr>
+    </p:bg>
+    <p:spTree>
+      <p:nvGrpSpPr>
+        <p:cNvPr id="1" name=""/>
+        <p:cNvGrpSpPr/>
+        <p:nvPr/>
+      </p:nvGrpSpPr>
+      <p:grpSpPr>
+        <a:xfrm>
+          <a:off x="0" y="0"/>
+          <a:ext cx="0" cy="0"/>
+          <a:chOff x="0" y="0"/>
+          <a:chExt cx="0" cy="0"/>
+        </a:xfrm>
+      </p:grpSpPr>
+      <p:sp>
+        <p:nvSpPr>
+          <p:cNvPr id="2" name="Text 0"/>
+          <p:cNvSpPr/>
+          <p:nvPr/>
+        </p:nvSpPr>
+        <p:spPr>
+          <a:xfrm>
+            <a:off x="640080" y="640080"/>
+            <a:ext cx="10058400" cy="731520"/>
+          </a:xfrm>
+          <a:prstGeom prst="rect">
+            <a:avLst/>
+          </a:prstGeom>
+          <a:noFill/>
+          <a:ln/>
+        </p:spPr>
+        <p:txBody>
+          <a:bodyPr wrap="square" rtlCol="0" anchor="ctr"/>
+          <a:lstStyle/>
+          <a:p>
+            <a:pPr indent="0" marL="0">
+              <a:buNone/>
+            </a:pPr>
+            <a:r>
+              <a:rPr lang="en-US" sz="3000" b="1" dirty="0">
+                <a:solidFill>
+                  <a:srgbClr val="1A1A1A"/>
+                </a:solidFill>
+                <a:latin typeface="Cambria" pitchFamily="34" charset="0"/>
+                <a:ea typeface="Cambria" pitchFamily="34" charset="-122"/>
+                <a:cs typeface="Cambria" pitchFamily="34" charset="-120"/>
+              </a:rPr>
+              <a:t>The session</a:t>
+            </a:r>
+            <a:endParaRPr lang="en-US" sz="3000" dirty="0"/>
+          </a:p>
+        </p:txBody>
+      </p:sp>
+      <p:sp>
+        <p:nvSpPr>
+          <p:cNvPr id="3" name="Shape 1"/>
+          <p:cNvSpPr/>
+          <p:nvPr/>
+        </p:nvSpPr>
+        <p:spPr>
+          <a:xfrm>
+            <a:off x="640080" y="1572768"/>
+            <a:ext cx="868680" cy="338328"/>
+          </a:xfrm>
+          <a:prstGeom prst="roundRect">
+            <a:avLst>
+              <a:gd name="adj" fmla="val 16216"/>
+            </a:avLst>
+          </a:prstGeom>
+          <a:solidFill>
             <a:srgbClr val="7A3B2E"/>
           </a:solidFill>
           <a:ln/>
@@ -5192,57 +6362,99 @@
       </p:sp>
       <p:sp>
         <p:nvSpPr>
+          <p:cNvPr id="4" name="Text 2"/>
+          <p:cNvSpPr/>
+          <p:nvPr/>
+        </p:nvSpPr>
+        <p:spPr>
+          <a:xfrm>
+            <a:off x="640080" y="1572768"/>
+            <a:ext cx="868680" cy="338328"/>
+          </a:xfrm>
+          <a:prstGeom prst="rect">
+            <a:avLst/>
+          </a:prstGeom>
+          <a:noFill/>
+          <a:ln/>
+        </p:spPr>
+        <p:txBody>
+          <a:bodyPr wrap="square" rtlCol="0" anchor="ctr"/>
+          <a:lstStyle/>
+          <a:p>
+            <a:pPr algn="ctr" indent="0" marL="0">
+              <a:buNone/>
+            </a:pPr>
+            <a:r>
+              <a:rPr lang="en-US" sz="1100" b="1" dirty="0">
+                <a:solidFill>
+                  <a:srgbClr val="FFFFFF"/>
+                </a:solidFill>
+                <a:latin typeface="Calibri" pitchFamily="34" charset="0"/>
+                <a:ea typeface="Calibri" pitchFamily="34" charset="-122"/>
+                <a:cs typeface="Calibri" pitchFamily="34" charset="-120"/>
+              </a:rPr>
+              <a:t>0:00</a:t>
+            </a:r>
+            <a:endParaRPr lang="en-US" sz="1100" dirty="0"/>
+          </a:p>
+        </p:txBody>
+      </p:sp>
+      <p:sp>
+        <p:nvSpPr>
+          <p:cNvPr id="5" name="Text 3"/>
+          <p:cNvSpPr/>
+          <p:nvPr/>
+        </p:nvSpPr>
+        <p:spPr>
+          <a:xfrm>
+            <a:off x="1691640" y="1554480"/>
+            <a:ext cx="9646920" cy="448056"/>
+          </a:xfrm>
+          <a:prstGeom prst="rect">
+            <a:avLst/>
+          </a:prstGeom>
+          <a:noFill/>
+          <a:ln/>
+        </p:spPr>
+        <p:txBody>
+          <a:bodyPr wrap="square" rtlCol="0" anchor="ctr">
+            <a:spAutoFit/>
+          </a:bodyPr>
+          <a:lstStyle/>
+          <a:p>
+            <a:pPr indent="0" marL="0">
+              <a:buNone/>
+            </a:pPr>
+            <a:r>
+              <a:rPr lang="en-US" sz="1100" dirty="0">
+                <a:solidFill>
+                  <a:srgbClr val="1A1A1A"/>
+                </a:solidFill>
+                <a:latin typeface="Calibri" pitchFamily="34" charset="0"/>
+                <a:ea typeface="Calibri" pitchFamily="34" charset="-122"/>
+                <a:cs typeface="Calibri" pitchFamily="34" charset="-120"/>
+              </a:rPr>
+              <a:t>Warm-up retrieval.</a:t>
+            </a:r>
+            <a:endParaRPr lang="en-US" sz="1100" dirty="0"/>
+          </a:p>
+        </p:txBody>
+      </p:sp>
+      <p:sp>
+        <p:nvSpPr>
           <p:cNvPr id="6" name="Shape 4"/>
           <p:cNvSpPr/>
           <p:nvPr/>
         </p:nvSpPr>
         <p:spPr>
           <a:xfrm>
-            <a:off x="11348430" y="5402430"/>
-            <a:ext cx="71327" cy="71327"/>
-          </a:xfrm>
-          <a:prstGeom prst="ellipse">
-            <a:avLst/>
-          </a:prstGeom>
-          <a:solidFill>
-            <a:srgbClr val="3F6F5F"/>
-          </a:solidFill>
-          <a:ln/>
-        </p:spPr>
-      </p:sp>
-      <p:sp>
-        <p:nvSpPr>
-          <p:cNvPr id="7" name="Shape 5"/>
-          <p:cNvSpPr/>
-          <p:nvPr/>
-        </p:nvSpPr>
-        <p:spPr>
-          <a:xfrm>
-            <a:off x="9759326" y="5722309"/>
-            <a:ext cx="97642" cy="97642"/>
-          </a:xfrm>
-          <a:prstGeom prst="ellipse">
-            <a:avLst/>
-          </a:prstGeom>
-          <a:solidFill>
-            <a:srgbClr val="B9852F"/>
-          </a:solidFill>
-          <a:ln/>
-        </p:spPr>
-      </p:sp>
-      <p:sp>
-        <p:nvSpPr>
-          <p:cNvPr id="8" name="Shape 6"/>
-          <p:cNvSpPr/>
-          <p:nvPr/>
-        </p:nvSpPr>
-        <p:spPr>
-          <a:xfrm>
-            <a:off x="10155655" y="5314266"/>
-            <a:ext cx="72014" cy="72014"/>
-          </a:xfrm>
-          <a:prstGeom prst="ellipse">
-            <a:avLst/>
+            <a:off x="640080" y="2020824"/>
+            <a:ext cx="868680" cy="338328"/>
+          </a:xfrm>
+          <a:prstGeom prst="roundRect">
+            <a:avLst>
+              <a:gd name="adj" fmla="val 16216"/>
+            </a:avLst>
           </a:prstGeom>
           <a:solidFill>
             <a:srgbClr val="7A3B2E"/>
@@ -5252,57 +6464,99 @@
       </p:sp>
       <p:sp>
         <p:nvSpPr>
+          <p:cNvPr id="7" name="Text 5"/>
+          <p:cNvSpPr/>
+          <p:nvPr/>
+        </p:nvSpPr>
+        <p:spPr>
+          <a:xfrm>
+            <a:off x="640080" y="2020824"/>
+            <a:ext cx="868680" cy="338328"/>
+          </a:xfrm>
+          <a:prstGeom prst="rect">
+            <a:avLst/>
+          </a:prstGeom>
+          <a:noFill/>
+          <a:ln/>
+        </p:spPr>
+        <p:txBody>
+          <a:bodyPr wrap="square" rtlCol="0" anchor="ctr"/>
+          <a:lstStyle/>
+          <a:p>
+            <a:pPr algn="ctr" indent="0" marL="0">
+              <a:buNone/>
+            </a:pPr>
+            <a:r>
+              <a:rPr lang="en-US" sz="1100" b="1" dirty="0">
+                <a:solidFill>
+                  <a:srgbClr val="FFFFFF"/>
+                </a:solidFill>
+                <a:latin typeface="Calibri" pitchFamily="34" charset="0"/>
+                <a:ea typeface="Calibri" pitchFamily="34" charset="-122"/>
+                <a:cs typeface="Calibri" pitchFamily="34" charset="-120"/>
+              </a:rPr>
+              <a:t>0:05</a:t>
+            </a:r>
+            <a:endParaRPr lang="en-US" sz="1100" dirty="0"/>
+          </a:p>
+        </p:txBody>
+      </p:sp>
+      <p:sp>
+        <p:nvSpPr>
+          <p:cNvPr id="8" name="Text 6"/>
+          <p:cNvSpPr/>
+          <p:nvPr/>
+        </p:nvSpPr>
+        <p:spPr>
+          <a:xfrm>
+            <a:off x="1691640" y="2002536"/>
+            <a:ext cx="9646920" cy="448056"/>
+          </a:xfrm>
+          <a:prstGeom prst="rect">
+            <a:avLst/>
+          </a:prstGeom>
+          <a:noFill/>
+          <a:ln/>
+        </p:spPr>
+        <p:txBody>
+          <a:bodyPr wrap="square" rtlCol="0" anchor="ctr">
+            <a:spAutoFit/>
+          </a:bodyPr>
+          <a:lstStyle/>
+          <a:p>
+            <a:pPr indent="0" marL="0">
+              <a:buNone/>
+            </a:pPr>
+            <a:r>
+              <a:rPr lang="en-US" sz="1100" dirty="0">
+                <a:solidFill>
+                  <a:srgbClr val="1A1A1A"/>
+                </a:solidFill>
+                <a:latin typeface="Calibri" pitchFamily="34" charset="0"/>
+                <a:ea typeface="Calibri" pitchFamily="34" charset="-122"/>
+                <a:cs typeface="Calibri" pitchFamily="34" charset="-120"/>
+              </a:rPr>
+              <a:t>The trial: claim, objection, re-run-without-fiction rebuttal, "interpret with care." One named choice is the chart: the hockey-stick shape depends on its y-axis and smoothing.</a:t>
+            </a:r>
+            <a:endParaRPr lang="en-US" sz="1100" dirty="0"/>
+          </a:p>
+        </p:txBody>
+      </p:sp>
+      <p:sp>
+        <p:nvSpPr>
           <p:cNvPr id="9" name="Shape 7"/>
           <p:cNvSpPr/>
           <p:nvPr/>
         </p:nvSpPr>
         <p:spPr>
           <a:xfrm>
-            <a:off x="11043898" y="4902202"/>
-            <a:ext cx="72167" cy="72167"/>
-          </a:xfrm>
-          <a:prstGeom prst="ellipse">
-            <a:avLst/>
-          </a:prstGeom>
-          <a:solidFill>
-            <a:srgbClr val="3F6F5F"/>
-          </a:solidFill>
-          <a:ln/>
-        </p:spPr>
-      </p:sp>
-      <p:sp>
-        <p:nvSpPr>
-          <p:cNvPr id="10" name="Shape 8"/>
-          <p:cNvSpPr/>
-          <p:nvPr/>
-        </p:nvSpPr>
-        <p:spPr>
-          <a:xfrm>
-            <a:off x="10930534" y="5210016"/>
-            <a:ext cx="66097" cy="66097"/>
-          </a:xfrm>
-          <a:prstGeom prst="ellipse">
-            <a:avLst/>
-          </a:prstGeom>
-          <a:solidFill>
-            <a:srgbClr val="B9852F"/>
-          </a:solidFill>
-          <a:ln/>
-        </p:spPr>
-      </p:sp>
-      <p:sp>
-        <p:nvSpPr>
-          <p:cNvPr id="11" name="Shape 9"/>
-          <p:cNvSpPr/>
-          <p:nvPr/>
-        </p:nvSpPr>
-        <p:spPr>
-          <a:xfrm>
-            <a:off x="10882363" y="5224248"/>
-            <a:ext cx="76664" cy="76664"/>
-          </a:xfrm>
-          <a:prstGeom prst="ellipse">
-            <a:avLst/>
+            <a:off x="640080" y="2468880"/>
+            <a:ext cx="868680" cy="338328"/>
+          </a:xfrm>
+          <a:prstGeom prst="roundRect">
+            <a:avLst>
+              <a:gd name="adj" fmla="val 16216"/>
+            </a:avLst>
           </a:prstGeom>
           <a:solidFill>
             <a:srgbClr val="7A3B2E"/>
@@ -5312,57 +6566,99 @@
       </p:sp>
       <p:sp>
         <p:nvSpPr>
+          <p:cNvPr id="10" name="Text 8"/>
+          <p:cNvSpPr/>
+          <p:nvPr/>
+        </p:nvSpPr>
+        <p:spPr>
+          <a:xfrm>
+            <a:off x="640080" y="2468880"/>
+            <a:ext cx="868680" cy="338328"/>
+          </a:xfrm>
+          <a:prstGeom prst="rect">
+            <a:avLst/>
+          </a:prstGeom>
+          <a:noFill/>
+          <a:ln/>
+        </p:spPr>
+        <p:txBody>
+          <a:bodyPr wrap="square" rtlCol="0" anchor="ctr"/>
+          <a:lstStyle/>
+          <a:p>
+            <a:pPr algn="ctr" indent="0" marL="0">
+              <a:buNone/>
+            </a:pPr>
+            <a:r>
+              <a:rPr lang="en-US" sz="1100" b="1" dirty="0">
+                <a:solidFill>
+                  <a:srgbClr val="FFFFFF"/>
+                </a:solidFill>
+                <a:latin typeface="Calibri" pitchFamily="34" charset="0"/>
+                <a:ea typeface="Calibri" pitchFamily="34" charset="-122"/>
+                <a:cs typeface="Calibri" pitchFamily="34" charset="-120"/>
+              </a:rPr>
+              <a:t>0:25</a:t>
+            </a:r>
+            <a:endParaRPr lang="en-US" sz="1100" dirty="0"/>
+          </a:p>
+        </p:txBody>
+      </p:sp>
+      <p:sp>
+        <p:nvSpPr>
+          <p:cNvPr id="11" name="Text 9"/>
+          <p:cNvSpPr/>
+          <p:nvPr/>
+        </p:nvSpPr>
+        <p:spPr>
+          <a:xfrm>
+            <a:off x="1691640" y="2450592"/>
+            <a:ext cx="9646920" cy="448056"/>
+          </a:xfrm>
+          <a:prstGeom prst="rect">
+            <a:avLst/>
+          </a:prstGeom>
+          <a:noFill/>
+          <a:ln/>
+        </p:spPr>
+        <p:txBody>
+          <a:bodyPr wrap="square" rtlCol="0" anchor="ctr">
+            <a:spAutoFit/>
+          </a:bodyPr>
+          <a:lstStyle/>
+          <a:p>
+            <a:pPr indent="0" marL="0">
+              <a:buNone/>
+            </a:pPr>
+            <a:r>
+              <a:rPr lang="en-US" sz="1100" dirty="0">
+                <a:solidFill>
+                  <a:srgbClr val="1A1A1A"/>
+                </a:solidFill>
+                <a:latin typeface="Calibri" pitchFamily="34" charset="0"/>
+                <a:ea typeface="Calibri" pitchFamily="34" charset="-122"/>
+                <a:cs typeface="Calibri" pitchFamily="34" charset="-120"/>
+              </a:rPr>
+              <a:t>Delight beat: an artist's signature vocabulary, the words they use far more than a pop baseline. No caveats.</a:t>
+            </a:r>
+            <a:endParaRPr lang="en-US" sz="1100" dirty="0"/>
+          </a:p>
+        </p:txBody>
+      </p:sp>
+      <p:sp>
+        <p:nvSpPr>
           <p:cNvPr id="12" name="Shape 10"/>
           <p:cNvSpPr/>
           <p:nvPr/>
         </p:nvSpPr>
         <p:spPr>
           <a:xfrm>
-            <a:off x="9405866" y="5668799"/>
-            <a:ext cx="71864" cy="71864"/>
-          </a:xfrm>
-          <a:prstGeom prst="ellipse">
-            <a:avLst/>
-          </a:prstGeom>
-          <a:solidFill>
-            <a:srgbClr val="3F6F5F"/>
-          </a:solidFill>
-          <a:ln/>
-        </p:spPr>
-      </p:sp>
-      <p:sp>
-        <p:nvSpPr>
-          <p:cNvPr id="13" name="Shape 11"/>
-          <p:cNvSpPr/>
-          <p:nvPr/>
-        </p:nvSpPr>
-        <p:spPr>
-          <a:xfrm>
-            <a:off x="10128162" y="5530208"/>
-            <a:ext cx="74557" cy="74557"/>
-          </a:xfrm>
-          <a:prstGeom prst="ellipse">
-            <a:avLst/>
-          </a:prstGeom>
-          <a:solidFill>
-            <a:srgbClr val="B9852F"/>
-          </a:solidFill>
-          <a:ln/>
-        </p:spPr>
-      </p:sp>
-      <p:sp>
-        <p:nvSpPr>
-          <p:cNvPr id="14" name="Shape 12"/>
-          <p:cNvSpPr/>
-          <p:nvPr/>
-        </p:nvSpPr>
-        <p:spPr>
-          <a:xfrm>
-            <a:off x="11555732" y="5532375"/>
-            <a:ext cx="52740" cy="52740"/>
-          </a:xfrm>
-          <a:prstGeom prst="ellipse">
-            <a:avLst/>
+            <a:off x="640080" y="2916936"/>
+            <a:ext cx="868680" cy="338328"/>
+          </a:xfrm>
+          <a:prstGeom prst="roundRect">
+            <a:avLst>
+              <a:gd name="adj" fmla="val 16216"/>
+            </a:avLst>
           </a:prstGeom>
           <a:solidFill>
             <a:srgbClr val="7A3B2E"/>
@@ -5372,57 +6668,99 @@
       </p:sp>
       <p:sp>
         <p:nvSpPr>
+          <p:cNvPr id="13" name="Text 11"/>
+          <p:cNvSpPr/>
+          <p:nvPr/>
+        </p:nvSpPr>
+        <p:spPr>
+          <a:xfrm>
+            <a:off x="640080" y="2916936"/>
+            <a:ext cx="868680" cy="338328"/>
+          </a:xfrm>
+          <a:prstGeom prst="rect">
+            <a:avLst/>
+          </a:prstGeom>
+          <a:noFill/>
+          <a:ln/>
+        </p:spPr>
+        <p:txBody>
+          <a:bodyPr wrap="square" rtlCol="0" anchor="ctr"/>
+          <a:lstStyle/>
+          <a:p>
+            <a:pPr algn="ctr" indent="0" marL="0">
+              <a:buNone/>
+            </a:pPr>
+            <a:r>
+              <a:rPr lang="en-US" sz="1100" b="1" dirty="0">
+                <a:solidFill>
+                  <a:srgbClr val="FFFFFF"/>
+                </a:solidFill>
+                <a:latin typeface="Calibri" pitchFamily="34" charset="0"/>
+                <a:ea typeface="Calibri" pitchFamily="34" charset="-122"/>
+                <a:cs typeface="Calibri" pitchFamily="34" charset="-120"/>
+              </a:rPr>
+              <a:t>0:30</a:t>
+            </a:r>
+            <a:endParaRPr lang="en-US" sz="1100" dirty="0"/>
+          </a:p>
+        </p:txBody>
+      </p:sp>
+      <p:sp>
+        <p:nvSpPr>
+          <p:cNvPr id="14" name="Text 12"/>
+          <p:cNvSpPr/>
+          <p:nvPr/>
+        </p:nvSpPr>
+        <p:spPr>
+          <a:xfrm>
+            <a:off x="1691640" y="2898648"/>
+            <a:ext cx="9646920" cy="448056"/>
+          </a:xfrm>
+          <a:prstGeom prst="rect">
+            <a:avLst/>
+          </a:prstGeom>
+          <a:noFill/>
+          <a:ln/>
+        </p:spPr>
+        <p:txBody>
+          <a:bodyPr wrap="square" rtlCol="0" anchor="ctr">
+            <a:spAutoFit/>
+          </a:bodyPr>
+          <a:lstStyle/>
+          <a:p>
+            <a:pPr indent="0" marL="0">
+              <a:buNone/>
+            </a:pPr>
+            <a:r>
+              <a:rPr lang="en-US" sz="1100" dirty="0">
+                <a:solidFill>
+                  <a:srgbClr val="1A1A1A"/>
+                </a:solidFill>
+                <a:latin typeface="Calibri" pitchFamily="34" charset="0"/>
+                <a:ea typeface="Calibri" pitchFamily="34" charset="-122"/>
+                <a:cs typeface="Calibri" pitchFamily="34" charset="-120"/>
+              </a:rPr>
+              <a:t>Hand-built bag-of-words: two authors, highlighters, argue about merging run/running. Counting requires defining.</a:t>
+            </a:r>
+            <a:endParaRPr lang="en-US" sz="1100" dirty="0"/>
+          </a:p>
+        </p:txBody>
+      </p:sp>
+      <p:sp>
+        <p:nvSpPr>
           <p:cNvPr id="15" name="Shape 13"/>
           <p:cNvSpPr/>
           <p:nvPr/>
         </p:nvSpPr>
         <p:spPr>
           <a:xfrm>
-            <a:off x="9634734" y="4661840"/>
-            <a:ext cx="84135" cy="84135"/>
-          </a:xfrm>
-          <a:prstGeom prst="ellipse">
-            <a:avLst/>
-          </a:prstGeom>
-          <a:solidFill>
-            <a:srgbClr val="3F6F5F"/>
-          </a:solidFill>
-          <a:ln/>
-        </p:spPr>
-      </p:sp>
-      <p:sp>
-        <p:nvSpPr>
-          <p:cNvPr id="16" name="Shape 14"/>
-          <p:cNvSpPr/>
-          <p:nvPr/>
-        </p:nvSpPr>
-        <p:spPr>
-          <a:xfrm>
-            <a:off x="10552610" y="5379864"/>
-            <a:ext cx="81875" cy="81875"/>
-          </a:xfrm>
-          <a:prstGeom prst="ellipse">
-            <a:avLst/>
-          </a:prstGeom>
-          <a:solidFill>
-            <a:srgbClr val="B9852F"/>
-          </a:solidFill>
-          <a:ln/>
-        </p:spPr>
-      </p:sp>
-      <p:sp>
-        <p:nvSpPr>
-          <p:cNvPr id="17" name="Shape 15"/>
-          <p:cNvSpPr/>
-          <p:nvPr/>
-        </p:nvSpPr>
-        <p:spPr>
-          <a:xfrm>
-            <a:off x="10255520" y="4935626"/>
-            <a:ext cx="68820" cy="68820"/>
-          </a:xfrm>
-          <a:prstGeom prst="ellipse">
-            <a:avLst/>
+            <a:off x="640080" y="3364992"/>
+            <a:ext cx="868680" cy="338328"/>
+          </a:xfrm>
+          <a:prstGeom prst="roundRect">
+            <a:avLst>
+              <a:gd name="adj" fmla="val 16216"/>
+            </a:avLst>
           </a:prstGeom>
           <a:solidFill>
             <a:srgbClr val="7A3B2E"/>
@@ -5432,23 +6770,593 @@
       </p:sp>
       <p:sp>
         <p:nvSpPr>
+          <p:cNvPr id="16" name="Text 14"/>
+          <p:cNvSpPr/>
+          <p:nvPr/>
+        </p:nvSpPr>
+        <p:spPr>
+          <a:xfrm>
+            <a:off x="640080" y="3364992"/>
+            <a:ext cx="868680" cy="338328"/>
+          </a:xfrm>
+          <a:prstGeom prst="rect">
+            <a:avLst/>
+          </a:prstGeom>
+          <a:noFill/>
+          <a:ln/>
+        </p:spPr>
+        <p:txBody>
+          <a:bodyPr wrap="square" rtlCol="0" anchor="ctr"/>
+          <a:lstStyle/>
+          <a:p>
+            <a:pPr algn="ctr" indent="0" marL="0">
+              <a:buNone/>
+            </a:pPr>
+            <a:r>
+              <a:rPr lang="en-US" sz="1100" b="1" dirty="0">
+                <a:solidFill>
+                  <a:srgbClr val="FFFFFF"/>
+                </a:solidFill>
+                <a:latin typeface="Calibri" pitchFamily="34" charset="0"/>
+                <a:ea typeface="Calibri" pitchFamily="34" charset="-122"/>
+                <a:cs typeface="Calibri" pitchFamily="34" charset="-120"/>
+              </a:rPr>
+              <a:t>0:55</a:t>
+            </a:r>
+            <a:endParaRPr lang="en-US" sz="1100" dirty="0"/>
+          </a:p>
+        </p:txBody>
+      </p:sp>
+      <p:sp>
+        <p:nvSpPr>
+          <p:cNvPr id="17" name="Text 15"/>
+          <p:cNvSpPr/>
+          <p:nvPr/>
+        </p:nvSpPr>
+        <p:spPr>
+          <a:xfrm>
+            <a:off x="1691640" y="3346704"/>
+            <a:ext cx="9646920" cy="448056"/>
+          </a:xfrm>
+          <a:prstGeom prst="rect">
+            <a:avLst/>
+          </a:prstGeom>
+          <a:noFill/>
+          <a:ln/>
+        </p:spPr>
+        <p:txBody>
+          <a:bodyPr wrap="square" rtlCol="0" anchor="ctr">
+            <a:spAutoFit/>
+          </a:bodyPr>
+          <a:lstStyle/>
+          <a:p>
+            <a:pPr indent="0" marL="0">
+              <a:buNone/>
+            </a:pPr>
+            <a:r>
+              <a:rPr lang="en-US" sz="1100" dirty="0">
+                <a:solidFill>
+                  <a:srgbClr val="1A1A1A"/>
+                </a:solidFill>
+                <a:latin typeface="Calibri" pitchFamily="34" charset="0"/>
+                <a:ea typeface="Calibri" pitchFamily="34" charset="-122"/>
+                <a:cs typeface="Calibri" pitchFamily="34" charset="-120"/>
+              </a:rPr>
+              <a:t>What counts as a word? Paste a sentence into two tokenizer playgrounds and watch it shatter differently. Models see tokens, not words.</a:t>
+            </a:r>
+            <a:endParaRPr lang="en-US" sz="1100" dirty="0"/>
+          </a:p>
+        </p:txBody>
+      </p:sp>
+      <p:sp>
+        <p:nvSpPr>
           <p:cNvPr id="18" name="Shape 16"/>
           <p:cNvSpPr/>
           <p:nvPr/>
         </p:nvSpPr>
         <p:spPr>
           <a:xfrm>
-            <a:off x="9810262" y="5790387"/>
-            <a:ext cx="67830" cy="67830"/>
-          </a:xfrm>
-          <a:prstGeom prst="ellipse">
-            <a:avLst/>
-          </a:prstGeom>
-          <a:solidFill>
-            <a:srgbClr val="3F6F5F"/>
-          </a:solidFill>
-          <a:ln/>
-        </p:spPr>
+            <a:off x="640080" y="3813048"/>
+            <a:ext cx="868680" cy="338328"/>
+          </a:xfrm>
+          <a:prstGeom prst="roundRect">
+            <a:avLst>
+              <a:gd name="adj" fmla="val 16216"/>
+            </a:avLst>
+          </a:prstGeom>
+          <a:solidFill>
+            <a:srgbClr val="7A3B2E"/>
+          </a:solidFill>
+          <a:ln/>
+        </p:spPr>
+      </p:sp>
+      <p:sp>
+        <p:nvSpPr>
+          <p:cNvPr id="19" name="Text 17"/>
+          <p:cNvSpPr/>
+          <p:nvPr/>
+        </p:nvSpPr>
+        <p:spPr>
+          <a:xfrm>
+            <a:off x="640080" y="3813048"/>
+            <a:ext cx="868680" cy="338328"/>
+          </a:xfrm>
+          <a:prstGeom prst="rect">
+            <a:avLst/>
+          </a:prstGeom>
+          <a:noFill/>
+          <a:ln/>
+        </p:spPr>
+        <p:txBody>
+          <a:bodyPr wrap="square" rtlCol="0" anchor="ctr"/>
+          <a:lstStyle/>
+          <a:p>
+            <a:pPr algn="ctr" indent="0" marL="0">
+              <a:buNone/>
+            </a:pPr>
+            <a:r>
+              <a:rPr lang="en-US" sz="1100" b="1" dirty="0">
+                <a:solidFill>
+                  <a:srgbClr val="FFFFFF"/>
+                </a:solidFill>
+                <a:latin typeface="Calibri" pitchFamily="34" charset="0"/>
+                <a:ea typeface="Calibri" pitchFamily="34" charset="-122"/>
+                <a:cs typeface="Calibri" pitchFamily="34" charset="-120"/>
+              </a:rPr>
+              <a:t>1:05</a:t>
+            </a:r>
+            <a:endParaRPr lang="en-US" sz="1100" dirty="0"/>
+          </a:p>
+        </p:txBody>
+      </p:sp>
+      <p:sp>
+        <p:nvSpPr>
+          <p:cNvPr id="20" name="Text 18"/>
+          <p:cNvSpPr/>
+          <p:nvPr/>
+        </p:nvSpPr>
+        <p:spPr>
+          <a:xfrm>
+            <a:off x="1691640" y="3794760"/>
+            <a:ext cx="9646920" cy="448056"/>
+          </a:xfrm>
+          <a:prstGeom prst="rect">
+            <a:avLst/>
+          </a:prstGeom>
+          <a:noFill/>
+          <a:ln/>
+        </p:spPr>
+        <p:txBody>
+          <a:bodyPr wrap="square" rtlCol="0" anchor="ctr">
+            <a:spAutoFit/>
+          </a:bodyPr>
+          <a:lstStyle/>
+          <a:p>
+            <a:pPr indent="0" marL="0">
+              <a:buNone/>
+            </a:pPr>
+            <a:r>
+              <a:rPr lang="en-US" sz="1100" dirty="0">
+                <a:solidFill>
+                  <a:srgbClr val="1A1A1A"/>
+                </a:solidFill>
+                <a:latin typeface="Calibri" pitchFamily="34" charset="0"/>
+                <a:ea typeface="Calibri" pitchFamily="34" charset="-122"/>
+                <a:cs typeface="Calibri" pitchFamily="34" charset="-120"/>
+              </a:rPr>
+              <a:t>Break</a:t>
+            </a:r>
+            <a:endParaRPr lang="en-US" sz="1100" dirty="0"/>
+          </a:p>
+        </p:txBody>
+      </p:sp>
+      <p:sp>
+        <p:nvSpPr>
+          <p:cNvPr id="21" name="Shape 19"/>
+          <p:cNvSpPr/>
+          <p:nvPr/>
+        </p:nvSpPr>
+        <p:spPr>
+          <a:xfrm>
+            <a:off x="640080" y="4261104"/>
+            <a:ext cx="868680" cy="338328"/>
+          </a:xfrm>
+          <a:prstGeom prst="roundRect">
+            <a:avLst>
+              <a:gd name="adj" fmla="val 16216"/>
+            </a:avLst>
+          </a:prstGeom>
+          <a:solidFill>
+            <a:srgbClr val="7A3B2E"/>
+          </a:solidFill>
+          <a:ln/>
+        </p:spPr>
+      </p:sp>
+      <p:sp>
+        <p:nvSpPr>
+          <p:cNvPr id="22" name="Text 20"/>
+          <p:cNvSpPr/>
+          <p:nvPr/>
+        </p:nvSpPr>
+        <p:spPr>
+          <a:xfrm>
+            <a:off x="640080" y="4261104"/>
+            <a:ext cx="868680" cy="338328"/>
+          </a:xfrm>
+          <a:prstGeom prst="rect">
+            <a:avLst/>
+          </a:prstGeom>
+          <a:noFill/>
+          <a:ln/>
+        </p:spPr>
+        <p:txBody>
+          <a:bodyPr wrap="square" rtlCol="0" anchor="ctr"/>
+          <a:lstStyle/>
+          <a:p>
+            <a:pPr algn="ctr" indent="0" marL="0">
+              <a:buNone/>
+            </a:pPr>
+            <a:r>
+              <a:rPr lang="en-US" sz="1100" b="1" dirty="0">
+                <a:solidFill>
+                  <a:srgbClr val="FFFFFF"/>
+                </a:solidFill>
+                <a:latin typeface="Calibri" pitchFamily="34" charset="0"/>
+                <a:ea typeface="Calibri" pitchFamily="34" charset="-122"/>
+                <a:cs typeface="Calibri" pitchFamily="34" charset="-120"/>
+              </a:rPr>
+              <a:t>1:15</a:t>
+            </a:r>
+            <a:endParaRPr lang="en-US" sz="1100" dirty="0"/>
+          </a:p>
+        </p:txBody>
+      </p:sp>
+      <p:sp>
+        <p:nvSpPr>
+          <p:cNvPr id="23" name="Text 21"/>
+          <p:cNvSpPr/>
+          <p:nvPr/>
+        </p:nvSpPr>
+        <p:spPr>
+          <a:xfrm>
+            <a:off x="1691640" y="4242816"/>
+            <a:ext cx="9646920" cy="448056"/>
+          </a:xfrm>
+          <a:prstGeom prst="rect">
+            <a:avLst/>
+          </a:prstGeom>
+          <a:noFill/>
+          <a:ln/>
+        </p:spPr>
+        <p:txBody>
+          <a:bodyPr wrap="square" rtlCol="0" anchor="ctr">
+            <a:spAutoFit/>
+          </a:bodyPr>
+          <a:lstStyle/>
+          <a:p>
+            <a:pPr indent="0" marL="0">
+              <a:buNone/>
+            </a:pPr>
+            <a:r>
+              <a:rPr lang="en-US" sz="1100" dirty="0">
+                <a:solidFill>
+                  <a:srgbClr val="1A1A1A"/>
+                </a:solidFill>
+                <a:latin typeface="Calibri" pitchFamily="34" charset="0"/>
+                <a:ea typeface="Calibri" pitchFamily="34" charset="-122"/>
+                <a:cs typeface="Calibri" pitchFamily="34" charset="-120"/>
+              </a:rPr>
+              <a:t>tf-idf: the AI scales your hand count; stop-words dominate, which motivates "common here, rare overall."</a:t>
+            </a:r>
+            <a:endParaRPr lang="en-US" sz="1100" dirty="0"/>
+          </a:p>
+        </p:txBody>
+      </p:sp>
+      <p:sp>
+        <p:nvSpPr>
+          <p:cNvPr id="24" name="Shape 22"/>
+          <p:cNvSpPr/>
+          <p:nvPr/>
+        </p:nvSpPr>
+        <p:spPr>
+          <a:xfrm>
+            <a:off x="640080" y="4709160"/>
+            <a:ext cx="868680" cy="338328"/>
+          </a:xfrm>
+          <a:prstGeom prst="roundRect">
+            <a:avLst>
+              <a:gd name="adj" fmla="val 16216"/>
+            </a:avLst>
+          </a:prstGeom>
+          <a:solidFill>
+            <a:srgbClr val="7A3B2E"/>
+          </a:solidFill>
+          <a:ln/>
+        </p:spPr>
+      </p:sp>
+      <p:sp>
+        <p:nvSpPr>
+          <p:cNvPr id="25" name="Text 23"/>
+          <p:cNvSpPr/>
+          <p:nvPr/>
+        </p:nvSpPr>
+        <p:spPr>
+          <a:xfrm>
+            <a:off x="640080" y="4709160"/>
+            <a:ext cx="868680" cy="338328"/>
+          </a:xfrm>
+          <a:prstGeom prst="rect">
+            <a:avLst/>
+          </a:prstGeom>
+          <a:noFill/>
+          <a:ln/>
+        </p:spPr>
+        <p:txBody>
+          <a:bodyPr wrap="square" rtlCol="0" anchor="ctr"/>
+          <a:lstStyle/>
+          <a:p>
+            <a:pPr algn="ctr" indent="0" marL="0">
+              <a:buNone/>
+            </a:pPr>
+            <a:r>
+              <a:rPr lang="en-US" sz="1100" b="1" dirty="0">
+                <a:solidFill>
+                  <a:srgbClr val="FFFFFF"/>
+                </a:solidFill>
+                <a:latin typeface="Calibri" pitchFamily="34" charset="0"/>
+                <a:ea typeface="Calibri" pitchFamily="34" charset="-122"/>
+                <a:cs typeface="Calibri" pitchFamily="34" charset="-120"/>
+              </a:rPr>
+              <a:t>1:30</a:t>
+            </a:r>
+            <a:endParaRPr lang="en-US" sz="1100" dirty="0"/>
+          </a:p>
+        </p:txBody>
+      </p:sp>
+      <p:sp>
+        <p:nvSpPr>
+          <p:cNvPr id="26" name="Text 24"/>
+          <p:cNvSpPr/>
+          <p:nvPr/>
+        </p:nvSpPr>
+        <p:spPr>
+          <a:xfrm>
+            <a:off x="1691640" y="4690872"/>
+            <a:ext cx="9646920" cy="448056"/>
+          </a:xfrm>
+          <a:prstGeom prst="rect">
+            <a:avLst/>
+          </a:prstGeom>
+          <a:noFill/>
+          <a:ln/>
+        </p:spPr>
+        <p:txBody>
+          <a:bodyPr wrap="square" rtlCol="0" anchor="ctr">
+            <a:spAutoFit/>
+          </a:bodyPr>
+          <a:lstStyle/>
+          <a:p>
+            <a:pPr indent="0" marL="0">
+              <a:buNone/>
+            </a:pPr>
+            <a:r>
+              <a:rPr lang="en-US" sz="1100" dirty="0">
+                <a:solidFill>
+                  <a:srgbClr val="1A1A1A"/>
+                </a:solidFill>
+                <a:latin typeface="Calibri" pitchFamily="34" charset="0"/>
+                <a:ea typeface="Calibri" pitchFamily="34" charset="-122"/>
+                <a:cs typeface="Calibri" pitchFamily="34" charset="-120"/>
+              </a:rPr>
+              <a:t>Keyness, the She Giggles, He Gallops move: a log-odds ratio between two corpora finds the words one voice uses far more than a baseline, exactly the method behind Week 1's featured piece. The corpus pair is a choice too: artist vs. pop, lyrics vs. subreddit vs. novel.</a:t>
+            </a:r>
+            <a:endParaRPr lang="en-US" sz="1100" dirty="0"/>
+          </a:p>
+        </p:txBody>
+      </p:sp>
+      <p:sp>
+        <p:nvSpPr>
+          <p:cNvPr id="27" name="Shape 25"/>
+          <p:cNvSpPr/>
+          <p:nvPr/>
+        </p:nvSpPr>
+        <p:spPr>
+          <a:xfrm>
+            <a:off x="640080" y="5157216"/>
+            <a:ext cx="868680" cy="338328"/>
+          </a:xfrm>
+          <a:prstGeom prst="roundRect">
+            <a:avLst>
+              <a:gd name="adj" fmla="val 16216"/>
+            </a:avLst>
+          </a:prstGeom>
+          <a:solidFill>
+            <a:srgbClr val="7A3B2E"/>
+          </a:solidFill>
+          <a:ln/>
+        </p:spPr>
+      </p:sp>
+      <p:sp>
+        <p:nvSpPr>
+          <p:cNvPr id="28" name="Text 26"/>
+          <p:cNvSpPr/>
+          <p:nvPr/>
+        </p:nvSpPr>
+        <p:spPr>
+          <a:xfrm>
+            <a:off x="640080" y="5157216"/>
+            <a:ext cx="868680" cy="338328"/>
+          </a:xfrm>
+          <a:prstGeom prst="rect">
+            <a:avLst/>
+          </a:prstGeom>
+          <a:noFill/>
+          <a:ln/>
+        </p:spPr>
+        <p:txBody>
+          <a:bodyPr wrap="square" rtlCol="0" anchor="ctr"/>
+          <a:lstStyle/>
+          <a:p>
+            <a:pPr algn="ctr" indent="0" marL="0">
+              <a:buNone/>
+            </a:pPr>
+            <a:r>
+              <a:rPr lang="en-US" sz="1100" b="1" dirty="0">
+                <a:solidFill>
+                  <a:srgbClr val="FFFFFF"/>
+                </a:solidFill>
+                <a:latin typeface="Calibri" pitchFamily="34" charset="0"/>
+                <a:ea typeface="Calibri" pitchFamily="34" charset="-122"/>
+                <a:cs typeface="Calibri" pitchFamily="34" charset="-120"/>
+              </a:rPr>
+              <a:t>1:42</a:t>
+            </a:r>
+            <a:endParaRPr lang="en-US" sz="1100" dirty="0"/>
+          </a:p>
+        </p:txBody>
+      </p:sp>
+      <p:sp>
+        <p:nvSpPr>
+          <p:cNvPr id="29" name="Text 27"/>
+          <p:cNvSpPr/>
+          <p:nvPr/>
+        </p:nvSpPr>
+        <p:spPr>
+          <a:xfrm>
+            <a:off x="1691640" y="5138928"/>
+            <a:ext cx="9646920" cy="448056"/>
+          </a:xfrm>
+          <a:prstGeom prst="rect">
+            <a:avLst/>
+          </a:prstGeom>
+          <a:noFill/>
+          <a:ln/>
+        </p:spPr>
+        <p:txBody>
+          <a:bodyPr wrap="square" rtlCol="0" anchor="ctr">
+            <a:spAutoFit/>
+          </a:bodyPr>
+          <a:lstStyle/>
+          <a:p>
+            <a:pPr indent="0" marL="0">
+              <a:buNone/>
+            </a:pPr>
+            <a:r>
+              <a:rPr lang="en-US" sz="1100" dirty="0">
+                <a:solidFill>
+                  <a:srgbClr val="1A1A1A"/>
+                </a:solidFill>
+                <a:latin typeface="Calibri" pitchFamily="34" charset="0"/>
+                <a:ea typeface="Calibri" pitchFamily="34" charset="-122"/>
+                <a:cs typeface="Calibri" pitchFamily="34" charset="-120"/>
+              </a:rPr>
+              <a:t>Is the difference real? The shuffle test: shuffle the labels, recount, a thousand times. If chance alone often makes a gap this big, don't trust it; if it almost never does, you have a finding. Real-but-tiny is still tiny.</a:t>
+            </a:r>
+            <a:endParaRPr lang="en-US" sz="1100" dirty="0"/>
+          </a:p>
+        </p:txBody>
+      </p:sp>
+      <p:sp>
+        <p:nvSpPr>
+          <p:cNvPr id="30" name="Shape 28"/>
+          <p:cNvSpPr/>
+          <p:nvPr/>
+        </p:nvSpPr>
+        <p:spPr>
+          <a:xfrm>
+            <a:off x="640080" y="5605272"/>
+            <a:ext cx="868680" cy="338328"/>
+          </a:xfrm>
+          <a:prstGeom prst="roundRect">
+            <a:avLst>
+              <a:gd name="adj" fmla="val 16216"/>
+            </a:avLst>
+          </a:prstGeom>
+          <a:solidFill>
+            <a:srgbClr val="7A3B2E"/>
+          </a:solidFill>
+          <a:ln/>
+        </p:spPr>
+      </p:sp>
+      <p:sp>
+        <p:nvSpPr>
+          <p:cNvPr id="31" name="Text 29"/>
+          <p:cNvSpPr/>
+          <p:nvPr/>
+        </p:nvSpPr>
+        <p:spPr>
+          <a:xfrm>
+            <a:off x="640080" y="5605272"/>
+            <a:ext cx="868680" cy="338328"/>
+          </a:xfrm>
+          <a:prstGeom prst="rect">
+            <a:avLst/>
+          </a:prstGeom>
+          <a:noFill/>
+          <a:ln/>
+        </p:spPr>
+        <p:txBody>
+          <a:bodyPr wrap="square" rtlCol="0" anchor="ctr"/>
+          <a:lstStyle/>
+          <a:p>
+            <a:pPr algn="ctr" indent="0" marL="0">
+              <a:buNone/>
+            </a:pPr>
+            <a:r>
+              <a:rPr lang="en-US" sz="1100" b="1" dirty="0">
+                <a:solidFill>
+                  <a:srgbClr val="FFFFFF"/>
+                </a:solidFill>
+                <a:latin typeface="Calibri" pitchFamily="34" charset="0"/>
+                <a:ea typeface="Calibri" pitchFamily="34" charset="-122"/>
+                <a:cs typeface="Calibri" pitchFamily="34" charset="-120"/>
+              </a:rPr>
+              <a:t>1:50</a:t>
+            </a:r>
+            <a:endParaRPr lang="en-US" sz="1100" dirty="0"/>
+          </a:p>
+        </p:txBody>
+      </p:sp>
+      <p:sp>
+        <p:nvSpPr>
+          <p:cNvPr id="32" name="Text 30"/>
+          <p:cNvSpPr/>
+          <p:nvPr/>
+        </p:nvSpPr>
+        <p:spPr>
+          <a:xfrm>
+            <a:off x="1691640" y="5586984"/>
+            <a:ext cx="9646920" cy="448056"/>
+          </a:xfrm>
+          <a:prstGeom prst="rect">
+            <a:avLst/>
+          </a:prstGeom>
+          <a:noFill/>
+          <a:ln/>
+        </p:spPr>
+        <p:txBody>
+          <a:bodyPr wrap="square" rtlCol="0" anchor="ctr">
+            <a:spAutoFit/>
+          </a:bodyPr>
+          <a:lstStyle/>
+          <a:p>
+            <a:pPr indent="0" marL="0">
+              <a:buNone/>
+            </a:pPr>
+            <a:r>
+              <a:rPr lang="en-US" sz="1100" dirty="0">
+                <a:solidFill>
+                  <a:srgbClr val="1A1A1A"/>
+                </a:solidFill>
+                <a:latin typeface="Calibri" pitchFamily="34" charset="0"/>
+                <a:ea typeface="Calibri" pitchFamily="34" charset="-122"/>
+                <a:cs typeface="Calibri" pitchFamily="34" charset="-120"/>
+              </a:rPr>
+              <a:t>Gemini-free check and check-out.</a:t>
+            </a:r>
+            <a:endParaRPr lang="en-US" sz="1100" dirty="0"/>
+          </a:p>
+        </p:txBody>
       </p:sp>
     </p:spTree>
   </p:cSld>

--- a/slides/pptx/week-02.pptx
+++ b/slides/pptx/week-02.pptx
@@ -4315,7 +4315,7 @@
                 <a:ea typeface="Calibri" pitchFamily="34" charset="-122"/>
                 <a:cs typeface="Calibri" pitchFamily="34" charset="-120"/>
               </a:rPr>
-              <a:t>WEEK 2 · THE MATERIAL</a:t>
+              <a:t>WEEK 2 · KEY POINTS</a:t>
             </a:r>
             <a:endParaRPr lang="en-US" sz="1200" dirty="0"/>
           </a:p>
@@ -4703,7 +4703,7 @@
                 <a:ea typeface="Calibri" pitchFamily="34" charset="-122"/>
                 <a:cs typeface="Calibri" pitchFamily="34" charset="-120"/>
               </a:rPr>
-              <a:t>WEEK 2 · THE MATERIAL</a:t>
+              <a:t>WEEK 2 · KEY POINTS</a:t>
             </a:r>
             <a:endParaRPr lang="en-US" sz="1200" dirty="0"/>
           </a:p>
@@ -5091,7 +5091,7 @@
                 <a:ea typeface="Calibri" pitchFamily="34" charset="-122"/>
                 <a:cs typeface="Calibri" pitchFamily="34" charset="-120"/>
               </a:rPr>
-              <a:t>WEEK 2 · THE MATERIAL</a:t>
+              <a:t>WEEK 2 · KEY POINTS</a:t>
             </a:r>
             <a:endParaRPr lang="en-US" sz="1200" dirty="0"/>
           </a:p>
@@ -5479,7 +5479,7 @@
                 <a:ea typeface="Calibri" pitchFamily="34" charset="-122"/>
                 <a:cs typeface="Calibri" pitchFamily="34" charset="-120"/>
               </a:rPr>
-              <a:t>WEEK 2 · THE MATERIAL</a:t>
+              <a:t>WEEK 2 · KEY POINTS</a:t>
             </a:r>
             <a:endParaRPr lang="en-US" sz="1200" dirty="0"/>
           </a:p>
@@ -6638,7 +6638,7 @@
                 <a:ea typeface="Calibri" pitchFamily="34" charset="-122"/>
                 <a:cs typeface="Calibri" pitchFamily="34" charset="-120"/>
               </a:rPr>
-              <a:t>Delight beat: an artist's signature vocabulary, the words they use far more than a pop baseline. No caveats.</a:t>
+              <a:t>For fun, before any complications: the words one artist uses far more than everyone else, their signature vocabulary against a pop baseline.</a:t>
             </a:r>
             <a:endParaRPr lang="en-US" sz="1100" dirty="0"/>
           </a:p>

--- a/slides/pptx/week-02.pptx
+++ b/slides/pptx/week-02.pptx
@@ -2008,7 +2008,7 @@
                 <a:ea typeface="Calibri" pitchFamily="34" charset="-122"/>
                 <a:cs typeface="Calibri" pitchFamily="34" charset="-120"/>
               </a:rPr>
-              <a:t>Put a famous PNAS paper on trial, find the words that make a voice distinctive (the method behind Week 1's featured study), and learn the one statistics move the course needs: the shuffle test for whether a difference is real.</a:t>
+              <a:t>Put a famous PNAS paper on trial, find the words that make a voice distinctive (the method behind Week 1's featured study), and learn the one statistical method the course requires: the shuffle test, which checks whether a difference is real.</a:t>
             </a:r>
             <a:endParaRPr lang="en-US" sz="1600" dirty="0"/>
           </a:p>
@@ -2738,7 +2738,7 @@
                 <a:ea typeface="Calibri" pitchFamily="34" charset="-122"/>
                 <a:cs typeface="Calibri" pitchFamily="34" charset="-120"/>
               </a:rPr>
-              <a:t>Count something in a text you love; one chart; one sentence naming a choice. Comparing two things? Shuffle-test it.</a:t>
+              <a:t>Count something in a text you care about; one chart; one sentence naming a choice. If the count compares two things, shuffle-test the gap.</a:t>
             </a:r>
             <a:endParaRPr lang="en-US" sz="1400" dirty="0"/>
           </a:p>
@@ -3092,7 +3092,7 @@
                 <a:ea typeface="Calibri" pitchFamily="34" charset="-122"/>
                 <a:cs typeface="Calibri" pitchFamily="34" charset="-120"/>
               </a:rPr>
-              <a:t>Counting is the honest floor, with no notion of meaning. This sets up the Week 5 payoff.</a:t>
+              <a:t>Counting is the simplest tool and has no notion of meaning. Week 5 addresses that limit.</a:t>
             </a:r>
             <a:endParaRPr lang="en-US" sz="1450" dirty="0"/>
           </a:p>
@@ -3380,7 +3380,7 @@
                 <a:ea typeface="Calibri" pitchFamily="34" charset="-122"/>
                 <a:cs typeface="Calibri" pitchFamily="34" charset="-120"/>
               </a:rPr>
-              <a:t>Shuffle the labels and count again, a thousand times; if chance often beats your gap, don't trust it.</a:t>
+              <a:t>Shuffle the labels and count again, one thousand times; if chance often matches your gap, do not trust it.</a:t>
             </a:r>
             <a:endParaRPr lang="en-US" sz="1450" dirty="0"/>
           </a:p>
@@ -4224,7 +4224,7 @@
                 <a:ea typeface="Calibri" pitchFamily="34" charset="-122"/>
                 <a:cs typeface="Calibri" pitchFamily="34" charset="-120"/>
               </a:rPr>
-              <a:t>The rising words are fiction-words, and Google scanned more fiction after 2000. The rebuttal and the move to steal: the authors removed the entire fiction corpus and re-ran it, and the pattern largely held. The answer to "your corpus is biased" is a test, not an argument.</a:t>
+              <a:t>The rising words are fiction-words, and Google scanned more fiction after 2000. The rebuttal, and the method worth adopting: the authors removed the entire fiction corpus and re-ran it, and the pattern largely held. The answer to "your corpus is biased" is a test, not an argument.</a:t>
             </a:r>
             <a:endParaRPr lang="en-US" sz="2000" dirty="0"/>
           </a:p>
@@ -4612,7 +4612,7 @@
                 <a:ea typeface="Calibri" pitchFamily="34" charset="-122"/>
                 <a:cs typeface="Calibri" pitchFamily="34" charset="-120"/>
               </a:rPr>
-              <a:t>The move to steal: answer "your corpus is biased" with a test, not an argument.</a:t>
+              <a:t>The method worth adopting: answer "your corpus is biased" with a test rather than an argument.</a:t>
             </a:r>
             <a:endParaRPr lang="en-US" sz="1650" dirty="0"/>
           </a:p>
@@ -5132,7 +5132,7 @@
                 <a:ea typeface="Cambria" pitchFamily="34" charset="-122"/>
                 <a:cs typeface="Cambria" pitchFamily="34" charset="-120"/>
               </a:rPr>
-              <a:t>Keyness: distinctively hers</a:t>
+              <a:t>Keyness: what makes a voice distinctive</a:t>
             </a:r>
             <a:endParaRPr lang="en-US" sz="3000" dirty="0"/>
           </a:p>
@@ -5324,7 +5324,7 @@
                 <a:ea typeface="Calibri" pitchFamily="34" charset="-122"/>
                 <a:cs typeface="Calibri" pitchFamily="34" charset="-120"/>
               </a:rPr>
-              <a:t>She Giggles, He Gallops IS this method: verbs after "she" vs. "he" in 2,000 screenplays. Women snuggle, giggle, squeal; men gallop, strap, shoot.</a:t>
+              <a:t>She Giggles, He Gallops is exactly this method: verbs after "she" vs. "he" in 2,000 screenplays. Women snuggle, giggle, squeal; men gallop, strap, shoot.</a:t>
             </a:r>
             <a:endParaRPr lang="en-US" sz="1650" dirty="0"/>
           </a:p>
@@ -5584,7 +5584,7 @@
                 <a:ea typeface="Calibri" pitchFamily="34" charset="-122"/>
                 <a:cs typeface="Calibri" pitchFamily="34" charset="-120"/>
               </a:rPr>
-              <a:t>The question chance asks: could randomly dealt labels produce a gap this big?</a:t>
+              <a:t>The question: could randomly dealt labels produce a gap this large?</a:t>
             </a:r>
             <a:endParaRPr lang="en-US" sz="1650" dirty="0"/>
           </a:p>
@@ -6638,7 +6638,7 @@
                 <a:ea typeface="Calibri" pitchFamily="34" charset="-122"/>
                 <a:cs typeface="Calibri" pitchFamily="34" charset="-120"/>
               </a:rPr>
-              <a:t>For fun, before any complications: the words one artist uses far more than everyone else, their signature vocabulary against a pop baseline.</a:t>
+              <a:t>A brief demonstration before the complications: the words one artist uses far more than everyone else, a signature vocabulary measured against a pop baseline.</a:t>
             </a:r>
             <a:endParaRPr lang="en-US" sz="1100" dirty="0"/>
           </a:p>
@@ -7250,7 +7250,7 @@
                 <a:ea typeface="Calibri" pitchFamily="34" charset="-122"/>
                 <a:cs typeface="Calibri" pitchFamily="34" charset="-120"/>
               </a:rPr>
-              <a:t>Is the difference real? The shuffle test: shuffle the labels, recount, a thousand times. If chance alone often makes a gap this big, don't trust it; if it almost never does, you have a finding. Real-but-tiny is still tiny.</a:t>
+              <a:t>Is the difference real? The shuffle test: shuffle the labels and recount, one thousand times. If chance alone frequently produces a gap this large, the difference should not be trusted; if it almost never does, the finding stands. A difference can be real and still small.</a:t>
             </a:r>
             <a:endParaRPr lang="en-US" sz="1100" dirty="0"/>
           </a:p>

--- a/slides/pptx/week-02.pptx
+++ b/slides/pptx/week-02.pptx
@@ -2452,7 +2452,7 @@
         </p:nvSpPr>
         <p:spPr>
           <a:xfrm>
-            <a:off x="640080" y="1810512"/>
+            <a:off x="640080" y="1673352"/>
             <a:ext cx="219456" cy="219456"/>
           </a:xfrm>
           <a:prstGeom prst="ellipse">
@@ -2472,7 +2472,7 @@
         </p:nvSpPr>
         <p:spPr>
           <a:xfrm>
-            <a:off x="1051560" y="1737360"/>
+            <a:off x="1051560" y="1600200"/>
             <a:ext cx="10424160" cy="365760"/>
           </a:xfrm>
           <a:prstGeom prst="rect">
@@ -2511,7 +2511,7 @@
         </p:nvSpPr>
         <p:spPr>
           <a:xfrm>
-            <a:off x="1051560" y="2121408"/>
+            <a:off x="1051560" y="1984248"/>
             <a:ext cx="10424160" cy="731520"/>
           </a:xfrm>
           <a:prstGeom prst="rect">
@@ -2552,7 +2552,7 @@
         </p:nvSpPr>
         <p:spPr>
           <a:xfrm>
-            <a:off x="640080" y="2953512"/>
+            <a:off x="640080" y="2633472"/>
             <a:ext cx="219456" cy="219456"/>
           </a:xfrm>
           <a:prstGeom prst="ellipse">
@@ -2572,7 +2572,7 @@
         </p:nvSpPr>
         <p:spPr>
           <a:xfrm>
-            <a:off x="1051560" y="2880360"/>
+            <a:off x="1051560" y="2560320"/>
             <a:ext cx="10424160" cy="365760"/>
           </a:xfrm>
           <a:prstGeom prst="rect">
@@ -2611,7 +2611,7 @@
         </p:nvSpPr>
         <p:spPr>
           <a:xfrm>
-            <a:off x="1051560" y="3264408"/>
+            <a:off x="1051560" y="2944368"/>
             <a:ext cx="10424160" cy="731520"/>
           </a:xfrm>
           <a:prstGeom prst="rect">
@@ -2652,7 +2652,7 @@
         </p:nvSpPr>
         <p:spPr>
           <a:xfrm>
-            <a:off x="640080" y="4096512"/>
+            <a:off x="640080" y="3593592"/>
             <a:ext cx="219456" cy="219456"/>
           </a:xfrm>
           <a:prstGeom prst="ellipse">
@@ -2672,7 +2672,7 @@
         </p:nvSpPr>
         <p:spPr>
           <a:xfrm>
-            <a:off x="1051560" y="4023360"/>
+            <a:off x="1051560" y="3520440"/>
             <a:ext cx="10424160" cy="365760"/>
           </a:xfrm>
           <a:prstGeom prst="rect">
@@ -2697,7 +2697,7 @@
                 <a:ea typeface="Calibri" pitchFamily="34" charset="-122"/>
                 <a:cs typeface="Calibri" pitchFamily="34" charset="-120"/>
               </a:rPr>
-              <a:t>Sketch</a:t>
+              <a:t>Deeper (optional)</a:t>
             </a:r>
             <a:endParaRPr lang="en-US" sz="1500" dirty="0"/>
           </a:p>
@@ -2711,7 +2711,7 @@
         </p:nvSpPr>
         <p:spPr>
           <a:xfrm>
-            <a:off x="1051560" y="4407408"/>
+            <a:off x="1051560" y="3904488"/>
             <a:ext cx="10424160" cy="731520"/>
           </a:xfrm>
           <a:prstGeom prst="rect">
@@ -2738,7 +2738,7 @@
                 <a:ea typeface="Calibri" pitchFamily="34" charset="-122"/>
                 <a:cs typeface="Calibri" pitchFamily="34" charset="-120"/>
               </a:rPr>
-              <a:t>Count something in a text you care about; one chart; one sentence naming a choice. If the count compares two things, shuffle-test the gap.</a:t>
+              <a:t>Grimmer &amp;amp; Stewart, Text as Data (2013), §1–4: all quantitative models of language are wrong, but some are useful</a:t>
             </a:r>
             <a:endParaRPr lang="en-US" sz="1400" dirty="0"/>
           </a:p>
@@ -2752,14 +2752,14 @@
         </p:nvSpPr>
         <p:spPr>
           <a:xfrm>
-            <a:off x="640080" y="5239512"/>
+            <a:off x="640080" y="4553712"/>
             <a:ext cx="219456" cy="219456"/>
           </a:xfrm>
           <a:prstGeom prst="ellipse">
             <a:avLst/>
           </a:prstGeom>
           <a:solidFill>
-            <a:srgbClr val="7A3B2E"/>
+            <a:srgbClr val="3F6F5F"/>
           </a:solidFill>
           <a:ln/>
         </p:spPr>
@@ -2772,7 +2772,7 @@
         </p:nvSpPr>
         <p:spPr>
           <a:xfrm>
-            <a:off x="1051560" y="5166360"/>
+            <a:off x="1051560" y="4480560"/>
             <a:ext cx="10424160" cy="365760"/>
           </a:xfrm>
           <a:prstGeom prst="rect">
@@ -2791,12 +2791,112 @@
             <a:r>
               <a:rPr lang="en-US" sz="1500" b="1" dirty="0">
                 <a:solidFill>
-                  <a:srgbClr val="7A3B2E"/>
+                  <a:srgbClr val="3F6F5F"/>
                 </a:solidFill>
                 <a:latin typeface="Calibri" pitchFamily="34" charset="0"/>
                 <a:ea typeface="Calibri" pitchFamily="34" charset="-122"/>
                 <a:cs typeface="Calibri" pitchFamily="34" charset="-120"/>
               </a:rPr>
+              <a:t>Sketch</a:t>
+            </a:r>
+            <a:endParaRPr lang="en-US" sz="1500" dirty="0"/>
+          </a:p>
+        </p:txBody>
+      </p:sp>
+      <p:sp>
+        <p:nvSpPr>
+          <p:cNvPr id="14" name="Text 12"/>
+          <p:cNvSpPr/>
+          <p:nvPr/>
+        </p:nvSpPr>
+        <p:spPr>
+          <a:xfrm>
+            <a:off x="1051560" y="4864608"/>
+            <a:ext cx="10424160" cy="731520"/>
+          </a:xfrm>
+          <a:prstGeom prst="rect">
+            <a:avLst/>
+          </a:prstGeom>
+          <a:noFill/>
+          <a:ln/>
+        </p:spPr>
+        <p:txBody>
+          <a:bodyPr wrap="square" rtlCol="0" anchor="t">
+            <a:spAutoFit/>
+          </a:bodyPr>
+          <a:lstStyle/>
+          <a:p>
+            <a:pPr indent="0" marL="0">
+              <a:buNone/>
+            </a:pPr>
+            <a:r>
+              <a:rPr lang="en-US" sz="1400" dirty="0">
+                <a:solidFill>
+                  <a:srgbClr val="1A1A1A"/>
+                </a:solidFill>
+                <a:latin typeface="Calibri" pitchFamily="34" charset="0"/>
+                <a:ea typeface="Calibri" pitchFamily="34" charset="-122"/>
+                <a:cs typeface="Calibri" pitchFamily="34" charset="-120"/>
+              </a:rPr>
+              <a:t>Count something in a text you care about; one chart; one sentence naming a choice. If the count compares two things, shuffle-test the gap.</a:t>
+            </a:r>
+            <a:endParaRPr lang="en-US" sz="1400" dirty="0"/>
+          </a:p>
+        </p:txBody>
+      </p:sp>
+      <p:sp>
+        <p:nvSpPr>
+          <p:cNvPr id="15" name="Shape 13"/>
+          <p:cNvSpPr/>
+          <p:nvPr/>
+        </p:nvSpPr>
+        <p:spPr>
+          <a:xfrm>
+            <a:off x="640080" y="5513832"/>
+            <a:ext cx="219456" cy="219456"/>
+          </a:xfrm>
+          <a:prstGeom prst="ellipse">
+            <a:avLst/>
+          </a:prstGeom>
+          <a:solidFill>
+            <a:srgbClr val="7A3B2E"/>
+          </a:solidFill>
+          <a:ln/>
+        </p:spPr>
+      </p:sp>
+      <p:sp>
+        <p:nvSpPr>
+          <p:cNvPr id="16" name="Text 14"/>
+          <p:cNvSpPr/>
+          <p:nvPr/>
+        </p:nvSpPr>
+        <p:spPr>
+          <a:xfrm>
+            <a:off x="1051560" y="5440680"/>
+            <a:ext cx="10424160" cy="365760"/>
+          </a:xfrm>
+          <a:prstGeom prst="rect">
+            <a:avLst/>
+          </a:prstGeom>
+          <a:noFill/>
+          <a:ln/>
+        </p:spPr>
+        <p:txBody>
+          <a:bodyPr wrap="square" rtlCol="0" anchor="ctr"/>
+          <a:lstStyle/>
+          <a:p>
+            <a:pPr indent="0" marL="0">
+              <a:buNone/>
+            </a:pPr>
+            <a:r>
+              <a:rPr lang="en-US" sz="1500" b="1" dirty="0">
+                <a:solidFill>
+                  <a:srgbClr val="7A3B2E"/>
+                </a:solidFill>
+                <a:latin typeface="Calibri" pitchFamily="34" charset="0"/>
+                <a:ea typeface="Calibri" pitchFamily="34" charset="-122"/>
+                <a:cs typeface="Calibri" pitchFamily="34" charset="-120"/>
+              </a:rPr>
               <a:t>Check (AI closed)</a:t>
             </a:r>
             <a:endParaRPr lang="en-US" sz="1500" dirty="0"/>
@@ -2805,13 +2905,13 @@
       </p:sp>
       <p:sp>
         <p:nvSpPr>
-          <p:cNvPr id="14" name="Text 12"/>
-          <p:cNvSpPr/>
-          <p:nvPr/>
-        </p:nvSpPr>
-        <p:spPr>
-          <a:xfrm>
-            <a:off x="1051560" y="5550408"/>
+          <p:cNvPr id="17" name="Text 15"/>
+          <p:cNvSpPr/>
+          <p:nvPr/>
+        </p:nvSpPr>
+        <p:spPr>
+          <a:xfrm>
+            <a:off x="1051560" y="5824728"/>
             <a:ext cx="10424160" cy="731520"/>
           </a:xfrm>
           <a:prstGeom prst="rect">

--- a/slides/pptx/week-02.pptx
+++ b/slides/pptx/week-02.pptx
@@ -17,9 +17,10 @@
     <p:sldId id="265" r:id="rId11"/>
     <p:sldId id="266" r:id="rId12"/>
     <p:sldId id="267" r:id="rId13"/>
+    <p:sldId id="268" r:id="rId14"/>
   </p:sldIdLst>
   <p:notesMasterIdLst>
-    <p:notesMasterId r:id="rId14"/>
+    <p:notesMasterId r:id="rId15"/>
   </p:notesMasterIdLst>
   <p:sldSz cx="12191695" cy="6858000"/>
   <p:notesSz cx="6858000" cy="12191695"/>
@@ -819,6 +820,94 @@
 </p:notes>
 </file>
 
+<file path=ppt/notesSlides/notesSlide13.xml><?xml version="1.0" encoding="utf-8"?>
+<p:notes xmlns:a="http://schemas.openxmlformats.org/drawingml/2006/main" xmlns:r="http://schemas.openxmlformats.org/officeDocument/2006/relationships" xmlns:p="http://schemas.openxmlformats.org/presentationml/2006/main">
+  <p:cSld>
+    <p:spTree>
+      <p:nvGrpSpPr>
+        <p:cNvPr id="1" name=""/>
+        <p:cNvGrpSpPr/>
+        <p:nvPr/>
+      </p:nvGrpSpPr>
+      <p:grpSpPr>
+        <a:xfrm>
+          <a:off x="0" y="0"/>
+          <a:ext cx="0" cy="0"/>
+          <a:chOff x="0" y="0"/>
+          <a:chExt cx="0" cy="0"/>
+        </a:xfrm>
+      </p:grpSpPr>
+      <p:sp>
+        <p:nvSpPr>
+          <p:cNvPr id="2" name="Slide Image Placeholder 1"/>
+          <p:cNvSpPr>
+            <a:spLocks noGrp="1" noRot="1" noChangeAspect="1"/>
+          </p:cNvSpPr>
+          <p:nvPr>
+            <p:ph type="sldImg"/>
+          </p:nvPr>
+        </p:nvSpPr>
+        <p:spPr/>
+      </p:sp>
+      <p:sp>
+        <p:nvSpPr>
+          <p:cNvPr id="3" name="Notes Placeholder 2"/>
+          <p:cNvSpPr>
+            <a:spLocks noGrp="1"/>
+          </p:cNvSpPr>
+          <p:nvPr>
+            <p:ph type="body" idx="1"/>
+          </p:nvPr>
+        </p:nvSpPr>
+        <p:spPr/>
+        <p:txBody>
+          <a:bodyPr/>
+          <a:lstStyle/>
+          <a:p>
+            <a:r>
+              <a:rPr lang="en-US" dirty="0"/>
+              <a:t/>
+            </a:r>
+            <a:endParaRPr lang="en-US" dirty="0"/>
+          </a:p>
+        </p:txBody>
+      </p:sp>
+      <p:sp>
+        <p:nvSpPr>
+          <p:cNvPr id="4" name="Slide Number Placeholder 3"/>
+          <p:cNvSpPr>
+            <a:spLocks noGrp="1"/>
+          </p:cNvSpPr>
+          <p:nvPr>
+            <p:ph type="sldNum" sz="quarter" idx="10"/>
+          </p:nvPr>
+        </p:nvSpPr>
+        <p:spPr/>
+        <p:txBody>
+          <a:bodyPr/>
+          <a:lstStyle/>
+          <a:p>
+            <a:fld id="{F7021451-1387-4CA6-816F-3879F97B5CBC}" type="slidenum">
+              <a:rPr lang="en-US"/>
+              <a:t>13</a:t>
+            </a:fld>
+            <a:endParaRPr lang="en-US"/>
+          </a:p>
+        </p:txBody>
+      </p:sp>
+    </p:spTree>
+    <p:extLst>
+      <p:ext uri="{BB962C8B-B14F-4D97-AF65-F5344CB8AC3E}">
+        <p14:creationId xmlns:p14="http://schemas.microsoft.com/office/powerpoint/2010/main" val="1024086991"/>
+      </p:ext>
+    </p:extLst>
+  </p:cSld>
+  <p:clrMapOvr>
+    <a:masterClrMapping/>
+  </p:clrMapOvr>
+</p:notes>
+</file>
+
 <file path=ppt/notesSlides/notesSlide2.xml><?xml version="1.0" encoding="utf-8"?>
 <p:notes xmlns:a="http://schemas.openxmlformats.org/drawingml/2006/main" xmlns:r="http://schemas.openxmlformats.org/officeDocument/2006/relationships" xmlns:p="http://schemas.openxmlformats.org/presentationml/2006/main">
   <p:cSld>
@@ -2438,7 +2527,7 @@
                 <a:ea typeface="Cambria" pitchFamily="34" charset="-122"/>
                 <a:cs typeface="Cambria" pitchFamily="34" charset="-120"/>
               </a:rPr>
-              <a:t>Reading &amp; homework</a:t>
+              <a:t>The session</a:t>
             </a:r>
             <a:endParaRPr lang="en-US" sz="3000" dirty="0"/>
           </a:p>
@@ -2452,11 +2541,13 @@
         </p:nvSpPr>
         <p:spPr>
           <a:xfrm>
-            <a:off x="640080" y="1673352"/>
-            <a:ext cx="219456" cy="219456"/>
-          </a:xfrm>
-          <a:prstGeom prst="ellipse">
-            <a:avLst/>
+            <a:off x="640080" y="1572768"/>
+            <a:ext cx="868680" cy="338328"/>
+          </a:xfrm>
+          <a:prstGeom prst="roundRect">
+            <a:avLst>
+              <a:gd name="adj" fmla="val 16216"/>
+            </a:avLst>
           </a:prstGeom>
           <a:solidFill>
             <a:srgbClr val="7A3B2E"/>
@@ -2472,8 +2563,8 @@
         </p:nvSpPr>
         <p:spPr>
           <a:xfrm>
-            <a:off x="1051560" y="1600200"/>
-            <a:ext cx="10424160" cy="365760"/>
+            <a:off x="640080" y="1572768"/>
+            <a:ext cx="868680" cy="338328"/>
           </a:xfrm>
           <a:prstGeom prst="rect">
             <a:avLst/>
@@ -2485,21 +2576,21 @@
           <a:bodyPr wrap="square" rtlCol="0" anchor="ctr"/>
           <a:lstStyle/>
           <a:p>
-            <a:pPr indent="0" marL="0">
-              <a:buNone/>
-            </a:pPr>
-            <a:r>
-              <a:rPr lang="en-US" sz="1500" b="1" dirty="0">
-                <a:solidFill>
-                  <a:srgbClr val="7A3B2E"/>
+            <a:pPr algn="ctr" indent="0" marL="0">
+              <a:buNone/>
+            </a:pPr>
+            <a:r>
+              <a:rPr lang="en-US" sz="1100" b="1" dirty="0">
+                <a:solidFill>
+                  <a:srgbClr val="FFFFFF"/>
                 </a:solidFill>
                 <a:latin typeface="Calibri" pitchFamily="34" charset="0"/>
                 <a:ea typeface="Calibri" pitchFamily="34" charset="-122"/>
                 <a:cs typeface="Calibri" pitchFamily="34" charset="-120"/>
               </a:rPr>
-              <a:t>Reading</a:t>
-            </a:r>
-            <a:endParaRPr lang="en-US" sz="1500" dirty="0"/>
+              <a:t>0:00</a:t>
+            </a:r>
+            <a:endParaRPr lang="en-US" sz="1100" dirty="0"/>
           </a:p>
         </p:txBody>
       </p:sp>
@@ -2511,17 +2602,17 @@
         </p:nvSpPr>
         <p:spPr>
           <a:xfrm>
-            <a:off x="1051560" y="1984248"/>
-            <a:ext cx="10424160" cy="731520"/>
-          </a:xfrm>
-          <a:prstGeom prst="rect">
-            <a:avLst/>
-          </a:prstGeom>
-          <a:noFill/>
-          <a:ln/>
-        </p:spPr>
-        <p:txBody>
-          <a:bodyPr wrap="square" rtlCol="0" anchor="t">
+            <a:off x="1691640" y="1554480"/>
+            <a:ext cx="9646920" cy="448056"/>
+          </a:xfrm>
+          <a:prstGeom prst="rect">
+            <a:avLst/>
+          </a:prstGeom>
+          <a:noFill/>
+          <a:ln/>
+        </p:spPr>
+        <p:txBody>
+          <a:bodyPr wrap="square" rtlCol="0" anchor="ctr">
             <a:spAutoFit/>
           </a:bodyPr>
           <a:lstStyle/>
@@ -2530,7 +2621,7 @@
               <a:buNone/>
             </a:pPr>
             <a:r>
-              <a:rPr lang="en-US" sz="1400" dirty="0">
+              <a:rPr lang="en-US" sz="1100" dirty="0">
                 <a:solidFill>
                   <a:srgbClr val="1A1A1A"/>
                 </a:solidFill>
@@ -2538,9 +2629,9 @@
                 <a:ea typeface="Calibri" pitchFamily="34" charset="-122"/>
                 <a:cs typeface="Calibri" pitchFamily="34" charset="-120"/>
               </a:rPr>
-              <a:t>Wolfram, What Is ChatGPT Doing (opening sections only)</a:t>
-            </a:r>
-            <a:endParaRPr lang="en-US" sz="1400" dirty="0"/>
+              <a:t>Warm-up retrieval.</a:t>
+            </a:r>
+            <a:endParaRPr lang="en-US" sz="1100" dirty="0"/>
           </a:p>
         </p:txBody>
       </p:sp>
@@ -2552,14 +2643,16 @@
         </p:nvSpPr>
         <p:spPr>
           <a:xfrm>
-            <a:off x="640080" y="2633472"/>
-            <a:ext cx="219456" cy="219456"/>
-          </a:xfrm>
-          <a:prstGeom prst="ellipse">
-            <a:avLst/>
-          </a:prstGeom>
-          <a:solidFill>
-            <a:srgbClr val="3F6F5F"/>
+            <a:off x="640080" y="2020824"/>
+            <a:ext cx="868680" cy="338328"/>
+          </a:xfrm>
+          <a:prstGeom prst="roundRect">
+            <a:avLst>
+              <a:gd name="adj" fmla="val 16216"/>
+            </a:avLst>
+          </a:prstGeom>
+          <a:solidFill>
+            <a:srgbClr val="7A3B2E"/>
           </a:solidFill>
           <a:ln/>
         </p:spPr>
@@ -2572,8 +2665,8 @@
         </p:nvSpPr>
         <p:spPr>
           <a:xfrm>
-            <a:off x="1051560" y="2560320"/>
-            <a:ext cx="10424160" cy="365760"/>
+            <a:off x="640080" y="2020824"/>
+            <a:ext cx="868680" cy="338328"/>
           </a:xfrm>
           <a:prstGeom prst="rect">
             <a:avLst/>
@@ -2585,21 +2678,21 @@
           <a:bodyPr wrap="square" rtlCol="0" anchor="ctr"/>
           <a:lstStyle/>
           <a:p>
-            <a:pPr indent="0" marL="0">
-              <a:buNone/>
-            </a:pPr>
-            <a:r>
-              <a:rPr lang="en-US" sz="1500" b="1" dirty="0">
-                <a:solidFill>
-                  <a:srgbClr val="3F6F5F"/>
+            <a:pPr algn="ctr" indent="0" marL="0">
+              <a:buNone/>
+            </a:pPr>
+            <a:r>
+              <a:rPr lang="en-US" sz="1100" b="1" dirty="0">
+                <a:solidFill>
+                  <a:srgbClr val="FFFFFF"/>
                 </a:solidFill>
                 <a:latin typeface="Calibri" pitchFamily="34" charset="0"/>
                 <a:ea typeface="Calibri" pitchFamily="34" charset="-122"/>
                 <a:cs typeface="Calibri" pitchFamily="34" charset="-120"/>
               </a:rPr>
-              <a:t>Supplement</a:t>
-            </a:r>
-            <a:endParaRPr lang="en-US" sz="1500" dirty="0"/>
+              <a:t>0:05</a:t>
+            </a:r>
+            <a:endParaRPr lang="en-US" sz="1100" dirty="0"/>
           </a:p>
         </p:txBody>
       </p:sp>
@@ -2611,17 +2704,17 @@
         </p:nvSpPr>
         <p:spPr>
           <a:xfrm>
-            <a:off x="1051560" y="2944368"/>
-            <a:ext cx="10424160" cy="731520"/>
-          </a:xfrm>
-          <a:prstGeom prst="rect">
-            <a:avLst/>
-          </a:prstGeom>
-          <a:noFill/>
-          <a:ln/>
-        </p:spPr>
-        <p:txBody>
-          <a:bodyPr wrap="square" rtlCol="0" anchor="t">
+            <a:off x="1691640" y="2002536"/>
+            <a:ext cx="9646920" cy="448056"/>
+          </a:xfrm>
+          <a:prstGeom prst="rect">
+            <a:avLst/>
+          </a:prstGeom>
+          <a:noFill/>
+          <a:ln/>
+        </p:spPr>
+        <p:txBody>
+          <a:bodyPr wrap="square" rtlCol="0" anchor="ctr">
             <a:spAutoFit/>
           </a:bodyPr>
           <a:lstStyle/>
@@ -2630,7 +2723,7 @@
               <a:buNone/>
             </a:pPr>
             <a:r>
-              <a:rPr lang="en-US" sz="1400" dirty="0">
+              <a:rPr lang="en-US" sz="1100" dirty="0">
                 <a:solidFill>
                   <a:srgbClr val="1A1A1A"/>
                 </a:solidFill>
@@ -2638,9 +2731,9 @@
                 <a:ea typeface="Calibri" pitchFamily="34" charset="-122"/>
                 <a:cs typeface="Calibri" pitchFamily="34" charset="-120"/>
               </a:rPr>
-              <a:t>Zipf's law, the straight line in every text</a:t>
-            </a:r>
-            <a:endParaRPr lang="en-US" sz="1400" dirty="0"/>
+              <a:t>The trial: claim, objection, re-run-without-fiction rebuttal, "interpret with care." One named choice is the chart: the hockey-stick shape depends on its y-axis and smoothing.</a:t>
+            </a:r>
+            <a:endParaRPr lang="en-US" sz="1100" dirty="0"/>
           </a:p>
         </p:txBody>
       </p:sp>
@@ -2652,14 +2745,16 @@
         </p:nvSpPr>
         <p:spPr>
           <a:xfrm>
-            <a:off x="640080" y="3593592"/>
-            <a:ext cx="219456" cy="219456"/>
-          </a:xfrm>
-          <a:prstGeom prst="ellipse">
-            <a:avLst/>
-          </a:prstGeom>
-          <a:solidFill>
-            <a:srgbClr val="B9852F"/>
+            <a:off x="640080" y="2468880"/>
+            <a:ext cx="868680" cy="338328"/>
+          </a:xfrm>
+          <a:prstGeom prst="roundRect">
+            <a:avLst>
+              <a:gd name="adj" fmla="val 16216"/>
+            </a:avLst>
+          </a:prstGeom>
+          <a:solidFill>
+            <a:srgbClr val="7A3B2E"/>
           </a:solidFill>
           <a:ln/>
         </p:spPr>
@@ -2672,8 +2767,8 @@
         </p:nvSpPr>
         <p:spPr>
           <a:xfrm>
-            <a:off x="1051560" y="3520440"/>
-            <a:ext cx="10424160" cy="365760"/>
+            <a:off x="640080" y="2468880"/>
+            <a:ext cx="868680" cy="338328"/>
           </a:xfrm>
           <a:prstGeom prst="rect">
             <a:avLst/>
@@ -2685,21 +2780,21 @@
           <a:bodyPr wrap="square" rtlCol="0" anchor="ctr"/>
           <a:lstStyle/>
           <a:p>
-            <a:pPr indent="0" marL="0">
-              <a:buNone/>
-            </a:pPr>
-            <a:r>
-              <a:rPr lang="en-US" sz="1500" b="1" dirty="0">
-                <a:solidFill>
-                  <a:srgbClr val="B9852F"/>
+            <a:pPr algn="ctr" indent="0" marL="0">
+              <a:buNone/>
+            </a:pPr>
+            <a:r>
+              <a:rPr lang="en-US" sz="1100" b="1" dirty="0">
+                <a:solidFill>
+                  <a:srgbClr val="FFFFFF"/>
                 </a:solidFill>
                 <a:latin typeface="Calibri" pitchFamily="34" charset="0"/>
                 <a:ea typeface="Calibri" pitchFamily="34" charset="-122"/>
                 <a:cs typeface="Calibri" pitchFamily="34" charset="-120"/>
               </a:rPr>
-              <a:t>Deeper (optional)</a:t>
-            </a:r>
-            <a:endParaRPr lang="en-US" sz="1500" dirty="0"/>
+              <a:t>0:25</a:t>
+            </a:r>
+            <a:endParaRPr lang="en-US" sz="1100" dirty="0"/>
           </a:p>
         </p:txBody>
       </p:sp>
@@ -2711,17 +2806,17 @@
         </p:nvSpPr>
         <p:spPr>
           <a:xfrm>
-            <a:off x="1051560" y="3904488"/>
-            <a:ext cx="10424160" cy="731520"/>
-          </a:xfrm>
-          <a:prstGeom prst="rect">
-            <a:avLst/>
-          </a:prstGeom>
-          <a:noFill/>
-          <a:ln/>
-        </p:spPr>
-        <p:txBody>
-          <a:bodyPr wrap="square" rtlCol="0" anchor="t">
+            <a:off x="1691640" y="2450592"/>
+            <a:ext cx="9646920" cy="448056"/>
+          </a:xfrm>
+          <a:prstGeom prst="rect">
+            <a:avLst/>
+          </a:prstGeom>
+          <a:noFill/>
+          <a:ln/>
+        </p:spPr>
+        <p:txBody>
+          <a:bodyPr wrap="square" rtlCol="0" anchor="ctr">
             <a:spAutoFit/>
           </a:bodyPr>
           <a:lstStyle/>
@@ -2730,7 +2825,7 @@
               <a:buNone/>
             </a:pPr>
             <a:r>
-              <a:rPr lang="en-US" sz="1400" dirty="0">
+              <a:rPr lang="en-US" sz="1100" dirty="0">
                 <a:solidFill>
                   <a:srgbClr val="1A1A1A"/>
                 </a:solidFill>
@@ -2738,9 +2833,9 @@
                 <a:ea typeface="Calibri" pitchFamily="34" charset="-122"/>
                 <a:cs typeface="Calibri" pitchFamily="34" charset="-120"/>
               </a:rPr>
-              <a:t>Grimmer &amp;amp; Stewart, Text as Data (2013), §1–4: all quantitative models of language are wrong, but some are useful</a:t>
-            </a:r>
-            <a:endParaRPr lang="en-US" sz="1400" dirty="0"/>
+              <a:t>A brief demonstration before the complications: the words one artist uses far more than everyone else, a signature vocabulary measured against a pop baseline.</a:t>
+            </a:r>
+            <a:endParaRPr lang="en-US" sz="1100" dirty="0"/>
           </a:p>
         </p:txBody>
       </p:sp>
@@ -2752,14 +2847,16 @@
         </p:nvSpPr>
         <p:spPr>
           <a:xfrm>
-            <a:off x="640080" y="4553712"/>
-            <a:ext cx="219456" cy="219456"/>
-          </a:xfrm>
-          <a:prstGeom prst="ellipse">
-            <a:avLst/>
-          </a:prstGeom>
-          <a:solidFill>
-            <a:srgbClr val="3F6F5F"/>
+            <a:off x="640080" y="2916936"/>
+            <a:ext cx="868680" cy="338328"/>
+          </a:xfrm>
+          <a:prstGeom prst="roundRect">
+            <a:avLst>
+              <a:gd name="adj" fmla="val 16216"/>
+            </a:avLst>
+          </a:prstGeom>
+          <a:solidFill>
+            <a:srgbClr val="7A3B2E"/>
           </a:solidFill>
           <a:ln/>
         </p:spPr>
@@ -2772,8 +2869,8 @@
         </p:nvSpPr>
         <p:spPr>
           <a:xfrm>
-            <a:off x="1051560" y="4480560"/>
-            <a:ext cx="10424160" cy="365760"/>
+            <a:off x="640080" y="2916936"/>
+            <a:ext cx="868680" cy="338328"/>
           </a:xfrm>
           <a:prstGeom prst="rect">
             <a:avLst/>
@@ -2785,21 +2882,21 @@
           <a:bodyPr wrap="square" rtlCol="0" anchor="ctr"/>
           <a:lstStyle/>
           <a:p>
-            <a:pPr indent="0" marL="0">
-              <a:buNone/>
-            </a:pPr>
-            <a:r>
-              <a:rPr lang="en-US" sz="1500" b="1" dirty="0">
-                <a:solidFill>
-                  <a:srgbClr val="3F6F5F"/>
+            <a:pPr algn="ctr" indent="0" marL="0">
+              <a:buNone/>
+            </a:pPr>
+            <a:r>
+              <a:rPr lang="en-US" sz="1100" b="1" dirty="0">
+                <a:solidFill>
+                  <a:srgbClr val="FFFFFF"/>
                 </a:solidFill>
                 <a:latin typeface="Calibri" pitchFamily="34" charset="0"/>
                 <a:ea typeface="Calibri" pitchFamily="34" charset="-122"/>
                 <a:cs typeface="Calibri" pitchFamily="34" charset="-120"/>
               </a:rPr>
-              <a:t>Sketch</a:t>
-            </a:r>
-            <a:endParaRPr lang="en-US" sz="1500" dirty="0"/>
+              <a:t>0:30</a:t>
+            </a:r>
+            <a:endParaRPr lang="en-US" sz="1100" dirty="0"/>
           </a:p>
         </p:txBody>
       </p:sp>
@@ -2811,17 +2908,17 @@
         </p:nvSpPr>
         <p:spPr>
           <a:xfrm>
-            <a:off x="1051560" y="4864608"/>
-            <a:ext cx="10424160" cy="731520"/>
-          </a:xfrm>
-          <a:prstGeom prst="rect">
-            <a:avLst/>
-          </a:prstGeom>
-          <a:noFill/>
-          <a:ln/>
-        </p:spPr>
-        <p:txBody>
-          <a:bodyPr wrap="square" rtlCol="0" anchor="t">
+            <a:off x="1691640" y="2898648"/>
+            <a:ext cx="9646920" cy="448056"/>
+          </a:xfrm>
+          <a:prstGeom prst="rect">
+            <a:avLst/>
+          </a:prstGeom>
+          <a:noFill/>
+          <a:ln/>
+        </p:spPr>
+        <p:txBody>
+          <a:bodyPr wrap="square" rtlCol="0" anchor="ctr">
             <a:spAutoFit/>
           </a:bodyPr>
           <a:lstStyle/>
@@ -2830,7 +2927,7 @@
               <a:buNone/>
             </a:pPr>
             <a:r>
-              <a:rPr lang="en-US" sz="1400" dirty="0">
+              <a:rPr lang="en-US" sz="1100" dirty="0">
                 <a:solidFill>
                   <a:srgbClr val="1A1A1A"/>
                 </a:solidFill>
@@ -2838,9 +2935,9 @@
                 <a:ea typeface="Calibri" pitchFamily="34" charset="-122"/>
                 <a:cs typeface="Calibri" pitchFamily="34" charset="-120"/>
               </a:rPr>
-              <a:t>Count something in a text you care about; one chart; one sentence naming a choice. If the count compares two things, shuffle-test the gap.</a:t>
-            </a:r>
-            <a:endParaRPr lang="en-US" sz="1400" dirty="0"/>
+              <a:t>Hand-built bag-of-words: two authors, highlighters, argue about merging run/running. Counting requires defining. Close with the loss demonstration: two sentences with identical bags and opposite meanings, and a picture beside its shuffled pixels, so the trade the bag makes is on the table before anything scales up.</a:t>
+            </a:r>
+            <a:endParaRPr lang="en-US" sz="1100" dirty="0"/>
           </a:p>
         </p:txBody>
       </p:sp>
@@ -2852,11 +2949,13 @@
         </p:nvSpPr>
         <p:spPr>
           <a:xfrm>
-            <a:off x="640080" y="5513832"/>
-            <a:ext cx="219456" cy="219456"/>
-          </a:xfrm>
-          <a:prstGeom prst="ellipse">
-            <a:avLst/>
+            <a:off x="640080" y="3364992"/>
+            <a:ext cx="868680" cy="338328"/>
+          </a:xfrm>
+          <a:prstGeom prst="roundRect">
+            <a:avLst>
+              <a:gd name="adj" fmla="val 16216"/>
+            </a:avLst>
           </a:prstGeom>
           <a:solidFill>
             <a:srgbClr val="7A3B2E"/>
@@ -2872,8 +2971,8 @@
         </p:nvSpPr>
         <p:spPr>
           <a:xfrm>
-            <a:off x="1051560" y="5440680"/>
-            <a:ext cx="10424160" cy="365760"/>
+            <a:off x="640080" y="3364992"/>
+            <a:ext cx="868680" cy="338328"/>
           </a:xfrm>
           <a:prstGeom prst="rect">
             <a:avLst/>
@@ -2885,21 +2984,21 @@
           <a:bodyPr wrap="square" rtlCol="0" anchor="ctr"/>
           <a:lstStyle/>
           <a:p>
-            <a:pPr indent="0" marL="0">
-              <a:buNone/>
-            </a:pPr>
-            <a:r>
-              <a:rPr lang="en-US" sz="1500" b="1" dirty="0">
-                <a:solidFill>
-                  <a:srgbClr val="7A3B2E"/>
+            <a:pPr algn="ctr" indent="0" marL="0">
+              <a:buNone/>
+            </a:pPr>
+            <a:r>
+              <a:rPr lang="en-US" sz="1100" b="1" dirty="0">
+                <a:solidFill>
+                  <a:srgbClr val="FFFFFF"/>
                 </a:solidFill>
                 <a:latin typeface="Calibri" pitchFamily="34" charset="0"/>
                 <a:ea typeface="Calibri" pitchFamily="34" charset="-122"/>
                 <a:cs typeface="Calibri" pitchFamily="34" charset="-120"/>
               </a:rPr>
-              <a:t>Check (AI closed)</a:t>
-            </a:r>
-            <a:endParaRPr lang="en-US" sz="1500" dirty="0"/>
+              <a:t>0:55</a:t>
+            </a:r>
+            <a:endParaRPr lang="en-US" sz="1100" dirty="0"/>
           </a:p>
         </p:txBody>
       </p:sp>
@@ -2911,17 +3010,17 @@
         </p:nvSpPr>
         <p:spPr>
           <a:xfrm>
-            <a:off x="1051560" y="5824728"/>
-            <a:ext cx="10424160" cy="731520"/>
-          </a:xfrm>
-          <a:prstGeom prst="rect">
-            <a:avLst/>
-          </a:prstGeom>
-          <a:noFill/>
-          <a:ln/>
-        </p:spPr>
-        <p:txBody>
-          <a:bodyPr wrap="square" rtlCol="0" anchor="t">
+            <a:off x="1691640" y="3346704"/>
+            <a:ext cx="9646920" cy="448056"/>
+          </a:xfrm>
+          <a:prstGeom prst="rect">
+            <a:avLst/>
+          </a:prstGeom>
+          <a:noFill/>
+          <a:ln/>
+        </p:spPr>
+        <p:txBody>
+          <a:bodyPr wrap="square" rtlCol="0" anchor="ctr">
             <a:spAutoFit/>
           </a:bodyPr>
           <a:lstStyle/>
@@ -2930,7 +3029,7 @@
               <a:buNone/>
             </a:pPr>
             <a:r>
-              <a:rPr lang="en-US" sz="1400" dirty="0">
+              <a:rPr lang="en-US" sz="1100" dirty="0">
                 <a:solidFill>
                   <a:srgbClr val="1A1A1A"/>
                 </a:solidFill>
@@ -2938,9 +3037,519 @@
                 <a:ea typeface="Calibri" pitchFamily="34" charset="-122"/>
                 <a:cs typeface="Calibri" pitchFamily="34" charset="-120"/>
               </a:rPr>
-              <a:t>Explain it: why two tokenizers split a sentence differently, and what your stemming choice changed. (Competencies 3, 5.)</a:t>
-            </a:r>
-            <a:endParaRPr lang="en-US" sz="1400" dirty="0"/>
+              <a:t>What counts as a word? Paste a sentence into two tokenizer playgrounds and watch it shatter differently. Models see tokens, not words.</a:t>
+            </a:r>
+            <a:endParaRPr lang="en-US" sz="1100" dirty="0"/>
+          </a:p>
+        </p:txBody>
+      </p:sp>
+      <p:sp>
+        <p:nvSpPr>
+          <p:cNvPr id="18" name="Shape 16"/>
+          <p:cNvSpPr/>
+          <p:nvPr/>
+        </p:nvSpPr>
+        <p:spPr>
+          <a:xfrm>
+            <a:off x="640080" y="3813048"/>
+            <a:ext cx="868680" cy="338328"/>
+          </a:xfrm>
+          <a:prstGeom prst="roundRect">
+            <a:avLst>
+              <a:gd name="adj" fmla="val 16216"/>
+            </a:avLst>
+          </a:prstGeom>
+          <a:solidFill>
+            <a:srgbClr val="7A3B2E"/>
+          </a:solidFill>
+          <a:ln/>
+        </p:spPr>
+      </p:sp>
+      <p:sp>
+        <p:nvSpPr>
+          <p:cNvPr id="19" name="Text 17"/>
+          <p:cNvSpPr/>
+          <p:nvPr/>
+        </p:nvSpPr>
+        <p:spPr>
+          <a:xfrm>
+            <a:off x="640080" y="3813048"/>
+            <a:ext cx="868680" cy="338328"/>
+          </a:xfrm>
+          <a:prstGeom prst="rect">
+            <a:avLst/>
+          </a:prstGeom>
+          <a:noFill/>
+          <a:ln/>
+        </p:spPr>
+        <p:txBody>
+          <a:bodyPr wrap="square" rtlCol="0" anchor="ctr"/>
+          <a:lstStyle/>
+          <a:p>
+            <a:pPr algn="ctr" indent="0" marL="0">
+              <a:buNone/>
+            </a:pPr>
+            <a:r>
+              <a:rPr lang="en-US" sz="1100" b="1" dirty="0">
+                <a:solidFill>
+                  <a:srgbClr val="FFFFFF"/>
+                </a:solidFill>
+                <a:latin typeface="Calibri" pitchFamily="34" charset="0"/>
+                <a:ea typeface="Calibri" pitchFamily="34" charset="-122"/>
+                <a:cs typeface="Calibri" pitchFamily="34" charset="-120"/>
+              </a:rPr>
+              <a:t>1:05</a:t>
+            </a:r>
+            <a:endParaRPr lang="en-US" sz="1100" dirty="0"/>
+          </a:p>
+        </p:txBody>
+      </p:sp>
+      <p:sp>
+        <p:nvSpPr>
+          <p:cNvPr id="20" name="Text 18"/>
+          <p:cNvSpPr/>
+          <p:nvPr/>
+        </p:nvSpPr>
+        <p:spPr>
+          <a:xfrm>
+            <a:off x="1691640" y="3794760"/>
+            <a:ext cx="9646920" cy="448056"/>
+          </a:xfrm>
+          <a:prstGeom prst="rect">
+            <a:avLst/>
+          </a:prstGeom>
+          <a:noFill/>
+          <a:ln/>
+        </p:spPr>
+        <p:txBody>
+          <a:bodyPr wrap="square" rtlCol="0" anchor="ctr">
+            <a:spAutoFit/>
+          </a:bodyPr>
+          <a:lstStyle/>
+          <a:p>
+            <a:pPr indent="0" marL="0">
+              <a:buNone/>
+            </a:pPr>
+            <a:r>
+              <a:rPr lang="en-US" sz="1100" dirty="0">
+                <a:solidFill>
+                  <a:srgbClr val="1A1A1A"/>
+                </a:solidFill>
+                <a:latin typeface="Calibri" pitchFamily="34" charset="0"/>
+                <a:ea typeface="Calibri" pitchFamily="34" charset="-122"/>
+                <a:cs typeface="Calibri" pitchFamily="34" charset="-120"/>
+              </a:rPr>
+              <a:t>Break</a:t>
+            </a:r>
+            <a:endParaRPr lang="en-US" sz="1100" dirty="0"/>
+          </a:p>
+        </p:txBody>
+      </p:sp>
+      <p:sp>
+        <p:nvSpPr>
+          <p:cNvPr id="21" name="Shape 19"/>
+          <p:cNvSpPr/>
+          <p:nvPr/>
+        </p:nvSpPr>
+        <p:spPr>
+          <a:xfrm>
+            <a:off x="640080" y="4261104"/>
+            <a:ext cx="868680" cy="338328"/>
+          </a:xfrm>
+          <a:prstGeom prst="roundRect">
+            <a:avLst>
+              <a:gd name="adj" fmla="val 16216"/>
+            </a:avLst>
+          </a:prstGeom>
+          <a:solidFill>
+            <a:srgbClr val="7A3B2E"/>
+          </a:solidFill>
+          <a:ln/>
+        </p:spPr>
+      </p:sp>
+      <p:sp>
+        <p:nvSpPr>
+          <p:cNvPr id="22" name="Text 20"/>
+          <p:cNvSpPr/>
+          <p:nvPr/>
+        </p:nvSpPr>
+        <p:spPr>
+          <a:xfrm>
+            <a:off x="640080" y="4261104"/>
+            <a:ext cx="868680" cy="338328"/>
+          </a:xfrm>
+          <a:prstGeom prst="rect">
+            <a:avLst/>
+          </a:prstGeom>
+          <a:noFill/>
+          <a:ln/>
+        </p:spPr>
+        <p:txBody>
+          <a:bodyPr wrap="square" rtlCol="0" anchor="ctr"/>
+          <a:lstStyle/>
+          <a:p>
+            <a:pPr algn="ctr" indent="0" marL="0">
+              <a:buNone/>
+            </a:pPr>
+            <a:r>
+              <a:rPr lang="en-US" sz="1100" b="1" dirty="0">
+                <a:solidFill>
+                  <a:srgbClr val="FFFFFF"/>
+                </a:solidFill>
+                <a:latin typeface="Calibri" pitchFamily="34" charset="0"/>
+                <a:ea typeface="Calibri" pitchFamily="34" charset="-122"/>
+                <a:cs typeface="Calibri" pitchFamily="34" charset="-120"/>
+              </a:rPr>
+              <a:t>1:15</a:t>
+            </a:r>
+            <a:endParaRPr lang="en-US" sz="1100" dirty="0"/>
+          </a:p>
+        </p:txBody>
+      </p:sp>
+      <p:sp>
+        <p:nvSpPr>
+          <p:cNvPr id="23" name="Text 21"/>
+          <p:cNvSpPr/>
+          <p:nvPr/>
+        </p:nvSpPr>
+        <p:spPr>
+          <a:xfrm>
+            <a:off x="1691640" y="4242816"/>
+            <a:ext cx="9646920" cy="448056"/>
+          </a:xfrm>
+          <a:prstGeom prst="rect">
+            <a:avLst/>
+          </a:prstGeom>
+          <a:noFill/>
+          <a:ln/>
+        </p:spPr>
+        <p:txBody>
+          <a:bodyPr wrap="square" rtlCol="0" anchor="ctr">
+            <a:spAutoFit/>
+          </a:bodyPr>
+          <a:lstStyle/>
+          <a:p>
+            <a:pPr indent="0" marL="0">
+              <a:buNone/>
+            </a:pPr>
+            <a:r>
+              <a:rPr lang="en-US" sz="1100" dirty="0">
+                <a:solidFill>
+                  <a:srgbClr val="1A1A1A"/>
+                </a:solidFill>
+                <a:latin typeface="Calibri" pitchFamily="34" charset="0"/>
+                <a:ea typeface="Calibri" pitchFamily="34" charset="-122"/>
+                <a:cs typeface="Calibri" pitchFamily="34" charset="-120"/>
+              </a:rPr>
+              <a:t>tf-idf: the AI scales your hand count; stop-words dominate, which motivates "common here, rare overall."</a:t>
+            </a:r>
+            <a:endParaRPr lang="en-US" sz="1100" dirty="0"/>
+          </a:p>
+        </p:txBody>
+      </p:sp>
+      <p:sp>
+        <p:nvSpPr>
+          <p:cNvPr id="24" name="Shape 22"/>
+          <p:cNvSpPr/>
+          <p:nvPr/>
+        </p:nvSpPr>
+        <p:spPr>
+          <a:xfrm>
+            <a:off x="640080" y="4709160"/>
+            <a:ext cx="868680" cy="338328"/>
+          </a:xfrm>
+          <a:prstGeom prst="roundRect">
+            <a:avLst>
+              <a:gd name="adj" fmla="val 16216"/>
+            </a:avLst>
+          </a:prstGeom>
+          <a:solidFill>
+            <a:srgbClr val="7A3B2E"/>
+          </a:solidFill>
+          <a:ln/>
+        </p:spPr>
+      </p:sp>
+      <p:sp>
+        <p:nvSpPr>
+          <p:cNvPr id="25" name="Text 23"/>
+          <p:cNvSpPr/>
+          <p:nvPr/>
+        </p:nvSpPr>
+        <p:spPr>
+          <a:xfrm>
+            <a:off x="640080" y="4709160"/>
+            <a:ext cx="868680" cy="338328"/>
+          </a:xfrm>
+          <a:prstGeom prst="rect">
+            <a:avLst/>
+          </a:prstGeom>
+          <a:noFill/>
+          <a:ln/>
+        </p:spPr>
+        <p:txBody>
+          <a:bodyPr wrap="square" rtlCol="0" anchor="ctr"/>
+          <a:lstStyle/>
+          <a:p>
+            <a:pPr algn="ctr" indent="0" marL="0">
+              <a:buNone/>
+            </a:pPr>
+            <a:r>
+              <a:rPr lang="en-US" sz="1100" b="1" dirty="0">
+                <a:solidFill>
+                  <a:srgbClr val="FFFFFF"/>
+                </a:solidFill>
+                <a:latin typeface="Calibri" pitchFamily="34" charset="0"/>
+                <a:ea typeface="Calibri" pitchFamily="34" charset="-122"/>
+                <a:cs typeface="Calibri" pitchFamily="34" charset="-120"/>
+              </a:rPr>
+              <a:t>1:30</a:t>
+            </a:r>
+            <a:endParaRPr lang="en-US" sz="1100" dirty="0"/>
+          </a:p>
+        </p:txBody>
+      </p:sp>
+      <p:sp>
+        <p:nvSpPr>
+          <p:cNvPr id="26" name="Text 24"/>
+          <p:cNvSpPr/>
+          <p:nvPr/>
+        </p:nvSpPr>
+        <p:spPr>
+          <a:xfrm>
+            <a:off x="1691640" y="4690872"/>
+            <a:ext cx="9646920" cy="448056"/>
+          </a:xfrm>
+          <a:prstGeom prst="rect">
+            <a:avLst/>
+          </a:prstGeom>
+          <a:noFill/>
+          <a:ln/>
+        </p:spPr>
+        <p:txBody>
+          <a:bodyPr wrap="square" rtlCol="0" anchor="ctr">
+            <a:spAutoFit/>
+          </a:bodyPr>
+          <a:lstStyle/>
+          <a:p>
+            <a:pPr indent="0" marL="0">
+              <a:buNone/>
+            </a:pPr>
+            <a:r>
+              <a:rPr lang="en-US" sz="1100" dirty="0">
+                <a:solidFill>
+                  <a:srgbClr val="1A1A1A"/>
+                </a:solidFill>
+                <a:latin typeface="Calibri" pitchFamily="34" charset="0"/>
+                <a:ea typeface="Calibri" pitchFamily="34" charset="-122"/>
+                <a:cs typeface="Calibri" pitchFamily="34" charset="-120"/>
+              </a:rPr>
+              <a:t>Keyness, the She Giggles, He Gallops move: a log-odds ratio between two corpora finds the words one voice uses far more than a baseline, exactly the method behind Week 1's featured piece. The corpus pair is a choice too: artist vs. pop, lyrics vs. subreddit vs. novel.</a:t>
+            </a:r>
+            <a:endParaRPr lang="en-US" sz="1100" dirty="0"/>
+          </a:p>
+        </p:txBody>
+      </p:sp>
+      <p:sp>
+        <p:nvSpPr>
+          <p:cNvPr id="27" name="Shape 25"/>
+          <p:cNvSpPr/>
+          <p:nvPr/>
+        </p:nvSpPr>
+        <p:spPr>
+          <a:xfrm>
+            <a:off x="640080" y="5157216"/>
+            <a:ext cx="868680" cy="338328"/>
+          </a:xfrm>
+          <a:prstGeom prst="roundRect">
+            <a:avLst>
+              <a:gd name="adj" fmla="val 16216"/>
+            </a:avLst>
+          </a:prstGeom>
+          <a:solidFill>
+            <a:srgbClr val="7A3B2E"/>
+          </a:solidFill>
+          <a:ln/>
+        </p:spPr>
+      </p:sp>
+      <p:sp>
+        <p:nvSpPr>
+          <p:cNvPr id="28" name="Text 26"/>
+          <p:cNvSpPr/>
+          <p:nvPr/>
+        </p:nvSpPr>
+        <p:spPr>
+          <a:xfrm>
+            <a:off x="640080" y="5157216"/>
+            <a:ext cx="868680" cy="338328"/>
+          </a:xfrm>
+          <a:prstGeom prst="rect">
+            <a:avLst/>
+          </a:prstGeom>
+          <a:noFill/>
+          <a:ln/>
+        </p:spPr>
+        <p:txBody>
+          <a:bodyPr wrap="square" rtlCol="0" anchor="ctr"/>
+          <a:lstStyle/>
+          <a:p>
+            <a:pPr algn="ctr" indent="0" marL="0">
+              <a:buNone/>
+            </a:pPr>
+            <a:r>
+              <a:rPr lang="en-US" sz="1100" b="1" dirty="0">
+                <a:solidFill>
+                  <a:srgbClr val="FFFFFF"/>
+                </a:solidFill>
+                <a:latin typeface="Calibri" pitchFamily="34" charset="0"/>
+                <a:ea typeface="Calibri" pitchFamily="34" charset="-122"/>
+                <a:cs typeface="Calibri" pitchFamily="34" charset="-120"/>
+              </a:rPr>
+              <a:t>1:42</a:t>
+            </a:r>
+            <a:endParaRPr lang="en-US" sz="1100" dirty="0"/>
+          </a:p>
+        </p:txBody>
+      </p:sp>
+      <p:sp>
+        <p:nvSpPr>
+          <p:cNvPr id="29" name="Text 27"/>
+          <p:cNvSpPr/>
+          <p:nvPr/>
+        </p:nvSpPr>
+        <p:spPr>
+          <a:xfrm>
+            <a:off x="1691640" y="5138928"/>
+            <a:ext cx="9646920" cy="448056"/>
+          </a:xfrm>
+          <a:prstGeom prst="rect">
+            <a:avLst/>
+          </a:prstGeom>
+          <a:noFill/>
+          <a:ln/>
+        </p:spPr>
+        <p:txBody>
+          <a:bodyPr wrap="square" rtlCol="0" anchor="ctr">
+            <a:spAutoFit/>
+          </a:bodyPr>
+          <a:lstStyle/>
+          <a:p>
+            <a:pPr indent="0" marL="0">
+              <a:buNone/>
+            </a:pPr>
+            <a:r>
+              <a:rPr lang="en-US" sz="1100" dirty="0">
+                <a:solidFill>
+                  <a:srgbClr val="1A1A1A"/>
+                </a:solidFill>
+                <a:latin typeface="Calibri" pitchFamily="34" charset="0"/>
+                <a:ea typeface="Calibri" pitchFamily="34" charset="-122"/>
+                <a:cs typeface="Calibri" pitchFamily="34" charset="-120"/>
+              </a:rPr>
+              <a:t>Is the difference real? The shuffle test: shuffle the labels and recount, one thousand times. If chance alone frequently produces a gap this large, the difference should not be trusted; if it almost never does, the finding stands. A difference can be real and still small.</a:t>
+            </a:r>
+            <a:endParaRPr lang="en-US" sz="1100" dirty="0"/>
+          </a:p>
+        </p:txBody>
+      </p:sp>
+      <p:sp>
+        <p:nvSpPr>
+          <p:cNvPr id="30" name="Shape 28"/>
+          <p:cNvSpPr/>
+          <p:nvPr/>
+        </p:nvSpPr>
+        <p:spPr>
+          <a:xfrm>
+            <a:off x="640080" y="5605272"/>
+            <a:ext cx="868680" cy="338328"/>
+          </a:xfrm>
+          <a:prstGeom prst="roundRect">
+            <a:avLst>
+              <a:gd name="adj" fmla="val 16216"/>
+            </a:avLst>
+          </a:prstGeom>
+          <a:solidFill>
+            <a:srgbClr val="7A3B2E"/>
+          </a:solidFill>
+          <a:ln/>
+        </p:spPr>
+      </p:sp>
+      <p:sp>
+        <p:nvSpPr>
+          <p:cNvPr id="31" name="Text 29"/>
+          <p:cNvSpPr/>
+          <p:nvPr/>
+        </p:nvSpPr>
+        <p:spPr>
+          <a:xfrm>
+            <a:off x="640080" y="5605272"/>
+            <a:ext cx="868680" cy="338328"/>
+          </a:xfrm>
+          <a:prstGeom prst="rect">
+            <a:avLst/>
+          </a:prstGeom>
+          <a:noFill/>
+          <a:ln/>
+        </p:spPr>
+        <p:txBody>
+          <a:bodyPr wrap="square" rtlCol="0" anchor="ctr"/>
+          <a:lstStyle/>
+          <a:p>
+            <a:pPr algn="ctr" indent="0" marL="0">
+              <a:buNone/>
+            </a:pPr>
+            <a:r>
+              <a:rPr lang="en-US" sz="1100" b="1" dirty="0">
+                <a:solidFill>
+                  <a:srgbClr val="FFFFFF"/>
+                </a:solidFill>
+                <a:latin typeface="Calibri" pitchFamily="34" charset="0"/>
+                <a:ea typeface="Calibri" pitchFamily="34" charset="-122"/>
+                <a:cs typeface="Calibri" pitchFamily="34" charset="-120"/>
+              </a:rPr>
+              <a:t>1:50</a:t>
+            </a:r>
+            <a:endParaRPr lang="en-US" sz="1100" dirty="0"/>
+          </a:p>
+        </p:txBody>
+      </p:sp>
+      <p:sp>
+        <p:nvSpPr>
+          <p:cNvPr id="32" name="Text 30"/>
+          <p:cNvSpPr/>
+          <p:nvPr/>
+        </p:nvSpPr>
+        <p:spPr>
+          <a:xfrm>
+            <a:off x="1691640" y="5586984"/>
+            <a:ext cx="9646920" cy="448056"/>
+          </a:xfrm>
+          <a:prstGeom prst="rect">
+            <a:avLst/>
+          </a:prstGeom>
+          <a:noFill/>
+          <a:ln/>
+        </p:spPr>
+        <p:txBody>
+          <a:bodyPr wrap="square" rtlCol="0" anchor="ctr">
+            <a:spAutoFit/>
+          </a:bodyPr>
+          <a:lstStyle/>
+          <a:p>
+            <a:pPr indent="0" marL="0">
+              <a:buNone/>
+            </a:pPr>
+            <a:r>
+              <a:rPr lang="en-US" sz="1100" dirty="0">
+                <a:solidFill>
+                  <a:srgbClr val="1A1A1A"/>
+                </a:solidFill>
+                <a:latin typeface="Calibri" pitchFamily="34" charset="0"/>
+                <a:ea typeface="Calibri" pitchFamily="34" charset="-122"/>
+                <a:cs typeface="Calibri" pitchFamily="34" charset="-120"/>
+              </a:rPr>
+              <a:t>Gemini-free check and check-out.</a:t>
+            </a:r>
+            <a:endParaRPr lang="en-US" sz="1100" dirty="0"/>
           </a:p>
         </p:txBody>
       </p:sp>
@@ -2985,7 +3594,7 @@
         <p:spPr>
           <a:xfrm>
             <a:off x="640080" y="640080"/>
-            <a:ext cx="10058400" cy="320040"/>
+            <a:ext cx="10058400" cy="731520"/>
           </a:xfrm>
           <a:prstGeom prst="rect">
             <a:avLst/>
@@ -3001,7 +3610,66 @@
               <a:buNone/>
             </a:pPr>
             <a:r>
-              <a:rPr lang="en-US" sz="1300" b="1" spc="300" kern="0" dirty="0">
+              <a:rPr lang="en-US" sz="3000" b="1" dirty="0">
+                <a:solidFill>
+                  <a:srgbClr val="1A1A1A"/>
+                </a:solidFill>
+                <a:latin typeface="Cambria" pitchFamily="34" charset="0"/>
+                <a:ea typeface="Cambria" pitchFamily="34" charset="-122"/>
+                <a:cs typeface="Cambria" pitchFamily="34" charset="-120"/>
+              </a:rPr>
+              <a:t>Reading &amp; homework</a:t>
+            </a:r>
+            <a:endParaRPr lang="en-US" sz="3000" dirty="0"/>
+          </a:p>
+        </p:txBody>
+      </p:sp>
+      <p:sp>
+        <p:nvSpPr>
+          <p:cNvPr id="3" name="Shape 1"/>
+          <p:cNvSpPr/>
+          <p:nvPr/>
+        </p:nvSpPr>
+        <p:spPr>
+          <a:xfrm>
+            <a:off x="640080" y="1673352"/>
+            <a:ext cx="219456" cy="219456"/>
+          </a:xfrm>
+          <a:prstGeom prst="ellipse">
+            <a:avLst/>
+          </a:prstGeom>
+          <a:solidFill>
+            <a:srgbClr val="7A3B2E"/>
+          </a:solidFill>
+          <a:ln/>
+        </p:spPr>
+      </p:sp>
+      <p:sp>
+        <p:nvSpPr>
+          <p:cNvPr id="4" name="Text 2"/>
+          <p:cNvSpPr/>
+          <p:nvPr/>
+        </p:nvSpPr>
+        <p:spPr>
+          <a:xfrm>
+            <a:off x="1051560" y="1600200"/>
+            <a:ext cx="10424160" cy="365760"/>
+          </a:xfrm>
+          <a:prstGeom prst="rect">
+            <a:avLst/>
+          </a:prstGeom>
+          <a:noFill/>
+          <a:ln/>
+        </p:spPr>
+        <p:txBody>
+          <a:bodyPr wrap="square" rtlCol="0" anchor="ctr"/>
+          <a:lstStyle/>
+          <a:p>
+            <a:pPr indent="0" marL="0">
+              <a:buNone/>
+            </a:pPr>
+            <a:r>
+              <a:rPr lang="en-US" sz="1500" b="1" dirty="0">
                 <a:solidFill>
                   <a:srgbClr val="7A3B2E"/>
                 </a:solidFill>
@@ -3009,72 +3677,11 @@
                 <a:ea typeface="Calibri" pitchFamily="34" charset="-122"/>
                 <a:cs typeface="Calibri" pitchFamily="34" charset="-120"/>
               </a:rPr>
-              <a:t>HOW THIS WEEK CONNECTS</a:t>
-            </a:r>
-            <a:endParaRPr lang="en-US" sz="1300" dirty="0"/>
-          </a:p>
-        </p:txBody>
-      </p:sp>
-      <p:sp>
-        <p:nvSpPr>
-          <p:cNvPr id="3" name="Text 1"/>
-          <p:cNvSpPr/>
-          <p:nvPr/>
-        </p:nvSpPr>
-        <p:spPr>
-          <a:xfrm>
-            <a:off x="640080" y="987552"/>
-            <a:ext cx="10058400" cy="640080"/>
-          </a:xfrm>
-          <a:prstGeom prst="rect">
-            <a:avLst/>
-          </a:prstGeom>
-          <a:noFill/>
-          <a:ln/>
-        </p:spPr>
-        <p:txBody>
-          <a:bodyPr wrap="square" rtlCol="0" anchor="ctr"/>
-          <a:lstStyle/>
-          <a:p>
-            <a:pPr indent="0" marL="0">
-              <a:buNone/>
-            </a:pPr>
-            <a:r>
-              <a:rPr lang="en-US" sz="2800" b="1" dirty="0">
-                <a:solidFill>
-                  <a:srgbClr val="1A1A1A"/>
-                </a:solidFill>
-                <a:latin typeface="Cambria" pitchFamily="34" charset="0"/>
-                <a:ea typeface="Cambria" pitchFamily="34" charset="-122"/>
-                <a:cs typeface="Cambria" pitchFamily="34" charset="-120"/>
-              </a:rPr>
-              <a:t>The course's through-lines</a:t>
-            </a:r>
-            <a:endParaRPr lang="en-US" sz="2800" dirty="0"/>
-          </a:p>
-        </p:txBody>
-      </p:sp>
-      <p:sp>
-        <p:nvSpPr>
-          <p:cNvPr id="4" name="Shape 2"/>
-          <p:cNvSpPr/>
-          <p:nvPr/>
-        </p:nvSpPr>
-        <p:spPr>
-          <a:xfrm>
-            <a:off x="640080" y="2057400"/>
-            <a:ext cx="457200" cy="457200"/>
-          </a:xfrm>
-          <a:prstGeom prst="roundRect">
-            <a:avLst>
-              <a:gd name="adj" fmla="val 16000"/>
-            </a:avLst>
-          </a:prstGeom>
-          <a:solidFill>
-            <a:srgbClr val="7A3B2E"/>
-          </a:solidFill>
-          <a:ln/>
-        </p:spPr>
+              <a:t>Reading</a:t>
+            </a:r>
+            <a:endParaRPr lang="en-US" sz="1500" dirty="0"/>
+          </a:p>
+        </p:txBody>
       </p:sp>
       <p:sp>
         <p:nvSpPr>
@@ -3084,86 +3691,8 @@
         </p:nvSpPr>
         <p:spPr>
           <a:xfrm>
-            <a:off x="640080" y="2057400"/>
-            <a:ext cx="457200" cy="457200"/>
-          </a:xfrm>
-          <a:prstGeom prst="rect">
-            <a:avLst/>
-          </a:prstGeom>
-          <a:noFill/>
-          <a:ln/>
-        </p:spPr>
-        <p:txBody>
-          <a:bodyPr wrap="square" rtlCol="0" anchor="ctr"/>
-          <a:lstStyle/>
-          <a:p>
-            <a:pPr algn="ctr" indent="0" marL="0">
-              <a:buNone/>
-            </a:pPr>
-            <a:r>
-              <a:rPr lang="en-US" sz="2000" b="1" dirty="0">
-                <a:solidFill>
-                  <a:srgbClr val="FFFFFF"/>
-                </a:solidFill>
-                <a:latin typeface="Cambria" pitchFamily="34" charset="0"/>
-                <a:ea typeface="Cambria" pitchFamily="34" charset="-122"/>
-                <a:cs typeface="Cambria" pitchFamily="34" charset="-120"/>
-              </a:rPr>
-              <a:t>1</a:t>
-            </a:r>
-            <a:endParaRPr lang="en-US" sz="2000" dirty="0"/>
-          </a:p>
-        </p:txBody>
-      </p:sp>
-      <p:sp>
-        <p:nvSpPr>
-          <p:cNvPr id="6" name="Text 4"/>
-          <p:cNvSpPr/>
-          <p:nvPr/>
-        </p:nvSpPr>
-        <p:spPr>
-          <a:xfrm>
-            <a:off x="1371600" y="2020824"/>
-            <a:ext cx="10332720" cy="411480"/>
-          </a:xfrm>
-          <a:prstGeom prst="rect">
-            <a:avLst/>
-          </a:prstGeom>
-          <a:noFill/>
-          <a:ln/>
-        </p:spPr>
-        <p:txBody>
-          <a:bodyPr wrap="square" rtlCol="0" anchor="ctr"/>
-          <a:lstStyle/>
-          <a:p>
-            <a:pPr indent="0" marL="0">
-              <a:buNone/>
-            </a:pPr>
-            <a:r>
-              <a:rPr lang="en-US" sz="1900" b="1" dirty="0">
-                <a:solidFill>
-                  <a:srgbClr val="7A3B2E"/>
-                </a:solidFill>
-                <a:latin typeface="Cambria" pitchFamily="34" charset="0"/>
-                <a:ea typeface="Cambria" pitchFamily="34" charset="-122"/>
-                <a:cs typeface="Cambria" pitchFamily="34" charset="-120"/>
-              </a:rPr>
-              <a:t>Beyond counting</a:t>
-            </a:r>
-            <a:endParaRPr lang="en-US" sz="1900" dirty="0"/>
-          </a:p>
-        </p:txBody>
-      </p:sp>
-      <p:sp>
-        <p:nvSpPr>
-          <p:cNvPr id="7" name="Text 5"/>
-          <p:cNvSpPr/>
-          <p:nvPr/>
-        </p:nvSpPr>
-        <p:spPr>
-          <a:xfrm>
-            <a:off x="1371600" y="2441448"/>
-            <a:ext cx="10332720" cy="914400"/>
+            <a:off x="1051560" y="1984248"/>
+            <a:ext cx="10424160" cy="731520"/>
           </a:xfrm>
           <a:prstGeom prst="rect">
             <a:avLst/>
@@ -3178,13 +3707,10 @@
           <a:lstStyle/>
           <a:p>
             <a:pPr indent="0" marL="0">
-              <a:lnSpc>
-                <a:spcPct val="112000"/>
-              </a:lnSpc>
-              <a:buNone/>
-            </a:pPr>
-            <a:r>
-              <a:rPr lang="en-US" sz="1450" dirty="0">
+              <a:buNone/>
+            </a:pPr>
+            <a:r>
+              <a:rPr lang="en-US" sz="1400" dirty="0">
                 <a:solidFill>
                   <a:srgbClr val="1A1A1A"/>
                 </a:solidFill>
@@ -3192,27 +3718,25 @@
                 <a:ea typeface="Calibri" pitchFamily="34" charset="-122"/>
                 <a:cs typeface="Calibri" pitchFamily="34" charset="-120"/>
               </a:rPr>
-              <a:t>Counting is the simplest tool and has no notion of meaning. Week 5 addresses that limit.</a:t>
-            </a:r>
-            <a:endParaRPr lang="en-US" sz="1450" dirty="0"/>
-          </a:p>
-        </p:txBody>
-      </p:sp>
-      <p:sp>
-        <p:nvSpPr>
-          <p:cNvPr id="8" name="Shape 6"/>
-          <p:cNvSpPr/>
-          <p:nvPr/>
-        </p:nvSpPr>
-        <p:spPr>
-          <a:xfrm>
-            <a:off x="640080" y="3520440"/>
-            <a:ext cx="457200" cy="457200"/>
-          </a:xfrm>
-          <a:prstGeom prst="roundRect">
-            <a:avLst>
-              <a:gd name="adj" fmla="val 16000"/>
-            </a:avLst>
+              <a:t>Wolfram, What Is ChatGPT Doing (opening sections only)</a:t>
+            </a:r>
+            <a:endParaRPr lang="en-US" sz="1400" dirty="0"/>
+          </a:p>
+        </p:txBody>
+      </p:sp>
+      <p:sp>
+        <p:nvSpPr>
+          <p:cNvPr id="6" name="Shape 4"/>
+          <p:cNvSpPr/>
+          <p:nvPr/>
+        </p:nvSpPr>
+        <p:spPr>
+          <a:xfrm>
+            <a:off x="640080" y="2633472"/>
+            <a:ext cx="219456" cy="219456"/>
+          </a:xfrm>
+          <a:prstGeom prst="ellipse">
+            <a:avLst/>
           </a:prstGeom>
           <a:solidFill>
             <a:srgbClr val="3F6F5F"/>
@@ -3222,14 +3746,14 @@
       </p:sp>
       <p:sp>
         <p:nvSpPr>
-          <p:cNvPr id="9" name="Text 7"/>
-          <p:cNvSpPr/>
-          <p:nvPr/>
-        </p:nvSpPr>
-        <p:spPr>
-          <a:xfrm>
-            <a:off x="640080" y="3520440"/>
-            <a:ext cx="457200" cy="457200"/>
+          <p:cNvPr id="7" name="Text 5"/>
+          <p:cNvSpPr/>
+          <p:nvPr/>
+        </p:nvSpPr>
+        <p:spPr>
+          <a:xfrm>
+            <a:off x="1051560" y="2560320"/>
+            <a:ext cx="10424160" cy="365760"/>
           </a:xfrm>
           <a:prstGeom prst="rect">
             <a:avLst/>
@@ -3241,73 +3765,34 @@
           <a:bodyPr wrap="square" rtlCol="0" anchor="ctr"/>
           <a:lstStyle/>
           <a:p>
-            <a:pPr algn="ctr" indent="0" marL="0">
-              <a:buNone/>
-            </a:pPr>
-            <a:r>
-              <a:rPr lang="en-US" sz="2000" b="1" dirty="0">
-                <a:solidFill>
-                  <a:srgbClr val="FFFFFF"/>
-                </a:solidFill>
-                <a:latin typeface="Cambria" pitchFamily="34" charset="0"/>
-                <a:ea typeface="Cambria" pitchFamily="34" charset="-122"/>
-                <a:cs typeface="Cambria" pitchFamily="34" charset="-120"/>
-              </a:rPr>
-              <a:t>2</a:t>
-            </a:r>
-            <a:endParaRPr lang="en-US" sz="2000" dirty="0"/>
-          </a:p>
-        </p:txBody>
-      </p:sp>
-      <p:sp>
-        <p:nvSpPr>
-          <p:cNvPr id="10" name="Text 8"/>
-          <p:cNvSpPr/>
-          <p:nvPr/>
-        </p:nvSpPr>
-        <p:spPr>
-          <a:xfrm>
-            <a:off x="1371600" y="3483864"/>
-            <a:ext cx="10332720" cy="411480"/>
-          </a:xfrm>
-          <a:prstGeom prst="rect">
-            <a:avLst/>
-          </a:prstGeom>
-          <a:noFill/>
-          <a:ln/>
-        </p:spPr>
-        <p:txBody>
-          <a:bodyPr wrap="square" rtlCol="0" anchor="ctr"/>
-          <a:lstStyle/>
-          <a:p>
             <a:pPr indent="0" marL="0">
               <a:buNone/>
             </a:pPr>
             <a:r>
-              <a:rPr lang="en-US" sz="1900" b="1" dirty="0">
+              <a:rPr lang="en-US" sz="1500" b="1" dirty="0">
                 <a:solidFill>
                   <a:srgbClr val="3F6F5F"/>
                 </a:solidFill>
-                <a:latin typeface="Cambria" pitchFamily="34" charset="0"/>
-                <a:ea typeface="Cambria" pitchFamily="34" charset="-122"/>
-                <a:cs typeface="Cambria" pitchFamily="34" charset="-120"/>
-              </a:rPr>
-              <a:t>Every count is a choice</a:t>
-            </a:r>
-            <a:endParaRPr lang="en-US" sz="1900" dirty="0"/>
-          </a:p>
-        </p:txBody>
-      </p:sp>
-      <p:sp>
-        <p:nvSpPr>
-          <p:cNvPr id="11" name="Text 9"/>
-          <p:cNvSpPr/>
-          <p:nvPr/>
-        </p:nvSpPr>
-        <p:spPr>
-          <a:xfrm>
-            <a:off x="1371600" y="3904488"/>
-            <a:ext cx="10332720" cy="914400"/>
+                <a:latin typeface="Calibri" pitchFamily="34" charset="0"/>
+                <a:ea typeface="Calibri" pitchFamily="34" charset="-122"/>
+                <a:cs typeface="Calibri" pitchFamily="34" charset="-120"/>
+              </a:rPr>
+              <a:t>Supplement</a:t>
+            </a:r>
+            <a:endParaRPr lang="en-US" sz="1500" dirty="0"/>
+          </a:p>
+        </p:txBody>
+      </p:sp>
+      <p:sp>
+        <p:nvSpPr>
+          <p:cNvPr id="8" name="Text 6"/>
+          <p:cNvSpPr/>
+          <p:nvPr/>
+        </p:nvSpPr>
+        <p:spPr>
+          <a:xfrm>
+            <a:off x="1051560" y="2944368"/>
+            <a:ext cx="10424160" cy="731520"/>
           </a:xfrm>
           <a:prstGeom prst="rect">
             <a:avLst/>
@@ -3322,13 +3807,10 @@
           <a:lstStyle/>
           <a:p>
             <a:pPr indent="0" marL="0">
-              <a:lnSpc>
-                <a:spcPct val="112000"/>
-              </a:lnSpc>
-              <a:buNone/>
-            </a:pPr>
-            <a:r>
-              <a:rPr lang="en-US" sz="1450" dirty="0">
+              <a:buNone/>
+            </a:pPr>
+            <a:r>
+              <a:rPr lang="en-US" sz="1400" dirty="0">
                 <a:solidFill>
                   <a:srgbClr val="1A1A1A"/>
                 </a:solidFill>
@@ -3336,27 +3818,25 @@
                 <a:ea typeface="Calibri" pitchFamily="34" charset="-122"/>
                 <a:cs typeface="Calibri" pitchFamily="34" charset="-120"/>
               </a:rPr>
-              <a:t>Tokens, stemming, the corpus, the chart's axis, each hides a decision you made.</a:t>
-            </a:r>
-            <a:endParaRPr lang="en-US" sz="1450" dirty="0"/>
-          </a:p>
-        </p:txBody>
-      </p:sp>
-      <p:sp>
-        <p:nvSpPr>
-          <p:cNvPr id="12" name="Shape 10"/>
-          <p:cNvSpPr/>
-          <p:nvPr/>
-        </p:nvSpPr>
-        <p:spPr>
-          <a:xfrm>
-            <a:off x="640080" y="4983480"/>
-            <a:ext cx="457200" cy="457200"/>
-          </a:xfrm>
-          <a:prstGeom prst="roundRect">
-            <a:avLst>
-              <a:gd name="adj" fmla="val 16000"/>
-            </a:avLst>
+              <a:t>Zipf's law, the straight line in every text</a:t>
+            </a:r>
+            <a:endParaRPr lang="en-US" sz="1400" dirty="0"/>
+          </a:p>
+        </p:txBody>
+      </p:sp>
+      <p:sp>
+        <p:nvSpPr>
+          <p:cNvPr id="9" name="Shape 7"/>
+          <p:cNvSpPr/>
+          <p:nvPr/>
+        </p:nvSpPr>
+        <p:spPr>
+          <a:xfrm>
+            <a:off x="640080" y="3593592"/>
+            <a:ext cx="219456" cy="219456"/>
+          </a:xfrm>
+          <a:prstGeom prst="ellipse">
+            <a:avLst/>
           </a:prstGeom>
           <a:solidFill>
             <a:srgbClr val="B9852F"/>
@@ -3366,14 +3846,14 @@
       </p:sp>
       <p:sp>
         <p:nvSpPr>
-          <p:cNvPr id="13" name="Text 11"/>
-          <p:cNvSpPr/>
-          <p:nvPr/>
-        </p:nvSpPr>
-        <p:spPr>
-          <a:xfrm>
-            <a:off x="640080" y="4983480"/>
-            <a:ext cx="457200" cy="457200"/>
+          <p:cNvPr id="10" name="Text 8"/>
+          <p:cNvSpPr/>
+          <p:nvPr/>
+        </p:nvSpPr>
+        <p:spPr>
+          <a:xfrm>
+            <a:off x="1051560" y="3520440"/>
+            <a:ext cx="10424160" cy="365760"/>
           </a:xfrm>
           <a:prstGeom prst="rect">
             <a:avLst/>
@@ -3385,73 +3865,34 @@
           <a:bodyPr wrap="square" rtlCol="0" anchor="ctr"/>
           <a:lstStyle/>
           <a:p>
-            <a:pPr algn="ctr" indent="0" marL="0">
-              <a:buNone/>
-            </a:pPr>
-            <a:r>
-              <a:rPr lang="en-US" sz="2000" b="1" dirty="0">
-                <a:solidFill>
-                  <a:srgbClr val="FFFFFF"/>
-                </a:solidFill>
-                <a:latin typeface="Cambria" pitchFamily="34" charset="0"/>
-                <a:ea typeface="Cambria" pitchFamily="34" charset="-122"/>
-                <a:cs typeface="Cambria" pitchFamily="34" charset="-120"/>
-              </a:rPr>
-              <a:t>3</a:t>
-            </a:r>
-            <a:endParaRPr lang="en-US" sz="2000" dirty="0"/>
-          </a:p>
-        </p:txBody>
-      </p:sp>
-      <p:sp>
-        <p:nvSpPr>
-          <p:cNvPr id="14" name="Text 12"/>
-          <p:cNvSpPr/>
-          <p:nvPr/>
-        </p:nvSpPr>
-        <p:spPr>
-          <a:xfrm>
-            <a:off x="1371600" y="4946904"/>
-            <a:ext cx="10332720" cy="411480"/>
-          </a:xfrm>
-          <a:prstGeom prst="rect">
-            <a:avLst/>
-          </a:prstGeom>
-          <a:noFill/>
-          <a:ln/>
-        </p:spPr>
-        <p:txBody>
-          <a:bodyPr wrap="square" rtlCol="0" anchor="ctr"/>
-          <a:lstStyle/>
-          <a:p>
             <a:pPr indent="0" marL="0">
               <a:buNone/>
             </a:pPr>
             <a:r>
-              <a:rPr lang="en-US" sz="1900" b="1" dirty="0">
+              <a:rPr lang="en-US" sz="1500" b="1" dirty="0">
                 <a:solidFill>
                   <a:srgbClr val="B9852F"/>
                 </a:solidFill>
-                <a:latin typeface="Cambria" pitchFamily="34" charset="0"/>
-                <a:ea typeface="Cambria" pitchFamily="34" charset="-122"/>
-                <a:cs typeface="Cambria" pitchFamily="34" charset="-120"/>
-              </a:rPr>
-              <a:t>Is the difference real?</a:t>
-            </a:r>
-            <a:endParaRPr lang="en-US" sz="1900" dirty="0"/>
-          </a:p>
-        </p:txBody>
-      </p:sp>
-      <p:sp>
-        <p:nvSpPr>
-          <p:cNvPr id="15" name="Text 13"/>
-          <p:cNvSpPr/>
-          <p:nvPr/>
-        </p:nvSpPr>
-        <p:spPr>
-          <a:xfrm>
-            <a:off x="1371600" y="5367528"/>
-            <a:ext cx="10332720" cy="914400"/>
+                <a:latin typeface="Calibri" pitchFamily="34" charset="0"/>
+                <a:ea typeface="Calibri" pitchFamily="34" charset="-122"/>
+                <a:cs typeface="Calibri" pitchFamily="34" charset="-120"/>
+              </a:rPr>
+              <a:t>Deeper (optional)</a:t>
+            </a:r>
+            <a:endParaRPr lang="en-US" sz="1500" dirty="0"/>
+          </a:p>
+        </p:txBody>
+      </p:sp>
+      <p:sp>
+        <p:nvSpPr>
+          <p:cNvPr id="11" name="Text 9"/>
+          <p:cNvSpPr/>
+          <p:nvPr/>
+        </p:nvSpPr>
+        <p:spPr>
+          <a:xfrm>
+            <a:off x="1051560" y="3904488"/>
+            <a:ext cx="10424160" cy="731520"/>
           </a:xfrm>
           <a:prstGeom prst="rect">
             <a:avLst/>
@@ -3466,13 +3907,10 @@
           <a:lstStyle/>
           <a:p>
             <a:pPr indent="0" marL="0">
-              <a:lnSpc>
-                <a:spcPct val="112000"/>
-              </a:lnSpc>
-              <a:buNone/>
-            </a:pPr>
-            <a:r>
-              <a:rPr lang="en-US" sz="1450" dirty="0">
+              <a:buNone/>
+            </a:pPr>
+            <a:r>
+              <a:rPr lang="en-US" sz="1400" dirty="0">
                 <a:solidFill>
                   <a:srgbClr val="1A1A1A"/>
                 </a:solidFill>
@@ -3480,9 +3918,209 @@
                 <a:ea typeface="Calibri" pitchFamily="34" charset="-122"/>
                 <a:cs typeface="Calibri" pitchFamily="34" charset="-120"/>
               </a:rPr>
-              <a:t>Shuffle the labels and count again, one thousand times; if chance often matches your gap, do not trust it.</a:t>
-            </a:r>
-            <a:endParaRPr lang="en-US" sz="1450" dirty="0"/>
+              <a:t>Grimmer &amp;amp; Stewart, Text as Data (2013), §1–4: all quantitative models of language are wrong, but some are useful</a:t>
+            </a:r>
+            <a:endParaRPr lang="en-US" sz="1400" dirty="0"/>
+          </a:p>
+        </p:txBody>
+      </p:sp>
+      <p:sp>
+        <p:nvSpPr>
+          <p:cNvPr id="12" name="Shape 10"/>
+          <p:cNvSpPr/>
+          <p:nvPr/>
+        </p:nvSpPr>
+        <p:spPr>
+          <a:xfrm>
+            <a:off x="640080" y="4553712"/>
+            <a:ext cx="219456" cy="219456"/>
+          </a:xfrm>
+          <a:prstGeom prst="ellipse">
+            <a:avLst/>
+          </a:prstGeom>
+          <a:solidFill>
+            <a:srgbClr val="3F6F5F"/>
+          </a:solidFill>
+          <a:ln/>
+        </p:spPr>
+      </p:sp>
+      <p:sp>
+        <p:nvSpPr>
+          <p:cNvPr id="13" name="Text 11"/>
+          <p:cNvSpPr/>
+          <p:nvPr/>
+        </p:nvSpPr>
+        <p:spPr>
+          <a:xfrm>
+            <a:off x="1051560" y="4480560"/>
+            <a:ext cx="10424160" cy="365760"/>
+          </a:xfrm>
+          <a:prstGeom prst="rect">
+            <a:avLst/>
+          </a:prstGeom>
+          <a:noFill/>
+          <a:ln/>
+        </p:spPr>
+        <p:txBody>
+          <a:bodyPr wrap="square" rtlCol="0" anchor="ctr"/>
+          <a:lstStyle/>
+          <a:p>
+            <a:pPr indent="0" marL="0">
+              <a:buNone/>
+            </a:pPr>
+            <a:r>
+              <a:rPr lang="en-US" sz="1500" b="1" dirty="0">
+                <a:solidFill>
+                  <a:srgbClr val="3F6F5F"/>
+                </a:solidFill>
+                <a:latin typeface="Calibri" pitchFamily="34" charset="0"/>
+                <a:ea typeface="Calibri" pitchFamily="34" charset="-122"/>
+                <a:cs typeface="Calibri" pitchFamily="34" charset="-120"/>
+              </a:rPr>
+              <a:t>Sketch</a:t>
+            </a:r>
+            <a:endParaRPr lang="en-US" sz="1500" dirty="0"/>
+          </a:p>
+        </p:txBody>
+      </p:sp>
+      <p:sp>
+        <p:nvSpPr>
+          <p:cNvPr id="14" name="Text 12"/>
+          <p:cNvSpPr/>
+          <p:nvPr/>
+        </p:nvSpPr>
+        <p:spPr>
+          <a:xfrm>
+            <a:off x="1051560" y="4864608"/>
+            <a:ext cx="10424160" cy="731520"/>
+          </a:xfrm>
+          <a:prstGeom prst="rect">
+            <a:avLst/>
+          </a:prstGeom>
+          <a:noFill/>
+          <a:ln/>
+        </p:spPr>
+        <p:txBody>
+          <a:bodyPr wrap="square" rtlCol="0" anchor="t">
+            <a:spAutoFit/>
+          </a:bodyPr>
+          <a:lstStyle/>
+          <a:p>
+            <a:pPr indent="0" marL="0">
+              <a:buNone/>
+            </a:pPr>
+            <a:r>
+              <a:rPr lang="en-US" sz="1400" dirty="0">
+                <a:solidFill>
+                  <a:srgbClr val="1A1A1A"/>
+                </a:solidFill>
+                <a:latin typeface="Calibri" pitchFamily="34" charset="0"/>
+                <a:ea typeface="Calibri" pitchFamily="34" charset="-122"/>
+                <a:cs typeface="Calibri" pitchFamily="34" charset="-120"/>
+              </a:rPr>
+              <a:t>Count something in a text you care about; one chart; one sentence naming a choice. If the count compares two things, shuffle-test the gap.</a:t>
+            </a:r>
+            <a:endParaRPr lang="en-US" sz="1400" dirty="0"/>
+          </a:p>
+        </p:txBody>
+      </p:sp>
+      <p:sp>
+        <p:nvSpPr>
+          <p:cNvPr id="15" name="Shape 13"/>
+          <p:cNvSpPr/>
+          <p:nvPr/>
+        </p:nvSpPr>
+        <p:spPr>
+          <a:xfrm>
+            <a:off x="640080" y="5513832"/>
+            <a:ext cx="219456" cy="219456"/>
+          </a:xfrm>
+          <a:prstGeom prst="ellipse">
+            <a:avLst/>
+          </a:prstGeom>
+          <a:solidFill>
+            <a:srgbClr val="7A3B2E"/>
+          </a:solidFill>
+          <a:ln/>
+        </p:spPr>
+      </p:sp>
+      <p:sp>
+        <p:nvSpPr>
+          <p:cNvPr id="16" name="Text 14"/>
+          <p:cNvSpPr/>
+          <p:nvPr/>
+        </p:nvSpPr>
+        <p:spPr>
+          <a:xfrm>
+            <a:off x="1051560" y="5440680"/>
+            <a:ext cx="10424160" cy="365760"/>
+          </a:xfrm>
+          <a:prstGeom prst="rect">
+            <a:avLst/>
+          </a:prstGeom>
+          <a:noFill/>
+          <a:ln/>
+        </p:spPr>
+        <p:txBody>
+          <a:bodyPr wrap="square" rtlCol="0" anchor="ctr"/>
+          <a:lstStyle/>
+          <a:p>
+            <a:pPr indent="0" marL="0">
+              <a:buNone/>
+            </a:pPr>
+            <a:r>
+              <a:rPr lang="en-US" sz="1500" b="1" dirty="0">
+                <a:solidFill>
+                  <a:srgbClr val="7A3B2E"/>
+                </a:solidFill>
+                <a:latin typeface="Calibri" pitchFamily="34" charset="0"/>
+                <a:ea typeface="Calibri" pitchFamily="34" charset="-122"/>
+                <a:cs typeface="Calibri" pitchFamily="34" charset="-120"/>
+              </a:rPr>
+              <a:t>Check (AI closed)</a:t>
+            </a:r>
+            <a:endParaRPr lang="en-US" sz="1500" dirty="0"/>
+          </a:p>
+        </p:txBody>
+      </p:sp>
+      <p:sp>
+        <p:nvSpPr>
+          <p:cNvPr id="17" name="Text 15"/>
+          <p:cNvSpPr/>
+          <p:nvPr/>
+        </p:nvSpPr>
+        <p:spPr>
+          <a:xfrm>
+            <a:off x="1051560" y="5824728"/>
+            <a:ext cx="10424160" cy="731520"/>
+          </a:xfrm>
+          <a:prstGeom prst="rect">
+            <a:avLst/>
+          </a:prstGeom>
+          <a:noFill/>
+          <a:ln/>
+        </p:spPr>
+        <p:txBody>
+          <a:bodyPr wrap="square" rtlCol="0" anchor="t">
+            <a:spAutoFit/>
+          </a:bodyPr>
+          <a:lstStyle/>
+          <a:p>
+            <a:pPr indent="0" marL="0">
+              <a:buNone/>
+            </a:pPr>
+            <a:r>
+              <a:rPr lang="en-US" sz="1400" dirty="0">
+                <a:solidFill>
+                  <a:srgbClr val="1A1A1A"/>
+                </a:solidFill>
+                <a:latin typeface="Calibri" pitchFamily="34" charset="0"/>
+                <a:ea typeface="Calibri" pitchFamily="34" charset="-122"/>
+                <a:cs typeface="Calibri" pitchFamily="34" charset="-120"/>
+              </a:rPr>
+              <a:t>Explain it: why two tokenizers split a sentence differently, and what your stemming choice changed. (Competencies 3, 5.)</a:t>
+            </a:r>
+            <a:endParaRPr lang="en-US" sz="1400" dirty="0"/>
           </a:p>
         </p:txBody>
       </p:sp>
@@ -3497,6 +4135,548 @@
 <file path=ppt/slides/slide12.xml><?xml version="1.0" encoding="utf-8"?>
 <p:sld xmlns:a="http://schemas.openxmlformats.org/drawingml/2006/main" xmlns:r="http://schemas.openxmlformats.org/officeDocument/2006/relationships" xmlns:p="http://schemas.openxmlformats.org/presentationml/2006/main">
   <p:cSld name="Slide 12">
+    <p:bg>
+      <p:bgPr>
+        <a:solidFill>
+          <a:srgbClr val="FFFFFF"/>
+        </a:solidFill>
+      </p:bgPr>
+    </p:bg>
+    <p:spTree>
+      <p:nvGrpSpPr>
+        <p:cNvPr id="1" name=""/>
+        <p:cNvGrpSpPr/>
+        <p:nvPr/>
+      </p:nvGrpSpPr>
+      <p:grpSpPr>
+        <a:xfrm>
+          <a:off x="0" y="0"/>
+          <a:ext cx="0" cy="0"/>
+          <a:chOff x="0" y="0"/>
+          <a:chExt cx="0" cy="0"/>
+        </a:xfrm>
+      </p:grpSpPr>
+      <p:sp>
+        <p:nvSpPr>
+          <p:cNvPr id="2" name="Text 0"/>
+          <p:cNvSpPr/>
+          <p:nvPr/>
+        </p:nvSpPr>
+        <p:spPr>
+          <a:xfrm>
+            <a:off x="640080" y="640080"/>
+            <a:ext cx="10058400" cy="320040"/>
+          </a:xfrm>
+          <a:prstGeom prst="rect">
+            <a:avLst/>
+          </a:prstGeom>
+          <a:noFill/>
+          <a:ln/>
+        </p:spPr>
+        <p:txBody>
+          <a:bodyPr wrap="square" rtlCol="0" anchor="ctr"/>
+          <a:lstStyle/>
+          <a:p>
+            <a:pPr indent="0" marL="0">
+              <a:buNone/>
+            </a:pPr>
+            <a:r>
+              <a:rPr lang="en-US" sz="1300" b="1" spc="300" kern="0" dirty="0">
+                <a:solidFill>
+                  <a:srgbClr val="7A3B2E"/>
+                </a:solidFill>
+                <a:latin typeface="Calibri" pitchFamily="34" charset="0"/>
+                <a:ea typeface="Calibri" pitchFamily="34" charset="-122"/>
+                <a:cs typeface="Calibri" pitchFamily="34" charset="-120"/>
+              </a:rPr>
+              <a:t>HOW THIS WEEK CONNECTS</a:t>
+            </a:r>
+            <a:endParaRPr lang="en-US" sz="1300" dirty="0"/>
+          </a:p>
+        </p:txBody>
+      </p:sp>
+      <p:sp>
+        <p:nvSpPr>
+          <p:cNvPr id="3" name="Text 1"/>
+          <p:cNvSpPr/>
+          <p:nvPr/>
+        </p:nvSpPr>
+        <p:spPr>
+          <a:xfrm>
+            <a:off x="640080" y="987552"/>
+            <a:ext cx="10058400" cy="640080"/>
+          </a:xfrm>
+          <a:prstGeom prst="rect">
+            <a:avLst/>
+          </a:prstGeom>
+          <a:noFill/>
+          <a:ln/>
+        </p:spPr>
+        <p:txBody>
+          <a:bodyPr wrap="square" rtlCol="0" anchor="ctr"/>
+          <a:lstStyle/>
+          <a:p>
+            <a:pPr indent="0" marL="0">
+              <a:buNone/>
+            </a:pPr>
+            <a:r>
+              <a:rPr lang="en-US" sz="2800" b="1" dirty="0">
+                <a:solidFill>
+                  <a:srgbClr val="1A1A1A"/>
+                </a:solidFill>
+                <a:latin typeface="Cambria" pitchFamily="34" charset="0"/>
+                <a:ea typeface="Cambria" pitchFamily="34" charset="-122"/>
+                <a:cs typeface="Cambria" pitchFamily="34" charset="-120"/>
+              </a:rPr>
+              <a:t>The course's through-lines</a:t>
+            </a:r>
+            <a:endParaRPr lang="en-US" sz="2800" dirty="0"/>
+          </a:p>
+        </p:txBody>
+      </p:sp>
+      <p:sp>
+        <p:nvSpPr>
+          <p:cNvPr id="4" name="Shape 2"/>
+          <p:cNvSpPr/>
+          <p:nvPr/>
+        </p:nvSpPr>
+        <p:spPr>
+          <a:xfrm>
+            <a:off x="640080" y="2057400"/>
+            <a:ext cx="457200" cy="457200"/>
+          </a:xfrm>
+          <a:prstGeom prst="roundRect">
+            <a:avLst>
+              <a:gd name="adj" fmla="val 16000"/>
+            </a:avLst>
+          </a:prstGeom>
+          <a:solidFill>
+            <a:srgbClr val="7A3B2E"/>
+          </a:solidFill>
+          <a:ln/>
+        </p:spPr>
+      </p:sp>
+      <p:sp>
+        <p:nvSpPr>
+          <p:cNvPr id="5" name="Text 3"/>
+          <p:cNvSpPr/>
+          <p:nvPr/>
+        </p:nvSpPr>
+        <p:spPr>
+          <a:xfrm>
+            <a:off x="640080" y="2057400"/>
+            <a:ext cx="457200" cy="457200"/>
+          </a:xfrm>
+          <a:prstGeom prst="rect">
+            <a:avLst/>
+          </a:prstGeom>
+          <a:noFill/>
+          <a:ln/>
+        </p:spPr>
+        <p:txBody>
+          <a:bodyPr wrap="square" rtlCol="0" anchor="ctr"/>
+          <a:lstStyle/>
+          <a:p>
+            <a:pPr algn="ctr" indent="0" marL="0">
+              <a:buNone/>
+            </a:pPr>
+            <a:r>
+              <a:rPr lang="en-US" sz="2000" b="1" dirty="0">
+                <a:solidFill>
+                  <a:srgbClr val="FFFFFF"/>
+                </a:solidFill>
+                <a:latin typeface="Cambria" pitchFamily="34" charset="0"/>
+                <a:ea typeface="Cambria" pitchFamily="34" charset="-122"/>
+                <a:cs typeface="Cambria" pitchFamily="34" charset="-120"/>
+              </a:rPr>
+              <a:t>1</a:t>
+            </a:r>
+            <a:endParaRPr lang="en-US" sz="2000" dirty="0"/>
+          </a:p>
+        </p:txBody>
+      </p:sp>
+      <p:sp>
+        <p:nvSpPr>
+          <p:cNvPr id="6" name="Text 4"/>
+          <p:cNvSpPr/>
+          <p:nvPr/>
+        </p:nvSpPr>
+        <p:spPr>
+          <a:xfrm>
+            <a:off x="1371600" y="2020824"/>
+            <a:ext cx="10332720" cy="411480"/>
+          </a:xfrm>
+          <a:prstGeom prst="rect">
+            <a:avLst/>
+          </a:prstGeom>
+          <a:noFill/>
+          <a:ln/>
+        </p:spPr>
+        <p:txBody>
+          <a:bodyPr wrap="square" rtlCol="0" anchor="ctr"/>
+          <a:lstStyle/>
+          <a:p>
+            <a:pPr indent="0" marL="0">
+              <a:buNone/>
+            </a:pPr>
+            <a:r>
+              <a:rPr lang="en-US" sz="1900" b="1" dirty="0">
+                <a:solidFill>
+                  <a:srgbClr val="7A3B2E"/>
+                </a:solidFill>
+                <a:latin typeface="Cambria" pitchFamily="34" charset="0"/>
+                <a:ea typeface="Cambria" pitchFamily="34" charset="-122"/>
+                <a:cs typeface="Cambria" pitchFamily="34" charset="-120"/>
+              </a:rPr>
+              <a:t>Beyond counting</a:t>
+            </a:r>
+            <a:endParaRPr lang="en-US" sz="1900" dirty="0"/>
+          </a:p>
+        </p:txBody>
+      </p:sp>
+      <p:sp>
+        <p:nvSpPr>
+          <p:cNvPr id="7" name="Text 5"/>
+          <p:cNvSpPr/>
+          <p:nvPr/>
+        </p:nvSpPr>
+        <p:spPr>
+          <a:xfrm>
+            <a:off x="1371600" y="2441448"/>
+            <a:ext cx="10332720" cy="914400"/>
+          </a:xfrm>
+          <a:prstGeom prst="rect">
+            <a:avLst/>
+          </a:prstGeom>
+          <a:noFill/>
+          <a:ln/>
+        </p:spPr>
+        <p:txBody>
+          <a:bodyPr wrap="square" rtlCol="0" anchor="t">
+            <a:spAutoFit/>
+          </a:bodyPr>
+          <a:lstStyle/>
+          <a:p>
+            <a:pPr indent="0" marL="0">
+              <a:lnSpc>
+                <a:spcPct val="112000"/>
+              </a:lnSpc>
+              <a:buNone/>
+            </a:pPr>
+            <a:r>
+              <a:rPr lang="en-US" sz="1450" dirty="0">
+                <a:solidFill>
+                  <a:srgbClr val="1A1A1A"/>
+                </a:solidFill>
+                <a:latin typeface="Calibri" pitchFamily="34" charset="0"/>
+                <a:ea typeface="Calibri" pitchFamily="34" charset="-122"/>
+                <a:cs typeface="Calibri" pitchFamily="34" charset="-120"/>
+              </a:rPr>
+              <a:t>Counting is the simplest tool and has no notion of meaning. Week 5 addresses that limit.</a:t>
+            </a:r>
+            <a:endParaRPr lang="en-US" sz="1450" dirty="0"/>
+          </a:p>
+        </p:txBody>
+      </p:sp>
+      <p:sp>
+        <p:nvSpPr>
+          <p:cNvPr id="8" name="Shape 6"/>
+          <p:cNvSpPr/>
+          <p:nvPr/>
+        </p:nvSpPr>
+        <p:spPr>
+          <a:xfrm>
+            <a:off x="640080" y="3520440"/>
+            <a:ext cx="457200" cy="457200"/>
+          </a:xfrm>
+          <a:prstGeom prst="roundRect">
+            <a:avLst>
+              <a:gd name="adj" fmla="val 16000"/>
+            </a:avLst>
+          </a:prstGeom>
+          <a:solidFill>
+            <a:srgbClr val="3F6F5F"/>
+          </a:solidFill>
+          <a:ln/>
+        </p:spPr>
+      </p:sp>
+      <p:sp>
+        <p:nvSpPr>
+          <p:cNvPr id="9" name="Text 7"/>
+          <p:cNvSpPr/>
+          <p:nvPr/>
+        </p:nvSpPr>
+        <p:spPr>
+          <a:xfrm>
+            <a:off x="640080" y="3520440"/>
+            <a:ext cx="457200" cy="457200"/>
+          </a:xfrm>
+          <a:prstGeom prst="rect">
+            <a:avLst/>
+          </a:prstGeom>
+          <a:noFill/>
+          <a:ln/>
+        </p:spPr>
+        <p:txBody>
+          <a:bodyPr wrap="square" rtlCol="0" anchor="ctr"/>
+          <a:lstStyle/>
+          <a:p>
+            <a:pPr algn="ctr" indent="0" marL="0">
+              <a:buNone/>
+            </a:pPr>
+            <a:r>
+              <a:rPr lang="en-US" sz="2000" b="1" dirty="0">
+                <a:solidFill>
+                  <a:srgbClr val="FFFFFF"/>
+                </a:solidFill>
+                <a:latin typeface="Cambria" pitchFamily="34" charset="0"/>
+                <a:ea typeface="Cambria" pitchFamily="34" charset="-122"/>
+                <a:cs typeface="Cambria" pitchFamily="34" charset="-120"/>
+              </a:rPr>
+              <a:t>2</a:t>
+            </a:r>
+            <a:endParaRPr lang="en-US" sz="2000" dirty="0"/>
+          </a:p>
+        </p:txBody>
+      </p:sp>
+      <p:sp>
+        <p:nvSpPr>
+          <p:cNvPr id="10" name="Text 8"/>
+          <p:cNvSpPr/>
+          <p:nvPr/>
+        </p:nvSpPr>
+        <p:spPr>
+          <a:xfrm>
+            <a:off x="1371600" y="3483864"/>
+            <a:ext cx="10332720" cy="411480"/>
+          </a:xfrm>
+          <a:prstGeom prst="rect">
+            <a:avLst/>
+          </a:prstGeom>
+          <a:noFill/>
+          <a:ln/>
+        </p:spPr>
+        <p:txBody>
+          <a:bodyPr wrap="square" rtlCol="0" anchor="ctr"/>
+          <a:lstStyle/>
+          <a:p>
+            <a:pPr indent="0" marL="0">
+              <a:buNone/>
+            </a:pPr>
+            <a:r>
+              <a:rPr lang="en-US" sz="1900" b="1" dirty="0">
+                <a:solidFill>
+                  <a:srgbClr val="3F6F5F"/>
+                </a:solidFill>
+                <a:latin typeface="Cambria" pitchFamily="34" charset="0"/>
+                <a:ea typeface="Cambria" pitchFamily="34" charset="-122"/>
+                <a:cs typeface="Cambria" pitchFamily="34" charset="-120"/>
+              </a:rPr>
+              <a:t>Every count is a choice</a:t>
+            </a:r>
+            <a:endParaRPr lang="en-US" sz="1900" dirty="0"/>
+          </a:p>
+        </p:txBody>
+      </p:sp>
+      <p:sp>
+        <p:nvSpPr>
+          <p:cNvPr id="11" name="Text 9"/>
+          <p:cNvSpPr/>
+          <p:nvPr/>
+        </p:nvSpPr>
+        <p:spPr>
+          <a:xfrm>
+            <a:off x="1371600" y="3904488"/>
+            <a:ext cx="10332720" cy="914400"/>
+          </a:xfrm>
+          <a:prstGeom prst="rect">
+            <a:avLst/>
+          </a:prstGeom>
+          <a:noFill/>
+          <a:ln/>
+        </p:spPr>
+        <p:txBody>
+          <a:bodyPr wrap="square" rtlCol="0" anchor="t">
+            <a:spAutoFit/>
+          </a:bodyPr>
+          <a:lstStyle/>
+          <a:p>
+            <a:pPr indent="0" marL="0">
+              <a:lnSpc>
+                <a:spcPct val="112000"/>
+              </a:lnSpc>
+              <a:buNone/>
+            </a:pPr>
+            <a:r>
+              <a:rPr lang="en-US" sz="1450" dirty="0">
+                <a:solidFill>
+                  <a:srgbClr val="1A1A1A"/>
+                </a:solidFill>
+                <a:latin typeface="Calibri" pitchFamily="34" charset="0"/>
+                <a:ea typeface="Calibri" pitchFamily="34" charset="-122"/>
+                <a:cs typeface="Calibri" pitchFamily="34" charset="-120"/>
+              </a:rPr>
+              <a:t>Tokens, stemming, the corpus, the chart's axis, each hides a decision you made.</a:t>
+            </a:r>
+            <a:endParaRPr lang="en-US" sz="1450" dirty="0"/>
+          </a:p>
+        </p:txBody>
+      </p:sp>
+      <p:sp>
+        <p:nvSpPr>
+          <p:cNvPr id="12" name="Shape 10"/>
+          <p:cNvSpPr/>
+          <p:nvPr/>
+        </p:nvSpPr>
+        <p:spPr>
+          <a:xfrm>
+            <a:off x="640080" y="4983480"/>
+            <a:ext cx="457200" cy="457200"/>
+          </a:xfrm>
+          <a:prstGeom prst="roundRect">
+            <a:avLst>
+              <a:gd name="adj" fmla="val 16000"/>
+            </a:avLst>
+          </a:prstGeom>
+          <a:solidFill>
+            <a:srgbClr val="B9852F"/>
+          </a:solidFill>
+          <a:ln/>
+        </p:spPr>
+      </p:sp>
+      <p:sp>
+        <p:nvSpPr>
+          <p:cNvPr id="13" name="Text 11"/>
+          <p:cNvSpPr/>
+          <p:nvPr/>
+        </p:nvSpPr>
+        <p:spPr>
+          <a:xfrm>
+            <a:off x="640080" y="4983480"/>
+            <a:ext cx="457200" cy="457200"/>
+          </a:xfrm>
+          <a:prstGeom prst="rect">
+            <a:avLst/>
+          </a:prstGeom>
+          <a:noFill/>
+          <a:ln/>
+        </p:spPr>
+        <p:txBody>
+          <a:bodyPr wrap="square" rtlCol="0" anchor="ctr"/>
+          <a:lstStyle/>
+          <a:p>
+            <a:pPr algn="ctr" indent="0" marL="0">
+              <a:buNone/>
+            </a:pPr>
+            <a:r>
+              <a:rPr lang="en-US" sz="2000" b="1" dirty="0">
+                <a:solidFill>
+                  <a:srgbClr val="FFFFFF"/>
+                </a:solidFill>
+                <a:latin typeface="Cambria" pitchFamily="34" charset="0"/>
+                <a:ea typeface="Cambria" pitchFamily="34" charset="-122"/>
+                <a:cs typeface="Cambria" pitchFamily="34" charset="-120"/>
+              </a:rPr>
+              <a:t>3</a:t>
+            </a:r>
+            <a:endParaRPr lang="en-US" sz="2000" dirty="0"/>
+          </a:p>
+        </p:txBody>
+      </p:sp>
+      <p:sp>
+        <p:nvSpPr>
+          <p:cNvPr id="14" name="Text 12"/>
+          <p:cNvSpPr/>
+          <p:nvPr/>
+        </p:nvSpPr>
+        <p:spPr>
+          <a:xfrm>
+            <a:off x="1371600" y="4946904"/>
+            <a:ext cx="10332720" cy="411480"/>
+          </a:xfrm>
+          <a:prstGeom prst="rect">
+            <a:avLst/>
+          </a:prstGeom>
+          <a:noFill/>
+          <a:ln/>
+        </p:spPr>
+        <p:txBody>
+          <a:bodyPr wrap="square" rtlCol="0" anchor="ctr"/>
+          <a:lstStyle/>
+          <a:p>
+            <a:pPr indent="0" marL="0">
+              <a:buNone/>
+            </a:pPr>
+            <a:r>
+              <a:rPr lang="en-US" sz="1900" b="1" dirty="0">
+                <a:solidFill>
+                  <a:srgbClr val="B9852F"/>
+                </a:solidFill>
+                <a:latin typeface="Cambria" pitchFamily="34" charset="0"/>
+                <a:ea typeface="Cambria" pitchFamily="34" charset="-122"/>
+                <a:cs typeface="Cambria" pitchFamily="34" charset="-120"/>
+              </a:rPr>
+              <a:t>Is the difference real?</a:t>
+            </a:r>
+            <a:endParaRPr lang="en-US" sz="1900" dirty="0"/>
+          </a:p>
+        </p:txBody>
+      </p:sp>
+      <p:sp>
+        <p:nvSpPr>
+          <p:cNvPr id="15" name="Text 13"/>
+          <p:cNvSpPr/>
+          <p:nvPr/>
+        </p:nvSpPr>
+        <p:spPr>
+          <a:xfrm>
+            <a:off x="1371600" y="5367528"/>
+            <a:ext cx="10332720" cy="914400"/>
+          </a:xfrm>
+          <a:prstGeom prst="rect">
+            <a:avLst/>
+          </a:prstGeom>
+          <a:noFill/>
+          <a:ln/>
+        </p:spPr>
+        <p:txBody>
+          <a:bodyPr wrap="square" rtlCol="0" anchor="t">
+            <a:spAutoFit/>
+          </a:bodyPr>
+          <a:lstStyle/>
+          <a:p>
+            <a:pPr indent="0" marL="0">
+              <a:lnSpc>
+                <a:spcPct val="112000"/>
+              </a:lnSpc>
+              <a:buNone/>
+            </a:pPr>
+            <a:r>
+              <a:rPr lang="en-US" sz="1450" dirty="0">
+                <a:solidFill>
+                  <a:srgbClr val="1A1A1A"/>
+                </a:solidFill>
+                <a:latin typeface="Calibri" pitchFamily="34" charset="0"/>
+                <a:ea typeface="Calibri" pitchFamily="34" charset="-122"/>
+                <a:cs typeface="Calibri" pitchFamily="34" charset="-120"/>
+              </a:rPr>
+              <a:t>Shuffle the labels and count again, one thousand times; if chance often matches your gap, do not trust it.</a:t>
+            </a:r>
+            <a:endParaRPr lang="en-US" sz="1450" dirty="0"/>
+          </a:p>
+        </p:txBody>
+      </p:sp>
+    </p:spTree>
+  </p:cSld>
+  <p:clrMapOvr>
+    <a:masterClrMapping/>
+  </p:clrMapOvr>
+</p:sld>
+</file>
+
+<file path=ppt/slides/slide13.xml><?xml version="1.0" encoding="utf-8"?>
+<p:sld xmlns:a="http://schemas.openxmlformats.org/drawingml/2006/main" xmlns:r="http://schemas.openxmlformats.org/officeDocument/2006/relationships" xmlns:p="http://schemas.openxmlformats.org/presentationml/2006/main">
+  <p:cSld name="Slide 13">
     <p:bg>
       <p:bgPr>
         <a:solidFill>
@@ -5232,7 +6412,7 @@
                 <a:ea typeface="Cambria" pitchFamily="34" charset="-122"/>
                 <a:cs typeface="Cambria" pitchFamily="34" charset="-120"/>
               </a:rPr>
-              <a:t>Keyness: what makes a voice distinctive</a:t>
+              <a:t>What the bag throws away</a:t>
             </a:r>
             <a:endParaRPr lang="en-US" sz="3000" dirty="0"/>
           </a:p>
@@ -5267,7 +6447,7 @@
         <p:spPr>
           <a:xfrm>
             <a:off x="1097280" y="2240280"/>
-            <a:ext cx="10607040" cy="1017270"/>
+            <a:ext cx="10607040" cy="813816"/>
           </a:xfrm>
           <a:prstGeom prst="rect">
             <a:avLst/>
@@ -5288,7 +6468,7 @@
               <a:buNone/>
             </a:pPr>
             <a:r>
-              <a:rPr lang="en-US" sz="1650" dirty="0">
+              <a:rPr lang="en-US" sz="1500" dirty="0">
                 <a:solidFill>
                   <a:srgbClr val="1A1A1A"/>
                 </a:solidFill>
@@ -5296,9 +6476,9 @@
                 <a:ea typeface="Calibri" pitchFamily="34" charset="-122"/>
                 <a:cs typeface="Calibri" pitchFamily="34" charset="-120"/>
               </a:rPr>
-              <a:t>For every word: how much likelier is it in corpus A than corpus B? A log-odds ratio, smoothed so rare words don't explode.</a:t>
-            </a:r>
-            <a:endParaRPr lang="en-US" sz="1650" dirty="0"/>
+              <a:t>A bag-of-words keeps the vocabulary and discards the order: "the critics loved it, the public did not" and "the public loved it, the critics did not" are the same bag.</a:t>
+            </a:r>
+            <a:endParaRPr lang="en-US" sz="1500" dirty="0"/>
           </a:p>
         </p:txBody>
       </p:sp>
@@ -5310,7 +6490,7 @@
         </p:nvSpPr>
         <p:spPr>
           <a:xfrm>
-            <a:off x="640080" y="3348990"/>
+            <a:off x="640080" y="3145536"/>
             <a:ext cx="201168" cy="201168"/>
           </a:xfrm>
           <a:prstGeom prst="ellipse">
@@ -5330,8 +6510,8 @@
         </p:nvSpPr>
         <p:spPr>
           <a:xfrm>
-            <a:off x="1097280" y="3257550"/>
-            <a:ext cx="10607040" cy="1017270"/>
+            <a:off x="1097280" y="3054096"/>
+            <a:ext cx="10607040" cy="813816"/>
           </a:xfrm>
           <a:prstGeom prst="rect">
             <a:avLst/>
@@ -5352,7 +6532,7 @@
               <a:buNone/>
             </a:pPr>
             <a:r>
-              <a:rPr lang="en-US" sz="1650" dirty="0">
+              <a:rPr lang="en-US" sz="1500" dirty="0">
                 <a:solidFill>
                   <a:srgbClr val="1A1A1A"/>
                 </a:solidFill>
@@ -5360,9 +6540,9 @@
                 <a:ea typeface="Calibri" pitchFamily="34" charset="-122"/>
                 <a:cs typeface="Calibri" pitchFamily="34" charset="-120"/>
               </a:rPr>
-              <a:t>Strongly positive = distinctively A. Strongly negative = distinctively B. The middle is shared language.</a:t>
-            </a:r>
-            <a:endParaRPr lang="en-US" sz="1650" dirty="0"/>
+              <a:t>Negation goes with it: "not good, actually bad" and "not bad, actually good" count identically.</a:t>
+            </a:r>
+            <a:endParaRPr lang="en-US" sz="1500" dirty="0"/>
           </a:p>
         </p:txBody>
       </p:sp>
@@ -5374,7 +6554,7 @@
         </p:nvSpPr>
         <p:spPr>
           <a:xfrm>
-            <a:off x="640080" y="4366260"/>
+            <a:off x="640080" y="3959352"/>
             <a:ext cx="201168" cy="201168"/>
           </a:xfrm>
           <a:prstGeom prst="ellipse">
@@ -5394,8 +6574,8 @@
         </p:nvSpPr>
         <p:spPr>
           <a:xfrm>
-            <a:off x="1097280" y="4274820"/>
-            <a:ext cx="10607040" cy="1017270"/>
+            <a:off x="1097280" y="3867912"/>
+            <a:ext cx="10607040" cy="813816"/>
           </a:xfrm>
           <a:prstGeom prst="rect">
             <a:avLst/>
@@ -5416,7 +6596,7 @@
               <a:buNone/>
             </a:pPr>
             <a:r>
-              <a:rPr lang="en-US" sz="1650" dirty="0">
+              <a:rPr lang="en-US" sz="1500" dirty="0">
                 <a:solidFill>
                   <a:srgbClr val="1A1A1A"/>
                 </a:solidFill>
@@ -5424,9 +6604,9 @@
                 <a:ea typeface="Calibri" pitchFamily="34" charset="-122"/>
                 <a:cs typeface="Calibri" pitchFamily="34" charset="-120"/>
               </a:rPr>
-              <a:t>She Giggles, He Gallops is exactly this method: verbs after "she" vs. "he" in 2,000 screenplays. Women snuggle, giggle, squeal; men gallop, strap, shoot.</a:t>
-            </a:r>
-            <a:endParaRPr lang="en-US" sz="1650" dirty="0"/>
+              <a:t>The bag-of-pixels loses the same way: a portrait and its shuffled pixels share the average color, the brightness, and the histogram. Composition is to images what word order is to sentences.</a:t>
+            </a:r>
+            <a:endParaRPr lang="en-US" sz="1500" dirty="0"/>
           </a:p>
         </p:txBody>
       </p:sp>
@@ -5438,7 +6618,7 @@
         </p:nvSpPr>
         <p:spPr>
           <a:xfrm>
-            <a:off x="640080" y="5383530"/>
+            <a:off x="640080" y="4773168"/>
             <a:ext cx="201168" cy="201168"/>
           </a:xfrm>
           <a:prstGeom prst="ellipse">
@@ -5458,8 +6638,8 @@
         </p:nvSpPr>
         <p:spPr>
           <a:xfrm>
-            <a:off x="1097280" y="5292090"/>
-            <a:ext cx="10607040" cy="1017270"/>
+            <a:off x="1097280" y="4681728"/>
+            <a:ext cx="10607040" cy="813816"/>
           </a:xfrm>
           <a:prstGeom prst="rect">
             <a:avLst/>
@@ -5480,7 +6660,7 @@
               <a:buNone/>
             </a:pPr>
             <a:r>
-              <a:rPr lang="en-US" sz="1650" dirty="0">
+              <a:rPr lang="en-US" sz="1500" dirty="0">
                 <a:solidFill>
                   <a:srgbClr val="1A1A1A"/>
                 </a:solidFill>
@@ -5488,9 +6668,73 @@
                 <a:ea typeface="Calibri" pitchFamily="34" charset="-122"/>
                 <a:cs typeface="Calibri" pitchFamily="34" charset="-120"/>
               </a:rPr>
-              <a:t>The corpus pair is a choice: this artist against pop, this subreddit against a novel. Different pair, different "distinctive."</a:t>
-            </a:r>
-            <a:endParaRPr lang="en-US" sz="1650" dirty="0"/>
+              <a:t>Every count this week carries that loss. It is a trade made for scale, and naming it is part of the method.</a:t>
+            </a:r>
+            <a:endParaRPr lang="en-US" sz="1500" dirty="0"/>
+          </a:p>
+        </p:txBody>
+      </p:sp>
+      <p:sp>
+        <p:nvSpPr>
+          <p:cNvPr id="13" name="Shape 11"/>
+          <p:cNvSpPr/>
+          <p:nvPr/>
+        </p:nvSpPr>
+        <p:spPr>
+          <a:xfrm>
+            <a:off x="640080" y="5586984"/>
+            <a:ext cx="201168" cy="201168"/>
+          </a:xfrm>
+          <a:prstGeom prst="ellipse">
+            <a:avLst/>
+          </a:prstGeom>
+          <a:solidFill>
+            <a:srgbClr val="3F6F5F"/>
+          </a:solidFill>
+          <a:ln/>
+        </p:spPr>
+      </p:sp>
+      <p:sp>
+        <p:nvSpPr>
+          <p:cNvPr id="14" name="Text 12"/>
+          <p:cNvSpPr/>
+          <p:nvPr/>
+        </p:nvSpPr>
+        <p:spPr>
+          <a:xfrm>
+            <a:off x="1097280" y="5495544"/>
+            <a:ext cx="10607040" cy="813816"/>
+          </a:xfrm>
+          <a:prstGeom prst="rect">
+            <a:avLst/>
+          </a:prstGeom>
+          <a:noFill/>
+          <a:ln/>
+        </p:spPr>
+        <p:txBody>
+          <a:bodyPr wrap="square" rtlCol="0" anchor="t">
+            <a:spAutoFit/>
+          </a:bodyPr>
+          <a:lstStyle/>
+          <a:p>
+            <a:pPr indent="0" marL="0">
+              <a:lnSpc>
+                <a:spcPct val="112000"/>
+              </a:lnSpc>
+              <a:buNone/>
+            </a:pPr>
+            <a:r>
+              <a:rPr lang="en-US" sz="1500" dirty="0">
+                <a:solidFill>
+                  <a:srgbClr val="1A1A1A"/>
+                </a:solidFill>
+                <a:latin typeface="Calibri" pitchFamily="34" charset="0"/>
+                <a:ea typeface="Calibri" pitchFamily="34" charset="-122"/>
+                <a:cs typeface="Calibri" pitchFamily="34" charset="-120"/>
+              </a:rPr>
+              <a:t>Week 5's embeddings exist to recover some of what the bag cannot hold: words represented by the company they keep.</a:t>
+            </a:r>
+            <a:endParaRPr lang="en-US" sz="1500" dirty="0"/>
           </a:p>
         </p:txBody>
       </p:sp>
@@ -5620,7 +6864,7 @@
                 <a:ea typeface="Cambria" pitchFamily="34" charset="-122"/>
                 <a:cs typeface="Cambria" pitchFamily="34" charset="-120"/>
               </a:rPr>
-              <a:t>The shuffle test: is the gap real?</a:t>
+              <a:t>Keyness: what makes a voice distinctive</a:t>
             </a:r>
             <a:endParaRPr lang="en-US" sz="3000" dirty="0"/>
           </a:p>
@@ -5684,7 +6928,7 @@
                 <a:ea typeface="Calibri" pitchFamily="34" charset="-122"/>
                 <a:cs typeface="Calibri" pitchFamily="34" charset="-120"/>
               </a:rPr>
-              <a:t>The question: could randomly dealt labels produce a gap this large?</a:t>
+              <a:t>For every word: how much likelier is it in corpus A than corpus B? A log-odds ratio, smoothed so rare words don't explode.</a:t>
             </a:r>
             <a:endParaRPr lang="en-US" sz="1650" dirty="0"/>
           </a:p>
@@ -5748,7 +6992,7 @@
                 <a:ea typeface="Calibri" pitchFamily="34" charset="-122"/>
                 <a:cs typeface="Calibri" pitchFamily="34" charset="-120"/>
               </a:rPr>
-              <a:t>Shuffle the labels, recount, 1,000 times. Mark where the real gap lands in that pile.</a:t>
+              <a:t>Strongly positive = distinctively A. Strongly negative = distinctively B. The middle is shared language.</a:t>
             </a:r>
             <a:endParaRPr lang="en-US" sz="1650" dirty="0"/>
           </a:p>
@@ -5812,7 +7056,7 @@
                 <a:ea typeface="Calibri" pitchFamily="34" charset="-122"/>
                 <a:cs typeface="Calibri" pitchFamily="34" charset="-120"/>
               </a:rPr>
-              <a:t>Chance rarely matches it: a finding. Chance matches it often: a coincidence.</a:t>
+              <a:t>She Giggles, He Gallops is exactly this method: verbs after "she" vs. "he" in 2,000 screenplays. Women snuggle, giggle, squeal; men gallop, strap, shoot.</a:t>
             </a:r>
             <a:endParaRPr lang="en-US" sz="1650" dirty="0"/>
           </a:p>
@@ -5876,7 +7120,7 @@
                 <a:ea typeface="Calibri" pitchFamily="34" charset="-122"/>
                 <a:cs typeface="Calibri" pitchFamily="34" charset="-120"/>
               </a:rPr>
-              <a:t>It says "probably not chance." It never says "big enough to matter." Effect size is your argument to make.</a:t>
+              <a:t>The corpus pair is a choice: this artist against pop, this subreddit against a novel. Different pair, different "distinctive."</a:t>
             </a:r>
             <a:endParaRPr lang="en-US" sz="1650" dirty="0"/>
           </a:p>
@@ -5916,14 +7160,34 @@
       </p:grpSpPr>
       <p:sp>
         <p:nvSpPr>
-          <p:cNvPr id="2" name="Text 0"/>
-          <p:cNvSpPr/>
-          <p:nvPr/>
-        </p:nvSpPr>
-        <p:spPr>
-          <a:xfrm>
-            <a:off x="640080" y="731520"/>
-            <a:ext cx="10058400" cy="731520"/>
+          <p:cNvPr id="2" name="Shape 0"/>
+          <p:cNvSpPr/>
+          <p:nvPr/>
+        </p:nvSpPr>
+        <p:spPr>
+          <a:xfrm>
+            <a:off x="0" y="0"/>
+            <a:ext cx="164592" cy="6858000"/>
+          </a:xfrm>
+          <a:prstGeom prst="rect">
+            <a:avLst/>
+          </a:prstGeom>
+          <a:solidFill>
+            <a:srgbClr val="3F6F5F"/>
+          </a:solidFill>
+          <a:ln/>
+        </p:spPr>
+      </p:sp>
+      <p:sp>
+        <p:nvSpPr>
+          <p:cNvPr id="3" name="Text 1"/>
+          <p:cNvSpPr/>
+          <p:nvPr/>
+        </p:nvSpPr>
+        <p:spPr>
+          <a:xfrm>
+            <a:off x="640080" y="640080"/>
+            <a:ext cx="10058400" cy="320040"/>
           </a:xfrm>
           <a:prstGeom prst="rect">
             <a:avLst/>
@@ -5933,6 +7197,47 @@
         </p:spPr>
         <p:txBody>
           <a:bodyPr wrap="square" rtlCol="0" anchor="ctr"/>
+          <a:lstStyle/>
+          <a:p>
+            <a:pPr indent="0" marL="0">
+              <a:buNone/>
+            </a:pPr>
+            <a:r>
+              <a:rPr lang="en-US" sz="1200" b="1" spc="300" kern="0" dirty="0">
+                <a:solidFill>
+                  <a:srgbClr val="3F6F5F"/>
+                </a:solidFill>
+                <a:latin typeface="Calibri" pitchFamily="34" charset="0"/>
+                <a:ea typeface="Calibri" pitchFamily="34" charset="-122"/>
+                <a:cs typeface="Calibri" pitchFamily="34" charset="-120"/>
+              </a:rPr>
+              <a:t>WEEK 2 · KEY POINTS</a:t>
+            </a:r>
+            <a:endParaRPr lang="en-US" sz="1200" dirty="0"/>
+          </a:p>
+        </p:txBody>
+      </p:sp>
+      <p:sp>
+        <p:nvSpPr>
+          <p:cNvPr id="4" name="Text 2"/>
+          <p:cNvSpPr/>
+          <p:nvPr/>
+        </p:nvSpPr>
+        <p:spPr>
+          <a:xfrm>
+            <a:off x="640080" y="1005840"/>
+            <a:ext cx="10881360" cy="914400"/>
+          </a:xfrm>
+          <a:prstGeom prst="rect">
+            <a:avLst/>
+          </a:prstGeom>
+          <a:noFill/>
+          <a:ln/>
+        </p:spPr>
+        <p:txBody>
+          <a:bodyPr wrap="square" rtlCol="0" anchor="t">
+            <a:spAutoFit/>
+          </a:bodyPr>
           <a:lstStyle/>
           <a:p>
             <a:pPr indent="0" marL="0">
@@ -5947,7 +7252,7 @@
                 <a:ea typeface="Cambria" pitchFamily="34" charset="-122"/>
                 <a:cs typeface="Cambria" pitchFamily="34" charset="-120"/>
               </a:rPr>
-              <a:t>Three modes today</a:t>
+              <a:t>The shuffle test: is the gap real?</a:t>
             </a:r>
             <a:endParaRPr lang="en-US" sz="3000" dirty="0"/>
           </a:p>
@@ -5955,134 +7260,98 @@
       </p:sp>
       <p:sp>
         <p:nvSpPr>
-          <p:cNvPr id="3" name="Text 1"/>
-          <p:cNvSpPr/>
-          <p:nvPr/>
-        </p:nvSpPr>
-        <p:spPr>
-          <a:xfrm>
-            <a:off x="640080" y="1417320"/>
-            <a:ext cx="10058400" cy="365760"/>
-          </a:xfrm>
-          <a:prstGeom prst="rect">
-            <a:avLst/>
-          </a:prstGeom>
-          <a:noFill/>
-          <a:ln/>
-        </p:spPr>
-        <p:txBody>
-          <a:bodyPr wrap="square" rtlCol="0" anchor="ctr"/>
+          <p:cNvPr id="5" name="Shape 3"/>
+          <p:cNvSpPr/>
+          <p:nvPr/>
+        </p:nvSpPr>
+        <p:spPr>
+          <a:xfrm>
+            <a:off x="640080" y="2331720"/>
+            <a:ext cx="201168" cy="201168"/>
+          </a:xfrm>
+          <a:prstGeom prst="ellipse">
+            <a:avLst/>
+          </a:prstGeom>
+          <a:solidFill>
+            <a:srgbClr val="7A3B2E"/>
+          </a:solidFill>
+          <a:ln/>
+        </p:spPr>
+      </p:sp>
+      <p:sp>
+        <p:nvSpPr>
+          <p:cNvPr id="6" name="Text 4"/>
+          <p:cNvSpPr/>
+          <p:nvPr/>
+        </p:nvSpPr>
+        <p:spPr>
+          <a:xfrm>
+            <a:off x="1097280" y="2240280"/>
+            <a:ext cx="10607040" cy="1017270"/>
+          </a:xfrm>
+          <a:prstGeom prst="rect">
+            <a:avLst/>
+          </a:prstGeom>
+          <a:noFill/>
+          <a:ln/>
+        </p:spPr>
+        <p:txBody>
+          <a:bodyPr wrap="square" rtlCol="0" anchor="t">
+            <a:spAutoFit/>
+          </a:bodyPr>
           <a:lstStyle/>
           <a:p>
             <a:pPr indent="0" marL="0">
-              <a:buNone/>
-            </a:pPr>
-            <a:r>
-              <a:rPr lang="en-US" sz="1400" i="1" dirty="0">
-                <a:solidFill>
-                  <a:srgbClr val="6B6B63"/>
+              <a:lnSpc>
+                <a:spcPct val="112000"/>
+              </a:lnSpc>
+              <a:buNone/>
+            </a:pPr>
+            <a:r>
+              <a:rPr lang="en-US" sz="1650" dirty="0">
+                <a:solidFill>
+                  <a:srgbClr val="1A1A1A"/>
                 </a:solidFill>
                 <a:latin typeface="Calibri" pitchFamily="34" charset="0"/>
                 <a:ea typeface="Calibri" pitchFamily="34" charset="-122"/>
                 <a:cs typeface="Calibri" pitchFamily="34" charset="-120"/>
               </a:rPr>
-              <a:t>about a third of the session each</a:t>
-            </a:r>
-            <a:endParaRPr lang="en-US" sz="1400" dirty="0"/>
-          </a:p>
-        </p:txBody>
-      </p:sp>
-      <p:sp>
-        <p:nvSpPr>
-          <p:cNvPr id="4" name="Shape 2"/>
-          <p:cNvSpPr/>
-          <p:nvPr/>
-        </p:nvSpPr>
-        <p:spPr>
-          <a:xfrm>
-            <a:off x="640080" y="2194560"/>
-            <a:ext cx="3383280" cy="3291840"/>
-          </a:xfrm>
-          <a:prstGeom prst="roundRect">
-            <a:avLst>
-              <a:gd name="adj" fmla="val 3333"/>
-            </a:avLst>
-          </a:prstGeom>
-          <a:solidFill>
-            <a:srgbClr val="F4EEE8"/>
-          </a:solidFill>
-          <a:ln/>
-        </p:spPr>
-      </p:sp>
-      <p:sp>
-        <p:nvSpPr>
-          <p:cNvPr id="5" name="Shape 3"/>
-          <p:cNvSpPr/>
-          <p:nvPr/>
-        </p:nvSpPr>
-        <p:spPr>
-          <a:xfrm>
-            <a:off x="1051560" y="2606040"/>
-            <a:ext cx="548640" cy="548640"/>
+              <a:t>The question: could randomly dealt labels produce a gap this large?</a:t>
+            </a:r>
+            <a:endParaRPr lang="en-US" sz="1650" dirty="0"/>
+          </a:p>
+        </p:txBody>
+      </p:sp>
+      <p:sp>
+        <p:nvSpPr>
+          <p:cNvPr id="7" name="Shape 5"/>
+          <p:cNvSpPr/>
+          <p:nvPr/>
+        </p:nvSpPr>
+        <p:spPr>
+          <a:xfrm>
+            <a:off x="640080" y="3348990"/>
+            <a:ext cx="201168" cy="201168"/>
           </a:xfrm>
           <a:prstGeom prst="ellipse">
             <a:avLst/>
           </a:prstGeom>
           <a:solidFill>
-            <a:srgbClr val="7A3B2E"/>
-          </a:solidFill>
-          <a:ln/>
-        </p:spPr>
-      </p:sp>
-      <p:sp>
-        <p:nvSpPr>
-          <p:cNvPr id="6" name="Text 4"/>
-          <p:cNvSpPr/>
-          <p:nvPr/>
-        </p:nvSpPr>
-        <p:spPr>
-          <a:xfrm>
-            <a:off x="1005840" y="3383280"/>
-            <a:ext cx="2651760" cy="548640"/>
-          </a:xfrm>
-          <a:prstGeom prst="rect">
-            <a:avLst/>
-          </a:prstGeom>
-          <a:noFill/>
-          <a:ln/>
-        </p:spPr>
-        <p:txBody>
-          <a:bodyPr wrap="square" rtlCol="0" anchor="ctr"/>
-          <a:lstStyle/>
-          <a:p>
-            <a:pPr indent="0" marL="0">
-              <a:buNone/>
-            </a:pPr>
-            <a:r>
-              <a:rPr lang="en-US" sz="2100" b="1" dirty="0">
-                <a:solidFill>
-                  <a:srgbClr val="1A1A1A"/>
-                </a:solidFill>
-                <a:latin typeface="Cambria" pitchFamily="34" charset="0"/>
-                <a:ea typeface="Cambria" pitchFamily="34" charset="-122"/>
-                <a:cs typeface="Cambria" pitchFamily="34" charset="-120"/>
-              </a:rPr>
-              <a:t>Lecture / demo</a:t>
-            </a:r>
-            <a:endParaRPr lang="en-US" sz="2100" dirty="0"/>
-          </a:p>
-        </p:txBody>
-      </p:sp>
-      <p:sp>
-        <p:nvSpPr>
-          <p:cNvPr id="7" name="Text 5"/>
-          <p:cNvSpPr/>
-          <p:nvPr/>
-        </p:nvSpPr>
-        <p:spPr>
-          <a:xfrm>
-            <a:off x="1005840" y="3977640"/>
-            <a:ext cx="2651760" cy="1371600"/>
+            <a:srgbClr val="3F6F5F"/>
+          </a:solidFill>
+          <a:ln/>
+        </p:spPr>
+      </p:sp>
+      <p:sp>
+        <p:nvSpPr>
+          <p:cNvPr id="8" name="Text 6"/>
+          <p:cNvSpPr/>
+          <p:nvPr/>
+        </p:nvSpPr>
+        <p:spPr>
+          <a:xfrm>
+            <a:off x="1097280" y="3257550"/>
+            <a:ext cx="10607040" cy="1017270"/>
           </a:xfrm>
           <a:prstGeom prst="rect">
             <a:avLst/>
@@ -6098,12 +7367,12 @@
           <a:p>
             <a:pPr indent="0" marL="0">
               <a:lnSpc>
-                <a:spcPct val="115000"/>
+                <a:spcPct val="112000"/>
               </a:lnSpc>
               <a:buNone/>
             </a:pPr>
             <a:r>
-              <a:rPr lang="en-US" sz="1500" dirty="0">
+              <a:rPr lang="en-US" sz="1650" dirty="0">
                 <a:solidFill>
                   <a:srgbClr val="1A1A1A"/>
                 </a:solidFill>
@@ -6111,33 +7380,11 @@
                 <a:ea typeface="Calibri" pitchFamily="34" charset="-122"/>
                 <a:cs typeface="Calibri" pitchFamily="34" charset="-120"/>
               </a:rPr>
-              <a:t>Advanced counting: baselines, keyness, and the shuffle test</a:t>
-            </a:r>
-            <a:endParaRPr lang="en-US" sz="1500" dirty="0"/>
-          </a:p>
-        </p:txBody>
-      </p:sp>
-      <p:sp>
-        <p:nvSpPr>
-          <p:cNvPr id="8" name="Shape 6"/>
-          <p:cNvSpPr/>
-          <p:nvPr/>
-        </p:nvSpPr>
-        <p:spPr>
-          <a:xfrm>
-            <a:off x="4526280" y="2194560"/>
-            <a:ext cx="3383280" cy="3291840"/>
-          </a:xfrm>
-          <a:prstGeom prst="roundRect">
-            <a:avLst>
-              <a:gd name="adj" fmla="val 3333"/>
-            </a:avLst>
-          </a:prstGeom>
-          <a:solidFill>
-            <a:srgbClr val="F4EEE8"/>
-          </a:solidFill>
-          <a:ln/>
-        </p:spPr>
+              <a:t>Shuffle the labels, recount, 1,000 times. Mark where the real gap lands in that pile.</a:t>
+            </a:r>
+            <a:endParaRPr lang="en-US" sz="1650" dirty="0"/>
+          </a:p>
+        </p:txBody>
       </p:sp>
       <p:sp>
         <p:nvSpPr>
@@ -6147,14 +7394,14 @@
         </p:nvSpPr>
         <p:spPr>
           <a:xfrm>
-            <a:off x="4937760" y="2606040"/>
-            <a:ext cx="548640" cy="548640"/>
+            <a:off x="640080" y="4366260"/>
+            <a:ext cx="201168" cy="201168"/>
           </a:xfrm>
           <a:prstGeom prst="ellipse">
             <a:avLst/>
           </a:prstGeom>
           <a:solidFill>
-            <a:srgbClr val="3F6F5F"/>
+            <a:srgbClr val="B9852F"/>
           </a:solidFill>
           <a:ln/>
         </p:spPr>
@@ -6167,47 +7414,8 @@
         </p:nvSpPr>
         <p:spPr>
           <a:xfrm>
-            <a:off x="4892040" y="3383280"/>
-            <a:ext cx="2651760" cy="548640"/>
-          </a:xfrm>
-          <a:prstGeom prst="rect">
-            <a:avLst/>
-          </a:prstGeom>
-          <a:noFill/>
-          <a:ln/>
-        </p:spPr>
-        <p:txBody>
-          <a:bodyPr wrap="square" rtlCol="0" anchor="ctr"/>
-          <a:lstStyle/>
-          <a:p>
-            <a:pPr indent="0" marL="0">
-              <a:buNone/>
-            </a:pPr>
-            <a:r>
-              <a:rPr lang="en-US" sz="2100" b="1" dirty="0">
-                <a:solidFill>
-                  <a:srgbClr val="1A1A1A"/>
-                </a:solidFill>
-                <a:latin typeface="Cambria" pitchFamily="34" charset="0"/>
-                <a:ea typeface="Cambria" pitchFamily="34" charset="-122"/>
-                <a:cs typeface="Cambria" pitchFamily="34" charset="-120"/>
-              </a:rPr>
-              <a:t>Workshop</a:t>
-            </a:r>
-            <a:endParaRPr lang="en-US" sz="2100" dirty="0"/>
-          </a:p>
-        </p:txBody>
-      </p:sp>
-      <p:sp>
-        <p:nvSpPr>
-          <p:cNvPr id="11" name="Text 9"/>
-          <p:cNvSpPr/>
-          <p:nvPr/>
-        </p:nvSpPr>
-        <p:spPr>
-          <a:xfrm>
-            <a:off x="4892040" y="3977640"/>
-            <a:ext cx="2651760" cy="1371600"/>
+            <a:off x="1097280" y="4274820"/>
+            <a:ext cx="10607040" cy="1017270"/>
           </a:xfrm>
           <a:prstGeom prst="rect">
             <a:avLst/>
@@ -6223,12 +7431,12 @@
           <a:p>
             <a:pPr indent="0" marL="0">
               <a:lnSpc>
-                <a:spcPct val="115000"/>
+                <a:spcPct val="112000"/>
               </a:lnSpc>
               <a:buNone/>
             </a:pPr>
             <a:r>
-              <a:rPr lang="en-US" sz="1500" dirty="0">
+              <a:rPr lang="en-US" sz="1650" dirty="0">
                 <a:solidFill>
                   <a:srgbClr val="1A1A1A"/>
                 </a:solidFill>
@@ -6236,103 +7444,42 @@
                 <a:ea typeface="Calibri" pitchFamily="34" charset="-122"/>
                 <a:cs typeface="Calibri" pitchFamily="34" charset="-120"/>
               </a:rPr>
-              <a:t>Build hands-on on your own data.</a:t>
-            </a:r>
-            <a:endParaRPr lang="en-US" sz="1500" dirty="0"/>
-          </a:p>
-        </p:txBody>
-      </p:sp>
-      <p:sp>
-        <p:nvSpPr>
-          <p:cNvPr id="12" name="Shape 10"/>
-          <p:cNvSpPr/>
-          <p:nvPr/>
-        </p:nvSpPr>
-        <p:spPr>
-          <a:xfrm>
-            <a:off x="8412480" y="2194560"/>
-            <a:ext cx="3383280" cy="3291840"/>
-          </a:xfrm>
-          <a:prstGeom prst="roundRect">
-            <a:avLst>
-              <a:gd name="adj" fmla="val 3333"/>
-            </a:avLst>
-          </a:prstGeom>
-          <a:solidFill>
-            <a:srgbClr val="F4EEE8"/>
-          </a:solidFill>
-          <a:ln/>
-        </p:spPr>
-      </p:sp>
-      <p:sp>
-        <p:nvSpPr>
-          <p:cNvPr id="13" name="Shape 11"/>
-          <p:cNvSpPr/>
-          <p:nvPr/>
-        </p:nvSpPr>
-        <p:spPr>
-          <a:xfrm>
-            <a:off x="8823960" y="2606040"/>
-            <a:ext cx="548640" cy="548640"/>
+              <a:t>Chance rarely matches it: a finding. Chance matches it often: a coincidence.</a:t>
+            </a:r>
+            <a:endParaRPr lang="en-US" sz="1650" dirty="0"/>
+          </a:p>
+        </p:txBody>
+      </p:sp>
+      <p:sp>
+        <p:nvSpPr>
+          <p:cNvPr id="11" name="Shape 9"/>
+          <p:cNvSpPr/>
+          <p:nvPr/>
+        </p:nvSpPr>
+        <p:spPr>
+          <a:xfrm>
+            <a:off x="640080" y="5383530"/>
+            <a:ext cx="201168" cy="201168"/>
           </a:xfrm>
           <a:prstGeom prst="ellipse">
             <a:avLst/>
           </a:prstGeom>
           <a:solidFill>
-            <a:srgbClr val="B9852F"/>
-          </a:solidFill>
-          <a:ln/>
-        </p:spPr>
-      </p:sp>
-      <p:sp>
-        <p:nvSpPr>
-          <p:cNvPr id="14" name="Text 12"/>
-          <p:cNvSpPr/>
-          <p:nvPr/>
-        </p:nvSpPr>
-        <p:spPr>
-          <a:xfrm>
-            <a:off x="8778240" y="3383280"/>
-            <a:ext cx="2651760" cy="548640"/>
-          </a:xfrm>
-          <a:prstGeom prst="rect">
-            <a:avLst/>
-          </a:prstGeom>
-          <a:noFill/>
-          <a:ln/>
-        </p:spPr>
-        <p:txBody>
-          <a:bodyPr wrap="square" rtlCol="0" anchor="ctr"/>
-          <a:lstStyle/>
-          <a:p>
-            <a:pPr indent="0" marL="0">
-              <a:buNone/>
-            </a:pPr>
-            <a:r>
-              <a:rPr lang="en-US" sz="2100" b="1" dirty="0">
-                <a:solidFill>
-                  <a:srgbClr val="1A1A1A"/>
-                </a:solidFill>
-                <a:latin typeface="Cambria" pitchFamily="34" charset="0"/>
-                <a:ea typeface="Cambria" pitchFamily="34" charset="-122"/>
-                <a:cs typeface="Cambria" pitchFamily="34" charset="-120"/>
-              </a:rPr>
-              <a:t>Discussion</a:t>
-            </a:r>
-            <a:endParaRPr lang="en-US" sz="2100" dirty="0"/>
-          </a:p>
-        </p:txBody>
-      </p:sp>
-      <p:sp>
-        <p:nvSpPr>
-          <p:cNvPr id="15" name="Text 13"/>
-          <p:cNvSpPr/>
-          <p:nvPr/>
-        </p:nvSpPr>
-        <p:spPr>
-          <a:xfrm>
-            <a:off x="8778240" y="3977640"/>
-            <a:ext cx="2651760" cy="1371600"/>
+            <a:srgbClr val="7A3B2E"/>
+          </a:solidFill>
+          <a:ln/>
+        </p:spPr>
+      </p:sp>
+      <p:sp>
+        <p:nvSpPr>
+          <p:cNvPr id="12" name="Text 10"/>
+          <p:cNvSpPr/>
+          <p:nvPr/>
+        </p:nvSpPr>
+        <p:spPr>
+          <a:xfrm>
+            <a:off x="1097280" y="5292090"/>
+            <a:ext cx="10607040" cy="1017270"/>
           </a:xfrm>
           <a:prstGeom prst="rect">
             <a:avLst/>
@@ -6348,12 +7495,12 @@
           <a:p>
             <a:pPr indent="0" marL="0">
               <a:lnSpc>
-                <a:spcPct val="115000"/>
+                <a:spcPct val="112000"/>
               </a:lnSpc>
               <a:buNone/>
             </a:pPr>
             <a:r>
-              <a:rPr lang="en-US" sz="1500" dirty="0">
+              <a:rPr lang="en-US" sz="1650" dirty="0">
                 <a:solidFill>
                   <a:srgbClr val="1A1A1A"/>
                 </a:solidFill>
@@ -6361,9 +7508,9 @@
                 <a:ea typeface="Calibri" pitchFamily="34" charset="-122"/>
                 <a:cs typeface="Calibri" pitchFamily="34" charset="-120"/>
               </a:rPr>
-              <a:t>Interrogate the study, debate it, or critique each other's work.</a:t>
-            </a:r>
-            <a:endParaRPr lang="en-US" sz="1500" dirty="0"/>
+              <a:t>It says "probably not chance." It never says "big enough to matter." Effect size is your argument to make.</a:t>
+            </a:r>
+            <a:endParaRPr lang="en-US" sz="1650" dirty="0"/>
           </a:p>
         </p:txBody>
       </p:sp>
@@ -6407,7 +7554,7 @@
         </p:nvSpPr>
         <p:spPr>
           <a:xfrm>
-            <a:off x="640080" y="640080"/>
+            <a:off x="640080" y="731520"/>
             <a:ext cx="10058400" cy="731520"/>
           </a:xfrm>
           <a:prstGeom prst="rect">
@@ -6432,7 +7579,7 @@
                 <a:ea typeface="Cambria" pitchFamily="34" charset="-122"/>
                 <a:cs typeface="Cambria" pitchFamily="34" charset="-120"/>
               </a:rPr>
-              <a:t>The session</a:t>
+              <a:t>Three modes today</a:t>
             </a:r>
             <a:endParaRPr lang="en-US" sz="3000" dirty="0"/>
           </a:p>
@@ -6440,36 +7587,14 @@
       </p:sp>
       <p:sp>
         <p:nvSpPr>
-          <p:cNvPr id="3" name="Shape 1"/>
-          <p:cNvSpPr/>
-          <p:nvPr/>
-        </p:nvSpPr>
-        <p:spPr>
-          <a:xfrm>
-            <a:off x="640080" y="1572768"/>
-            <a:ext cx="868680" cy="338328"/>
-          </a:xfrm>
-          <a:prstGeom prst="roundRect">
-            <a:avLst>
-              <a:gd name="adj" fmla="val 16216"/>
-            </a:avLst>
-          </a:prstGeom>
-          <a:solidFill>
-            <a:srgbClr val="7A3B2E"/>
-          </a:solidFill>
-          <a:ln/>
-        </p:spPr>
-      </p:sp>
-      <p:sp>
-        <p:nvSpPr>
-          <p:cNvPr id="4" name="Text 2"/>
-          <p:cNvSpPr/>
-          <p:nvPr/>
-        </p:nvSpPr>
-        <p:spPr>
-          <a:xfrm>
-            <a:off x="640080" y="1572768"/>
-            <a:ext cx="868680" cy="338328"/>
+          <p:cNvPr id="3" name="Text 1"/>
+          <p:cNvSpPr/>
+          <p:nvPr/>
+        </p:nvSpPr>
+        <p:spPr>
+          <a:xfrm>
+            <a:off x="640080" y="1417320"/>
+            <a:ext cx="10058400" cy="365760"/>
           </a:xfrm>
           <a:prstGeom prst="rect">
             <a:avLst/>
@@ -6481,52 +7606,136 @@
           <a:bodyPr wrap="square" rtlCol="0" anchor="ctr"/>
           <a:lstStyle/>
           <a:p>
-            <a:pPr algn="ctr" indent="0" marL="0">
-              <a:buNone/>
-            </a:pPr>
-            <a:r>
-              <a:rPr lang="en-US" sz="1100" b="1" dirty="0">
-                <a:solidFill>
-                  <a:srgbClr val="FFFFFF"/>
+            <a:pPr indent="0" marL="0">
+              <a:buNone/>
+            </a:pPr>
+            <a:r>
+              <a:rPr lang="en-US" sz="1400" i="1" dirty="0">
+                <a:solidFill>
+                  <a:srgbClr val="6B6B63"/>
                 </a:solidFill>
                 <a:latin typeface="Calibri" pitchFamily="34" charset="0"/>
                 <a:ea typeface="Calibri" pitchFamily="34" charset="-122"/>
                 <a:cs typeface="Calibri" pitchFamily="34" charset="-120"/>
               </a:rPr>
-              <a:t>0:00</a:t>
-            </a:r>
-            <a:endParaRPr lang="en-US" sz="1100" dirty="0"/>
-          </a:p>
-        </p:txBody>
-      </p:sp>
-      <p:sp>
-        <p:nvSpPr>
-          <p:cNvPr id="5" name="Text 3"/>
-          <p:cNvSpPr/>
-          <p:nvPr/>
-        </p:nvSpPr>
-        <p:spPr>
-          <a:xfrm>
-            <a:off x="1691640" y="1554480"/>
-            <a:ext cx="9646920" cy="448056"/>
-          </a:xfrm>
-          <a:prstGeom prst="rect">
-            <a:avLst/>
-          </a:prstGeom>
-          <a:noFill/>
-          <a:ln/>
-        </p:spPr>
-        <p:txBody>
-          <a:bodyPr wrap="square" rtlCol="0" anchor="ctr">
+              <a:t>about a third of the session each</a:t>
+            </a:r>
+            <a:endParaRPr lang="en-US" sz="1400" dirty="0"/>
+          </a:p>
+        </p:txBody>
+      </p:sp>
+      <p:sp>
+        <p:nvSpPr>
+          <p:cNvPr id="4" name="Shape 2"/>
+          <p:cNvSpPr/>
+          <p:nvPr/>
+        </p:nvSpPr>
+        <p:spPr>
+          <a:xfrm>
+            <a:off x="640080" y="2194560"/>
+            <a:ext cx="3383280" cy="3291840"/>
+          </a:xfrm>
+          <a:prstGeom prst="roundRect">
+            <a:avLst>
+              <a:gd name="adj" fmla="val 3333"/>
+            </a:avLst>
+          </a:prstGeom>
+          <a:solidFill>
+            <a:srgbClr val="F4EEE8"/>
+          </a:solidFill>
+          <a:ln/>
+        </p:spPr>
+      </p:sp>
+      <p:sp>
+        <p:nvSpPr>
+          <p:cNvPr id="5" name="Shape 3"/>
+          <p:cNvSpPr/>
+          <p:nvPr/>
+        </p:nvSpPr>
+        <p:spPr>
+          <a:xfrm>
+            <a:off x="1051560" y="2606040"/>
+            <a:ext cx="548640" cy="548640"/>
+          </a:xfrm>
+          <a:prstGeom prst="ellipse">
+            <a:avLst/>
+          </a:prstGeom>
+          <a:solidFill>
+            <a:srgbClr val="7A3B2E"/>
+          </a:solidFill>
+          <a:ln/>
+        </p:spPr>
+      </p:sp>
+      <p:sp>
+        <p:nvSpPr>
+          <p:cNvPr id="6" name="Text 4"/>
+          <p:cNvSpPr/>
+          <p:nvPr/>
+        </p:nvSpPr>
+        <p:spPr>
+          <a:xfrm>
+            <a:off x="1005840" y="3383280"/>
+            <a:ext cx="2651760" cy="548640"/>
+          </a:xfrm>
+          <a:prstGeom prst="rect">
+            <a:avLst/>
+          </a:prstGeom>
+          <a:noFill/>
+          <a:ln/>
+        </p:spPr>
+        <p:txBody>
+          <a:bodyPr wrap="square" rtlCol="0" anchor="ctr"/>
+          <a:lstStyle/>
+          <a:p>
+            <a:pPr indent="0" marL="0">
+              <a:buNone/>
+            </a:pPr>
+            <a:r>
+              <a:rPr lang="en-US" sz="2100" b="1" dirty="0">
+                <a:solidFill>
+                  <a:srgbClr val="1A1A1A"/>
+                </a:solidFill>
+                <a:latin typeface="Cambria" pitchFamily="34" charset="0"/>
+                <a:ea typeface="Cambria" pitchFamily="34" charset="-122"/>
+                <a:cs typeface="Cambria" pitchFamily="34" charset="-120"/>
+              </a:rPr>
+              <a:t>Lecture / demo</a:t>
+            </a:r>
+            <a:endParaRPr lang="en-US" sz="2100" dirty="0"/>
+          </a:p>
+        </p:txBody>
+      </p:sp>
+      <p:sp>
+        <p:nvSpPr>
+          <p:cNvPr id="7" name="Text 5"/>
+          <p:cNvSpPr/>
+          <p:nvPr/>
+        </p:nvSpPr>
+        <p:spPr>
+          <a:xfrm>
+            <a:off x="1005840" y="3977640"/>
+            <a:ext cx="2651760" cy="1371600"/>
+          </a:xfrm>
+          <a:prstGeom prst="rect">
+            <a:avLst/>
+          </a:prstGeom>
+          <a:noFill/>
+          <a:ln/>
+        </p:spPr>
+        <p:txBody>
+          <a:bodyPr wrap="square" rtlCol="0" anchor="t">
             <a:spAutoFit/>
           </a:bodyPr>
           <a:lstStyle/>
           <a:p>
             <a:pPr indent="0" marL="0">
-              <a:buNone/>
-            </a:pPr>
-            <a:r>
-              <a:rPr lang="en-US" sz="1100" dirty="0">
+              <a:lnSpc>
+                <a:spcPct val="115000"/>
+              </a:lnSpc>
+              <a:buNone/>
+            </a:pPr>
+            <a:r>
+              <a:rPr lang="en-US" sz="1500" dirty="0">
                 <a:solidFill>
                   <a:srgbClr val="1A1A1A"/>
                 </a:solidFill>
@@ -6534,44 +7743,64 @@
                 <a:ea typeface="Calibri" pitchFamily="34" charset="-122"/>
                 <a:cs typeface="Calibri" pitchFamily="34" charset="-120"/>
               </a:rPr>
-              <a:t>Warm-up retrieval.</a:t>
-            </a:r>
-            <a:endParaRPr lang="en-US" sz="1100" dirty="0"/>
-          </a:p>
-        </p:txBody>
-      </p:sp>
-      <p:sp>
-        <p:nvSpPr>
-          <p:cNvPr id="6" name="Shape 4"/>
-          <p:cNvSpPr/>
-          <p:nvPr/>
-        </p:nvSpPr>
-        <p:spPr>
-          <a:xfrm>
-            <a:off x="640080" y="2020824"/>
-            <a:ext cx="868680" cy="338328"/>
+              <a:t>Advanced counting: baselines, keyness, and the shuffle test</a:t>
+            </a:r>
+            <a:endParaRPr lang="en-US" sz="1500" dirty="0"/>
+          </a:p>
+        </p:txBody>
+      </p:sp>
+      <p:sp>
+        <p:nvSpPr>
+          <p:cNvPr id="8" name="Shape 6"/>
+          <p:cNvSpPr/>
+          <p:nvPr/>
+        </p:nvSpPr>
+        <p:spPr>
+          <a:xfrm>
+            <a:off x="4526280" y="2194560"/>
+            <a:ext cx="3383280" cy="3291840"/>
           </a:xfrm>
           <a:prstGeom prst="roundRect">
             <a:avLst>
-              <a:gd name="adj" fmla="val 16216"/>
+              <a:gd name="adj" fmla="val 3333"/>
             </a:avLst>
           </a:prstGeom>
           <a:solidFill>
-            <a:srgbClr val="7A3B2E"/>
-          </a:solidFill>
-          <a:ln/>
-        </p:spPr>
-      </p:sp>
-      <p:sp>
-        <p:nvSpPr>
-          <p:cNvPr id="7" name="Text 5"/>
-          <p:cNvSpPr/>
-          <p:nvPr/>
-        </p:nvSpPr>
-        <p:spPr>
-          <a:xfrm>
-            <a:off x="640080" y="2020824"/>
-            <a:ext cx="868680" cy="338328"/>
+            <a:srgbClr val="F4EEE8"/>
+          </a:solidFill>
+          <a:ln/>
+        </p:spPr>
+      </p:sp>
+      <p:sp>
+        <p:nvSpPr>
+          <p:cNvPr id="9" name="Shape 7"/>
+          <p:cNvSpPr/>
+          <p:nvPr/>
+        </p:nvSpPr>
+        <p:spPr>
+          <a:xfrm>
+            <a:off x="4937760" y="2606040"/>
+            <a:ext cx="548640" cy="548640"/>
+          </a:xfrm>
+          <a:prstGeom prst="ellipse">
+            <a:avLst/>
+          </a:prstGeom>
+          <a:solidFill>
+            <a:srgbClr val="3F6F5F"/>
+          </a:solidFill>
+          <a:ln/>
+        </p:spPr>
+      </p:sp>
+      <p:sp>
+        <p:nvSpPr>
+          <p:cNvPr id="10" name="Text 8"/>
+          <p:cNvSpPr/>
+          <p:nvPr/>
+        </p:nvSpPr>
+        <p:spPr>
+          <a:xfrm>
+            <a:off x="4892040" y="3383280"/>
+            <a:ext cx="2651760" cy="548640"/>
           </a:xfrm>
           <a:prstGeom prst="rect">
             <a:avLst/>
@@ -6583,52 +7812,180 @@
           <a:bodyPr wrap="square" rtlCol="0" anchor="ctr"/>
           <a:lstStyle/>
           <a:p>
-            <a:pPr algn="ctr" indent="0" marL="0">
-              <a:buNone/>
-            </a:pPr>
-            <a:r>
-              <a:rPr lang="en-US" sz="1100" b="1" dirty="0">
-                <a:solidFill>
-                  <a:srgbClr val="FFFFFF"/>
+            <a:pPr indent="0" marL="0">
+              <a:buNone/>
+            </a:pPr>
+            <a:r>
+              <a:rPr lang="en-US" sz="2100" b="1" dirty="0">
+                <a:solidFill>
+                  <a:srgbClr val="1A1A1A"/>
+                </a:solidFill>
+                <a:latin typeface="Cambria" pitchFamily="34" charset="0"/>
+                <a:ea typeface="Cambria" pitchFamily="34" charset="-122"/>
+                <a:cs typeface="Cambria" pitchFamily="34" charset="-120"/>
+              </a:rPr>
+              <a:t>Workshop</a:t>
+            </a:r>
+            <a:endParaRPr lang="en-US" sz="2100" dirty="0"/>
+          </a:p>
+        </p:txBody>
+      </p:sp>
+      <p:sp>
+        <p:nvSpPr>
+          <p:cNvPr id="11" name="Text 9"/>
+          <p:cNvSpPr/>
+          <p:nvPr/>
+        </p:nvSpPr>
+        <p:spPr>
+          <a:xfrm>
+            <a:off x="4892040" y="3977640"/>
+            <a:ext cx="2651760" cy="1371600"/>
+          </a:xfrm>
+          <a:prstGeom prst="rect">
+            <a:avLst/>
+          </a:prstGeom>
+          <a:noFill/>
+          <a:ln/>
+        </p:spPr>
+        <p:txBody>
+          <a:bodyPr wrap="square" rtlCol="0" anchor="t">
+            <a:spAutoFit/>
+          </a:bodyPr>
+          <a:lstStyle/>
+          <a:p>
+            <a:pPr indent="0" marL="0">
+              <a:lnSpc>
+                <a:spcPct val="115000"/>
+              </a:lnSpc>
+              <a:buNone/>
+            </a:pPr>
+            <a:r>
+              <a:rPr lang="en-US" sz="1500" dirty="0">
+                <a:solidFill>
+                  <a:srgbClr val="1A1A1A"/>
                 </a:solidFill>
                 <a:latin typeface="Calibri" pitchFamily="34" charset="0"/>
                 <a:ea typeface="Calibri" pitchFamily="34" charset="-122"/>
                 <a:cs typeface="Calibri" pitchFamily="34" charset="-120"/>
               </a:rPr>
-              <a:t>0:05</a:t>
-            </a:r>
-            <a:endParaRPr lang="en-US" sz="1100" dirty="0"/>
-          </a:p>
-        </p:txBody>
-      </p:sp>
-      <p:sp>
-        <p:nvSpPr>
-          <p:cNvPr id="8" name="Text 6"/>
-          <p:cNvSpPr/>
-          <p:nvPr/>
-        </p:nvSpPr>
-        <p:spPr>
-          <a:xfrm>
-            <a:off x="1691640" y="2002536"/>
-            <a:ext cx="9646920" cy="448056"/>
-          </a:xfrm>
-          <a:prstGeom prst="rect">
-            <a:avLst/>
-          </a:prstGeom>
-          <a:noFill/>
-          <a:ln/>
-        </p:spPr>
-        <p:txBody>
-          <a:bodyPr wrap="square" rtlCol="0" anchor="ctr">
+              <a:t>Build hands-on on your own data.</a:t>
+            </a:r>
+            <a:endParaRPr lang="en-US" sz="1500" dirty="0"/>
+          </a:p>
+        </p:txBody>
+      </p:sp>
+      <p:sp>
+        <p:nvSpPr>
+          <p:cNvPr id="12" name="Shape 10"/>
+          <p:cNvSpPr/>
+          <p:nvPr/>
+        </p:nvSpPr>
+        <p:spPr>
+          <a:xfrm>
+            <a:off x="8412480" y="2194560"/>
+            <a:ext cx="3383280" cy="3291840"/>
+          </a:xfrm>
+          <a:prstGeom prst="roundRect">
+            <a:avLst>
+              <a:gd name="adj" fmla="val 3333"/>
+            </a:avLst>
+          </a:prstGeom>
+          <a:solidFill>
+            <a:srgbClr val="F4EEE8"/>
+          </a:solidFill>
+          <a:ln/>
+        </p:spPr>
+      </p:sp>
+      <p:sp>
+        <p:nvSpPr>
+          <p:cNvPr id="13" name="Shape 11"/>
+          <p:cNvSpPr/>
+          <p:nvPr/>
+        </p:nvSpPr>
+        <p:spPr>
+          <a:xfrm>
+            <a:off x="8823960" y="2606040"/>
+            <a:ext cx="548640" cy="548640"/>
+          </a:xfrm>
+          <a:prstGeom prst="ellipse">
+            <a:avLst/>
+          </a:prstGeom>
+          <a:solidFill>
+            <a:srgbClr val="B9852F"/>
+          </a:solidFill>
+          <a:ln/>
+        </p:spPr>
+      </p:sp>
+      <p:sp>
+        <p:nvSpPr>
+          <p:cNvPr id="14" name="Text 12"/>
+          <p:cNvSpPr/>
+          <p:nvPr/>
+        </p:nvSpPr>
+        <p:spPr>
+          <a:xfrm>
+            <a:off x="8778240" y="3383280"/>
+            <a:ext cx="2651760" cy="548640"/>
+          </a:xfrm>
+          <a:prstGeom prst="rect">
+            <a:avLst/>
+          </a:prstGeom>
+          <a:noFill/>
+          <a:ln/>
+        </p:spPr>
+        <p:txBody>
+          <a:bodyPr wrap="square" rtlCol="0" anchor="ctr"/>
+          <a:lstStyle/>
+          <a:p>
+            <a:pPr indent="0" marL="0">
+              <a:buNone/>
+            </a:pPr>
+            <a:r>
+              <a:rPr lang="en-US" sz="2100" b="1" dirty="0">
+                <a:solidFill>
+                  <a:srgbClr val="1A1A1A"/>
+                </a:solidFill>
+                <a:latin typeface="Cambria" pitchFamily="34" charset="0"/>
+                <a:ea typeface="Cambria" pitchFamily="34" charset="-122"/>
+                <a:cs typeface="Cambria" pitchFamily="34" charset="-120"/>
+              </a:rPr>
+              <a:t>Discussion</a:t>
+            </a:r>
+            <a:endParaRPr lang="en-US" sz="2100" dirty="0"/>
+          </a:p>
+        </p:txBody>
+      </p:sp>
+      <p:sp>
+        <p:nvSpPr>
+          <p:cNvPr id="15" name="Text 13"/>
+          <p:cNvSpPr/>
+          <p:nvPr/>
+        </p:nvSpPr>
+        <p:spPr>
+          <a:xfrm>
+            <a:off x="8778240" y="3977640"/>
+            <a:ext cx="2651760" cy="1371600"/>
+          </a:xfrm>
+          <a:prstGeom prst="rect">
+            <a:avLst/>
+          </a:prstGeom>
+          <a:noFill/>
+          <a:ln/>
+        </p:spPr>
+        <p:txBody>
+          <a:bodyPr wrap="square" rtlCol="0" anchor="t">
             <a:spAutoFit/>
           </a:bodyPr>
           <a:lstStyle/>
           <a:p>
             <a:pPr indent="0" marL="0">
-              <a:buNone/>
-            </a:pPr>
-            <a:r>
-              <a:rPr lang="en-US" sz="1100" dirty="0">
+              <a:lnSpc>
+                <a:spcPct val="115000"/>
+              </a:lnSpc>
+              <a:buNone/>
+            </a:pPr>
+            <a:r>
+              <a:rPr lang="en-US" sz="1500" dirty="0">
                 <a:solidFill>
                   <a:srgbClr val="1A1A1A"/>
                 </a:solidFill>
@@ -6636,825 +7993,9 @@
                 <a:ea typeface="Calibri" pitchFamily="34" charset="-122"/>
                 <a:cs typeface="Calibri" pitchFamily="34" charset="-120"/>
               </a:rPr>
-              <a:t>The trial: claim, objection, re-run-without-fiction rebuttal, "interpret with care." One named choice is the chart: the hockey-stick shape depends on its y-axis and smoothing.</a:t>
-            </a:r>
-            <a:endParaRPr lang="en-US" sz="1100" dirty="0"/>
-          </a:p>
-        </p:txBody>
-      </p:sp>
-      <p:sp>
-        <p:nvSpPr>
-          <p:cNvPr id="9" name="Shape 7"/>
-          <p:cNvSpPr/>
-          <p:nvPr/>
-        </p:nvSpPr>
-        <p:spPr>
-          <a:xfrm>
-            <a:off x="640080" y="2468880"/>
-            <a:ext cx="868680" cy="338328"/>
-          </a:xfrm>
-          <a:prstGeom prst="roundRect">
-            <a:avLst>
-              <a:gd name="adj" fmla="val 16216"/>
-            </a:avLst>
-          </a:prstGeom>
-          <a:solidFill>
-            <a:srgbClr val="7A3B2E"/>
-          </a:solidFill>
-          <a:ln/>
-        </p:spPr>
-      </p:sp>
-      <p:sp>
-        <p:nvSpPr>
-          <p:cNvPr id="10" name="Text 8"/>
-          <p:cNvSpPr/>
-          <p:nvPr/>
-        </p:nvSpPr>
-        <p:spPr>
-          <a:xfrm>
-            <a:off x="640080" y="2468880"/>
-            <a:ext cx="868680" cy="338328"/>
-          </a:xfrm>
-          <a:prstGeom prst="rect">
-            <a:avLst/>
-          </a:prstGeom>
-          <a:noFill/>
-          <a:ln/>
-        </p:spPr>
-        <p:txBody>
-          <a:bodyPr wrap="square" rtlCol="0" anchor="ctr"/>
-          <a:lstStyle/>
-          <a:p>
-            <a:pPr algn="ctr" indent="0" marL="0">
-              <a:buNone/>
-            </a:pPr>
-            <a:r>
-              <a:rPr lang="en-US" sz="1100" b="1" dirty="0">
-                <a:solidFill>
-                  <a:srgbClr val="FFFFFF"/>
-                </a:solidFill>
-                <a:latin typeface="Calibri" pitchFamily="34" charset="0"/>
-                <a:ea typeface="Calibri" pitchFamily="34" charset="-122"/>
-                <a:cs typeface="Calibri" pitchFamily="34" charset="-120"/>
-              </a:rPr>
-              <a:t>0:25</a:t>
-            </a:r>
-            <a:endParaRPr lang="en-US" sz="1100" dirty="0"/>
-          </a:p>
-        </p:txBody>
-      </p:sp>
-      <p:sp>
-        <p:nvSpPr>
-          <p:cNvPr id="11" name="Text 9"/>
-          <p:cNvSpPr/>
-          <p:nvPr/>
-        </p:nvSpPr>
-        <p:spPr>
-          <a:xfrm>
-            <a:off x="1691640" y="2450592"/>
-            <a:ext cx="9646920" cy="448056"/>
-          </a:xfrm>
-          <a:prstGeom prst="rect">
-            <a:avLst/>
-          </a:prstGeom>
-          <a:noFill/>
-          <a:ln/>
-        </p:spPr>
-        <p:txBody>
-          <a:bodyPr wrap="square" rtlCol="0" anchor="ctr">
-            <a:spAutoFit/>
-          </a:bodyPr>
-          <a:lstStyle/>
-          <a:p>
-            <a:pPr indent="0" marL="0">
-              <a:buNone/>
-            </a:pPr>
-            <a:r>
-              <a:rPr lang="en-US" sz="1100" dirty="0">
-                <a:solidFill>
-                  <a:srgbClr val="1A1A1A"/>
-                </a:solidFill>
-                <a:latin typeface="Calibri" pitchFamily="34" charset="0"/>
-                <a:ea typeface="Calibri" pitchFamily="34" charset="-122"/>
-                <a:cs typeface="Calibri" pitchFamily="34" charset="-120"/>
-              </a:rPr>
-              <a:t>A brief demonstration before the complications: the words one artist uses far more than everyone else, a signature vocabulary measured against a pop baseline.</a:t>
-            </a:r>
-            <a:endParaRPr lang="en-US" sz="1100" dirty="0"/>
-          </a:p>
-        </p:txBody>
-      </p:sp>
-      <p:sp>
-        <p:nvSpPr>
-          <p:cNvPr id="12" name="Shape 10"/>
-          <p:cNvSpPr/>
-          <p:nvPr/>
-        </p:nvSpPr>
-        <p:spPr>
-          <a:xfrm>
-            <a:off x="640080" y="2916936"/>
-            <a:ext cx="868680" cy="338328"/>
-          </a:xfrm>
-          <a:prstGeom prst="roundRect">
-            <a:avLst>
-              <a:gd name="adj" fmla="val 16216"/>
-            </a:avLst>
-          </a:prstGeom>
-          <a:solidFill>
-            <a:srgbClr val="7A3B2E"/>
-          </a:solidFill>
-          <a:ln/>
-        </p:spPr>
-      </p:sp>
-      <p:sp>
-        <p:nvSpPr>
-          <p:cNvPr id="13" name="Text 11"/>
-          <p:cNvSpPr/>
-          <p:nvPr/>
-        </p:nvSpPr>
-        <p:spPr>
-          <a:xfrm>
-            <a:off x="640080" y="2916936"/>
-            <a:ext cx="868680" cy="338328"/>
-          </a:xfrm>
-          <a:prstGeom prst="rect">
-            <a:avLst/>
-          </a:prstGeom>
-          <a:noFill/>
-          <a:ln/>
-        </p:spPr>
-        <p:txBody>
-          <a:bodyPr wrap="square" rtlCol="0" anchor="ctr"/>
-          <a:lstStyle/>
-          <a:p>
-            <a:pPr algn="ctr" indent="0" marL="0">
-              <a:buNone/>
-            </a:pPr>
-            <a:r>
-              <a:rPr lang="en-US" sz="1100" b="1" dirty="0">
-                <a:solidFill>
-                  <a:srgbClr val="FFFFFF"/>
-                </a:solidFill>
-                <a:latin typeface="Calibri" pitchFamily="34" charset="0"/>
-                <a:ea typeface="Calibri" pitchFamily="34" charset="-122"/>
-                <a:cs typeface="Calibri" pitchFamily="34" charset="-120"/>
-              </a:rPr>
-              <a:t>0:30</a:t>
-            </a:r>
-            <a:endParaRPr lang="en-US" sz="1100" dirty="0"/>
-          </a:p>
-        </p:txBody>
-      </p:sp>
-      <p:sp>
-        <p:nvSpPr>
-          <p:cNvPr id="14" name="Text 12"/>
-          <p:cNvSpPr/>
-          <p:nvPr/>
-        </p:nvSpPr>
-        <p:spPr>
-          <a:xfrm>
-            <a:off x="1691640" y="2898648"/>
-            <a:ext cx="9646920" cy="448056"/>
-          </a:xfrm>
-          <a:prstGeom prst="rect">
-            <a:avLst/>
-          </a:prstGeom>
-          <a:noFill/>
-          <a:ln/>
-        </p:spPr>
-        <p:txBody>
-          <a:bodyPr wrap="square" rtlCol="0" anchor="ctr">
-            <a:spAutoFit/>
-          </a:bodyPr>
-          <a:lstStyle/>
-          <a:p>
-            <a:pPr indent="0" marL="0">
-              <a:buNone/>
-            </a:pPr>
-            <a:r>
-              <a:rPr lang="en-US" sz="1100" dirty="0">
-                <a:solidFill>
-                  <a:srgbClr val="1A1A1A"/>
-                </a:solidFill>
-                <a:latin typeface="Calibri" pitchFamily="34" charset="0"/>
-                <a:ea typeface="Calibri" pitchFamily="34" charset="-122"/>
-                <a:cs typeface="Calibri" pitchFamily="34" charset="-120"/>
-              </a:rPr>
-              <a:t>Hand-built bag-of-words: two authors, highlighters, argue about merging run/running. Counting requires defining.</a:t>
-            </a:r>
-            <a:endParaRPr lang="en-US" sz="1100" dirty="0"/>
-          </a:p>
-        </p:txBody>
-      </p:sp>
-      <p:sp>
-        <p:nvSpPr>
-          <p:cNvPr id="15" name="Shape 13"/>
-          <p:cNvSpPr/>
-          <p:nvPr/>
-        </p:nvSpPr>
-        <p:spPr>
-          <a:xfrm>
-            <a:off x="640080" y="3364992"/>
-            <a:ext cx="868680" cy="338328"/>
-          </a:xfrm>
-          <a:prstGeom prst="roundRect">
-            <a:avLst>
-              <a:gd name="adj" fmla="val 16216"/>
-            </a:avLst>
-          </a:prstGeom>
-          <a:solidFill>
-            <a:srgbClr val="7A3B2E"/>
-          </a:solidFill>
-          <a:ln/>
-        </p:spPr>
-      </p:sp>
-      <p:sp>
-        <p:nvSpPr>
-          <p:cNvPr id="16" name="Text 14"/>
-          <p:cNvSpPr/>
-          <p:nvPr/>
-        </p:nvSpPr>
-        <p:spPr>
-          <a:xfrm>
-            <a:off x="640080" y="3364992"/>
-            <a:ext cx="868680" cy="338328"/>
-          </a:xfrm>
-          <a:prstGeom prst="rect">
-            <a:avLst/>
-          </a:prstGeom>
-          <a:noFill/>
-          <a:ln/>
-        </p:spPr>
-        <p:txBody>
-          <a:bodyPr wrap="square" rtlCol="0" anchor="ctr"/>
-          <a:lstStyle/>
-          <a:p>
-            <a:pPr algn="ctr" indent="0" marL="0">
-              <a:buNone/>
-            </a:pPr>
-            <a:r>
-              <a:rPr lang="en-US" sz="1100" b="1" dirty="0">
-                <a:solidFill>
-                  <a:srgbClr val="FFFFFF"/>
-                </a:solidFill>
-                <a:latin typeface="Calibri" pitchFamily="34" charset="0"/>
-                <a:ea typeface="Calibri" pitchFamily="34" charset="-122"/>
-                <a:cs typeface="Calibri" pitchFamily="34" charset="-120"/>
-              </a:rPr>
-              <a:t>0:55</a:t>
-            </a:r>
-            <a:endParaRPr lang="en-US" sz="1100" dirty="0"/>
-          </a:p>
-        </p:txBody>
-      </p:sp>
-      <p:sp>
-        <p:nvSpPr>
-          <p:cNvPr id="17" name="Text 15"/>
-          <p:cNvSpPr/>
-          <p:nvPr/>
-        </p:nvSpPr>
-        <p:spPr>
-          <a:xfrm>
-            <a:off x="1691640" y="3346704"/>
-            <a:ext cx="9646920" cy="448056"/>
-          </a:xfrm>
-          <a:prstGeom prst="rect">
-            <a:avLst/>
-          </a:prstGeom>
-          <a:noFill/>
-          <a:ln/>
-        </p:spPr>
-        <p:txBody>
-          <a:bodyPr wrap="square" rtlCol="0" anchor="ctr">
-            <a:spAutoFit/>
-          </a:bodyPr>
-          <a:lstStyle/>
-          <a:p>
-            <a:pPr indent="0" marL="0">
-              <a:buNone/>
-            </a:pPr>
-            <a:r>
-              <a:rPr lang="en-US" sz="1100" dirty="0">
-                <a:solidFill>
-                  <a:srgbClr val="1A1A1A"/>
-                </a:solidFill>
-                <a:latin typeface="Calibri" pitchFamily="34" charset="0"/>
-                <a:ea typeface="Calibri" pitchFamily="34" charset="-122"/>
-                <a:cs typeface="Calibri" pitchFamily="34" charset="-120"/>
-              </a:rPr>
-              <a:t>What counts as a word? Paste a sentence into two tokenizer playgrounds and watch it shatter differently. Models see tokens, not words.</a:t>
-            </a:r>
-            <a:endParaRPr lang="en-US" sz="1100" dirty="0"/>
-          </a:p>
-        </p:txBody>
-      </p:sp>
-      <p:sp>
-        <p:nvSpPr>
-          <p:cNvPr id="18" name="Shape 16"/>
-          <p:cNvSpPr/>
-          <p:nvPr/>
-        </p:nvSpPr>
-        <p:spPr>
-          <a:xfrm>
-            <a:off x="640080" y="3813048"/>
-            <a:ext cx="868680" cy="338328"/>
-          </a:xfrm>
-          <a:prstGeom prst="roundRect">
-            <a:avLst>
-              <a:gd name="adj" fmla="val 16216"/>
-            </a:avLst>
-          </a:prstGeom>
-          <a:solidFill>
-            <a:srgbClr val="7A3B2E"/>
-          </a:solidFill>
-          <a:ln/>
-        </p:spPr>
-      </p:sp>
-      <p:sp>
-        <p:nvSpPr>
-          <p:cNvPr id="19" name="Text 17"/>
-          <p:cNvSpPr/>
-          <p:nvPr/>
-        </p:nvSpPr>
-        <p:spPr>
-          <a:xfrm>
-            <a:off x="640080" y="3813048"/>
-            <a:ext cx="868680" cy="338328"/>
-          </a:xfrm>
-          <a:prstGeom prst="rect">
-            <a:avLst/>
-          </a:prstGeom>
-          <a:noFill/>
-          <a:ln/>
-        </p:spPr>
-        <p:txBody>
-          <a:bodyPr wrap="square" rtlCol="0" anchor="ctr"/>
-          <a:lstStyle/>
-          <a:p>
-            <a:pPr algn="ctr" indent="0" marL="0">
-              <a:buNone/>
-            </a:pPr>
-            <a:r>
-              <a:rPr lang="en-US" sz="1100" b="1" dirty="0">
-                <a:solidFill>
-                  <a:srgbClr val="FFFFFF"/>
-                </a:solidFill>
-                <a:latin typeface="Calibri" pitchFamily="34" charset="0"/>
-                <a:ea typeface="Calibri" pitchFamily="34" charset="-122"/>
-                <a:cs typeface="Calibri" pitchFamily="34" charset="-120"/>
-              </a:rPr>
-              <a:t>1:05</a:t>
-            </a:r>
-            <a:endParaRPr lang="en-US" sz="1100" dirty="0"/>
-          </a:p>
-        </p:txBody>
-      </p:sp>
-      <p:sp>
-        <p:nvSpPr>
-          <p:cNvPr id="20" name="Text 18"/>
-          <p:cNvSpPr/>
-          <p:nvPr/>
-        </p:nvSpPr>
-        <p:spPr>
-          <a:xfrm>
-            <a:off x="1691640" y="3794760"/>
-            <a:ext cx="9646920" cy="448056"/>
-          </a:xfrm>
-          <a:prstGeom prst="rect">
-            <a:avLst/>
-          </a:prstGeom>
-          <a:noFill/>
-          <a:ln/>
-        </p:spPr>
-        <p:txBody>
-          <a:bodyPr wrap="square" rtlCol="0" anchor="ctr">
-            <a:spAutoFit/>
-          </a:bodyPr>
-          <a:lstStyle/>
-          <a:p>
-            <a:pPr indent="0" marL="0">
-              <a:buNone/>
-            </a:pPr>
-            <a:r>
-              <a:rPr lang="en-US" sz="1100" dirty="0">
-                <a:solidFill>
-                  <a:srgbClr val="1A1A1A"/>
-                </a:solidFill>
-                <a:latin typeface="Calibri" pitchFamily="34" charset="0"/>
-                <a:ea typeface="Calibri" pitchFamily="34" charset="-122"/>
-                <a:cs typeface="Calibri" pitchFamily="34" charset="-120"/>
-              </a:rPr>
-              <a:t>Break</a:t>
-            </a:r>
-            <a:endParaRPr lang="en-US" sz="1100" dirty="0"/>
-          </a:p>
-        </p:txBody>
-      </p:sp>
-      <p:sp>
-        <p:nvSpPr>
-          <p:cNvPr id="21" name="Shape 19"/>
-          <p:cNvSpPr/>
-          <p:nvPr/>
-        </p:nvSpPr>
-        <p:spPr>
-          <a:xfrm>
-            <a:off x="640080" y="4261104"/>
-            <a:ext cx="868680" cy="338328"/>
-          </a:xfrm>
-          <a:prstGeom prst="roundRect">
-            <a:avLst>
-              <a:gd name="adj" fmla="val 16216"/>
-            </a:avLst>
-          </a:prstGeom>
-          <a:solidFill>
-            <a:srgbClr val="7A3B2E"/>
-          </a:solidFill>
-          <a:ln/>
-        </p:spPr>
-      </p:sp>
-      <p:sp>
-        <p:nvSpPr>
-          <p:cNvPr id="22" name="Text 20"/>
-          <p:cNvSpPr/>
-          <p:nvPr/>
-        </p:nvSpPr>
-        <p:spPr>
-          <a:xfrm>
-            <a:off x="640080" y="4261104"/>
-            <a:ext cx="868680" cy="338328"/>
-          </a:xfrm>
-          <a:prstGeom prst="rect">
-            <a:avLst/>
-          </a:prstGeom>
-          <a:noFill/>
-          <a:ln/>
-        </p:spPr>
-        <p:txBody>
-          <a:bodyPr wrap="square" rtlCol="0" anchor="ctr"/>
-          <a:lstStyle/>
-          <a:p>
-            <a:pPr algn="ctr" indent="0" marL="0">
-              <a:buNone/>
-            </a:pPr>
-            <a:r>
-              <a:rPr lang="en-US" sz="1100" b="1" dirty="0">
-                <a:solidFill>
-                  <a:srgbClr val="FFFFFF"/>
-                </a:solidFill>
-                <a:latin typeface="Calibri" pitchFamily="34" charset="0"/>
-                <a:ea typeface="Calibri" pitchFamily="34" charset="-122"/>
-                <a:cs typeface="Calibri" pitchFamily="34" charset="-120"/>
-              </a:rPr>
-              <a:t>1:15</a:t>
-            </a:r>
-            <a:endParaRPr lang="en-US" sz="1100" dirty="0"/>
-          </a:p>
-        </p:txBody>
-      </p:sp>
-      <p:sp>
-        <p:nvSpPr>
-          <p:cNvPr id="23" name="Text 21"/>
-          <p:cNvSpPr/>
-          <p:nvPr/>
-        </p:nvSpPr>
-        <p:spPr>
-          <a:xfrm>
-            <a:off x="1691640" y="4242816"/>
-            <a:ext cx="9646920" cy="448056"/>
-          </a:xfrm>
-          <a:prstGeom prst="rect">
-            <a:avLst/>
-          </a:prstGeom>
-          <a:noFill/>
-          <a:ln/>
-        </p:spPr>
-        <p:txBody>
-          <a:bodyPr wrap="square" rtlCol="0" anchor="ctr">
-            <a:spAutoFit/>
-          </a:bodyPr>
-          <a:lstStyle/>
-          <a:p>
-            <a:pPr indent="0" marL="0">
-              <a:buNone/>
-            </a:pPr>
-            <a:r>
-              <a:rPr lang="en-US" sz="1100" dirty="0">
-                <a:solidFill>
-                  <a:srgbClr val="1A1A1A"/>
-                </a:solidFill>
-                <a:latin typeface="Calibri" pitchFamily="34" charset="0"/>
-                <a:ea typeface="Calibri" pitchFamily="34" charset="-122"/>
-                <a:cs typeface="Calibri" pitchFamily="34" charset="-120"/>
-              </a:rPr>
-              <a:t>tf-idf: the AI scales your hand count; stop-words dominate, which motivates "common here, rare overall."</a:t>
-            </a:r>
-            <a:endParaRPr lang="en-US" sz="1100" dirty="0"/>
-          </a:p>
-        </p:txBody>
-      </p:sp>
-      <p:sp>
-        <p:nvSpPr>
-          <p:cNvPr id="24" name="Shape 22"/>
-          <p:cNvSpPr/>
-          <p:nvPr/>
-        </p:nvSpPr>
-        <p:spPr>
-          <a:xfrm>
-            <a:off x="640080" y="4709160"/>
-            <a:ext cx="868680" cy="338328"/>
-          </a:xfrm>
-          <a:prstGeom prst="roundRect">
-            <a:avLst>
-              <a:gd name="adj" fmla="val 16216"/>
-            </a:avLst>
-          </a:prstGeom>
-          <a:solidFill>
-            <a:srgbClr val="7A3B2E"/>
-          </a:solidFill>
-          <a:ln/>
-        </p:spPr>
-      </p:sp>
-      <p:sp>
-        <p:nvSpPr>
-          <p:cNvPr id="25" name="Text 23"/>
-          <p:cNvSpPr/>
-          <p:nvPr/>
-        </p:nvSpPr>
-        <p:spPr>
-          <a:xfrm>
-            <a:off x="640080" y="4709160"/>
-            <a:ext cx="868680" cy="338328"/>
-          </a:xfrm>
-          <a:prstGeom prst="rect">
-            <a:avLst/>
-          </a:prstGeom>
-          <a:noFill/>
-          <a:ln/>
-        </p:spPr>
-        <p:txBody>
-          <a:bodyPr wrap="square" rtlCol="0" anchor="ctr"/>
-          <a:lstStyle/>
-          <a:p>
-            <a:pPr algn="ctr" indent="0" marL="0">
-              <a:buNone/>
-            </a:pPr>
-            <a:r>
-              <a:rPr lang="en-US" sz="1100" b="1" dirty="0">
-                <a:solidFill>
-                  <a:srgbClr val="FFFFFF"/>
-                </a:solidFill>
-                <a:latin typeface="Calibri" pitchFamily="34" charset="0"/>
-                <a:ea typeface="Calibri" pitchFamily="34" charset="-122"/>
-                <a:cs typeface="Calibri" pitchFamily="34" charset="-120"/>
-              </a:rPr>
-              <a:t>1:30</a:t>
-            </a:r>
-            <a:endParaRPr lang="en-US" sz="1100" dirty="0"/>
-          </a:p>
-        </p:txBody>
-      </p:sp>
-      <p:sp>
-        <p:nvSpPr>
-          <p:cNvPr id="26" name="Text 24"/>
-          <p:cNvSpPr/>
-          <p:nvPr/>
-        </p:nvSpPr>
-        <p:spPr>
-          <a:xfrm>
-            <a:off x="1691640" y="4690872"/>
-            <a:ext cx="9646920" cy="448056"/>
-          </a:xfrm>
-          <a:prstGeom prst="rect">
-            <a:avLst/>
-          </a:prstGeom>
-          <a:noFill/>
-          <a:ln/>
-        </p:spPr>
-        <p:txBody>
-          <a:bodyPr wrap="square" rtlCol="0" anchor="ctr">
-            <a:spAutoFit/>
-          </a:bodyPr>
-          <a:lstStyle/>
-          <a:p>
-            <a:pPr indent="0" marL="0">
-              <a:buNone/>
-            </a:pPr>
-            <a:r>
-              <a:rPr lang="en-US" sz="1100" dirty="0">
-                <a:solidFill>
-                  <a:srgbClr val="1A1A1A"/>
-                </a:solidFill>
-                <a:latin typeface="Calibri" pitchFamily="34" charset="0"/>
-                <a:ea typeface="Calibri" pitchFamily="34" charset="-122"/>
-                <a:cs typeface="Calibri" pitchFamily="34" charset="-120"/>
-              </a:rPr>
-              <a:t>Keyness, the She Giggles, He Gallops move: a log-odds ratio between two corpora finds the words one voice uses far more than a baseline, exactly the method behind Week 1's featured piece. The corpus pair is a choice too: artist vs. pop, lyrics vs. subreddit vs. novel.</a:t>
-            </a:r>
-            <a:endParaRPr lang="en-US" sz="1100" dirty="0"/>
-          </a:p>
-        </p:txBody>
-      </p:sp>
-      <p:sp>
-        <p:nvSpPr>
-          <p:cNvPr id="27" name="Shape 25"/>
-          <p:cNvSpPr/>
-          <p:nvPr/>
-        </p:nvSpPr>
-        <p:spPr>
-          <a:xfrm>
-            <a:off x="640080" y="5157216"/>
-            <a:ext cx="868680" cy="338328"/>
-          </a:xfrm>
-          <a:prstGeom prst="roundRect">
-            <a:avLst>
-              <a:gd name="adj" fmla="val 16216"/>
-            </a:avLst>
-          </a:prstGeom>
-          <a:solidFill>
-            <a:srgbClr val="7A3B2E"/>
-          </a:solidFill>
-          <a:ln/>
-        </p:spPr>
-      </p:sp>
-      <p:sp>
-        <p:nvSpPr>
-          <p:cNvPr id="28" name="Text 26"/>
-          <p:cNvSpPr/>
-          <p:nvPr/>
-        </p:nvSpPr>
-        <p:spPr>
-          <a:xfrm>
-            <a:off x="640080" y="5157216"/>
-            <a:ext cx="868680" cy="338328"/>
-          </a:xfrm>
-          <a:prstGeom prst="rect">
-            <a:avLst/>
-          </a:prstGeom>
-          <a:noFill/>
-          <a:ln/>
-        </p:spPr>
-        <p:txBody>
-          <a:bodyPr wrap="square" rtlCol="0" anchor="ctr"/>
-          <a:lstStyle/>
-          <a:p>
-            <a:pPr algn="ctr" indent="0" marL="0">
-              <a:buNone/>
-            </a:pPr>
-            <a:r>
-              <a:rPr lang="en-US" sz="1100" b="1" dirty="0">
-                <a:solidFill>
-                  <a:srgbClr val="FFFFFF"/>
-                </a:solidFill>
-                <a:latin typeface="Calibri" pitchFamily="34" charset="0"/>
-                <a:ea typeface="Calibri" pitchFamily="34" charset="-122"/>
-                <a:cs typeface="Calibri" pitchFamily="34" charset="-120"/>
-              </a:rPr>
-              <a:t>1:42</a:t>
-            </a:r>
-            <a:endParaRPr lang="en-US" sz="1100" dirty="0"/>
-          </a:p>
-        </p:txBody>
-      </p:sp>
-      <p:sp>
-        <p:nvSpPr>
-          <p:cNvPr id="29" name="Text 27"/>
-          <p:cNvSpPr/>
-          <p:nvPr/>
-        </p:nvSpPr>
-        <p:spPr>
-          <a:xfrm>
-            <a:off x="1691640" y="5138928"/>
-            <a:ext cx="9646920" cy="448056"/>
-          </a:xfrm>
-          <a:prstGeom prst="rect">
-            <a:avLst/>
-          </a:prstGeom>
-          <a:noFill/>
-          <a:ln/>
-        </p:spPr>
-        <p:txBody>
-          <a:bodyPr wrap="square" rtlCol="0" anchor="ctr">
-            <a:spAutoFit/>
-          </a:bodyPr>
-          <a:lstStyle/>
-          <a:p>
-            <a:pPr indent="0" marL="0">
-              <a:buNone/>
-            </a:pPr>
-            <a:r>
-              <a:rPr lang="en-US" sz="1100" dirty="0">
-                <a:solidFill>
-                  <a:srgbClr val="1A1A1A"/>
-                </a:solidFill>
-                <a:latin typeface="Calibri" pitchFamily="34" charset="0"/>
-                <a:ea typeface="Calibri" pitchFamily="34" charset="-122"/>
-                <a:cs typeface="Calibri" pitchFamily="34" charset="-120"/>
-              </a:rPr>
-              <a:t>Is the difference real? The shuffle test: shuffle the labels and recount, one thousand times. If chance alone frequently produces a gap this large, the difference should not be trusted; if it almost never does, the finding stands. A difference can be real and still small.</a:t>
-            </a:r>
-            <a:endParaRPr lang="en-US" sz="1100" dirty="0"/>
-          </a:p>
-        </p:txBody>
-      </p:sp>
-      <p:sp>
-        <p:nvSpPr>
-          <p:cNvPr id="30" name="Shape 28"/>
-          <p:cNvSpPr/>
-          <p:nvPr/>
-        </p:nvSpPr>
-        <p:spPr>
-          <a:xfrm>
-            <a:off x="640080" y="5605272"/>
-            <a:ext cx="868680" cy="338328"/>
-          </a:xfrm>
-          <a:prstGeom prst="roundRect">
-            <a:avLst>
-              <a:gd name="adj" fmla="val 16216"/>
-            </a:avLst>
-          </a:prstGeom>
-          <a:solidFill>
-            <a:srgbClr val="7A3B2E"/>
-          </a:solidFill>
-          <a:ln/>
-        </p:spPr>
-      </p:sp>
-      <p:sp>
-        <p:nvSpPr>
-          <p:cNvPr id="31" name="Text 29"/>
-          <p:cNvSpPr/>
-          <p:nvPr/>
-        </p:nvSpPr>
-        <p:spPr>
-          <a:xfrm>
-            <a:off x="640080" y="5605272"/>
-            <a:ext cx="868680" cy="338328"/>
-          </a:xfrm>
-          <a:prstGeom prst="rect">
-            <a:avLst/>
-          </a:prstGeom>
-          <a:noFill/>
-          <a:ln/>
-        </p:spPr>
-        <p:txBody>
-          <a:bodyPr wrap="square" rtlCol="0" anchor="ctr"/>
-          <a:lstStyle/>
-          <a:p>
-            <a:pPr algn="ctr" indent="0" marL="0">
-              <a:buNone/>
-            </a:pPr>
-            <a:r>
-              <a:rPr lang="en-US" sz="1100" b="1" dirty="0">
-                <a:solidFill>
-                  <a:srgbClr val="FFFFFF"/>
-                </a:solidFill>
-                <a:latin typeface="Calibri" pitchFamily="34" charset="0"/>
-                <a:ea typeface="Calibri" pitchFamily="34" charset="-122"/>
-                <a:cs typeface="Calibri" pitchFamily="34" charset="-120"/>
-              </a:rPr>
-              <a:t>1:50</a:t>
-            </a:r>
-            <a:endParaRPr lang="en-US" sz="1100" dirty="0"/>
-          </a:p>
-        </p:txBody>
-      </p:sp>
-      <p:sp>
-        <p:nvSpPr>
-          <p:cNvPr id="32" name="Text 30"/>
-          <p:cNvSpPr/>
-          <p:nvPr/>
-        </p:nvSpPr>
-        <p:spPr>
-          <a:xfrm>
-            <a:off x="1691640" y="5586984"/>
-            <a:ext cx="9646920" cy="448056"/>
-          </a:xfrm>
-          <a:prstGeom prst="rect">
-            <a:avLst/>
-          </a:prstGeom>
-          <a:noFill/>
-          <a:ln/>
-        </p:spPr>
-        <p:txBody>
-          <a:bodyPr wrap="square" rtlCol="0" anchor="ctr">
-            <a:spAutoFit/>
-          </a:bodyPr>
-          <a:lstStyle/>
-          <a:p>
-            <a:pPr indent="0" marL="0">
-              <a:buNone/>
-            </a:pPr>
-            <a:r>
-              <a:rPr lang="en-US" sz="1100" dirty="0">
-                <a:solidFill>
-                  <a:srgbClr val="1A1A1A"/>
-                </a:solidFill>
-                <a:latin typeface="Calibri" pitchFamily="34" charset="0"/>
-                <a:ea typeface="Calibri" pitchFamily="34" charset="-122"/>
-                <a:cs typeface="Calibri" pitchFamily="34" charset="-120"/>
-              </a:rPr>
-              <a:t>Gemini-free check and check-out.</a:t>
-            </a:r>
-            <a:endParaRPr lang="en-US" sz="1100" dirty="0"/>
+              <a:t>Interrogate the study, debate it, or critique each other's work.</a:t>
+            </a:r>
+            <a:endParaRPr lang="en-US" sz="1500" dirty="0"/>
           </a:p>
         </p:txBody>
       </p:sp>

--- a/slides/pptx/week-02.pptx
+++ b/slides/pptx/week-02.pptx
@@ -17,10 +17,9 @@
     <p:sldId id="265" r:id="rId11"/>
     <p:sldId id="266" r:id="rId12"/>
     <p:sldId id="267" r:id="rId13"/>
-    <p:sldId id="268" r:id="rId14"/>
   </p:sldIdLst>
   <p:notesMasterIdLst>
-    <p:notesMasterId r:id="rId15"/>
+    <p:notesMasterId r:id="rId14"/>
   </p:notesMasterIdLst>
   <p:sldSz cx="12191695" cy="6858000"/>
   <p:notesSz cx="6858000" cy="12191695"/>
@@ -820,94 +819,6 @@
 </p:notes>
 </file>
 
-<file path=ppt/notesSlides/notesSlide13.xml><?xml version="1.0" encoding="utf-8"?>
-<p:notes xmlns:a="http://schemas.openxmlformats.org/drawingml/2006/main" xmlns:r="http://schemas.openxmlformats.org/officeDocument/2006/relationships" xmlns:p="http://schemas.openxmlformats.org/presentationml/2006/main">
-  <p:cSld>
-    <p:spTree>
-      <p:nvGrpSpPr>
-        <p:cNvPr id="1" name=""/>
-        <p:cNvGrpSpPr/>
-        <p:nvPr/>
-      </p:nvGrpSpPr>
-      <p:grpSpPr>
-        <a:xfrm>
-          <a:off x="0" y="0"/>
-          <a:ext cx="0" cy="0"/>
-          <a:chOff x="0" y="0"/>
-          <a:chExt cx="0" cy="0"/>
-        </a:xfrm>
-      </p:grpSpPr>
-      <p:sp>
-        <p:nvSpPr>
-          <p:cNvPr id="2" name="Slide Image Placeholder 1"/>
-          <p:cNvSpPr>
-            <a:spLocks noGrp="1" noRot="1" noChangeAspect="1"/>
-          </p:cNvSpPr>
-          <p:nvPr>
-            <p:ph type="sldImg"/>
-          </p:nvPr>
-        </p:nvSpPr>
-        <p:spPr/>
-      </p:sp>
-      <p:sp>
-        <p:nvSpPr>
-          <p:cNvPr id="3" name="Notes Placeholder 2"/>
-          <p:cNvSpPr>
-            <a:spLocks noGrp="1"/>
-          </p:cNvSpPr>
-          <p:nvPr>
-            <p:ph type="body" idx="1"/>
-          </p:nvPr>
-        </p:nvSpPr>
-        <p:spPr/>
-        <p:txBody>
-          <a:bodyPr/>
-          <a:lstStyle/>
-          <a:p>
-            <a:r>
-              <a:rPr lang="en-US" dirty="0"/>
-              <a:t/>
-            </a:r>
-            <a:endParaRPr lang="en-US" dirty="0"/>
-          </a:p>
-        </p:txBody>
-      </p:sp>
-      <p:sp>
-        <p:nvSpPr>
-          <p:cNvPr id="4" name="Slide Number Placeholder 3"/>
-          <p:cNvSpPr>
-            <a:spLocks noGrp="1"/>
-          </p:cNvSpPr>
-          <p:nvPr>
-            <p:ph type="sldNum" sz="quarter" idx="10"/>
-          </p:nvPr>
-        </p:nvSpPr>
-        <p:spPr/>
-        <p:txBody>
-          <a:bodyPr/>
-          <a:lstStyle/>
-          <a:p>
-            <a:fld id="{F7021451-1387-4CA6-816F-3879F97B5CBC}" type="slidenum">
-              <a:rPr lang="en-US"/>
-              <a:t>13</a:t>
-            </a:fld>
-            <a:endParaRPr lang="en-US"/>
-          </a:p>
-        </p:txBody>
-      </p:sp>
-    </p:spTree>
-    <p:extLst>
-      <p:ext uri="{BB962C8B-B14F-4D97-AF65-F5344CB8AC3E}">
-        <p14:creationId xmlns:p14="http://schemas.microsoft.com/office/powerpoint/2010/main" val="1024086991"/>
-      </p:ext>
-    </p:extLst>
-  </p:cSld>
-  <p:clrMapOvr>
-    <a:masterClrMapping/>
-  </p:clrMapOvr>
-</p:notes>
-</file>
-
 <file path=ppt/notesSlides/notesSlide2.xml><?xml version="1.0" encoding="utf-8"?>
 <p:notes xmlns:a="http://schemas.openxmlformats.org/drawingml/2006/main" xmlns:r="http://schemas.openxmlformats.org/officeDocument/2006/relationships" xmlns:p="http://schemas.openxmlformats.org/presentationml/2006/main">
   <p:cSld>
@@ -2527,7 +2438,7 @@
                 <a:ea typeface="Cambria" pitchFamily="34" charset="-122"/>
                 <a:cs typeface="Cambria" pitchFamily="34" charset="-120"/>
               </a:rPr>
-              <a:t>The session</a:t>
+              <a:t>Reading &amp; homework</a:t>
             </a:r>
             <a:endParaRPr lang="en-US" sz="3000" dirty="0"/>
           </a:p>
@@ -2541,13 +2452,11 @@
         </p:nvSpPr>
         <p:spPr>
           <a:xfrm>
-            <a:off x="640080" y="1572768"/>
-            <a:ext cx="868680" cy="338328"/>
-          </a:xfrm>
-          <a:prstGeom prst="roundRect">
-            <a:avLst>
-              <a:gd name="adj" fmla="val 16216"/>
-            </a:avLst>
+            <a:off x="640080" y="1673352"/>
+            <a:ext cx="219456" cy="219456"/>
+          </a:xfrm>
+          <a:prstGeom prst="ellipse">
+            <a:avLst/>
           </a:prstGeom>
           <a:solidFill>
             <a:srgbClr val="7A3B2E"/>
@@ -2563,8 +2472,8 @@
         </p:nvSpPr>
         <p:spPr>
           <a:xfrm>
-            <a:off x="640080" y="1572768"/>
-            <a:ext cx="868680" cy="338328"/>
+            <a:off x="1051560" y="1600200"/>
+            <a:ext cx="10424160" cy="365760"/>
           </a:xfrm>
           <a:prstGeom prst="rect">
             <a:avLst/>
@@ -2576,21 +2485,21 @@
           <a:bodyPr wrap="square" rtlCol="0" anchor="ctr"/>
           <a:lstStyle/>
           <a:p>
-            <a:pPr algn="ctr" indent="0" marL="0">
-              <a:buNone/>
-            </a:pPr>
-            <a:r>
-              <a:rPr lang="en-US" sz="1100" b="1" dirty="0">
-                <a:solidFill>
-                  <a:srgbClr val="FFFFFF"/>
+            <a:pPr indent="0" marL="0">
+              <a:buNone/>
+            </a:pPr>
+            <a:r>
+              <a:rPr lang="en-US" sz="1500" b="1" dirty="0">
+                <a:solidFill>
+                  <a:srgbClr val="7A3B2E"/>
                 </a:solidFill>
                 <a:latin typeface="Calibri" pitchFamily="34" charset="0"/>
                 <a:ea typeface="Calibri" pitchFamily="34" charset="-122"/>
                 <a:cs typeface="Calibri" pitchFamily="34" charset="-120"/>
               </a:rPr>
-              <a:t>0:00</a:t>
-            </a:r>
-            <a:endParaRPr lang="en-US" sz="1100" dirty="0"/>
+              <a:t>Reading</a:t>
+            </a:r>
+            <a:endParaRPr lang="en-US" sz="1500" dirty="0"/>
           </a:p>
         </p:txBody>
       </p:sp>
@@ -2602,17 +2511,17 @@
         </p:nvSpPr>
         <p:spPr>
           <a:xfrm>
-            <a:off x="1691640" y="1554480"/>
-            <a:ext cx="9646920" cy="448056"/>
-          </a:xfrm>
-          <a:prstGeom prst="rect">
-            <a:avLst/>
-          </a:prstGeom>
-          <a:noFill/>
-          <a:ln/>
-        </p:spPr>
-        <p:txBody>
-          <a:bodyPr wrap="square" rtlCol="0" anchor="ctr">
+            <a:off x="1051560" y="1984248"/>
+            <a:ext cx="10424160" cy="731520"/>
+          </a:xfrm>
+          <a:prstGeom prst="rect">
+            <a:avLst/>
+          </a:prstGeom>
+          <a:noFill/>
+          <a:ln/>
+        </p:spPr>
+        <p:txBody>
+          <a:bodyPr wrap="square" rtlCol="0" anchor="t">
             <a:spAutoFit/>
           </a:bodyPr>
           <a:lstStyle/>
@@ -2621,7 +2530,7 @@
               <a:buNone/>
             </a:pPr>
             <a:r>
-              <a:rPr lang="en-US" sz="1100" dirty="0">
+              <a:rPr lang="en-US" sz="1400" dirty="0">
                 <a:solidFill>
                   <a:srgbClr val="1A1A1A"/>
                 </a:solidFill>
@@ -2629,9 +2538,9 @@
                 <a:ea typeface="Calibri" pitchFamily="34" charset="-122"/>
                 <a:cs typeface="Calibri" pitchFamily="34" charset="-120"/>
               </a:rPr>
-              <a:t>Warm-up retrieval.</a:t>
-            </a:r>
-            <a:endParaRPr lang="en-US" sz="1100" dirty="0"/>
+              <a:t>Wolfram, What Is ChatGPT Doing (opening sections only)</a:t>
+            </a:r>
+            <a:endParaRPr lang="en-US" sz="1400" dirty="0"/>
           </a:p>
         </p:txBody>
       </p:sp>
@@ -2643,16 +2552,14 @@
         </p:nvSpPr>
         <p:spPr>
           <a:xfrm>
-            <a:off x="640080" y="2020824"/>
-            <a:ext cx="868680" cy="338328"/>
-          </a:xfrm>
-          <a:prstGeom prst="roundRect">
-            <a:avLst>
-              <a:gd name="adj" fmla="val 16216"/>
-            </a:avLst>
-          </a:prstGeom>
-          <a:solidFill>
-            <a:srgbClr val="7A3B2E"/>
+            <a:off x="640080" y="2633472"/>
+            <a:ext cx="219456" cy="219456"/>
+          </a:xfrm>
+          <a:prstGeom prst="ellipse">
+            <a:avLst/>
+          </a:prstGeom>
+          <a:solidFill>
+            <a:srgbClr val="3F6F5F"/>
           </a:solidFill>
           <a:ln/>
         </p:spPr>
@@ -2665,8 +2572,8 @@
         </p:nvSpPr>
         <p:spPr>
           <a:xfrm>
-            <a:off x="640080" y="2020824"/>
-            <a:ext cx="868680" cy="338328"/>
+            <a:off x="1051560" y="2560320"/>
+            <a:ext cx="10424160" cy="365760"/>
           </a:xfrm>
           <a:prstGeom prst="rect">
             <a:avLst/>
@@ -2678,21 +2585,21 @@
           <a:bodyPr wrap="square" rtlCol="0" anchor="ctr"/>
           <a:lstStyle/>
           <a:p>
-            <a:pPr algn="ctr" indent="0" marL="0">
-              <a:buNone/>
-            </a:pPr>
-            <a:r>
-              <a:rPr lang="en-US" sz="1100" b="1" dirty="0">
-                <a:solidFill>
-                  <a:srgbClr val="FFFFFF"/>
+            <a:pPr indent="0" marL="0">
+              <a:buNone/>
+            </a:pPr>
+            <a:r>
+              <a:rPr lang="en-US" sz="1500" b="1" dirty="0">
+                <a:solidFill>
+                  <a:srgbClr val="3F6F5F"/>
                 </a:solidFill>
                 <a:latin typeface="Calibri" pitchFamily="34" charset="0"/>
                 <a:ea typeface="Calibri" pitchFamily="34" charset="-122"/>
                 <a:cs typeface="Calibri" pitchFamily="34" charset="-120"/>
               </a:rPr>
-              <a:t>0:05</a:t>
-            </a:r>
-            <a:endParaRPr lang="en-US" sz="1100" dirty="0"/>
+              <a:t>Supplement</a:t>
+            </a:r>
+            <a:endParaRPr lang="en-US" sz="1500" dirty="0"/>
           </a:p>
         </p:txBody>
       </p:sp>
@@ -2704,17 +2611,17 @@
         </p:nvSpPr>
         <p:spPr>
           <a:xfrm>
-            <a:off x="1691640" y="2002536"/>
-            <a:ext cx="9646920" cy="448056"/>
-          </a:xfrm>
-          <a:prstGeom prst="rect">
-            <a:avLst/>
-          </a:prstGeom>
-          <a:noFill/>
-          <a:ln/>
-        </p:spPr>
-        <p:txBody>
-          <a:bodyPr wrap="square" rtlCol="0" anchor="ctr">
+            <a:off x="1051560" y="2944368"/>
+            <a:ext cx="10424160" cy="731520"/>
+          </a:xfrm>
+          <a:prstGeom prst="rect">
+            <a:avLst/>
+          </a:prstGeom>
+          <a:noFill/>
+          <a:ln/>
+        </p:spPr>
+        <p:txBody>
+          <a:bodyPr wrap="square" rtlCol="0" anchor="t">
             <a:spAutoFit/>
           </a:bodyPr>
           <a:lstStyle/>
@@ -2723,7 +2630,7 @@
               <a:buNone/>
             </a:pPr>
             <a:r>
-              <a:rPr lang="en-US" sz="1100" dirty="0">
+              <a:rPr lang="en-US" sz="1400" dirty="0">
                 <a:solidFill>
                   <a:srgbClr val="1A1A1A"/>
                 </a:solidFill>
@@ -2731,9 +2638,9 @@
                 <a:ea typeface="Calibri" pitchFamily="34" charset="-122"/>
                 <a:cs typeface="Calibri" pitchFamily="34" charset="-120"/>
               </a:rPr>
-              <a:t>The trial: claim, objection, re-run-without-fiction rebuttal, "interpret with care." One named choice is the chart: the hockey-stick shape depends on its y-axis and smoothing.</a:t>
-            </a:r>
-            <a:endParaRPr lang="en-US" sz="1100" dirty="0"/>
+              <a:t>Zipf's law, the straight line in every text</a:t>
+            </a:r>
+            <a:endParaRPr lang="en-US" sz="1400" dirty="0"/>
           </a:p>
         </p:txBody>
       </p:sp>
@@ -2745,16 +2652,14 @@
         </p:nvSpPr>
         <p:spPr>
           <a:xfrm>
-            <a:off x="640080" y="2468880"/>
-            <a:ext cx="868680" cy="338328"/>
-          </a:xfrm>
-          <a:prstGeom prst="roundRect">
-            <a:avLst>
-              <a:gd name="adj" fmla="val 16216"/>
-            </a:avLst>
-          </a:prstGeom>
-          <a:solidFill>
-            <a:srgbClr val="7A3B2E"/>
+            <a:off x="640080" y="3593592"/>
+            <a:ext cx="219456" cy="219456"/>
+          </a:xfrm>
+          <a:prstGeom prst="ellipse">
+            <a:avLst/>
+          </a:prstGeom>
+          <a:solidFill>
+            <a:srgbClr val="B9852F"/>
           </a:solidFill>
           <a:ln/>
         </p:spPr>
@@ -2767,8 +2672,8 @@
         </p:nvSpPr>
         <p:spPr>
           <a:xfrm>
-            <a:off x="640080" y="2468880"/>
-            <a:ext cx="868680" cy="338328"/>
+            <a:off x="1051560" y="3520440"/>
+            <a:ext cx="10424160" cy="365760"/>
           </a:xfrm>
           <a:prstGeom prst="rect">
             <a:avLst/>
@@ -2780,21 +2685,21 @@
           <a:bodyPr wrap="square" rtlCol="0" anchor="ctr"/>
           <a:lstStyle/>
           <a:p>
-            <a:pPr algn="ctr" indent="0" marL="0">
-              <a:buNone/>
-            </a:pPr>
-            <a:r>
-              <a:rPr lang="en-US" sz="1100" b="1" dirty="0">
-                <a:solidFill>
-                  <a:srgbClr val="FFFFFF"/>
+            <a:pPr indent="0" marL="0">
+              <a:buNone/>
+            </a:pPr>
+            <a:r>
+              <a:rPr lang="en-US" sz="1500" b="1" dirty="0">
+                <a:solidFill>
+                  <a:srgbClr val="B9852F"/>
                 </a:solidFill>
                 <a:latin typeface="Calibri" pitchFamily="34" charset="0"/>
                 <a:ea typeface="Calibri" pitchFamily="34" charset="-122"/>
                 <a:cs typeface="Calibri" pitchFamily="34" charset="-120"/>
               </a:rPr>
-              <a:t>0:25</a:t>
-            </a:r>
-            <a:endParaRPr lang="en-US" sz="1100" dirty="0"/>
+              <a:t>Deeper (optional)</a:t>
+            </a:r>
+            <a:endParaRPr lang="en-US" sz="1500" dirty="0"/>
           </a:p>
         </p:txBody>
       </p:sp>
@@ -2806,17 +2711,17 @@
         </p:nvSpPr>
         <p:spPr>
           <a:xfrm>
-            <a:off x="1691640" y="2450592"/>
-            <a:ext cx="9646920" cy="448056"/>
-          </a:xfrm>
-          <a:prstGeom prst="rect">
-            <a:avLst/>
-          </a:prstGeom>
-          <a:noFill/>
-          <a:ln/>
-        </p:spPr>
-        <p:txBody>
-          <a:bodyPr wrap="square" rtlCol="0" anchor="ctr">
+            <a:off x="1051560" y="3904488"/>
+            <a:ext cx="10424160" cy="731520"/>
+          </a:xfrm>
+          <a:prstGeom prst="rect">
+            <a:avLst/>
+          </a:prstGeom>
+          <a:noFill/>
+          <a:ln/>
+        </p:spPr>
+        <p:txBody>
+          <a:bodyPr wrap="square" rtlCol="0" anchor="t">
             <a:spAutoFit/>
           </a:bodyPr>
           <a:lstStyle/>
@@ -2825,7 +2730,7 @@
               <a:buNone/>
             </a:pPr>
             <a:r>
-              <a:rPr lang="en-US" sz="1100" dirty="0">
+              <a:rPr lang="en-US" sz="1400" dirty="0">
                 <a:solidFill>
                   <a:srgbClr val="1A1A1A"/>
                 </a:solidFill>
@@ -2833,9 +2738,9 @@
                 <a:ea typeface="Calibri" pitchFamily="34" charset="-122"/>
                 <a:cs typeface="Calibri" pitchFamily="34" charset="-120"/>
               </a:rPr>
-              <a:t>A brief demonstration before the complications: the words one artist uses far more than everyone else, a signature vocabulary measured against a pop baseline.</a:t>
-            </a:r>
-            <a:endParaRPr lang="en-US" sz="1100" dirty="0"/>
+              <a:t>Grimmer &amp;amp; Stewart, Text as Data (2013), §1–4: all quantitative models of language are wrong, but some are useful</a:t>
+            </a:r>
+            <a:endParaRPr lang="en-US" sz="1400" dirty="0"/>
           </a:p>
         </p:txBody>
       </p:sp>
@@ -2847,16 +2752,14 @@
         </p:nvSpPr>
         <p:spPr>
           <a:xfrm>
-            <a:off x="640080" y="2916936"/>
-            <a:ext cx="868680" cy="338328"/>
-          </a:xfrm>
-          <a:prstGeom prst="roundRect">
-            <a:avLst>
-              <a:gd name="adj" fmla="val 16216"/>
-            </a:avLst>
-          </a:prstGeom>
-          <a:solidFill>
-            <a:srgbClr val="7A3B2E"/>
+            <a:off x="640080" y="4553712"/>
+            <a:ext cx="219456" cy="219456"/>
+          </a:xfrm>
+          <a:prstGeom prst="ellipse">
+            <a:avLst/>
+          </a:prstGeom>
+          <a:solidFill>
+            <a:srgbClr val="3F6F5F"/>
           </a:solidFill>
           <a:ln/>
         </p:spPr>
@@ -2869,8 +2772,8 @@
         </p:nvSpPr>
         <p:spPr>
           <a:xfrm>
-            <a:off x="640080" y="2916936"/>
-            <a:ext cx="868680" cy="338328"/>
+            <a:off x="1051560" y="4480560"/>
+            <a:ext cx="10424160" cy="365760"/>
           </a:xfrm>
           <a:prstGeom prst="rect">
             <a:avLst/>
@@ -2882,21 +2785,21 @@
           <a:bodyPr wrap="square" rtlCol="0" anchor="ctr"/>
           <a:lstStyle/>
           <a:p>
-            <a:pPr algn="ctr" indent="0" marL="0">
-              <a:buNone/>
-            </a:pPr>
-            <a:r>
-              <a:rPr lang="en-US" sz="1100" b="1" dirty="0">
-                <a:solidFill>
-                  <a:srgbClr val="FFFFFF"/>
+            <a:pPr indent="0" marL="0">
+              <a:buNone/>
+            </a:pPr>
+            <a:r>
+              <a:rPr lang="en-US" sz="1500" b="1" dirty="0">
+                <a:solidFill>
+                  <a:srgbClr val="3F6F5F"/>
                 </a:solidFill>
                 <a:latin typeface="Calibri" pitchFamily="34" charset="0"/>
                 <a:ea typeface="Calibri" pitchFamily="34" charset="-122"/>
                 <a:cs typeface="Calibri" pitchFamily="34" charset="-120"/>
               </a:rPr>
-              <a:t>0:30</a:t>
-            </a:r>
-            <a:endParaRPr lang="en-US" sz="1100" dirty="0"/>
+              <a:t>Sketch</a:t>
+            </a:r>
+            <a:endParaRPr lang="en-US" sz="1500" dirty="0"/>
           </a:p>
         </p:txBody>
       </p:sp>
@@ -2908,17 +2811,17 @@
         </p:nvSpPr>
         <p:spPr>
           <a:xfrm>
-            <a:off x="1691640" y="2898648"/>
-            <a:ext cx="9646920" cy="448056"/>
-          </a:xfrm>
-          <a:prstGeom prst="rect">
-            <a:avLst/>
-          </a:prstGeom>
-          <a:noFill/>
-          <a:ln/>
-        </p:spPr>
-        <p:txBody>
-          <a:bodyPr wrap="square" rtlCol="0" anchor="ctr">
+            <a:off x="1051560" y="4864608"/>
+            <a:ext cx="10424160" cy="731520"/>
+          </a:xfrm>
+          <a:prstGeom prst="rect">
+            <a:avLst/>
+          </a:prstGeom>
+          <a:noFill/>
+          <a:ln/>
+        </p:spPr>
+        <p:txBody>
+          <a:bodyPr wrap="square" rtlCol="0" anchor="t">
             <a:spAutoFit/>
           </a:bodyPr>
           <a:lstStyle/>
@@ -2927,7 +2830,7 @@
               <a:buNone/>
             </a:pPr>
             <a:r>
-              <a:rPr lang="en-US" sz="1100" dirty="0">
+              <a:rPr lang="en-US" sz="1400" dirty="0">
                 <a:solidFill>
                   <a:srgbClr val="1A1A1A"/>
                 </a:solidFill>
@@ -2935,9 +2838,9 @@
                 <a:ea typeface="Calibri" pitchFamily="34" charset="-122"/>
                 <a:cs typeface="Calibri" pitchFamily="34" charset="-120"/>
               </a:rPr>
-              <a:t>Hand-built bag-of-words: two authors, highlighters, argue about merging run/running. Counting requires defining. Close with the loss demonstration: two sentences with identical bags and opposite meanings, and a picture beside its shuffled pixels, so the trade the bag makes is on the table before anything scales up.</a:t>
-            </a:r>
-            <a:endParaRPr lang="en-US" sz="1100" dirty="0"/>
+              <a:t>Count something in a text you care about; one chart; one sentence naming a choice. If the count compares two things, shuffle-test the gap.</a:t>
+            </a:r>
+            <a:endParaRPr lang="en-US" sz="1400" dirty="0"/>
           </a:p>
         </p:txBody>
       </p:sp>
@@ -2949,13 +2852,11 @@
         </p:nvSpPr>
         <p:spPr>
           <a:xfrm>
-            <a:off x="640080" y="3364992"/>
-            <a:ext cx="868680" cy="338328"/>
-          </a:xfrm>
-          <a:prstGeom prst="roundRect">
-            <a:avLst>
-              <a:gd name="adj" fmla="val 16216"/>
-            </a:avLst>
+            <a:off x="640080" y="5513832"/>
+            <a:ext cx="219456" cy="219456"/>
+          </a:xfrm>
+          <a:prstGeom prst="ellipse">
+            <a:avLst/>
           </a:prstGeom>
           <a:solidFill>
             <a:srgbClr val="7A3B2E"/>
@@ -2971,8 +2872,8 @@
         </p:nvSpPr>
         <p:spPr>
           <a:xfrm>
-            <a:off x="640080" y="3364992"/>
-            <a:ext cx="868680" cy="338328"/>
+            <a:off x="1051560" y="5440680"/>
+            <a:ext cx="10424160" cy="365760"/>
           </a:xfrm>
           <a:prstGeom prst="rect">
             <a:avLst/>
@@ -2984,21 +2885,21 @@
           <a:bodyPr wrap="square" rtlCol="0" anchor="ctr"/>
           <a:lstStyle/>
           <a:p>
-            <a:pPr algn="ctr" indent="0" marL="0">
-              <a:buNone/>
-            </a:pPr>
-            <a:r>
-              <a:rPr lang="en-US" sz="1100" b="1" dirty="0">
-                <a:solidFill>
-                  <a:srgbClr val="FFFFFF"/>
+            <a:pPr indent="0" marL="0">
+              <a:buNone/>
+            </a:pPr>
+            <a:r>
+              <a:rPr lang="en-US" sz="1500" b="1" dirty="0">
+                <a:solidFill>
+                  <a:srgbClr val="7A3B2E"/>
                 </a:solidFill>
                 <a:latin typeface="Calibri" pitchFamily="34" charset="0"/>
                 <a:ea typeface="Calibri" pitchFamily="34" charset="-122"/>
                 <a:cs typeface="Calibri" pitchFamily="34" charset="-120"/>
               </a:rPr>
-              <a:t>0:55</a:t>
-            </a:r>
-            <a:endParaRPr lang="en-US" sz="1100" dirty="0"/>
+              <a:t>Check (AI closed)</a:t>
+            </a:r>
+            <a:endParaRPr lang="en-US" sz="1500" dirty="0"/>
           </a:p>
         </p:txBody>
       </p:sp>
@@ -3010,17 +2911,17 @@
         </p:nvSpPr>
         <p:spPr>
           <a:xfrm>
-            <a:off x="1691640" y="3346704"/>
-            <a:ext cx="9646920" cy="448056"/>
-          </a:xfrm>
-          <a:prstGeom prst="rect">
-            <a:avLst/>
-          </a:prstGeom>
-          <a:noFill/>
-          <a:ln/>
-        </p:spPr>
-        <p:txBody>
-          <a:bodyPr wrap="square" rtlCol="0" anchor="ctr">
+            <a:off x="1051560" y="5824728"/>
+            <a:ext cx="10424160" cy="731520"/>
+          </a:xfrm>
+          <a:prstGeom prst="rect">
+            <a:avLst/>
+          </a:prstGeom>
+          <a:noFill/>
+          <a:ln/>
+        </p:spPr>
+        <p:txBody>
+          <a:bodyPr wrap="square" rtlCol="0" anchor="t">
             <a:spAutoFit/>
           </a:bodyPr>
           <a:lstStyle/>
@@ -3029,7 +2930,7 @@
               <a:buNone/>
             </a:pPr>
             <a:r>
-              <a:rPr lang="en-US" sz="1100" dirty="0">
+              <a:rPr lang="en-US" sz="1400" dirty="0">
                 <a:solidFill>
                   <a:srgbClr val="1A1A1A"/>
                 </a:solidFill>
@@ -3037,519 +2938,9 @@
                 <a:ea typeface="Calibri" pitchFamily="34" charset="-122"/>
                 <a:cs typeface="Calibri" pitchFamily="34" charset="-120"/>
               </a:rPr>
-              <a:t>What counts as a word? Paste a sentence into two tokenizer playgrounds and watch it shatter differently. Models see tokens, not words.</a:t>
-            </a:r>
-            <a:endParaRPr lang="en-US" sz="1100" dirty="0"/>
-          </a:p>
-        </p:txBody>
-      </p:sp>
-      <p:sp>
-        <p:nvSpPr>
-          <p:cNvPr id="18" name="Shape 16"/>
-          <p:cNvSpPr/>
-          <p:nvPr/>
-        </p:nvSpPr>
-        <p:spPr>
-          <a:xfrm>
-            <a:off x="640080" y="3813048"/>
-            <a:ext cx="868680" cy="338328"/>
-          </a:xfrm>
-          <a:prstGeom prst="roundRect">
-            <a:avLst>
-              <a:gd name="adj" fmla="val 16216"/>
-            </a:avLst>
-          </a:prstGeom>
-          <a:solidFill>
-            <a:srgbClr val="7A3B2E"/>
-          </a:solidFill>
-          <a:ln/>
-        </p:spPr>
-      </p:sp>
-      <p:sp>
-        <p:nvSpPr>
-          <p:cNvPr id="19" name="Text 17"/>
-          <p:cNvSpPr/>
-          <p:nvPr/>
-        </p:nvSpPr>
-        <p:spPr>
-          <a:xfrm>
-            <a:off x="640080" y="3813048"/>
-            <a:ext cx="868680" cy="338328"/>
-          </a:xfrm>
-          <a:prstGeom prst="rect">
-            <a:avLst/>
-          </a:prstGeom>
-          <a:noFill/>
-          <a:ln/>
-        </p:spPr>
-        <p:txBody>
-          <a:bodyPr wrap="square" rtlCol="0" anchor="ctr"/>
-          <a:lstStyle/>
-          <a:p>
-            <a:pPr algn="ctr" indent="0" marL="0">
-              <a:buNone/>
-            </a:pPr>
-            <a:r>
-              <a:rPr lang="en-US" sz="1100" b="1" dirty="0">
-                <a:solidFill>
-                  <a:srgbClr val="FFFFFF"/>
-                </a:solidFill>
-                <a:latin typeface="Calibri" pitchFamily="34" charset="0"/>
-                <a:ea typeface="Calibri" pitchFamily="34" charset="-122"/>
-                <a:cs typeface="Calibri" pitchFamily="34" charset="-120"/>
-              </a:rPr>
-              <a:t>1:05</a:t>
-            </a:r>
-            <a:endParaRPr lang="en-US" sz="1100" dirty="0"/>
-          </a:p>
-        </p:txBody>
-      </p:sp>
-      <p:sp>
-        <p:nvSpPr>
-          <p:cNvPr id="20" name="Text 18"/>
-          <p:cNvSpPr/>
-          <p:nvPr/>
-        </p:nvSpPr>
-        <p:spPr>
-          <a:xfrm>
-            <a:off x="1691640" y="3794760"/>
-            <a:ext cx="9646920" cy="448056"/>
-          </a:xfrm>
-          <a:prstGeom prst="rect">
-            <a:avLst/>
-          </a:prstGeom>
-          <a:noFill/>
-          <a:ln/>
-        </p:spPr>
-        <p:txBody>
-          <a:bodyPr wrap="square" rtlCol="0" anchor="ctr">
-            <a:spAutoFit/>
-          </a:bodyPr>
-          <a:lstStyle/>
-          <a:p>
-            <a:pPr indent="0" marL="0">
-              <a:buNone/>
-            </a:pPr>
-            <a:r>
-              <a:rPr lang="en-US" sz="1100" dirty="0">
-                <a:solidFill>
-                  <a:srgbClr val="1A1A1A"/>
-                </a:solidFill>
-                <a:latin typeface="Calibri" pitchFamily="34" charset="0"/>
-                <a:ea typeface="Calibri" pitchFamily="34" charset="-122"/>
-                <a:cs typeface="Calibri" pitchFamily="34" charset="-120"/>
-              </a:rPr>
-              <a:t>Break</a:t>
-            </a:r>
-            <a:endParaRPr lang="en-US" sz="1100" dirty="0"/>
-          </a:p>
-        </p:txBody>
-      </p:sp>
-      <p:sp>
-        <p:nvSpPr>
-          <p:cNvPr id="21" name="Shape 19"/>
-          <p:cNvSpPr/>
-          <p:nvPr/>
-        </p:nvSpPr>
-        <p:spPr>
-          <a:xfrm>
-            <a:off x="640080" y="4261104"/>
-            <a:ext cx="868680" cy="338328"/>
-          </a:xfrm>
-          <a:prstGeom prst="roundRect">
-            <a:avLst>
-              <a:gd name="adj" fmla="val 16216"/>
-            </a:avLst>
-          </a:prstGeom>
-          <a:solidFill>
-            <a:srgbClr val="7A3B2E"/>
-          </a:solidFill>
-          <a:ln/>
-        </p:spPr>
-      </p:sp>
-      <p:sp>
-        <p:nvSpPr>
-          <p:cNvPr id="22" name="Text 20"/>
-          <p:cNvSpPr/>
-          <p:nvPr/>
-        </p:nvSpPr>
-        <p:spPr>
-          <a:xfrm>
-            <a:off x="640080" y="4261104"/>
-            <a:ext cx="868680" cy="338328"/>
-          </a:xfrm>
-          <a:prstGeom prst="rect">
-            <a:avLst/>
-          </a:prstGeom>
-          <a:noFill/>
-          <a:ln/>
-        </p:spPr>
-        <p:txBody>
-          <a:bodyPr wrap="square" rtlCol="0" anchor="ctr"/>
-          <a:lstStyle/>
-          <a:p>
-            <a:pPr algn="ctr" indent="0" marL="0">
-              <a:buNone/>
-            </a:pPr>
-            <a:r>
-              <a:rPr lang="en-US" sz="1100" b="1" dirty="0">
-                <a:solidFill>
-                  <a:srgbClr val="FFFFFF"/>
-                </a:solidFill>
-                <a:latin typeface="Calibri" pitchFamily="34" charset="0"/>
-                <a:ea typeface="Calibri" pitchFamily="34" charset="-122"/>
-                <a:cs typeface="Calibri" pitchFamily="34" charset="-120"/>
-              </a:rPr>
-              <a:t>1:15</a:t>
-            </a:r>
-            <a:endParaRPr lang="en-US" sz="1100" dirty="0"/>
-          </a:p>
-        </p:txBody>
-      </p:sp>
-      <p:sp>
-        <p:nvSpPr>
-          <p:cNvPr id="23" name="Text 21"/>
-          <p:cNvSpPr/>
-          <p:nvPr/>
-        </p:nvSpPr>
-        <p:spPr>
-          <a:xfrm>
-            <a:off x="1691640" y="4242816"/>
-            <a:ext cx="9646920" cy="448056"/>
-          </a:xfrm>
-          <a:prstGeom prst="rect">
-            <a:avLst/>
-          </a:prstGeom>
-          <a:noFill/>
-          <a:ln/>
-        </p:spPr>
-        <p:txBody>
-          <a:bodyPr wrap="square" rtlCol="0" anchor="ctr">
-            <a:spAutoFit/>
-          </a:bodyPr>
-          <a:lstStyle/>
-          <a:p>
-            <a:pPr indent="0" marL="0">
-              <a:buNone/>
-            </a:pPr>
-            <a:r>
-              <a:rPr lang="en-US" sz="1100" dirty="0">
-                <a:solidFill>
-                  <a:srgbClr val="1A1A1A"/>
-                </a:solidFill>
-                <a:latin typeface="Calibri" pitchFamily="34" charset="0"/>
-                <a:ea typeface="Calibri" pitchFamily="34" charset="-122"/>
-                <a:cs typeface="Calibri" pitchFamily="34" charset="-120"/>
-              </a:rPr>
-              <a:t>tf-idf: the AI scales your hand count; stop-words dominate, which motivates "common here, rare overall."</a:t>
-            </a:r>
-            <a:endParaRPr lang="en-US" sz="1100" dirty="0"/>
-          </a:p>
-        </p:txBody>
-      </p:sp>
-      <p:sp>
-        <p:nvSpPr>
-          <p:cNvPr id="24" name="Shape 22"/>
-          <p:cNvSpPr/>
-          <p:nvPr/>
-        </p:nvSpPr>
-        <p:spPr>
-          <a:xfrm>
-            <a:off x="640080" y="4709160"/>
-            <a:ext cx="868680" cy="338328"/>
-          </a:xfrm>
-          <a:prstGeom prst="roundRect">
-            <a:avLst>
-              <a:gd name="adj" fmla="val 16216"/>
-            </a:avLst>
-          </a:prstGeom>
-          <a:solidFill>
-            <a:srgbClr val="7A3B2E"/>
-          </a:solidFill>
-          <a:ln/>
-        </p:spPr>
-      </p:sp>
-      <p:sp>
-        <p:nvSpPr>
-          <p:cNvPr id="25" name="Text 23"/>
-          <p:cNvSpPr/>
-          <p:nvPr/>
-        </p:nvSpPr>
-        <p:spPr>
-          <a:xfrm>
-            <a:off x="640080" y="4709160"/>
-            <a:ext cx="868680" cy="338328"/>
-          </a:xfrm>
-          <a:prstGeom prst="rect">
-            <a:avLst/>
-          </a:prstGeom>
-          <a:noFill/>
-          <a:ln/>
-        </p:spPr>
-        <p:txBody>
-          <a:bodyPr wrap="square" rtlCol="0" anchor="ctr"/>
-          <a:lstStyle/>
-          <a:p>
-            <a:pPr algn="ctr" indent="0" marL="0">
-              <a:buNone/>
-            </a:pPr>
-            <a:r>
-              <a:rPr lang="en-US" sz="1100" b="1" dirty="0">
-                <a:solidFill>
-                  <a:srgbClr val="FFFFFF"/>
-                </a:solidFill>
-                <a:latin typeface="Calibri" pitchFamily="34" charset="0"/>
-                <a:ea typeface="Calibri" pitchFamily="34" charset="-122"/>
-                <a:cs typeface="Calibri" pitchFamily="34" charset="-120"/>
-              </a:rPr>
-              <a:t>1:30</a:t>
-            </a:r>
-            <a:endParaRPr lang="en-US" sz="1100" dirty="0"/>
-          </a:p>
-        </p:txBody>
-      </p:sp>
-      <p:sp>
-        <p:nvSpPr>
-          <p:cNvPr id="26" name="Text 24"/>
-          <p:cNvSpPr/>
-          <p:nvPr/>
-        </p:nvSpPr>
-        <p:spPr>
-          <a:xfrm>
-            <a:off x="1691640" y="4690872"/>
-            <a:ext cx="9646920" cy="448056"/>
-          </a:xfrm>
-          <a:prstGeom prst="rect">
-            <a:avLst/>
-          </a:prstGeom>
-          <a:noFill/>
-          <a:ln/>
-        </p:spPr>
-        <p:txBody>
-          <a:bodyPr wrap="square" rtlCol="0" anchor="ctr">
-            <a:spAutoFit/>
-          </a:bodyPr>
-          <a:lstStyle/>
-          <a:p>
-            <a:pPr indent="0" marL="0">
-              <a:buNone/>
-            </a:pPr>
-            <a:r>
-              <a:rPr lang="en-US" sz="1100" dirty="0">
-                <a:solidFill>
-                  <a:srgbClr val="1A1A1A"/>
-                </a:solidFill>
-                <a:latin typeface="Calibri" pitchFamily="34" charset="0"/>
-                <a:ea typeface="Calibri" pitchFamily="34" charset="-122"/>
-                <a:cs typeface="Calibri" pitchFamily="34" charset="-120"/>
-              </a:rPr>
-              <a:t>Keyness, the She Giggles, He Gallops move: a log-odds ratio between two corpora finds the words one voice uses far more than a baseline, exactly the method behind Week 1's featured piece. The corpus pair is a choice too: artist vs. pop, lyrics vs. subreddit vs. novel.</a:t>
-            </a:r>
-            <a:endParaRPr lang="en-US" sz="1100" dirty="0"/>
-          </a:p>
-        </p:txBody>
-      </p:sp>
-      <p:sp>
-        <p:nvSpPr>
-          <p:cNvPr id="27" name="Shape 25"/>
-          <p:cNvSpPr/>
-          <p:nvPr/>
-        </p:nvSpPr>
-        <p:spPr>
-          <a:xfrm>
-            <a:off x="640080" y="5157216"/>
-            <a:ext cx="868680" cy="338328"/>
-          </a:xfrm>
-          <a:prstGeom prst="roundRect">
-            <a:avLst>
-              <a:gd name="adj" fmla="val 16216"/>
-            </a:avLst>
-          </a:prstGeom>
-          <a:solidFill>
-            <a:srgbClr val="7A3B2E"/>
-          </a:solidFill>
-          <a:ln/>
-        </p:spPr>
-      </p:sp>
-      <p:sp>
-        <p:nvSpPr>
-          <p:cNvPr id="28" name="Text 26"/>
-          <p:cNvSpPr/>
-          <p:nvPr/>
-        </p:nvSpPr>
-        <p:spPr>
-          <a:xfrm>
-            <a:off x="640080" y="5157216"/>
-            <a:ext cx="868680" cy="338328"/>
-          </a:xfrm>
-          <a:prstGeom prst="rect">
-            <a:avLst/>
-          </a:prstGeom>
-          <a:noFill/>
-          <a:ln/>
-        </p:spPr>
-        <p:txBody>
-          <a:bodyPr wrap="square" rtlCol="0" anchor="ctr"/>
-          <a:lstStyle/>
-          <a:p>
-            <a:pPr algn="ctr" indent="0" marL="0">
-              <a:buNone/>
-            </a:pPr>
-            <a:r>
-              <a:rPr lang="en-US" sz="1100" b="1" dirty="0">
-                <a:solidFill>
-                  <a:srgbClr val="FFFFFF"/>
-                </a:solidFill>
-                <a:latin typeface="Calibri" pitchFamily="34" charset="0"/>
-                <a:ea typeface="Calibri" pitchFamily="34" charset="-122"/>
-                <a:cs typeface="Calibri" pitchFamily="34" charset="-120"/>
-              </a:rPr>
-              <a:t>1:42</a:t>
-            </a:r>
-            <a:endParaRPr lang="en-US" sz="1100" dirty="0"/>
-          </a:p>
-        </p:txBody>
-      </p:sp>
-      <p:sp>
-        <p:nvSpPr>
-          <p:cNvPr id="29" name="Text 27"/>
-          <p:cNvSpPr/>
-          <p:nvPr/>
-        </p:nvSpPr>
-        <p:spPr>
-          <a:xfrm>
-            <a:off x="1691640" y="5138928"/>
-            <a:ext cx="9646920" cy="448056"/>
-          </a:xfrm>
-          <a:prstGeom prst="rect">
-            <a:avLst/>
-          </a:prstGeom>
-          <a:noFill/>
-          <a:ln/>
-        </p:spPr>
-        <p:txBody>
-          <a:bodyPr wrap="square" rtlCol="0" anchor="ctr">
-            <a:spAutoFit/>
-          </a:bodyPr>
-          <a:lstStyle/>
-          <a:p>
-            <a:pPr indent="0" marL="0">
-              <a:buNone/>
-            </a:pPr>
-            <a:r>
-              <a:rPr lang="en-US" sz="1100" dirty="0">
-                <a:solidFill>
-                  <a:srgbClr val="1A1A1A"/>
-                </a:solidFill>
-                <a:latin typeface="Calibri" pitchFamily="34" charset="0"/>
-                <a:ea typeface="Calibri" pitchFamily="34" charset="-122"/>
-                <a:cs typeface="Calibri" pitchFamily="34" charset="-120"/>
-              </a:rPr>
-              <a:t>Is the difference real? The shuffle test: shuffle the labels and recount, one thousand times. If chance alone frequently produces a gap this large, the difference should not be trusted; if it almost never does, the finding stands. A difference can be real and still small.</a:t>
-            </a:r>
-            <a:endParaRPr lang="en-US" sz="1100" dirty="0"/>
-          </a:p>
-        </p:txBody>
-      </p:sp>
-      <p:sp>
-        <p:nvSpPr>
-          <p:cNvPr id="30" name="Shape 28"/>
-          <p:cNvSpPr/>
-          <p:nvPr/>
-        </p:nvSpPr>
-        <p:spPr>
-          <a:xfrm>
-            <a:off x="640080" y="5605272"/>
-            <a:ext cx="868680" cy="338328"/>
-          </a:xfrm>
-          <a:prstGeom prst="roundRect">
-            <a:avLst>
-              <a:gd name="adj" fmla="val 16216"/>
-            </a:avLst>
-          </a:prstGeom>
-          <a:solidFill>
-            <a:srgbClr val="7A3B2E"/>
-          </a:solidFill>
-          <a:ln/>
-        </p:spPr>
-      </p:sp>
-      <p:sp>
-        <p:nvSpPr>
-          <p:cNvPr id="31" name="Text 29"/>
-          <p:cNvSpPr/>
-          <p:nvPr/>
-        </p:nvSpPr>
-        <p:spPr>
-          <a:xfrm>
-            <a:off x="640080" y="5605272"/>
-            <a:ext cx="868680" cy="338328"/>
-          </a:xfrm>
-          <a:prstGeom prst="rect">
-            <a:avLst/>
-          </a:prstGeom>
-          <a:noFill/>
-          <a:ln/>
-        </p:spPr>
-        <p:txBody>
-          <a:bodyPr wrap="square" rtlCol="0" anchor="ctr"/>
-          <a:lstStyle/>
-          <a:p>
-            <a:pPr algn="ctr" indent="0" marL="0">
-              <a:buNone/>
-            </a:pPr>
-            <a:r>
-              <a:rPr lang="en-US" sz="1100" b="1" dirty="0">
-                <a:solidFill>
-                  <a:srgbClr val="FFFFFF"/>
-                </a:solidFill>
-                <a:latin typeface="Calibri" pitchFamily="34" charset="0"/>
-                <a:ea typeface="Calibri" pitchFamily="34" charset="-122"/>
-                <a:cs typeface="Calibri" pitchFamily="34" charset="-120"/>
-              </a:rPr>
-              <a:t>1:50</a:t>
-            </a:r>
-            <a:endParaRPr lang="en-US" sz="1100" dirty="0"/>
-          </a:p>
-        </p:txBody>
-      </p:sp>
-      <p:sp>
-        <p:nvSpPr>
-          <p:cNvPr id="32" name="Text 30"/>
-          <p:cNvSpPr/>
-          <p:nvPr/>
-        </p:nvSpPr>
-        <p:spPr>
-          <a:xfrm>
-            <a:off x="1691640" y="5586984"/>
-            <a:ext cx="9646920" cy="448056"/>
-          </a:xfrm>
-          <a:prstGeom prst="rect">
-            <a:avLst/>
-          </a:prstGeom>
-          <a:noFill/>
-          <a:ln/>
-        </p:spPr>
-        <p:txBody>
-          <a:bodyPr wrap="square" rtlCol="0" anchor="ctr">
-            <a:spAutoFit/>
-          </a:bodyPr>
-          <a:lstStyle/>
-          <a:p>
-            <a:pPr indent="0" marL="0">
-              <a:buNone/>
-            </a:pPr>
-            <a:r>
-              <a:rPr lang="en-US" sz="1100" dirty="0">
-                <a:solidFill>
-                  <a:srgbClr val="1A1A1A"/>
-                </a:solidFill>
-                <a:latin typeface="Calibri" pitchFamily="34" charset="0"/>
-                <a:ea typeface="Calibri" pitchFamily="34" charset="-122"/>
-                <a:cs typeface="Calibri" pitchFamily="34" charset="-120"/>
-              </a:rPr>
-              <a:t>Gemini-free check and check-out.</a:t>
-            </a:r>
-            <a:endParaRPr lang="en-US" sz="1100" dirty="0"/>
+              <a:t>Explain it: why two tokenizers split a sentence differently, and what your stemming choice changed. (Competencies 3, 5.)</a:t>
+            </a:r>
+            <a:endParaRPr lang="en-US" sz="1400" dirty="0"/>
           </a:p>
         </p:txBody>
       </p:sp>
@@ -3594,7 +2985,7 @@
         <p:spPr>
           <a:xfrm>
             <a:off x="640080" y="640080"/>
-            <a:ext cx="10058400" cy="731520"/>
+            <a:ext cx="10058400" cy="320040"/>
           </a:xfrm>
           <a:prstGeom prst="rect">
             <a:avLst/>
@@ -3610,7 +3001,46 @@
               <a:buNone/>
             </a:pPr>
             <a:r>
-              <a:rPr lang="en-US" sz="3000" b="1" dirty="0">
+              <a:rPr lang="en-US" sz="1300" b="1" spc="300" kern="0" dirty="0">
+                <a:solidFill>
+                  <a:srgbClr val="7A3B2E"/>
+                </a:solidFill>
+                <a:latin typeface="Calibri" pitchFamily="34" charset="0"/>
+                <a:ea typeface="Calibri" pitchFamily="34" charset="-122"/>
+                <a:cs typeface="Calibri" pitchFamily="34" charset="-120"/>
+              </a:rPr>
+              <a:t>HOW THIS WEEK CONNECTS</a:t>
+            </a:r>
+            <a:endParaRPr lang="en-US" sz="1300" dirty="0"/>
+          </a:p>
+        </p:txBody>
+      </p:sp>
+      <p:sp>
+        <p:nvSpPr>
+          <p:cNvPr id="3" name="Text 1"/>
+          <p:cNvSpPr/>
+          <p:nvPr/>
+        </p:nvSpPr>
+        <p:spPr>
+          <a:xfrm>
+            <a:off x="640080" y="987552"/>
+            <a:ext cx="10058400" cy="640080"/>
+          </a:xfrm>
+          <a:prstGeom prst="rect">
+            <a:avLst/>
+          </a:prstGeom>
+          <a:noFill/>
+          <a:ln/>
+        </p:spPr>
+        <p:txBody>
+          <a:bodyPr wrap="square" rtlCol="0" anchor="ctr"/>
+          <a:lstStyle/>
+          <a:p>
+            <a:pPr indent="0" marL="0">
+              <a:buNone/>
+            </a:pPr>
+            <a:r>
+              <a:rPr lang="en-US" sz="2800" b="1" dirty="0">
                 <a:solidFill>
                   <a:srgbClr val="1A1A1A"/>
                 </a:solidFill>
@@ -3618,25 +3048,27 @@
                 <a:ea typeface="Cambria" pitchFamily="34" charset="-122"/>
                 <a:cs typeface="Cambria" pitchFamily="34" charset="-120"/>
               </a:rPr>
-              <a:t>Reading &amp; homework</a:t>
-            </a:r>
-            <a:endParaRPr lang="en-US" sz="3000" dirty="0"/>
-          </a:p>
-        </p:txBody>
-      </p:sp>
-      <p:sp>
-        <p:nvSpPr>
-          <p:cNvPr id="3" name="Shape 1"/>
-          <p:cNvSpPr/>
-          <p:nvPr/>
-        </p:nvSpPr>
-        <p:spPr>
-          <a:xfrm>
-            <a:off x="640080" y="1673352"/>
-            <a:ext cx="219456" cy="219456"/>
-          </a:xfrm>
-          <a:prstGeom prst="ellipse">
-            <a:avLst/>
+              <a:t>The course's through-lines</a:t>
+            </a:r>
+            <a:endParaRPr lang="en-US" sz="2800" dirty="0"/>
+          </a:p>
+        </p:txBody>
+      </p:sp>
+      <p:sp>
+        <p:nvSpPr>
+          <p:cNvPr id="4" name="Shape 2"/>
+          <p:cNvSpPr/>
+          <p:nvPr/>
+        </p:nvSpPr>
+        <p:spPr>
+          <a:xfrm>
+            <a:off x="640080" y="2057400"/>
+            <a:ext cx="457200" cy="457200"/>
+          </a:xfrm>
+          <a:prstGeom prst="roundRect">
+            <a:avLst>
+              <a:gd name="adj" fmla="val 16000"/>
+            </a:avLst>
           </a:prstGeom>
           <a:solidFill>
             <a:srgbClr val="7A3B2E"/>
@@ -3646,14 +3078,14 @@
       </p:sp>
       <p:sp>
         <p:nvSpPr>
-          <p:cNvPr id="4" name="Text 2"/>
-          <p:cNvSpPr/>
-          <p:nvPr/>
-        </p:nvSpPr>
-        <p:spPr>
-          <a:xfrm>
-            <a:off x="1051560" y="1600200"/>
-            <a:ext cx="10424160" cy="365760"/>
+          <p:cNvPr id="5" name="Text 3"/>
+          <p:cNvSpPr/>
+          <p:nvPr/>
+        </p:nvSpPr>
+        <p:spPr>
+          <a:xfrm>
+            <a:off x="640080" y="2057400"/>
+            <a:ext cx="457200" cy="457200"/>
           </a:xfrm>
           <a:prstGeom prst="rect">
             <a:avLst/>
@@ -3665,34 +3097,217 @@
           <a:bodyPr wrap="square" rtlCol="0" anchor="ctr"/>
           <a:lstStyle/>
           <a:p>
+            <a:pPr algn="ctr" indent="0" marL="0">
+              <a:buNone/>
+            </a:pPr>
+            <a:r>
+              <a:rPr lang="en-US" sz="2000" b="1" dirty="0">
+                <a:solidFill>
+                  <a:srgbClr val="FFFFFF"/>
+                </a:solidFill>
+                <a:latin typeface="Cambria" pitchFamily="34" charset="0"/>
+                <a:ea typeface="Cambria" pitchFamily="34" charset="-122"/>
+                <a:cs typeface="Cambria" pitchFamily="34" charset="-120"/>
+              </a:rPr>
+              <a:t>1</a:t>
+            </a:r>
+            <a:endParaRPr lang="en-US" sz="2000" dirty="0"/>
+          </a:p>
+        </p:txBody>
+      </p:sp>
+      <p:sp>
+        <p:nvSpPr>
+          <p:cNvPr id="6" name="Text 4"/>
+          <p:cNvSpPr/>
+          <p:nvPr/>
+        </p:nvSpPr>
+        <p:spPr>
+          <a:xfrm>
+            <a:off x="1371600" y="2020824"/>
+            <a:ext cx="10332720" cy="411480"/>
+          </a:xfrm>
+          <a:prstGeom prst="rect">
+            <a:avLst/>
+          </a:prstGeom>
+          <a:noFill/>
+          <a:ln/>
+        </p:spPr>
+        <p:txBody>
+          <a:bodyPr wrap="square" rtlCol="0" anchor="ctr"/>
+          <a:lstStyle/>
+          <a:p>
             <a:pPr indent="0" marL="0">
               <a:buNone/>
             </a:pPr>
             <a:r>
-              <a:rPr lang="en-US" sz="1500" b="1" dirty="0">
+              <a:rPr lang="en-US" sz="1900" b="1" dirty="0">
                 <a:solidFill>
                   <a:srgbClr val="7A3B2E"/>
+                </a:solidFill>
+                <a:latin typeface="Cambria" pitchFamily="34" charset="0"/>
+                <a:ea typeface="Cambria" pitchFamily="34" charset="-122"/>
+                <a:cs typeface="Cambria" pitchFamily="34" charset="-120"/>
+              </a:rPr>
+              <a:t>Beyond counting</a:t>
+            </a:r>
+            <a:endParaRPr lang="en-US" sz="1900" dirty="0"/>
+          </a:p>
+        </p:txBody>
+      </p:sp>
+      <p:sp>
+        <p:nvSpPr>
+          <p:cNvPr id="7" name="Text 5"/>
+          <p:cNvSpPr/>
+          <p:nvPr/>
+        </p:nvSpPr>
+        <p:spPr>
+          <a:xfrm>
+            <a:off x="1371600" y="2441448"/>
+            <a:ext cx="10332720" cy="914400"/>
+          </a:xfrm>
+          <a:prstGeom prst="rect">
+            <a:avLst/>
+          </a:prstGeom>
+          <a:noFill/>
+          <a:ln/>
+        </p:spPr>
+        <p:txBody>
+          <a:bodyPr wrap="square" rtlCol="0" anchor="t">
+            <a:spAutoFit/>
+          </a:bodyPr>
+          <a:lstStyle/>
+          <a:p>
+            <a:pPr indent="0" marL="0">
+              <a:lnSpc>
+                <a:spcPct val="112000"/>
+              </a:lnSpc>
+              <a:buNone/>
+            </a:pPr>
+            <a:r>
+              <a:rPr lang="en-US" sz="1450" dirty="0">
+                <a:solidFill>
+                  <a:srgbClr val="1A1A1A"/>
                 </a:solidFill>
                 <a:latin typeface="Calibri" pitchFamily="34" charset="0"/>
                 <a:ea typeface="Calibri" pitchFamily="34" charset="-122"/>
                 <a:cs typeface="Calibri" pitchFamily="34" charset="-120"/>
               </a:rPr>
-              <a:t>Reading</a:t>
-            </a:r>
-            <a:endParaRPr lang="en-US" sz="1500" dirty="0"/>
-          </a:p>
-        </p:txBody>
-      </p:sp>
-      <p:sp>
-        <p:nvSpPr>
-          <p:cNvPr id="5" name="Text 3"/>
-          <p:cNvSpPr/>
-          <p:nvPr/>
-        </p:nvSpPr>
-        <p:spPr>
-          <a:xfrm>
-            <a:off x="1051560" y="1984248"/>
-            <a:ext cx="10424160" cy="731520"/>
+              <a:t>Counting is the simplest tool and has no notion of meaning. Week 5 addresses that limit.</a:t>
+            </a:r>
+            <a:endParaRPr lang="en-US" sz="1450" dirty="0"/>
+          </a:p>
+        </p:txBody>
+      </p:sp>
+      <p:sp>
+        <p:nvSpPr>
+          <p:cNvPr id="8" name="Shape 6"/>
+          <p:cNvSpPr/>
+          <p:nvPr/>
+        </p:nvSpPr>
+        <p:spPr>
+          <a:xfrm>
+            <a:off x="640080" y="3520440"/>
+            <a:ext cx="457200" cy="457200"/>
+          </a:xfrm>
+          <a:prstGeom prst="roundRect">
+            <a:avLst>
+              <a:gd name="adj" fmla="val 16000"/>
+            </a:avLst>
+          </a:prstGeom>
+          <a:solidFill>
+            <a:srgbClr val="3F6F5F"/>
+          </a:solidFill>
+          <a:ln/>
+        </p:spPr>
+      </p:sp>
+      <p:sp>
+        <p:nvSpPr>
+          <p:cNvPr id="9" name="Text 7"/>
+          <p:cNvSpPr/>
+          <p:nvPr/>
+        </p:nvSpPr>
+        <p:spPr>
+          <a:xfrm>
+            <a:off x="640080" y="3520440"/>
+            <a:ext cx="457200" cy="457200"/>
+          </a:xfrm>
+          <a:prstGeom prst="rect">
+            <a:avLst/>
+          </a:prstGeom>
+          <a:noFill/>
+          <a:ln/>
+        </p:spPr>
+        <p:txBody>
+          <a:bodyPr wrap="square" rtlCol="0" anchor="ctr"/>
+          <a:lstStyle/>
+          <a:p>
+            <a:pPr algn="ctr" indent="0" marL="0">
+              <a:buNone/>
+            </a:pPr>
+            <a:r>
+              <a:rPr lang="en-US" sz="2000" b="1" dirty="0">
+                <a:solidFill>
+                  <a:srgbClr val="FFFFFF"/>
+                </a:solidFill>
+                <a:latin typeface="Cambria" pitchFamily="34" charset="0"/>
+                <a:ea typeface="Cambria" pitchFamily="34" charset="-122"/>
+                <a:cs typeface="Cambria" pitchFamily="34" charset="-120"/>
+              </a:rPr>
+              <a:t>2</a:t>
+            </a:r>
+            <a:endParaRPr lang="en-US" sz="2000" dirty="0"/>
+          </a:p>
+        </p:txBody>
+      </p:sp>
+      <p:sp>
+        <p:nvSpPr>
+          <p:cNvPr id="10" name="Text 8"/>
+          <p:cNvSpPr/>
+          <p:nvPr/>
+        </p:nvSpPr>
+        <p:spPr>
+          <a:xfrm>
+            <a:off x="1371600" y="3483864"/>
+            <a:ext cx="10332720" cy="411480"/>
+          </a:xfrm>
+          <a:prstGeom prst="rect">
+            <a:avLst/>
+          </a:prstGeom>
+          <a:noFill/>
+          <a:ln/>
+        </p:spPr>
+        <p:txBody>
+          <a:bodyPr wrap="square" rtlCol="0" anchor="ctr"/>
+          <a:lstStyle/>
+          <a:p>
+            <a:pPr indent="0" marL="0">
+              <a:buNone/>
+            </a:pPr>
+            <a:r>
+              <a:rPr lang="en-US" sz="1900" b="1" dirty="0">
+                <a:solidFill>
+                  <a:srgbClr val="3F6F5F"/>
+                </a:solidFill>
+                <a:latin typeface="Cambria" pitchFamily="34" charset="0"/>
+                <a:ea typeface="Cambria" pitchFamily="34" charset="-122"/>
+                <a:cs typeface="Cambria" pitchFamily="34" charset="-120"/>
+              </a:rPr>
+              <a:t>Every count is a choice</a:t>
+            </a:r>
+            <a:endParaRPr lang="en-US" sz="1900" dirty="0"/>
+          </a:p>
+        </p:txBody>
+      </p:sp>
+      <p:sp>
+        <p:nvSpPr>
+          <p:cNvPr id="11" name="Text 9"/>
+          <p:cNvSpPr/>
+          <p:nvPr/>
+        </p:nvSpPr>
+        <p:spPr>
+          <a:xfrm>
+            <a:off x="1371600" y="3904488"/>
+            <a:ext cx="10332720" cy="914400"/>
           </a:xfrm>
           <a:prstGeom prst="rect">
             <a:avLst/>
@@ -3707,10 +3322,13 @@
           <a:lstStyle/>
           <a:p>
             <a:pPr indent="0" marL="0">
-              <a:buNone/>
-            </a:pPr>
-            <a:r>
-              <a:rPr lang="en-US" sz="1400" dirty="0">
+              <a:lnSpc>
+                <a:spcPct val="112000"/>
+              </a:lnSpc>
+              <a:buNone/>
+            </a:pPr>
+            <a:r>
+              <a:rPr lang="en-US" sz="1450" dirty="0">
                 <a:solidFill>
                   <a:srgbClr val="1A1A1A"/>
                 </a:solidFill>
@@ -3718,42 +3336,44 @@
                 <a:ea typeface="Calibri" pitchFamily="34" charset="-122"/>
                 <a:cs typeface="Calibri" pitchFamily="34" charset="-120"/>
               </a:rPr>
-              <a:t>Wolfram, What Is ChatGPT Doing (opening sections only)</a:t>
-            </a:r>
-            <a:endParaRPr lang="en-US" sz="1400" dirty="0"/>
-          </a:p>
-        </p:txBody>
-      </p:sp>
-      <p:sp>
-        <p:nvSpPr>
-          <p:cNvPr id="6" name="Shape 4"/>
-          <p:cNvSpPr/>
-          <p:nvPr/>
-        </p:nvSpPr>
-        <p:spPr>
-          <a:xfrm>
-            <a:off x="640080" y="2633472"/>
-            <a:ext cx="219456" cy="219456"/>
-          </a:xfrm>
-          <a:prstGeom prst="ellipse">
-            <a:avLst/>
-          </a:prstGeom>
-          <a:solidFill>
-            <a:srgbClr val="3F6F5F"/>
-          </a:solidFill>
-          <a:ln/>
-        </p:spPr>
-      </p:sp>
-      <p:sp>
-        <p:nvSpPr>
-          <p:cNvPr id="7" name="Text 5"/>
-          <p:cNvSpPr/>
-          <p:nvPr/>
-        </p:nvSpPr>
-        <p:spPr>
-          <a:xfrm>
-            <a:off x="1051560" y="2560320"/>
-            <a:ext cx="10424160" cy="365760"/>
+              <a:t>Tokens, stemming, the corpus, the chart's axis, each hides a decision you made.</a:t>
+            </a:r>
+            <a:endParaRPr lang="en-US" sz="1450" dirty="0"/>
+          </a:p>
+        </p:txBody>
+      </p:sp>
+      <p:sp>
+        <p:nvSpPr>
+          <p:cNvPr id="12" name="Shape 10"/>
+          <p:cNvSpPr/>
+          <p:nvPr/>
+        </p:nvSpPr>
+        <p:spPr>
+          <a:xfrm>
+            <a:off x="640080" y="4983480"/>
+            <a:ext cx="457200" cy="457200"/>
+          </a:xfrm>
+          <a:prstGeom prst="roundRect">
+            <a:avLst>
+              <a:gd name="adj" fmla="val 16000"/>
+            </a:avLst>
+          </a:prstGeom>
+          <a:solidFill>
+            <a:srgbClr val="B9852F"/>
+          </a:solidFill>
+          <a:ln/>
+        </p:spPr>
+      </p:sp>
+      <p:sp>
+        <p:nvSpPr>
+          <p:cNvPr id="13" name="Text 11"/>
+          <p:cNvSpPr/>
+          <p:nvPr/>
+        </p:nvSpPr>
+        <p:spPr>
+          <a:xfrm>
+            <a:off x="640080" y="4983480"/>
+            <a:ext cx="457200" cy="457200"/>
           </a:xfrm>
           <a:prstGeom prst="rect">
             <a:avLst/>
@@ -3765,362 +3385,104 @@
           <a:bodyPr wrap="square" rtlCol="0" anchor="ctr"/>
           <a:lstStyle/>
           <a:p>
+            <a:pPr algn="ctr" indent="0" marL="0">
+              <a:buNone/>
+            </a:pPr>
+            <a:r>
+              <a:rPr lang="en-US" sz="2000" b="1" dirty="0">
+                <a:solidFill>
+                  <a:srgbClr val="FFFFFF"/>
+                </a:solidFill>
+                <a:latin typeface="Cambria" pitchFamily="34" charset="0"/>
+                <a:ea typeface="Cambria" pitchFamily="34" charset="-122"/>
+                <a:cs typeface="Cambria" pitchFamily="34" charset="-120"/>
+              </a:rPr>
+              <a:t>3</a:t>
+            </a:r>
+            <a:endParaRPr lang="en-US" sz="2000" dirty="0"/>
+          </a:p>
+        </p:txBody>
+      </p:sp>
+      <p:sp>
+        <p:nvSpPr>
+          <p:cNvPr id="14" name="Text 12"/>
+          <p:cNvSpPr/>
+          <p:nvPr/>
+        </p:nvSpPr>
+        <p:spPr>
+          <a:xfrm>
+            <a:off x="1371600" y="4946904"/>
+            <a:ext cx="10332720" cy="411480"/>
+          </a:xfrm>
+          <a:prstGeom prst="rect">
+            <a:avLst/>
+          </a:prstGeom>
+          <a:noFill/>
+          <a:ln/>
+        </p:spPr>
+        <p:txBody>
+          <a:bodyPr wrap="square" rtlCol="0" anchor="ctr"/>
+          <a:lstStyle/>
+          <a:p>
             <a:pPr indent="0" marL="0">
               <a:buNone/>
             </a:pPr>
             <a:r>
-              <a:rPr lang="en-US" sz="1500" b="1" dirty="0">
-                <a:solidFill>
-                  <a:srgbClr val="3F6F5F"/>
+              <a:rPr lang="en-US" sz="1900" b="1" dirty="0">
+                <a:solidFill>
+                  <a:srgbClr val="B9852F"/>
+                </a:solidFill>
+                <a:latin typeface="Cambria" pitchFamily="34" charset="0"/>
+                <a:ea typeface="Cambria" pitchFamily="34" charset="-122"/>
+                <a:cs typeface="Cambria" pitchFamily="34" charset="-120"/>
+              </a:rPr>
+              <a:t>Is the difference real?</a:t>
+            </a:r>
+            <a:endParaRPr lang="en-US" sz="1900" dirty="0"/>
+          </a:p>
+        </p:txBody>
+      </p:sp>
+      <p:sp>
+        <p:nvSpPr>
+          <p:cNvPr id="15" name="Text 13"/>
+          <p:cNvSpPr/>
+          <p:nvPr/>
+        </p:nvSpPr>
+        <p:spPr>
+          <a:xfrm>
+            <a:off x="1371600" y="5367528"/>
+            <a:ext cx="10332720" cy="914400"/>
+          </a:xfrm>
+          <a:prstGeom prst="rect">
+            <a:avLst/>
+          </a:prstGeom>
+          <a:noFill/>
+          <a:ln/>
+        </p:spPr>
+        <p:txBody>
+          <a:bodyPr wrap="square" rtlCol="0" anchor="t">
+            <a:spAutoFit/>
+          </a:bodyPr>
+          <a:lstStyle/>
+          <a:p>
+            <a:pPr indent="0" marL="0">
+              <a:lnSpc>
+                <a:spcPct val="112000"/>
+              </a:lnSpc>
+              <a:buNone/>
+            </a:pPr>
+            <a:r>
+              <a:rPr lang="en-US" sz="1450" dirty="0">
+                <a:solidFill>
+                  <a:srgbClr val="1A1A1A"/>
                 </a:solidFill>
                 <a:latin typeface="Calibri" pitchFamily="34" charset="0"/>
                 <a:ea typeface="Calibri" pitchFamily="34" charset="-122"/>
                 <a:cs typeface="Calibri" pitchFamily="34" charset="-120"/>
               </a:rPr>
-              <a:t>Supplement</a:t>
-            </a:r>
-            <a:endParaRPr lang="en-US" sz="1500" dirty="0"/>
-          </a:p>
-        </p:txBody>
-      </p:sp>
-      <p:sp>
-        <p:nvSpPr>
-          <p:cNvPr id="8" name="Text 6"/>
-          <p:cNvSpPr/>
-          <p:nvPr/>
-        </p:nvSpPr>
-        <p:spPr>
-          <a:xfrm>
-            <a:off x="1051560" y="2944368"/>
-            <a:ext cx="10424160" cy="731520"/>
-          </a:xfrm>
-          <a:prstGeom prst="rect">
-            <a:avLst/>
-          </a:prstGeom>
-          <a:noFill/>
-          <a:ln/>
-        </p:spPr>
-        <p:txBody>
-          <a:bodyPr wrap="square" rtlCol="0" anchor="t">
-            <a:spAutoFit/>
-          </a:bodyPr>
-          <a:lstStyle/>
-          <a:p>
-            <a:pPr indent="0" marL="0">
-              <a:buNone/>
-            </a:pPr>
-            <a:r>
-              <a:rPr lang="en-US" sz="1400" dirty="0">
-                <a:solidFill>
-                  <a:srgbClr val="1A1A1A"/>
-                </a:solidFill>
-                <a:latin typeface="Calibri" pitchFamily="34" charset="0"/>
-                <a:ea typeface="Calibri" pitchFamily="34" charset="-122"/>
-                <a:cs typeface="Calibri" pitchFamily="34" charset="-120"/>
-              </a:rPr>
-              <a:t>Zipf's law, the straight line in every text</a:t>
-            </a:r>
-            <a:endParaRPr lang="en-US" sz="1400" dirty="0"/>
-          </a:p>
-        </p:txBody>
-      </p:sp>
-      <p:sp>
-        <p:nvSpPr>
-          <p:cNvPr id="9" name="Shape 7"/>
-          <p:cNvSpPr/>
-          <p:nvPr/>
-        </p:nvSpPr>
-        <p:spPr>
-          <a:xfrm>
-            <a:off x="640080" y="3593592"/>
-            <a:ext cx="219456" cy="219456"/>
-          </a:xfrm>
-          <a:prstGeom prst="ellipse">
-            <a:avLst/>
-          </a:prstGeom>
-          <a:solidFill>
-            <a:srgbClr val="B9852F"/>
-          </a:solidFill>
-          <a:ln/>
-        </p:spPr>
-      </p:sp>
-      <p:sp>
-        <p:nvSpPr>
-          <p:cNvPr id="10" name="Text 8"/>
-          <p:cNvSpPr/>
-          <p:nvPr/>
-        </p:nvSpPr>
-        <p:spPr>
-          <a:xfrm>
-            <a:off x="1051560" y="3520440"/>
-            <a:ext cx="10424160" cy="365760"/>
-          </a:xfrm>
-          <a:prstGeom prst="rect">
-            <a:avLst/>
-          </a:prstGeom>
-          <a:noFill/>
-          <a:ln/>
-        </p:spPr>
-        <p:txBody>
-          <a:bodyPr wrap="square" rtlCol="0" anchor="ctr"/>
-          <a:lstStyle/>
-          <a:p>
-            <a:pPr indent="0" marL="0">
-              <a:buNone/>
-            </a:pPr>
-            <a:r>
-              <a:rPr lang="en-US" sz="1500" b="1" dirty="0">
-                <a:solidFill>
-                  <a:srgbClr val="B9852F"/>
-                </a:solidFill>
-                <a:latin typeface="Calibri" pitchFamily="34" charset="0"/>
-                <a:ea typeface="Calibri" pitchFamily="34" charset="-122"/>
-                <a:cs typeface="Calibri" pitchFamily="34" charset="-120"/>
-              </a:rPr>
-              <a:t>Deeper (optional)</a:t>
-            </a:r>
-            <a:endParaRPr lang="en-US" sz="1500" dirty="0"/>
-          </a:p>
-        </p:txBody>
-      </p:sp>
-      <p:sp>
-        <p:nvSpPr>
-          <p:cNvPr id="11" name="Text 9"/>
-          <p:cNvSpPr/>
-          <p:nvPr/>
-        </p:nvSpPr>
-        <p:spPr>
-          <a:xfrm>
-            <a:off x="1051560" y="3904488"/>
-            <a:ext cx="10424160" cy="731520"/>
-          </a:xfrm>
-          <a:prstGeom prst="rect">
-            <a:avLst/>
-          </a:prstGeom>
-          <a:noFill/>
-          <a:ln/>
-        </p:spPr>
-        <p:txBody>
-          <a:bodyPr wrap="square" rtlCol="0" anchor="t">
-            <a:spAutoFit/>
-          </a:bodyPr>
-          <a:lstStyle/>
-          <a:p>
-            <a:pPr indent="0" marL="0">
-              <a:buNone/>
-            </a:pPr>
-            <a:r>
-              <a:rPr lang="en-US" sz="1400" dirty="0">
-                <a:solidFill>
-                  <a:srgbClr val="1A1A1A"/>
-                </a:solidFill>
-                <a:latin typeface="Calibri" pitchFamily="34" charset="0"/>
-                <a:ea typeface="Calibri" pitchFamily="34" charset="-122"/>
-                <a:cs typeface="Calibri" pitchFamily="34" charset="-120"/>
-              </a:rPr>
-              <a:t>Grimmer &amp;amp; Stewart, Text as Data (2013), §1–4: all quantitative models of language are wrong, but some are useful</a:t>
-            </a:r>
-            <a:endParaRPr lang="en-US" sz="1400" dirty="0"/>
-          </a:p>
-        </p:txBody>
-      </p:sp>
-      <p:sp>
-        <p:nvSpPr>
-          <p:cNvPr id="12" name="Shape 10"/>
-          <p:cNvSpPr/>
-          <p:nvPr/>
-        </p:nvSpPr>
-        <p:spPr>
-          <a:xfrm>
-            <a:off x="640080" y="4553712"/>
-            <a:ext cx="219456" cy="219456"/>
-          </a:xfrm>
-          <a:prstGeom prst="ellipse">
-            <a:avLst/>
-          </a:prstGeom>
-          <a:solidFill>
-            <a:srgbClr val="3F6F5F"/>
-          </a:solidFill>
-          <a:ln/>
-        </p:spPr>
-      </p:sp>
-      <p:sp>
-        <p:nvSpPr>
-          <p:cNvPr id="13" name="Text 11"/>
-          <p:cNvSpPr/>
-          <p:nvPr/>
-        </p:nvSpPr>
-        <p:spPr>
-          <a:xfrm>
-            <a:off x="1051560" y="4480560"/>
-            <a:ext cx="10424160" cy="365760"/>
-          </a:xfrm>
-          <a:prstGeom prst="rect">
-            <a:avLst/>
-          </a:prstGeom>
-          <a:noFill/>
-          <a:ln/>
-        </p:spPr>
-        <p:txBody>
-          <a:bodyPr wrap="square" rtlCol="0" anchor="ctr"/>
-          <a:lstStyle/>
-          <a:p>
-            <a:pPr indent="0" marL="0">
-              <a:buNone/>
-            </a:pPr>
-            <a:r>
-              <a:rPr lang="en-US" sz="1500" b="1" dirty="0">
-                <a:solidFill>
-                  <a:srgbClr val="3F6F5F"/>
-                </a:solidFill>
-                <a:latin typeface="Calibri" pitchFamily="34" charset="0"/>
-                <a:ea typeface="Calibri" pitchFamily="34" charset="-122"/>
-                <a:cs typeface="Calibri" pitchFamily="34" charset="-120"/>
-              </a:rPr>
-              <a:t>Sketch</a:t>
-            </a:r>
-            <a:endParaRPr lang="en-US" sz="1500" dirty="0"/>
-          </a:p>
-        </p:txBody>
-      </p:sp>
-      <p:sp>
-        <p:nvSpPr>
-          <p:cNvPr id="14" name="Text 12"/>
-          <p:cNvSpPr/>
-          <p:nvPr/>
-        </p:nvSpPr>
-        <p:spPr>
-          <a:xfrm>
-            <a:off x="1051560" y="4864608"/>
-            <a:ext cx="10424160" cy="731520"/>
-          </a:xfrm>
-          <a:prstGeom prst="rect">
-            <a:avLst/>
-          </a:prstGeom>
-          <a:noFill/>
-          <a:ln/>
-        </p:spPr>
-        <p:txBody>
-          <a:bodyPr wrap="square" rtlCol="0" anchor="t">
-            <a:spAutoFit/>
-          </a:bodyPr>
-          <a:lstStyle/>
-          <a:p>
-            <a:pPr indent="0" marL="0">
-              <a:buNone/>
-            </a:pPr>
-            <a:r>
-              <a:rPr lang="en-US" sz="1400" dirty="0">
-                <a:solidFill>
-                  <a:srgbClr val="1A1A1A"/>
-                </a:solidFill>
-                <a:latin typeface="Calibri" pitchFamily="34" charset="0"/>
-                <a:ea typeface="Calibri" pitchFamily="34" charset="-122"/>
-                <a:cs typeface="Calibri" pitchFamily="34" charset="-120"/>
-              </a:rPr>
-              <a:t>Count something in a text you care about; one chart; one sentence naming a choice. If the count compares two things, shuffle-test the gap.</a:t>
-            </a:r>
-            <a:endParaRPr lang="en-US" sz="1400" dirty="0"/>
-          </a:p>
-        </p:txBody>
-      </p:sp>
-      <p:sp>
-        <p:nvSpPr>
-          <p:cNvPr id="15" name="Shape 13"/>
-          <p:cNvSpPr/>
-          <p:nvPr/>
-        </p:nvSpPr>
-        <p:spPr>
-          <a:xfrm>
-            <a:off x="640080" y="5513832"/>
-            <a:ext cx="219456" cy="219456"/>
-          </a:xfrm>
-          <a:prstGeom prst="ellipse">
-            <a:avLst/>
-          </a:prstGeom>
-          <a:solidFill>
-            <a:srgbClr val="7A3B2E"/>
-          </a:solidFill>
-          <a:ln/>
-        </p:spPr>
-      </p:sp>
-      <p:sp>
-        <p:nvSpPr>
-          <p:cNvPr id="16" name="Text 14"/>
-          <p:cNvSpPr/>
-          <p:nvPr/>
-        </p:nvSpPr>
-        <p:spPr>
-          <a:xfrm>
-            <a:off x="1051560" y="5440680"/>
-            <a:ext cx="10424160" cy="365760"/>
-          </a:xfrm>
-          <a:prstGeom prst="rect">
-            <a:avLst/>
-          </a:prstGeom>
-          <a:noFill/>
-          <a:ln/>
-        </p:spPr>
-        <p:txBody>
-          <a:bodyPr wrap="square" rtlCol="0" anchor="ctr"/>
-          <a:lstStyle/>
-          <a:p>
-            <a:pPr indent="0" marL="0">
-              <a:buNone/>
-            </a:pPr>
-            <a:r>
-              <a:rPr lang="en-US" sz="1500" b="1" dirty="0">
-                <a:solidFill>
-                  <a:srgbClr val="7A3B2E"/>
-                </a:solidFill>
-                <a:latin typeface="Calibri" pitchFamily="34" charset="0"/>
-                <a:ea typeface="Calibri" pitchFamily="34" charset="-122"/>
-                <a:cs typeface="Calibri" pitchFamily="34" charset="-120"/>
-              </a:rPr>
-              <a:t>Check (AI closed)</a:t>
-            </a:r>
-            <a:endParaRPr lang="en-US" sz="1500" dirty="0"/>
-          </a:p>
-        </p:txBody>
-      </p:sp>
-      <p:sp>
-        <p:nvSpPr>
-          <p:cNvPr id="17" name="Text 15"/>
-          <p:cNvSpPr/>
-          <p:nvPr/>
-        </p:nvSpPr>
-        <p:spPr>
-          <a:xfrm>
-            <a:off x="1051560" y="5824728"/>
-            <a:ext cx="10424160" cy="731520"/>
-          </a:xfrm>
-          <a:prstGeom prst="rect">
-            <a:avLst/>
-          </a:prstGeom>
-          <a:noFill/>
-          <a:ln/>
-        </p:spPr>
-        <p:txBody>
-          <a:bodyPr wrap="square" rtlCol="0" anchor="t">
-            <a:spAutoFit/>
-          </a:bodyPr>
-          <a:lstStyle/>
-          <a:p>
-            <a:pPr indent="0" marL="0">
-              <a:buNone/>
-            </a:pPr>
-            <a:r>
-              <a:rPr lang="en-US" sz="1400" dirty="0">
-                <a:solidFill>
-                  <a:srgbClr val="1A1A1A"/>
-                </a:solidFill>
-                <a:latin typeface="Calibri" pitchFamily="34" charset="0"/>
-                <a:ea typeface="Calibri" pitchFamily="34" charset="-122"/>
-                <a:cs typeface="Calibri" pitchFamily="34" charset="-120"/>
-              </a:rPr>
-              <a:t>Explain it: why two tokenizers split a sentence differently, and what your stemming choice changed. (Competencies 3, 5.)</a:t>
-            </a:r>
-            <a:endParaRPr lang="en-US" sz="1400" dirty="0"/>
+              <a:t>Shuffle the labels and count again, one thousand times; if chance often matches your gap, do not trust it.</a:t>
+            </a:r>
+            <a:endParaRPr lang="en-US" sz="1450" dirty="0"/>
           </a:p>
         </p:txBody>
       </p:sp>
@@ -4135,548 +3497,6 @@
 <file path=ppt/slides/slide12.xml><?xml version="1.0" encoding="utf-8"?>
 <p:sld xmlns:a="http://schemas.openxmlformats.org/drawingml/2006/main" xmlns:r="http://schemas.openxmlformats.org/officeDocument/2006/relationships" xmlns:p="http://schemas.openxmlformats.org/presentationml/2006/main">
   <p:cSld name="Slide 12">
-    <p:bg>
-      <p:bgPr>
-        <a:solidFill>
-          <a:srgbClr val="FFFFFF"/>
-        </a:solidFill>
-      </p:bgPr>
-    </p:bg>
-    <p:spTree>
-      <p:nvGrpSpPr>
-        <p:cNvPr id="1" name=""/>
-        <p:cNvGrpSpPr/>
-        <p:nvPr/>
-      </p:nvGrpSpPr>
-      <p:grpSpPr>
-        <a:xfrm>
-          <a:off x="0" y="0"/>
-          <a:ext cx="0" cy="0"/>
-          <a:chOff x="0" y="0"/>
-          <a:chExt cx="0" cy="0"/>
-        </a:xfrm>
-      </p:grpSpPr>
-      <p:sp>
-        <p:nvSpPr>
-          <p:cNvPr id="2" name="Text 0"/>
-          <p:cNvSpPr/>
-          <p:nvPr/>
-        </p:nvSpPr>
-        <p:spPr>
-          <a:xfrm>
-            <a:off x="640080" y="640080"/>
-            <a:ext cx="10058400" cy="320040"/>
-          </a:xfrm>
-          <a:prstGeom prst="rect">
-            <a:avLst/>
-          </a:prstGeom>
-          <a:noFill/>
-          <a:ln/>
-        </p:spPr>
-        <p:txBody>
-          <a:bodyPr wrap="square" rtlCol="0" anchor="ctr"/>
-          <a:lstStyle/>
-          <a:p>
-            <a:pPr indent="0" marL="0">
-              <a:buNone/>
-            </a:pPr>
-            <a:r>
-              <a:rPr lang="en-US" sz="1300" b="1" spc="300" kern="0" dirty="0">
-                <a:solidFill>
-                  <a:srgbClr val="7A3B2E"/>
-                </a:solidFill>
-                <a:latin typeface="Calibri" pitchFamily="34" charset="0"/>
-                <a:ea typeface="Calibri" pitchFamily="34" charset="-122"/>
-                <a:cs typeface="Calibri" pitchFamily="34" charset="-120"/>
-              </a:rPr>
-              <a:t>HOW THIS WEEK CONNECTS</a:t>
-            </a:r>
-            <a:endParaRPr lang="en-US" sz="1300" dirty="0"/>
-          </a:p>
-        </p:txBody>
-      </p:sp>
-      <p:sp>
-        <p:nvSpPr>
-          <p:cNvPr id="3" name="Text 1"/>
-          <p:cNvSpPr/>
-          <p:nvPr/>
-        </p:nvSpPr>
-        <p:spPr>
-          <a:xfrm>
-            <a:off x="640080" y="987552"/>
-            <a:ext cx="10058400" cy="640080"/>
-          </a:xfrm>
-          <a:prstGeom prst="rect">
-            <a:avLst/>
-          </a:prstGeom>
-          <a:noFill/>
-          <a:ln/>
-        </p:spPr>
-        <p:txBody>
-          <a:bodyPr wrap="square" rtlCol="0" anchor="ctr"/>
-          <a:lstStyle/>
-          <a:p>
-            <a:pPr indent="0" marL="0">
-              <a:buNone/>
-            </a:pPr>
-            <a:r>
-              <a:rPr lang="en-US" sz="2800" b="1" dirty="0">
-                <a:solidFill>
-                  <a:srgbClr val="1A1A1A"/>
-                </a:solidFill>
-                <a:latin typeface="Cambria" pitchFamily="34" charset="0"/>
-                <a:ea typeface="Cambria" pitchFamily="34" charset="-122"/>
-                <a:cs typeface="Cambria" pitchFamily="34" charset="-120"/>
-              </a:rPr>
-              <a:t>The course's through-lines</a:t>
-            </a:r>
-            <a:endParaRPr lang="en-US" sz="2800" dirty="0"/>
-          </a:p>
-        </p:txBody>
-      </p:sp>
-      <p:sp>
-        <p:nvSpPr>
-          <p:cNvPr id="4" name="Shape 2"/>
-          <p:cNvSpPr/>
-          <p:nvPr/>
-        </p:nvSpPr>
-        <p:spPr>
-          <a:xfrm>
-            <a:off x="640080" y="2057400"/>
-            <a:ext cx="457200" cy="457200"/>
-          </a:xfrm>
-          <a:prstGeom prst="roundRect">
-            <a:avLst>
-              <a:gd name="adj" fmla="val 16000"/>
-            </a:avLst>
-          </a:prstGeom>
-          <a:solidFill>
-            <a:srgbClr val="7A3B2E"/>
-          </a:solidFill>
-          <a:ln/>
-        </p:spPr>
-      </p:sp>
-      <p:sp>
-        <p:nvSpPr>
-          <p:cNvPr id="5" name="Text 3"/>
-          <p:cNvSpPr/>
-          <p:nvPr/>
-        </p:nvSpPr>
-        <p:spPr>
-          <a:xfrm>
-            <a:off x="640080" y="2057400"/>
-            <a:ext cx="457200" cy="457200"/>
-          </a:xfrm>
-          <a:prstGeom prst="rect">
-            <a:avLst/>
-          </a:prstGeom>
-          <a:noFill/>
-          <a:ln/>
-        </p:spPr>
-        <p:txBody>
-          <a:bodyPr wrap="square" rtlCol="0" anchor="ctr"/>
-          <a:lstStyle/>
-          <a:p>
-            <a:pPr algn="ctr" indent="0" marL="0">
-              <a:buNone/>
-            </a:pPr>
-            <a:r>
-              <a:rPr lang="en-US" sz="2000" b="1" dirty="0">
-                <a:solidFill>
-                  <a:srgbClr val="FFFFFF"/>
-                </a:solidFill>
-                <a:latin typeface="Cambria" pitchFamily="34" charset="0"/>
-                <a:ea typeface="Cambria" pitchFamily="34" charset="-122"/>
-                <a:cs typeface="Cambria" pitchFamily="34" charset="-120"/>
-              </a:rPr>
-              <a:t>1</a:t>
-            </a:r>
-            <a:endParaRPr lang="en-US" sz="2000" dirty="0"/>
-          </a:p>
-        </p:txBody>
-      </p:sp>
-      <p:sp>
-        <p:nvSpPr>
-          <p:cNvPr id="6" name="Text 4"/>
-          <p:cNvSpPr/>
-          <p:nvPr/>
-        </p:nvSpPr>
-        <p:spPr>
-          <a:xfrm>
-            <a:off x="1371600" y="2020824"/>
-            <a:ext cx="10332720" cy="411480"/>
-          </a:xfrm>
-          <a:prstGeom prst="rect">
-            <a:avLst/>
-          </a:prstGeom>
-          <a:noFill/>
-          <a:ln/>
-        </p:spPr>
-        <p:txBody>
-          <a:bodyPr wrap="square" rtlCol="0" anchor="ctr"/>
-          <a:lstStyle/>
-          <a:p>
-            <a:pPr indent="0" marL="0">
-              <a:buNone/>
-            </a:pPr>
-            <a:r>
-              <a:rPr lang="en-US" sz="1900" b="1" dirty="0">
-                <a:solidFill>
-                  <a:srgbClr val="7A3B2E"/>
-                </a:solidFill>
-                <a:latin typeface="Cambria" pitchFamily="34" charset="0"/>
-                <a:ea typeface="Cambria" pitchFamily="34" charset="-122"/>
-                <a:cs typeface="Cambria" pitchFamily="34" charset="-120"/>
-              </a:rPr>
-              <a:t>Beyond counting</a:t>
-            </a:r>
-            <a:endParaRPr lang="en-US" sz="1900" dirty="0"/>
-          </a:p>
-        </p:txBody>
-      </p:sp>
-      <p:sp>
-        <p:nvSpPr>
-          <p:cNvPr id="7" name="Text 5"/>
-          <p:cNvSpPr/>
-          <p:nvPr/>
-        </p:nvSpPr>
-        <p:spPr>
-          <a:xfrm>
-            <a:off x="1371600" y="2441448"/>
-            <a:ext cx="10332720" cy="914400"/>
-          </a:xfrm>
-          <a:prstGeom prst="rect">
-            <a:avLst/>
-          </a:prstGeom>
-          <a:noFill/>
-          <a:ln/>
-        </p:spPr>
-        <p:txBody>
-          <a:bodyPr wrap="square" rtlCol="0" anchor="t">
-            <a:spAutoFit/>
-          </a:bodyPr>
-          <a:lstStyle/>
-          <a:p>
-            <a:pPr indent="0" marL="0">
-              <a:lnSpc>
-                <a:spcPct val="112000"/>
-              </a:lnSpc>
-              <a:buNone/>
-            </a:pPr>
-            <a:r>
-              <a:rPr lang="en-US" sz="1450" dirty="0">
-                <a:solidFill>
-                  <a:srgbClr val="1A1A1A"/>
-                </a:solidFill>
-                <a:latin typeface="Calibri" pitchFamily="34" charset="0"/>
-                <a:ea typeface="Calibri" pitchFamily="34" charset="-122"/>
-                <a:cs typeface="Calibri" pitchFamily="34" charset="-120"/>
-              </a:rPr>
-              <a:t>Counting is the simplest tool and has no notion of meaning. Week 5 addresses that limit.</a:t>
-            </a:r>
-            <a:endParaRPr lang="en-US" sz="1450" dirty="0"/>
-          </a:p>
-        </p:txBody>
-      </p:sp>
-      <p:sp>
-        <p:nvSpPr>
-          <p:cNvPr id="8" name="Shape 6"/>
-          <p:cNvSpPr/>
-          <p:nvPr/>
-        </p:nvSpPr>
-        <p:spPr>
-          <a:xfrm>
-            <a:off x="640080" y="3520440"/>
-            <a:ext cx="457200" cy="457200"/>
-          </a:xfrm>
-          <a:prstGeom prst="roundRect">
-            <a:avLst>
-              <a:gd name="adj" fmla="val 16000"/>
-            </a:avLst>
-          </a:prstGeom>
-          <a:solidFill>
-            <a:srgbClr val="3F6F5F"/>
-          </a:solidFill>
-          <a:ln/>
-        </p:spPr>
-      </p:sp>
-      <p:sp>
-        <p:nvSpPr>
-          <p:cNvPr id="9" name="Text 7"/>
-          <p:cNvSpPr/>
-          <p:nvPr/>
-        </p:nvSpPr>
-        <p:spPr>
-          <a:xfrm>
-            <a:off x="640080" y="3520440"/>
-            <a:ext cx="457200" cy="457200"/>
-          </a:xfrm>
-          <a:prstGeom prst="rect">
-            <a:avLst/>
-          </a:prstGeom>
-          <a:noFill/>
-          <a:ln/>
-        </p:spPr>
-        <p:txBody>
-          <a:bodyPr wrap="square" rtlCol="0" anchor="ctr"/>
-          <a:lstStyle/>
-          <a:p>
-            <a:pPr algn="ctr" indent="0" marL="0">
-              <a:buNone/>
-            </a:pPr>
-            <a:r>
-              <a:rPr lang="en-US" sz="2000" b="1" dirty="0">
-                <a:solidFill>
-                  <a:srgbClr val="FFFFFF"/>
-                </a:solidFill>
-                <a:latin typeface="Cambria" pitchFamily="34" charset="0"/>
-                <a:ea typeface="Cambria" pitchFamily="34" charset="-122"/>
-                <a:cs typeface="Cambria" pitchFamily="34" charset="-120"/>
-              </a:rPr>
-              <a:t>2</a:t>
-            </a:r>
-            <a:endParaRPr lang="en-US" sz="2000" dirty="0"/>
-          </a:p>
-        </p:txBody>
-      </p:sp>
-      <p:sp>
-        <p:nvSpPr>
-          <p:cNvPr id="10" name="Text 8"/>
-          <p:cNvSpPr/>
-          <p:nvPr/>
-        </p:nvSpPr>
-        <p:spPr>
-          <a:xfrm>
-            <a:off x="1371600" y="3483864"/>
-            <a:ext cx="10332720" cy="411480"/>
-          </a:xfrm>
-          <a:prstGeom prst="rect">
-            <a:avLst/>
-          </a:prstGeom>
-          <a:noFill/>
-          <a:ln/>
-        </p:spPr>
-        <p:txBody>
-          <a:bodyPr wrap="square" rtlCol="0" anchor="ctr"/>
-          <a:lstStyle/>
-          <a:p>
-            <a:pPr indent="0" marL="0">
-              <a:buNone/>
-            </a:pPr>
-            <a:r>
-              <a:rPr lang="en-US" sz="1900" b="1" dirty="0">
-                <a:solidFill>
-                  <a:srgbClr val="3F6F5F"/>
-                </a:solidFill>
-                <a:latin typeface="Cambria" pitchFamily="34" charset="0"/>
-                <a:ea typeface="Cambria" pitchFamily="34" charset="-122"/>
-                <a:cs typeface="Cambria" pitchFamily="34" charset="-120"/>
-              </a:rPr>
-              <a:t>Every count is a choice</a:t>
-            </a:r>
-            <a:endParaRPr lang="en-US" sz="1900" dirty="0"/>
-          </a:p>
-        </p:txBody>
-      </p:sp>
-      <p:sp>
-        <p:nvSpPr>
-          <p:cNvPr id="11" name="Text 9"/>
-          <p:cNvSpPr/>
-          <p:nvPr/>
-        </p:nvSpPr>
-        <p:spPr>
-          <a:xfrm>
-            <a:off x="1371600" y="3904488"/>
-            <a:ext cx="10332720" cy="914400"/>
-          </a:xfrm>
-          <a:prstGeom prst="rect">
-            <a:avLst/>
-          </a:prstGeom>
-          <a:noFill/>
-          <a:ln/>
-        </p:spPr>
-        <p:txBody>
-          <a:bodyPr wrap="square" rtlCol="0" anchor="t">
-            <a:spAutoFit/>
-          </a:bodyPr>
-          <a:lstStyle/>
-          <a:p>
-            <a:pPr indent="0" marL="0">
-              <a:lnSpc>
-                <a:spcPct val="112000"/>
-              </a:lnSpc>
-              <a:buNone/>
-            </a:pPr>
-            <a:r>
-              <a:rPr lang="en-US" sz="1450" dirty="0">
-                <a:solidFill>
-                  <a:srgbClr val="1A1A1A"/>
-                </a:solidFill>
-                <a:latin typeface="Calibri" pitchFamily="34" charset="0"/>
-                <a:ea typeface="Calibri" pitchFamily="34" charset="-122"/>
-                <a:cs typeface="Calibri" pitchFamily="34" charset="-120"/>
-              </a:rPr>
-              <a:t>Tokens, stemming, the corpus, the chart's axis, each hides a decision you made.</a:t>
-            </a:r>
-            <a:endParaRPr lang="en-US" sz="1450" dirty="0"/>
-          </a:p>
-        </p:txBody>
-      </p:sp>
-      <p:sp>
-        <p:nvSpPr>
-          <p:cNvPr id="12" name="Shape 10"/>
-          <p:cNvSpPr/>
-          <p:nvPr/>
-        </p:nvSpPr>
-        <p:spPr>
-          <a:xfrm>
-            <a:off x="640080" y="4983480"/>
-            <a:ext cx="457200" cy="457200"/>
-          </a:xfrm>
-          <a:prstGeom prst="roundRect">
-            <a:avLst>
-              <a:gd name="adj" fmla="val 16000"/>
-            </a:avLst>
-          </a:prstGeom>
-          <a:solidFill>
-            <a:srgbClr val="B9852F"/>
-          </a:solidFill>
-          <a:ln/>
-        </p:spPr>
-      </p:sp>
-      <p:sp>
-        <p:nvSpPr>
-          <p:cNvPr id="13" name="Text 11"/>
-          <p:cNvSpPr/>
-          <p:nvPr/>
-        </p:nvSpPr>
-        <p:spPr>
-          <a:xfrm>
-            <a:off x="640080" y="4983480"/>
-            <a:ext cx="457200" cy="457200"/>
-          </a:xfrm>
-          <a:prstGeom prst="rect">
-            <a:avLst/>
-          </a:prstGeom>
-          <a:noFill/>
-          <a:ln/>
-        </p:spPr>
-        <p:txBody>
-          <a:bodyPr wrap="square" rtlCol="0" anchor="ctr"/>
-          <a:lstStyle/>
-          <a:p>
-            <a:pPr algn="ctr" indent="0" marL="0">
-              <a:buNone/>
-            </a:pPr>
-            <a:r>
-              <a:rPr lang="en-US" sz="2000" b="1" dirty="0">
-                <a:solidFill>
-                  <a:srgbClr val="FFFFFF"/>
-                </a:solidFill>
-                <a:latin typeface="Cambria" pitchFamily="34" charset="0"/>
-                <a:ea typeface="Cambria" pitchFamily="34" charset="-122"/>
-                <a:cs typeface="Cambria" pitchFamily="34" charset="-120"/>
-              </a:rPr>
-              <a:t>3</a:t>
-            </a:r>
-            <a:endParaRPr lang="en-US" sz="2000" dirty="0"/>
-          </a:p>
-        </p:txBody>
-      </p:sp>
-      <p:sp>
-        <p:nvSpPr>
-          <p:cNvPr id="14" name="Text 12"/>
-          <p:cNvSpPr/>
-          <p:nvPr/>
-        </p:nvSpPr>
-        <p:spPr>
-          <a:xfrm>
-            <a:off x="1371600" y="4946904"/>
-            <a:ext cx="10332720" cy="411480"/>
-          </a:xfrm>
-          <a:prstGeom prst="rect">
-            <a:avLst/>
-          </a:prstGeom>
-          <a:noFill/>
-          <a:ln/>
-        </p:spPr>
-        <p:txBody>
-          <a:bodyPr wrap="square" rtlCol="0" anchor="ctr"/>
-          <a:lstStyle/>
-          <a:p>
-            <a:pPr indent="0" marL="0">
-              <a:buNone/>
-            </a:pPr>
-            <a:r>
-              <a:rPr lang="en-US" sz="1900" b="1" dirty="0">
-                <a:solidFill>
-                  <a:srgbClr val="B9852F"/>
-                </a:solidFill>
-                <a:latin typeface="Cambria" pitchFamily="34" charset="0"/>
-                <a:ea typeface="Cambria" pitchFamily="34" charset="-122"/>
-                <a:cs typeface="Cambria" pitchFamily="34" charset="-120"/>
-              </a:rPr>
-              <a:t>Is the difference real?</a:t>
-            </a:r>
-            <a:endParaRPr lang="en-US" sz="1900" dirty="0"/>
-          </a:p>
-        </p:txBody>
-      </p:sp>
-      <p:sp>
-        <p:nvSpPr>
-          <p:cNvPr id="15" name="Text 13"/>
-          <p:cNvSpPr/>
-          <p:nvPr/>
-        </p:nvSpPr>
-        <p:spPr>
-          <a:xfrm>
-            <a:off x="1371600" y="5367528"/>
-            <a:ext cx="10332720" cy="914400"/>
-          </a:xfrm>
-          <a:prstGeom prst="rect">
-            <a:avLst/>
-          </a:prstGeom>
-          <a:noFill/>
-          <a:ln/>
-        </p:spPr>
-        <p:txBody>
-          <a:bodyPr wrap="square" rtlCol="0" anchor="t">
-            <a:spAutoFit/>
-          </a:bodyPr>
-          <a:lstStyle/>
-          <a:p>
-            <a:pPr indent="0" marL="0">
-              <a:lnSpc>
-                <a:spcPct val="112000"/>
-              </a:lnSpc>
-              <a:buNone/>
-            </a:pPr>
-            <a:r>
-              <a:rPr lang="en-US" sz="1450" dirty="0">
-                <a:solidFill>
-                  <a:srgbClr val="1A1A1A"/>
-                </a:solidFill>
-                <a:latin typeface="Calibri" pitchFamily="34" charset="0"/>
-                <a:ea typeface="Calibri" pitchFamily="34" charset="-122"/>
-                <a:cs typeface="Calibri" pitchFamily="34" charset="-120"/>
-              </a:rPr>
-              <a:t>Shuffle the labels and count again, one thousand times; if chance often matches your gap, do not trust it.</a:t>
-            </a:r>
-            <a:endParaRPr lang="en-US" sz="1450" dirty="0"/>
-          </a:p>
-        </p:txBody>
-      </p:sp>
-    </p:spTree>
-  </p:cSld>
-  <p:clrMapOvr>
-    <a:masterClrMapping/>
-  </p:clrMapOvr>
-</p:sld>
-</file>
-
-<file path=ppt/slides/slide13.xml><?xml version="1.0" encoding="utf-8"?>
-<p:sld xmlns:a="http://schemas.openxmlformats.org/drawingml/2006/main" xmlns:r="http://schemas.openxmlformats.org/officeDocument/2006/relationships" xmlns:p="http://schemas.openxmlformats.org/presentationml/2006/main">
-  <p:cSld name="Slide 13">
     <p:bg>
       <p:bgPr>
         <a:solidFill>
@@ -6412,7 +5232,7 @@
                 <a:ea typeface="Cambria" pitchFamily="34" charset="-122"/>
                 <a:cs typeface="Cambria" pitchFamily="34" charset="-120"/>
               </a:rPr>
-              <a:t>What the bag throws away</a:t>
+              <a:t>Keyness: what makes a voice distinctive</a:t>
             </a:r>
             <a:endParaRPr lang="en-US" sz="3000" dirty="0"/>
           </a:p>
@@ -6447,7 +5267,7 @@
         <p:spPr>
           <a:xfrm>
             <a:off x="1097280" y="2240280"/>
-            <a:ext cx="10607040" cy="813816"/>
+            <a:ext cx="10607040" cy="1017270"/>
           </a:xfrm>
           <a:prstGeom prst="rect">
             <a:avLst/>
@@ -6468,7 +5288,7 @@
               <a:buNone/>
             </a:pPr>
             <a:r>
-              <a:rPr lang="en-US" sz="1500" dirty="0">
+              <a:rPr lang="en-US" sz="1650" dirty="0">
                 <a:solidFill>
                   <a:srgbClr val="1A1A1A"/>
                 </a:solidFill>
@@ -6476,9 +5296,9 @@
                 <a:ea typeface="Calibri" pitchFamily="34" charset="-122"/>
                 <a:cs typeface="Calibri" pitchFamily="34" charset="-120"/>
               </a:rPr>
-              <a:t>A bag-of-words keeps the vocabulary and discards the order: "the critics loved it, the public did not" and "the public loved it, the critics did not" are the same bag.</a:t>
-            </a:r>
-            <a:endParaRPr lang="en-US" sz="1500" dirty="0"/>
+              <a:t>For every word: how much likelier is it in corpus A than corpus B? A log-odds ratio, smoothed so rare words don't explode.</a:t>
+            </a:r>
+            <a:endParaRPr lang="en-US" sz="1650" dirty="0"/>
           </a:p>
         </p:txBody>
       </p:sp>
@@ -6490,7 +5310,7 @@
         </p:nvSpPr>
         <p:spPr>
           <a:xfrm>
-            <a:off x="640080" y="3145536"/>
+            <a:off x="640080" y="3348990"/>
             <a:ext cx="201168" cy="201168"/>
           </a:xfrm>
           <a:prstGeom prst="ellipse">
@@ -6510,8 +5330,8 @@
         </p:nvSpPr>
         <p:spPr>
           <a:xfrm>
-            <a:off x="1097280" y="3054096"/>
-            <a:ext cx="10607040" cy="813816"/>
+            <a:off x="1097280" y="3257550"/>
+            <a:ext cx="10607040" cy="1017270"/>
           </a:xfrm>
           <a:prstGeom prst="rect">
             <a:avLst/>
@@ -6532,7 +5352,7 @@
               <a:buNone/>
             </a:pPr>
             <a:r>
-              <a:rPr lang="en-US" sz="1500" dirty="0">
+              <a:rPr lang="en-US" sz="1650" dirty="0">
                 <a:solidFill>
                   <a:srgbClr val="1A1A1A"/>
                 </a:solidFill>
@@ -6540,9 +5360,9 @@
                 <a:ea typeface="Calibri" pitchFamily="34" charset="-122"/>
                 <a:cs typeface="Calibri" pitchFamily="34" charset="-120"/>
               </a:rPr>
-              <a:t>Negation goes with it: "not good, actually bad" and "not bad, actually good" count identically.</a:t>
-            </a:r>
-            <a:endParaRPr lang="en-US" sz="1500" dirty="0"/>
+              <a:t>Strongly positive = distinctively A. Strongly negative = distinctively B. The middle is shared language.</a:t>
+            </a:r>
+            <a:endParaRPr lang="en-US" sz="1650" dirty="0"/>
           </a:p>
         </p:txBody>
       </p:sp>
@@ -6554,7 +5374,7 @@
         </p:nvSpPr>
         <p:spPr>
           <a:xfrm>
-            <a:off x="640080" y="3959352"/>
+            <a:off x="640080" y="4366260"/>
             <a:ext cx="201168" cy="201168"/>
           </a:xfrm>
           <a:prstGeom prst="ellipse">
@@ -6574,8 +5394,8 @@
         </p:nvSpPr>
         <p:spPr>
           <a:xfrm>
-            <a:off x="1097280" y="3867912"/>
-            <a:ext cx="10607040" cy="813816"/>
+            <a:off x="1097280" y="4274820"/>
+            <a:ext cx="10607040" cy="1017270"/>
           </a:xfrm>
           <a:prstGeom prst="rect">
             <a:avLst/>
@@ -6596,7 +5416,7 @@
               <a:buNone/>
             </a:pPr>
             <a:r>
-              <a:rPr lang="en-US" sz="1500" dirty="0">
+              <a:rPr lang="en-US" sz="1650" dirty="0">
                 <a:solidFill>
                   <a:srgbClr val="1A1A1A"/>
                 </a:solidFill>
@@ -6604,9 +5424,9 @@
                 <a:ea typeface="Calibri" pitchFamily="34" charset="-122"/>
                 <a:cs typeface="Calibri" pitchFamily="34" charset="-120"/>
               </a:rPr>
-              <a:t>The bag-of-pixels loses the same way: a portrait and its shuffled pixels share the average color, the brightness, and the histogram. Composition is to images what word order is to sentences.</a:t>
-            </a:r>
-            <a:endParaRPr lang="en-US" sz="1500" dirty="0"/>
+              <a:t>She Giggles, He Gallops is exactly this method: verbs after "she" vs. "he" in 2,000 screenplays. Women snuggle, giggle, squeal; men gallop, strap, shoot.</a:t>
+            </a:r>
+            <a:endParaRPr lang="en-US" sz="1650" dirty="0"/>
           </a:p>
         </p:txBody>
       </p:sp>
@@ -6618,7 +5438,7 @@
         </p:nvSpPr>
         <p:spPr>
           <a:xfrm>
-            <a:off x="640080" y="4773168"/>
+            <a:off x="640080" y="5383530"/>
             <a:ext cx="201168" cy="201168"/>
           </a:xfrm>
           <a:prstGeom prst="ellipse">
@@ -6638,8 +5458,8 @@
         </p:nvSpPr>
         <p:spPr>
           <a:xfrm>
-            <a:off x="1097280" y="4681728"/>
-            <a:ext cx="10607040" cy="813816"/>
+            <a:off x="1097280" y="5292090"/>
+            <a:ext cx="10607040" cy="1017270"/>
           </a:xfrm>
           <a:prstGeom prst="rect">
             <a:avLst/>
@@ -6660,7 +5480,7 @@
               <a:buNone/>
             </a:pPr>
             <a:r>
-              <a:rPr lang="en-US" sz="1500" dirty="0">
+              <a:rPr lang="en-US" sz="1650" dirty="0">
                 <a:solidFill>
                   <a:srgbClr val="1A1A1A"/>
                 </a:solidFill>
@@ -6668,73 +5488,9 @@
                 <a:ea typeface="Calibri" pitchFamily="34" charset="-122"/>
                 <a:cs typeface="Calibri" pitchFamily="34" charset="-120"/>
               </a:rPr>
-              <a:t>Every count this week carries that loss. It is a trade made for scale, and naming it is part of the method.</a:t>
-            </a:r>
-            <a:endParaRPr lang="en-US" sz="1500" dirty="0"/>
-          </a:p>
-        </p:txBody>
-      </p:sp>
-      <p:sp>
-        <p:nvSpPr>
-          <p:cNvPr id="13" name="Shape 11"/>
-          <p:cNvSpPr/>
-          <p:nvPr/>
-        </p:nvSpPr>
-        <p:spPr>
-          <a:xfrm>
-            <a:off x="640080" y="5586984"/>
-            <a:ext cx="201168" cy="201168"/>
-          </a:xfrm>
-          <a:prstGeom prst="ellipse">
-            <a:avLst/>
-          </a:prstGeom>
-          <a:solidFill>
-            <a:srgbClr val="3F6F5F"/>
-          </a:solidFill>
-          <a:ln/>
-        </p:spPr>
-      </p:sp>
-      <p:sp>
-        <p:nvSpPr>
-          <p:cNvPr id="14" name="Text 12"/>
-          <p:cNvSpPr/>
-          <p:nvPr/>
-        </p:nvSpPr>
-        <p:spPr>
-          <a:xfrm>
-            <a:off x="1097280" y="5495544"/>
-            <a:ext cx="10607040" cy="813816"/>
-          </a:xfrm>
-          <a:prstGeom prst="rect">
-            <a:avLst/>
-          </a:prstGeom>
-          <a:noFill/>
-          <a:ln/>
-        </p:spPr>
-        <p:txBody>
-          <a:bodyPr wrap="square" rtlCol="0" anchor="t">
-            <a:spAutoFit/>
-          </a:bodyPr>
-          <a:lstStyle/>
-          <a:p>
-            <a:pPr indent="0" marL="0">
-              <a:lnSpc>
-                <a:spcPct val="112000"/>
-              </a:lnSpc>
-              <a:buNone/>
-            </a:pPr>
-            <a:r>
-              <a:rPr lang="en-US" sz="1500" dirty="0">
-                <a:solidFill>
-                  <a:srgbClr val="1A1A1A"/>
-                </a:solidFill>
-                <a:latin typeface="Calibri" pitchFamily="34" charset="0"/>
-                <a:ea typeface="Calibri" pitchFamily="34" charset="-122"/>
-                <a:cs typeface="Calibri" pitchFamily="34" charset="-120"/>
-              </a:rPr>
-              <a:t>Week 5's embeddings exist to recover some of what the bag cannot hold: words represented by the company they keep.</a:t>
-            </a:r>
-            <a:endParaRPr lang="en-US" sz="1500" dirty="0"/>
+              <a:t>The corpus pair is a choice: this artist against pop, this subreddit against a novel. Different pair, different "distinctive."</a:t>
+            </a:r>
+            <a:endParaRPr lang="en-US" sz="1650" dirty="0"/>
           </a:p>
         </p:txBody>
       </p:sp>
@@ -6864,7 +5620,7 @@
                 <a:ea typeface="Cambria" pitchFamily="34" charset="-122"/>
                 <a:cs typeface="Cambria" pitchFamily="34" charset="-120"/>
               </a:rPr>
-              <a:t>Keyness: what makes a voice distinctive</a:t>
+              <a:t>The shuffle test: is the gap real?</a:t>
             </a:r>
             <a:endParaRPr lang="en-US" sz="3000" dirty="0"/>
           </a:p>
@@ -6928,7 +5684,7 @@
                 <a:ea typeface="Calibri" pitchFamily="34" charset="-122"/>
                 <a:cs typeface="Calibri" pitchFamily="34" charset="-120"/>
               </a:rPr>
-              <a:t>For every word: how much likelier is it in corpus A than corpus B? A log-odds ratio, smoothed so rare words don't explode.</a:t>
+              <a:t>The question: could randomly dealt labels produce a gap this large?</a:t>
             </a:r>
             <a:endParaRPr lang="en-US" sz="1650" dirty="0"/>
           </a:p>
@@ -6992,7 +5748,7 @@
                 <a:ea typeface="Calibri" pitchFamily="34" charset="-122"/>
                 <a:cs typeface="Calibri" pitchFamily="34" charset="-120"/>
               </a:rPr>
-              <a:t>Strongly positive = distinctively A. Strongly negative = distinctively B. The middle is shared language.</a:t>
+              <a:t>Shuffle the labels, recount, 1,000 times. Mark where the real gap lands in that pile.</a:t>
             </a:r>
             <a:endParaRPr lang="en-US" sz="1650" dirty="0"/>
           </a:p>
@@ -7056,7 +5812,7 @@
                 <a:ea typeface="Calibri" pitchFamily="34" charset="-122"/>
                 <a:cs typeface="Calibri" pitchFamily="34" charset="-120"/>
               </a:rPr>
-              <a:t>She Giggles, He Gallops is exactly this method: verbs after "she" vs. "he" in 2,000 screenplays. Women snuggle, giggle, squeal; men gallop, strap, shoot.</a:t>
+              <a:t>Chance rarely matches it: a finding. Chance matches it often: a coincidence.</a:t>
             </a:r>
             <a:endParaRPr lang="en-US" sz="1650" dirty="0"/>
           </a:p>
@@ -7120,7 +5876,7 @@
                 <a:ea typeface="Calibri" pitchFamily="34" charset="-122"/>
                 <a:cs typeface="Calibri" pitchFamily="34" charset="-120"/>
               </a:rPr>
-              <a:t>The corpus pair is a choice: this artist against pop, this subreddit against a novel. Different pair, different "distinctive."</a:t>
+              <a:t>It says "probably not chance." It never says "big enough to matter." Effect size is your argument to make.</a:t>
             </a:r>
             <a:endParaRPr lang="en-US" sz="1650" dirty="0"/>
           </a:p>
@@ -7160,23 +5916,42 @@
       </p:grpSpPr>
       <p:sp>
         <p:nvSpPr>
-          <p:cNvPr id="2" name="Shape 0"/>
-          <p:cNvSpPr/>
-          <p:nvPr/>
-        </p:nvSpPr>
-        <p:spPr>
-          <a:xfrm>
-            <a:off x="0" y="0"/>
-            <a:ext cx="164592" cy="6858000"/>
-          </a:xfrm>
-          <a:prstGeom prst="rect">
-            <a:avLst/>
-          </a:prstGeom>
-          <a:solidFill>
-            <a:srgbClr val="3F6F5F"/>
-          </a:solidFill>
-          <a:ln/>
-        </p:spPr>
+          <p:cNvPr id="2" name="Text 0"/>
+          <p:cNvSpPr/>
+          <p:nvPr/>
+        </p:nvSpPr>
+        <p:spPr>
+          <a:xfrm>
+            <a:off x="640080" y="731520"/>
+            <a:ext cx="10058400" cy="731520"/>
+          </a:xfrm>
+          <a:prstGeom prst="rect">
+            <a:avLst/>
+          </a:prstGeom>
+          <a:noFill/>
+          <a:ln/>
+        </p:spPr>
+        <p:txBody>
+          <a:bodyPr wrap="square" rtlCol="0" anchor="ctr"/>
+          <a:lstStyle/>
+          <a:p>
+            <a:pPr indent="0" marL="0">
+              <a:buNone/>
+            </a:pPr>
+            <a:r>
+              <a:rPr lang="en-US" sz="3000" b="1" dirty="0">
+                <a:solidFill>
+                  <a:srgbClr val="1A1A1A"/>
+                </a:solidFill>
+                <a:latin typeface="Cambria" pitchFamily="34" charset="0"/>
+                <a:ea typeface="Cambria" pitchFamily="34" charset="-122"/>
+                <a:cs typeface="Cambria" pitchFamily="34" charset="-120"/>
+              </a:rPr>
+              <a:t>Three modes today</a:t>
+            </a:r>
+            <a:endParaRPr lang="en-US" sz="3000" dirty="0"/>
+          </a:p>
+        </p:txBody>
       </p:sp>
       <p:sp>
         <p:nvSpPr>
@@ -7186,8 +5961,8 @@
         </p:nvSpPr>
         <p:spPr>
           <a:xfrm>
-            <a:off x="640080" y="640080"/>
-            <a:ext cx="10058400" cy="320040"/>
+            <a:off x="640080" y="1417320"/>
+            <a:ext cx="10058400" cy="365760"/>
           </a:xfrm>
           <a:prstGeom prst="rect">
             <a:avLst/>
@@ -7203,30 +5978,111 @@
               <a:buNone/>
             </a:pPr>
             <a:r>
-              <a:rPr lang="en-US" sz="1200" b="1" spc="300" kern="0" dirty="0">
-                <a:solidFill>
-                  <a:srgbClr val="3F6F5F"/>
+              <a:rPr lang="en-US" sz="1400" i="1" dirty="0">
+                <a:solidFill>
+                  <a:srgbClr val="6B6B63"/>
                 </a:solidFill>
                 <a:latin typeface="Calibri" pitchFamily="34" charset="0"/>
                 <a:ea typeface="Calibri" pitchFamily="34" charset="-122"/>
                 <a:cs typeface="Calibri" pitchFamily="34" charset="-120"/>
               </a:rPr>
-              <a:t>WEEK 2 · KEY POINTS</a:t>
-            </a:r>
-            <a:endParaRPr lang="en-US" sz="1200" dirty="0"/>
-          </a:p>
-        </p:txBody>
-      </p:sp>
-      <p:sp>
-        <p:nvSpPr>
-          <p:cNvPr id="4" name="Text 2"/>
-          <p:cNvSpPr/>
-          <p:nvPr/>
-        </p:nvSpPr>
-        <p:spPr>
-          <a:xfrm>
-            <a:off x="640080" y="1005840"/>
-            <a:ext cx="10881360" cy="914400"/>
+              <a:t>about a third of the session each</a:t>
+            </a:r>
+            <a:endParaRPr lang="en-US" sz="1400" dirty="0"/>
+          </a:p>
+        </p:txBody>
+      </p:sp>
+      <p:sp>
+        <p:nvSpPr>
+          <p:cNvPr id="4" name="Shape 2"/>
+          <p:cNvSpPr/>
+          <p:nvPr/>
+        </p:nvSpPr>
+        <p:spPr>
+          <a:xfrm>
+            <a:off x="640080" y="2194560"/>
+            <a:ext cx="3383280" cy="3291840"/>
+          </a:xfrm>
+          <a:prstGeom prst="roundRect">
+            <a:avLst>
+              <a:gd name="adj" fmla="val 3333"/>
+            </a:avLst>
+          </a:prstGeom>
+          <a:solidFill>
+            <a:srgbClr val="F4EEE8"/>
+          </a:solidFill>
+          <a:ln/>
+        </p:spPr>
+      </p:sp>
+      <p:sp>
+        <p:nvSpPr>
+          <p:cNvPr id="5" name="Shape 3"/>
+          <p:cNvSpPr/>
+          <p:nvPr/>
+        </p:nvSpPr>
+        <p:spPr>
+          <a:xfrm>
+            <a:off x="1051560" y="2606040"/>
+            <a:ext cx="548640" cy="548640"/>
+          </a:xfrm>
+          <a:prstGeom prst="ellipse">
+            <a:avLst/>
+          </a:prstGeom>
+          <a:solidFill>
+            <a:srgbClr val="7A3B2E"/>
+          </a:solidFill>
+          <a:ln/>
+        </p:spPr>
+      </p:sp>
+      <p:sp>
+        <p:nvSpPr>
+          <p:cNvPr id="6" name="Text 4"/>
+          <p:cNvSpPr/>
+          <p:nvPr/>
+        </p:nvSpPr>
+        <p:spPr>
+          <a:xfrm>
+            <a:off x="1005840" y="3383280"/>
+            <a:ext cx="2651760" cy="548640"/>
+          </a:xfrm>
+          <a:prstGeom prst="rect">
+            <a:avLst/>
+          </a:prstGeom>
+          <a:noFill/>
+          <a:ln/>
+        </p:spPr>
+        <p:txBody>
+          <a:bodyPr wrap="square" rtlCol="0" anchor="ctr"/>
+          <a:lstStyle/>
+          <a:p>
+            <a:pPr indent="0" marL="0">
+              <a:buNone/>
+            </a:pPr>
+            <a:r>
+              <a:rPr lang="en-US" sz="2100" b="1" dirty="0">
+                <a:solidFill>
+                  <a:srgbClr val="1A1A1A"/>
+                </a:solidFill>
+                <a:latin typeface="Cambria" pitchFamily="34" charset="0"/>
+                <a:ea typeface="Cambria" pitchFamily="34" charset="-122"/>
+                <a:cs typeface="Cambria" pitchFamily="34" charset="-120"/>
+              </a:rPr>
+              <a:t>Lecture / demo</a:t>
+            </a:r>
+            <a:endParaRPr lang="en-US" sz="2100" dirty="0"/>
+          </a:p>
+        </p:txBody>
+      </p:sp>
+      <p:sp>
+        <p:nvSpPr>
+          <p:cNvPr id="7" name="Text 5"/>
+          <p:cNvSpPr/>
+          <p:nvPr/>
+        </p:nvSpPr>
+        <p:spPr>
+          <a:xfrm>
+            <a:off x="1005840" y="3977640"/>
+            <a:ext cx="2651760" cy="1371600"/>
           </a:xfrm>
           <a:prstGeom prst="rect">
             <a:avLst/>
@@ -7241,10 +6097,94 @@
           <a:lstStyle/>
           <a:p>
             <a:pPr indent="0" marL="0">
-              <a:buNone/>
-            </a:pPr>
-            <a:r>
-              <a:rPr lang="en-US" sz="3000" b="1" dirty="0">
+              <a:lnSpc>
+                <a:spcPct val="115000"/>
+              </a:lnSpc>
+              <a:buNone/>
+            </a:pPr>
+            <a:r>
+              <a:rPr lang="en-US" sz="1500" dirty="0">
+                <a:solidFill>
+                  <a:srgbClr val="1A1A1A"/>
+                </a:solidFill>
+                <a:latin typeface="Calibri" pitchFamily="34" charset="0"/>
+                <a:ea typeface="Calibri" pitchFamily="34" charset="-122"/>
+                <a:cs typeface="Calibri" pitchFamily="34" charset="-120"/>
+              </a:rPr>
+              <a:t>Advanced counting: baselines, keyness, and the shuffle test</a:t>
+            </a:r>
+            <a:endParaRPr lang="en-US" sz="1500" dirty="0"/>
+          </a:p>
+        </p:txBody>
+      </p:sp>
+      <p:sp>
+        <p:nvSpPr>
+          <p:cNvPr id="8" name="Shape 6"/>
+          <p:cNvSpPr/>
+          <p:nvPr/>
+        </p:nvSpPr>
+        <p:spPr>
+          <a:xfrm>
+            <a:off x="4526280" y="2194560"/>
+            <a:ext cx="3383280" cy="3291840"/>
+          </a:xfrm>
+          <a:prstGeom prst="roundRect">
+            <a:avLst>
+              <a:gd name="adj" fmla="val 3333"/>
+            </a:avLst>
+          </a:prstGeom>
+          <a:solidFill>
+            <a:srgbClr val="F4EEE8"/>
+          </a:solidFill>
+          <a:ln/>
+        </p:spPr>
+      </p:sp>
+      <p:sp>
+        <p:nvSpPr>
+          <p:cNvPr id="9" name="Shape 7"/>
+          <p:cNvSpPr/>
+          <p:nvPr/>
+        </p:nvSpPr>
+        <p:spPr>
+          <a:xfrm>
+            <a:off x="4937760" y="2606040"/>
+            <a:ext cx="548640" cy="548640"/>
+          </a:xfrm>
+          <a:prstGeom prst="ellipse">
+            <a:avLst/>
+          </a:prstGeom>
+          <a:solidFill>
+            <a:srgbClr val="3F6F5F"/>
+          </a:solidFill>
+          <a:ln/>
+        </p:spPr>
+      </p:sp>
+      <p:sp>
+        <p:nvSpPr>
+          <p:cNvPr id="10" name="Text 8"/>
+          <p:cNvSpPr/>
+          <p:nvPr/>
+        </p:nvSpPr>
+        <p:spPr>
+          <a:xfrm>
+            <a:off x="4892040" y="3383280"/>
+            <a:ext cx="2651760" cy="548640"/>
+          </a:xfrm>
+          <a:prstGeom prst="rect">
+            <a:avLst/>
+          </a:prstGeom>
+          <a:noFill/>
+          <a:ln/>
+        </p:spPr>
+        <p:txBody>
+          <a:bodyPr wrap="square" rtlCol="0" anchor="ctr"/>
+          <a:lstStyle/>
+          <a:p>
+            <a:pPr indent="0" marL="0">
+              <a:buNone/>
+            </a:pPr>
+            <a:r>
+              <a:rPr lang="en-US" sz="2100" b="1" dirty="0">
                 <a:solidFill>
                   <a:srgbClr val="1A1A1A"/>
                 </a:solidFill>
@@ -7252,42 +6192,22 @@
                 <a:ea typeface="Cambria" pitchFamily="34" charset="-122"/>
                 <a:cs typeface="Cambria" pitchFamily="34" charset="-120"/>
               </a:rPr>
-              <a:t>The shuffle test: is the gap real?</a:t>
-            </a:r>
-            <a:endParaRPr lang="en-US" sz="3000" dirty="0"/>
-          </a:p>
-        </p:txBody>
-      </p:sp>
-      <p:sp>
-        <p:nvSpPr>
-          <p:cNvPr id="5" name="Shape 3"/>
-          <p:cNvSpPr/>
-          <p:nvPr/>
-        </p:nvSpPr>
-        <p:spPr>
-          <a:xfrm>
-            <a:off x="640080" y="2331720"/>
-            <a:ext cx="201168" cy="201168"/>
-          </a:xfrm>
-          <a:prstGeom prst="ellipse">
-            <a:avLst/>
-          </a:prstGeom>
-          <a:solidFill>
-            <a:srgbClr val="7A3B2E"/>
-          </a:solidFill>
-          <a:ln/>
-        </p:spPr>
-      </p:sp>
-      <p:sp>
-        <p:nvSpPr>
-          <p:cNvPr id="6" name="Text 4"/>
-          <p:cNvSpPr/>
-          <p:nvPr/>
-        </p:nvSpPr>
-        <p:spPr>
-          <a:xfrm>
-            <a:off x="1097280" y="2240280"/>
-            <a:ext cx="10607040" cy="1017270"/>
+              <a:t>Workshop</a:t>
+            </a:r>
+            <a:endParaRPr lang="en-US" sz="2100" dirty="0"/>
+          </a:p>
+        </p:txBody>
+      </p:sp>
+      <p:sp>
+        <p:nvSpPr>
+          <p:cNvPr id="11" name="Text 9"/>
+          <p:cNvSpPr/>
+          <p:nvPr/>
+        </p:nvSpPr>
+        <p:spPr>
+          <a:xfrm>
+            <a:off x="4892040" y="3977640"/>
+            <a:ext cx="2651760" cy="1371600"/>
           </a:xfrm>
           <a:prstGeom prst="rect">
             <a:avLst/>
@@ -7303,12 +6223,12 @@
           <a:p>
             <a:pPr indent="0" marL="0">
               <a:lnSpc>
-                <a:spcPct val="112000"/>
+                <a:spcPct val="115000"/>
               </a:lnSpc>
               <a:buNone/>
             </a:pPr>
             <a:r>
-              <a:rPr lang="en-US" sz="1650" dirty="0">
+              <a:rPr lang="en-US" sz="1500" dirty="0">
                 <a:solidFill>
                   <a:srgbClr val="1A1A1A"/>
                 </a:solidFill>
@@ -7316,42 +6236,103 @@
                 <a:ea typeface="Calibri" pitchFamily="34" charset="-122"/>
                 <a:cs typeface="Calibri" pitchFamily="34" charset="-120"/>
               </a:rPr>
-              <a:t>The question: could randomly dealt labels produce a gap this large?</a:t>
-            </a:r>
-            <a:endParaRPr lang="en-US" sz="1650" dirty="0"/>
-          </a:p>
-        </p:txBody>
-      </p:sp>
-      <p:sp>
-        <p:nvSpPr>
-          <p:cNvPr id="7" name="Shape 5"/>
-          <p:cNvSpPr/>
-          <p:nvPr/>
-        </p:nvSpPr>
-        <p:spPr>
-          <a:xfrm>
-            <a:off x="640080" y="3348990"/>
-            <a:ext cx="201168" cy="201168"/>
+              <a:t>Build hands-on on your own data.</a:t>
+            </a:r>
+            <a:endParaRPr lang="en-US" sz="1500" dirty="0"/>
+          </a:p>
+        </p:txBody>
+      </p:sp>
+      <p:sp>
+        <p:nvSpPr>
+          <p:cNvPr id="12" name="Shape 10"/>
+          <p:cNvSpPr/>
+          <p:nvPr/>
+        </p:nvSpPr>
+        <p:spPr>
+          <a:xfrm>
+            <a:off x="8412480" y="2194560"/>
+            <a:ext cx="3383280" cy="3291840"/>
+          </a:xfrm>
+          <a:prstGeom prst="roundRect">
+            <a:avLst>
+              <a:gd name="adj" fmla="val 3333"/>
+            </a:avLst>
+          </a:prstGeom>
+          <a:solidFill>
+            <a:srgbClr val="F4EEE8"/>
+          </a:solidFill>
+          <a:ln/>
+        </p:spPr>
+      </p:sp>
+      <p:sp>
+        <p:nvSpPr>
+          <p:cNvPr id="13" name="Shape 11"/>
+          <p:cNvSpPr/>
+          <p:nvPr/>
+        </p:nvSpPr>
+        <p:spPr>
+          <a:xfrm>
+            <a:off x="8823960" y="2606040"/>
+            <a:ext cx="548640" cy="548640"/>
           </a:xfrm>
           <a:prstGeom prst="ellipse">
             <a:avLst/>
           </a:prstGeom>
           <a:solidFill>
-            <a:srgbClr val="3F6F5F"/>
-          </a:solidFill>
-          <a:ln/>
-        </p:spPr>
-      </p:sp>
-      <p:sp>
-        <p:nvSpPr>
-          <p:cNvPr id="8" name="Text 6"/>
-          <p:cNvSpPr/>
-          <p:nvPr/>
-        </p:nvSpPr>
-        <p:spPr>
-          <a:xfrm>
-            <a:off x="1097280" y="3257550"/>
-            <a:ext cx="10607040" cy="1017270"/>
+            <a:srgbClr val="B9852F"/>
+          </a:solidFill>
+          <a:ln/>
+        </p:spPr>
+      </p:sp>
+      <p:sp>
+        <p:nvSpPr>
+          <p:cNvPr id="14" name="Text 12"/>
+          <p:cNvSpPr/>
+          <p:nvPr/>
+        </p:nvSpPr>
+        <p:spPr>
+          <a:xfrm>
+            <a:off x="8778240" y="3383280"/>
+            <a:ext cx="2651760" cy="548640"/>
+          </a:xfrm>
+          <a:prstGeom prst="rect">
+            <a:avLst/>
+          </a:prstGeom>
+          <a:noFill/>
+          <a:ln/>
+        </p:spPr>
+        <p:txBody>
+          <a:bodyPr wrap="square" rtlCol="0" anchor="ctr"/>
+          <a:lstStyle/>
+          <a:p>
+            <a:pPr indent="0" marL="0">
+              <a:buNone/>
+            </a:pPr>
+            <a:r>
+              <a:rPr lang="en-US" sz="2100" b="1" dirty="0">
+                <a:solidFill>
+                  <a:srgbClr val="1A1A1A"/>
+                </a:solidFill>
+                <a:latin typeface="Cambria" pitchFamily="34" charset="0"/>
+                <a:ea typeface="Cambria" pitchFamily="34" charset="-122"/>
+                <a:cs typeface="Cambria" pitchFamily="34" charset="-120"/>
+              </a:rPr>
+              <a:t>Discussion</a:t>
+            </a:r>
+            <a:endParaRPr lang="en-US" sz="2100" dirty="0"/>
+          </a:p>
+        </p:txBody>
+      </p:sp>
+      <p:sp>
+        <p:nvSpPr>
+          <p:cNvPr id="15" name="Text 13"/>
+          <p:cNvSpPr/>
+          <p:nvPr/>
+        </p:nvSpPr>
+        <p:spPr>
+          <a:xfrm>
+            <a:off x="8778240" y="3977640"/>
+            <a:ext cx="2651760" cy="1371600"/>
           </a:xfrm>
           <a:prstGeom prst="rect">
             <a:avLst/>
@@ -7367,12 +6348,12 @@
           <a:p>
             <a:pPr indent="0" marL="0">
               <a:lnSpc>
-                <a:spcPct val="112000"/>
+                <a:spcPct val="115000"/>
               </a:lnSpc>
               <a:buNone/>
             </a:pPr>
             <a:r>
-              <a:rPr lang="en-US" sz="1650" dirty="0">
+              <a:rPr lang="en-US" sz="1500" dirty="0">
                 <a:solidFill>
                   <a:srgbClr val="1A1A1A"/>
                 </a:solidFill>
@@ -7380,137 +6361,9 @@
                 <a:ea typeface="Calibri" pitchFamily="34" charset="-122"/>
                 <a:cs typeface="Calibri" pitchFamily="34" charset="-120"/>
               </a:rPr>
-              <a:t>Shuffle the labels, recount, 1,000 times. Mark where the real gap lands in that pile.</a:t>
-            </a:r>
-            <a:endParaRPr lang="en-US" sz="1650" dirty="0"/>
-          </a:p>
-        </p:txBody>
-      </p:sp>
-      <p:sp>
-        <p:nvSpPr>
-          <p:cNvPr id="9" name="Shape 7"/>
-          <p:cNvSpPr/>
-          <p:nvPr/>
-        </p:nvSpPr>
-        <p:spPr>
-          <a:xfrm>
-            <a:off x="640080" y="4366260"/>
-            <a:ext cx="201168" cy="201168"/>
-          </a:xfrm>
-          <a:prstGeom prst="ellipse">
-            <a:avLst/>
-          </a:prstGeom>
-          <a:solidFill>
-            <a:srgbClr val="B9852F"/>
-          </a:solidFill>
-          <a:ln/>
-        </p:spPr>
-      </p:sp>
-      <p:sp>
-        <p:nvSpPr>
-          <p:cNvPr id="10" name="Text 8"/>
-          <p:cNvSpPr/>
-          <p:nvPr/>
-        </p:nvSpPr>
-        <p:spPr>
-          <a:xfrm>
-            <a:off x="1097280" y="4274820"/>
-            <a:ext cx="10607040" cy="1017270"/>
-          </a:xfrm>
-          <a:prstGeom prst="rect">
-            <a:avLst/>
-          </a:prstGeom>
-          <a:noFill/>
-          <a:ln/>
-        </p:spPr>
-        <p:txBody>
-          <a:bodyPr wrap="square" rtlCol="0" anchor="t">
-            <a:spAutoFit/>
-          </a:bodyPr>
-          <a:lstStyle/>
-          <a:p>
-            <a:pPr indent="0" marL="0">
-              <a:lnSpc>
-                <a:spcPct val="112000"/>
-              </a:lnSpc>
-              <a:buNone/>
-            </a:pPr>
-            <a:r>
-              <a:rPr lang="en-US" sz="1650" dirty="0">
-                <a:solidFill>
-                  <a:srgbClr val="1A1A1A"/>
-                </a:solidFill>
-                <a:latin typeface="Calibri" pitchFamily="34" charset="0"/>
-                <a:ea typeface="Calibri" pitchFamily="34" charset="-122"/>
-                <a:cs typeface="Calibri" pitchFamily="34" charset="-120"/>
-              </a:rPr>
-              <a:t>Chance rarely matches it: a finding. Chance matches it often: a coincidence.</a:t>
-            </a:r>
-            <a:endParaRPr lang="en-US" sz="1650" dirty="0"/>
-          </a:p>
-        </p:txBody>
-      </p:sp>
-      <p:sp>
-        <p:nvSpPr>
-          <p:cNvPr id="11" name="Shape 9"/>
-          <p:cNvSpPr/>
-          <p:nvPr/>
-        </p:nvSpPr>
-        <p:spPr>
-          <a:xfrm>
-            <a:off x="640080" y="5383530"/>
-            <a:ext cx="201168" cy="201168"/>
-          </a:xfrm>
-          <a:prstGeom prst="ellipse">
-            <a:avLst/>
-          </a:prstGeom>
-          <a:solidFill>
-            <a:srgbClr val="7A3B2E"/>
-          </a:solidFill>
-          <a:ln/>
-        </p:spPr>
-      </p:sp>
-      <p:sp>
-        <p:nvSpPr>
-          <p:cNvPr id="12" name="Text 10"/>
-          <p:cNvSpPr/>
-          <p:nvPr/>
-        </p:nvSpPr>
-        <p:spPr>
-          <a:xfrm>
-            <a:off x="1097280" y="5292090"/>
-            <a:ext cx="10607040" cy="1017270"/>
-          </a:xfrm>
-          <a:prstGeom prst="rect">
-            <a:avLst/>
-          </a:prstGeom>
-          <a:noFill/>
-          <a:ln/>
-        </p:spPr>
-        <p:txBody>
-          <a:bodyPr wrap="square" rtlCol="0" anchor="t">
-            <a:spAutoFit/>
-          </a:bodyPr>
-          <a:lstStyle/>
-          <a:p>
-            <a:pPr indent="0" marL="0">
-              <a:lnSpc>
-                <a:spcPct val="112000"/>
-              </a:lnSpc>
-              <a:buNone/>
-            </a:pPr>
-            <a:r>
-              <a:rPr lang="en-US" sz="1650" dirty="0">
-                <a:solidFill>
-                  <a:srgbClr val="1A1A1A"/>
-                </a:solidFill>
-                <a:latin typeface="Calibri" pitchFamily="34" charset="0"/>
-                <a:ea typeface="Calibri" pitchFamily="34" charset="-122"/>
-                <a:cs typeface="Calibri" pitchFamily="34" charset="-120"/>
-              </a:rPr>
-              <a:t>It says "probably not chance." It never says "big enough to matter." Effect size is your argument to make.</a:t>
-            </a:r>
-            <a:endParaRPr lang="en-US" sz="1650" dirty="0"/>
+              <a:t>Interrogate the study, debate it, or critique each other's work.</a:t>
+            </a:r>
+            <a:endParaRPr lang="en-US" sz="1500" dirty="0"/>
           </a:p>
         </p:txBody>
       </p:sp>
@@ -7554,7 +6407,7 @@
         </p:nvSpPr>
         <p:spPr>
           <a:xfrm>
-            <a:off x="640080" y="731520"/>
+            <a:off x="640080" y="640080"/>
             <a:ext cx="10058400" cy="731520"/>
           </a:xfrm>
           <a:prstGeom prst="rect">
@@ -7579,7 +6432,7 @@
                 <a:ea typeface="Cambria" pitchFamily="34" charset="-122"/>
                 <a:cs typeface="Cambria" pitchFamily="34" charset="-120"/>
               </a:rPr>
-              <a:t>Three modes today</a:t>
+              <a:t>The session</a:t>
             </a:r>
             <a:endParaRPr lang="en-US" sz="3000" dirty="0"/>
           </a:p>
@@ -7587,14 +6440,36 @@
       </p:sp>
       <p:sp>
         <p:nvSpPr>
-          <p:cNvPr id="3" name="Text 1"/>
-          <p:cNvSpPr/>
-          <p:nvPr/>
-        </p:nvSpPr>
-        <p:spPr>
-          <a:xfrm>
-            <a:off x="640080" y="1417320"/>
-            <a:ext cx="10058400" cy="365760"/>
+          <p:cNvPr id="3" name="Shape 1"/>
+          <p:cNvSpPr/>
+          <p:nvPr/>
+        </p:nvSpPr>
+        <p:spPr>
+          <a:xfrm>
+            <a:off x="640080" y="1572768"/>
+            <a:ext cx="868680" cy="338328"/>
+          </a:xfrm>
+          <a:prstGeom prst="roundRect">
+            <a:avLst>
+              <a:gd name="adj" fmla="val 16216"/>
+            </a:avLst>
+          </a:prstGeom>
+          <a:solidFill>
+            <a:srgbClr val="7A3B2E"/>
+          </a:solidFill>
+          <a:ln/>
+        </p:spPr>
+      </p:sp>
+      <p:sp>
+        <p:nvSpPr>
+          <p:cNvPr id="4" name="Text 2"/>
+          <p:cNvSpPr/>
+          <p:nvPr/>
+        </p:nvSpPr>
+        <p:spPr>
+          <a:xfrm>
+            <a:off x="640080" y="1572768"/>
+            <a:ext cx="868680" cy="338328"/>
           </a:xfrm>
           <a:prstGeom prst="rect">
             <a:avLst/>
@@ -7606,136 +6481,52 @@
           <a:bodyPr wrap="square" rtlCol="0" anchor="ctr"/>
           <a:lstStyle/>
           <a:p>
-            <a:pPr indent="0" marL="0">
-              <a:buNone/>
-            </a:pPr>
-            <a:r>
-              <a:rPr lang="en-US" sz="1400" i="1" dirty="0">
-                <a:solidFill>
-                  <a:srgbClr val="6B6B63"/>
+            <a:pPr algn="ctr" indent="0" marL="0">
+              <a:buNone/>
+            </a:pPr>
+            <a:r>
+              <a:rPr lang="en-US" sz="1100" b="1" dirty="0">
+                <a:solidFill>
+                  <a:srgbClr val="FFFFFF"/>
                 </a:solidFill>
                 <a:latin typeface="Calibri" pitchFamily="34" charset="0"/>
                 <a:ea typeface="Calibri" pitchFamily="34" charset="-122"/>
                 <a:cs typeface="Calibri" pitchFamily="34" charset="-120"/>
               </a:rPr>
-              <a:t>about a third of the session each</a:t>
-            </a:r>
-            <a:endParaRPr lang="en-US" sz="1400" dirty="0"/>
-          </a:p>
-        </p:txBody>
-      </p:sp>
-      <p:sp>
-        <p:nvSpPr>
-          <p:cNvPr id="4" name="Shape 2"/>
-          <p:cNvSpPr/>
-          <p:nvPr/>
-        </p:nvSpPr>
-        <p:spPr>
-          <a:xfrm>
-            <a:off x="640080" y="2194560"/>
-            <a:ext cx="3383280" cy="3291840"/>
-          </a:xfrm>
-          <a:prstGeom prst="roundRect">
-            <a:avLst>
-              <a:gd name="adj" fmla="val 3333"/>
-            </a:avLst>
-          </a:prstGeom>
-          <a:solidFill>
-            <a:srgbClr val="F4EEE8"/>
-          </a:solidFill>
-          <a:ln/>
-        </p:spPr>
-      </p:sp>
-      <p:sp>
-        <p:nvSpPr>
-          <p:cNvPr id="5" name="Shape 3"/>
-          <p:cNvSpPr/>
-          <p:nvPr/>
-        </p:nvSpPr>
-        <p:spPr>
-          <a:xfrm>
-            <a:off x="1051560" y="2606040"/>
-            <a:ext cx="548640" cy="548640"/>
-          </a:xfrm>
-          <a:prstGeom prst="ellipse">
-            <a:avLst/>
-          </a:prstGeom>
-          <a:solidFill>
-            <a:srgbClr val="7A3B2E"/>
-          </a:solidFill>
-          <a:ln/>
-        </p:spPr>
-      </p:sp>
-      <p:sp>
-        <p:nvSpPr>
-          <p:cNvPr id="6" name="Text 4"/>
-          <p:cNvSpPr/>
-          <p:nvPr/>
-        </p:nvSpPr>
-        <p:spPr>
-          <a:xfrm>
-            <a:off x="1005840" y="3383280"/>
-            <a:ext cx="2651760" cy="548640"/>
-          </a:xfrm>
-          <a:prstGeom prst="rect">
-            <a:avLst/>
-          </a:prstGeom>
-          <a:noFill/>
-          <a:ln/>
-        </p:spPr>
-        <p:txBody>
-          <a:bodyPr wrap="square" rtlCol="0" anchor="ctr"/>
-          <a:lstStyle/>
-          <a:p>
-            <a:pPr indent="0" marL="0">
-              <a:buNone/>
-            </a:pPr>
-            <a:r>
-              <a:rPr lang="en-US" sz="2100" b="1" dirty="0">
-                <a:solidFill>
-                  <a:srgbClr val="1A1A1A"/>
-                </a:solidFill>
-                <a:latin typeface="Cambria" pitchFamily="34" charset="0"/>
-                <a:ea typeface="Cambria" pitchFamily="34" charset="-122"/>
-                <a:cs typeface="Cambria" pitchFamily="34" charset="-120"/>
-              </a:rPr>
-              <a:t>Lecture / demo</a:t>
-            </a:r>
-            <a:endParaRPr lang="en-US" sz="2100" dirty="0"/>
-          </a:p>
-        </p:txBody>
-      </p:sp>
-      <p:sp>
-        <p:nvSpPr>
-          <p:cNvPr id="7" name="Text 5"/>
-          <p:cNvSpPr/>
-          <p:nvPr/>
-        </p:nvSpPr>
-        <p:spPr>
-          <a:xfrm>
-            <a:off x="1005840" y="3977640"/>
-            <a:ext cx="2651760" cy="1371600"/>
-          </a:xfrm>
-          <a:prstGeom prst="rect">
-            <a:avLst/>
-          </a:prstGeom>
-          <a:noFill/>
-          <a:ln/>
-        </p:spPr>
-        <p:txBody>
-          <a:bodyPr wrap="square" rtlCol="0" anchor="t">
+              <a:t>0:00</a:t>
+            </a:r>
+            <a:endParaRPr lang="en-US" sz="1100" dirty="0"/>
+          </a:p>
+        </p:txBody>
+      </p:sp>
+      <p:sp>
+        <p:nvSpPr>
+          <p:cNvPr id="5" name="Text 3"/>
+          <p:cNvSpPr/>
+          <p:nvPr/>
+        </p:nvSpPr>
+        <p:spPr>
+          <a:xfrm>
+            <a:off x="1691640" y="1554480"/>
+            <a:ext cx="9646920" cy="448056"/>
+          </a:xfrm>
+          <a:prstGeom prst="rect">
+            <a:avLst/>
+          </a:prstGeom>
+          <a:noFill/>
+          <a:ln/>
+        </p:spPr>
+        <p:txBody>
+          <a:bodyPr wrap="square" rtlCol="0" anchor="ctr">
             <a:spAutoFit/>
           </a:bodyPr>
           <a:lstStyle/>
           <a:p>
             <a:pPr indent="0" marL="0">
-              <a:lnSpc>
-                <a:spcPct val="115000"/>
-              </a:lnSpc>
-              <a:buNone/>
-            </a:pPr>
-            <a:r>
-              <a:rPr lang="en-US" sz="1500" dirty="0">
+              <a:buNone/>
+            </a:pPr>
+            <a:r>
+              <a:rPr lang="en-US" sz="1100" dirty="0">
                 <a:solidFill>
                   <a:srgbClr val="1A1A1A"/>
                 </a:solidFill>
@@ -7743,64 +6534,44 @@
                 <a:ea typeface="Calibri" pitchFamily="34" charset="-122"/>
                 <a:cs typeface="Calibri" pitchFamily="34" charset="-120"/>
               </a:rPr>
-              <a:t>Advanced counting: baselines, keyness, and the shuffle test</a:t>
-            </a:r>
-            <a:endParaRPr lang="en-US" sz="1500" dirty="0"/>
-          </a:p>
-        </p:txBody>
-      </p:sp>
-      <p:sp>
-        <p:nvSpPr>
-          <p:cNvPr id="8" name="Shape 6"/>
-          <p:cNvSpPr/>
-          <p:nvPr/>
-        </p:nvSpPr>
-        <p:spPr>
-          <a:xfrm>
-            <a:off x="4526280" y="2194560"/>
-            <a:ext cx="3383280" cy="3291840"/>
+              <a:t>Warm-up retrieval.</a:t>
+            </a:r>
+            <a:endParaRPr lang="en-US" sz="1100" dirty="0"/>
+          </a:p>
+        </p:txBody>
+      </p:sp>
+      <p:sp>
+        <p:nvSpPr>
+          <p:cNvPr id="6" name="Shape 4"/>
+          <p:cNvSpPr/>
+          <p:nvPr/>
+        </p:nvSpPr>
+        <p:spPr>
+          <a:xfrm>
+            <a:off x="640080" y="2020824"/>
+            <a:ext cx="868680" cy="338328"/>
           </a:xfrm>
           <a:prstGeom prst="roundRect">
             <a:avLst>
-              <a:gd name="adj" fmla="val 3333"/>
+              <a:gd name="adj" fmla="val 16216"/>
             </a:avLst>
           </a:prstGeom>
           <a:solidFill>
-            <a:srgbClr val="F4EEE8"/>
-          </a:solidFill>
-          <a:ln/>
-        </p:spPr>
-      </p:sp>
-      <p:sp>
-        <p:nvSpPr>
-          <p:cNvPr id="9" name="Shape 7"/>
-          <p:cNvSpPr/>
-          <p:nvPr/>
-        </p:nvSpPr>
-        <p:spPr>
-          <a:xfrm>
-            <a:off x="4937760" y="2606040"/>
-            <a:ext cx="548640" cy="548640"/>
-          </a:xfrm>
-          <a:prstGeom prst="ellipse">
-            <a:avLst/>
-          </a:prstGeom>
-          <a:solidFill>
-            <a:srgbClr val="3F6F5F"/>
-          </a:solidFill>
-          <a:ln/>
-        </p:spPr>
-      </p:sp>
-      <p:sp>
-        <p:nvSpPr>
-          <p:cNvPr id="10" name="Text 8"/>
-          <p:cNvSpPr/>
-          <p:nvPr/>
-        </p:nvSpPr>
-        <p:spPr>
-          <a:xfrm>
-            <a:off x="4892040" y="3383280"/>
-            <a:ext cx="2651760" cy="548640"/>
+            <a:srgbClr val="7A3B2E"/>
+          </a:solidFill>
+          <a:ln/>
+        </p:spPr>
+      </p:sp>
+      <p:sp>
+        <p:nvSpPr>
+          <p:cNvPr id="7" name="Text 5"/>
+          <p:cNvSpPr/>
+          <p:nvPr/>
+        </p:nvSpPr>
+        <p:spPr>
+          <a:xfrm>
+            <a:off x="640080" y="2020824"/>
+            <a:ext cx="868680" cy="338328"/>
           </a:xfrm>
           <a:prstGeom prst="rect">
             <a:avLst/>
@@ -7812,180 +6583,52 @@
           <a:bodyPr wrap="square" rtlCol="0" anchor="ctr"/>
           <a:lstStyle/>
           <a:p>
-            <a:pPr indent="0" marL="0">
-              <a:buNone/>
-            </a:pPr>
-            <a:r>
-              <a:rPr lang="en-US" sz="2100" b="1" dirty="0">
-                <a:solidFill>
-                  <a:srgbClr val="1A1A1A"/>
-                </a:solidFill>
-                <a:latin typeface="Cambria" pitchFamily="34" charset="0"/>
-                <a:ea typeface="Cambria" pitchFamily="34" charset="-122"/>
-                <a:cs typeface="Cambria" pitchFamily="34" charset="-120"/>
-              </a:rPr>
-              <a:t>Workshop</a:t>
-            </a:r>
-            <a:endParaRPr lang="en-US" sz="2100" dirty="0"/>
-          </a:p>
-        </p:txBody>
-      </p:sp>
-      <p:sp>
-        <p:nvSpPr>
-          <p:cNvPr id="11" name="Text 9"/>
-          <p:cNvSpPr/>
-          <p:nvPr/>
-        </p:nvSpPr>
-        <p:spPr>
-          <a:xfrm>
-            <a:off x="4892040" y="3977640"/>
-            <a:ext cx="2651760" cy="1371600"/>
-          </a:xfrm>
-          <a:prstGeom prst="rect">
-            <a:avLst/>
-          </a:prstGeom>
-          <a:noFill/>
-          <a:ln/>
-        </p:spPr>
-        <p:txBody>
-          <a:bodyPr wrap="square" rtlCol="0" anchor="t">
-            <a:spAutoFit/>
-          </a:bodyPr>
-          <a:lstStyle/>
-          <a:p>
-            <a:pPr indent="0" marL="0">
-              <a:lnSpc>
-                <a:spcPct val="115000"/>
-              </a:lnSpc>
-              <a:buNone/>
-            </a:pPr>
-            <a:r>
-              <a:rPr lang="en-US" sz="1500" dirty="0">
-                <a:solidFill>
-                  <a:srgbClr val="1A1A1A"/>
+            <a:pPr algn="ctr" indent="0" marL="0">
+              <a:buNone/>
+            </a:pPr>
+            <a:r>
+              <a:rPr lang="en-US" sz="1100" b="1" dirty="0">
+                <a:solidFill>
+                  <a:srgbClr val="FFFFFF"/>
                 </a:solidFill>
                 <a:latin typeface="Calibri" pitchFamily="34" charset="0"/>
                 <a:ea typeface="Calibri" pitchFamily="34" charset="-122"/>
                 <a:cs typeface="Calibri" pitchFamily="34" charset="-120"/>
               </a:rPr>
-              <a:t>Build hands-on on your own data.</a:t>
-            </a:r>
-            <a:endParaRPr lang="en-US" sz="1500" dirty="0"/>
-          </a:p>
-        </p:txBody>
-      </p:sp>
-      <p:sp>
-        <p:nvSpPr>
-          <p:cNvPr id="12" name="Shape 10"/>
-          <p:cNvSpPr/>
-          <p:nvPr/>
-        </p:nvSpPr>
-        <p:spPr>
-          <a:xfrm>
-            <a:off x="8412480" y="2194560"/>
-            <a:ext cx="3383280" cy="3291840"/>
-          </a:xfrm>
-          <a:prstGeom prst="roundRect">
-            <a:avLst>
-              <a:gd name="adj" fmla="val 3333"/>
-            </a:avLst>
-          </a:prstGeom>
-          <a:solidFill>
-            <a:srgbClr val="F4EEE8"/>
-          </a:solidFill>
-          <a:ln/>
-        </p:spPr>
-      </p:sp>
-      <p:sp>
-        <p:nvSpPr>
-          <p:cNvPr id="13" name="Shape 11"/>
-          <p:cNvSpPr/>
-          <p:nvPr/>
-        </p:nvSpPr>
-        <p:spPr>
-          <a:xfrm>
-            <a:off x="8823960" y="2606040"/>
-            <a:ext cx="548640" cy="548640"/>
-          </a:xfrm>
-          <a:prstGeom prst="ellipse">
-            <a:avLst/>
-          </a:prstGeom>
-          <a:solidFill>
-            <a:srgbClr val="B9852F"/>
-          </a:solidFill>
-          <a:ln/>
-        </p:spPr>
-      </p:sp>
-      <p:sp>
-        <p:nvSpPr>
-          <p:cNvPr id="14" name="Text 12"/>
-          <p:cNvSpPr/>
-          <p:nvPr/>
-        </p:nvSpPr>
-        <p:spPr>
-          <a:xfrm>
-            <a:off x="8778240" y="3383280"/>
-            <a:ext cx="2651760" cy="548640"/>
-          </a:xfrm>
-          <a:prstGeom prst="rect">
-            <a:avLst/>
-          </a:prstGeom>
-          <a:noFill/>
-          <a:ln/>
-        </p:spPr>
-        <p:txBody>
-          <a:bodyPr wrap="square" rtlCol="0" anchor="ctr"/>
-          <a:lstStyle/>
-          <a:p>
-            <a:pPr indent="0" marL="0">
-              <a:buNone/>
-            </a:pPr>
-            <a:r>
-              <a:rPr lang="en-US" sz="2100" b="1" dirty="0">
-                <a:solidFill>
-                  <a:srgbClr val="1A1A1A"/>
-                </a:solidFill>
-                <a:latin typeface="Cambria" pitchFamily="34" charset="0"/>
-                <a:ea typeface="Cambria" pitchFamily="34" charset="-122"/>
-                <a:cs typeface="Cambria" pitchFamily="34" charset="-120"/>
-              </a:rPr>
-              <a:t>Discussion</a:t>
-            </a:r>
-            <a:endParaRPr lang="en-US" sz="2100" dirty="0"/>
-          </a:p>
-        </p:txBody>
-      </p:sp>
-      <p:sp>
-        <p:nvSpPr>
-          <p:cNvPr id="15" name="Text 13"/>
-          <p:cNvSpPr/>
-          <p:nvPr/>
-        </p:nvSpPr>
-        <p:spPr>
-          <a:xfrm>
-            <a:off x="8778240" y="3977640"/>
-            <a:ext cx="2651760" cy="1371600"/>
-          </a:xfrm>
-          <a:prstGeom prst="rect">
-            <a:avLst/>
-          </a:prstGeom>
-          <a:noFill/>
-          <a:ln/>
-        </p:spPr>
-        <p:txBody>
-          <a:bodyPr wrap="square" rtlCol="0" anchor="t">
+              <a:t>0:05</a:t>
+            </a:r>
+            <a:endParaRPr lang="en-US" sz="1100" dirty="0"/>
+          </a:p>
+        </p:txBody>
+      </p:sp>
+      <p:sp>
+        <p:nvSpPr>
+          <p:cNvPr id="8" name="Text 6"/>
+          <p:cNvSpPr/>
+          <p:nvPr/>
+        </p:nvSpPr>
+        <p:spPr>
+          <a:xfrm>
+            <a:off x="1691640" y="2002536"/>
+            <a:ext cx="9646920" cy="448056"/>
+          </a:xfrm>
+          <a:prstGeom prst="rect">
+            <a:avLst/>
+          </a:prstGeom>
+          <a:noFill/>
+          <a:ln/>
+        </p:spPr>
+        <p:txBody>
+          <a:bodyPr wrap="square" rtlCol="0" anchor="ctr">
             <a:spAutoFit/>
           </a:bodyPr>
           <a:lstStyle/>
           <a:p>
             <a:pPr indent="0" marL="0">
-              <a:lnSpc>
-                <a:spcPct val="115000"/>
-              </a:lnSpc>
-              <a:buNone/>
-            </a:pPr>
-            <a:r>
-              <a:rPr lang="en-US" sz="1500" dirty="0">
+              <a:buNone/>
+            </a:pPr>
+            <a:r>
+              <a:rPr lang="en-US" sz="1100" dirty="0">
                 <a:solidFill>
                   <a:srgbClr val="1A1A1A"/>
                 </a:solidFill>
@@ -7993,9 +6636,825 @@
                 <a:ea typeface="Calibri" pitchFamily="34" charset="-122"/>
                 <a:cs typeface="Calibri" pitchFamily="34" charset="-120"/>
               </a:rPr>
-              <a:t>Interrogate the study, debate it, or critique each other's work.</a:t>
-            </a:r>
-            <a:endParaRPr lang="en-US" sz="1500" dirty="0"/>
+              <a:t>The trial: claim, objection, re-run-without-fiction rebuttal, "interpret with care." One named choice is the chart: the hockey-stick shape depends on its y-axis and smoothing.</a:t>
+            </a:r>
+            <a:endParaRPr lang="en-US" sz="1100" dirty="0"/>
+          </a:p>
+        </p:txBody>
+      </p:sp>
+      <p:sp>
+        <p:nvSpPr>
+          <p:cNvPr id="9" name="Shape 7"/>
+          <p:cNvSpPr/>
+          <p:nvPr/>
+        </p:nvSpPr>
+        <p:spPr>
+          <a:xfrm>
+            <a:off x="640080" y="2468880"/>
+            <a:ext cx="868680" cy="338328"/>
+          </a:xfrm>
+          <a:prstGeom prst="roundRect">
+            <a:avLst>
+              <a:gd name="adj" fmla="val 16216"/>
+            </a:avLst>
+          </a:prstGeom>
+          <a:solidFill>
+            <a:srgbClr val="7A3B2E"/>
+          </a:solidFill>
+          <a:ln/>
+        </p:spPr>
+      </p:sp>
+      <p:sp>
+        <p:nvSpPr>
+          <p:cNvPr id="10" name="Text 8"/>
+          <p:cNvSpPr/>
+          <p:nvPr/>
+        </p:nvSpPr>
+        <p:spPr>
+          <a:xfrm>
+            <a:off x="640080" y="2468880"/>
+            <a:ext cx="868680" cy="338328"/>
+          </a:xfrm>
+          <a:prstGeom prst="rect">
+            <a:avLst/>
+          </a:prstGeom>
+          <a:noFill/>
+          <a:ln/>
+        </p:spPr>
+        <p:txBody>
+          <a:bodyPr wrap="square" rtlCol="0" anchor="ctr"/>
+          <a:lstStyle/>
+          <a:p>
+            <a:pPr algn="ctr" indent="0" marL="0">
+              <a:buNone/>
+            </a:pPr>
+            <a:r>
+              <a:rPr lang="en-US" sz="1100" b="1" dirty="0">
+                <a:solidFill>
+                  <a:srgbClr val="FFFFFF"/>
+                </a:solidFill>
+                <a:latin typeface="Calibri" pitchFamily="34" charset="0"/>
+                <a:ea typeface="Calibri" pitchFamily="34" charset="-122"/>
+                <a:cs typeface="Calibri" pitchFamily="34" charset="-120"/>
+              </a:rPr>
+              <a:t>0:25</a:t>
+            </a:r>
+            <a:endParaRPr lang="en-US" sz="1100" dirty="0"/>
+          </a:p>
+        </p:txBody>
+      </p:sp>
+      <p:sp>
+        <p:nvSpPr>
+          <p:cNvPr id="11" name="Text 9"/>
+          <p:cNvSpPr/>
+          <p:nvPr/>
+        </p:nvSpPr>
+        <p:spPr>
+          <a:xfrm>
+            <a:off x="1691640" y="2450592"/>
+            <a:ext cx="9646920" cy="448056"/>
+          </a:xfrm>
+          <a:prstGeom prst="rect">
+            <a:avLst/>
+          </a:prstGeom>
+          <a:noFill/>
+          <a:ln/>
+        </p:spPr>
+        <p:txBody>
+          <a:bodyPr wrap="square" rtlCol="0" anchor="ctr">
+            <a:spAutoFit/>
+          </a:bodyPr>
+          <a:lstStyle/>
+          <a:p>
+            <a:pPr indent="0" marL="0">
+              <a:buNone/>
+            </a:pPr>
+            <a:r>
+              <a:rPr lang="en-US" sz="1100" dirty="0">
+                <a:solidFill>
+                  <a:srgbClr val="1A1A1A"/>
+                </a:solidFill>
+                <a:latin typeface="Calibri" pitchFamily="34" charset="0"/>
+                <a:ea typeface="Calibri" pitchFamily="34" charset="-122"/>
+                <a:cs typeface="Calibri" pitchFamily="34" charset="-120"/>
+              </a:rPr>
+              <a:t>A brief demonstration before the complications: the words one artist uses far more than everyone else, a signature vocabulary measured against a pop baseline.</a:t>
+            </a:r>
+            <a:endParaRPr lang="en-US" sz="1100" dirty="0"/>
+          </a:p>
+        </p:txBody>
+      </p:sp>
+      <p:sp>
+        <p:nvSpPr>
+          <p:cNvPr id="12" name="Shape 10"/>
+          <p:cNvSpPr/>
+          <p:nvPr/>
+        </p:nvSpPr>
+        <p:spPr>
+          <a:xfrm>
+            <a:off x="640080" y="2916936"/>
+            <a:ext cx="868680" cy="338328"/>
+          </a:xfrm>
+          <a:prstGeom prst="roundRect">
+            <a:avLst>
+              <a:gd name="adj" fmla="val 16216"/>
+            </a:avLst>
+          </a:prstGeom>
+          <a:solidFill>
+            <a:srgbClr val="7A3B2E"/>
+          </a:solidFill>
+          <a:ln/>
+        </p:spPr>
+      </p:sp>
+      <p:sp>
+        <p:nvSpPr>
+          <p:cNvPr id="13" name="Text 11"/>
+          <p:cNvSpPr/>
+          <p:nvPr/>
+        </p:nvSpPr>
+        <p:spPr>
+          <a:xfrm>
+            <a:off x="640080" y="2916936"/>
+            <a:ext cx="868680" cy="338328"/>
+          </a:xfrm>
+          <a:prstGeom prst="rect">
+            <a:avLst/>
+          </a:prstGeom>
+          <a:noFill/>
+          <a:ln/>
+        </p:spPr>
+        <p:txBody>
+          <a:bodyPr wrap="square" rtlCol="0" anchor="ctr"/>
+          <a:lstStyle/>
+          <a:p>
+            <a:pPr algn="ctr" indent="0" marL="0">
+              <a:buNone/>
+            </a:pPr>
+            <a:r>
+              <a:rPr lang="en-US" sz="1100" b="1" dirty="0">
+                <a:solidFill>
+                  <a:srgbClr val="FFFFFF"/>
+                </a:solidFill>
+                <a:latin typeface="Calibri" pitchFamily="34" charset="0"/>
+                <a:ea typeface="Calibri" pitchFamily="34" charset="-122"/>
+                <a:cs typeface="Calibri" pitchFamily="34" charset="-120"/>
+              </a:rPr>
+              <a:t>0:30</a:t>
+            </a:r>
+            <a:endParaRPr lang="en-US" sz="1100" dirty="0"/>
+          </a:p>
+        </p:txBody>
+      </p:sp>
+      <p:sp>
+        <p:nvSpPr>
+          <p:cNvPr id="14" name="Text 12"/>
+          <p:cNvSpPr/>
+          <p:nvPr/>
+        </p:nvSpPr>
+        <p:spPr>
+          <a:xfrm>
+            <a:off x="1691640" y="2898648"/>
+            <a:ext cx="9646920" cy="448056"/>
+          </a:xfrm>
+          <a:prstGeom prst="rect">
+            <a:avLst/>
+          </a:prstGeom>
+          <a:noFill/>
+          <a:ln/>
+        </p:spPr>
+        <p:txBody>
+          <a:bodyPr wrap="square" rtlCol="0" anchor="ctr">
+            <a:spAutoFit/>
+          </a:bodyPr>
+          <a:lstStyle/>
+          <a:p>
+            <a:pPr indent="0" marL="0">
+              <a:buNone/>
+            </a:pPr>
+            <a:r>
+              <a:rPr lang="en-US" sz="1100" dirty="0">
+                <a:solidFill>
+                  <a:srgbClr val="1A1A1A"/>
+                </a:solidFill>
+                <a:latin typeface="Calibri" pitchFamily="34" charset="0"/>
+                <a:ea typeface="Calibri" pitchFamily="34" charset="-122"/>
+                <a:cs typeface="Calibri" pitchFamily="34" charset="-120"/>
+              </a:rPr>
+              <a:t>Hand-built bag-of-words: two authors, highlighters, argue about merging run/running. Counting requires defining.</a:t>
+            </a:r>
+            <a:endParaRPr lang="en-US" sz="1100" dirty="0"/>
+          </a:p>
+        </p:txBody>
+      </p:sp>
+      <p:sp>
+        <p:nvSpPr>
+          <p:cNvPr id="15" name="Shape 13"/>
+          <p:cNvSpPr/>
+          <p:nvPr/>
+        </p:nvSpPr>
+        <p:spPr>
+          <a:xfrm>
+            <a:off x="640080" y="3364992"/>
+            <a:ext cx="868680" cy="338328"/>
+          </a:xfrm>
+          <a:prstGeom prst="roundRect">
+            <a:avLst>
+              <a:gd name="adj" fmla="val 16216"/>
+            </a:avLst>
+          </a:prstGeom>
+          <a:solidFill>
+            <a:srgbClr val="7A3B2E"/>
+          </a:solidFill>
+          <a:ln/>
+        </p:spPr>
+      </p:sp>
+      <p:sp>
+        <p:nvSpPr>
+          <p:cNvPr id="16" name="Text 14"/>
+          <p:cNvSpPr/>
+          <p:nvPr/>
+        </p:nvSpPr>
+        <p:spPr>
+          <a:xfrm>
+            <a:off x="640080" y="3364992"/>
+            <a:ext cx="868680" cy="338328"/>
+          </a:xfrm>
+          <a:prstGeom prst="rect">
+            <a:avLst/>
+          </a:prstGeom>
+          <a:noFill/>
+          <a:ln/>
+        </p:spPr>
+        <p:txBody>
+          <a:bodyPr wrap="square" rtlCol="0" anchor="ctr"/>
+          <a:lstStyle/>
+          <a:p>
+            <a:pPr algn="ctr" indent="0" marL="0">
+              <a:buNone/>
+            </a:pPr>
+            <a:r>
+              <a:rPr lang="en-US" sz="1100" b="1" dirty="0">
+                <a:solidFill>
+                  <a:srgbClr val="FFFFFF"/>
+                </a:solidFill>
+                <a:latin typeface="Calibri" pitchFamily="34" charset="0"/>
+                <a:ea typeface="Calibri" pitchFamily="34" charset="-122"/>
+                <a:cs typeface="Calibri" pitchFamily="34" charset="-120"/>
+              </a:rPr>
+              <a:t>0:55</a:t>
+            </a:r>
+            <a:endParaRPr lang="en-US" sz="1100" dirty="0"/>
+          </a:p>
+        </p:txBody>
+      </p:sp>
+      <p:sp>
+        <p:nvSpPr>
+          <p:cNvPr id="17" name="Text 15"/>
+          <p:cNvSpPr/>
+          <p:nvPr/>
+        </p:nvSpPr>
+        <p:spPr>
+          <a:xfrm>
+            <a:off x="1691640" y="3346704"/>
+            <a:ext cx="9646920" cy="448056"/>
+          </a:xfrm>
+          <a:prstGeom prst="rect">
+            <a:avLst/>
+          </a:prstGeom>
+          <a:noFill/>
+          <a:ln/>
+        </p:spPr>
+        <p:txBody>
+          <a:bodyPr wrap="square" rtlCol="0" anchor="ctr">
+            <a:spAutoFit/>
+          </a:bodyPr>
+          <a:lstStyle/>
+          <a:p>
+            <a:pPr indent="0" marL="0">
+              <a:buNone/>
+            </a:pPr>
+            <a:r>
+              <a:rPr lang="en-US" sz="1100" dirty="0">
+                <a:solidFill>
+                  <a:srgbClr val="1A1A1A"/>
+                </a:solidFill>
+                <a:latin typeface="Calibri" pitchFamily="34" charset="0"/>
+                <a:ea typeface="Calibri" pitchFamily="34" charset="-122"/>
+                <a:cs typeface="Calibri" pitchFamily="34" charset="-120"/>
+              </a:rPr>
+              <a:t>What counts as a word? Paste a sentence into two tokenizer playgrounds and watch it shatter differently. Models see tokens, not words.</a:t>
+            </a:r>
+            <a:endParaRPr lang="en-US" sz="1100" dirty="0"/>
+          </a:p>
+        </p:txBody>
+      </p:sp>
+      <p:sp>
+        <p:nvSpPr>
+          <p:cNvPr id="18" name="Shape 16"/>
+          <p:cNvSpPr/>
+          <p:nvPr/>
+        </p:nvSpPr>
+        <p:spPr>
+          <a:xfrm>
+            <a:off x="640080" y="3813048"/>
+            <a:ext cx="868680" cy="338328"/>
+          </a:xfrm>
+          <a:prstGeom prst="roundRect">
+            <a:avLst>
+              <a:gd name="adj" fmla="val 16216"/>
+            </a:avLst>
+          </a:prstGeom>
+          <a:solidFill>
+            <a:srgbClr val="7A3B2E"/>
+          </a:solidFill>
+          <a:ln/>
+        </p:spPr>
+      </p:sp>
+      <p:sp>
+        <p:nvSpPr>
+          <p:cNvPr id="19" name="Text 17"/>
+          <p:cNvSpPr/>
+          <p:nvPr/>
+        </p:nvSpPr>
+        <p:spPr>
+          <a:xfrm>
+            <a:off x="640080" y="3813048"/>
+            <a:ext cx="868680" cy="338328"/>
+          </a:xfrm>
+          <a:prstGeom prst="rect">
+            <a:avLst/>
+          </a:prstGeom>
+          <a:noFill/>
+          <a:ln/>
+        </p:spPr>
+        <p:txBody>
+          <a:bodyPr wrap="square" rtlCol="0" anchor="ctr"/>
+          <a:lstStyle/>
+          <a:p>
+            <a:pPr algn="ctr" indent="0" marL="0">
+              <a:buNone/>
+            </a:pPr>
+            <a:r>
+              <a:rPr lang="en-US" sz="1100" b="1" dirty="0">
+                <a:solidFill>
+                  <a:srgbClr val="FFFFFF"/>
+                </a:solidFill>
+                <a:latin typeface="Calibri" pitchFamily="34" charset="0"/>
+                <a:ea typeface="Calibri" pitchFamily="34" charset="-122"/>
+                <a:cs typeface="Calibri" pitchFamily="34" charset="-120"/>
+              </a:rPr>
+              <a:t>1:05</a:t>
+            </a:r>
+            <a:endParaRPr lang="en-US" sz="1100" dirty="0"/>
+          </a:p>
+        </p:txBody>
+      </p:sp>
+      <p:sp>
+        <p:nvSpPr>
+          <p:cNvPr id="20" name="Text 18"/>
+          <p:cNvSpPr/>
+          <p:nvPr/>
+        </p:nvSpPr>
+        <p:spPr>
+          <a:xfrm>
+            <a:off x="1691640" y="3794760"/>
+            <a:ext cx="9646920" cy="448056"/>
+          </a:xfrm>
+          <a:prstGeom prst="rect">
+            <a:avLst/>
+          </a:prstGeom>
+          <a:noFill/>
+          <a:ln/>
+        </p:spPr>
+        <p:txBody>
+          <a:bodyPr wrap="square" rtlCol="0" anchor="ctr">
+            <a:spAutoFit/>
+          </a:bodyPr>
+          <a:lstStyle/>
+          <a:p>
+            <a:pPr indent="0" marL="0">
+              <a:buNone/>
+            </a:pPr>
+            <a:r>
+              <a:rPr lang="en-US" sz="1100" dirty="0">
+                <a:solidFill>
+                  <a:srgbClr val="1A1A1A"/>
+                </a:solidFill>
+                <a:latin typeface="Calibri" pitchFamily="34" charset="0"/>
+                <a:ea typeface="Calibri" pitchFamily="34" charset="-122"/>
+                <a:cs typeface="Calibri" pitchFamily="34" charset="-120"/>
+              </a:rPr>
+              <a:t>Break</a:t>
+            </a:r>
+            <a:endParaRPr lang="en-US" sz="1100" dirty="0"/>
+          </a:p>
+        </p:txBody>
+      </p:sp>
+      <p:sp>
+        <p:nvSpPr>
+          <p:cNvPr id="21" name="Shape 19"/>
+          <p:cNvSpPr/>
+          <p:nvPr/>
+        </p:nvSpPr>
+        <p:spPr>
+          <a:xfrm>
+            <a:off x="640080" y="4261104"/>
+            <a:ext cx="868680" cy="338328"/>
+          </a:xfrm>
+          <a:prstGeom prst="roundRect">
+            <a:avLst>
+              <a:gd name="adj" fmla="val 16216"/>
+            </a:avLst>
+          </a:prstGeom>
+          <a:solidFill>
+            <a:srgbClr val="7A3B2E"/>
+          </a:solidFill>
+          <a:ln/>
+        </p:spPr>
+      </p:sp>
+      <p:sp>
+        <p:nvSpPr>
+          <p:cNvPr id="22" name="Text 20"/>
+          <p:cNvSpPr/>
+          <p:nvPr/>
+        </p:nvSpPr>
+        <p:spPr>
+          <a:xfrm>
+            <a:off x="640080" y="4261104"/>
+            <a:ext cx="868680" cy="338328"/>
+          </a:xfrm>
+          <a:prstGeom prst="rect">
+            <a:avLst/>
+          </a:prstGeom>
+          <a:noFill/>
+          <a:ln/>
+        </p:spPr>
+        <p:txBody>
+          <a:bodyPr wrap="square" rtlCol="0" anchor="ctr"/>
+          <a:lstStyle/>
+          <a:p>
+            <a:pPr algn="ctr" indent="0" marL="0">
+              <a:buNone/>
+            </a:pPr>
+            <a:r>
+              <a:rPr lang="en-US" sz="1100" b="1" dirty="0">
+                <a:solidFill>
+                  <a:srgbClr val="FFFFFF"/>
+                </a:solidFill>
+                <a:latin typeface="Calibri" pitchFamily="34" charset="0"/>
+                <a:ea typeface="Calibri" pitchFamily="34" charset="-122"/>
+                <a:cs typeface="Calibri" pitchFamily="34" charset="-120"/>
+              </a:rPr>
+              <a:t>1:15</a:t>
+            </a:r>
+            <a:endParaRPr lang="en-US" sz="1100" dirty="0"/>
+          </a:p>
+        </p:txBody>
+      </p:sp>
+      <p:sp>
+        <p:nvSpPr>
+          <p:cNvPr id="23" name="Text 21"/>
+          <p:cNvSpPr/>
+          <p:nvPr/>
+        </p:nvSpPr>
+        <p:spPr>
+          <a:xfrm>
+            <a:off x="1691640" y="4242816"/>
+            <a:ext cx="9646920" cy="448056"/>
+          </a:xfrm>
+          <a:prstGeom prst="rect">
+            <a:avLst/>
+          </a:prstGeom>
+          <a:noFill/>
+          <a:ln/>
+        </p:spPr>
+        <p:txBody>
+          <a:bodyPr wrap="square" rtlCol="0" anchor="ctr">
+            <a:spAutoFit/>
+          </a:bodyPr>
+          <a:lstStyle/>
+          <a:p>
+            <a:pPr indent="0" marL="0">
+              <a:buNone/>
+            </a:pPr>
+            <a:r>
+              <a:rPr lang="en-US" sz="1100" dirty="0">
+                <a:solidFill>
+                  <a:srgbClr val="1A1A1A"/>
+                </a:solidFill>
+                <a:latin typeface="Calibri" pitchFamily="34" charset="0"/>
+                <a:ea typeface="Calibri" pitchFamily="34" charset="-122"/>
+                <a:cs typeface="Calibri" pitchFamily="34" charset="-120"/>
+              </a:rPr>
+              <a:t>tf-idf: the AI scales your hand count; stop-words dominate, which motivates "common here, rare overall."</a:t>
+            </a:r>
+            <a:endParaRPr lang="en-US" sz="1100" dirty="0"/>
+          </a:p>
+        </p:txBody>
+      </p:sp>
+      <p:sp>
+        <p:nvSpPr>
+          <p:cNvPr id="24" name="Shape 22"/>
+          <p:cNvSpPr/>
+          <p:nvPr/>
+        </p:nvSpPr>
+        <p:spPr>
+          <a:xfrm>
+            <a:off x="640080" y="4709160"/>
+            <a:ext cx="868680" cy="338328"/>
+          </a:xfrm>
+          <a:prstGeom prst="roundRect">
+            <a:avLst>
+              <a:gd name="adj" fmla="val 16216"/>
+            </a:avLst>
+          </a:prstGeom>
+          <a:solidFill>
+            <a:srgbClr val="7A3B2E"/>
+          </a:solidFill>
+          <a:ln/>
+        </p:spPr>
+      </p:sp>
+      <p:sp>
+        <p:nvSpPr>
+          <p:cNvPr id="25" name="Text 23"/>
+          <p:cNvSpPr/>
+          <p:nvPr/>
+        </p:nvSpPr>
+        <p:spPr>
+          <a:xfrm>
+            <a:off x="640080" y="4709160"/>
+            <a:ext cx="868680" cy="338328"/>
+          </a:xfrm>
+          <a:prstGeom prst="rect">
+            <a:avLst/>
+          </a:prstGeom>
+          <a:noFill/>
+          <a:ln/>
+        </p:spPr>
+        <p:txBody>
+          <a:bodyPr wrap="square" rtlCol="0" anchor="ctr"/>
+          <a:lstStyle/>
+          <a:p>
+            <a:pPr algn="ctr" indent="0" marL="0">
+              <a:buNone/>
+            </a:pPr>
+            <a:r>
+              <a:rPr lang="en-US" sz="1100" b="1" dirty="0">
+                <a:solidFill>
+                  <a:srgbClr val="FFFFFF"/>
+                </a:solidFill>
+                <a:latin typeface="Calibri" pitchFamily="34" charset="0"/>
+                <a:ea typeface="Calibri" pitchFamily="34" charset="-122"/>
+                <a:cs typeface="Calibri" pitchFamily="34" charset="-120"/>
+              </a:rPr>
+              <a:t>1:30</a:t>
+            </a:r>
+            <a:endParaRPr lang="en-US" sz="1100" dirty="0"/>
+          </a:p>
+        </p:txBody>
+      </p:sp>
+      <p:sp>
+        <p:nvSpPr>
+          <p:cNvPr id="26" name="Text 24"/>
+          <p:cNvSpPr/>
+          <p:nvPr/>
+        </p:nvSpPr>
+        <p:spPr>
+          <a:xfrm>
+            <a:off x="1691640" y="4690872"/>
+            <a:ext cx="9646920" cy="448056"/>
+          </a:xfrm>
+          <a:prstGeom prst="rect">
+            <a:avLst/>
+          </a:prstGeom>
+          <a:noFill/>
+          <a:ln/>
+        </p:spPr>
+        <p:txBody>
+          <a:bodyPr wrap="square" rtlCol="0" anchor="ctr">
+            <a:spAutoFit/>
+          </a:bodyPr>
+          <a:lstStyle/>
+          <a:p>
+            <a:pPr indent="0" marL="0">
+              <a:buNone/>
+            </a:pPr>
+            <a:r>
+              <a:rPr lang="en-US" sz="1100" dirty="0">
+                <a:solidFill>
+                  <a:srgbClr val="1A1A1A"/>
+                </a:solidFill>
+                <a:latin typeface="Calibri" pitchFamily="34" charset="0"/>
+                <a:ea typeface="Calibri" pitchFamily="34" charset="-122"/>
+                <a:cs typeface="Calibri" pitchFamily="34" charset="-120"/>
+              </a:rPr>
+              <a:t>Keyness, the She Giggles, He Gallops move: a log-odds ratio between two corpora finds the words one voice uses far more than a baseline, exactly the method behind Week 1's featured piece. The corpus pair is a choice too: artist vs. pop, lyrics vs. subreddit vs. novel.</a:t>
+            </a:r>
+            <a:endParaRPr lang="en-US" sz="1100" dirty="0"/>
+          </a:p>
+        </p:txBody>
+      </p:sp>
+      <p:sp>
+        <p:nvSpPr>
+          <p:cNvPr id="27" name="Shape 25"/>
+          <p:cNvSpPr/>
+          <p:nvPr/>
+        </p:nvSpPr>
+        <p:spPr>
+          <a:xfrm>
+            <a:off x="640080" y="5157216"/>
+            <a:ext cx="868680" cy="338328"/>
+          </a:xfrm>
+          <a:prstGeom prst="roundRect">
+            <a:avLst>
+              <a:gd name="adj" fmla="val 16216"/>
+            </a:avLst>
+          </a:prstGeom>
+          <a:solidFill>
+            <a:srgbClr val="7A3B2E"/>
+          </a:solidFill>
+          <a:ln/>
+        </p:spPr>
+      </p:sp>
+      <p:sp>
+        <p:nvSpPr>
+          <p:cNvPr id="28" name="Text 26"/>
+          <p:cNvSpPr/>
+          <p:nvPr/>
+        </p:nvSpPr>
+        <p:spPr>
+          <a:xfrm>
+            <a:off x="640080" y="5157216"/>
+            <a:ext cx="868680" cy="338328"/>
+          </a:xfrm>
+          <a:prstGeom prst="rect">
+            <a:avLst/>
+          </a:prstGeom>
+          <a:noFill/>
+          <a:ln/>
+        </p:spPr>
+        <p:txBody>
+          <a:bodyPr wrap="square" rtlCol="0" anchor="ctr"/>
+          <a:lstStyle/>
+          <a:p>
+            <a:pPr algn="ctr" indent="0" marL="0">
+              <a:buNone/>
+            </a:pPr>
+            <a:r>
+              <a:rPr lang="en-US" sz="1100" b="1" dirty="0">
+                <a:solidFill>
+                  <a:srgbClr val="FFFFFF"/>
+                </a:solidFill>
+                <a:latin typeface="Calibri" pitchFamily="34" charset="0"/>
+                <a:ea typeface="Calibri" pitchFamily="34" charset="-122"/>
+                <a:cs typeface="Calibri" pitchFamily="34" charset="-120"/>
+              </a:rPr>
+              <a:t>1:42</a:t>
+            </a:r>
+            <a:endParaRPr lang="en-US" sz="1100" dirty="0"/>
+          </a:p>
+        </p:txBody>
+      </p:sp>
+      <p:sp>
+        <p:nvSpPr>
+          <p:cNvPr id="29" name="Text 27"/>
+          <p:cNvSpPr/>
+          <p:nvPr/>
+        </p:nvSpPr>
+        <p:spPr>
+          <a:xfrm>
+            <a:off x="1691640" y="5138928"/>
+            <a:ext cx="9646920" cy="448056"/>
+          </a:xfrm>
+          <a:prstGeom prst="rect">
+            <a:avLst/>
+          </a:prstGeom>
+          <a:noFill/>
+          <a:ln/>
+        </p:spPr>
+        <p:txBody>
+          <a:bodyPr wrap="square" rtlCol="0" anchor="ctr">
+            <a:spAutoFit/>
+          </a:bodyPr>
+          <a:lstStyle/>
+          <a:p>
+            <a:pPr indent="0" marL="0">
+              <a:buNone/>
+            </a:pPr>
+            <a:r>
+              <a:rPr lang="en-US" sz="1100" dirty="0">
+                <a:solidFill>
+                  <a:srgbClr val="1A1A1A"/>
+                </a:solidFill>
+                <a:latin typeface="Calibri" pitchFamily="34" charset="0"/>
+                <a:ea typeface="Calibri" pitchFamily="34" charset="-122"/>
+                <a:cs typeface="Calibri" pitchFamily="34" charset="-120"/>
+              </a:rPr>
+              <a:t>Is the difference real? The shuffle test: shuffle the labels and recount, one thousand times. If chance alone frequently produces a gap this large, the difference should not be trusted; if it almost never does, the finding stands. A difference can be real and still small.</a:t>
+            </a:r>
+            <a:endParaRPr lang="en-US" sz="1100" dirty="0"/>
+          </a:p>
+        </p:txBody>
+      </p:sp>
+      <p:sp>
+        <p:nvSpPr>
+          <p:cNvPr id="30" name="Shape 28"/>
+          <p:cNvSpPr/>
+          <p:nvPr/>
+        </p:nvSpPr>
+        <p:spPr>
+          <a:xfrm>
+            <a:off x="640080" y="5605272"/>
+            <a:ext cx="868680" cy="338328"/>
+          </a:xfrm>
+          <a:prstGeom prst="roundRect">
+            <a:avLst>
+              <a:gd name="adj" fmla="val 16216"/>
+            </a:avLst>
+          </a:prstGeom>
+          <a:solidFill>
+            <a:srgbClr val="7A3B2E"/>
+          </a:solidFill>
+          <a:ln/>
+        </p:spPr>
+      </p:sp>
+      <p:sp>
+        <p:nvSpPr>
+          <p:cNvPr id="31" name="Text 29"/>
+          <p:cNvSpPr/>
+          <p:nvPr/>
+        </p:nvSpPr>
+        <p:spPr>
+          <a:xfrm>
+            <a:off x="640080" y="5605272"/>
+            <a:ext cx="868680" cy="338328"/>
+          </a:xfrm>
+          <a:prstGeom prst="rect">
+            <a:avLst/>
+          </a:prstGeom>
+          <a:noFill/>
+          <a:ln/>
+        </p:spPr>
+        <p:txBody>
+          <a:bodyPr wrap="square" rtlCol="0" anchor="ctr"/>
+          <a:lstStyle/>
+          <a:p>
+            <a:pPr algn="ctr" indent="0" marL="0">
+              <a:buNone/>
+            </a:pPr>
+            <a:r>
+              <a:rPr lang="en-US" sz="1100" b="1" dirty="0">
+                <a:solidFill>
+                  <a:srgbClr val="FFFFFF"/>
+                </a:solidFill>
+                <a:latin typeface="Calibri" pitchFamily="34" charset="0"/>
+                <a:ea typeface="Calibri" pitchFamily="34" charset="-122"/>
+                <a:cs typeface="Calibri" pitchFamily="34" charset="-120"/>
+              </a:rPr>
+              <a:t>1:50</a:t>
+            </a:r>
+            <a:endParaRPr lang="en-US" sz="1100" dirty="0"/>
+          </a:p>
+        </p:txBody>
+      </p:sp>
+      <p:sp>
+        <p:nvSpPr>
+          <p:cNvPr id="32" name="Text 30"/>
+          <p:cNvSpPr/>
+          <p:nvPr/>
+        </p:nvSpPr>
+        <p:spPr>
+          <a:xfrm>
+            <a:off x="1691640" y="5586984"/>
+            <a:ext cx="9646920" cy="448056"/>
+          </a:xfrm>
+          <a:prstGeom prst="rect">
+            <a:avLst/>
+          </a:prstGeom>
+          <a:noFill/>
+          <a:ln/>
+        </p:spPr>
+        <p:txBody>
+          <a:bodyPr wrap="square" rtlCol="0" anchor="ctr">
+            <a:spAutoFit/>
+          </a:bodyPr>
+          <a:lstStyle/>
+          <a:p>
+            <a:pPr indent="0" marL="0">
+              <a:buNone/>
+            </a:pPr>
+            <a:r>
+              <a:rPr lang="en-US" sz="1100" dirty="0">
+                <a:solidFill>
+                  <a:srgbClr val="1A1A1A"/>
+                </a:solidFill>
+                <a:latin typeface="Calibri" pitchFamily="34" charset="0"/>
+                <a:ea typeface="Calibri" pitchFamily="34" charset="-122"/>
+                <a:cs typeface="Calibri" pitchFamily="34" charset="-120"/>
+              </a:rPr>
+              <a:t>Gemini-free check and check-out.</a:t>
+            </a:r>
+            <a:endParaRPr lang="en-US" sz="1100" dirty="0"/>
           </a:p>
         </p:txBody>
       </p:sp>

--- a/slides/pptx/week-02.pptx
+++ b/slides/pptx/week-02.pptx
@@ -1967,7 +1967,7 @@
                 <a:ea typeface="Cambria" pitchFamily="34" charset="-122"/>
                 <a:cs typeface="Cambria" pitchFamily="34" charset="-120"/>
               </a:rPr>
-              <a:t>Counting Is Already a Model</a:t>
+              <a:t>Counting, Compared: Is the Difference Real?</a:t>
             </a:r>
             <a:endParaRPr lang="en-US" sz="4000" dirty="0"/>
           </a:p>

--- a/slides/pptx/week-02.pptx
+++ b/slides/pptx/week-02.pptx
@@ -6534,7 +6534,7 @@
                 <a:ea typeface="Calibri" pitchFamily="34" charset="-122"/>
                 <a:cs typeface="Calibri" pitchFamily="34" charset="-120"/>
               </a:rPr>
-              <a:t>Warm-up retrieval.</a:t>
+              <a:t>Warm-up: favorite Pudding pieces from the sketch, what did yours count, and one choice its makers made. Then retrieval.</a:t>
             </a:r>
             <a:endParaRPr lang="en-US" sz="1100" dirty="0"/>
           </a:p>

--- a/slides/pptx/week-02.pptx
+++ b/slides/pptx/week-02.pptx
@@ -4879,7 +4879,7 @@
         <p:spPr>
           <a:xfrm>
             <a:off x="1097280" y="2240280"/>
-            <a:ext cx="10607040" cy="1017270"/>
+            <a:ext cx="10607040" cy="813816"/>
           </a:xfrm>
           <a:prstGeom prst="rect">
             <a:avLst/>
@@ -4900,7 +4900,7 @@
               <a:buNone/>
             </a:pPr>
             <a:r>
-              <a:rPr lang="en-US" sz="1650" dirty="0">
+              <a:rPr lang="en-US" sz="1500" dirty="0">
                 <a:solidFill>
                   <a:srgbClr val="1A1A1A"/>
                 </a:solidFill>
@@ -4910,7 +4910,7 @@
               </a:rPr>
               <a:t>Two tokenizers shatter the same sentence differently: "don't" becomes one chip, two, or three.</a:t>
             </a:r>
-            <a:endParaRPr lang="en-US" sz="1650" dirty="0"/>
+            <a:endParaRPr lang="en-US" sz="1500" dirty="0"/>
           </a:p>
         </p:txBody>
       </p:sp>
@@ -4922,7 +4922,7 @@
         </p:nvSpPr>
         <p:spPr>
           <a:xfrm>
-            <a:off x="640080" y="3348990"/>
+            <a:off x="640080" y="3145536"/>
             <a:ext cx="201168" cy="201168"/>
           </a:xfrm>
           <a:prstGeom prst="ellipse">
@@ -4942,8 +4942,8 @@
         </p:nvSpPr>
         <p:spPr>
           <a:xfrm>
-            <a:off x="1097280" y="3257550"/>
-            <a:ext cx="10607040" cy="1017270"/>
+            <a:off x="1097280" y="3054096"/>
+            <a:ext cx="10607040" cy="813816"/>
           </a:xfrm>
           <a:prstGeom prst="rect">
             <a:avLst/>
@@ -4964,7 +4964,7 @@
               <a:buNone/>
             </a:pPr>
             <a:r>
-              <a:rPr lang="en-US" sz="1650" dirty="0">
+              <a:rPr lang="en-US" sz="1500" dirty="0">
                 <a:solidFill>
                   <a:srgbClr val="1A1A1A"/>
                 </a:solidFill>
@@ -4974,7 +4974,7 @@
               </a:rPr>
               <a:t>Models never see words. They see tokens, and the split is a design decision.</a:t>
             </a:r>
-            <a:endParaRPr lang="en-US" sz="1650" dirty="0"/>
+            <a:endParaRPr lang="en-US" sz="1500" dirty="0"/>
           </a:p>
         </p:txBody>
       </p:sp>
@@ -4986,7 +4986,7 @@
         </p:nvSpPr>
         <p:spPr>
           <a:xfrm>
-            <a:off x="640080" y="4366260"/>
+            <a:off x="640080" y="3959352"/>
             <a:ext cx="201168" cy="201168"/>
           </a:xfrm>
           <a:prstGeom prst="ellipse">
@@ -5006,8 +5006,8 @@
         </p:nvSpPr>
         <p:spPr>
           <a:xfrm>
-            <a:off x="1097280" y="4274820"/>
-            <a:ext cx="10607040" cy="1017270"/>
+            <a:off x="1097280" y="3867912"/>
+            <a:ext cx="10607040" cy="813816"/>
           </a:xfrm>
           <a:prstGeom prst="rect">
             <a:avLst/>
@@ -5028,7 +5028,7 @@
               <a:buNone/>
             </a:pPr>
             <a:r>
-              <a:rPr lang="en-US" sz="1650" dirty="0">
+              <a:rPr lang="en-US" sz="1500" dirty="0">
                 <a:solidFill>
                   <a:srgbClr val="1A1A1A"/>
                 </a:solidFill>
@@ -5036,9 +5036,9 @@
                 <a:ea typeface="Calibri" pitchFamily="34" charset="-122"/>
                 <a:cs typeface="Calibri" pitchFamily="34" charset="-120"/>
               </a:rPr>
-              <a:t>Your hand-count argument about run/running is the same decision, made with highlighters.</a:t>
-            </a:r>
-            <a:endParaRPr lang="en-US" sz="1650" dirty="0"/>
+              <a:t>Your hand-count argument about run/running is the same decision, made with highlighters. A stemmer makes it by rule (and produces "beauti"); a lemmatizer makes it by dictionary (and reads "was" as a noun unless told otherwise).</a:t>
+            </a:r>
+            <a:endParaRPr lang="en-US" sz="1500" dirty="0"/>
           </a:p>
         </p:txBody>
       </p:sp>
@@ -5050,7 +5050,7 @@
         </p:nvSpPr>
         <p:spPr>
           <a:xfrm>
-            <a:off x="640080" y="5383530"/>
+            <a:off x="640080" y="4773168"/>
             <a:ext cx="201168" cy="201168"/>
           </a:xfrm>
           <a:prstGeom prst="ellipse">
@@ -5070,8 +5070,8 @@
         </p:nvSpPr>
         <p:spPr>
           <a:xfrm>
-            <a:off x="1097280" y="5292090"/>
-            <a:ext cx="10607040" cy="1017270"/>
+            <a:off x="1097280" y="4681728"/>
+            <a:ext cx="10607040" cy="813816"/>
           </a:xfrm>
           <a:prstGeom prst="rect">
             <a:avLst/>
@@ -5092,7 +5092,7 @@
               <a:buNone/>
             </a:pPr>
             <a:r>
-              <a:rPr lang="en-US" sz="1650" dirty="0">
+              <a:rPr lang="en-US" sz="1500" dirty="0">
                 <a:solidFill>
                   <a:srgbClr val="1A1A1A"/>
                 </a:solidFill>
@@ -5100,9 +5100,73 @@
                 <a:ea typeface="Calibri" pitchFamily="34" charset="-122"/>
                 <a:cs typeface="Calibri" pitchFamily="34" charset="-120"/>
               </a:rPr>
+              <a:t>Zipf's law: rank words by frequency and every corpus gives the same curve. The head is the stop list; the tail is too rare to count.</a:t>
+            </a:r>
+            <a:endParaRPr lang="en-US" sz="1500" dirty="0"/>
+          </a:p>
+        </p:txBody>
+      </p:sp>
+      <p:sp>
+        <p:nvSpPr>
+          <p:cNvPr id="13" name="Shape 11"/>
+          <p:cNvSpPr/>
+          <p:nvPr/>
+        </p:nvSpPr>
+        <p:spPr>
+          <a:xfrm>
+            <a:off x="640080" y="5586984"/>
+            <a:ext cx="201168" cy="201168"/>
+          </a:xfrm>
+          <a:prstGeom prst="ellipse">
+            <a:avLst/>
+          </a:prstGeom>
+          <a:solidFill>
+            <a:srgbClr val="3F6F5F"/>
+          </a:solidFill>
+          <a:ln/>
+        </p:spPr>
+      </p:sp>
+      <p:sp>
+        <p:nvSpPr>
+          <p:cNvPr id="14" name="Text 12"/>
+          <p:cNvSpPr/>
+          <p:nvPr/>
+        </p:nvSpPr>
+        <p:spPr>
+          <a:xfrm>
+            <a:off x="1097280" y="5495544"/>
+            <a:ext cx="10607040" cy="813816"/>
+          </a:xfrm>
+          <a:prstGeom prst="rect">
+            <a:avLst/>
+          </a:prstGeom>
+          <a:noFill/>
+          <a:ln/>
+        </p:spPr>
+        <p:txBody>
+          <a:bodyPr wrap="square" rtlCol="0" anchor="t">
+            <a:spAutoFit/>
+          </a:bodyPr>
+          <a:lstStyle/>
+          <a:p>
+            <a:pPr indent="0" marL="0">
+              <a:lnSpc>
+                <a:spcPct val="112000"/>
+              </a:lnSpc>
+              <a:buNone/>
+            </a:pPr>
+            <a:r>
+              <a:rPr lang="en-US" sz="1500" dirty="0">
+                <a:solidFill>
+                  <a:srgbClr val="1A1A1A"/>
+                </a:solidFill>
+                <a:latin typeface="Calibri" pitchFamily="34" charset="0"/>
+                <a:ea typeface="Calibri" pitchFamily="34" charset="-122"/>
+                <a:cs typeface="Calibri" pitchFamily="34" charset="-120"/>
+              </a:rPr>
               <a:t>tf-idf: down-weight what is common everywhere. "Common here, rare overall" is what characterizes a text.</a:t>
             </a:r>
-            <a:endParaRPr lang="en-US" sz="1650" dirty="0"/>
+            <a:endParaRPr lang="en-US" sz="1500" dirty="0"/>
           </a:p>
         </p:txBody>
       </p:sp>
@@ -6942,7 +7006,7 @@
                 <a:ea typeface="Calibri" pitchFamily="34" charset="-122"/>
                 <a:cs typeface="Calibri" pitchFamily="34" charset="-120"/>
               </a:rPr>
-              <a:t>What counts as a word? Paste a sentence into two tokenizer playgrounds and watch it shatter differently. Models see tokens, not words.</a:t>
+              <a:t>What counts as a word? Paste a sentence into two tokenizer playgrounds and watch it shatter differently. Models see tokens, not words. Then the standard tools for the run/running decision: NLTK stemming and lemmatization, a real stop list, and Zipf's law, the curve that explains why stop lists exist.</a:t>
             </a:r>
             <a:endParaRPr lang="en-US" sz="1100" dirty="0"/>
           </a:p>

--- a/slides/pptx/week-02.pptx
+++ b/slides/pptx/week-02.pptx
@@ -17,9 +17,13 @@
     <p:sldId id="265" r:id="rId11"/>
     <p:sldId id="266" r:id="rId12"/>
     <p:sldId id="267" r:id="rId13"/>
+    <p:sldId id="268" r:id="rId14"/>
+    <p:sldId id="269" r:id="rId15"/>
+    <p:sldId id="270" r:id="rId16"/>
+    <p:sldId id="271" r:id="rId17"/>
   </p:sldIdLst>
   <p:notesMasterIdLst>
-    <p:notesMasterId r:id="rId14"/>
+    <p:notesMasterId r:id="rId18"/>
   </p:notesMasterIdLst>
   <p:sldSz cx="12191695" cy="6858000"/>
   <p:notesSz cx="6858000" cy="12191695"/>
@@ -819,6 +823,358 @@
 </p:notes>
 </file>
 
+<file path=ppt/notesSlides/notesSlide13.xml><?xml version="1.0" encoding="utf-8"?>
+<p:notes xmlns:a="http://schemas.openxmlformats.org/drawingml/2006/main" xmlns:r="http://schemas.openxmlformats.org/officeDocument/2006/relationships" xmlns:p="http://schemas.openxmlformats.org/presentationml/2006/main">
+  <p:cSld>
+    <p:spTree>
+      <p:nvGrpSpPr>
+        <p:cNvPr id="1" name=""/>
+        <p:cNvGrpSpPr/>
+        <p:nvPr/>
+      </p:nvGrpSpPr>
+      <p:grpSpPr>
+        <a:xfrm>
+          <a:off x="0" y="0"/>
+          <a:ext cx="0" cy="0"/>
+          <a:chOff x="0" y="0"/>
+          <a:chExt cx="0" cy="0"/>
+        </a:xfrm>
+      </p:grpSpPr>
+      <p:sp>
+        <p:nvSpPr>
+          <p:cNvPr id="2" name="Slide Image Placeholder 1"/>
+          <p:cNvSpPr>
+            <a:spLocks noGrp="1" noRot="1" noChangeAspect="1"/>
+          </p:cNvSpPr>
+          <p:nvPr>
+            <p:ph type="sldImg"/>
+          </p:nvPr>
+        </p:nvSpPr>
+        <p:spPr/>
+      </p:sp>
+      <p:sp>
+        <p:nvSpPr>
+          <p:cNvPr id="3" name="Notes Placeholder 2"/>
+          <p:cNvSpPr>
+            <a:spLocks noGrp="1"/>
+          </p:cNvSpPr>
+          <p:nvPr>
+            <p:ph type="body" idx="1"/>
+          </p:nvPr>
+        </p:nvSpPr>
+        <p:spPr/>
+        <p:txBody>
+          <a:bodyPr/>
+          <a:lstStyle/>
+          <a:p>
+            <a:r>
+              <a:rPr lang="en-US" dirty="0"/>
+              <a:t/>
+            </a:r>
+            <a:endParaRPr lang="en-US" dirty="0"/>
+          </a:p>
+        </p:txBody>
+      </p:sp>
+      <p:sp>
+        <p:nvSpPr>
+          <p:cNvPr id="4" name="Slide Number Placeholder 3"/>
+          <p:cNvSpPr>
+            <a:spLocks noGrp="1"/>
+          </p:cNvSpPr>
+          <p:nvPr>
+            <p:ph type="sldNum" sz="quarter" idx="10"/>
+          </p:nvPr>
+        </p:nvSpPr>
+        <p:spPr/>
+        <p:txBody>
+          <a:bodyPr/>
+          <a:lstStyle/>
+          <a:p>
+            <a:fld id="{F7021451-1387-4CA6-816F-3879F97B5CBC}" type="slidenum">
+              <a:rPr lang="en-US"/>
+              <a:t>13</a:t>
+            </a:fld>
+            <a:endParaRPr lang="en-US"/>
+          </a:p>
+        </p:txBody>
+      </p:sp>
+    </p:spTree>
+    <p:extLst>
+      <p:ext uri="{BB962C8B-B14F-4D97-AF65-F5344CB8AC3E}">
+        <p14:creationId xmlns:p14="http://schemas.microsoft.com/office/powerpoint/2010/main" val="1024086991"/>
+      </p:ext>
+    </p:extLst>
+  </p:cSld>
+  <p:clrMapOvr>
+    <a:masterClrMapping/>
+  </p:clrMapOvr>
+</p:notes>
+</file>
+
+<file path=ppt/notesSlides/notesSlide14.xml><?xml version="1.0" encoding="utf-8"?>
+<p:notes xmlns:a="http://schemas.openxmlformats.org/drawingml/2006/main" xmlns:r="http://schemas.openxmlformats.org/officeDocument/2006/relationships" xmlns:p="http://schemas.openxmlformats.org/presentationml/2006/main">
+  <p:cSld>
+    <p:spTree>
+      <p:nvGrpSpPr>
+        <p:cNvPr id="1" name=""/>
+        <p:cNvGrpSpPr/>
+        <p:nvPr/>
+      </p:nvGrpSpPr>
+      <p:grpSpPr>
+        <a:xfrm>
+          <a:off x="0" y="0"/>
+          <a:ext cx="0" cy="0"/>
+          <a:chOff x="0" y="0"/>
+          <a:chExt cx="0" cy="0"/>
+        </a:xfrm>
+      </p:grpSpPr>
+      <p:sp>
+        <p:nvSpPr>
+          <p:cNvPr id="2" name="Slide Image Placeholder 1"/>
+          <p:cNvSpPr>
+            <a:spLocks noGrp="1" noRot="1" noChangeAspect="1"/>
+          </p:cNvSpPr>
+          <p:nvPr>
+            <p:ph type="sldImg"/>
+          </p:nvPr>
+        </p:nvSpPr>
+        <p:spPr/>
+      </p:sp>
+      <p:sp>
+        <p:nvSpPr>
+          <p:cNvPr id="3" name="Notes Placeholder 2"/>
+          <p:cNvSpPr>
+            <a:spLocks noGrp="1"/>
+          </p:cNvSpPr>
+          <p:nvPr>
+            <p:ph type="body" idx="1"/>
+          </p:nvPr>
+        </p:nvSpPr>
+        <p:spPr/>
+        <p:txBody>
+          <a:bodyPr/>
+          <a:lstStyle/>
+          <a:p>
+            <a:r>
+              <a:rPr lang="en-US" dirty="0"/>
+              <a:t/>
+            </a:r>
+            <a:endParaRPr lang="en-US" dirty="0"/>
+          </a:p>
+        </p:txBody>
+      </p:sp>
+      <p:sp>
+        <p:nvSpPr>
+          <p:cNvPr id="4" name="Slide Number Placeholder 3"/>
+          <p:cNvSpPr>
+            <a:spLocks noGrp="1"/>
+          </p:cNvSpPr>
+          <p:nvPr>
+            <p:ph type="sldNum" sz="quarter" idx="10"/>
+          </p:nvPr>
+        </p:nvSpPr>
+        <p:spPr/>
+        <p:txBody>
+          <a:bodyPr/>
+          <a:lstStyle/>
+          <a:p>
+            <a:fld id="{F7021451-1387-4CA6-816F-3879F97B5CBC}" type="slidenum">
+              <a:rPr lang="en-US"/>
+              <a:t>14</a:t>
+            </a:fld>
+            <a:endParaRPr lang="en-US"/>
+          </a:p>
+        </p:txBody>
+      </p:sp>
+    </p:spTree>
+    <p:extLst>
+      <p:ext uri="{BB962C8B-B14F-4D97-AF65-F5344CB8AC3E}">
+        <p14:creationId xmlns:p14="http://schemas.microsoft.com/office/powerpoint/2010/main" val="1024086991"/>
+      </p:ext>
+    </p:extLst>
+  </p:cSld>
+  <p:clrMapOvr>
+    <a:masterClrMapping/>
+  </p:clrMapOvr>
+</p:notes>
+</file>
+
+<file path=ppt/notesSlides/notesSlide15.xml><?xml version="1.0" encoding="utf-8"?>
+<p:notes xmlns:a="http://schemas.openxmlformats.org/drawingml/2006/main" xmlns:r="http://schemas.openxmlformats.org/officeDocument/2006/relationships" xmlns:p="http://schemas.openxmlformats.org/presentationml/2006/main">
+  <p:cSld>
+    <p:spTree>
+      <p:nvGrpSpPr>
+        <p:cNvPr id="1" name=""/>
+        <p:cNvGrpSpPr/>
+        <p:nvPr/>
+      </p:nvGrpSpPr>
+      <p:grpSpPr>
+        <a:xfrm>
+          <a:off x="0" y="0"/>
+          <a:ext cx="0" cy="0"/>
+          <a:chOff x="0" y="0"/>
+          <a:chExt cx="0" cy="0"/>
+        </a:xfrm>
+      </p:grpSpPr>
+      <p:sp>
+        <p:nvSpPr>
+          <p:cNvPr id="2" name="Slide Image Placeholder 1"/>
+          <p:cNvSpPr>
+            <a:spLocks noGrp="1" noRot="1" noChangeAspect="1"/>
+          </p:cNvSpPr>
+          <p:nvPr>
+            <p:ph type="sldImg"/>
+          </p:nvPr>
+        </p:nvSpPr>
+        <p:spPr/>
+      </p:sp>
+      <p:sp>
+        <p:nvSpPr>
+          <p:cNvPr id="3" name="Notes Placeholder 2"/>
+          <p:cNvSpPr>
+            <a:spLocks noGrp="1"/>
+          </p:cNvSpPr>
+          <p:nvPr>
+            <p:ph type="body" idx="1"/>
+          </p:nvPr>
+        </p:nvSpPr>
+        <p:spPr/>
+        <p:txBody>
+          <a:bodyPr/>
+          <a:lstStyle/>
+          <a:p>
+            <a:r>
+              <a:rPr lang="en-US" dirty="0"/>
+              <a:t/>
+            </a:r>
+            <a:endParaRPr lang="en-US" dirty="0"/>
+          </a:p>
+        </p:txBody>
+      </p:sp>
+      <p:sp>
+        <p:nvSpPr>
+          <p:cNvPr id="4" name="Slide Number Placeholder 3"/>
+          <p:cNvSpPr>
+            <a:spLocks noGrp="1"/>
+          </p:cNvSpPr>
+          <p:nvPr>
+            <p:ph type="sldNum" sz="quarter" idx="10"/>
+          </p:nvPr>
+        </p:nvSpPr>
+        <p:spPr/>
+        <p:txBody>
+          <a:bodyPr/>
+          <a:lstStyle/>
+          <a:p>
+            <a:fld id="{F7021451-1387-4CA6-816F-3879F97B5CBC}" type="slidenum">
+              <a:rPr lang="en-US"/>
+              <a:t>15</a:t>
+            </a:fld>
+            <a:endParaRPr lang="en-US"/>
+          </a:p>
+        </p:txBody>
+      </p:sp>
+    </p:spTree>
+    <p:extLst>
+      <p:ext uri="{BB962C8B-B14F-4D97-AF65-F5344CB8AC3E}">
+        <p14:creationId xmlns:p14="http://schemas.microsoft.com/office/powerpoint/2010/main" val="1024086991"/>
+      </p:ext>
+    </p:extLst>
+  </p:cSld>
+  <p:clrMapOvr>
+    <a:masterClrMapping/>
+  </p:clrMapOvr>
+</p:notes>
+</file>
+
+<file path=ppt/notesSlides/notesSlide16.xml><?xml version="1.0" encoding="utf-8"?>
+<p:notes xmlns:a="http://schemas.openxmlformats.org/drawingml/2006/main" xmlns:r="http://schemas.openxmlformats.org/officeDocument/2006/relationships" xmlns:p="http://schemas.openxmlformats.org/presentationml/2006/main">
+  <p:cSld>
+    <p:spTree>
+      <p:nvGrpSpPr>
+        <p:cNvPr id="1" name=""/>
+        <p:cNvGrpSpPr/>
+        <p:nvPr/>
+      </p:nvGrpSpPr>
+      <p:grpSpPr>
+        <a:xfrm>
+          <a:off x="0" y="0"/>
+          <a:ext cx="0" cy="0"/>
+          <a:chOff x="0" y="0"/>
+          <a:chExt cx="0" cy="0"/>
+        </a:xfrm>
+      </p:grpSpPr>
+      <p:sp>
+        <p:nvSpPr>
+          <p:cNvPr id="2" name="Slide Image Placeholder 1"/>
+          <p:cNvSpPr>
+            <a:spLocks noGrp="1" noRot="1" noChangeAspect="1"/>
+          </p:cNvSpPr>
+          <p:nvPr>
+            <p:ph type="sldImg"/>
+          </p:nvPr>
+        </p:nvSpPr>
+        <p:spPr/>
+      </p:sp>
+      <p:sp>
+        <p:nvSpPr>
+          <p:cNvPr id="3" name="Notes Placeholder 2"/>
+          <p:cNvSpPr>
+            <a:spLocks noGrp="1"/>
+          </p:cNvSpPr>
+          <p:nvPr>
+            <p:ph type="body" idx="1"/>
+          </p:nvPr>
+        </p:nvSpPr>
+        <p:spPr/>
+        <p:txBody>
+          <a:bodyPr/>
+          <a:lstStyle/>
+          <a:p>
+            <a:r>
+              <a:rPr lang="en-US" dirty="0"/>
+              <a:t/>
+            </a:r>
+            <a:endParaRPr lang="en-US" dirty="0"/>
+          </a:p>
+        </p:txBody>
+      </p:sp>
+      <p:sp>
+        <p:nvSpPr>
+          <p:cNvPr id="4" name="Slide Number Placeholder 3"/>
+          <p:cNvSpPr>
+            <a:spLocks noGrp="1"/>
+          </p:cNvSpPr>
+          <p:nvPr>
+            <p:ph type="sldNum" sz="quarter" idx="10"/>
+          </p:nvPr>
+        </p:nvSpPr>
+        <p:spPr/>
+        <p:txBody>
+          <a:bodyPr/>
+          <a:lstStyle/>
+          <a:p>
+            <a:fld id="{F7021451-1387-4CA6-816F-3879F97B5CBC}" type="slidenum">
+              <a:rPr lang="en-US"/>
+              <a:t>16</a:t>
+            </a:fld>
+            <a:endParaRPr lang="en-US"/>
+          </a:p>
+        </p:txBody>
+      </p:sp>
+    </p:spTree>
+    <p:extLst>
+      <p:ext uri="{BB962C8B-B14F-4D97-AF65-F5344CB8AC3E}">
+        <p14:creationId xmlns:p14="http://schemas.microsoft.com/office/powerpoint/2010/main" val="1024086991"/>
+      </p:ext>
+    </p:extLst>
+  </p:cSld>
+  <p:clrMapOvr>
+    <a:masterClrMapping/>
+  </p:clrMapOvr>
+</p:notes>
+</file>
+
 <file path=ppt/notesSlides/notesSlide2.xml><?xml version="1.0" encoding="utf-8"?>
 <p:notes xmlns:a="http://schemas.openxmlformats.org/drawingml/2006/main" xmlns:r="http://schemas.openxmlformats.org/officeDocument/2006/relationships" xmlns:p="http://schemas.openxmlformats.org/presentationml/2006/main">
   <p:cSld>
@@ -2407,14 +2763,34 @@
       </p:grpSpPr>
       <p:sp>
         <p:nvSpPr>
-          <p:cNvPr id="2" name="Text 0"/>
+          <p:cNvPr id="2" name="Shape 0"/>
+          <p:cNvSpPr/>
+          <p:nvPr/>
+        </p:nvSpPr>
+        <p:spPr>
+          <a:xfrm>
+            <a:off x="0" y="0"/>
+            <a:ext cx="164592" cy="6858000"/>
+          </a:xfrm>
+          <a:prstGeom prst="rect">
+            <a:avLst/>
+          </a:prstGeom>
+          <a:solidFill>
+            <a:srgbClr val="7A3B2E"/>
+          </a:solidFill>
+          <a:ln/>
+        </p:spPr>
+      </p:sp>
+      <p:sp>
+        <p:nvSpPr>
+          <p:cNvPr id="3" name="Text 1"/>
           <p:cNvSpPr/>
           <p:nvPr/>
         </p:nvSpPr>
         <p:spPr>
           <a:xfrm>
             <a:off x="640080" y="640080"/>
-            <a:ext cx="10058400" cy="731520"/>
+            <a:ext cx="10058400" cy="320040"/>
           </a:xfrm>
           <a:prstGeom prst="rect">
             <a:avLst/>
@@ -2424,6 +2800,47 @@
         </p:spPr>
         <p:txBody>
           <a:bodyPr wrap="square" rtlCol="0" anchor="ctr"/>
+          <a:lstStyle/>
+          <a:p>
+            <a:pPr indent="0" marL="0">
+              <a:buNone/>
+            </a:pPr>
+            <a:r>
+              <a:rPr lang="en-US" sz="1200" b="1" spc="300" kern="0" dirty="0">
+                <a:solidFill>
+                  <a:srgbClr val="7A3B2E"/>
+                </a:solidFill>
+                <a:latin typeface="Calibri" pitchFamily="34" charset="0"/>
+                <a:ea typeface="Calibri" pitchFamily="34" charset="-122"/>
+                <a:cs typeface="Calibri" pitchFamily="34" charset="-120"/>
+              </a:rPr>
+              <a:t>WEEK 2 · KEY POINTS</a:t>
+            </a:r>
+            <a:endParaRPr lang="en-US" sz="1200" dirty="0"/>
+          </a:p>
+        </p:txBody>
+      </p:sp>
+      <p:sp>
+        <p:nvSpPr>
+          <p:cNvPr id="4" name="Text 2"/>
+          <p:cNvSpPr/>
+          <p:nvPr/>
+        </p:nvSpPr>
+        <p:spPr>
+          <a:xfrm>
+            <a:off x="640080" y="1005840"/>
+            <a:ext cx="10881360" cy="914400"/>
+          </a:xfrm>
+          <a:prstGeom prst="rect">
+            <a:avLst/>
+          </a:prstGeom>
+          <a:noFill/>
+          <a:ln/>
+        </p:spPr>
+        <p:txBody>
+          <a:bodyPr wrap="square" rtlCol="0" anchor="t">
+            <a:spAutoFit/>
+          </a:bodyPr>
           <a:lstStyle/>
           <a:p>
             <a:pPr indent="0" marL="0">
@@ -2438,7 +2855,7 @@
                 <a:ea typeface="Cambria" pitchFamily="34" charset="-122"/>
                 <a:cs typeface="Cambria" pitchFamily="34" charset="-120"/>
               </a:rPr>
-              <a:t>Reading &amp; homework</a:t>
+              <a:t>Keyness: what makes a voice distinctive</a:t>
             </a:r>
             <a:endParaRPr lang="en-US" sz="3000" dirty="0"/>
           </a:p>
@@ -2446,14 +2863,14 @@
       </p:sp>
       <p:sp>
         <p:nvSpPr>
-          <p:cNvPr id="3" name="Shape 1"/>
-          <p:cNvSpPr/>
-          <p:nvPr/>
-        </p:nvSpPr>
-        <p:spPr>
-          <a:xfrm>
-            <a:off x="640080" y="1673352"/>
-            <a:ext cx="219456" cy="219456"/>
+          <p:cNvPr id="5" name="Shape 3"/>
+          <p:cNvSpPr/>
+          <p:nvPr/>
+        </p:nvSpPr>
+        <p:spPr>
+          <a:xfrm>
+            <a:off x="640080" y="2331720"/>
+            <a:ext cx="201168" cy="201168"/>
           </a:xfrm>
           <a:prstGeom prst="ellipse">
             <a:avLst/>
@@ -2466,53 +2883,78 @@
       </p:sp>
       <p:sp>
         <p:nvSpPr>
-          <p:cNvPr id="4" name="Text 2"/>
-          <p:cNvSpPr/>
-          <p:nvPr/>
-        </p:nvSpPr>
-        <p:spPr>
-          <a:xfrm>
-            <a:off x="1051560" y="1600200"/>
-            <a:ext cx="10424160" cy="365760"/>
-          </a:xfrm>
-          <a:prstGeom prst="rect">
-            <a:avLst/>
-          </a:prstGeom>
-          <a:noFill/>
-          <a:ln/>
-        </p:spPr>
-        <p:txBody>
-          <a:bodyPr wrap="square" rtlCol="0" anchor="ctr"/>
-          <a:lstStyle/>
-          <a:p>
-            <a:pPr indent="0" marL="0">
-              <a:buNone/>
-            </a:pPr>
-            <a:r>
-              <a:rPr lang="en-US" sz="1500" b="1" dirty="0">
-                <a:solidFill>
-                  <a:srgbClr val="7A3B2E"/>
+          <p:cNvPr id="6" name="Text 4"/>
+          <p:cNvSpPr/>
+          <p:nvPr/>
+        </p:nvSpPr>
+        <p:spPr>
+          <a:xfrm>
+            <a:off x="1097280" y="2240280"/>
+            <a:ext cx="10607040" cy="1017270"/>
+          </a:xfrm>
+          <a:prstGeom prst="rect">
+            <a:avLst/>
+          </a:prstGeom>
+          <a:noFill/>
+          <a:ln/>
+        </p:spPr>
+        <p:txBody>
+          <a:bodyPr wrap="square" rtlCol="0" anchor="t">
+            <a:spAutoFit/>
+          </a:bodyPr>
+          <a:lstStyle/>
+          <a:p>
+            <a:pPr indent="0" marL="0">
+              <a:lnSpc>
+                <a:spcPct val="112000"/>
+              </a:lnSpc>
+              <a:buNone/>
+            </a:pPr>
+            <a:r>
+              <a:rPr lang="en-US" sz="1650" dirty="0">
+                <a:solidFill>
+                  <a:srgbClr val="1A1A1A"/>
                 </a:solidFill>
                 <a:latin typeface="Calibri" pitchFamily="34" charset="0"/>
                 <a:ea typeface="Calibri" pitchFamily="34" charset="-122"/>
                 <a:cs typeface="Calibri" pitchFamily="34" charset="-120"/>
               </a:rPr>
-              <a:t>Reading</a:t>
-            </a:r>
-            <a:endParaRPr lang="en-US" sz="1500" dirty="0"/>
-          </a:p>
-        </p:txBody>
-      </p:sp>
-      <p:sp>
-        <p:nvSpPr>
-          <p:cNvPr id="5" name="Text 3"/>
-          <p:cNvSpPr/>
-          <p:nvPr/>
-        </p:nvSpPr>
-        <p:spPr>
-          <a:xfrm>
-            <a:off x="1051560" y="1984248"/>
-            <a:ext cx="10424160" cy="731520"/>
+              <a:t>For every word: how much likelier is it in corpus A than corpus B? A log-odds ratio, smoothed so rare words don't explode.</a:t>
+            </a:r>
+            <a:endParaRPr lang="en-US" sz="1650" dirty="0"/>
+          </a:p>
+        </p:txBody>
+      </p:sp>
+      <p:sp>
+        <p:nvSpPr>
+          <p:cNvPr id="7" name="Shape 5"/>
+          <p:cNvSpPr/>
+          <p:nvPr/>
+        </p:nvSpPr>
+        <p:spPr>
+          <a:xfrm>
+            <a:off x="640080" y="3348990"/>
+            <a:ext cx="201168" cy="201168"/>
+          </a:xfrm>
+          <a:prstGeom prst="ellipse">
+            <a:avLst/>
+          </a:prstGeom>
+          <a:solidFill>
+            <a:srgbClr val="3F6F5F"/>
+          </a:solidFill>
+          <a:ln/>
+        </p:spPr>
+      </p:sp>
+      <p:sp>
+        <p:nvSpPr>
+          <p:cNvPr id="8" name="Text 6"/>
+          <p:cNvSpPr/>
+          <p:nvPr/>
+        </p:nvSpPr>
+        <p:spPr>
+          <a:xfrm>
+            <a:off x="1097280" y="3257550"/>
+            <a:ext cx="10607040" cy="1017270"/>
           </a:xfrm>
           <a:prstGeom prst="rect">
             <a:avLst/>
@@ -2527,10 +2969,13 @@
           <a:lstStyle/>
           <a:p>
             <a:pPr indent="0" marL="0">
-              <a:buNone/>
-            </a:pPr>
-            <a:r>
-              <a:rPr lang="en-US" sz="1400" dirty="0">
+              <a:lnSpc>
+                <a:spcPct val="112000"/>
+              </a:lnSpc>
+              <a:buNone/>
+            </a:pPr>
+            <a:r>
+              <a:rPr lang="en-US" sz="1650" dirty="0">
                 <a:solidFill>
                   <a:srgbClr val="1A1A1A"/>
                 </a:solidFill>
@@ -2538,81 +2983,106 @@
                 <a:ea typeface="Calibri" pitchFamily="34" charset="-122"/>
                 <a:cs typeface="Calibri" pitchFamily="34" charset="-120"/>
               </a:rPr>
-              <a:t>Wolfram, What Is ChatGPT Doing (opening sections only)</a:t>
-            </a:r>
-            <a:endParaRPr lang="en-US" sz="1400" dirty="0"/>
-          </a:p>
-        </p:txBody>
-      </p:sp>
-      <p:sp>
-        <p:nvSpPr>
-          <p:cNvPr id="6" name="Shape 4"/>
-          <p:cNvSpPr/>
-          <p:nvPr/>
-        </p:nvSpPr>
-        <p:spPr>
-          <a:xfrm>
-            <a:off x="640080" y="2633472"/>
-            <a:ext cx="219456" cy="219456"/>
+              <a:t>Strongly positive = distinctively A. Strongly negative = distinctively B. The middle is shared language.</a:t>
+            </a:r>
+            <a:endParaRPr lang="en-US" sz="1650" dirty="0"/>
+          </a:p>
+        </p:txBody>
+      </p:sp>
+      <p:sp>
+        <p:nvSpPr>
+          <p:cNvPr id="9" name="Shape 7"/>
+          <p:cNvSpPr/>
+          <p:nvPr/>
+        </p:nvSpPr>
+        <p:spPr>
+          <a:xfrm>
+            <a:off x="640080" y="4366260"/>
+            <a:ext cx="201168" cy="201168"/>
           </a:xfrm>
           <a:prstGeom prst="ellipse">
             <a:avLst/>
           </a:prstGeom>
           <a:solidFill>
-            <a:srgbClr val="3F6F5F"/>
-          </a:solidFill>
-          <a:ln/>
-        </p:spPr>
-      </p:sp>
-      <p:sp>
-        <p:nvSpPr>
-          <p:cNvPr id="7" name="Text 5"/>
-          <p:cNvSpPr/>
-          <p:nvPr/>
-        </p:nvSpPr>
-        <p:spPr>
-          <a:xfrm>
-            <a:off x="1051560" y="2560320"/>
-            <a:ext cx="10424160" cy="365760"/>
-          </a:xfrm>
-          <a:prstGeom prst="rect">
-            <a:avLst/>
-          </a:prstGeom>
-          <a:noFill/>
-          <a:ln/>
-        </p:spPr>
-        <p:txBody>
-          <a:bodyPr wrap="square" rtlCol="0" anchor="ctr"/>
-          <a:lstStyle/>
-          <a:p>
-            <a:pPr indent="0" marL="0">
-              <a:buNone/>
-            </a:pPr>
-            <a:r>
-              <a:rPr lang="en-US" sz="1500" b="1" dirty="0">
-                <a:solidFill>
-                  <a:srgbClr val="3F6F5F"/>
+            <a:srgbClr val="B9852F"/>
+          </a:solidFill>
+          <a:ln/>
+        </p:spPr>
+      </p:sp>
+      <p:sp>
+        <p:nvSpPr>
+          <p:cNvPr id="10" name="Text 8"/>
+          <p:cNvSpPr/>
+          <p:nvPr/>
+        </p:nvSpPr>
+        <p:spPr>
+          <a:xfrm>
+            <a:off x="1097280" y="4274820"/>
+            <a:ext cx="10607040" cy="1017270"/>
+          </a:xfrm>
+          <a:prstGeom prst="rect">
+            <a:avLst/>
+          </a:prstGeom>
+          <a:noFill/>
+          <a:ln/>
+        </p:spPr>
+        <p:txBody>
+          <a:bodyPr wrap="square" rtlCol="0" anchor="t">
+            <a:spAutoFit/>
+          </a:bodyPr>
+          <a:lstStyle/>
+          <a:p>
+            <a:pPr indent="0" marL="0">
+              <a:lnSpc>
+                <a:spcPct val="112000"/>
+              </a:lnSpc>
+              <a:buNone/>
+            </a:pPr>
+            <a:r>
+              <a:rPr lang="en-US" sz="1650" dirty="0">
+                <a:solidFill>
+                  <a:srgbClr val="1A1A1A"/>
                 </a:solidFill>
                 <a:latin typeface="Calibri" pitchFamily="34" charset="0"/>
                 <a:ea typeface="Calibri" pitchFamily="34" charset="-122"/>
                 <a:cs typeface="Calibri" pitchFamily="34" charset="-120"/>
               </a:rPr>
-              <a:t>Supplement</a:t>
-            </a:r>
-            <a:endParaRPr lang="en-US" sz="1500" dirty="0"/>
-          </a:p>
-        </p:txBody>
-      </p:sp>
-      <p:sp>
-        <p:nvSpPr>
-          <p:cNvPr id="8" name="Text 6"/>
-          <p:cNvSpPr/>
-          <p:nvPr/>
-        </p:nvSpPr>
-        <p:spPr>
-          <a:xfrm>
-            <a:off x="1051560" y="2944368"/>
-            <a:ext cx="10424160" cy="731520"/>
+              <a:t>She Giggles, He Gallops is exactly this method: verbs after "she" vs. "he" in 2,000 screenplays. Women snuggle, giggle, squeal; men gallop, strap, shoot.</a:t>
+            </a:r>
+            <a:endParaRPr lang="en-US" sz="1650" dirty="0"/>
+          </a:p>
+        </p:txBody>
+      </p:sp>
+      <p:sp>
+        <p:nvSpPr>
+          <p:cNvPr id="11" name="Shape 9"/>
+          <p:cNvSpPr/>
+          <p:nvPr/>
+        </p:nvSpPr>
+        <p:spPr>
+          <a:xfrm>
+            <a:off x="640080" y="5383530"/>
+            <a:ext cx="201168" cy="201168"/>
+          </a:xfrm>
+          <a:prstGeom prst="ellipse">
+            <a:avLst/>
+          </a:prstGeom>
+          <a:solidFill>
+            <a:srgbClr val="7A3B2E"/>
+          </a:solidFill>
+          <a:ln/>
+        </p:spPr>
+      </p:sp>
+      <p:sp>
+        <p:nvSpPr>
+          <p:cNvPr id="12" name="Text 10"/>
+          <p:cNvSpPr/>
+          <p:nvPr/>
+        </p:nvSpPr>
+        <p:spPr>
+          <a:xfrm>
+            <a:off x="1097280" y="5292090"/>
+            <a:ext cx="10607040" cy="1017270"/>
           </a:xfrm>
           <a:prstGeom prst="rect">
             <a:avLst/>
@@ -2627,10 +3097,13 @@
           <a:lstStyle/>
           <a:p>
             <a:pPr indent="0" marL="0">
-              <a:buNone/>
-            </a:pPr>
-            <a:r>
-              <a:rPr lang="en-US" sz="1400" dirty="0">
+              <a:lnSpc>
+                <a:spcPct val="112000"/>
+              </a:lnSpc>
+              <a:buNone/>
+            </a:pPr>
+            <a:r>
+              <a:rPr lang="en-US" sz="1650" dirty="0">
                 <a:solidFill>
                   <a:srgbClr val="1A1A1A"/>
                 </a:solidFill>
@@ -2638,309 +3111,9 @@
                 <a:ea typeface="Calibri" pitchFamily="34" charset="-122"/>
                 <a:cs typeface="Calibri" pitchFamily="34" charset="-120"/>
               </a:rPr>
-              <a:t>Zipf's law, the straight line in every text</a:t>
-            </a:r>
-            <a:endParaRPr lang="en-US" sz="1400" dirty="0"/>
-          </a:p>
-        </p:txBody>
-      </p:sp>
-      <p:sp>
-        <p:nvSpPr>
-          <p:cNvPr id="9" name="Shape 7"/>
-          <p:cNvSpPr/>
-          <p:nvPr/>
-        </p:nvSpPr>
-        <p:spPr>
-          <a:xfrm>
-            <a:off x="640080" y="3593592"/>
-            <a:ext cx="219456" cy="219456"/>
-          </a:xfrm>
-          <a:prstGeom prst="ellipse">
-            <a:avLst/>
-          </a:prstGeom>
-          <a:solidFill>
-            <a:srgbClr val="B9852F"/>
-          </a:solidFill>
-          <a:ln/>
-        </p:spPr>
-      </p:sp>
-      <p:sp>
-        <p:nvSpPr>
-          <p:cNvPr id="10" name="Text 8"/>
-          <p:cNvSpPr/>
-          <p:nvPr/>
-        </p:nvSpPr>
-        <p:spPr>
-          <a:xfrm>
-            <a:off x="1051560" y="3520440"/>
-            <a:ext cx="10424160" cy="365760"/>
-          </a:xfrm>
-          <a:prstGeom prst="rect">
-            <a:avLst/>
-          </a:prstGeom>
-          <a:noFill/>
-          <a:ln/>
-        </p:spPr>
-        <p:txBody>
-          <a:bodyPr wrap="square" rtlCol="0" anchor="ctr"/>
-          <a:lstStyle/>
-          <a:p>
-            <a:pPr indent="0" marL="0">
-              <a:buNone/>
-            </a:pPr>
-            <a:r>
-              <a:rPr lang="en-US" sz="1500" b="1" dirty="0">
-                <a:solidFill>
-                  <a:srgbClr val="B9852F"/>
-                </a:solidFill>
-                <a:latin typeface="Calibri" pitchFamily="34" charset="0"/>
-                <a:ea typeface="Calibri" pitchFamily="34" charset="-122"/>
-                <a:cs typeface="Calibri" pitchFamily="34" charset="-120"/>
-              </a:rPr>
-              <a:t>Deeper (optional)</a:t>
-            </a:r>
-            <a:endParaRPr lang="en-US" sz="1500" dirty="0"/>
-          </a:p>
-        </p:txBody>
-      </p:sp>
-      <p:sp>
-        <p:nvSpPr>
-          <p:cNvPr id="11" name="Text 9"/>
-          <p:cNvSpPr/>
-          <p:nvPr/>
-        </p:nvSpPr>
-        <p:spPr>
-          <a:xfrm>
-            <a:off x="1051560" y="3904488"/>
-            <a:ext cx="10424160" cy="731520"/>
-          </a:xfrm>
-          <a:prstGeom prst="rect">
-            <a:avLst/>
-          </a:prstGeom>
-          <a:noFill/>
-          <a:ln/>
-        </p:spPr>
-        <p:txBody>
-          <a:bodyPr wrap="square" rtlCol="0" anchor="t">
-            <a:spAutoFit/>
-          </a:bodyPr>
-          <a:lstStyle/>
-          <a:p>
-            <a:pPr indent="0" marL="0">
-              <a:buNone/>
-            </a:pPr>
-            <a:r>
-              <a:rPr lang="en-US" sz="1400" dirty="0">
-                <a:solidFill>
-                  <a:srgbClr val="1A1A1A"/>
-                </a:solidFill>
-                <a:latin typeface="Calibri" pitchFamily="34" charset="0"/>
-                <a:ea typeface="Calibri" pitchFamily="34" charset="-122"/>
-                <a:cs typeface="Calibri" pitchFamily="34" charset="-120"/>
-              </a:rPr>
-              <a:t>Grimmer &amp;amp; Stewart, Text as Data (2013), §1–4: all quantitative models of language are wrong, but some are useful</a:t>
-            </a:r>
-            <a:endParaRPr lang="en-US" sz="1400" dirty="0"/>
-          </a:p>
-        </p:txBody>
-      </p:sp>
-      <p:sp>
-        <p:nvSpPr>
-          <p:cNvPr id="12" name="Shape 10"/>
-          <p:cNvSpPr/>
-          <p:nvPr/>
-        </p:nvSpPr>
-        <p:spPr>
-          <a:xfrm>
-            <a:off x="640080" y="4553712"/>
-            <a:ext cx="219456" cy="219456"/>
-          </a:xfrm>
-          <a:prstGeom prst="ellipse">
-            <a:avLst/>
-          </a:prstGeom>
-          <a:solidFill>
-            <a:srgbClr val="3F6F5F"/>
-          </a:solidFill>
-          <a:ln/>
-        </p:spPr>
-      </p:sp>
-      <p:sp>
-        <p:nvSpPr>
-          <p:cNvPr id="13" name="Text 11"/>
-          <p:cNvSpPr/>
-          <p:nvPr/>
-        </p:nvSpPr>
-        <p:spPr>
-          <a:xfrm>
-            <a:off x="1051560" y="4480560"/>
-            <a:ext cx="10424160" cy="365760"/>
-          </a:xfrm>
-          <a:prstGeom prst="rect">
-            <a:avLst/>
-          </a:prstGeom>
-          <a:noFill/>
-          <a:ln/>
-        </p:spPr>
-        <p:txBody>
-          <a:bodyPr wrap="square" rtlCol="0" anchor="ctr"/>
-          <a:lstStyle/>
-          <a:p>
-            <a:pPr indent="0" marL="0">
-              <a:buNone/>
-            </a:pPr>
-            <a:r>
-              <a:rPr lang="en-US" sz="1500" b="1" dirty="0">
-                <a:solidFill>
-                  <a:srgbClr val="3F6F5F"/>
-                </a:solidFill>
-                <a:latin typeface="Calibri" pitchFamily="34" charset="0"/>
-                <a:ea typeface="Calibri" pitchFamily="34" charset="-122"/>
-                <a:cs typeface="Calibri" pitchFamily="34" charset="-120"/>
-              </a:rPr>
-              <a:t>Sketch</a:t>
-            </a:r>
-            <a:endParaRPr lang="en-US" sz="1500" dirty="0"/>
-          </a:p>
-        </p:txBody>
-      </p:sp>
-      <p:sp>
-        <p:nvSpPr>
-          <p:cNvPr id="14" name="Text 12"/>
-          <p:cNvSpPr/>
-          <p:nvPr/>
-        </p:nvSpPr>
-        <p:spPr>
-          <a:xfrm>
-            <a:off x="1051560" y="4864608"/>
-            <a:ext cx="10424160" cy="731520"/>
-          </a:xfrm>
-          <a:prstGeom prst="rect">
-            <a:avLst/>
-          </a:prstGeom>
-          <a:noFill/>
-          <a:ln/>
-        </p:spPr>
-        <p:txBody>
-          <a:bodyPr wrap="square" rtlCol="0" anchor="t">
-            <a:spAutoFit/>
-          </a:bodyPr>
-          <a:lstStyle/>
-          <a:p>
-            <a:pPr indent="0" marL="0">
-              <a:buNone/>
-            </a:pPr>
-            <a:r>
-              <a:rPr lang="en-US" sz="1400" dirty="0">
-                <a:solidFill>
-                  <a:srgbClr val="1A1A1A"/>
-                </a:solidFill>
-                <a:latin typeface="Calibri" pitchFamily="34" charset="0"/>
-                <a:ea typeface="Calibri" pitchFamily="34" charset="-122"/>
-                <a:cs typeface="Calibri" pitchFamily="34" charset="-120"/>
-              </a:rPr>
-              <a:t>Count something in a text you care about; one chart; one sentence naming a choice. If the count compares two things, shuffle-test the gap.</a:t>
-            </a:r>
-            <a:endParaRPr lang="en-US" sz="1400" dirty="0"/>
-          </a:p>
-        </p:txBody>
-      </p:sp>
-      <p:sp>
-        <p:nvSpPr>
-          <p:cNvPr id="15" name="Shape 13"/>
-          <p:cNvSpPr/>
-          <p:nvPr/>
-        </p:nvSpPr>
-        <p:spPr>
-          <a:xfrm>
-            <a:off x="640080" y="5513832"/>
-            <a:ext cx="219456" cy="219456"/>
-          </a:xfrm>
-          <a:prstGeom prst="ellipse">
-            <a:avLst/>
-          </a:prstGeom>
-          <a:solidFill>
-            <a:srgbClr val="7A3B2E"/>
-          </a:solidFill>
-          <a:ln/>
-        </p:spPr>
-      </p:sp>
-      <p:sp>
-        <p:nvSpPr>
-          <p:cNvPr id="16" name="Text 14"/>
-          <p:cNvSpPr/>
-          <p:nvPr/>
-        </p:nvSpPr>
-        <p:spPr>
-          <a:xfrm>
-            <a:off x="1051560" y="5440680"/>
-            <a:ext cx="10424160" cy="365760"/>
-          </a:xfrm>
-          <a:prstGeom prst="rect">
-            <a:avLst/>
-          </a:prstGeom>
-          <a:noFill/>
-          <a:ln/>
-        </p:spPr>
-        <p:txBody>
-          <a:bodyPr wrap="square" rtlCol="0" anchor="ctr"/>
-          <a:lstStyle/>
-          <a:p>
-            <a:pPr indent="0" marL="0">
-              <a:buNone/>
-            </a:pPr>
-            <a:r>
-              <a:rPr lang="en-US" sz="1500" b="1" dirty="0">
-                <a:solidFill>
-                  <a:srgbClr val="7A3B2E"/>
-                </a:solidFill>
-                <a:latin typeface="Calibri" pitchFamily="34" charset="0"/>
-                <a:ea typeface="Calibri" pitchFamily="34" charset="-122"/>
-                <a:cs typeface="Calibri" pitchFamily="34" charset="-120"/>
-              </a:rPr>
-              <a:t>Check (AI closed)</a:t>
-            </a:r>
-            <a:endParaRPr lang="en-US" sz="1500" dirty="0"/>
-          </a:p>
-        </p:txBody>
-      </p:sp>
-      <p:sp>
-        <p:nvSpPr>
-          <p:cNvPr id="17" name="Text 15"/>
-          <p:cNvSpPr/>
-          <p:nvPr/>
-        </p:nvSpPr>
-        <p:spPr>
-          <a:xfrm>
-            <a:off x="1051560" y="5824728"/>
-            <a:ext cx="10424160" cy="731520"/>
-          </a:xfrm>
-          <a:prstGeom prst="rect">
-            <a:avLst/>
-          </a:prstGeom>
-          <a:noFill/>
-          <a:ln/>
-        </p:spPr>
-        <p:txBody>
-          <a:bodyPr wrap="square" rtlCol="0" anchor="t">
-            <a:spAutoFit/>
-          </a:bodyPr>
-          <a:lstStyle/>
-          <a:p>
-            <a:pPr indent="0" marL="0">
-              <a:buNone/>
-            </a:pPr>
-            <a:r>
-              <a:rPr lang="en-US" sz="1400" dirty="0">
-                <a:solidFill>
-                  <a:srgbClr val="1A1A1A"/>
-                </a:solidFill>
-                <a:latin typeface="Calibri" pitchFamily="34" charset="0"/>
-                <a:ea typeface="Calibri" pitchFamily="34" charset="-122"/>
-                <a:cs typeface="Calibri" pitchFamily="34" charset="-120"/>
-              </a:rPr>
-              <a:t>Explain it: why two tokenizers split a sentence differently, and what your stemming choice changed. (Competencies 3, 5.)</a:t>
-            </a:r>
-            <a:endParaRPr lang="en-US" sz="1400" dirty="0"/>
+              <a:t>The corpus pair is a choice: this artist against pop, this subreddit against a novel. Different pair, different "distinctive."</a:t>
+            </a:r>
+            <a:endParaRPr lang="en-US" sz="1650" dirty="0"/>
           </a:p>
         </p:txBody>
       </p:sp>
@@ -2978,7 +3151,27 @@
       </p:grpSpPr>
       <p:sp>
         <p:nvSpPr>
-          <p:cNvPr id="2" name="Text 0"/>
+          <p:cNvPr id="2" name="Shape 0"/>
+          <p:cNvSpPr/>
+          <p:nvPr/>
+        </p:nvSpPr>
+        <p:spPr>
+          <a:xfrm>
+            <a:off x="0" y="0"/>
+            <a:ext cx="164592" cy="6858000"/>
+          </a:xfrm>
+          <a:prstGeom prst="rect">
+            <a:avLst/>
+          </a:prstGeom>
+          <a:solidFill>
+            <a:srgbClr val="3F6F5F"/>
+          </a:solidFill>
+          <a:ln/>
+        </p:spPr>
+      </p:sp>
+      <p:sp>
+        <p:nvSpPr>
+          <p:cNvPr id="3" name="Text 1"/>
           <p:cNvSpPr/>
           <p:nvPr/>
         </p:nvSpPr>
@@ -3001,46 +3194,48 @@
               <a:buNone/>
             </a:pPr>
             <a:r>
-              <a:rPr lang="en-US" sz="1300" b="1" spc="300" kern="0" dirty="0">
-                <a:solidFill>
-                  <a:srgbClr val="7A3B2E"/>
+              <a:rPr lang="en-US" sz="1200" b="1" spc="300" kern="0" dirty="0">
+                <a:solidFill>
+                  <a:srgbClr val="3F6F5F"/>
                 </a:solidFill>
                 <a:latin typeface="Calibri" pitchFamily="34" charset="0"/>
                 <a:ea typeface="Calibri" pitchFamily="34" charset="-122"/>
                 <a:cs typeface="Calibri" pitchFamily="34" charset="-120"/>
               </a:rPr>
-              <a:t>HOW THIS WEEK CONNECTS</a:t>
-            </a:r>
-            <a:endParaRPr lang="en-US" sz="1300" dirty="0"/>
-          </a:p>
-        </p:txBody>
-      </p:sp>
-      <p:sp>
-        <p:nvSpPr>
-          <p:cNvPr id="3" name="Text 1"/>
-          <p:cNvSpPr/>
-          <p:nvPr/>
-        </p:nvSpPr>
-        <p:spPr>
-          <a:xfrm>
-            <a:off x="640080" y="987552"/>
-            <a:ext cx="10058400" cy="640080"/>
-          </a:xfrm>
-          <a:prstGeom prst="rect">
-            <a:avLst/>
-          </a:prstGeom>
-          <a:noFill/>
-          <a:ln/>
-        </p:spPr>
-        <p:txBody>
-          <a:bodyPr wrap="square" rtlCol="0" anchor="ctr"/>
-          <a:lstStyle/>
-          <a:p>
-            <a:pPr indent="0" marL="0">
-              <a:buNone/>
-            </a:pPr>
-            <a:r>
-              <a:rPr lang="en-US" sz="2800" b="1" dirty="0">
+              <a:t>WEEK 2 · KEY POINTS</a:t>
+            </a:r>
+            <a:endParaRPr lang="en-US" sz="1200" dirty="0"/>
+          </a:p>
+        </p:txBody>
+      </p:sp>
+      <p:sp>
+        <p:nvSpPr>
+          <p:cNvPr id="4" name="Text 2"/>
+          <p:cNvSpPr/>
+          <p:nvPr/>
+        </p:nvSpPr>
+        <p:spPr>
+          <a:xfrm>
+            <a:off x="640080" y="1005840"/>
+            <a:ext cx="10881360" cy="914400"/>
+          </a:xfrm>
+          <a:prstGeom prst="rect">
+            <a:avLst/>
+          </a:prstGeom>
+          <a:noFill/>
+          <a:ln/>
+        </p:spPr>
+        <p:txBody>
+          <a:bodyPr wrap="square" rtlCol="0" anchor="t">
+            <a:spAutoFit/>
+          </a:bodyPr>
+          <a:lstStyle/>
+          <a:p>
+            <a:pPr indent="0" marL="0">
+              <a:buNone/>
+            </a:pPr>
+            <a:r>
+              <a:rPr lang="en-US" sz="3000" b="1" dirty="0">
                 <a:solidFill>
                   <a:srgbClr val="1A1A1A"/>
                 </a:solidFill>
@@ -3048,27 +3243,25 @@
                 <a:ea typeface="Cambria" pitchFamily="34" charset="-122"/>
                 <a:cs typeface="Cambria" pitchFamily="34" charset="-120"/>
               </a:rPr>
-              <a:t>The course's through-lines</a:t>
-            </a:r>
-            <a:endParaRPr lang="en-US" sz="2800" dirty="0"/>
-          </a:p>
-        </p:txBody>
-      </p:sp>
-      <p:sp>
-        <p:nvSpPr>
-          <p:cNvPr id="4" name="Shape 2"/>
-          <p:cNvSpPr/>
-          <p:nvPr/>
-        </p:nvSpPr>
-        <p:spPr>
-          <a:xfrm>
-            <a:off x="640080" y="2057400"/>
-            <a:ext cx="457200" cy="457200"/>
-          </a:xfrm>
-          <a:prstGeom prst="roundRect">
-            <a:avLst>
-              <a:gd name="adj" fmla="val 16000"/>
-            </a:avLst>
+              <a:t>The shuffle test: is the gap real?</a:t>
+            </a:r>
+            <a:endParaRPr lang="en-US" sz="3000" dirty="0"/>
+          </a:p>
+        </p:txBody>
+      </p:sp>
+      <p:sp>
+        <p:nvSpPr>
+          <p:cNvPr id="5" name="Shape 3"/>
+          <p:cNvSpPr/>
+          <p:nvPr/>
+        </p:nvSpPr>
+        <p:spPr>
+          <a:xfrm>
+            <a:off x="640080" y="2331720"/>
+            <a:ext cx="201168" cy="201168"/>
+          </a:xfrm>
+          <a:prstGeom prst="ellipse">
+            <a:avLst/>
           </a:prstGeom>
           <a:solidFill>
             <a:srgbClr val="7A3B2E"/>
@@ -3078,92 +3271,14 @@
       </p:sp>
       <p:sp>
         <p:nvSpPr>
-          <p:cNvPr id="5" name="Text 3"/>
-          <p:cNvSpPr/>
-          <p:nvPr/>
-        </p:nvSpPr>
-        <p:spPr>
-          <a:xfrm>
-            <a:off x="640080" y="2057400"/>
-            <a:ext cx="457200" cy="457200"/>
-          </a:xfrm>
-          <a:prstGeom prst="rect">
-            <a:avLst/>
-          </a:prstGeom>
-          <a:noFill/>
-          <a:ln/>
-        </p:spPr>
-        <p:txBody>
-          <a:bodyPr wrap="square" rtlCol="0" anchor="ctr"/>
-          <a:lstStyle/>
-          <a:p>
-            <a:pPr algn="ctr" indent="0" marL="0">
-              <a:buNone/>
-            </a:pPr>
-            <a:r>
-              <a:rPr lang="en-US" sz="2000" b="1" dirty="0">
-                <a:solidFill>
-                  <a:srgbClr val="FFFFFF"/>
-                </a:solidFill>
-                <a:latin typeface="Cambria" pitchFamily="34" charset="0"/>
-                <a:ea typeface="Cambria" pitchFamily="34" charset="-122"/>
-                <a:cs typeface="Cambria" pitchFamily="34" charset="-120"/>
-              </a:rPr>
-              <a:t>1</a:t>
-            </a:r>
-            <a:endParaRPr lang="en-US" sz="2000" dirty="0"/>
-          </a:p>
-        </p:txBody>
-      </p:sp>
-      <p:sp>
-        <p:nvSpPr>
           <p:cNvPr id="6" name="Text 4"/>
           <p:cNvSpPr/>
           <p:nvPr/>
         </p:nvSpPr>
         <p:spPr>
           <a:xfrm>
-            <a:off x="1371600" y="2020824"/>
-            <a:ext cx="10332720" cy="411480"/>
-          </a:xfrm>
-          <a:prstGeom prst="rect">
-            <a:avLst/>
-          </a:prstGeom>
-          <a:noFill/>
-          <a:ln/>
-        </p:spPr>
-        <p:txBody>
-          <a:bodyPr wrap="square" rtlCol="0" anchor="ctr"/>
-          <a:lstStyle/>
-          <a:p>
-            <a:pPr indent="0" marL="0">
-              <a:buNone/>
-            </a:pPr>
-            <a:r>
-              <a:rPr lang="en-US" sz="1900" b="1" dirty="0">
-                <a:solidFill>
-                  <a:srgbClr val="7A3B2E"/>
-                </a:solidFill>
-                <a:latin typeface="Cambria" pitchFamily="34" charset="0"/>
-                <a:ea typeface="Cambria" pitchFamily="34" charset="-122"/>
-                <a:cs typeface="Cambria" pitchFamily="34" charset="-120"/>
-              </a:rPr>
-              <a:t>Beyond counting</a:t>
-            </a:r>
-            <a:endParaRPr lang="en-US" sz="1900" dirty="0"/>
-          </a:p>
-        </p:txBody>
-      </p:sp>
-      <p:sp>
-        <p:nvSpPr>
-          <p:cNvPr id="7" name="Text 5"/>
-          <p:cNvSpPr/>
-          <p:nvPr/>
-        </p:nvSpPr>
-        <p:spPr>
-          <a:xfrm>
-            <a:off x="1371600" y="2441448"/>
-            <a:ext cx="10332720" cy="914400"/>
+            <a:off x="1097280" y="2240280"/>
+            <a:ext cx="10607040" cy="1017270"/>
           </a:xfrm>
           <a:prstGeom prst="rect">
             <a:avLst/>
@@ -3184,7 +3299,7 @@
               <a:buNone/>
             </a:pPr>
             <a:r>
-              <a:rPr lang="en-US" sz="1450" dirty="0">
+              <a:rPr lang="en-US" sz="1650" dirty="0">
                 <a:solidFill>
                   <a:srgbClr val="1A1A1A"/>
                 </a:solidFill>
@@ -3192,27 +3307,25 @@
                 <a:ea typeface="Calibri" pitchFamily="34" charset="-122"/>
                 <a:cs typeface="Calibri" pitchFamily="34" charset="-120"/>
               </a:rPr>
-              <a:t>Counting is the simplest tool and has no notion of meaning. Week 5 addresses that limit.</a:t>
-            </a:r>
-            <a:endParaRPr lang="en-US" sz="1450" dirty="0"/>
-          </a:p>
-        </p:txBody>
-      </p:sp>
-      <p:sp>
-        <p:nvSpPr>
-          <p:cNvPr id="8" name="Shape 6"/>
-          <p:cNvSpPr/>
-          <p:nvPr/>
-        </p:nvSpPr>
-        <p:spPr>
-          <a:xfrm>
-            <a:off x="640080" y="3520440"/>
-            <a:ext cx="457200" cy="457200"/>
-          </a:xfrm>
-          <a:prstGeom prst="roundRect">
-            <a:avLst>
-              <a:gd name="adj" fmla="val 16000"/>
-            </a:avLst>
+              <a:t>The question: could randomly dealt labels produce a gap this large?</a:t>
+            </a:r>
+            <a:endParaRPr lang="en-US" sz="1650" dirty="0"/>
+          </a:p>
+        </p:txBody>
+      </p:sp>
+      <p:sp>
+        <p:nvSpPr>
+          <p:cNvPr id="7" name="Shape 5"/>
+          <p:cNvSpPr/>
+          <p:nvPr/>
+        </p:nvSpPr>
+        <p:spPr>
+          <a:xfrm>
+            <a:off x="640080" y="3348990"/>
+            <a:ext cx="201168" cy="201168"/>
+          </a:xfrm>
+          <a:prstGeom prst="ellipse">
+            <a:avLst/>
           </a:prstGeom>
           <a:solidFill>
             <a:srgbClr val="3F6F5F"/>
@@ -3222,92 +3335,14 @@
       </p:sp>
       <p:sp>
         <p:nvSpPr>
-          <p:cNvPr id="9" name="Text 7"/>
-          <p:cNvSpPr/>
-          <p:nvPr/>
-        </p:nvSpPr>
-        <p:spPr>
-          <a:xfrm>
-            <a:off x="640080" y="3520440"/>
-            <a:ext cx="457200" cy="457200"/>
-          </a:xfrm>
-          <a:prstGeom prst="rect">
-            <a:avLst/>
-          </a:prstGeom>
-          <a:noFill/>
-          <a:ln/>
-        </p:spPr>
-        <p:txBody>
-          <a:bodyPr wrap="square" rtlCol="0" anchor="ctr"/>
-          <a:lstStyle/>
-          <a:p>
-            <a:pPr algn="ctr" indent="0" marL="0">
-              <a:buNone/>
-            </a:pPr>
-            <a:r>
-              <a:rPr lang="en-US" sz="2000" b="1" dirty="0">
-                <a:solidFill>
-                  <a:srgbClr val="FFFFFF"/>
-                </a:solidFill>
-                <a:latin typeface="Cambria" pitchFamily="34" charset="0"/>
-                <a:ea typeface="Cambria" pitchFamily="34" charset="-122"/>
-                <a:cs typeface="Cambria" pitchFamily="34" charset="-120"/>
-              </a:rPr>
-              <a:t>2</a:t>
-            </a:r>
-            <a:endParaRPr lang="en-US" sz="2000" dirty="0"/>
-          </a:p>
-        </p:txBody>
-      </p:sp>
-      <p:sp>
-        <p:nvSpPr>
-          <p:cNvPr id="10" name="Text 8"/>
-          <p:cNvSpPr/>
-          <p:nvPr/>
-        </p:nvSpPr>
-        <p:spPr>
-          <a:xfrm>
-            <a:off x="1371600" y="3483864"/>
-            <a:ext cx="10332720" cy="411480"/>
-          </a:xfrm>
-          <a:prstGeom prst="rect">
-            <a:avLst/>
-          </a:prstGeom>
-          <a:noFill/>
-          <a:ln/>
-        </p:spPr>
-        <p:txBody>
-          <a:bodyPr wrap="square" rtlCol="0" anchor="ctr"/>
-          <a:lstStyle/>
-          <a:p>
-            <a:pPr indent="0" marL="0">
-              <a:buNone/>
-            </a:pPr>
-            <a:r>
-              <a:rPr lang="en-US" sz="1900" b="1" dirty="0">
-                <a:solidFill>
-                  <a:srgbClr val="3F6F5F"/>
-                </a:solidFill>
-                <a:latin typeface="Cambria" pitchFamily="34" charset="0"/>
-                <a:ea typeface="Cambria" pitchFamily="34" charset="-122"/>
-                <a:cs typeface="Cambria" pitchFamily="34" charset="-120"/>
-              </a:rPr>
-              <a:t>Every count is a choice</a:t>
-            </a:r>
-            <a:endParaRPr lang="en-US" sz="1900" dirty="0"/>
-          </a:p>
-        </p:txBody>
-      </p:sp>
-      <p:sp>
-        <p:nvSpPr>
-          <p:cNvPr id="11" name="Text 9"/>
-          <p:cNvSpPr/>
-          <p:nvPr/>
-        </p:nvSpPr>
-        <p:spPr>
-          <a:xfrm>
-            <a:off x="1371600" y="3904488"/>
-            <a:ext cx="10332720" cy="914400"/>
+          <p:cNvPr id="8" name="Text 6"/>
+          <p:cNvSpPr/>
+          <p:nvPr/>
+        </p:nvSpPr>
+        <p:spPr>
+          <a:xfrm>
+            <a:off x="1097280" y="3257550"/>
+            <a:ext cx="10607040" cy="1017270"/>
           </a:xfrm>
           <a:prstGeom prst="rect">
             <a:avLst/>
@@ -3328,7 +3363,7 @@
               <a:buNone/>
             </a:pPr>
             <a:r>
-              <a:rPr lang="en-US" sz="1450" dirty="0">
+              <a:rPr lang="en-US" sz="1650" dirty="0">
                 <a:solidFill>
                   <a:srgbClr val="1A1A1A"/>
                 </a:solidFill>
@@ -3336,27 +3371,25 @@
                 <a:ea typeface="Calibri" pitchFamily="34" charset="-122"/>
                 <a:cs typeface="Calibri" pitchFamily="34" charset="-120"/>
               </a:rPr>
-              <a:t>Tokens, stemming, the corpus, the chart's axis, each hides a decision you made.</a:t>
-            </a:r>
-            <a:endParaRPr lang="en-US" sz="1450" dirty="0"/>
-          </a:p>
-        </p:txBody>
-      </p:sp>
-      <p:sp>
-        <p:nvSpPr>
-          <p:cNvPr id="12" name="Shape 10"/>
-          <p:cNvSpPr/>
-          <p:nvPr/>
-        </p:nvSpPr>
-        <p:spPr>
-          <a:xfrm>
-            <a:off x="640080" y="4983480"/>
-            <a:ext cx="457200" cy="457200"/>
-          </a:xfrm>
-          <a:prstGeom prst="roundRect">
-            <a:avLst>
-              <a:gd name="adj" fmla="val 16000"/>
-            </a:avLst>
+              <a:t>Shuffle the labels, recount, 1,000 times. Mark where the real gap lands in that pile.</a:t>
+            </a:r>
+            <a:endParaRPr lang="en-US" sz="1650" dirty="0"/>
+          </a:p>
+        </p:txBody>
+      </p:sp>
+      <p:sp>
+        <p:nvSpPr>
+          <p:cNvPr id="9" name="Shape 7"/>
+          <p:cNvSpPr/>
+          <p:nvPr/>
+        </p:nvSpPr>
+        <p:spPr>
+          <a:xfrm>
+            <a:off x="640080" y="4366260"/>
+            <a:ext cx="201168" cy="201168"/>
+          </a:xfrm>
+          <a:prstGeom prst="ellipse">
+            <a:avLst/>
           </a:prstGeom>
           <a:solidFill>
             <a:srgbClr val="B9852F"/>
@@ -3366,92 +3399,14 @@
       </p:sp>
       <p:sp>
         <p:nvSpPr>
-          <p:cNvPr id="13" name="Text 11"/>
-          <p:cNvSpPr/>
-          <p:nvPr/>
-        </p:nvSpPr>
-        <p:spPr>
-          <a:xfrm>
-            <a:off x="640080" y="4983480"/>
-            <a:ext cx="457200" cy="457200"/>
-          </a:xfrm>
-          <a:prstGeom prst="rect">
-            <a:avLst/>
-          </a:prstGeom>
-          <a:noFill/>
-          <a:ln/>
-        </p:spPr>
-        <p:txBody>
-          <a:bodyPr wrap="square" rtlCol="0" anchor="ctr"/>
-          <a:lstStyle/>
-          <a:p>
-            <a:pPr algn="ctr" indent="0" marL="0">
-              <a:buNone/>
-            </a:pPr>
-            <a:r>
-              <a:rPr lang="en-US" sz="2000" b="1" dirty="0">
-                <a:solidFill>
-                  <a:srgbClr val="FFFFFF"/>
-                </a:solidFill>
-                <a:latin typeface="Cambria" pitchFamily="34" charset="0"/>
-                <a:ea typeface="Cambria" pitchFamily="34" charset="-122"/>
-                <a:cs typeface="Cambria" pitchFamily="34" charset="-120"/>
-              </a:rPr>
-              <a:t>3</a:t>
-            </a:r>
-            <a:endParaRPr lang="en-US" sz="2000" dirty="0"/>
-          </a:p>
-        </p:txBody>
-      </p:sp>
-      <p:sp>
-        <p:nvSpPr>
-          <p:cNvPr id="14" name="Text 12"/>
-          <p:cNvSpPr/>
-          <p:nvPr/>
-        </p:nvSpPr>
-        <p:spPr>
-          <a:xfrm>
-            <a:off x="1371600" y="4946904"/>
-            <a:ext cx="10332720" cy="411480"/>
-          </a:xfrm>
-          <a:prstGeom prst="rect">
-            <a:avLst/>
-          </a:prstGeom>
-          <a:noFill/>
-          <a:ln/>
-        </p:spPr>
-        <p:txBody>
-          <a:bodyPr wrap="square" rtlCol="0" anchor="ctr"/>
-          <a:lstStyle/>
-          <a:p>
-            <a:pPr indent="0" marL="0">
-              <a:buNone/>
-            </a:pPr>
-            <a:r>
-              <a:rPr lang="en-US" sz="1900" b="1" dirty="0">
-                <a:solidFill>
-                  <a:srgbClr val="B9852F"/>
-                </a:solidFill>
-                <a:latin typeface="Cambria" pitchFamily="34" charset="0"/>
-                <a:ea typeface="Cambria" pitchFamily="34" charset="-122"/>
-                <a:cs typeface="Cambria" pitchFamily="34" charset="-120"/>
-              </a:rPr>
-              <a:t>Is the difference real?</a:t>
-            </a:r>
-            <a:endParaRPr lang="en-US" sz="1900" dirty="0"/>
-          </a:p>
-        </p:txBody>
-      </p:sp>
-      <p:sp>
-        <p:nvSpPr>
-          <p:cNvPr id="15" name="Text 13"/>
-          <p:cNvSpPr/>
-          <p:nvPr/>
-        </p:nvSpPr>
-        <p:spPr>
-          <a:xfrm>
-            <a:off x="1371600" y="5367528"/>
-            <a:ext cx="10332720" cy="914400"/>
+          <p:cNvPr id="10" name="Text 8"/>
+          <p:cNvSpPr/>
+          <p:nvPr/>
+        </p:nvSpPr>
+        <p:spPr>
+          <a:xfrm>
+            <a:off x="1097280" y="4274820"/>
+            <a:ext cx="10607040" cy="1017270"/>
           </a:xfrm>
           <a:prstGeom prst="rect">
             <a:avLst/>
@@ -3472,7 +3427,7 @@
               <a:buNone/>
             </a:pPr>
             <a:r>
-              <a:rPr lang="en-US" sz="1450" dirty="0">
+              <a:rPr lang="en-US" sz="1650" dirty="0">
                 <a:solidFill>
                   <a:srgbClr val="1A1A1A"/>
                 </a:solidFill>
@@ -3480,9 +3435,73 @@
                 <a:ea typeface="Calibri" pitchFamily="34" charset="-122"/>
                 <a:cs typeface="Calibri" pitchFamily="34" charset="-120"/>
               </a:rPr>
-              <a:t>Shuffle the labels and count again, one thousand times; if chance often matches your gap, do not trust it.</a:t>
-            </a:r>
-            <a:endParaRPr lang="en-US" sz="1450" dirty="0"/>
+              <a:t>Chance rarely matches it: a finding. Chance matches it often: a coincidence.</a:t>
+            </a:r>
+            <a:endParaRPr lang="en-US" sz="1650" dirty="0"/>
+          </a:p>
+        </p:txBody>
+      </p:sp>
+      <p:sp>
+        <p:nvSpPr>
+          <p:cNvPr id="11" name="Shape 9"/>
+          <p:cNvSpPr/>
+          <p:nvPr/>
+        </p:nvSpPr>
+        <p:spPr>
+          <a:xfrm>
+            <a:off x="640080" y="5383530"/>
+            <a:ext cx="201168" cy="201168"/>
+          </a:xfrm>
+          <a:prstGeom prst="ellipse">
+            <a:avLst/>
+          </a:prstGeom>
+          <a:solidFill>
+            <a:srgbClr val="7A3B2E"/>
+          </a:solidFill>
+          <a:ln/>
+        </p:spPr>
+      </p:sp>
+      <p:sp>
+        <p:nvSpPr>
+          <p:cNvPr id="12" name="Text 10"/>
+          <p:cNvSpPr/>
+          <p:nvPr/>
+        </p:nvSpPr>
+        <p:spPr>
+          <a:xfrm>
+            <a:off x="1097280" y="5292090"/>
+            <a:ext cx="10607040" cy="1017270"/>
+          </a:xfrm>
+          <a:prstGeom prst="rect">
+            <a:avLst/>
+          </a:prstGeom>
+          <a:noFill/>
+          <a:ln/>
+        </p:spPr>
+        <p:txBody>
+          <a:bodyPr wrap="square" rtlCol="0" anchor="t">
+            <a:spAutoFit/>
+          </a:bodyPr>
+          <a:lstStyle/>
+          <a:p>
+            <a:pPr indent="0" marL="0">
+              <a:lnSpc>
+                <a:spcPct val="112000"/>
+              </a:lnSpc>
+              <a:buNone/>
+            </a:pPr>
+            <a:r>
+              <a:rPr lang="en-US" sz="1650" dirty="0">
+                <a:solidFill>
+                  <a:srgbClr val="1A1A1A"/>
+                </a:solidFill>
+                <a:latin typeface="Calibri" pitchFamily="34" charset="0"/>
+                <a:ea typeface="Calibri" pitchFamily="34" charset="-122"/>
+                <a:cs typeface="Calibri" pitchFamily="34" charset="-120"/>
+              </a:rPr>
+              <a:t>It says "probably not chance." It never says "big enough to matter." Effect size is your argument to make.</a:t>
+            </a:r>
+            <a:endParaRPr lang="en-US" sz="1650" dirty="0"/>
           </a:p>
         </p:txBody>
       </p:sp>
@@ -3497,6 +3516,2695 @@
 <file path=ppt/slides/slide12.xml><?xml version="1.0" encoding="utf-8"?>
 <p:sld xmlns:a="http://schemas.openxmlformats.org/drawingml/2006/main" xmlns:r="http://schemas.openxmlformats.org/officeDocument/2006/relationships" xmlns:p="http://schemas.openxmlformats.org/presentationml/2006/main">
   <p:cSld name="Slide 12">
+    <p:bg>
+      <p:bgPr>
+        <a:solidFill>
+          <a:srgbClr val="FFFFFF"/>
+        </a:solidFill>
+      </p:bgPr>
+    </p:bg>
+    <p:spTree>
+      <p:nvGrpSpPr>
+        <p:cNvPr id="1" name=""/>
+        <p:cNvGrpSpPr/>
+        <p:nvPr/>
+      </p:nvGrpSpPr>
+      <p:grpSpPr>
+        <a:xfrm>
+          <a:off x="0" y="0"/>
+          <a:ext cx="0" cy="0"/>
+          <a:chOff x="0" y="0"/>
+          <a:chExt cx="0" cy="0"/>
+        </a:xfrm>
+      </p:grpSpPr>
+      <p:sp>
+        <p:nvSpPr>
+          <p:cNvPr id="2" name="Text 0"/>
+          <p:cNvSpPr/>
+          <p:nvPr/>
+        </p:nvSpPr>
+        <p:spPr>
+          <a:xfrm>
+            <a:off x="640080" y="731520"/>
+            <a:ext cx="10058400" cy="731520"/>
+          </a:xfrm>
+          <a:prstGeom prst="rect">
+            <a:avLst/>
+          </a:prstGeom>
+          <a:noFill/>
+          <a:ln/>
+        </p:spPr>
+        <p:txBody>
+          <a:bodyPr wrap="square" rtlCol="0" anchor="ctr"/>
+          <a:lstStyle/>
+          <a:p>
+            <a:pPr indent="0" marL="0">
+              <a:buNone/>
+            </a:pPr>
+            <a:r>
+              <a:rPr lang="en-US" sz="3000" b="1" dirty="0">
+                <a:solidFill>
+                  <a:srgbClr val="1A1A1A"/>
+                </a:solidFill>
+                <a:latin typeface="Cambria" pitchFamily="34" charset="0"/>
+                <a:ea typeface="Cambria" pitchFamily="34" charset="-122"/>
+                <a:cs typeface="Cambria" pitchFamily="34" charset="-120"/>
+              </a:rPr>
+              <a:t>Three modes today</a:t>
+            </a:r>
+            <a:endParaRPr lang="en-US" sz="3000" dirty="0"/>
+          </a:p>
+        </p:txBody>
+      </p:sp>
+      <p:sp>
+        <p:nvSpPr>
+          <p:cNvPr id="3" name="Text 1"/>
+          <p:cNvSpPr/>
+          <p:nvPr/>
+        </p:nvSpPr>
+        <p:spPr>
+          <a:xfrm>
+            <a:off x="640080" y="1417320"/>
+            <a:ext cx="10058400" cy="365760"/>
+          </a:xfrm>
+          <a:prstGeom prst="rect">
+            <a:avLst/>
+          </a:prstGeom>
+          <a:noFill/>
+          <a:ln/>
+        </p:spPr>
+        <p:txBody>
+          <a:bodyPr wrap="square" rtlCol="0" anchor="ctr"/>
+          <a:lstStyle/>
+          <a:p>
+            <a:pPr indent="0" marL="0">
+              <a:buNone/>
+            </a:pPr>
+            <a:r>
+              <a:rPr lang="en-US" sz="1400" i="1" dirty="0">
+                <a:solidFill>
+                  <a:srgbClr val="6B6B63"/>
+                </a:solidFill>
+                <a:latin typeface="Calibri" pitchFamily="34" charset="0"/>
+                <a:ea typeface="Calibri" pitchFamily="34" charset="-122"/>
+                <a:cs typeface="Calibri" pitchFamily="34" charset="-120"/>
+              </a:rPr>
+              <a:t>about a third of the session each</a:t>
+            </a:r>
+            <a:endParaRPr lang="en-US" sz="1400" dirty="0"/>
+          </a:p>
+        </p:txBody>
+      </p:sp>
+      <p:sp>
+        <p:nvSpPr>
+          <p:cNvPr id="4" name="Shape 2"/>
+          <p:cNvSpPr/>
+          <p:nvPr/>
+        </p:nvSpPr>
+        <p:spPr>
+          <a:xfrm>
+            <a:off x="640080" y="2194560"/>
+            <a:ext cx="3383280" cy="3291840"/>
+          </a:xfrm>
+          <a:prstGeom prst="roundRect">
+            <a:avLst>
+              <a:gd name="adj" fmla="val 3333"/>
+            </a:avLst>
+          </a:prstGeom>
+          <a:solidFill>
+            <a:srgbClr val="F4EEE8"/>
+          </a:solidFill>
+          <a:ln/>
+        </p:spPr>
+      </p:sp>
+      <p:sp>
+        <p:nvSpPr>
+          <p:cNvPr id="5" name="Shape 3"/>
+          <p:cNvSpPr/>
+          <p:nvPr/>
+        </p:nvSpPr>
+        <p:spPr>
+          <a:xfrm>
+            <a:off x="1051560" y="2606040"/>
+            <a:ext cx="548640" cy="548640"/>
+          </a:xfrm>
+          <a:prstGeom prst="ellipse">
+            <a:avLst/>
+          </a:prstGeom>
+          <a:solidFill>
+            <a:srgbClr val="7A3B2E"/>
+          </a:solidFill>
+          <a:ln/>
+        </p:spPr>
+      </p:sp>
+      <p:sp>
+        <p:nvSpPr>
+          <p:cNvPr id="6" name="Text 4"/>
+          <p:cNvSpPr/>
+          <p:nvPr/>
+        </p:nvSpPr>
+        <p:spPr>
+          <a:xfrm>
+            <a:off x="1005840" y="3383280"/>
+            <a:ext cx="2651760" cy="548640"/>
+          </a:xfrm>
+          <a:prstGeom prst="rect">
+            <a:avLst/>
+          </a:prstGeom>
+          <a:noFill/>
+          <a:ln/>
+        </p:spPr>
+        <p:txBody>
+          <a:bodyPr wrap="square" rtlCol="0" anchor="ctr"/>
+          <a:lstStyle/>
+          <a:p>
+            <a:pPr indent="0" marL="0">
+              <a:buNone/>
+            </a:pPr>
+            <a:r>
+              <a:rPr lang="en-US" sz="2100" b="1" dirty="0">
+                <a:solidFill>
+                  <a:srgbClr val="1A1A1A"/>
+                </a:solidFill>
+                <a:latin typeface="Cambria" pitchFamily="34" charset="0"/>
+                <a:ea typeface="Cambria" pitchFamily="34" charset="-122"/>
+                <a:cs typeface="Cambria" pitchFamily="34" charset="-120"/>
+              </a:rPr>
+              <a:t>Lecture / demo</a:t>
+            </a:r>
+            <a:endParaRPr lang="en-US" sz="2100" dirty="0"/>
+          </a:p>
+        </p:txBody>
+      </p:sp>
+      <p:sp>
+        <p:nvSpPr>
+          <p:cNvPr id="7" name="Text 5"/>
+          <p:cNvSpPr/>
+          <p:nvPr/>
+        </p:nvSpPr>
+        <p:spPr>
+          <a:xfrm>
+            <a:off x="1005840" y="3977640"/>
+            <a:ext cx="2651760" cy="1371600"/>
+          </a:xfrm>
+          <a:prstGeom prst="rect">
+            <a:avLst/>
+          </a:prstGeom>
+          <a:noFill/>
+          <a:ln/>
+        </p:spPr>
+        <p:txBody>
+          <a:bodyPr wrap="square" rtlCol="0" anchor="t">
+            <a:spAutoFit/>
+          </a:bodyPr>
+          <a:lstStyle/>
+          <a:p>
+            <a:pPr indent="0" marL="0">
+              <a:lnSpc>
+                <a:spcPct val="115000"/>
+              </a:lnSpc>
+              <a:buNone/>
+            </a:pPr>
+            <a:r>
+              <a:rPr lang="en-US" sz="1500" dirty="0">
+                <a:solidFill>
+                  <a:srgbClr val="1A1A1A"/>
+                </a:solidFill>
+                <a:latin typeface="Calibri" pitchFamily="34" charset="0"/>
+                <a:ea typeface="Calibri" pitchFamily="34" charset="-122"/>
+                <a:cs typeface="Calibri" pitchFamily="34" charset="-120"/>
+              </a:rPr>
+              <a:t>Advanced counting: baselines, keyness, and the shuffle test</a:t>
+            </a:r>
+            <a:endParaRPr lang="en-US" sz="1500" dirty="0"/>
+          </a:p>
+        </p:txBody>
+      </p:sp>
+      <p:sp>
+        <p:nvSpPr>
+          <p:cNvPr id="8" name="Shape 6"/>
+          <p:cNvSpPr/>
+          <p:nvPr/>
+        </p:nvSpPr>
+        <p:spPr>
+          <a:xfrm>
+            <a:off x="4526280" y="2194560"/>
+            <a:ext cx="3383280" cy="3291840"/>
+          </a:xfrm>
+          <a:prstGeom prst="roundRect">
+            <a:avLst>
+              <a:gd name="adj" fmla="val 3333"/>
+            </a:avLst>
+          </a:prstGeom>
+          <a:solidFill>
+            <a:srgbClr val="F4EEE8"/>
+          </a:solidFill>
+          <a:ln/>
+        </p:spPr>
+      </p:sp>
+      <p:sp>
+        <p:nvSpPr>
+          <p:cNvPr id="9" name="Shape 7"/>
+          <p:cNvSpPr/>
+          <p:nvPr/>
+        </p:nvSpPr>
+        <p:spPr>
+          <a:xfrm>
+            <a:off x="4937760" y="2606040"/>
+            <a:ext cx="548640" cy="548640"/>
+          </a:xfrm>
+          <a:prstGeom prst="ellipse">
+            <a:avLst/>
+          </a:prstGeom>
+          <a:solidFill>
+            <a:srgbClr val="3F6F5F"/>
+          </a:solidFill>
+          <a:ln/>
+        </p:spPr>
+      </p:sp>
+      <p:sp>
+        <p:nvSpPr>
+          <p:cNvPr id="10" name="Text 8"/>
+          <p:cNvSpPr/>
+          <p:nvPr/>
+        </p:nvSpPr>
+        <p:spPr>
+          <a:xfrm>
+            <a:off x="4892040" y="3383280"/>
+            <a:ext cx="2651760" cy="548640"/>
+          </a:xfrm>
+          <a:prstGeom prst="rect">
+            <a:avLst/>
+          </a:prstGeom>
+          <a:noFill/>
+          <a:ln/>
+        </p:spPr>
+        <p:txBody>
+          <a:bodyPr wrap="square" rtlCol="0" anchor="ctr"/>
+          <a:lstStyle/>
+          <a:p>
+            <a:pPr indent="0" marL="0">
+              <a:buNone/>
+            </a:pPr>
+            <a:r>
+              <a:rPr lang="en-US" sz="2100" b="1" dirty="0">
+                <a:solidFill>
+                  <a:srgbClr val="1A1A1A"/>
+                </a:solidFill>
+                <a:latin typeface="Cambria" pitchFamily="34" charset="0"/>
+                <a:ea typeface="Cambria" pitchFamily="34" charset="-122"/>
+                <a:cs typeface="Cambria" pitchFamily="34" charset="-120"/>
+              </a:rPr>
+              <a:t>Workshop</a:t>
+            </a:r>
+            <a:endParaRPr lang="en-US" sz="2100" dirty="0"/>
+          </a:p>
+        </p:txBody>
+      </p:sp>
+      <p:sp>
+        <p:nvSpPr>
+          <p:cNvPr id="11" name="Text 9"/>
+          <p:cNvSpPr/>
+          <p:nvPr/>
+        </p:nvSpPr>
+        <p:spPr>
+          <a:xfrm>
+            <a:off x="4892040" y="3977640"/>
+            <a:ext cx="2651760" cy="1371600"/>
+          </a:xfrm>
+          <a:prstGeom prst="rect">
+            <a:avLst/>
+          </a:prstGeom>
+          <a:noFill/>
+          <a:ln/>
+        </p:spPr>
+        <p:txBody>
+          <a:bodyPr wrap="square" rtlCol="0" anchor="t">
+            <a:spAutoFit/>
+          </a:bodyPr>
+          <a:lstStyle/>
+          <a:p>
+            <a:pPr indent="0" marL="0">
+              <a:lnSpc>
+                <a:spcPct val="115000"/>
+              </a:lnSpc>
+              <a:buNone/>
+            </a:pPr>
+            <a:r>
+              <a:rPr lang="en-US" sz="1500" dirty="0">
+                <a:solidFill>
+                  <a:srgbClr val="1A1A1A"/>
+                </a:solidFill>
+                <a:latin typeface="Calibri" pitchFamily="34" charset="0"/>
+                <a:ea typeface="Calibri" pitchFamily="34" charset="-122"/>
+                <a:cs typeface="Calibri" pitchFamily="34" charset="-120"/>
+              </a:rPr>
+              <a:t>Build hands-on on your own data.</a:t>
+            </a:r>
+            <a:endParaRPr lang="en-US" sz="1500" dirty="0"/>
+          </a:p>
+        </p:txBody>
+      </p:sp>
+      <p:sp>
+        <p:nvSpPr>
+          <p:cNvPr id="12" name="Shape 10"/>
+          <p:cNvSpPr/>
+          <p:nvPr/>
+        </p:nvSpPr>
+        <p:spPr>
+          <a:xfrm>
+            <a:off x="8412480" y="2194560"/>
+            <a:ext cx="3383280" cy="3291840"/>
+          </a:xfrm>
+          <a:prstGeom prst="roundRect">
+            <a:avLst>
+              <a:gd name="adj" fmla="val 3333"/>
+            </a:avLst>
+          </a:prstGeom>
+          <a:solidFill>
+            <a:srgbClr val="F4EEE8"/>
+          </a:solidFill>
+          <a:ln/>
+        </p:spPr>
+      </p:sp>
+      <p:sp>
+        <p:nvSpPr>
+          <p:cNvPr id="13" name="Shape 11"/>
+          <p:cNvSpPr/>
+          <p:nvPr/>
+        </p:nvSpPr>
+        <p:spPr>
+          <a:xfrm>
+            <a:off x="8823960" y="2606040"/>
+            <a:ext cx="548640" cy="548640"/>
+          </a:xfrm>
+          <a:prstGeom prst="ellipse">
+            <a:avLst/>
+          </a:prstGeom>
+          <a:solidFill>
+            <a:srgbClr val="B9852F"/>
+          </a:solidFill>
+          <a:ln/>
+        </p:spPr>
+      </p:sp>
+      <p:sp>
+        <p:nvSpPr>
+          <p:cNvPr id="14" name="Text 12"/>
+          <p:cNvSpPr/>
+          <p:nvPr/>
+        </p:nvSpPr>
+        <p:spPr>
+          <a:xfrm>
+            <a:off x="8778240" y="3383280"/>
+            <a:ext cx="2651760" cy="548640"/>
+          </a:xfrm>
+          <a:prstGeom prst="rect">
+            <a:avLst/>
+          </a:prstGeom>
+          <a:noFill/>
+          <a:ln/>
+        </p:spPr>
+        <p:txBody>
+          <a:bodyPr wrap="square" rtlCol="0" anchor="ctr"/>
+          <a:lstStyle/>
+          <a:p>
+            <a:pPr indent="0" marL="0">
+              <a:buNone/>
+            </a:pPr>
+            <a:r>
+              <a:rPr lang="en-US" sz="2100" b="1" dirty="0">
+                <a:solidFill>
+                  <a:srgbClr val="1A1A1A"/>
+                </a:solidFill>
+                <a:latin typeface="Cambria" pitchFamily="34" charset="0"/>
+                <a:ea typeface="Cambria" pitchFamily="34" charset="-122"/>
+                <a:cs typeface="Cambria" pitchFamily="34" charset="-120"/>
+              </a:rPr>
+              <a:t>Discussion</a:t>
+            </a:r>
+            <a:endParaRPr lang="en-US" sz="2100" dirty="0"/>
+          </a:p>
+        </p:txBody>
+      </p:sp>
+      <p:sp>
+        <p:nvSpPr>
+          <p:cNvPr id="15" name="Text 13"/>
+          <p:cNvSpPr/>
+          <p:nvPr/>
+        </p:nvSpPr>
+        <p:spPr>
+          <a:xfrm>
+            <a:off x="8778240" y="3977640"/>
+            <a:ext cx="2651760" cy="1371600"/>
+          </a:xfrm>
+          <a:prstGeom prst="rect">
+            <a:avLst/>
+          </a:prstGeom>
+          <a:noFill/>
+          <a:ln/>
+        </p:spPr>
+        <p:txBody>
+          <a:bodyPr wrap="square" rtlCol="0" anchor="t">
+            <a:spAutoFit/>
+          </a:bodyPr>
+          <a:lstStyle/>
+          <a:p>
+            <a:pPr indent="0" marL="0">
+              <a:lnSpc>
+                <a:spcPct val="115000"/>
+              </a:lnSpc>
+              <a:buNone/>
+            </a:pPr>
+            <a:r>
+              <a:rPr lang="en-US" sz="1500" dirty="0">
+                <a:solidFill>
+                  <a:srgbClr val="1A1A1A"/>
+                </a:solidFill>
+                <a:latin typeface="Calibri" pitchFamily="34" charset="0"/>
+                <a:ea typeface="Calibri" pitchFamily="34" charset="-122"/>
+                <a:cs typeface="Calibri" pitchFamily="34" charset="-120"/>
+              </a:rPr>
+              <a:t>Interrogate the study, debate it, or critique each other's work.</a:t>
+            </a:r>
+            <a:endParaRPr lang="en-US" sz="1500" dirty="0"/>
+          </a:p>
+        </p:txBody>
+      </p:sp>
+    </p:spTree>
+  </p:cSld>
+  <p:clrMapOvr>
+    <a:masterClrMapping/>
+  </p:clrMapOvr>
+</p:sld>
+</file>
+
+<file path=ppt/slides/slide13.xml><?xml version="1.0" encoding="utf-8"?>
+<p:sld xmlns:a="http://schemas.openxmlformats.org/drawingml/2006/main" xmlns:r="http://schemas.openxmlformats.org/officeDocument/2006/relationships" xmlns:p="http://schemas.openxmlformats.org/presentationml/2006/main">
+  <p:cSld name="Slide 13">
+    <p:bg>
+      <p:bgPr>
+        <a:solidFill>
+          <a:srgbClr val="FFFFFF"/>
+        </a:solidFill>
+      </p:bgPr>
+    </p:bg>
+    <p:spTree>
+      <p:nvGrpSpPr>
+        <p:cNvPr id="1" name=""/>
+        <p:cNvGrpSpPr/>
+        <p:nvPr/>
+      </p:nvGrpSpPr>
+      <p:grpSpPr>
+        <a:xfrm>
+          <a:off x="0" y="0"/>
+          <a:ext cx="0" cy="0"/>
+          <a:chOff x="0" y="0"/>
+          <a:chExt cx="0" cy="0"/>
+        </a:xfrm>
+      </p:grpSpPr>
+      <p:sp>
+        <p:nvSpPr>
+          <p:cNvPr id="2" name="Text 0"/>
+          <p:cNvSpPr/>
+          <p:nvPr/>
+        </p:nvSpPr>
+        <p:spPr>
+          <a:xfrm>
+            <a:off x="640080" y="640080"/>
+            <a:ext cx="10058400" cy="731520"/>
+          </a:xfrm>
+          <a:prstGeom prst="rect">
+            <a:avLst/>
+          </a:prstGeom>
+          <a:noFill/>
+          <a:ln/>
+        </p:spPr>
+        <p:txBody>
+          <a:bodyPr wrap="square" rtlCol="0" anchor="ctr"/>
+          <a:lstStyle/>
+          <a:p>
+            <a:pPr indent="0" marL="0">
+              <a:buNone/>
+            </a:pPr>
+            <a:r>
+              <a:rPr lang="en-US" sz="3000" b="1" dirty="0">
+                <a:solidFill>
+                  <a:srgbClr val="1A1A1A"/>
+                </a:solidFill>
+                <a:latin typeface="Cambria" pitchFamily="34" charset="0"/>
+                <a:ea typeface="Cambria" pitchFamily="34" charset="-122"/>
+                <a:cs typeface="Cambria" pitchFamily="34" charset="-120"/>
+              </a:rPr>
+              <a:t>The session</a:t>
+            </a:r>
+            <a:endParaRPr lang="en-US" sz="3000" dirty="0"/>
+          </a:p>
+        </p:txBody>
+      </p:sp>
+      <p:sp>
+        <p:nvSpPr>
+          <p:cNvPr id="3" name="Shape 1"/>
+          <p:cNvSpPr/>
+          <p:nvPr/>
+        </p:nvSpPr>
+        <p:spPr>
+          <a:xfrm>
+            <a:off x="640080" y="1572768"/>
+            <a:ext cx="868680" cy="338328"/>
+          </a:xfrm>
+          <a:prstGeom prst="roundRect">
+            <a:avLst>
+              <a:gd name="adj" fmla="val 16216"/>
+            </a:avLst>
+          </a:prstGeom>
+          <a:solidFill>
+            <a:srgbClr val="7A3B2E"/>
+          </a:solidFill>
+          <a:ln/>
+        </p:spPr>
+      </p:sp>
+      <p:sp>
+        <p:nvSpPr>
+          <p:cNvPr id="4" name="Text 2"/>
+          <p:cNvSpPr/>
+          <p:nvPr/>
+        </p:nvSpPr>
+        <p:spPr>
+          <a:xfrm>
+            <a:off x="640080" y="1572768"/>
+            <a:ext cx="868680" cy="338328"/>
+          </a:xfrm>
+          <a:prstGeom prst="rect">
+            <a:avLst/>
+          </a:prstGeom>
+          <a:noFill/>
+          <a:ln/>
+        </p:spPr>
+        <p:txBody>
+          <a:bodyPr wrap="square" rtlCol="0" anchor="ctr"/>
+          <a:lstStyle/>
+          <a:p>
+            <a:pPr algn="ctr" indent="0" marL="0">
+              <a:buNone/>
+            </a:pPr>
+            <a:r>
+              <a:rPr lang="en-US" sz="1100" b="1" dirty="0">
+                <a:solidFill>
+                  <a:srgbClr val="FFFFFF"/>
+                </a:solidFill>
+                <a:latin typeface="Calibri" pitchFamily="34" charset="0"/>
+                <a:ea typeface="Calibri" pitchFamily="34" charset="-122"/>
+                <a:cs typeface="Calibri" pitchFamily="34" charset="-120"/>
+              </a:rPr>
+              <a:t>0:00</a:t>
+            </a:r>
+            <a:endParaRPr lang="en-US" sz="1100" dirty="0"/>
+          </a:p>
+        </p:txBody>
+      </p:sp>
+      <p:sp>
+        <p:nvSpPr>
+          <p:cNvPr id="5" name="Text 3"/>
+          <p:cNvSpPr/>
+          <p:nvPr/>
+        </p:nvSpPr>
+        <p:spPr>
+          <a:xfrm>
+            <a:off x="1691640" y="1554480"/>
+            <a:ext cx="9646920" cy="448056"/>
+          </a:xfrm>
+          <a:prstGeom prst="rect">
+            <a:avLst/>
+          </a:prstGeom>
+          <a:noFill/>
+          <a:ln/>
+        </p:spPr>
+        <p:txBody>
+          <a:bodyPr wrap="square" rtlCol="0" anchor="ctr">
+            <a:spAutoFit/>
+          </a:bodyPr>
+          <a:lstStyle/>
+          <a:p>
+            <a:pPr indent="0" marL="0">
+              <a:buNone/>
+            </a:pPr>
+            <a:r>
+              <a:rPr lang="en-US" sz="1100" dirty="0">
+                <a:solidFill>
+                  <a:srgbClr val="1A1A1A"/>
+                </a:solidFill>
+                <a:latin typeface="Calibri" pitchFamily="34" charset="0"/>
+                <a:ea typeface="Calibri" pitchFamily="34" charset="-122"/>
+                <a:cs typeface="Calibri" pitchFamily="34" charset="-120"/>
+              </a:rPr>
+              <a:t>Warm-up: favorite Pudding pieces from the sketch, what did yours count, and one choice its makers made. Then retrieval.</a:t>
+            </a:r>
+            <a:endParaRPr lang="en-US" sz="1100" dirty="0"/>
+          </a:p>
+        </p:txBody>
+      </p:sp>
+      <p:sp>
+        <p:nvSpPr>
+          <p:cNvPr id="6" name="Shape 4"/>
+          <p:cNvSpPr/>
+          <p:nvPr/>
+        </p:nvSpPr>
+        <p:spPr>
+          <a:xfrm>
+            <a:off x="640080" y="2020824"/>
+            <a:ext cx="868680" cy="338328"/>
+          </a:xfrm>
+          <a:prstGeom prst="roundRect">
+            <a:avLst>
+              <a:gd name="adj" fmla="val 16216"/>
+            </a:avLst>
+          </a:prstGeom>
+          <a:solidFill>
+            <a:srgbClr val="7A3B2E"/>
+          </a:solidFill>
+          <a:ln/>
+        </p:spPr>
+      </p:sp>
+      <p:sp>
+        <p:nvSpPr>
+          <p:cNvPr id="7" name="Text 5"/>
+          <p:cNvSpPr/>
+          <p:nvPr/>
+        </p:nvSpPr>
+        <p:spPr>
+          <a:xfrm>
+            <a:off x="640080" y="2020824"/>
+            <a:ext cx="868680" cy="338328"/>
+          </a:xfrm>
+          <a:prstGeom prst="rect">
+            <a:avLst/>
+          </a:prstGeom>
+          <a:noFill/>
+          <a:ln/>
+        </p:spPr>
+        <p:txBody>
+          <a:bodyPr wrap="square" rtlCol="0" anchor="ctr"/>
+          <a:lstStyle/>
+          <a:p>
+            <a:pPr algn="ctr" indent="0" marL="0">
+              <a:buNone/>
+            </a:pPr>
+            <a:r>
+              <a:rPr lang="en-US" sz="1100" b="1" dirty="0">
+                <a:solidFill>
+                  <a:srgbClr val="FFFFFF"/>
+                </a:solidFill>
+                <a:latin typeface="Calibri" pitchFamily="34" charset="0"/>
+                <a:ea typeface="Calibri" pitchFamily="34" charset="-122"/>
+                <a:cs typeface="Calibri" pitchFamily="34" charset="-120"/>
+              </a:rPr>
+              <a:t>0:05</a:t>
+            </a:r>
+            <a:endParaRPr lang="en-US" sz="1100" dirty="0"/>
+          </a:p>
+        </p:txBody>
+      </p:sp>
+      <p:sp>
+        <p:nvSpPr>
+          <p:cNvPr id="8" name="Text 6"/>
+          <p:cNvSpPr/>
+          <p:nvPr/>
+        </p:nvSpPr>
+        <p:spPr>
+          <a:xfrm>
+            <a:off x="1691640" y="2002536"/>
+            <a:ext cx="9646920" cy="448056"/>
+          </a:xfrm>
+          <a:prstGeom prst="rect">
+            <a:avLst/>
+          </a:prstGeom>
+          <a:noFill/>
+          <a:ln/>
+        </p:spPr>
+        <p:txBody>
+          <a:bodyPr wrap="square" rtlCol="0" anchor="ctr">
+            <a:spAutoFit/>
+          </a:bodyPr>
+          <a:lstStyle/>
+          <a:p>
+            <a:pPr indent="0" marL="0">
+              <a:buNone/>
+            </a:pPr>
+            <a:r>
+              <a:rPr lang="en-US" sz="1100" dirty="0">
+                <a:solidFill>
+                  <a:srgbClr val="1A1A1A"/>
+                </a:solidFill>
+                <a:latin typeface="Calibri" pitchFamily="34" charset="0"/>
+                <a:ea typeface="Calibri" pitchFamily="34" charset="-122"/>
+                <a:cs typeface="Calibri" pitchFamily="34" charset="-120"/>
+              </a:rPr>
+              <a:t>The trial: claim, objection, re-run-without-fiction rebuttal, "interpret with care." One named choice is the chart: the hockey-stick shape depends on its y-axis and smoothing. The notebook pulls the paper's own phrases live from Google Books and probes the fiction objection with fiction-marker phrases.</a:t>
+            </a:r>
+            <a:endParaRPr lang="en-US" sz="1100" dirty="0"/>
+          </a:p>
+        </p:txBody>
+      </p:sp>
+      <p:sp>
+        <p:nvSpPr>
+          <p:cNvPr id="9" name="Shape 7"/>
+          <p:cNvSpPr/>
+          <p:nvPr/>
+        </p:nvSpPr>
+        <p:spPr>
+          <a:xfrm>
+            <a:off x="640080" y="2468880"/>
+            <a:ext cx="868680" cy="338328"/>
+          </a:xfrm>
+          <a:prstGeom prst="roundRect">
+            <a:avLst>
+              <a:gd name="adj" fmla="val 16216"/>
+            </a:avLst>
+          </a:prstGeom>
+          <a:solidFill>
+            <a:srgbClr val="7A3B2E"/>
+          </a:solidFill>
+          <a:ln/>
+        </p:spPr>
+      </p:sp>
+      <p:sp>
+        <p:nvSpPr>
+          <p:cNvPr id="10" name="Text 8"/>
+          <p:cNvSpPr/>
+          <p:nvPr/>
+        </p:nvSpPr>
+        <p:spPr>
+          <a:xfrm>
+            <a:off x="640080" y="2468880"/>
+            <a:ext cx="868680" cy="338328"/>
+          </a:xfrm>
+          <a:prstGeom prst="rect">
+            <a:avLst/>
+          </a:prstGeom>
+          <a:noFill/>
+          <a:ln/>
+        </p:spPr>
+        <p:txBody>
+          <a:bodyPr wrap="square" rtlCol="0" anchor="ctr"/>
+          <a:lstStyle/>
+          <a:p>
+            <a:pPr algn="ctr" indent="0" marL="0">
+              <a:buNone/>
+            </a:pPr>
+            <a:r>
+              <a:rPr lang="en-US" sz="1100" b="1" dirty="0">
+                <a:solidFill>
+                  <a:srgbClr val="FFFFFF"/>
+                </a:solidFill>
+                <a:latin typeface="Calibri" pitchFamily="34" charset="0"/>
+                <a:ea typeface="Calibri" pitchFamily="34" charset="-122"/>
+                <a:cs typeface="Calibri" pitchFamily="34" charset="-120"/>
+              </a:rPr>
+              <a:t>0:25</a:t>
+            </a:r>
+            <a:endParaRPr lang="en-US" sz="1100" dirty="0"/>
+          </a:p>
+        </p:txBody>
+      </p:sp>
+      <p:sp>
+        <p:nvSpPr>
+          <p:cNvPr id="11" name="Text 9"/>
+          <p:cNvSpPr/>
+          <p:nvPr/>
+        </p:nvSpPr>
+        <p:spPr>
+          <a:xfrm>
+            <a:off x="1691640" y="2450592"/>
+            <a:ext cx="9646920" cy="448056"/>
+          </a:xfrm>
+          <a:prstGeom prst="rect">
+            <a:avLst/>
+          </a:prstGeom>
+          <a:noFill/>
+          <a:ln/>
+        </p:spPr>
+        <p:txBody>
+          <a:bodyPr wrap="square" rtlCol="0" anchor="ctr">
+            <a:spAutoFit/>
+          </a:bodyPr>
+          <a:lstStyle/>
+          <a:p>
+            <a:pPr indent="0" marL="0">
+              <a:buNone/>
+            </a:pPr>
+            <a:r>
+              <a:rPr lang="en-US" sz="1100" dirty="0">
+                <a:solidFill>
+                  <a:srgbClr val="1A1A1A"/>
+                </a:solidFill>
+                <a:latin typeface="Calibri" pitchFamily="34" charset="0"/>
+                <a:ea typeface="Calibri" pitchFamily="34" charset="-122"/>
+                <a:cs typeface="Calibri" pitchFamily="34" charset="-120"/>
+              </a:rPr>
+              <a:t>A brief demonstration before the complications: the words one artist uses far more than everyone else, a signature vocabulary measured against a pop baseline.</a:t>
+            </a:r>
+            <a:endParaRPr lang="en-US" sz="1100" dirty="0"/>
+          </a:p>
+        </p:txBody>
+      </p:sp>
+      <p:sp>
+        <p:nvSpPr>
+          <p:cNvPr id="12" name="Shape 10"/>
+          <p:cNvSpPr/>
+          <p:nvPr/>
+        </p:nvSpPr>
+        <p:spPr>
+          <a:xfrm>
+            <a:off x="640080" y="2916936"/>
+            <a:ext cx="868680" cy="338328"/>
+          </a:xfrm>
+          <a:prstGeom prst="roundRect">
+            <a:avLst>
+              <a:gd name="adj" fmla="val 16216"/>
+            </a:avLst>
+          </a:prstGeom>
+          <a:solidFill>
+            <a:srgbClr val="7A3B2E"/>
+          </a:solidFill>
+          <a:ln/>
+        </p:spPr>
+      </p:sp>
+      <p:sp>
+        <p:nvSpPr>
+          <p:cNvPr id="13" name="Text 11"/>
+          <p:cNvSpPr/>
+          <p:nvPr/>
+        </p:nvSpPr>
+        <p:spPr>
+          <a:xfrm>
+            <a:off x="640080" y="2916936"/>
+            <a:ext cx="868680" cy="338328"/>
+          </a:xfrm>
+          <a:prstGeom prst="rect">
+            <a:avLst/>
+          </a:prstGeom>
+          <a:noFill/>
+          <a:ln/>
+        </p:spPr>
+        <p:txBody>
+          <a:bodyPr wrap="square" rtlCol="0" anchor="ctr"/>
+          <a:lstStyle/>
+          <a:p>
+            <a:pPr algn="ctr" indent="0" marL="0">
+              <a:buNone/>
+            </a:pPr>
+            <a:r>
+              <a:rPr lang="en-US" sz="1100" b="1" dirty="0">
+                <a:solidFill>
+                  <a:srgbClr val="FFFFFF"/>
+                </a:solidFill>
+                <a:latin typeface="Calibri" pitchFamily="34" charset="0"/>
+                <a:ea typeface="Calibri" pitchFamily="34" charset="-122"/>
+                <a:cs typeface="Calibri" pitchFamily="34" charset="-120"/>
+              </a:rPr>
+              <a:t>0:30</a:t>
+            </a:r>
+            <a:endParaRPr lang="en-US" sz="1100" dirty="0"/>
+          </a:p>
+        </p:txBody>
+      </p:sp>
+      <p:sp>
+        <p:nvSpPr>
+          <p:cNvPr id="14" name="Text 12"/>
+          <p:cNvSpPr/>
+          <p:nvPr/>
+        </p:nvSpPr>
+        <p:spPr>
+          <a:xfrm>
+            <a:off x="1691640" y="2898648"/>
+            <a:ext cx="9646920" cy="448056"/>
+          </a:xfrm>
+          <a:prstGeom prst="rect">
+            <a:avLst/>
+          </a:prstGeom>
+          <a:noFill/>
+          <a:ln/>
+        </p:spPr>
+        <p:txBody>
+          <a:bodyPr wrap="square" rtlCol="0" anchor="ctr">
+            <a:spAutoFit/>
+          </a:bodyPr>
+          <a:lstStyle/>
+          <a:p>
+            <a:pPr indent="0" marL="0">
+              <a:buNone/>
+            </a:pPr>
+            <a:r>
+              <a:rPr lang="en-US" sz="1100" dirty="0">
+                <a:solidFill>
+                  <a:srgbClr val="1A1A1A"/>
+                </a:solidFill>
+                <a:latin typeface="Calibri" pitchFamily="34" charset="0"/>
+                <a:ea typeface="Calibri" pitchFamily="34" charset="-122"/>
+                <a:cs typeface="Calibri" pitchFamily="34" charset="-120"/>
+              </a:rPr>
+              <a:t>Hand-built bag-of-words: two authors, highlighters, argue about merging run/running. Counting requires defining.</a:t>
+            </a:r>
+            <a:endParaRPr lang="en-US" sz="1100" dirty="0"/>
+          </a:p>
+        </p:txBody>
+      </p:sp>
+      <p:sp>
+        <p:nvSpPr>
+          <p:cNvPr id="15" name="Shape 13"/>
+          <p:cNvSpPr/>
+          <p:nvPr/>
+        </p:nvSpPr>
+        <p:spPr>
+          <a:xfrm>
+            <a:off x="640080" y="3364992"/>
+            <a:ext cx="868680" cy="338328"/>
+          </a:xfrm>
+          <a:prstGeom prst="roundRect">
+            <a:avLst>
+              <a:gd name="adj" fmla="val 16216"/>
+            </a:avLst>
+          </a:prstGeom>
+          <a:solidFill>
+            <a:srgbClr val="7A3B2E"/>
+          </a:solidFill>
+          <a:ln/>
+        </p:spPr>
+      </p:sp>
+      <p:sp>
+        <p:nvSpPr>
+          <p:cNvPr id="16" name="Text 14"/>
+          <p:cNvSpPr/>
+          <p:nvPr/>
+        </p:nvSpPr>
+        <p:spPr>
+          <a:xfrm>
+            <a:off x="640080" y="3364992"/>
+            <a:ext cx="868680" cy="338328"/>
+          </a:xfrm>
+          <a:prstGeom prst="rect">
+            <a:avLst/>
+          </a:prstGeom>
+          <a:noFill/>
+          <a:ln/>
+        </p:spPr>
+        <p:txBody>
+          <a:bodyPr wrap="square" rtlCol="0" anchor="ctr"/>
+          <a:lstStyle/>
+          <a:p>
+            <a:pPr algn="ctr" indent="0" marL="0">
+              <a:buNone/>
+            </a:pPr>
+            <a:r>
+              <a:rPr lang="en-US" sz="1100" b="1" dirty="0">
+                <a:solidFill>
+                  <a:srgbClr val="FFFFFF"/>
+                </a:solidFill>
+                <a:latin typeface="Calibri" pitchFamily="34" charset="0"/>
+                <a:ea typeface="Calibri" pitchFamily="34" charset="-122"/>
+                <a:cs typeface="Calibri" pitchFamily="34" charset="-120"/>
+              </a:rPr>
+              <a:t>0:55</a:t>
+            </a:r>
+            <a:endParaRPr lang="en-US" sz="1100" dirty="0"/>
+          </a:p>
+        </p:txBody>
+      </p:sp>
+      <p:sp>
+        <p:nvSpPr>
+          <p:cNvPr id="17" name="Text 15"/>
+          <p:cNvSpPr/>
+          <p:nvPr/>
+        </p:nvSpPr>
+        <p:spPr>
+          <a:xfrm>
+            <a:off x="1691640" y="3346704"/>
+            <a:ext cx="9646920" cy="448056"/>
+          </a:xfrm>
+          <a:prstGeom prst="rect">
+            <a:avLst/>
+          </a:prstGeom>
+          <a:noFill/>
+          <a:ln/>
+        </p:spPr>
+        <p:txBody>
+          <a:bodyPr wrap="square" rtlCol="0" anchor="ctr">
+            <a:spAutoFit/>
+          </a:bodyPr>
+          <a:lstStyle/>
+          <a:p>
+            <a:pPr indent="0" marL="0">
+              <a:buNone/>
+            </a:pPr>
+            <a:r>
+              <a:rPr lang="en-US" sz="1100" dirty="0">
+                <a:solidFill>
+                  <a:srgbClr val="1A1A1A"/>
+                </a:solidFill>
+                <a:latin typeface="Calibri" pitchFamily="34" charset="0"/>
+                <a:ea typeface="Calibri" pitchFamily="34" charset="-122"/>
+                <a:cs typeface="Calibri" pitchFamily="34" charset="-120"/>
+              </a:rPr>
+              <a:t>What counts as a word? Paste a sentence into two tokenizer playgrounds and watch it shatter differently. Models see tokens, not words. Then the standard tools for the run/running decision: NLTK stemming and lemmatization, a real stop list, and Zipf's law, the curve that explains why stop lists exist.</a:t>
+            </a:r>
+            <a:endParaRPr lang="en-US" sz="1100" dirty="0"/>
+          </a:p>
+        </p:txBody>
+      </p:sp>
+      <p:sp>
+        <p:nvSpPr>
+          <p:cNvPr id="18" name="Shape 16"/>
+          <p:cNvSpPr/>
+          <p:nvPr/>
+        </p:nvSpPr>
+        <p:spPr>
+          <a:xfrm>
+            <a:off x="640080" y="3813048"/>
+            <a:ext cx="868680" cy="338328"/>
+          </a:xfrm>
+          <a:prstGeom prst="roundRect">
+            <a:avLst>
+              <a:gd name="adj" fmla="val 16216"/>
+            </a:avLst>
+          </a:prstGeom>
+          <a:solidFill>
+            <a:srgbClr val="7A3B2E"/>
+          </a:solidFill>
+          <a:ln/>
+        </p:spPr>
+      </p:sp>
+      <p:sp>
+        <p:nvSpPr>
+          <p:cNvPr id="19" name="Text 17"/>
+          <p:cNvSpPr/>
+          <p:nvPr/>
+        </p:nvSpPr>
+        <p:spPr>
+          <a:xfrm>
+            <a:off x="640080" y="3813048"/>
+            <a:ext cx="868680" cy="338328"/>
+          </a:xfrm>
+          <a:prstGeom prst="rect">
+            <a:avLst/>
+          </a:prstGeom>
+          <a:noFill/>
+          <a:ln/>
+        </p:spPr>
+        <p:txBody>
+          <a:bodyPr wrap="square" rtlCol="0" anchor="ctr"/>
+          <a:lstStyle/>
+          <a:p>
+            <a:pPr algn="ctr" indent="0" marL="0">
+              <a:buNone/>
+            </a:pPr>
+            <a:r>
+              <a:rPr lang="en-US" sz="1100" b="1" dirty="0">
+                <a:solidFill>
+                  <a:srgbClr val="FFFFFF"/>
+                </a:solidFill>
+                <a:latin typeface="Calibri" pitchFamily="34" charset="0"/>
+                <a:ea typeface="Calibri" pitchFamily="34" charset="-122"/>
+                <a:cs typeface="Calibri" pitchFamily="34" charset="-120"/>
+              </a:rPr>
+              <a:t>1:05</a:t>
+            </a:r>
+            <a:endParaRPr lang="en-US" sz="1100" dirty="0"/>
+          </a:p>
+        </p:txBody>
+      </p:sp>
+      <p:sp>
+        <p:nvSpPr>
+          <p:cNvPr id="20" name="Text 18"/>
+          <p:cNvSpPr/>
+          <p:nvPr/>
+        </p:nvSpPr>
+        <p:spPr>
+          <a:xfrm>
+            <a:off x="1691640" y="3794760"/>
+            <a:ext cx="9646920" cy="448056"/>
+          </a:xfrm>
+          <a:prstGeom prst="rect">
+            <a:avLst/>
+          </a:prstGeom>
+          <a:noFill/>
+          <a:ln/>
+        </p:spPr>
+        <p:txBody>
+          <a:bodyPr wrap="square" rtlCol="0" anchor="ctr">
+            <a:spAutoFit/>
+          </a:bodyPr>
+          <a:lstStyle/>
+          <a:p>
+            <a:pPr indent="0" marL="0">
+              <a:buNone/>
+            </a:pPr>
+            <a:r>
+              <a:rPr lang="en-US" sz="1100" dirty="0">
+                <a:solidFill>
+                  <a:srgbClr val="1A1A1A"/>
+                </a:solidFill>
+                <a:latin typeface="Calibri" pitchFamily="34" charset="0"/>
+                <a:ea typeface="Calibri" pitchFamily="34" charset="-122"/>
+                <a:cs typeface="Calibri" pitchFamily="34" charset="-120"/>
+              </a:rPr>
+              <a:t>Break</a:t>
+            </a:r>
+            <a:endParaRPr lang="en-US" sz="1100" dirty="0"/>
+          </a:p>
+        </p:txBody>
+      </p:sp>
+      <p:sp>
+        <p:nvSpPr>
+          <p:cNvPr id="21" name="Shape 19"/>
+          <p:cNvSpPr/>
+          <p:nvPr/>
+        </p:nvSpPr>
+        <p:spPr>
+          <a:xfrm>
+            <a:off x="640080" y="4261104"/>
+            <a:ext cx="868680" cy="338328"/>
+          </a:xfrm>
+          <a:prstGeom prst="roundRect">
+            <a:avLst>
+              <a:gd name="adj" fmla="val 16216"/>
+            </a:avLst>
+          </a:prstGeom>
+          <a:solidFill>
+            <a:srgbClr val="7A3B2E"/>
+          </a:solidFill>
+          <a:ln/>
+        </p:spPr>
+      </p:sp>
+      <p:sp>
+        <p:nvSpPr>
+          <p:cNvPr id="22" name="Text 20"/>
+          <p:cNvSpPr/>
+          <p:nvPr/>
+        </p:nvSpPr>
+        <p:spPr>
+          <a:xfrm>
+            <a:off x="640080" y="4261104"/>
+            <a:ext cx="868680" cy="338328"/>
+          </a:xfrm>
+          <a:prstGeom prst="rect">
+            <a:avLst/>
+          </a:prstGeom>
+          <a:noFill/>
+          <a:ln/>
+        </p:spPr>
+        <p:txBody>
+          <a:bodyPr wrap="square" rtlCol="0" anchor="ctr"/>
+          <a:lstStyle/>
+          <a:p>
+            <a:pPr algn="ctr" indent="0" marL="0">
+              <a:buNone/>
+            </a:pPr>
+            <a:r>
+              <a:rPr lang="en-US" sz="1100" b="1" dirty="0">
+                <a:solidFill>
+                  <a:srgbClr val="FFFFFF"/>
+                </a:solidFill>
+                <a:latin typeface="Calibri" pitchFamily="34" charset="0"/>
+                <a:ea typeface="Calibri" pitchFamily="34" charset="-122"/>
+                <a:cs typeface="Calibri" pitchFamily="34" charset="-120"/>
+              </a:rPr>
+              <a:t>1:15</a:t>
+            </a:r>
+            <a:endParaRPr lang="en-US" sz="1100" dirty="0"/>
+          </a:p>
+        </p:txBody>
+      </p:sp>
+      <p:sp>
+        <p:nvSpPr>
+          <p:cNvPr id="23" name="Text 21"/>
+          <p:cNvSpPr/>
+          <p:nvPr/>
+        </p:nvSpPr>
+        <p:spPr>
+          <a:xfrm>
+            <a:off x="1691640" y="4242816"/>
+            <a:ext cx="9646920" cy="448056"/>
+          </a:xfrm>
+          <a:prstGeom prst="rect">
+            <a:avLst/>
+          </a:prstGeom>
+          <a:noFill/>
+          <a:ln/>
+        </p:spPr>
+        <p:txBody>
+          <a:bodyPr wrap="square" rtlCol="0" anchor="ctr">
+            <a:spAutoFit/>
+          </a:bodyPr>
+          <a:lstStyle/>
+          <a:p>
+            <a:pPr indent="0" marL="0">
+              <a:buNone/>
+            </a:pPr>
+            <a:r>
+              <a:rPr lang="en-US" sz="1100" dirty="0">
+                <a:solidFill>
+                  <a:srgbClr val="1A1A1A"/>
+                </a:solidFill>
+                <a:latin typeface="Calibri" pitchFamily="34" charset="0"/>
+                <a:ea typeface="Calibri" pitchFamily="34" charset="-122"/>
+                <a:cs typeface="Calibri" pitchFamily="34" charset="-120"/>
+              </a:rPr>
+              <a:t>N-grams and statistics, hands-on: bigrams across three corpora, distributions and mean-versus-median on real counts, rates per 1,000 words. Then tf-idf ("common here, rare overall") and k-means clustering: the counts separate verse from prose and split the sonnets in two, a lesson in what clustering actually answers.</a:t>
+            </a:r>
+            <a:endParaRPr lang="en-US" sz="1100" dirty="0"/>
+          </a:p>
+        </p:txBody>
+      </p:sp>
+      <p:sp>
+        <p:nvSpPr>
+          <p:cNvPr id="24" name="Shape 22"/>
+          <p:cNvSpPr/>
+          <p:nvPr/>
+        </p:nvSpPr>
+        <p:spPr>
+          <a:xfrm>
+            <a:off x="640080" y="4709160"/>
+            <a:ext cx="868680" cy="338328"/>
+          </a:xfrm>
+          <a:prstGeom prst="roundRect">
+            <a:avLst>
+              <a:gd name="adj" fmla="val 16216"/>
+            </a:avLst>
+          </a:prstGeom>
+          <a:solidFill>
+            <a:srgbClr val="7A3B2E"/>
+          </a:solidFill>
+          <a:ln/>
+        </p:spPr>
+      </p:sp>
+      <p:sp>
+        <p:nvSpPr>
+          <p:cNvPr id="25" name="Text 23"/>
+          <p:cNvSpPr/>
+          <p:nvPr/>
+        </p:nvSpPr>
+        <p:spPr>
+          <a:xfrm>
+            <a:off x="640080" y="4709160"/>
+            <a:ext cx="868680" cy="338328"/>
+          </a:xfrm>
+          <a:prstGeom prst="rect">
+            <a:avLst/>
+          </a:prstGeom>
+          <a:noFill/>
+          <a:ln/>
+        </p:spPr>
+        <p:txBody>
+          <a:bodyPr wrap="square" rtlCol="0" anchor="ctr"/>
+          <a:lstStyle/>
+          <a:p>
+            <a:pPr algn="ctr" indent="0" marL="0">
+              <a:buNone/>
+            </a:pPr>
+            <a:r>
+              <a:rPr lang="en-US" sz="1100" b="1" dirty="0">
+                <a:solidFill>
+                  <a:srgbClr val="FFFFFF"/>
+                </a:solidFill>
+                <a:latin typeface="Calibri" pitchFamily="34" charset="0"/>
+                <a:ea typeface="Calibri" pitchFamily="34" charset="-122"/>
+                <a:cs typeface="Calibri" pitchFamily="34" charset="-120"/>
+              </a:rPr>
+              <a:t>1:30</a:t>
+            </a:r>
+            <a:endParaRPr lang="en-US" sz="1100" dirty="0"/>
+          </a:p>
+        </p:txBody>
+      </p:sp>
+      <p:sp>
+        <p:nvSpPr>
+          <p:cNvPr id="26" name="Text 24"/>
+          <p:cNvSpPr/>
+          <p:nvPr/>
+        </p:nvSpPr>
+        <p:spPr>
+          <a:xfrm>
+            <a:off x="1691640" y="4690872"/>
+            <a:ext cx="9646920" cy="448056"/>
+          </a:xfrm>
+          <a:prstGeom prst="rect">
+            <a:avLst/>
+          </a:prstGeom>
+          <a:noFill/>
+          <a:ln/>
+        </p:spPr>
+        <p:txBody>
+          <a:bodyPr wrap="square" rtlCol="0" anchor="ctr">
+            <a:spAutoFit/>
+          </a:bodyPr>
+          <a:lstStyle/>
+          <a:p>
+            <a:pPr indent="0" marL="0">
+              <a:buNone/>
+            </a:pPr>
+            <a:r>
+              <a:rPr lang="en-US" sz="1100" dirty="0">
+                <a:solidFill>
+                  <a:srgbClr val="1A1A1A"/>
+                </a:solidFill>
+                <a:latin typeface="Calibri" pitchFamily="34" charset="0"/>
+                <a:ea typeface="Calibri" pitchFamily="34" charset="-122"/>
+                <a:cs typeface="Calibri" pitchFamily="34" charset="-120"/>
+              </a:rPr>
+              <a:t>Keyness, the She Giggles, He Gallops move: a log-odds ratio between two corpora finds the words one voice uses far more than a baseline, exactly the method behind Week 1's featured piece. The corpus pair is a choice too: artist vs. pop, lyrics vs. subreddit vs. novel.</a:t>
+            </a:r>
+            <a:endParaRPr lang="en-US" sz="1100" dirty="0"/>
+          </a:p>
+        </p:txBody>
+      </p:sp>
+      <p:sp>
+        <p:nvSpPr>
+          <p:cNvPr id="27" name="Shape 25"/>
+          <p:cNvSpPr/>
+          <p:nvPr/>
+        </p:nvSpPr>
+        <p:spPr>
+          <a:xfrm>
+            <a:off x="640080" y="5157216"/>
+            <a:ext cx="868680" cy="338328"/>
+          </a:xfrm>
+          <a:prstGeom prst="roundRect">
+            <a:avLst>
+              <a:gd name="adj" fmla="val 16216"/>
+            </a:avLst>
+          </a:prstGeom>
+          <a:solidFill>
+            <a:srgbClr val="7A3B2E"/>
+          </a:solidFill>
+          <a:ln/>
+        </p:spPr>
+      </p:sp>
+      <p:sp>
+        <p:nvSpPr>
+          <p:cNvPr id="28" name="Text 26"/>
+          <p:cNvSpPr/>
+          <p:nvPr/>
+        </p:nvSpPr>
+        <p:spPr>
+          <a:xfrm>
+            <a:off x="640080" y="5157216"/>
+            <a:ext cx="868680" cy="338328"/>
+          </a:xfrm>
+          <a:prstGeom prst="rect">
+            <a:avLst/>
+          </a:prstGeom>
+          <a:noFill/>
+          <a:ln/>
+        </p:spPr>
+        <p:txBody>
+          <a:bodyPr wrap="square" rtlCol="0" anchor="ctr"/>
+          <a:lstStyle/>
+          <a:p>
+            <a:pPr algn="ctr" indent="0" marL="0">
+              <a:buNone/>
+            </a:pPr>
+            <a:r>
+              <a:rPr lang="en-US" sz="1100" b="1" dirty="0">
+                <a:solidFill>
+                  <a:srgbClr val="FFFFFF"/>
+                </a:solidFill>
+                <a:latin typeface="Calibri" pitchFamily="34" charset="0"/>
+                <a:ea typeface="Calibri" pitchFamily="34" charset="-122"/>
+                <a:cs typeface="Calibri" pitchFamily="34" charset="-120"/>
+              </a:rPr>
+              <a:t>1:42</a:t>
+            </a:r>
+            <a:endParaRPr lang="en-US" sz="1100" dirty="0"/>
+          </a:p>
+        </p:txBody>
+      </p:sp>
+      <p:sp>
+        <p:nvSpPr>
+          <p:cNvPr id="29" name="Text 27"/>
+          <p:cNvSpPr/>
+          <p:nvPr/>
+        </p:nvSpPr>
+        <p:spPr>
+          <a:xfrm>
+            <a:off x="1691640" y="5138928"/>
+            <a:ext cx="9646920" cy="448056"/>
+          </a:xfrm>
+          <a:prstGeom prst="rect">
+            <a:avLst/>
+          </a:prstGeom>
+          <a:noFill/>
+          <a:ln/>
+        </p:spPr>
+        <p:txBody>
+          <a:bodyPr wrap="square" rtlCol="0" anchor="ctr">
+            <a:spAutoFit/>
+          </a:bodyPr>
+          <a:lstStyle/>
+          <a:p>
+            <a:pPr indent="0" marL="0">
+              <a:buNone/>
+            </a:pPr>
+            <a:r>
+              <a:rPr lang="en-US" sz="1100" dirty="0">
+                <a:solidFill>
+                  <a:srgbClr val="1A1A1A"/>
+                </a:solidFill>
+                <a:latin typeface="Calibri" pitchFamily="34" charset="0"/>
+                <a:ea typeface="Calibri" pitchFamily="34" charset="-122"/>
+                <a:cs typeface="Calibri" pitchFamily="34" charset="-120"/>
+              </a:rPr>
+              <a:t>Is the difference real? The shuffle test: shuffle the labels and recount, one thousand times. If chance alone frequently produces a gap this large, the difference should not be trusted; if it almost never does, the finding stands. A difference can be real and still small.</a:t>
+            </a:r>
+            <a:endParaRPr lang="en-US" sz="1100" dirty="0"/>
+          </a:p>
+        </p:txBody>
+      </p:sp>
+      <p:sp>
+        <p:nvSpPr>
+          <p:cNvPr id="30" name="Shape 28"/>
+          <p:cNvSpPr/>
+          <p:nvPr/>
+        </p:nvSpPr>
+        <p:spPr>
+          <a:xfrm>
+            <a:off x="640080" y="5605272"/>
+            <a:ext cx="868680" cy="338328"/>
+          </a:xfrm>
+          <a:prstGeom prst="roundRect">
+            <a:avLst>
+              <a:gd name="adj" fmla="val 16216"/>
+            </a:avLst>
+          </a:prstGeom>
+          <a:solidFill>
+            <a:srgbClr val="7A3B2E"/>
+          </a:solidFill>
+          <a:ln/>
+        </p:spPr>
+      </p:sp>
+      <p:sp>
+        <p:nvSpPr>
+          <p:cNvPr id="31" name="Text 29"/>
+          <p:cNvSpPr/>
+          <p:nvPr/>
+        </p:nvSpPr>
+        <p:spPr>
+          <a:xfrm>
+            <a:off x="640080" y="5605272"/>
+            <a:ext cx="868680" cy="338328"/>
+          </a:xfrm>
+          <a:prstGeom prst="rect">
+            <a:avLst/>
+          </a:prstGeom>
+          <a:noFill/>
+          <a:ln/>
+        </p:spPr>
+        <p:txBody>
+          <a:bodyPr wrap="square" rtlCol="0" anchor="ctr"/>
+          <a:lstStyle/>
+          <a:p>
+            <a:pPr algn="ctr" indent="0" marL="0">
+              <a:buNone/>
+            </a:pPr>
+            <a:r>
+              <a:rPr lang="en-US" sz="1100" b="1" dirty="0">
+                <a:solidFill>
+                  <a:srgbClr val="FFFFFF"/>
+                </a:solidFill>
+                <a:latin typeface="Calibri" pitchFamily="34" charset="0"/>
+                <a:ea typeface="Calibri" pitchFamily="34" charset="-122"/>
+                <a:cs typeface="Calibri" pitchFamily="34" charset="-120"/>
+              </a:rPr>
+              <a:t>1:50</a:t>
+            </a:r>
+            <a:endParaRPr lang="en-US" sz="1100" dirty="0"/>
+          </a:p>
+        </p:txBody>
+      </p:sp>
+      <p:sp>
+        <p:nvSpPr>
+          <p:cNvPr id="32" name="Text 30"/>
+          <p:cNvSpPr/>
+          <p:nvPr/>
+        </p:nvSpPr>
+        <p:spPr>
+          <a:xfrm>
+            <a:off x="1691640" y="5586984"/>
+            <a:ext cx="9646920" cy="448056"/>
+          </a:xfrm>
+          <a:prstGeom prst="rect">
+            <a:avLst/>
+          </a:prstGeom>
+          <a:noFill/>
+          <a:ln/>
+        </p:spPr>
+        <p:txBody>
+          <a:bodyPr wrap="square" rtlCol="0" anchor="ctr">
+            <a:spAutoFit/>
+          </a:bodyPr>
+          <a:lstStyle/>
+          <a:p>
+            <a:pPr indent="0" marL="0">
+              <a:buNone/>
+            </a:pPr>
+            <a:r>
+              <a:rPr lang="en-US" sz="1100" dirty="0">
+                <a:solidFill>
+                  <a:srgbClr val="1A1A1A"/>
+                </a:solidFill>
+                <a:latin typeface="Calibri" pitchFamily="34" charset="0"/>
+                <a:ea typeface="Calibri" pitchFamily="34" charset="-122"/>
+                <a:cs typeface="Calibri" pitchFamily="34" charset="-120"/>
+              </a:rPr>
+              <a:t>Gemini-free check and check-out.</a:t>
+            </a:r>
+            <a:endParaRPr lang="en-US" sz="1100" dirty="0"/>
+          </a:p>
+        </p:txBody>
+      </p:sp>
+    </p:spTree>
+  </p:cSld>
+  <p:clrMapOvr>
+    <a:masterClrMapping/>
+  </p:clrMapOvr>
+</p:sld>
+</file>
+
+<file path=ppt/slides/slide14.xml><?xml version="1.0" encoding="utf-8"?>
+<p:sld xmlns:a="http://schemas.openxmlformats.org/drawingml/2006/main" xmlns:r="http://schemas.openxmlformats.org/officeDocument/2006/relationships" xmlns:p="http://schemas.openxmlformats.org/presentationml/2006/main">
+  <p:cSld name="Slide 14">
+    <p:bg>
+      <p:bgPr>
+        <a:solidFill>
+          <a:srgbClr val="FFFFFF"/>
+        </a:solidFill>
+      </p:bgPr>
+    </p:bg>
+    <p:spTree>
+      <p:nvGrpSpPr>
+        <p:cNvPr id="1" name=""/>
+        <p:cNvGrpSpPr/>
+        <p:nvPr/>
+      </p:nvGrpSpPr>
+      <p:grpSpPr>
+        <a:xfrm>
+          <a:off x="0" y="0"/>
+          <a:ext cx="0" cy="0"/>
+          <a:chOff x="0" y="0"/>
+          <a:chExt cx="0" cy="0"/>
+        </a:xfrm>
+      </p:grpSpPr>
+      <p:sp>
+        <p:nvSpPr>
+          <p:cNvPr id="2" name="Text 0"/>
+          <p:cNvSpPr/>
+          <p:nvPr/>
+        </p:nvSpPr>
+        <p:spPr>
+          <a:xfrm>
+            <a:off x="640080" y="640080"/>
+            <a:ext cx="10058400" cy="731520"/>
+          </a:xfrm>
+          <a:prstGeom prst="rect">
+            <a:avLst/>
+          </a:prstGeom>
+          <a:noFill/>
+          <a:ln/>
+        </p:spPr>
+        <p:txBody>
+          <a:bodyPr wrap="square" rtlCol="0" anchor="ctr"/>
+          <a:lstStyle/>
+          <a:p>
+            <a:pPr indent="0" marL="0">
+              <a:buNone/>
+            </a:pPr>
+            <a:r>
+              <a:rPr lang="en-US" sz="3000" b="1" dirty="0">
+                <a:solidFill>
+                  <a:srgbClr val="1A1A1A"/>
+                </a:solidFill>
+                <a:latin typeface="Cambria" pitchFamily="34" charset="0"/>
+                <a:ea typeface="Cambria" pitchFamily="34" charset="-122"/>
+                <a:cs typeface="Cambria" pitchFamily="34" charset="-120"/>
+              </a:rPr>
+              <a:t>Reading &amp; homework</a:t>
+            </a:r>
+            <a:endParaRPr lang="en-US" sz="3000" dirty="0"/>
+          </a:p>
+        </p:txBody>
+      </p:sp>
+      <p:sp>
+        <p:nvSpPr>
+          <p:cNvPr id="3" name="Shape 1"/>
+          <p:cNvSpPr/>
+          <p:nvPr/>
+        </p:nvSpPr>
+        <p:spPr>
+          <a:xfrm>
+            <a:off x="640080" y="1673352"/>
+            <a:ext cx="219456" cy="219456"/>
+          </a:xfrm>
+          <a:prstGeom prst="ellipse">
+            <a:avLst/>
+          </a:prstGeom>
+          <a:solidFill>
+            <a:srgbClr val="7A3B2E"/>
+          </a:solidFill>
+          <a:ln/>
+        </p:spPr>
+      </p:sp>
+      <p:sp>
+        <p:nvSpPr>
+          <p:cNvPr id="4" name="Text 2"/>
+          <p:cNvSpPr/>
+          <p:nvPr/>
+        </p:nvSpPr>
+        <p:spPr>
+          <a:xfrm>
+            <a:off x="1051560" y="1600200"/>
+            <a:ext cx="10424160" cy="365760"/>
+          </a:xfrm>
+          <a:prstGeom prst="rect">
+            <a:avLst/>
+          </a:prstGeom>
+          <a:noFill/>
+          <a:ln/>
+        </p:spPr>
+        <p:txBody>
+          <a:bodyPr wrap="square" rtlCol="0" anchor="ctr"/>
+          <a:lstStyle/>
+          <a:p>
+            <a:pPr indent="0" marL="0">
+              <a:buNone/>
+            </a:pPr>
+            <a:r>
+              <a:rPr lang="en-US" sz="1500" b="1" dirty="0">
+                <a:solidFill>
+                  <a:srgbClr val="7A3B2E"/>
+                </a:solidFill>
+                <a:latin typeface="Calibri" pitchFamily="34" charset="0"/>
+                <a:ea typeface="Calibri" pitchFamily="34" charset="-122"/>
+                <a:cs typeface="Calibri" pitchFamily="34" charset="-120"/>
+              </a:rPr>
+              <a:t>Reading</a:t>
+            </a:r>
+            <a:endParaRPr lang="en-US" sz="1500" dirty="0"/>
+          </a:p>
+        </p:txBody>
+      </p:sp>
+      <p:sp>
+        <p:nvSpPr>
+          <p:cNvPr id="5" name="Text 3"/>
+          <p:cNvSpPr/>
+          <p:nvPr/>
+        </p:nvSpPr>
+        <p:spPr>
+          <a:xfrm>
+            <a:off x="1051560" y="1984248"/>
+            <a:ext cx="10424160" cy="731520"/>
+          </a:xfrm>
+          <a:prstGeom prst="rect">
+            <a:avLst/>
+          </a:prstGeom>
+          <a:noFill/>
+          <a:ln/>
+        </p:spPr>
+        <p:txBody>
+          <a:bodyPr wrap="square" rtlCol="0" anchor="t">
+            <a:spAutoFit/>
+          </a:bodyPr>
+          <a:lstStyle/>
+          <a:p>
+            <a:pPr indent="0" marL="0">
+              <a:buNone/>
+            </a:pPr>
+            <a:r>
+              <a:rPr lang="en-US" sz="1400" dirty="0">
+                <a:solidFill>
+                  <a:srgbClr val="1A1A1A"/>
+                </a:solidFill>
+                <a:latin typeface="Calibri" pitchFamily="34" charset="0"/>
+                <a:ea typeface="Calibri" pitchFamily="34" charset="-122"/>
+                <a:cs typeface="Calibri" pitchFamily="34" charset="-120"/>
+              </a:rPr>
+              <a:t>Wolfram, What Is ChatGPT Doing (opening sections only)</a:t>
+            </a:r>
+            <a:endParaRPr lang="en-US" sz="1400" dirty="0"/>
+          </a:p>
+        </p:txBody>
+      </p:sp>
+      <p:sp>
+        <p:nvSpPr>
+          <p:cNvPr id="6" name="Shape 4"/>
+          <p:cNvSpPr/>
+          <p:nvPr/>
+        </p:nvSpPr>
+        <p:spPr>
+          <a:xfrm>
+            <a:off x="640080" y="2633472"/>
+            <a:ext cx="219456" cy="219456"/>
+          </a:xfrm>
+          <a:prstGeom prst="ellipse">
+            <a:avLst/>
+          </a:prstGeom>
+          <a:solidFill>
+            <a:srgbClr val="3F6F5F"/>
+          </a:solidFill>
+          <a:ln/>
+        </p:spPr>
+      </p:sp>
+      <p:sp>
+        <p:nvSpPr>
+          <p:cNvPr id="7" name="Text 5"/>
+          <p:cNvSpPr/>
+          <p:nvPr/>
+        </p:nvSpPr>
+        <p:spPr>
+          <a:xfrm>
+            <a:off x="1051560" y="2560320"/>
+            <a:ext cx="10424160" cy="365760"/>
+          </a:xfrm>
+          <a:prstGeom prst="rect">
+            <a:avLst/>
+          </a:prstGeom>
+          <a:noFill/>
+          <a:ln/>
+        </p:spPr>
+        <p:txBody>
+          <a:bodyPr wrap="square" rtlCol="0" anchor="ctr"/>
+          <a:lstStyle/>
+          <a:p>
+            <a:pPr indent="0" marL="0">
+              <a:buNone/>
+            </a:pPr>
+            <a:r>
+              <a:rPr lang="en-US" sz="1500" b="1" dirty="0">
+                <a:solidFill>
+                  <a:srgbClr val="3F6F5F"/>
+                </a:solidFill>
+                <a:latin typeface="Calibri" pitchFamily="34" charset="0"/>
+                <a:ea typeface="Calibri" pitchFamily="34" charset="-122"/>
+                <a:cs typeface="Calibri" pitchFamily="34" charset="-120"/>
+              </a:rPr>
+              <a:t>Supplement</a:t>
+            </a:r>
+            <a:endParaRPr lang="en-US" sz="1500" dirty="0"/>
+          </a:p>
+        </p:txBody>
+      </p:sp>
+      <p:sp>
+        <p:nvSpPr>
+          <p:cNvPr id="8" name="Text 6"/>
+          <p:cNvSpPr/>
+          <p:nvPr/>
+        </p:nvSpPr>
+        <p:spPr>
+          <a:xfrm>
+            <a:off x="1051560" y="2944368"/>
+            <a:ext cx="10424160" cy="731520"/>
+          </a:xfrm>
+          <a:prstGeom prst="rect">
+            <a:avLst/>
+          </a:prstGeom>
+          <a:noFill/>
+          <a:ln/>
+        </p:spPr>
+        <p:txBody>
+          <a:bodyPr wrap="square" rtlCol="0" anchor="t">
+            <a:spAutoFit/>
+          </a:bodyPr>
+          <a:lstStyle/>
+          <a:p>
+            <a:pPr indent="0" marL="0">
+              <a:buNone/>
+            </a:pPr>
+            <a:r>
+              <a:rPr lang="en-US" sz="1400" dirty="0">
+                <a:solidFill>
+                  <a:srgbClr val="1A1A1A"/>
+                </a:solidFill>
+                <a:latin typeface="Calibri" pitchFamily="34" charset="0"/>
+                <a:ea typeface="Calibri" pitchFamily="34" charset="-122"/>
+                <a:cs typeface="Calibri" pitchFamily="34" charset="-120"/>
+              </a:rPr>
+              <a:t>Zipf's law, the straight line in every text</a:t>
+            </a:r>
+            <a:endParaRPr lang="en-US" sz="1400" dirty="0"/>
+          </a:p>
+        </p:txBody>
+      </p:sp>
+      <p:sp>
+        <p:nvSpPr>
+          <p:cNvPr id="9" name="Shape 7"/>
+          <p:cNvSpPr/>
+          <p:nvPr/>
+        </p:nvSpPr>
+        <p:spPr>
+          <a:xfrm>
+            <a:off x="640080" y="3593592"/>
+            <a:ext cx="219456" cy="219456"/>
+          </a:xfrm>
+          <a:prstGeom prst="ellipse">
+            <a:avLst/>
+          </a:prstGeom>
+          <a:solidFill>
+            <a:srgbClr val="B9852F"/>
+          </a:solidFill>
+          <a:ln/>
+        </p:spPr>
+      </p:sp>
+      <p:sp>
+        <p:nvSpPr>
+          <p:cNvPr id="10" name="Text 8"/>
+          <p:cNvSpPr/>
+          <p:nvPr/>
+        </p:nvSpPr>
+        <p:spPr>
+          <a:xfrm>
+            <a:off x="1051560" y="3520440"/>
+            <a:ext cx="10424160" cy="365760"/>
+          </a:xfrm>
+          <a:prstGeom prst="rect">
+            <a:avLst/>
+          </a:prstGeom>
+          <a:noFill/>
+          <a:ln/>
+        </p:spPr>
+        <p:txBody>
+          <a:bodyPr wrap="square" rtlCol="0" anchor="ctr"/>
+          <a:lstStyle/>
+          <a:p>
+            <a:pPr indent="0" marL="0">
+              <a:buNone/>
+            </a:pPr>
+            <a:r>
+              <a:rPr lang="en-US" sz="1500" b="1" dirty="0">
+                <a:solidFill>
+                  <a:srgbClr val="B9852F"/>
+                </a:solidFill>
+                <a:latin typeface="Calibri" pitchFamily="34" charset="0"/>
+                <a:ea typeface="Calibri" pitchFamily="34" charset="-122"/>
+                <a:cs typeface="Calibri" pitchFamily="34" charset="-120"/>
+              </a:rPr>
+              <a:t>Deeper (optional)</a:t>
+            </a:r>
+            <a:endParaRPr lang="en-US" sz="1500" dirty="0"/>
+          </a:p>
+        </p:txBody>
+      </p:sp>
+      <p:sp>
+        <p:nvSpPr>
+          <p:cNvPr id="11" name="Text 9"/>
+          <p:cNvSpPr/>
+          <p:nvPr/>
+        </p:nvSpPr>
+        <p:spPr>
+          <a:xfrm>
+            <a:off x="1051560" y="3904488"/>
+            <a:ext cx="10424160" cy="731520"/>
+          </a:xfrm>
+          <a:prstGeom prst="rect">
+            <a:avLst/>
+          </a:prstGeom>
+          <a:noFill/>
+          <a:ln/>
+        </p:spPr>
+        <p:txBody>
+          <a:bodyPr wrap="square" rtlCol="0" anchor="t">
+            <a:spAutoFit/>
+          </a:bodyPr>
+          <a:lstStyle/>
+          <a:p>
+            <a:pPr indent="0" marL="0">
+              <a:buNone/>
+            </a:pPr>
+            <a:r>
+              <a:rPr lang="en-US" sz="1400" dirty="0">
+                <a:solidFill>
+                  <a:srgbClr val="1A1A1A"/>
+                </a:solidFill>
+                <a:latin typeface="Calibri" pitchFamily="34" charset="0"/>
+                <a:ea typeface="Calibri" pitchFamily="34" charset="-122"/>
+                <a:cs typeface="Calibri" pitchFamily="34" charset="-120"/>
+              </a:rPr>
+              <a:t>Grimmer &amp;amp; Stewart, Text as Data (2013), §1–4: all quantitative models of language are wrong, but some are useful</a:t>
+            </a:r>
+            <a:endParaRPr lang="en-US" sz="1400" dirty="0"/>
+          </a:p>
+        </p:txBody>
+      </p:sp>
+      <p:sp>
+        <p:nvSpPr>
+          <p:cNvPr id="12" name="Shape 10"/>
+          <p:cNvSpPr/>
+          <p:nvPr/>
+        </p:nvSpPr>
+        <p:spPr>
+          <a:xfrm>
+            <a:off x="640080" y="4553712"/>
+            <a:ext cx="219456" cy="219456"/>
+          </a:xfrm>
+          <a:prstGeom prst="ellipse">
+            <a:avLst/>
+          </a:prstGeom>
+          <a:solidFill>
+            <a:srgbClr val="3F6F5F"/>
+          </a:solidFill>
+          <a:ln/>
+        </p:spPr>
+      </p:sp>
+      <p:sp>
+        <p:nvSpPr>
+          <p:cNvPr id="13" name="Text 11"/>
+          <p:cNvSpPr/>
+          <p:nvPr/>
+        </p:nvSpPr>
+        <p:spPr>
+          <a:xfrm>
+            <a:off x="1051560" y="4480560"/>
+            <a:ext cx="10424160" cy="365760"/>
+          </a:xfrm>
+          <a:prstGeom prst="rect">
+            <a:avLst/>
+          </a:prstGeom>
+          <a:noFill/>
+          <a:ln/>
+        </p:spPr>
+        <p:txBody>
+          <a:bodyPr wrap="square" rtlCol="0" anchor="ctr"/>
+          <a:lstStyle/>
+          <a:p>
+            <a:pPr indent="0" marL="0">
+              <a:buNone/>
+            </a:pPr>
+            <a:r>
+              <a:rPr lang="en-US" sz="1500" b="1" dirty="0">
+                <a:solidFill>
+                  <a:srgbClr val="3F6F5F"/>
+                </a:solidFill>
+                <a:latin typeface="Calibri" pitchFamily="34" charset="0"/>
+                <a:ea typeface="Calibri" pitchFamily="34" charset="-122"/>
+                <a:cs typeface="Calibri" pitchFamily="34" charset="-120"/>
+              </a:rPr>
+              <a:t>Sketch</a:t>
+            </a:r>
+            <a:endParaRPr lang="en-US" sz="1500" dirty="0"/>
+          </a:p>
+        </p:txBody>
+      </p:sp>
+      <p:sp>
+        <p:nvSpPr>
+          <p:cNvPr id="14" name="Text 12"/>
+          <p:cNvSpPr/>
+          <p:nvPr/>
+        </p:nvSpPr>
+        <p:spPr>
+          <a:xfrm>
+            <a:off x="1051560" y="4864608"/>
+            <a:ext cx="10424160" cy="731520"/>
+          </a:xfrm>
+          <a:prstGeom prst="rect">
+            <a:avLst/>
+          </a:prstGeom>
+          <a:noFill/>
+          <a:ln/>
+        </p:spPr>
+        <p:txBody>
+          <a:bodyPr wrap="square" rtlCol="0" anchor="t">
+            <a:spAutoFit/>
+          </a:bodyPr>
+          <a:lstStyle/>
+          <a:p>
+            <a:pPr indent="0" marL="0">
+              <a:buNone/>
+            </a:pPr>
+            <a:r>
+              <a:rPr lang="en-US" sz="1400" dirty="0">
+                <a:solidFill>
+                  <a:srgbClr val="1A1A1A"/>
+                </a:solidFill>
+                <a:latin typeface="Calibri" pitchFamily="34" charset="0"/>
+                <a:ea typeface="Calibri" pitchFamily="34" charset="-122"/>
+                <a:cs typeface="Calibri" pitchFamily="34" charset="-120"/>
+              </a:rPr>
+              <a:t>Count something in a text you care about; one chart; one sentence naming a choice. If the count compares two things, shuffle-test the gap.</a:t>
+            </a:r>
+            <a:endParaRPr lang="en-US" sz="1400" dirty="0"/>
+          </a:p>
+        </p:txBody>
+      </p:sp>
+      <p:sp>
+        <p:nvSpPr>
+          <p:cNvPr id="15" name="Shape 13"/>
+          <p:cNvSpPr/>
+          <p:nvPr/>
+        </p:nvSpPr>
+        <p:spPr>
+          <a:xfrm>
+            <a:off x="640080" y="5513832"/>
+            <a:ext cx="219456" cy="219456"/>
+          </a:xfrm>
+          <a:prstGeom prst="ellipse">
+            <a:avLst/>
+          </a:prstGeom>
+          <a:solidFill>
+            <a:srgbClr val="7A3B2E"/>
+          </a:solidFill>
+          <a:ln/>
+        </p:spPr>
+      </p:sp>
+      <p:sp>
+        <p:nvSpPr>
+          <p:cNvPr id="16" name="Text 14"/>
+          <p:cNvSpPr/>
+          <p:nvPr/>
+        </p:nvSpPr>
+        <p:spPr>
+          <a:xfrm>
+            <a:off x="1051560" y="5440680"/>
+            <a:ext cx="10424160" cy="365760"/>
+          </a:xfrm>
+          <a:prstGeom prst="rect">
+            <a:avLst/>
+          </a:prstGeom>
+          <a:noFill/>
+          <a:ln/>
+        </p:spPr>
+        <p:txBody>
+          <a:bodyPr wrap="square" rtlCol="0" anchor="ctr"/>
+          <a:lstStyle/>
+          <a:p>
+            <a:pPr indent="0" marL="0">
+              <a:buNone/>
+            </a:pPr>
+            <a:r>
+              <a:rPr lang="en-US" sz="1500" b="1" dirty="0">
+                <a:solidFill>
+                  <a:srgbClr val="7A3B2E"/>
+                </a:solidFill>
+                <a:latin typeface="Calibri" pitchFamily="34" charset="0"/>
+                <a:ea typeface="Calibri" pitchFamily="34" charset="-122"/>
+                <a:cs typeface="Calibri" pitchFamily="34" charset="-120"/>
+              </a:rPr>
+              <a:t>Check (AI closed)</a:t>
+            </a:r>
+            <a:endParaRPr lang="en-US" sz="1500" dirty="0"/>
+          </a:p>
+        </p:txBody>
+      </p:sp>
+      <p:sp>
+        <p:nvSpPr>
+          <p:cNvPr id="17" name="Text 15"/>
+          <p:cNvSpPr/>
+          <p:nvPr/>
+        </p:nvSpPr>
+        <p:spPr>
+          <a:xfrm>
+            <a:off x="1051560" y="5824728"/>
+            <a:ext cx="10424160" cy="731520"/>
+          </a:xfrm>
+          <a:prstGeom prst="rect">
+            <a:avLst/>
+          </a:prstGeom>
+          <a:noFill/>
+          <a:ln/>
+        </p:spPr>
+        <p:txBody>
+          <a:bodyPr wrap="square" rtlCol="0" anchor="t">
+            <a:spAutoFit/>
+          </a:bodyPr>
+          <a:lstStyle/>
+          <a:p>
+            <a:pPr indent="0" marL="0">
+              <a:buNone/>
+            </a:pPr>
+            <a:r>
+              <a:rPr lang="en-US" sz="1400" dirty="0">
+                <a:solidFill>
+                  <a:srgbClr val="1A1A1A"/>
+                </a:solidFill>
+                <a:latin typeface="Calibri" pitchFamily="34" charset="0"/>
+                <a:ea typeface="Calibri" pitchFamily="34" charset="-122"/>
+                <a:cs typeface="Calibri" pitchFamily="34" charset="-120"/>
+              </a:rPr>
+              <a:t>Explain it: why two tokenizers split a sentence differently, and what your stemming choice changed. (Competencies 3, 5.)</a:t>
+            </a:r>
+            <a:endParaRPr lang="en-US" sz="1400" dirty="0"/>
+          </a:p>
+        </p:txBody>
+      </p:sp>
+    </p:spTree>
+  </p:cSld>
+  <p:clrMapOvr>
+    <a:masterClrMapping/>
+  </p:clrMapOvr>
+</p:sld>
+</file>
+
+<file path=ppt/slides/slide15.xml><?xml version="1.0" encoding="utf-8"?>
+<p:sld xmlns:a="http://schemas.openxmlformats.org/drawingml/2006/main" xmlns:r="http://schemas.openxmlformats.org/officeDocument/2006/relationships" xmlns:p="http://schemas.openxmlformats.org/presentationml/2006/main">
+  <p:cSld name="Slide 15">
+    <p:bg>
+      <p:bgPr>
+        <a:solidFill>
+          <a:srgbClr val="FFFFFF"/>
+        </a:solidFill>
+      </p:bgPr>
+    </p:bg>
+    <p:spTree>
+      <p:nvGrpSpPr>
+        <p:cNvPr id="1" name=""/>
+        <p:cNvGrpSpPr/>
+        <p:nvPr/>
+      </p:nvGrpSpPr>
+      <p:grpSpPr>
+        <a:xfrm>
+          <a:off x="0" y="0"/>
+          <a:ext cx="0" cy="0"/>
+          <a:chOff x="0" y="0"/>
+          <a:chExt cx="0" cy="0"/>
+        </a:xfrm>
+      </p:grpSpPr>
+      <p:sp>
+        <p:nvSpPr>
+          <p:cNvPr id="2" name="Text 0"/>
+          <p:cNvSpPr/>
+          <p:nvPr/>
+        </p:nvSpPr>
+        <p:spPr>
+          <a:xfrm>
+            <a:off x="640080" y="640080"/>
+            <a:ext cx="10058400" cy="320040"/>
+          </a:xfrm>
+          <a:prstGeom prst="rect">
+            <a:avLst/>
+          </a:prstGeom>
+          <a:noFill/>
+          <a:ln/>
+        </p:spPr>
+        <p:txBody>
+          <a:bodyPr wrap="square" rtlCol="0" anchor="ctr"/>
+          <a:lstStyle/>
+          <a:p>
+            <a:pPr indent="0" marL="0">
+              <a:buNone/>
+            </a:pPr>
+            <a:r>
+              <a:rPr lang="en-US" sz="1300" b="1" spc="300" kern="0" dirty="0">
+                <a:solidFill>
+                  <a:srgbClr val="7A3B2E"/>
+                </a:solidFill>
+                <a:latin typeface="Calibri" pitchFamily="34" charset="0"/>
+                <a:ea typeface="Calibri" pitchFamily="34" charset="-122"/>
+                <a:cs typeface="Calibri" pitchFamily="34" charset="-120"/>
+              </a:rPr>
+              <a:t>HOW THIS WEEK CONNECTS</a:t>
+            </a:r>
+            <a:endParaRPr lang="en-US" sz="1300" dirty="0"/>
+          </a:p>
+        </p:txBody>
+      </p:sp>
+      <p:sp>
+        <p:nvSpPr>
+          <p:cNvPr id="3" name="Text 1"/>
+          <p:cNvSpPr/>
+          <p:nvPr/>
+        </p:nvSpPr>
+        <p:spPr>
+          <a:xfrm>
+            <a:off x="640080" y="987552"/>
+            <a:ext cx="10058400" cy="640080"/>
+          </a:xfrm>
+          <a:prstGeom prst="rect">
+            <a:avLst/>
+          </a:prstGeom>
+          <a:noFill/>
+          <a:ln/>
+        </p:spPr>
+        <p:txBody>
+          <a:bodyPr wrap="square" rtlCol="0" anchor="ctr"/>
+          <a:lstStyle/>
+          <a:p>
+            <a:pPr indent="0" marL="0">
+              <a:buNone/>
+            </a:pPr>
+            <a:r>
+              <a:rPr lang="en-US" sz="2800" b="1" dirty="0">
+                <a:solidFill>
+                  <a:srgbClr val="1A1A1A"/>
+                </a:solidFill>
+                <a:latin typeface="Cambria" pitchFamily="34" charset="0"/>
+                <a:ea typeface="Cambria" pitchFamily="34" charset="-122"/>
+                <a:cs typeface="Cambria" pitchFamily="34" charset="-120"/>
+              </a:rPr>
+              <a:t>The course's through-lines</a:t>
+            </a:r>
+            <a:endParaRPr lang="en-US" sz="2800" dirty="0"/>
+          </a:p>
+        </p:txBody>
+      </p:sp>
+      <p:sp>
+        <p:nvSpPr>
+          <p:cNvPr id="4" name="Shape 2"/>
+          <p:cNvSpPr/>
+          <p:nvPr/>
+        </p:nvSpPr>
+        <p:spPr>
+          <a:xfrm>
+            <a:off x="640080" y="2057400"/>
+            <a:ext cx="457200" cy="457200"/>
+          </a:xfrm>
+          <a:prstGeom prst="roundRect">
+            <a:avLst>
+              <a:gd name="adj" fmla="val 16000"/>
+            </a:avLst>
+          </a:prstGeom>
+          <a:solidFill>
+            <a:srgbClr val="7A3B2E"/>
+          </a:solidFill>
+          <a:ln/>
+        </p:spPr>
+      </p:sp>
+      <p:sp>
+        <p:nvSpPr>
+          <p:cNvPr id="5" name="Text 3"/>
+          <p:cNvSpPr/>
+          <p:nvPr/>
+        </p:nvSpPr>
+        <p:spPr>
+          <a:xfrm>
+            <a:off x="640080" y="2057400"/>
+            <a:ext cx="457200" cy="457200"/>
+          </a:xfrm>
+          <a:prstGeom prst="rect">
+            <a:avLst/>
+          </a:prstGeom>
+          <a:noFill/>
+          <a:ln/>
+        </p:spPr>
+        <p:txBody>
+          <a:bodyPr wrap="square" rtlCol="0" anchor="ctr"/>
+          <a:lstStyle/>
+          <a:p>
+            <a:pPr algn="ctr" indent="0" marL="0">
+              <a:buNone/>
+            </a:pPr>
+            <a:r>
+              <a:rPr lang="en-US" sz="2000" b="1" dirty="0">
+                <a:solidFill>
+                  <a:srgbClr val="FFFFFF"/>
+                </a:solidFill>
+                <a:latin typeface="Cambria" pitchFamily="34" charset="0"/>
+                <a:ea typeface="Cambria" pitchFamily="34" charset="-122"/>
+                <a:cs typeface="Cambria" pitchFamily="34" charset="-120"/>
+              </a:rPr>
+              <a:t>1</a:t>
+            </a:r>
+            <a:endParaRPr lang="en-US" sz="2000" dirty="0"/>
+          </a:p>
+        </p:txBody>
+      </p:sp>
+      <p:sp>
+        <p:nvSpPr>
+          <p:cNvPr id="6" name="Text 4"/>
+          <p:cNvSpPr/>
+          <p:nvPr/>
+        </p:nvSpPr>
+        <p:spPr>
+          <a:xfrm>
+            <a:off x="1371600" y="2020824"/>
+            <a:ext cx="10332720" cy="411480"/>
+          </a:xfrm>
+          <a:prstGeom prst="rect">
+            <a:avLst/>
+          </a:prstGeom>
+          <a:noFill/>
+          <a:ln/>
+        </p:spPr>
+        <p:txBody>
+          <a:bodyPr wrap="square" rtlCol="0" anchor="ctr"/>
+          <a:lstStyle/>
+          <a:p>
+            <a:pPr indent="0" marL="0">
+              <a:buNone/>
+            </a:pPr>
+            <a:r>
+              <a:rPr lang="en-US" sz="1900" b="1" dirty="0">
+                <a:solidFill>
+                  <a:srgbClr val="7A3B2E"/>
+                </a:solidFill>
+                <a:latin typeface="Cambria" pitchFamily="34" charset="0"/>
+                <a:ea typeface="Cambria" pitchFamily="34" charset="-122"/>
+                <a:cs typeface="Cambria" pitchFamily="34" charset="-120"/>
+              </a:rPr>
+              <a:t>Beyond counting</a:t>
+            </a:r>
+            <a:endParaRPr lang="en-US" sz="1900" dirty="0"/>
+          </a:p>
+        </p:txBody>
+      </p:sp>
+      <p:sp>
+        <p:nvSpPr>
+          <p:cNvPr id="7" name="Text 5"/>
+          <p:cNvSpPr/>
+          <p:nvPr/>
+        </p:nvSpPr>
+        <p:spPr>
+          <a:xfrm>
+            <a:off x="1371600" y="2441448"/>
+            <a:ext cx="10332720" cy="914400"/>
+          </a:xfrm>
+          <a:prstGeom prst="rect">
+            <a:avLst/>
+          </a:prstGeom>
+          <a:noFill/>
+          <a:ln/>
+        </p:spPr>
+        <p:txBody>
+          <a:bodyPr wrap="square" rtlCol="0" anchor="t">
+            <a:spAutoFit/>
+          </a:bodyPr>
+          <a:lstStyle/>
+          <a:p>
+            <a:pPr indent="0" marL="0">
+              <a:lnSpc>
+                <a:spcPct val="112000"/>
+              </a:lnSpc>
+              <a:buNone/>
+            </a:pPr>
+            <a:r>
+              <a:rPr lang="en-US" sz="1450" dirty="0">
+                <a:solidFill>
+                  <a:srgbClr val="1A1A1A"/>
+                </a:solidFill>
+                <a:latin typeface="Calibri" pitchFamily="34" charset="0"/>
+                <a:ea typeface="Calibri" pitchFamily="34" charset="-122"/>
+                <a:cs typeface="Calibri" pitchFamily="34" charset="-120"/>
+              </a:rPr>
+              <a:t>Counting is the simplest tool and has no notion of meaning. Week 5 addresses that limit.</a:t>
+            </a:r>
+            <a:endParaRPr lang="en-US" sz="1450" dirty="0"/>
+          </a:p>
+        </p:txBody>
+      </p:sp>
+      <p:sp>
+        <p:nvSpPr>
+          <p:cNvPr id="8" name="Shape 6"/>
+          <p:cNvSpPr/>
+          <p:nvPr/>
+        </p:nvSpPr>
+        <p:spPr>
+          <a:xfrm>
+            <a:off x="640080" y="3520440"/>
+            <a:ext cx="457200" cy="457200"/>
+          </a:xfrm>
+          <a:prstGeom prst="roundRect">
+            <a:avLst>
+              <a:gd name="adj" fmla="val 16000"/>
+            </a:avLst>
+          </a:prstGeom>
+          <a:solidFill>
+            <a:srgbClr val="3F6F5F"/>
+          </a:solidFill>
+          <a:ln/>
+        </p:spPr>
+      </p:sp>
+      <p:sp>
+        <p:nvSpPr>
+          <p:cNvPr id="9" name="Text 7"/>
+          <p:cNvSpPr/>
+          <p:nvPr/>
+        </p:nvSpPr>
+        <p:spPr>
+          <a:xfrm>
+            <a:off x="640080" y="3520440"/>
+            <a:ext cx="457200" cy="457200"/>
+          </a:xfrm>
+          <a:prstGeom prst="rect">
+            <a:avLst/>
+          </a:prstGeom>
+          <a:noFill/>
+          <a:ln/>
+        </p:spPr>
+        <p:txBody>
+          <a:bodyPr wrap="square" rtlCol="0" anchor="ctr"/>
+          <a:lstStyle/>
+          <a:p>
+            <a:pPr algn="ctr" indent="0" marL="0">
+              <a:buNone/>
+            </a:pPr>
+            <a:r>
+              <a:rPr lang="en-US" sz="2000" b="1" dirty="0">
+                <a:solidFill>
+                  <a:srgbClr val="FFFFFF"/>
+                </a:solidFill>
+                <a:latin typeface="Cambria" pitchFamily="34" charset="0"/>
+                <a:ea typeface="Cambria" pitchFamily="34" charset="-122"/>
+                <a:cs typeface="Cambria" pitchFamily="34" charset="-120"/>
+              </a:rPr>
+              <a:t>2</a:t>
+            </a:r>
+            <a:endParaRPr lang="en-US" sz="2000" dirty="0"/>
+          </a:p>
+        </p:txBody>
+      </p:sp>
+      <p:sp>
+        <p:nvSpPr>
+          <p:cNvPr id="10" name="Text 8"/>
+          <p:cNvSpPr/>
+          <p:nvPr/>
+        </p:nvSpPr>
+        <p:spPr>
+          <a:xfrm>
+            <a:off x="1371600" y="3483864"/>
+            <a:ext cx="10332720" cy="411480"/>
+          </a:xfrm>
+          <a:prstGeom prst="rect">
+            <a:avLst/>
+          </a:prstGeom>
+          <a:noFill/>
+          <a:ln/>
+        </p:spPr>
+        <p:txBody>
+          <a:bodyPr wrap="square" rtlCol="0" anchor="ctr"/>
+          <a:lstStyle/>
+          <a:p>
+            <a:pPr indent="0" marL="0">
+              <a:buNone/>
+            </a:pPr>
+            <a:r>
+              <a:rPr lang="en-US" sz="1900" b="1" dirty="0">
+                <a:solidFill>
+                  <a:srgbClr val="3F6F5F"/>
+                </a:solidFill>
+                <a:latin typeface="Cambria" pitchFamily="34" charset="0"/>
+                <a:ea typeface="Cambria" pitchFamily="34" charset="-122"/>
+                <a:cs typeface="Cambria" pitchFamily="34" charset="-120"/>
+              </a:rPr>
+              <a:t>Every count is a choice</a:t>
+            </a:r>
+            <a:endParaRPr lang="en-US" sz="1900" dirty="0"/>
+          </a:p>
+        </p:txBody>
+      </p:sp>
+      <p:sp>
+        <p:nvSpPr>
+          <p:cNvPr id="11" name="Text 9"/>
+          <p:cNvSpPr/>
+          <p:nvPr/>
+        </p:nvSpPr>
+        <p:spPr>
+          <a:xfrm>
+            <a:off x="1371600" y="3904488"/>
+            <a:ext cx="10332720" cy="914400"/>
+          </a:xfrm>
+          <a:prstGeom prst="rect">
+            <a:avLst/>
+          </a:prstGeom>
+          <a:noFill/>
+          <a:ln/>
+        </p:spPr>
+        <p:txBody>
+          <a:bodyPr wrap="square" rtlCol="0" anchor="t">
+            <a:spAutoFit/>
+          </a:bodyPr>
+          <a:lstStyle/>
+          <a:p>
+            <a:pPr indent="0" marL="0">
+              <a:lnSpc>
+                <a:spcPct val="112000"/>
+              </a:lnSpc>
+              <a:buNone/>
+            </a:pPr>
+            <a:r>
+              <a:rPr lang="en-US" sz="1450" dirty="0">
+                <a:solidFill>
+                  <a:srgbClr val="1A1A1A"/>
+                </a:solidFill>
+                <a:latin typeface="Calibri" pitchFamily="34" charset="0"/>
+                <a:ea typeface="Calibri" pitchFamily="34" charset="-122"/>
+                <a:cs typeface="Calibri" pitchFamily="34" charset="-120"/>
+              </a:rPr>
+              <a:t>Tokens, stemming, the corpus, the chart's axis, each hides a decision you made.</a:t>
+            </a:r>
+            <a:endParaRPr lang="en-US" sz="1450" dirty="0"/>
+          </a:p>
+        </p:txBody>
+      </p:sp>
+      <p:sp>
+        <p:nvSpPr>
+          <p:cNvPr id="12" name="Shape 10"/>
+          <p:cNvSpPr/>
+          <p:nvPr/>
+        </p:nvSpPr>
+        <p:spPr>
+          <a:xfrm>
+            <a:off x="640080" y="4983480"/>
+            <a:ext cx="457200" cy="457200"/>
+          </a:xfrm>
+          <a:prstGeom prst="roundRect">
+            <a:avLst>
+              <a:gd name="adj" fmla="val 16000"/>
+            </a:avLst>
+          </a:prstGeom>
+          <a:solidFill>
+            <a:srgbClr val="B9852F"/>
+          </a:solidFill>
+          <a:ln/>
+        </p:spPr>
+      </p:sp>
+      <p:sp>
+        <p:nvSpPr>
+          <p:cNvPr id="13" name="Text 11"/>
+          <p:cNvSpPr/>
+          <p:nvPr/>
+        </p:nvSpPr>
+        <p:spPr>
+          <a:xfrm>
+            <a:off x="640080" y="4983480"/>
+            <a:ext cx="457200" cy="457200"/>
+          </a:xfrm>
+          <a:prstGeom prst="rect">
+            <a:avLst/>
+          </a:prstGeom>
+          <a:noFill/>
+          <a:ln/>
+        </p:spPr>
+        <p:txBody>
+          <a:bodyPr wrap="square" rtlCol="0" anchor="ctr"/>
+          <a:lstStyle/>
+          <a:p>
+            <a:pPr algn="ctr" indent="0" marL="0">
+              <a:buNone/>
+            </a:pPr>
+            <a:r>
+              <a:rPr lang="en-US" sz="2000" b="1" dirty="0">
+                <a:solidFill>
+                  <a:srgbClr val="FFFFFF"/>
+                </a:solidFill>
+                <a:latin typeface="Cambria" pitchFamily="34" charset="0"/>
+                <a:ea typeface="Cambria" pitchFamily="34" charset="-122"/>
+                <a:cs typeface="Cambria" pitchFamily="34" charset="-120"/>
+              </a:rPr>
+              <a:t>3</a:t>
+            </a:r>
+            <a:endParaRPr lang="en-US" sz="2000" dirty="0"/>
+          </a:p>
+        </p:txBody>
+      </p:sp>
+      <p:sp>
+        <p:nvSpPr>
+          <p:cNvPr id="14" name="Text 12"/>
+          <p:cNvSpPr/>
+          <p:nvPr/>
+        </p:nvSpPr>
+        <p:spPr>
+          <a:xfrm>
+            <a:off x="1371600" y="4946904"/>
+            <a:ext cx="10332720" cy="411480"/>
+          </a:xfrm>
+          <a:prstGeom prst="rect">
+            <a:avLst/>
+          </a:prstGeom>
+          <a:noFill/>
+          <a:ln/>
+        </p:spPr>
+        <p:txBody>
+          <a:bodyPr wrap="square" rtlCol="0" anchor="ctr"/>
+          <a:lstStyle/>
+          <a:p>
+            <a:pPr indent="0" marL="0">
+              <a:buNone/>
+            </a:pPr>
+            <a:r>
+              <a:rPr lang="en-US" sz="1900" b="1" dirty="0">
+                <a:solidFill>
+                  <a:srgbClr val="B9852F"/>
+                </a:solidFill>
+                <a:latin typeface="Cambria" pitchFamily="34" charset="0"/>
+                <a:ea typeface="Cambria" pitchFamily="34" charset="-122"/>
+                <a:cs typeface="Cambria" pitchFamily="34" charset="-120"/>
+              </a:rPr>
+              <a:t>Is the difference real?</a:t>
+            </a:r>
+            <a:endParaRPr lang="en-US" sz="1900" dirty="0"/>
+          </a:p>
+        </p:txBody>
+      </p:sp>
+      <p:sp>
+        <p:nvSpPr>
+          <p:cNvPr id="15" name="Text 13"/>
+          <p:cNvSpPr/>
+          <p:nvPr/>
+        </p:nvSpPr>
+        <p:spPr>
+          <a:xfrm>
+            <a:off x="1371600" y="5367528"/>
+            <a:ext cx="10332720" cy="914400"/>
+          </a:xfrm>
+          <a:prstGeom prst="rect">
+            <a:avLst/>
+          </a:prstGeom>
+          <a:noFill/>
+          <a:ln/>
+        </p:spPr>
+        <p:txBody>
+          <a:bodyPr wrap="square" rtlCol="0" anchor="t">
+            <a:spAutoFit/>
+          </a:bodyPr>
+          <a:lstStyle/>
+          <a:p>
+            <a:pPr indent="0" marL="0">
+              <a:lnSpc>
+                <a:spcPct val="112000"/>
+              </a:lnSpc>
+              <a:buNone/>
+            </a:pPr>
+            <a:r>
+              <a:rPr lang="en-US" sz="1450" dirty="0">
+                <a:solidFill>
+                  <a:srgbClr val="1A1A1A"/>
+                </a:solidFill>
+                <a:latin typeface="Calibri" pitchFamily="34" charset="0"/>
+                <a:ea typeface="Calibri" pitchFamily="34" charset="-122"/>
+                <a:cs typeface="Calibri" pitchFamily="34" charset="-120"/>
+              </a:rPr>
+              <a:t>Shuffle the labels and count again, one thousand times; if chance often matches your gap, do not trust it.</a:t>
+            </a:r>
+            <a:endParaRPr lang="en-US" sz="1450" dirty="0"/>
+          </a:p>
+        </p:txBody>
+      </p:sp>
+    </p:spTree>
+  </p:cSld>
+  <p:clrMapOvr>
+    <a:masterClrMapping/>
+  </p:clrMapOvr>
+</p:sld>
+</file>
+
+<file path=ppt/slides/slide16.xml><?xml version="1.0" encoding="utf-8"?>
+<p:sld xmlns:a="http://schemas.openxmlformats.org/drawingml/2006/main" xmlns:r="http://schemas.openxmlformats.org/officeDocument/2006/relationships" xmlns:p="http://schemas.openxmlformats.org/presentationml/2006/main">
+  <p:cSld name="Slide 16">
     <p:bg>
       <p:bgPr>
         <a:solidFill>
@@ -4491,7 +7199,7 @@
         <p:spPr>
           <a:xfrm>
             <a:off x="1097280" y="2240280"/>
-            <a:ext cx="10607040" cy="1017270"/>
+            <a:ext cx="10607040" cy="813816"/>
           </a:xfrm>
           <a:prstGeom prst="rect">
             <a:avLst/>
@@ -4512,7 +7220,7 @@
               <a:buNone/>
             </a:pPr>
             <a:r>
-              <a:rPr lang="en-US" sz="1650" dirty="0">
+              <a:rPr lang="en-US" sz="1500" dirty="0">
                 <a:solidFill>
                   <a:srgbClr val="1A1A1A"/>
                 </a:solidFill>
@@ -4522,7 +7230,7 @@
               </a:rPr>
               <a:t>The claim (PNAS 2021): phrases of distorted thinking ("I am a failure," "everyone hates me") surge in Google Books after 2000. A hockey stick.</a:t>
             </a:r>
-            <a:endParaRPr lang="en-US" sz="1650" dirty="0"/>
+            <a:endParaRPr lang="en-US" sz="1500" dirty="0"/>
           </a:p>
         </p:txBody>
       </p:sp>
@@ -4534,7 +7242,7 @@
         </p:nvSpPr>
         <p:spPr>
           <a:xfrm>
-            <a:off x="640080" y="3348990"/>
+            <a:off x="640080" y="3145536"/>
             <a:ext cx="201168" cy="201168"/>
           </a:xfrm>
           <a:prstGeom prst="ellipse">
@@ -4554,8 +7262,8 @@
         </p:nvSpPr>
         <p:spPr>
           <a:xfrm>
-            <a:off x="1097280" y="3257550"/>
-            <a:ext cx="10607040" cy="1017270"/>
+            <a:off x="1097280" y="3054096"/>
+            <a:ext cx="10607040" cy="813816"/>
           </a:xfrm>
           <a:prstGeom prst="rect">
             <a:avLst/>
@@ -4576,7 +7284,7 @@
               <a:buNone/>
             </a:pPr>
             <a:r>
-              <a:rPr lang="en-US" sz="1650" dirty="0">
+              <a:rPr lang="en-US" sz="1500" dirty="0">
                 <a:solidFill>
                   <a:srgbClr val="1A1A1A"/>
                 </a:solidFill>
@@ -4586,7 +7294,7 @@
               </a:rPr>
               <a:t>The objection: Google scanned more fiction after 2000. Maybe the surge is novels, not distress.</a:t>
             </a:r>
-            <a:endParaRPr lang="en-US" sz="1650" dirty="0"/>
+            <a:endParaRPr lang="en-US" sz="1500" dirty="0"/>
           </a:p>
         </p:txBody>
       </p:sp>
@@ -4598,7 +7306,7 @@
         </p:nvSpPr>
         <p:spPr>
           <a:xfrm>
-            <a:off x="640080" y="4366260"/>
+            <a:off x="640080" y="3959352"/>
             <a:ext cx="201168" cy="201168"/>
           </a:xfrm>
           <a:prstGeom prst="ellipse">
@@ -4618,8 +7326,8 @@
         </p:nvSpPr>
         <p:spPr>
           <a:xfrm>
-            <a:off x="1097280" y="4274820"/>
-            <a:ext cx="10607040" cy="1017270"/>
+            <a:off x="1097280" y="3867912"/>
+            <a:ext cx="10607040" cy="813816"/>
           </a:xfrm>
           <a:prstGeom prst="rect">
             <a:avLst/>
@@ -4640,7 +7348,7 @@
               <a:buNone/>
             </a:pPr>
             <a:r>
-              <a:rPr lang="en-US" sz="1650" dirty="0">
+              <a:rPr lang="en-US" sz="1500" dirty="0">
                 <a:solidFill>
                   <a:srgbClr val="1A1A1A"/>
                 </a:solidFill>
@@ -4650,7 +7358,7 @@
               </a:rPr>
               <a:t>The rebuttal: the authors deleted the entire fiction corpus and re-ran the analysis. The pattern largely held.</a:t>
             </a:r>
-            <a:endParaRPr lang="en-US" sz="1650" dirty="0"/>
+            <a:endParaRPr lang="en-US" sz="1500" dirty="0"/>
           </a:p>
         </p:txBody>
       </p:sp>
@@ -4662,7 +7370,7 @@
         </p:nvSpPr>
         <p:spPr>
           <a:xfrm>
-            <a:off x="640080" y="5383530"/>
+            <a:off x="640080" y="4773168"/>
             <a:ext cx="201168" cy="201168"/>
           </a:xfrm>
           <a:prstGeom prst="ellipse">
@@ -4682,8 +7390,8 @@
         </p:nvSpPr>
         <p:spPr>
           <a:xfrm>
-            <a:off x="1097280" y="5292090"/>
-            <a:ext cx="10607040" cy="1017270"/>
+            <a:off x="1097280" y="4681728"/>
+            <a:ext cx="10607040" cy="813816"/>
           </a:xfrm>
           <a:prstGeom prst="rect">
             <a:avLst/>
@@ -4704,7 +7412,7 @@
               <a:buNone/>
             </a:pPr>
             <a:r>
-              <a:rPr lang="en-US" sz="1650" dirty="0">
+              <a:rPr lang="en-US" sz="1500" dirty="0">
                 <a:solidFill>
                   <a:srgbClr val="1A1A1A"/>
                 </a:solidFill>
@@ -4712,9 +7420,73 @@
                 <a:ea typeface="Calibri" pitchFamily="34" charset="-122"/>
                 <a:cs typeface="Calibri" pitchFamily="34" charset="-120"/>
               </a:rPr>
+              <a:t>The notebook runs the trial live: the Ngram Viewer's JSON endpoint returns the paper's own data. "I am a failure" hockey-sticks in the mixed corpus and sits roughly flat inside fiction; "she whispered" hockey-sticks too. The evidence cuts both ways, which is why it is a trial.</a:t>
+            </a:r>
+            <a:endParaRPr lang="en-US" sz="1500" dirty="0"/>
+          </a:p>
+        </p:txBody>
+      </p:sp>
+      <p:sp>
+        <p:nvSpPr>
+          <p:cNvPr id="13" name="Shape 11"/>
+          <p:cNvSpPr/>
+          <p:nvPr/>
+        </p:nvSpPr>
+        <p:spPr>
+          <a:xfrm>
+            <a:off x="640080" y="5586984"/>
+            <a:ext cx="201168" cy="201168"/>
+          </a:xfrm>
+          <a:prstGeom prst="ellipse">
+            <a:avLst/>
+          </a:prstGeom>
+          <a:solidFill>
+            <a:srgbClr val="3F6F5F"/>
+          </a:solidFill>
+          <a:ln/>
+        </p:spPr>
+      </p:sp>
+      <p:sp>
+        <p:nvSpPr>
+          <p:cNvPr id="14" name="Text 12"/>
+          <p:cNvSpPr/>
+          <p:nvPr/>
+        </p:nvSpPr>
+        <p:spPr>
+          <a:xfrm>
+            <a:off x="1097280" y="5495544"/>
+            <a:ext cx="10607040" cy="813816"/>
+          </a:xfrm>
+          <a:prstGeom prst="rect">
+            <a:avLst/>
+          </a:prstGeom>
+          <a:noFill/>
+          <a:ln/>
+        </p:spPr>
+        <p:txBody>
+          <a:bodyPr wrap="square" rtlCol="0" anchor="t">
+            <a:spAutoFit/>
+          </a:bodyPr>
+          <a:lstStyle/>
+          <a:p>
+            <a:pPr indent="0" marL="0">
+              <a:lnSpc>
+                <a:spcPct val="112000"/>
+              </a:lnSpc>
+              <a:buNone/>
+            </a:pPr>
+            <a:r>
+              <a:rPr lang="en-US" sz="1500" dirty="0">
+                <a:solidFill>
+                  <a:srgbClr val="1A1A1A"/>
+                </a:solidFill>
+                <a:latin typeface="Calibri" pitchFamily="34" charset="0"/>
+                <a:ea typeface="Calibri" pitchFamily="34" charset="-122"/>
+                <a:cs typeface="Calibri" pitchFamily="34" charset="-120"/>
+              </a:rPr>
               <a:t>The method worth adopting: answer "your corpus is biased" with a test rather than an argument.</a:t>
             </a:r>
-            <a:endParaRPr lang="en-US" sz="1650" dirty="0"/>
+            <a:endParaRPr lang="en-US" sz="1500" dirty="0"/>
           </a:p>
         </p:txBody>
       </p:sp>
@@ -5296,7 +8068,7 @@
                 <a:ea typeface="Cambria" pitchFamily="34" charset="-122"/>
                 <a:cs typeface="Cambria" pitchFamily="34" charset="-120"/>
               </a:rPr>
-              <a:t>Keyness: what makes a voice distinctive</a:t>
+              <a:t>N-grams: counting phrases</a:t>
             </a:r>
             <a:endParaRPr lang="en-US" sz="3000" dirty="0"/>
           </a:p>
@@ -5360,7 +8132,7 @@
                 <a:ea typeface="Calibri" pitchFamily="34" charset="-122"/>
                 <a:cs typeface="Calibri" pitchFamily="34" charset="-120"/>
               </a:rPr>
-              <a:t>For every word: how much likelier is it in corpus A than corpus B? A log-odds ratio, smoothed so rare words don't explode.</a:t>
+              <a:t>A bigram is two words in a row. Week 1 counted the sonnets' pairs; this week counts pairs across three corpora, and each book's top bigrams are already a fingerprint.</a:t>
             </a:r>
             <a:endParaRPr lang="en-US" sz="1650" dirty="0"/>
           </a:p>
@@ -5424,7 +8196,7 @@
                 <a:ea typeface="Calibri" pitchFamily="34" charset="-122"/>
                 <a:cs typeface="Calibri" pitchFamily="34" charset="-120"/>
               </a:rPr>
-              <a:t>Strongly positive = distinctively A. Strongly negative = distinctively B. The middle is shared language.</a:t>
+              <a:t>Google Books n-grams are this method at civilizational scale: 500 billion words, one JSON request per query. Bollen et al. is an n-gram study.</a:t>
             </a:r>
             <a:endParaRPr lang="en-US" sz="1650" dirty="0"/>
           </a:p>
@@ -5488,7 +8260,7 @@
                 <a:ea typeface="Calibri" pitchFamily="34" charset="-122"/>
                 <a:cs typeface="Calibri" pitchFamily="34" charset="-120"/>
               </a:rPr>
-              <a:t>She Giggles, He Gallops is exactly this method: verbs after "she" vs. "he" in 2,000 screenplays. Women snuggle, giggle, squeal; men gallop, strap, shoot.</a:t>
+              <a:t>Longer n-grams buy context and pay in sparsity: the top word appears hundreds of times, the top pair dozens, the top triple six.</a:t>
             </a:r>
             <a:endParaRPr lang="en-US" sz="1650" dirty="0"/>
           </a:p>
@@ -5552,7 +8324,7 @@
                 <a:ea typeface="Calibri" pitchFamily="34" charset="-122"/>
                 <a:cs typeface="Calibri" pitchFamily="34" charset="-120"/>
               </a:rPr>
-              <a:t>The corpus pair is a choice: this artist against pop, this subreddit against a novel. Different pair, different "distinctive."</a:t>
+              <a:t>"My love" is a different fact than "my" plus "love": pairs keep a sliver of the order the bag throws away.</a:t>
             </a:r>
             <a:endParaRPr lang="en-US" sz="1650" dirty="0"/>
           </a:p>
@@ -5684,7 +8456,7 @@
                 <a:ea typeface="Cambria" pitchFamily="34" charset="-122"/>
                 <a:cs typeface="Cambria" pitchFamily="34" charset="-120"/>
               </a:rPr>
-              <a:t>The shuffle test: is the gap real?</a:t>
+              <a:t>The statistics of counts</a:t>
             </a:r>
             <a:endParaRPr lang="en-US" sz="3000" dirty="0"/>
           </a:p>
@@ -5748,7 +8520,7 @@
                 <a:ea typeface="Calibri" pitchFamily="34" charset="-122"/>
                 <a:cs typeface="Calibri" pitchFamily="34" charset="-120"/>
               </a:rPr>
-              <a:t>The question: could randomly dealt labels produce a gap this large?</a:t>
+              <a:t>Habit one: look at the distribution before the mean. Count data is skewed: most paragraphs of Dracula contain "night" zero times, a few contain many. Mean and median disagree, and the mean alone misleads.</a:t>
             </a:r>
             <a:endParaRPr lang="en-US" sz="1650" dirty="0"/>
           </a:p>
@@ -5812,7 +8584,7 @@
                 <a:ea typeface="Calibri" pitchFamily="34" charset="-122"/>
                 <a:cs typeface="Calibri" pitchFamily="34" charset="-120"/>
               </a:rPr>
-              <a:t>Shuffle the labels, recount, 1,000 times. Mark where the real gap lands in that pile.</a:t>
+              <a:t>Habit two: divide by a denominator. The novels outweigh all 154 sonnets combined, so raw totals always vote for the novels. Rates per 1,000 words: "love" is 10.8 in the sonnets, 0.7 in Frankenstein.</a:t>
             </a:r>
             <a:endParaRPr lang="en-US" sz="1650" dirty="0"/>
           </a:p>
@@ -5876,7 +8648,7 @@
                 <a:ea typeface="Calibri" pitchFamily="34" charset="-122"/>
                 <a:cs typeface="Calibri" pitchFamily="34" charset="-120"/>
               </a:rPr>
-              <a:t>Chance rarely matches it: a finding. Chance matches it often: a coincidence.</a:t>
+              <a:t>Habit three: a gap between rates can still be luck. That is the shuffle test's question, and it closes the session.</a:t>
             </a:r>
             <a:endParaRPr lang="en-US" sz="1650" dirty="0"/>
           </a:p>
@@ -5940,7 +8712,7 @@
                 <a:ea typeface="Calibri" pitchFamily="34" charset="-122"/>
                 <a:cs typeface="Calibri" pitchFamily="34" charset="-120"/>
               </a:rPr>
-              <a:t>It says "probably not chance." It never says "big enough to matter." Effect size is your argument to make.</a:t>
+              <a:t>A difference can be real and still small; a big difference can be an artifact of the denominator. Say which you have.</a:t>
             </a:r>
             <a:endParaRPr lang="en-US" sz="1650" dirty="0"/>
           </a:p>
@@ -5980,14 +8752,34 @@
       </p:grpSpPr>
       <p:sp>
         <p:nvSpPr>
-          <p:cNvPr id="2" name="Text 0"/>
-          <p:cNvSpPr/>
-          <p:nvPr/>
-        </p:nvSpPr>
-        <p:spPr>
-          <a:xfrm>
-            <a:off x="640080" y="731520"/>
-            <a:ext cx="10058400" cy="731520"/>
+          <p:cNvPr id="2" name="Shape 0"/>
+          <p:cNvSpPr/>
+          <p:nvPr/>
+        </p:nvSpPr>
+        <p:spPr>
+          <a:xfrm>
+            <a:off x="0" y="0"/>
+            <a:ext cx="164592" cy="6858000"/>
+          </a:xfrm>
+          <a:prstGeom prst="rect">
+            <a:avLst/>
+          </a:prstGeom>
+          <a:solidFill>
+            <a:srgbClr val="3F6F5F"/>
+          </a:solidFill>
+          <a:ln/>
+        </p:spPr>
+      </p:sp>
+      <p:sp>
+        <p:nvSpPr>
+          <p:cNvPr id="3" name="Text 1"/>
+          <p:cNvSpPr/>
+          <p:nvPr/>
+        </p:nvSpPr>
+        <p:spPr>
+          <a:xfrm>
+            <a:off x="640080" y="640080"/>
+            <a:ext cx="10058400" cy="320040"/>
           </a:xfrm>
           <a:prstGeom prst="rect">
             <a:avLst/>
@@ -5997,6 +8789,47 @@
         </p:spPr>
         <p:txBody>
           <a:bodyPr wrap="square" rtlCol="0" anchor="ctr"/>
+          <a:lstStyle/>
+          <a:p>
+            <a:pPr indent="0" marL="0">
+              <a:buNone/>
+            </a:pPr>
+            <a:r>
+              <a:rPr lang="en-US" sz="1200" b="1" spc="300" kern="0" dirty="0">
+                <a:solidFill>
+                  <a:srgbClr val="3F6F5F"/>
+                </a:solidFill>
+                <a:latin typeface="Calibri" pitchFamily="34" charset="0"/>
+                <a:ea typeface="Calibri" pitchFamily="34" charset="-122"/>
+                <a:cs typeface="Calibri" pitchFamily="34" charset="-120"/>
+              </a:rPr>
+              <a:t>WEEK 2 · KEY POINTS</a:t>
+            </a:r>
+            <a:endParaRPr lang="en-US" sz="1200" dirty="0"/>
+          </a:p>
+        </p:txBody>
+      </p:sp>
+      <p:sp>
+        <p:nvSpPr>
+          <p:cNvPr id="4" name="Text 2"/>
+          <p:cNvSpPr/>
+          <p:nvPr/>
+        </p:nvSpPr>
+        <p:spPr>
+          <a:xfrm>
+            <a:off x="640080" y="1005840"/>
+            <a:ext cx="10881360" cy="914400"/>
+          </a:xfrm>
+          <a:prstGeom prst="rect">
+            <a:avLst/>
+          </a:prstGeom>
+          <a:noFill/>
+          <a:ln/>
+        </p:spPr>
+        <p:txBody>
+          <a:bodyPr wrap="square" rtlCol="0" anchor="t">
+            <a:spAutoFit/>
+          </a:bodyPr>
           <a:lstStyle/>
           <a:p>
             <a:pPr indent="0" marL="0">
@@ -6011,7 +8844,7 @@
                 <a:ea typeface="Cambria" pitchFamily="34" charset="-122"/>
                 <a:cs typeface="Cambria" pitchFamily="34" charset="-120"/>
               </a:rPr>
-              <a:t>Three modes today</a:t>
+              <a:t>Clustering: what do the counts separate?</a:t>
             </a:r>
             <a:endParaRPr lang="en-US" sz="3000" dirty="0"/>
           </a:p>
@@ -6019,134 +8852,98 @@
       </p:sp>
       <p:sp>
         <p:nvSpPr>
-          <p:cNvPr id="3" name="Text 1"/>
-          <p:cNvSpPr/>
-          <p:nvPr/>
-        </p:nvSpPr>
-        <p:spPr>
-          <a:xfrm>
-            <a:off x="640080" y="1417320"/>
-            <a:ext cx="10058400" cy="365760"/>
-          </a:xfrm>
-          <a:prstGeom prst="rect">
-            <a:avLst/>
-          </a:prstGeom>
-          <a:noFill/>
-          <a:ln/>
-        </p:spPr>
-        <p:txBody>
-          <a:bodyPr wrap="square" rtlCol="0" anchor="ctr"/>
-          <a:lstStyle/>
-          <a:p>
-            <a:pPr indent="0" marL="0">
-              <a:buNone/>
-            </a:pPr>
-            <a:r>
-              <a:rPr lang="en-US" sz="1400" i="1" dirty="0">
-                <a:solidFill>
-                  <a:srgbClr val="6B6B63"/>
+          <p:cNvPr id="5" name="Shape 3"/>
+          <p:cNvSpPr/>
+          <p:nvPr/>
+        </p:nvSpPr>
+        <p:spPr>
+          <a:xfrm>
+            <a:off x="640080" y="2331720"/>
+            <a:ext cx="201168" cy="201168"/>
+          </a:xfrm>
+          <a:prstGeom prst="ellipse">
+            <a:avLst/>
+          </a:prstGeom>
+          <a:solidFill>
+            <a:srgbClr val="7A3B2E"/>
+          </a:solidFill>
+          <a:ln/>
+        </p:spPr>
+      </p:sp>
+      <p:sp>
+        <p:nvSpPr>
+          <p:cNvPr id="6" name="Text 4"/>
+          <p:cNvSpPr/>
+          <p:nvPr/>
+        </p:nvSpPr>
+        <p:spPr>
+          <a:xfrm>
+            <a:off x="1097280" y="2240280"/>
+            <a:ext cx="10607040" cy="1017270"/>
+          </a:xfrm>
+          <a:prstGeom prst="rect">
+            <a:avLst/>
+          </a:prstGeom>
+          <a:noFill/>
+          <a:ln/>
+        </p:spPr>
+        <p:txBody>
+          <a:bodyPr wrap="square" rtlCol="0" anchor="t">
+            <a:spAutoFit/>
+          </a:bodyPr>
+          <a:lstStyle/>
+          <a:p>
+            <a:pPr indent="0" marL="0">
+              <a:lnSpc>
+                <a:spcPct val="112000"/>
+              </a:lnSpc>
+              <a:buNone/>
+            </a:pPr>
+            <a:r>
+              <a:rPr lang="en-US" sz="1650" dirty="0">
+                <a:solidFill>
+                  <a:srgbClr val="1A1A1A"/>
                 </a:solidFill>
                 <a:latin typeface="Calibri" pitchFamily="34" charset="0"/>
                 <a:ea typeface="Calibri" pitchFamily="34" charset="-122"/>
                 <a:cs typeface="Calibri" pitchFamily="34" charset="-120"/>
               </a:rPr>
-              <a:t>about a third of the session each</a:t>
-            </a:r>
-            <a:endParaRPr lang="en-US" sz="1400" dirty="0"/>
-          </a:p>
-        </p:txBody>
-      </p:sp>
-      <p:sp>
-        <p:nvSpPr>
-          <p:cNvPr id="4" name="Shape 2"/>
-          <p:cNvSpPr/>
-          <p:nvPr/>
-        </p:nvSpPr>
-        <p:spPr>
-          <a:xfrm>
-            <a:off x="640080" y="2194560"/>
-            <a:ext cx="3383280" cy="3291840"/>
-          </a:xfrm>
-          <a:prstGeom prst="roundRect">
-            <a:avLst>
-              <a:gd name="adj" fmla="val 3333"/>
-            </a:avLst>
-          </a:prstGeom>
-          <a:solidFill>
-            <a:srgbClr val="F4EEE8"/>
-          </a:solidFill>
-          <a:ln/>
-        </p:spPr>
-      </p:sp>
-      <p:sp>
-        <p:nvSpPr>
-          <p:cNvPr id="5" name="Shape 3"/>
-          <p:cNvSpPr/>
-          <p:nvPr/>
-        </p:nvSpPr>
-        <p:spPr>
-          <a:xfrm>
-            <a:off x="1051560" y="2606040"/>
-            <a:ext cx="548640" cy="548640"/>
+              <a:t>Give k-means the 314 documents as tf-idf vectors and ask for three piles, no labels. It returns: novels in one pile, sonnets split across two.</a:t>
+            </a:r>
+            <a:endParaRPr lang="en-US" sz="1650" dirty="0"/>
+          </a:p>
+        </p:txBody>
+      </p:sp>
+      <p:sp>
+        <p:nvSpPr>
+          <p:cNvPr id="7" name="Shape 5"/>
+          <p:cNvSpPr/>
+          <p:nvPr/>
+        </p:nvSpPr>
+        <p:spPr>
+          <a:xfrm>
+            <a:off x="640080" y="3348990"/>
+            <a:ext cx="201168" cy="201168"/>
           </a:xfrm>
           <a:prstGeom prst="ellipse">
             <a:avLst/>
           </a:prstGeom>
           <a:solidFill>
-            <a:srgbClr val="7A3B2E"/>
-          </a:solidFill>
-          <a:ln/>
-        </p:spPr>
-      </p:sp>
-      <p:sp>
-        <p:nvSpPr>
-          <p:cNvPr id="6" name="Text 4"/>
-          <p:cNvSpPr/>
-          <p:nvPr/>
-        </p:nvSpPr>
-        <p:spPr>
-          <a:xfrm>
-            <a:off x="1005840" y="3383280"/>
-            <a:ext cx="2651760" cy="548640"/>
-          </a:xfrm>
-          <a:prstGeom prst="rect">
-            <a:avLst/>
-          </a:prstGeom>
-          <a:noFill/>
-          <a:ln/>
-        </p:spPr>
-        <p:txBody>
-          <a:bodyPr wrap="square" rtlCol="0" anchor="ctr"/>
-          <a:lstStyle/>
-          <a:p>
-            <a:pPr indent="0" marL="0">
-              <a:buNone/>
-            </a:pPr>
-            <a:r>
-              <a:rPr lang="en-US" sz="2100" b="1" dirty="0">
-                <a:solidFill>
-                  <a:srgbClr val="1A1A1A"/>
-                </a:solidFill>
-                <a:latin typeface="Cambria" pitchFamily="34" charset="0"/>
-                <a:ea typeface="Cambria" pitchFamily="34" charset="-122"/>
-                <a:cs typeface="Cambria" pitchFamily="34" charset="-120"/>
-              </a:rPr>
-              <a:t>Lecture / demo</a:t>
-            </a:r>
-            <a:endParaRPr lang="en-US" sz="2100" dirty="0"/>
-          </a:p>
-        </p:txBody>
-      </p:sp>
-      <p:sp>
-        <p:nvSpPr>
-          <p:cNvPr id="7" name="Text 5"/>
-          <p:cNvSpPr/>
-          <p:nvPr/>
-        </p:nvSpPr>
-        <p:spPr>
-          <a:xfrm>
-            <a:off x="1005840" y="3977640"/>
-            <a:ext cx="2651760" cy="1371600"/>
+            <a:srgbClr val="3F6F5F"/>
+          </a:solidFill>
+          <a:ln/>
+        </p:spPr>
+      </p:sp>
+      <p:sp>
+        <p:nvSpPr>
+          <p:cNvPr id="8" name="Text 6"/>
+          <p:cNvSpPr/>
+          <p:nvPr/>
+        </p:nvSpPr>
+        <p:spPr>
+          <a:xfrm>
+            <a:off x="1097280" y="3257550"/>
+            <a:ext cx="10607040" cy="1017270"/>
           </a:xfrm>
           <a:prstGeom prst="rect">
             <a:avLst/>
@@ -6162,12 +8959,12 @@
           <a:p>
             <a:pPr indent="0" marL="0">
               <a:lnSpc>
-                <a:spcPct val="115000"/>
+                <a:spcPct val="112000"/>
               </a:lnSpc>
               <a:buNone/>
             </a:pPr>
             <a:r>
-              <a:rPr lang="en-US" sz="1500" dirty="0">
+              <a:rPr lang="en-US" sz="1650" dirty="0">
                 <a:solidFill>
                   <a:srgbClr val="1A1A1A"/>
                 </a:solidFill>
@@ -6175,33 +8972,11 @@
                 <a:ea typeface="Calibri" pitchFamily="34" charset="-122"/>
                 <a:cs typeface="Calibri" pitchFamily="34" charset="-120"/>
               </a:rPr>
-              <a:t>Advanced counting: baselines, keyness, and the shuffle test</a:t>
-            </a:r>
-            <a:endParaRPr lang="en-US" sz="1500" dirty="0"/>
-          </a:p>
-        </p:txBody>
-      </p:sp>
-      <p:sp>
-        <p:nvSpPr>
-          <p:cNvPr id="8" name="Shape 6"/>
-          <p:cNvSpPr/>
-          <p:nvPr/>
-        </p:nvSpPr>
-        <p:spPr>
-          <a:xfrm>
-            <a:off x="4526280" y="2194560"/>
-            <a:ext cx="3383280" cy="3291840"/>
-          </a:xfrm>
-          <a:prstGeom prst="roundRect">
-            <a:avLst>
-              <a:gd name="adj" fmla="val 3333"/>
-            </a:avLst>
-          </a:prstGeom>
-          <a:solidFill>
-            <a:srgbClr val="F4EEE8"/>
-          </a:solidFill>
-          <a:ln/>
-        </p:spPr>
+              <a:t>It found the loudest differences, verse against prose and a divide inside the sonnets, not the three books you had in mind. Clustering answers its own question.</a:t>
+            </a:r>
+            <a:endParaRPr lang="en-US" sz="1650" dirty="0"/>
+          </a:p>
+        </p:txBody>
       </p:sp>
       <p:sp>
         <p:nvSpPr>
@@ -6211,14 +8986,14 @@
         </p:nvSpPr>
         <p:spPr>
           <a:xfrm>
-            <a:off x="4937760" y="2606040"/>
-            <a:ext cx="548640" cy="548640"/>
+            <a:off x="640080" y="4366260"/>
+            <a:ext cx="201168" cy="201168"/>
           </a:xfrm>
           <a:prstGeom prst="ellipse">
             <a:avLst/>
           </a:prstGeom>
           <a:solidFill>
-            <a:srgbClr val="3F6F5F"/>
+            <a:srgbClr val="B9852F"/>
           </a:solidFill>
           <a:ln/>
         </p:spPr>
@@ -6231,47 +9006,8 @@
         </p:nvSpPr>
         <p:spPr>
           <a:xfrm>
-            <a:off x="4892040" y="3383280"/>
-            <a:ext cx="2651760" cy="548640"/>
-          </a:xfrm>
-          <a:prstGeom prst="rect">
-            <a:avLst/>
-          </a:prstGeom>
-          <a:noFill/>
-          <a:ln/>
-        </p:spPr>
-        <p:txBody>
-          <a:bodyPr wrap="square" rtlCol="0" anchor="ctr"/>
-          <a:lstStyle/>
-          <a:p>
-            <a:pPr indent="0" marL="0">
-              <a:buNone/>
-            </a:pPr>
-            <a:r>
-              <a:rPr lang="en-US" sz="2100" b="1" dirty="0">
-                <a:solidFill>
-                  <a:srgbClr val="1A1A1A"/>
-                </a:solidFill>
-                <a:latin typeface="Cambria" pitchFamily="34" charset="0"/>
-                <a:ea typeface="Cambria" pitchFamily="34" charset="-122"/>
-                <a:cs typeface="Cambria" pitchFamily="34" charset="-120"/>
-              </a:rPr>
-              <a:t>Workshop</a:t>
-            </a:r>
-            <a:endParaRPr lang="en-US" sz="2100" dirty="0"/>
-          </a:p>
-        </p:txBody>
-      </p:sp>
-      <p:sp>
-        <p:nvSpPr>
-          <p:cNvPr id="11" name="Text 9"/>
-          <p:cNvSpPr/>
-          <p:nvPr/>
-        </p:nvSpPr>
-        <p:spPr>
-          <a:xfrm>
-            <a:off x="4892040" y="3977640"/>
-            <a:ext cx="2651760" cy="1371600"/>
+            <a:off x="1097280" y="4274820"/>
+            <a:ext cx="10607040" cy="1017270"/>
           </a:xfrm>
           <a:prstGeom prst="rect">
             <a:avLst/>
@@ -6287,12 +9023,12 @@
           <a:p>
             <a:pPr indent="0" marL="0">
               <a:lnSpc>
-                <a:spcPct val="115000"/>
+                <a:spcPct val="112000"/>
               </a:lnSpc>
               <a:buNone/>
             </a:pPr>
             <a:r>
-              <a:rPr lang="en-US" sz="1500" dirty="0">
+              <a:rPr lang="en-US" sz="1650" dirty="0">
                 <a:solidFill>
                   <a:srgbClr val="1A1A1A"/>
                 </a:solidFill>
@@ -6300,103 +9036,42 @@
                 <a:ea typeface="Calibri" pitchFamily="34" charset="-122"/>
                 <a:cs typeface="Calibri" pitchFamily="34" charset="-120"/>
               </a:rPr>
-              <a:t>Build hands-on on your own data.</a:t>
-            </a:r>
-            <a:endParaRPr lang="en-US" sz="1500" dirty="0"/>
-          </a:p>
-        </p:txBody>
-      </p:sp>
-      <p:sp>
-        <p:nvSpPr>
-          <p:cNvPr id="12" name="Shape 10"/>
-          <p:cNvSpPr/>
-          <p:nvPr/>
-        </p:nvSpPr>
-        <p:spPr>
-          <a:xfrm>
-            <a:off x="8412480" y="2194560"/>
-            <a:ext cx="3383280" cy="3291840"/>
-          </a:xfrm>
-          <a:prstGeom prst="roundRect">
-            <a:avLst>
-              <a:gd name="adj" fmla="val 3333"/>
-            </a:avLst>
-          </a:prstGeom>
-          <a:solidFill>
-            <a:srgbClr val="F4EEE8"/>
-          </a:solidFill>
-          <a:ln/>
-        </p:spPr>
-      </p:sp>
-      <p:sp>
-        <p:nvSpPr>
-          <p:cNvPr id="13" name="Shape 11"/>
-          <p:cNvSpPr/>
-          <p:nvPr/>
-        </p:nvSpPr>
-        <p:spPr>
-          <a:xfrm>
-            <a:off x="8823960" y="2606040"/>
-            <a:ext cx="548640" cy="548640"/>
+              <a:t>The ablation: on raw counts, k-means returns one giant blob. The everywhere-words dominate the geometry; tf-idf is what makes the space navigable.</a:t>
+            </a:r>
+            <a:endParaRPr lang="en-US" sz="1650" dirty="0"/>
+          </a:p>
+        </p:txBody>
+      </p:sp>
+      <p:sp>
+        <p:nvSpPr>
+          <p:cNvPr id="11" name="Shape 9"/>
+          <p:cNvSpPr/>
+          <p:nvPr/>
+        </p:nvSpPr>
+        <p:spPr>
+          <a:xfrm>
+            <a:off x="640080" y="5383530"/>
+            <a:ext cx="201168" cy="201168"/>
           </a:xfrm>
           <a:prstGeom prst="ellipse">
             <a:avLst/>
           </a:prstGeom>
           <a:solidFill>
-            <a:srgbClr val="B9852F"/>
-          </a:solidFill>
-          <a:ln/>
-        </p:spPr>
-      </p:sp>
-      <p:sp>
-        <p:nvSpPr>
-          <p:cNvPr id="14" name="Text 12"/>
-          <p:cNvSpPr/>
-          <p:nvPr/>
-        </p:nvSpPr>
-        <p:spPr>
-          <a:xfrm>
-            <a:off x="8778240" y="3383280"/>
-            <a:ext cx="2651760" cy="548640"/>
-          </a:xfrm>
-          <a:prstGeom prst="rect">
-            <a:avLst/>
-          </a:prstGeom>
-          <a:noFill/>
-          <a:ln/>
-        </p:spPr>
-        <p:txBody>
-          <a:bodyPr wrap="square" rtlCol="0" anchor="ctr"/>
-          <a:lstStyle/>
-          <a:p>
-            <a:pPr indent="0" marL="0">
-              <a:buNone/>
-            </a:pPr>
-            <a:r>
-              <a:rPr lang="en-US" sz="2100" b="1" dirty="0">
-                <a:solidFill>
-                  <a:srgbClr val="1A1A1A"/>
-                </a:solidFill>
-                <a:latin typeface="Cambria" pitchFamily="34" charset="0"/>
-                <a:ea typeface="Cambria" pitchFamily="34" charset="-122"/>
-                <a:cs typeface="Cambria" pitchFamily="34" charset="-120"/>
-              </a:rPr>
-              <a:t>Discussion</a:t>
-            </a:r>
-            <a:endParaRPr lang="en-US" sz="2100" dirty="0"/>
-          </a:p>
-        </p:txBody>
-      </p:sp>
-      <p:sp>
-        <p:nvSpPr>
-          <p:cNvPr id="15" name="Text 13"/>
-          <p:cNvSpPr/>
-          <p:nvPr/>
-        </p:nvSpPr>
-        <p:spPr>
-          <a:xfrm>
-            <a:off x="8778240" y="3977640"/>
-            <a:ext cx="2651760" cy="1371600"/>
+            <a:srgbClr val="7A3B2E"/>
+          </a:solidFill>
+          <a:ln/>
+        </p:spPr>
+      </p:sp>
+      <p:sp>
+        <p:nvSpPr>
+          <p:cNvPr id="12" name="Text 10"/>
+          <p:cNvSpPr/>
+          <p:nvPr/>
+        </p:nvSpPr>
+        <p:spPr>
+          <a:xfrm>
+            <a:off x="1097280" y="5292090"/>
+            <a:ext cx="10607040" cy="1017270"/>
           </a:xfrm>
           <a:prstGeom prst="rect">
             <a:avLst/>
@@ -6412,12 +9087,12 @@
           <a:p>
             <a:pPr indent="0" marL="0">
               <a:lnSpc>
-                <a:spcPct val="115000"/>
+                <a:spcPct val="112000"/>
               </a:lnSpc>
               <a:buNone/>
             </a:pPr>
             <a:r>
-              <a:rPr lang="en-US" sz="1500" dirty="0">
+              <a:rPr lang="en-US" sz="1650" dirty="0">
                 <a:solidFill>
                   <a:srgbClr val="1A1A1A"/>
                 </a:solidFill>
@@ -6425,9 +9100,9 @@
                 <a:ea typeface="Calibri" pitchFamily="34" charset="-122"/>
                 <a:cs typeface="Calibri" pitchFamily="34" charset="-120"/>
               </a:rPr>
-              <a:t>Interrogate the study, debate it, or critique each other's work.</a:t>
-            </a:r>
-            <a:endParaRPr lang="en-US" sz="1500" dirty="0"/>
+              <a:t>Novels only, two piles: about three in four paragraphs sort by author. Real signal, not a clean one. Name what separated before you claim it.</a:t>
+            </a:r>
+            <a:endParaRPr lang="en-US" sz="1650" dirty="0"/>
           </a:p>
         </p:txBody>
       </p:sp>
@@ -6465,14 +9140,34 @@
       </p:grpSpPr>
       <p:sp>
         <p:nvSpPr>
-          <p:cNvPr id="2" name="Text 0"/>
+          <p:cNvPr id="2" name="Shape 0"/>
+          <p:cNvSpPr/>
+          <p:nvPr/>
+        </p:nvSpPr>
+        <p:spPr>
+          <a:xfrm>
+            <a:off x="0" y="0"/>
+            <a:ext cx="164592" cy="6858000"/>
+          </a:xfrm>
+          <a:prstGeom prst="rect">
+            <a:avLst/>
+          </a:prstGeom>
+          <a:solidFill>
+            <a:srgbClr val="B9852F"/>
+          </a:solidFill>
+          <a:ln/>
+        </p:spPr>
+      </p:sp>
+      <p:sp>
+        <p:nvSpPr>
+          <p:cNvPr id="3" name="Text 1"/>
           <p:cNvSpPr/>
           <p:nvPr/>
         </p:nvSpPr>
         <p:spPr>
           <a:xfrm>
             <a:off x="640080" y="640080"/>
-            <a:ext cx="10058400" cy="731520"/>
+            <a:ext cx="10058400" cy="320040"/>
           </a:xfrm>
           <a:prstGeom prst="rect">
             <a:avLst/>
@@ -6482,6 +9177,47 @@
         </p:spPr>
         <p:txBody>
           <a:bodyPr wrap="square" rtlCol="0" anchor="ctr"/>
+          <a:lstStyle/>
+          <a:p>
+            <a:pPr indent="0" marL="0">
+              <a:buNone/>
+            </a:pPr>
+            <a:r>
+              <a:rPr lang="en-US" sz="1200" b="1" spc="300" kern="0" dirty="0">
+                <a:solidFill>
+                  <a:srgbClr val="B9852F"/>
+                </a:solidFill>
+                <a:latin typeface="Calibri" pitchFamily="34" charset="0"/>
+                <a:ea typeface="Calibri" pitchFamily="34" charset="-122"/>
+                <a:cs typeface="Calibri" pitchFamily="34" charset="-120"/>
+              </a:rPr>
+              <a:t>WEEK 2 · KEY POINTS</a:t>
+            </a:r>
+            <a:endParaRPr lang="en-US" sz="1200" dirty="0"/>
+          </a:p>
+        </p:txBody>
+      </p:sp>
+      <p:sp>
+        <p:nvSpPr>
+          <p:cNvPr id="4" name="Text 2"/>
+          <p:cNvSpPr/>
+          <p:nvPr/>
+        </p:nvSpPr>
+        <p:spPr>
+          <a:xfrm>
+            <a:off x="640080" y="1005840"/>
+            <a:ext cx="10881360" cy="914400"/>
+          </a:xfrm>
+          <a:prstGeom prst="rect">
+            <a:avLst/>
+          </a:prstGeom>
+          <a:noFill/>
+          <a:ln/>
+        </p:spPr>
+        <p:txBody>
+          <a:bodyPr wrap="square" rtlCol="0" anchor="t">
+            <a:spAutoFit/>
+          </a:bodyPr>
           <a:lstStyle/>
           <a:p>
             <a:pPr indent="0" marL="0">
@@ -6496,7 +9232,7 @@
                 <a:ea typeface="Cambria" pitchFamily="34" charset="-122"/>
                 <a:cs typeface="Cambria" pitchFamily="34" charset="-120"/>
               </a:rPr>
-              <a:t>The session</a:t>
+              <a:t>Where counting fails</a:t>
             </a:r>
             <a:endParaRPr lang="en-US" sz="3000" dirty="0"/>
           </a:p>
@@ -6504,19 +9240,17 @@
       </p:sp>
       <p:sp>
         <p:nvSpPr>
-          <p:cNvPr id="3" name="Shape 1"/>
-          <p:cNvSpPr/>
-          <p:nvPr/>
-        </p:nvSpPr>
-        <p:spPr>
-          <a:xfrm>
-            <a:off x="640080" y="1572768"/>
-            <a:ext cx="868680" cy="338328"/>
-          </a:xfrm>
-          <a:prstGeom prst="roundRect">
-            <a:avLst>
-              <a:gd name="adj" fmla="val 16216"/>
-            </a:avLst>
+          <p:cNvPr id="5" name="Shape 3"/>
+          <p:cNvSpPr/>
+          <p:nvPr/>
+        </p:nvSpPr>
+        <p:spPr>
+          <a:xfrm>
+            <a:off x="640080" y="2331720"/>
+            <a:ext cx="201168" cy="201168"/>
+          </a:xfrm>
+          <a:prstGeom prst="ellipse">
+            <a:avLst/>
           </a:prstGeom>
           <a:solidFill>
             <a:srgbClr val="7A3B2E"/>
@@ -6526,71 +9260,99 @@
       </p:sp>
       <p:sp>
         <p:nvSpPr>
-          <p:cNvPr id="4" name="Text 2"/>
-          <p:cNvSpPr/>
-          <p:nvPr/>
-        </p:nvSpPr>
-        <p:spPr>
-          <a:xfrm>
-            <a:off x="640080" y="1572768"/>
-            <a:ext cx="868680" cy="338328"/>
-          </a:xfrm>
-          <a:prstGeom prst="rect">
-            <a:avLst/>
-          </a:prstGeom>
-          <a:noFill/>
-          <a:ln/>
-        </p:spPr>
-        <p:txBody>
-          <a:bodyPr wrap="square" rtlCol="0" anchor="ctr"/>
-          <a:lstStyle/>
-          <a:p>
-            <a:pPr algn="ctr" indent="0" marL="0">
-              <a:buNone/>
-            </a:pPr>
-            <a:r>
-              <a:rPr lang="en-US" sz="1100" b="1" dirty="0">
-                <a:solidFill>
-                  <a:srgbClr val="FFFFFF"/>
+          <p:cNvPr id="6" name="Text 4"/>
+          <p:cNvSpPr/>
+          <p:nvPr/>
+        </p:nvSpPr>
+        <p:spPr>
+          <a:xfrm>
+            <a:off x="1097280" y="2240280"/>
+            <a:ext cx="10607040" cy="1017270"/>
+          </a:xfrm>
+          <a:prstGeom prst="rect">
+            <a:avLst/>
+          </a:prstGeom>
+          <a:noFill/>
+          <a:ln/>
+        </p:spPr>
+        <p:txBody>
+          <a:bodyPr wrap="square" rtlCol="0" anchor="t">
+            <a:spAutoFit/>
+          </a:bodyPr>
+          <a:lstStyle/>
+          <a:p>
+            <a:pPr indent="0" marL="0">
+              <a:lnSpc>
+                <a:spcPct val="112000"/>
+              </a:lnSpc>
+              <a:buNone/>
+            </a:pPr>
+            <a:r>
+              <a:rPr lang="en-US" sz="1650" dirty="0">
+                <a:solidFill>
+                  <a:srgbClr val="1A1A1A"/>
                 </a:solidFill>
                 <a:latin typeface="Calibri" pitchFamily="34" charset="0"/>
                 <a:ea typeface="Calibri" pitchFamily="34" charset="-122"/>
                 <a:cs typeface="Calibri" pitchFamily="34" charset="-120"/>
               </a:rPr>
-              <a:t>0:00</a:t>
-            </a:r>
-            <a:endParaRPr lang="en-US" sz="1100" dirty="0"/>
-          </a:p>
-        </p:txBody>
-      </p:sp>
-      <p:sp>
-        <p:nvSpPr>
-          <p:cNvPr id="5" name="Text 3"/>
-          <p:cNvSpPr/>
-          <p:nvPr/>
-        </p:nvSpPr>
-        <p:spPr>
-          <a:xfrm>
-            <a:off x="1691640" y="1554480"/>
-            <a:ext cx="9646920" cy="448056"/>
-          </a:xfrm>
-          <a:prstGeom prst="rect">
-            <a:avLst/>
-          </a:prstGeom>
-          <a:noFill/>
-          <a:ln/>
-        </p:spPr>
-        <p:txBody>
-          <a:bodyPr wrap="square" rtlCol="0" anchor="ctr">
+              <a:t>Negation: "I am not happy" adds one to the happy count. Bigrams catch a little of this; most context is invisible to a counter.</a:t>
+            </a:r>
+            <a:endParaRPr lang="en-US" sz="1650" dirty="0"/>
+          </a:p>
+        </p:txBody>
+      </p:sp>
+      <p:sp>
+        <p:nvSpPr>
+          <p:cNvPr id="7" name="Shape 5"/>
+          <p:cNvSpPr/>
+          <p:nvPr/>
+        </p:nvSpPr>
+        <p:spPr>
+          <a:xfrm>
+            <a:off x="640080" y="3348990"/>
+            <a:ext cx="201168" cy="201168"/>
+          </a:xfrm>
+          <a:prstGeom prst="ellipse">
+            <a:avLst/>
+          </a:prstGeom>
+          <a:solidFill>
+            <a:srgbClr val="3F6F5F"/>
+          </a:solidFill>
+          <a:ln/>
+        </p:spPr>
+      </p:sp>
+      <p:sp>
+        <p:nvSpPr>
+          <p:cNvPr id="8" name="Text 6"/>
+          <p:cNvSpPr/>
+          <p:nvPr/>
+        </p:nvSpPr>
+        <p:spPr>
+          <a:xfrm>
+            <a:off x="1097280" y="3257550"/>
+            <a:ext cx="10607040" cy="1017270"/>
+          </a:xfrm>
+          <a:prstGeom prst="rect">
+            <a:avLst/>
+          </a:prstGeom>
+          <a:noFill/>
+          <a:ln/>
+        </p:spPr>
+        <p:txBody>
+          <a:bodyPr wrap="square" rtlCol="0" anchor="t">
             <a:spAutoFit/>
           </a:bodyPr>
           <a:lstStyle/>
           <a:p>
             <a:pPr indent="0" marL="0">
-              <a:buNone/>
-            </a:pPr>
-            <a:r>
-              <a:rPr lang="en-US" sz="1100" dirty="0">
+              <a:lnSpc>
+                <a:spcPct val="112000"/>
+              </a:lnSpc>
+              <a:buNone/>
+            </a:pPr>
+            <a:r>
+              <a:rPr lang="en-US" sz="1650" dirty="0">
                 <a:solidFill>
                   <a:srgbClr val="1A1A1A"/>
                 </a:solidFill>
@@ -6598,101 +9360,127 @@
                 <a:ea typeface="Calibri" pitchFamily="34" charset="-122"/>
                 <a:cs typeface="Calibri" pitchFamily="34" charset="-120"/>
               </a:rPr>
-              <a:t>Warm-up: favorite Pudding pieces from the sketch, what did yours count, and one choice its makers made. Then retrieval.</a:t>
-            </a:r>
-            <a:endParaRPr lang="en-US" sz="1100" dirty="0"/>
-          </a:p>
-        </p:txBody>
-      </p:sp>
-      <p:sp>
-        <p:nvSpPr>
-          <p:cNvPr id="6" name="Shape 4"/>
-          <p:cNvSpPr/>
-          <p:nvPr/>
-        </p:nvSpPr>
-        <p:spPr>
-          <a:xfrm>
-            <a:off x="640080" y="2020824"/>
-            <a:ext cx="868680" cy="338328"/>
-          </a:xfrm>
-          <a:prstGeom prst="roundRect">
-            <a:avLst>
-              <a:gd name="adj" fmla="val 16216"/>
-            </a:avLst>
-          </a:prstGeom>
-          <a:solidFill>
-            <a:srgbClr val="7A3B2E"/>
-          </a:solidFill>
-          <a:ln/>
-        </p:spPr>
-      </p:sp>
-      <p:sp>
-        <p:nvSpPr>
-          <p:cNvPr id="7" name="Text 5"/>
-          <p:cNvSpPr/>
-          <p:nvPr/>
-        </p:nvSpPr>
-        <p:spPr>
-          <a:xfrm>
-            <a:off x="640080" y="2020824"/>
-            <a:ext cx="868680" cy="338328"/>
-          </a:xfrm>
-          <a:prstGeom prst="rect">
-            <a:avLst/>
-          </a:prstGeom>
-          <a:noFill/>
-          <a:ln/>
-        </p:spPr>
-        <p:txBody>
-          <a:bodyPr wrap="square" rtlCol="0" anchor="ctr"/>
-          <a:lstStyle/>
-          <a:p>
-            <a:pPr algn="ctr" indent="0" marL="0">
-              <a:buNone/>
-            </a:pPr>
-            <a:r>
-              <a:rPr lang="en-US" sz="1100" b="1" dirty="0">
-                <a:solidFill>
-                  <a:srgbClr val="FFFFFF"/>
+              <a:t>The stemmer is rules without a dictionary: universal, university, and universe all become "univers".</a:t>
+            </a:r>
+            <a:endParaRPr lang="en-US" sz="1650" dirty="0"/>
+          </a:p>
+        </p:txBody>
+      </p:sp>
+      <p:sp>
+        <p:nvSpPr>
+          <p:cNvPr id="9" name="Shape 7"/>
+          <p:cNvSpPr/>
+          <p:nvPr/>
+        </p:nvSpPr>
+        <p:spPr>
+          <a:xfrm>
+            <a:off x="640080" y="4366260"/>
+            <a:ext cx="201168" cy="201168"/>
+          </a:xfrm>
+          <a:prstGeom prst="ellipse">
+            <a:avLst/>
+          </a:prstGeom>
+          <a:solidFill>
+            <a:srgbClr val="B9852F"/>
+          </a:solidFill>
+          <a:ln/>
+        </p:spPr>
+      </p:sp>
+      <p:sp>
+        <p:nvSpPr>
+          <p:cNvPr id="10" name="Text 8"/>
+          <p:cNvSpPr/>
+          <p:nvPr/>
+        </p:nvSpPr>
+        <p:spPr>
+          <a:xfrm>
+            <a:off x="1097280" y="4274820"/>
+            <a:ext cx="10607040" cy="1017270"/>
+          </a:xfrm>
+          <a:prstGeom prst="rect">
+            <a:avLst/>
+          </a:prstGeom>
+          <a:noFill/>
+          <a:ln/>
+        </p:spPr>
+        <p:txBody>
+          <a:bodyPr wrap="square" rtlCol="0" anchor="t">
+            <a:spAutoFit/>
+          </a:bodyPr>
+          <a:lstStyle/>
+          <a:p>
+            <a:pPr indent="0" marL="0">
+              <a:lnSpc>
+                <a:spcPct val="112000"/>
+              </a:lnSpc>
+              <a:buNone/>
+            </a:pPr>
+            <a:r>
+              <a:rPr lang="en-US" sz="1650" dirty="0">
+                <a:solidFill>
+                  <a:srgbClr val="1A1A1A"/>
                 </a:solidFill>
                 <a:latin typeface="Calibri" pitchFamily="34" charset="0"/>
                 <a:ea typeface="Calibri" pitchFamily="34" charset="-122"/>
                 <a:cs typeface="Calibri" pitchFamily="34" charset="-120"/>
               </a:rPr>
-              <a:t>0:05</a:t>
-            </a:r>
-            <a:endParaRPr lang="en-US" sz="1100" dirty="0"/>
-          </a:p>
-        </p:txBody>
-      </p:sp>
-      <p:sp>
-        <p:nvSpPr>
-          <p:cNvPr id="8" name="Text 6"/>
-          <p:cNvSpPr/>
-          <p:nvPr/>
-        </p:nvSpPr>
-        <p:spPr>
-          <a:xfrm>
-            <a:off x="1691640" y="2002536"/>
-            <a:ext cx="9646920" cy="448056"/>
-          </a:xfrm>
-          <a:prstGeom prst="rect">
-            <a:avLst/>
-          </a:prstGeom>
-          <a:noFill/>
-          <a:ln/>
-        </p:spPr>
-        <p:txBody>
-          <a:bodyPr wrap="square" rtlCol="0" anchor="ctr">
+              <a:t>The lemmatizer needs the part of speech: "saw" is a tool as a noun and the past of see as a verb; told nothing, it guesses.</a:t>
+            </a:r>
+            <a:endParaRPr lang="en-US" sz="1650" dirty="0"/>
+          </a:p>
+        </p:txBody>
+      </p:sp>
+      <p:sp>
+        <p:nvSpPr>
+          <p:cNvPr id="11" name="Shape 9"/>
+          <p:cNvSpPr/>
+          <p:nvPr/>
+        </p:nvSpPr>
+        <p:spPr>
+          <a:xfrm>
+            <a:off x="640080" y="5383530"/>
+            <a:ext cx="201168" cy="201168"/>
+          </a:xfrm>
+          <a:prstGeom prst="ellipse">
+            <a:avLst/>
+          </a:prstGeom>
+          <a:solidFill>
+            <a:srgbClr val="7A3B2E"/>
+          </a:solidFill>
+          <a:ln/>
+        </p:spPr>
+      </p:sp>
+      <p:sp>
+        <p:nvSpPr>
+          <p:cNvPr id="12" name="Text 10"/>
+          <p:cNvSpPr/>
+          <p:nvPr/>
+        </p:nvSpPr>
+        <p:spPr>
+          <a:xfrm>
+            <a:off x="1097280" y="5292090"/>
+            <a:ext cx="10607040" cy="1017270"/>
+          </a:xfrm>
+          <a:prstGeom prst="rect">
+            <a:avLst/>
+          </a:prstGeom>
+          <a:noFill/>
+          <a:ln/>
+        </p:spPr>
+        <p:txBody>
+          <a:bodyPr wrap="square" rtlCol="0" anchor="t">
             <a:spAutoFit/>
           </a:bodyPr>
           <a:lstStyle/>
           <a:p>
             <a:pPr indent="0" marL="0">
-              <a:buNone/>
-            </a:pPr>
-            <a:r>
-              <a:rPr lang="en-US" sz="1100" dirty="0">
+              <a:lnSpc>
+                <a:spcPct val="112000"/>
+              </a:lnSpc>
+              <a:buNone/>
+            </a:pPr>
+            <a:r>
+              <a:rPr lang="en-US" sz="1650" dirty="0">
                 <a:solidFill>
                   <a:srgbClr val="1A1A1A"/>
                 </a:solidFill>
@@ -6700,825 +9488,9 @@
                 <a:ea typeface="Calibri" pitchFamily="34" charset="-122"/>
                 <a:cs typeface="Calibri" pitchFamily="34" charset="-120"/>
               </a:rPr>
-              <a:t>The trial: claim, objection, re-run-without-fiction rebuttal, "interpret with care." One named choice is the chart: the hockey-stick shape depends on its y-axis and smoothing.</a:t>
-            </a:r>
-            <a:endParaRPr lang="en-US" sz="1100" dirty="0"/>
-          </a:p>
-        </p:txBody>
-      </p:sp>
-      <p:sp>
-        <p:nvSpPr>
-          <p:cNvPr id="9" name="Shape 7"/>
-          <p:cNvSpPr/>
-          <p:nvPr/>
-        </p:nvSpPr>
-        <p:spPr>
-          <a:xfrm>
-            <a:off x="640080" y="2468880"/>
-            <a:ext cx="868680" cy="338328"/>
-          </a:xfrm>
-          <a:prstGeom prst="roundRect">
-            <a:avLst>
-              <a:gd name="adj" fmla="val 16216"/>
-            </a:avLst>
-          </a:prstGeom>
-          <a:solidFill>
-            <a:srgbClr val="7A3B2E"/>
-          </a:solidFill>
-          <a:ln/>
-        </p:spPr>
-      </p:sp>
-      <p:sp>
-        <p:nvSpPr>
-          <p:cNvPr id="10" name="Text 8"/>
-          <p:cNvSpPr/>
-          <p:nvPr/>
-        </p:nvSpPr>
-        <p:spPr>
-          <a:xfrm>
-            <a:off x="640080" y="2468880"/>
-            <a:ext cx="868680" cy="338328"/>
-          </a:xfrm>
-          <a:prstGeom prst="rect">
-            <a:avLst/>
-          </a:prstGeom>
-          <a:noFill/>
-          <a:ln/>
-        </p:spPr>
-        <p:txBody>
-          <a:bodyPr wrap="square" rtlCol="0" anchor="ctr"/>
-          <a:lstStyle/>
-          <a:p>
-            <a:pPr algn="ctr" indent="0" marL="0">
-              <a:buNone/>
-            </a:pPr>
-            <a:r>
-              <a:rPr lang="en-US" sz="1100" b="1" dirty="0">
-                <a:solidFill>
-                  <a:srgbClr val="FFFFFF"/>
-                </a:solidFill>
-                <a:latin typeface="Calibri" pitchFamily="34" charset="0"/>
-                <a:ea typeface="Calibri" pitchFamily="34" charset="-122"/>
-                <a:cs typeface="Calibri" pitchFamily="34" charset="-120"/>
-              </a:rPr>
-              <a:t>0:25</a:t>
-            </a:r>
-            <a:endParaRPr lang="en-US" sz="1100" dirty="0"/>
-          </a:p>
-        </p:txBody>
-      </p:sp>
-      <p:sp>
-        <p:nvSpPr>
-          <p:cNvPr id="11" name="Text 9"/>
-          <p:cNvSpPr/>
-          <p:nvPr/>
-        </p:nvSpPr>
-        <p:spPr>
-          <a:xfrm>
-            <a:off x="1691640" y="2450592"/>
-            <a:ext cx="9646920" cy="448056"/>
-          </a:xfrm>
-          <a:prstGeom prst="rect">
-            <a:avLst/>
-          </a:prstGeom>
-          <a:noFill/>
-          <a:ln/>
-        </p:spPr>
-        <p:txBody>
-          <a:bodyPr wrap="square" rtlCol="0" anchor="ctr">
-            <a:spAutoFit/>
-          </a:bodyPr>
-          <a:lstStyle/>
-          <a:p>
-            <a:pPr indent="0" marL="0">
-              <a:buNone/>
-            </a:pPr>
-            <a:r>
-              <a:rPr lang="en-US" sz="1100" dirty="0">
-                <a:solidFill>
-                  <a:srgbClr val="1A1A1A"/>
-                </a:solidFill>
-                <a:latin typeface="Calibri" pitchFamily="34" charset="0"/>
-                <a:ea typeface="Calibri" pitchFamily="34" charset="-122"/>
-                <a:cs typeface="Calibri" pitchFamily="34" charset="-120"/>
-              </a:rPr>
-              <a:t>A brief demonstration before the complications: the words one artist uses far more than everyone else, a signature vocabulary measured against a pop baseline.</a:t>
-            </a:r>
-            <a:endParaRPr lang="en-US" sz="1100" dirty="0"/>
-          </a:p>
-        </p:txBody>
-      </p:sp>
-      <p:sp>
-        <p:nvSpPr>
-          <p:cNvPr id="12" name="Shape 10"/>
-          <p:cNvSpPr/>
-          <p:nvPr/>
-        </p:nvSpPr>
-        <p:spPr>
-          <a:xfrm>
-            <a:off x="640080" y="2916936"/>
-            <a:ext cx="868680" cy="338328"/>
-          </a:xfrm>
-          <a:prstGeom prst="roundRect">
-            <a:avLst>
-              <a:gd name="adj" fmla="val 16216"/>
-            </a:avLst>
-          </a:prstGeom>
-          <a:solidFill>
-            <a:srgbClr val="7A3B2E"/>
-          </a:solidFill>
-          <a:ln/>
-        </p:spPr>
-      </p:sp>
-      <p:sp>
-        <p:nvSpPr>
-          <p:cNvPr id="13" name="Text 11"/>
-          <p:cNvSpPr/>
-          <p:nvPr/>
-        </p:nvSpPr>
-        <p:spPr>
-          <a:xfrm>
-            <a:off x="640080" y="2916936"/>
-            <a:ext cx="868680" cy="338328"/>
-          </a:xfrm>
-          <a:prstGeom prst="rect">
-            <a:avLst/>
-          </a:prstGeom>
-          <a:noFill/>
-          <a:ln/>
-        </p:spPr>
-        <p:txBody>
-          <a:bodyPr wrap="square" rtlCol="0" anchor="ctr"/>
-          <a:lstStyle/>
-          <a:p>
-            <a:pPr algn="ctr" indent="0" marL="0">
-              <a:buNone/>
-            </a:pPr>
-            <a:r>
-              <a:rPr lang="en-US" sz="1100" b="1" dirty="0">
-                <a:solidFill>
-                  <a:srgbClr val="FFFFFF"/>
-                </a:solidFill>
-                <a:latin typeface="Calibri" pitchFamily="34" charset="0"/>
-                <a:ea typeface="Calibri" pitchFamily="34" charset="-122"/>
-                <a:cs typeface="Calibri" pitchFamily="34" charset="-120"/>
-              </a:rPr>
-              <a:t>0:30</a:t>
-            </a:r>
-            <a:endParaRPr lang="en-US" sz="1100" dirty="0"/>
-          </a:p>
-        </p:txBody>
-      </p:sp>
-      <p:sp>
-        <p:nvSpPr>
-          <p:cNvPr id="14" name="Text 12"/>
-          <p:cNvSpPr/>
-          <p:nvPr/>
-        </p:nvSpPr>
-        <p:spPr>
-          <a:xfrm>
-            <a:off x="1691640" y="2898648"/>
-            <a:ext cx="9646920" cy="448056"/>
-          </a:xfrm>
-          <a:prstGeom prst="rect">
-            <a:avLst/>
-          </a:prstGeom>
-          <a:noFill/>
-          <a:ln/>
-        </p:spPr>
-        <p:txBody>
-          <a:bodyPr wrap="square" rtlCol="0" anchor="ctr">
-            <a:spAutoFit/>
-          </a:bodyPr>
-          <a:lstStyle/>
-          <a:p>
-            <a:pPr indent="0" marL="0">
-              <a:buNone/>
-            </a:pPr>
-            <a:r>
-              <a:rPr lang="en-US" sz="1100" dirty="0">
-                <a:solidFill>
-                  <a:srgbClr val="1A1A1A"/>
-                </a:solidFill>
-                <a:latin typeface="Calibri" pitchFamily="34" charset="0"/>
-                <a:ea typeface="Calibri" pitchFamily="34" charset="-122"/>
-                <a:cs typeface="Calibri" pitchFamily="34" charset="-120"/>
-              </a:rPr>
-              <a:t>Hand-built bag-of-words: two authors, highlighters, argue about merging run/running. Counting requires defining.</a:t>
-            </a:r>
-            <a:endParaRPr lang="en-US" sz="1100" dirty="0"/>
-          </a:p>
-        </p:txBody>
-      </p:sp>
-      <p:sp>
-        <p:nvSpPr>
-          <p:cNvPr id="15" name="Shape 13"/>
-          <p:cNvSpPr/>
-          <p:nvPr/>
-        </p:nvSpPr>
-        <p:spPr>
-          <a:xfrm>
-            <a:off x="640080" y="3364992"/>
-            <a:ext cx="868680" cy="338328"/>
-          </a:xfrm>
-          <a:prstGeom prst="roundRect">
-            <a:avLst>
-              <a:gd name="adj" fmla="val 16216"/>
-            </a:avLst>
-          </a:prstGeom>
-          <a:solidFill>
-            <a:srgbClr val="7A3B2E"/>
-          </a:solidFill>
-          <a:ln/>
-        </p:spPr>
-      </p:sp>
-      <p:sp>
-        <p:nvSpPr>
-          <p:cNvPr id="16" name="Text 14"/>
-          <p:cNvSpPr/>
-          <p:nvPr/>
-        </p:nvSpPr>
-        <p:spPr>
-          <a:xfrm>
-            <a:off x="640080" y="3364992"/>
-            <a:ext cx="868680" cy="338328"/>
-          </a:xfrm>
-          <a:prstGeom prst="rect">
-            <a:avLst/>
-          </a:prstGeom>
-          <a:noFill/>
-          <a:ln/>
-        </p:spPr>
-        <p:txBody>
-          <a:bodyPr wrap="square" rtlCol="0" anchor="ctr"/>
-          <a:lstStyle/>
-          <a:p>
-            <a:pPr algn="ctr" indent="0" marL="0">
-              <a:buNone/>
-            </a:pPr>
-            <a:r>
-              <a:rPr lang="en-US" sz="1100" b="1" dirty="0">
-                <a:solidFill>
-                  <a:srgbClr val="FFFFFF"/>
-                </a:solidFill>
-                <a:latin typeface="Calibri" pitchFamily="34" charset="0"/>
-                <a:ea typeface="Calibri" pitchFamily="34" charset="-122"/>
-                <a:cs typeface="Calibri" pitchFamily="34" charset="-120"/>
-              </a:rPr>
-              <a:t>0:55</a:t>
-            </a:r>
-            <a:endParaRPr lang="en-US" sz="1100" dirty="0"/>
-          </a:p>
-        </p:txBody>
-      </p:sp>
-      <p:sp>
-        <p:nvSpPr>
-          <p:cNvPr id="17" name="Text 15"/>
-          <p:cNvSpPr/>
-          <p:nvPr/>
-        </p:nvSpPr>
-        <p:spPr>
-          <a:xfrm>
-            <a:off x="1691640" y="3346704"/>
-            <a:ext cx="9646920" cy="448056"/>
-          </a:xfrm>
-          <a:prstGeom prst="rect">
-            <a:avLst/>
-          </a:prstGeom>
-          <a:noFill/>
-          <a:ln/>
-        </p:spPr>
-        <p:txBody>
-          <a:bodyPr wrap="square" rtlCol="0" anchor="ctr">
-            <a:spAutoFit/>
-          </a:bodyPr>
-          <a:lstStyle/>
-          <a:p>
-            <a:pPr indent="0" marL="0">
-              <a:buNone/>
-            </a:pPr>
-            <a:r>
-              <a:rPr lang="en-US" sz="1100" dirty="0">
-                <a:solidFill>
-                  <a:srgbClr val="1A1A1A"/>
-                </a:solidFill>
-                <a:latin typeface="Calibri" pitchFamily="34" charset="0"/>
-                <a:ea typeface="Calibri" pitchFamily="34" charset="-122"/>
-                <a:cs typeface="Calibri" pitchFamily="34" charset="-120"/>
-              </a:rPr>
-              <a:t>What counts as a word? Paste a sentence into two tokenizer playgrounds and watch it shatter differently. Models see tokens, not words. Then the standard tools for the run/running decision: NLTK stemming and lemmatization, a real stop list, and Zipf's law, the curve that explains why stop lists exist.</a:t>
-            </a:r>
-            <a:endParaRPr lang="en-US" sz="1100" dirty="0"/>
-          </a:p>
-        </p:txBody>
-      </p:sp>
-      <p:sp>
-        <p:nvSpPr>
-          <p:cNvPr id="18" name="Shape 16"/>
-          <p:cNvSpPr/>
-          <p:nvPr/>
-        </p:nvSpPr>
-        <p:spPr>
-          <a:xfrm>
-            <a:off x="640080" y="3813048"/>
-            <a:ext cx="868680" cy="338328"/>
-          </a:xfrm>
-          <a:prstGeom prst="roundRect">
-            <a:avLst>
-              <a:gd name="adj" fmla="val 16216"/>
-            </a:avLst>
-          </a:prstGeom>
-          <a:solidFill>
-            <a:srgbClr val="7A3B2E"/>
-          </a:solidFill>
-          <a:ln/>
-        </p:spPr>
-      </p:sp>
-      <p:sp>
-        <p:nvSpPr>
-          <p:cNvPr id="19" name="Text 17"/>
-          <p:cNvSpPr/>
-          <p:nvPr/>
-        </p:nvSpPr>
-        <p:spPr>
-          <a:xfrm>
-            <a:off x="640080" y="3813048"/>
-            <a:ext cx="868680" cy="338328"/>
-          </a:xfrm>
-          <a:prstGeom prst="rect">
-            <a:avLst/>
-          </a:prstGeom>
-          <a:noFill/>
-          <a:ln/>
-        </p:spPr>
-        <p:txBody>
-          <a:bodyPr wrap="square" rtlCol="0" anchor="ctr"/>
-          <a:lstStyle/>
-          <a:p>
-            <a:pPr algn="ctr" indent="0" marL="0">
-              <a:buNone/>
-            </a:pPr>
-            <a:r>
-              <a:rPr lang="en-US" sz="1100" b="1" dirty="0">
-                <a:solidFill>
-                  <a:srgbClr val="FFFFFF"/>
-                </a:solidFill>
-                <a:latin typeface="Calibri" pitchFamily="34" charset="0"/>
-                <a:ea typeface="Calibri" pitchFamily="34" charset="-122"/>
-                <a:cs typeface="Calibri" pitchFamily="34" charset="-120"/>
-              </a:rPr>
-              <a:t>1:05</a:t>
-            </a:r>
-            <a:endParaRPr lang="en-US" sz="1100" dirty="0"/>
-          </a:p>
-        </p:txBody>
-      </p:sp>
-      <p:sp>
-        <p:nvSpPr>
-          <p:cNvPr id="20" name="Text 18"/>
-          <p:cNvSpPr/>
-          <p:nvPr/>
-        </p:nvSpPr>
-        <p:spPr>
-          <a:xfrm>
-            <a:off x="1691640" y="3794760"/>
-            <a:ext cx="9646920" cy="448056"/>
-          </a:xfrm>
-          <a:prstGeom prst="rect">
-            <a:avLst/>
-          </a:prstGeom>
-          <a:noFill/>
-          <a:ln/>
-        </p:spPr>
-        <p:txBody>
-          <a:bodyPr wrap="square" rtlCol="0" anchor="ctr">
-            <a:spAutoFit/>
-          </a:bodyPr>
-          <a:lstStyle/>
-          <a:p>
-            <a:pPr indent="0" marL="0">
-              <a:buNone/>
-            </a:pPr>
-            <a:r>
-              <a:rPr lang="en-US" sz="1100" dirty="0">
-                <a:solidFill>
-                  <a:srgbClr val="1A1A1A"/>
-                </a:solidFill>
-                <a:latin typeface="Calibri" pitchFamily="34" charset="0"/>
-                <a:ea typeface="Calibri" pitchFamily="34" charset="-122"/>
-                <a:cs typeface="Calibri" pitchFamily="34" charset="-120"/>
-              </a:rPr>
-              <a:t>Break</a:t>
-            </a:r>
-            <a:endParaRPr lang="en-US" sz="1100" dirty="0"/>
-          </a:p>
-        </p:txBody>
-      </p:sp>
-      <p:sp>
-        <p:nvSpPr>
-          <p:cNvPr id="21" name="Shape 19"/>
-          <p:cNvSpPr/>
-          <p:nvPr/>
-        </p:nvSpPr>
-        <p:spPr>
-          <a:xfrm>
-            <a:off x="640080" y="4261104"/>
-            <a:ext cx="868680" cy="338328"/>
-          </a:xfrm>
-          <a:prstGeom prst="roundRect">
-            <a:avLst>
-              <a:gd name="adj" fmla="val 16216"/>
-            </a:avLst>
-          </a:prstGeom>
-          <a:solidFill>
-            <a:srgbClr val="7A3B2E"/>
-          </a:solidFill>
-          <a:ln/>
-        </p:spPr>
-      </p:sp>
-      <p:sp>
-        <p:nvSpPr>
-          <p:cNvPr id="22" name="Text 20"/>
-          <p:cNvSpPr/>
-          <p:nvPr/>
-        </p:nvSpPr>
-        <p:spPr>
-          <a:xfrm>
-            <a:off x="640080" y="4261104"/>
-            <a:ext cx="868680" cy="338328"/>
-          </a:xfrm>
-          <a:prstGeom prst="rect">
-            <a:avLst/>
-          </a:prstGeom>
-          <a:noFill/>
-          <a:ln/>
-        </p:spPr>
-        <p:txBody>
-          <a:bodyPr wrap="square" rtlCol="0" anchor="ctr"/>
-          <a:lstStyle/>
-          <a:p>
-            <a:pPr algn="ctr" indent="0" marL="0">
-              <a:buNone/>
-            </a:pPr>
-            <a:r>
-              <a:rPr lang="en-US" sz="1100" b="1" dirty="0">
-                <a:solidFill>
-                  <a:srgbClr val="FFFFFF"/>
-                </a:solidFill>
-                <a:latin typeface="Calibri" pitchFamily="34" charset="0"/>
-                <a:ea typeface="Calibri" pitchFamily="34" charset="-122"/>
-                <a:cs typeface="Calibri" pitchFamily="34" charset="-120"/>
-              </a:rPr>
-              <a:t>1:15</a:t>
-            </a:r>
-            <a:endParaRPr lang="en-US" sz="1100" dirty="0"/>
-          </a:p>
-        </p:txBody>
-      </p:sp>
-      <p:sp>
-        <p:nvSpPr>
-          <p:cNvPr id="23" name="Text 21"/>
-          <p:cNvSpPr/>
-          <p:nvPr/>
-        </p:nvSpPr>
-        <p:spPr>
-          <a:xfrm>
-            <a:off x="1691640" y="4242816"/>
-            <a:ext cx="9646920" cy="448056"/>
-          </a:xfrm>
-          <a:prstGeom prst="rect">
-            <a:avLst/>
-          </a:prstGeom>
-          <a:noFill/>
-          <a:ln/>
-        </p:spPr>
-        <p:txBody>
-          <a:bodyPr wrap="square" rtlCol="0" anchor="ctr">
-            <a:spAutoFit/>
-          </a:bodyPr>
-          <a:lstStyle/>
-          <a:p>
-            <a:pPr indent="0" marL="0">
-              <a:buNone/>
-            </a:pPr>
-            <a:r>
-              <a:rPr lang="en-US" sz="1100" dirty="0">
-                <a:solidFill>
-                  <a:srgbClr val="1A1A1A"/>
-                </a:solidFill>
-                <a:latin typeface="Calibri" pitchFamily="34" charset="0"/>
-                <a:ea typeface="Calibri" pitchFamily="34" charset="-122"/>
-                <a:cs typeface="Calibri" pitchFamily="34" charset="-120"/>
-              </a:rPr>
-              <a:t>tf-idf: the AI scales your hand count; stop-words dominate, which motivates "common here, rare overall."</a:t>
-            </a:r>
-            <a:endParaRPr lang="en-US" sz="1100" dirty="0"/>
-          </a:p>
-        </p:txBody>
-      </p:sp>
-      <p:sp>
-        <p:nvSpPr>
-          <p:cNvPr id="24" name="Shape 22"/>
-          <p:cNvSpPr/>
-          <p:nvPr/>
-        </p:nvSpPr>
-        <p:spPr>
-          <a:xfrm>
-            <a:off x="640080" y="4709160"/>
-            <a:ext cx="868680" cy="338328"/>
-          </a:xfrm>
-          <a:prstGeom prst="roundRect">
-            <a:avLst>
-              <a:gd name="adj" fmla="val 16216"/>
-            </a:avLst>
-          </a:prstGeom>
-          <a:solidFill>
-            <a:srgbClr val="7A3B2E"/>
-          </a:solidFill>
-          <a:ln/>
-        </p:spPr>
-      </p:sp>
-      <p:sp>
-        <p:nvSpPr>
-          <p:cNvPr id="25" name="Text 23"/>
-          <p:cNvSpPr/>
-          <p:nvPr/>
-        </p:nvSpPr>
-        <p:spPr>
-          <a:xfrm>
-            <a:off x="640080" y="4709160"/>
-            <a:ext cx="868680" cy="338328"/>
-          </a:xfrm>
-          <a:prstGeom prst="rect">
-            <a:avLst/>
-          </a:prstGeom>
-          <a:noFill/>
-          <a:ln/>
-        </p:spPr>
-        <p:txBody>
-          <a:bodyPr wrap="square" rtlCol="0" anchor="ctr"/>
-          <a:lstStyle/>
-          <a:p>
-            <a:pPr algn="ctr" indent="0" marL="0">
-              <a:buNone/>
-            </a:pPr>
-            <a:r>
-              <a:rPr lang="en-US" sz="1100" b="1" dirty="0">
-                <a:solidFill>
-                  <a:srgbClr val="FFFFFF"/>
-                </a:solidFill>
-                <a:latin typeface="Calibri" pitchFamily="34" charset="0"/>
-                <a:ea typeface="Calibri" pitchFamily="34" charset="-122"/>
-                <a:cs typeface="Calibri" pitchFamily="34" charset="-120"/>
-              </a:rPr>
-              <a:t>1:30</a:t>
-            </a:r>
-            <a:endParaRPr lang="en-US" sz="1100" dirty="0"/>
-          </a:p>
-        </p:txBody>
-      </p:sp>
-      <p:sp>
-        <p:nvSpPr>
-          <p:cNvPr id="26" name="Text 24"/>
-          <p:cNvSpPr/>
-          <p:nvPr/>
-        </p:nvSpPr>
-        <p:spPr>
-          <a:xfrm>
-            <a:off x="1691640" y="4690872"/>
-            <a:ext cx="9646920" cy="448056"/>
-          </a:xfrm>
-          <a:prstGeom prst="rect">
-            <a:avLst/>
-          </a:prstGeom>
-          <a:noFill/>
-          <a:ln/>
-        </p:spPr>
-        <p:txBody>
-          <a:bodyPr wrap="square" rtlCol="0" anchor="ctr">
-            <a:spAutoFit/>
-          </a:bodyPr>
-          <a:lstStyle/>
-          <a:p>
-            <a:pPr indent="0" marL="0">
-              <a:buNone/>
-            </a:pPr>
-            <a:r>
-              <a:rPr lang="en-US" sz="1100" dirty="0">
-                <a:solidFill>
-                  <a:srgbClr val="1A1A1A"/>
-                </a:solidFill>
-                <a:latin typeface="Calibri" pitchFamily="34" charset="0"/>
-                <a:ea typeface="Calibri" pitchFamily="34" charset="-122"/>
-                <a:cs typeface="Calibri" pitchFamily="34" charset="-120"/>
-              </a:rPr>
-              <a:t>Keyness, the She Giggles, He Gallops move: a log-odds ratio between two corpora finds the words one voice uses far more than a baseline, exactly the method behind Week 1's featured piece. The corpus pair is a choice too: artist vs. pop, lyrics vs. subreddit vs. novel.</a:t>
-            </a:r>
-            <a:endParaRPr lang="en-US" sz="1100" dirty="0"/>
-          </a:p>
-        </p:txBody>
-      </p:sp>
-      <p:sp>
-        <p:nvSpPr>
-          <p:cNvPr id="27" name="Shape 25"/>
-          <p:cNvSpPr/>
-          <p:nvPr/>
-        </p:nvSpPr>
-        <p:spPr>
-          <a:xfrm>
-            <a:off x="640080" y="5157216"/>
-            <a:ext cx="868680" cy="338328"/>
-          </a:xfrm>
-          <a:prstGeom prst="roundRect">
-            <a:avLst>
-              <a:gd name="adj" fmla="val 16216"/>
-            </a:avLst>
-          </a:prstGeom>
-          <a:solidFill>
-            <a:srgbClr val="7A3B2E"/>
-          </a:solidFill>
-          <a:ln/>
-        </p:spPr>
-      </p:sp>
-      <p:sp>
-        <p:nvSpPr>
-          <p:cNvPr id="28" name="Text 26"/>
-          <p:cNvSpPr/>
-          <p:nvPr/>
-        </p:nvSpPr>
-        <p:spPr>
-          <a:xfrm>
-            <a:off x="640080" y="5157216"/>
-            <a:ext cx="868680" cy="338328"/>
-          </a:xfrm>
-          <a:prstGeom prst="rect">
-            <a:avLst/>
-          </a:prstGeom>
-          <a:noFill/>
-          <a:ln/>
-        </p:spPr>
-        <p:txBody>
-          <a:bodyPr wrap="square" rtlCol="0" anchor="ctr"/>
-          <a:lstStyle/>
-          <a:p>
-            <a:pPr algn="ctr" indent="0" marL="0">
-              <a:buNone/>
-            </a:pPr>
-            <a:r>
-              <a:rPr lang="en-US" sz="1100" b="1" dirty="0">
-                <a:solidFill>
-                  <a:srgbClr val="FFFFFF"/>
-                </a:solidFill>
-                <a:latin typeface="Calibri" pitchFamily="34" charset="0"/>
-                <a:ea typeface="Calibri" pitchFamily="34" charset="-122"/>
-                <a:cs typeface="Calibri" pitchFamily="34" charset="-120"/>
-              </a:rPr>
-              <a:t>1:42</a:t>
-            </a:r>
-            <a:endParaRPr lang="en-US" sz="1100" dirty="0"/>
-          </a:p>
-        </p:txBody>
-      </p:sp>
-      <p:sp>
-        <p:nvSpPr>
-          <p:cNvPr id="29" name="Text 27"/>
-          <p:cNvSpPr/>
-          <p:nvPr/>
-        </p:nvSpPr>
-        <p:spPr>
-          <a:xfrm>
-            <a:off x="1691640" y="5138928"/>
-            <a:ext cx="9646920" cy="448056"/>
-          </a:xfrm>
-          <a:prstGeom prst="rect">
-            <a:avLst/>
-          </a:prstGeom>
-          <a:noFill/>
-          <a:ln/>
-        </p:spPr>
-        <p:txBody>
-          <a:bodyPr wrap="square" rtlCol="0" anchor="ctr">
-            <a:spAutoFit/>
-          </a:bodyPr>
-          <a:lstStyle/>
-          <a:p>
-            <a:pPr indent="0" marL="0">
-              <a:buNone/>
-            </a:pPr>
-            <a:r>
-              <a:rPr lang="en-US" sz="1100" dirty="0">
-                <a:solidFill>
-                  <a:srgbClr val="1A1A1A"/>
-                </a:solidFill>
-                <a:latin typeface="Calibri" pitchFamily="34" charset="0"/>
-                <a:ea typeface="Calibri" pitchFamily="34" charset="-122"/>
-                <a:cs typeface="Calibri" pitchFamily="34" charset="-120"/>
-              </a:rPr>
-              <a:t>Is the difference real? The shuffle test: shuffle the labels and recount, one thousand times. If chance alone frequently produces a gap this large, the difference should not be trusted; if it almost never does, the finding stands. A difference can be real and still small.</a:t>
-            </a:r>
-            <a:endParaRPr lang="en-US" sz="1100" dirty="0"/>
-          </a:p>
-        </p:txBody>
-      </p:sp>
-      <p:sp>
-        <p:nvSpPr>
-          <p:cNvPr id="30" name="Shape 28"/>
-          <p:cNvSpPr/>
-          <p:nvPr/>
-        </p:nvSpPr>
-        <p:spPr>
-          <a:xfrm>
-            <a:off x="640080" y="5605272"/>
-            <a:ext cx="868680" cy="338328"/>
-          </a:xfrm>
-          <a:prstGeom prst="roundRect">
-            <a:avLst>
-              <a:gd name="adj" fmla="val 16216"/>
-            </a:avLst>
-          </a:prstGeom>
-          <a:solidFill>
-            <a:srgbClr val="7A3B2E"/>
-          </a:solidFill>
-          <a:ln/>
-        </p:spPr>
-      </p:sp>
-      <p:sp>
-        <p:nvSpPr>
-          <p:cNvPr id="31" name="Text 29"/>
-          <p:cNvSpPr/>
-          <p:nvPr/>
-        </p:nvSpPr>
-        <p:spPr>
-          <a:xfrm>
-            <a:off x="640080" y="5605272"/>
-            <a:ext cx="868680" cy="338328"/>
-          </a:xfrm>
-          <a:prstGeom prst="rect">
-            <a:avLst/>
-          </a:prstGeom>
-          <a:noFill/>
-          <a:ln/>
-        </p:spPr>
-        <p:txBody>
-          <a:bodyPr wrap="square" rtlCol="0" anchor="ctr"/>
-          <a:lstStyle/>
-          <a:p>
-            <a:pPr algn="ctr" indent="0" marL="0">
-              <a:buNone/>
-            </a:pPr>
-            <a:r>
-              <a:rPr lang="en-US" sz="1100" b="1" dirty="0">
-                <a:solidFill>
-                  <a:srgbClr val="FFFFFF"/>
-                </a:solidFill>
-                <a:latin typeface="Calibri" pitchFamily="34" charset="0"/>
-                <a:ea typeface="Calibri" pitchFamily="34" charset="-122"/>
-                <a:cs typeface="Calibri" pitchFamily="34" charset="-120"/>
-              </a:rPr>
-              <a:t>1:50</a:t>
-            </a:r>
-            <a:endParaRPr lang="en-US" sz="1100" dirty="0"/>
-          </a:p>
-        </p:txBody>
-      </p:sp>
-      <p:sp>
-        <p:nvSpPr>
-          <p:cNvPr id="32" name="Text 30"/>
-          <p:cNvSpPr/>
-          <p:nvPr/>
-        </p:nvSpPr>
-        <p:spPr>
-          <a:xfrm>
-            <a:off x="1691640" y="5586984"/>
-            <a:ext cx="9646920" cy="448056"/>
-          </a:xfrm>
-          <a:prstGeom prst="rect">
-            <a:avLst/>
-          </a:prstGeom>
-          <a:noFill/>
-          <a:ln/>
-        </p:spPr>
-        <p:txBody>
-          <a:bodyPr wrap="square" rtlCol="0" anchor="ctr">
-            <a:spAutoFit/>
-          </a:bodyPr>
-          <a:lstStyle/>
-          <a:p>
-            <a:pPr indent="0" marL="0">
-              <a:buNone/>
-            </a:pPr>
-            <a:r>
-              <a:rPr lang="en-US" sz="1100" dirty="0">
-                <a:solidFill>
-                  <a:srgbClr val="1A1A1A"/>
-                </a:solidFill>
-                <a:latin typeface="Calibri" pitchFamily="34" charset="0"/>
-                <a:ea typeface="Calibri" pitchFamily="34" charset="-122"/>
-                <a:cs typeface="Calibri" pitchFamily="34" charset="-120"/>
-              </a:rPr>
-              <a:t>Gemini-free check and check-out.</a:t>
-            </a:r>
-            <a:endParaRPr lang="en-US" sz="1100" dirty="0"/>
+              <a:t>Polysemy: "sick beat" and "sick child" add to the same count. A word type is not a meaning. Week 5's embeddings exist for these holes, and bring their own.</a:t>
+            </a:r>
+            <a:endParaRPr lang="en-US" sz="1650" dirty="0"/>
           </a:p>
         </p:txBody>
       </p:sp>

--- a/slides/pptx/week-02.pptx
+++ b/slides/pptx/week-02.pptx
@@ -4769,7 +4769,7 @@
                 <a:ea typeface="Calibri" pitchFamily="34" charset="-122"/>
                 <a:cs typeface="Calibri" pitchFamily="34" charset="-120"/>
               </a:rPr>
-              <a:t>N-grams and statistics, hands-on: bigrams across three corpora, distributions and mean-versus-median on real counts, rates per 1,000 words. Then tf-idf ("common here, rare overall") and k-means clustering: the counts separate verse from prose and split the sonnets in two, a lesson in what clustering actually answers.</a:t>
+              <a:t>N-grams and statistics, hands-on: bigrams across three corpora, distributions and mean-versus-median on real counts, rates per 1,000 words. Then tf-idf ("common here, rare overall") and k-means on 360 live Reddit comments from three subreddits: raw counts give a blob, tf-idf plus 60 dimensions sorts six in seven comments with their community. The representation, not the algorithm, does the work.</a:t>
             </a:r>
             <a:endParaRPr lang="en-US" sz="1100" dirty="0"/>
           </a:p>
@@ -8844,7 +8844,7 @@
                 <a:ea typeface="Cambria" pitchFamily="34" charset="-122"/>
                 <a:cs typeface="Cambria" pitchFamily="34" charset="-120"/>
               </a:rPr>
-              <a:t>Clustering: what do the counts separate?</a:t>
+              <a:t>Clustering: three communities, separable from counts alone</a:t>
             </a:r>
             <a:endParaRPr lang="en-US" sz="3000" dirty="0"/>
           </a:p>
@@ -8908,7 +8908,7 @@
                 <a:ea typeface="Calibri" pitchFamily="34" charset="-122"/>
                 <a:cs typeface="Calibri" pitchFamily="34" charset="-120"/>
               </a:rPr>
-              <a:t>Give k-means the 314 documents as tf-idf vectors and ask for three piles, no labels. It returns: novels in one pile, sonnets split across two.</a:t>
+              <a:t>360 Reddit comments from r/buildapc, r/gardening, and r/relationship_advice, streamed live (analyze-only: counts and findings are published, the text and usernames never are). k-means gets no labels.</a:t>
             </a:r>
             <a:endParaRPr lang="en-US" sz="1650" dirty="0"/>
           </a:p>
@@ -8972,7 +8972,7 @@
                 <a:ea typeface="Calibri" pitchFamily="34" charset="-122"/>
                 <a:cs typeface="Calibri" pitchFamily="34" charset="-120"/>
               </a:rPr>
-              <a:t>It found the loudest differences, verse against prose and a divide inside the sonnets, not the three books you had in mind. Clustering answers its own question.</a:t>
+              <a:t>Raw counts: one blob, the everywhere-words dominate. tf-idf: better, still smeared. tf-idf compressed to 60 dimensions: about six comments in seven land with their community.</a:t>
             </a:r>
             <a:endParaRPr lang="en-US" sz="1650" dirty="0"/>
           </a:p>
@@ -9036,7 +9036,7 @@
                 <a:ea typeface="Calibri" pitchFamily="34" charset="-122"/>
                 <a:cs typeface="Calibri" pitchFamily="34" charset="-120"/>
               </a:rPr>
-              <a:t>The ablation: on raw counts, k-means returns one giant blob. The everywhere-words dominate the geometry; tf-idf is what makes the space navigable.</a:t>
+              <a:t>The algorithm never changed; the representation did. Same data, same k-means, three answers, which previews Week 5's whole move: replace word columns with learned dimensions.</a:t>
             </a:r>
             <a:endParaRPr lang="en-US" sz="1650" dirty="0"/>
           </a:p>
@@ -9100,7 +9100,7 @@
                 <a:ea typeface="Calibri" pitchFamily="34" charset="-122"/>
                 <a:cs typeface="Calibri" pitchFamily="34" charset="-120"/>
               </a:rPr>
-              <a:t>Novels only, two piles: about three in four paragraphs sort by author. Real signal, not a clean one. Name what separated before you claim it.</a:t>
+              <a:t>Read the stragglers: a gardening comment about a partner sorts with relationship_advice. The cluster found vocabulary; vocabulary mostly tracks community. Name what separated before you claim it.</a:t>
             </a:r>
             <a:endParaRPr lang="en-US" sz="1650" dirty="0"/>
           </a:p>

--- a/slides/pptx/week-02.pptx
+++ b/slides/pptx/week-02.pptx
@@ -8879,7 +8879,7 @@
         <p:spPr>
           <a:xfrm>
             <a:off x="1097280" y="2240280"/>
-            <a:ext cx="10607040" cy="1017270"/>
+            <a:ext cx="10607040" cy="813816"/>
           </a:xfrm>
           <a:prstGeom prst="rect">
             <a:avLst/>
@@ -8900,7 +8900,7 @@
               <a:buNone/>
             </a:pPr>
             <a:r>
-              <a:rPr lang="en-US" sz="1650" dirty="0">
+              <a:rPr lang="en-US" sz="1500" dirty="0">
                 <a:solidFill>
                   <a:srgbClr val="1A1A1A"/>
                 </a:solidFill>
@@ -8910,7 +8910,7 @@
               </a:rPr>
               <a:t>360 Reddit comments from r/buildapc, r/gardening, and r/relationship_advice, streamed live (analyze-only: counts and findings are published, the text and usernames never are). k-means gets no labels.</a:t>
             </a:r>
-            <a:endParaRPr lang="en-US" sz="1650" dirty="0"/>
+            <a:endParaRPr lang="en-US" sz="1500" dirty="0"/>
           </a:p>
         </p:txBody>
       </p:sp>
@@ -8922,7 +8922,7 @@
         </p:nvSpPr>
         <p:spPr>
           <a:xfrm>
-            <a:off x="640080" y="3348990"/>
+            <a:off x="640080" y="3145536"/>
             <a:ext cx="201168" cy="201168"/>
           </a:xfrm>
           <a:prstGeom prst="ellipse">
@@ -8942,8 +8942,8 @@
         </p:nvSpPr>
         <p:spPr>
           <a:xfrm>
-            <a:off x="1097280" y="3257550"/>
-            <a:ext cx="10607040" cy="1017270"/>
+            <a:off x="1097280" y="3054096"/>
+            <a:ext cx="10607040" cy="813816"/>
           </a:xfrm>
           <a:prstGeom prst="rect">
             <a:avLst/>
@@ -8964,7 +8964,7 @@
               <a:buNone/>
             </a:pPr>
             <a:r>
-              <a:rPr lang="en-US" sz="1650" dirty="0">
+              <a:rPr lang="en-US" sz="1500" dirty="0">
                 <a:solidFill>
                   <a:srgbClr val="1A1A1A"/>
                 </a:solidFill>
@@ -8974,7 +8974,7 @@
               </a:rPr>
               <a:t>Raw counts: one blob, the everywhere-words dominate. tf-idf: better, still smeared. tf-idf compressed to 60 dimensions: about six comments in seven land with their community.</a:t>
             </a:r>
-            <a:endParaRPr lang="en-US" sz="1650" dirty="0"/>
+            <a:endParaRPr lang="en-US" sz="1500" dirty="0"/>
           </a:p>
         </p:txBody>
       </p:sp>
@@ -8986,7 +8986,7 @@
         </p:nvSpPr>
         <p:spPr>
           <a:xfrm>
-            <a:off x="640080" y="4366260"/>
+            <a:off x="640080" y="3959352"/>
             <a:ext cx="201168" cy="201168"/>
           </a:xfrm>
           <a:prstGeom prst="ellipse">
@@ -9006,8 +9006,8 @@
         </p:nvSpPr>
         <p:spPr>
           <a:xfrm>
-            <a:off x="1097280" y="4274820"/>
-            <a:ext cx="10607040" cy="1017270"/>
+            <a:off x="1097280" y="3867912"/>
+            <a:ext cx="10607040" cy="813816"/>
           </a:xfrm>
           <a:prstGeom prst="rect">
             <a:avLst/>
@@ -9028,7 +9028,7 @@
               <a:buNone/>
             </a:pPr>
             <a:r>
-              <a:rPr lang="en-US" sz="1650" dirty="0">
+              <a:rPr lang="en-US" sz="1500" dirty="0">
                 <a:solidFill>
                   <a:srgbClr val="1A1A1A"/>
                 </a:solidFill>
@@ -9038,7 +9038,7 @@
               </a:rPr>
               <a:t>The algorithm never changed; the representation did. Same data, same k-means, three answers, which previews Week 5's whole move: replace word columns with learned dimensions.</a:t>
             </a:r>
-            <a:endParaRPr lang="en-US" sz="1650" dirty="0"/>
+            <a:endParaRPr lang="en-US" sz="1500" dirty="0"/>
           </a:p>
         </p:txBody>
       </p:sp>
@@ -9050,7 +9050,7 @@
         </p:nvSpPr>
         <p:spPr>
           <a:xfrm>
-            <a:off x="640080" y="5383530"/>
+            <a:off x="640080" y="4773168"/>
             <a:ext cx="201168" cy="201168"/>
           </a:xfrm>
           <a:prstGeom prst="ellipse">
@@ -9070,8 +9070,8 @@
         </p:nvSpPr>
         <p:spPr>
           <a:xfrm>
-            <a:off x="1097280" y="5292090"/>
-            <a:ext cx="10607040" cy="1017270"/>
+            <a:off x="1097280" y="4681728"/>
+            <a:ext cx="10607040" cy="813816"/>
           </a:xfrm>
           <a:prstGeom prst="rect">
             <a:avLst/>
@@ -9092,7 +9092,7 @@
               <a:buNone/>
             </a:pPr>
             <a:r>
-              <a:rPr lang="en-US" sz="1650" dirty="0">
+              <a:rPr lang="en-US" sz="1500" dirty="0">
                 <a:solidFill>
                   <a:srgbClr val="1A1A1A"/>
                 </a:solidFill>
@@ -9102,7 +9102,71 @@
               </a:rPr>
               <a:t>Read the stragglers: a gardening comment about a partner sorts with relationship_advice. The cluster found vocabulary; vocabulary mostly tracks community. Name what separated before you claim it.</a:t>
             </a:r>
-            <a:endParaRPr lang="en-US" sz="1650" dirty="0"/>
+            <a:endParaRPr lang="en-US" sz="1500" dirty="0"/>
+          </a:p>
+        </p:txBody>
+      </p:sp>
+      <p:sp>
+        <p:nvSpPr>
+          <p:cNvPr id="13" name="Shape 11"/>
+          <p:cNvSpPr/>
+          <p:nvPr/>
+        </p:nvSpPr>
+        <p:spPr>
+          <a:xfrm>
+            <a:off x="640080" y="5586984"/>
+            <a:ext cx="201168" cy="201168"/>
+          </a:xfrm>
+          <a:prstGeom prst="ellipse">
+            <a:avLst/>
+          </a:prstGeom>
+          <a:solidFill>
+            <a:srgbClr val="3F6F5F"/>
+          </a:solidFill>
+          <a:ln/>
+        </p:spPr>
+      </p:sp>
+      <p:sp>
+        <p:nvSpPr>
+          <p:cNvPr id="14" name="Text 12"/>
+          <p:cNvSpPr/>
+          <p:nvPr/>
+        </p:nvSpPr>
+        <p:spPr>
+          <a:xfrm>
+            <a:off x="1097280" y="5495544"/>
+            <a:ext cx="10607040" cy="813816"/>
+          </a:xfrm>
+          <a:prstGeom prst="rect">
+            <a:avLst/>
+          </a:prstGeom>
+          <a:noFill/>
+          <a:ln/>
+        </p:spPr>
+        <p:txBody>
+          <a:bodyPr wrap="square" rtlCol="0" anchor="t">
+            <a:spAutoFit/>
+          </a:bodyPr>
+          <a:lstStyle/>
+          <a:p>
+            <a:pPr indent="0" marL="0">
+              <a:lnSpc>
+                <a:spcPct val="112000"/>
+              </a:lnSpc>
+              <a:buNone/>
+            </a:pPr>
+            <a:r>
+              <a:rPr lang="en-US" sz="1500" dirty="0">
+                <a:solidFill>
+                  <a:srgbClr val="1A1A1A"/>
+                </a:solidFill>
+                <a:latin typeface="Calibri" pitchFamily="34" charset="0"/>
+                <a:ea typeface="Calibri" pitchFamily="34" charset="-122"/>
+                <a:cs typeface="Calibri" pitchFamily="34" charset="-120"/>
+              </a:rPr>
+              <a:t>The hard version, in the go-further: r/sandiego against r/SanDiegan, one city, two communities. Clustering barely beats a coin flip, and even Week 3's supervised classifier reaches only about 60 percent. Topic is easy; community-within-topic is hard.</a:t>
+            </a:r>
+            <a:endParaRPr lang="en-US" sz="1500" dirty="0"/>
           </a:p>
         </p:txBody>
       </p:sp>

--- a/slides/pptx/week-02.pptx
+++ b/slides/pptx/week-02.pptx
@@ -4769,7 +4769,7 @@
                 <a:ea typeface="Calibri" pitchFamily="34" charset="-122"/>
                 <a:cs typeface="Calibri" pitchFamily="34" charset="-120"/>
               </a:rPr>
-              <a:t>N-grams and statistics, hands-on: bigrams across three corpora, distributions and mean-versus-median on real counts, rates per 1,000 words. Then tf-idf ("common here, rare overall") and k-means on 360 live Reddit comments from three subreddits: raw counts give a blob, tf-idf plus 60 dimensions sorts six in seven comments with their community. The representation, not the algorithm, does the work.</a:t>
+              <a:t>N-grams and statistics, hands-on: bigrams across three corpora, distributions and mean-versus-median on real counts, rates per 1,000 words. Then tf-idf ("common here, rare overall") and k-means on 360 live Reddit comments from three subreddits: raw counts give a blob, tf-idf plus 60 dimensions sorts six in seven comments with their community. The representation, not the algorithm, does the work. Closer: the same k-means on twenty Met paintings counted into 27 color buckets sorts portraits from landscapes, three in four.</a:t>
             </a:r>
             <a:endParaRPr lang="en-US" sz="1100" dirty="0"/>
           </a:p>
@@ -8879,7 +8879,7 @@
         <p:spPr>
           <a:xfrm>
             <a:off x="1097280" y="2240280"/>
-            <a:ext cx="10607040" cy="813816"/>
+            <a:ext cx="10607040" cy="678180"/>
           </a:xfrm>
           <a:prstGeom prst="rect">
             <a:avLst/>
@@ -8922,7 +8922,7 @@
         </p:nvSpPr>
         <p:spPr>
           <a:xfrm>
-            <a:off x="640080" y="3145536"/>
+            <a:off x="640080" y="3009900"/>
             <a:ext cx="201168" cy="201168"/>
           </a:xfrm>
           <a:prstGeom prst="ellipse">
@@ -8942,8 +8942,8 @@
         </p:nvSpPr>
         <p:spPr>
           <a:xfrm>
-            <a:off x="1097280" y="3054096"/>
-            <a:ext cx="10607040" cy="813816"/>
+            <a:off x="1097280" y="2918460"/>
+            <a:ext cx="10607040" cy="678180"/>
           </a:xfrm>
           <a:prstGeom prst="rect">
             <a:avLst/>
@@ -8986,7 +8986,7 @@
         </p:nvSpPr>
         <p:spPr>
           <a:xfrm>
-            <a:off x="640080" y="3959352"/>
+            <a:off x="640080" y="3688080"/>
             <a:ext cx="201168" cy="201168"/>
           </a:xfrm>
           <a:prstGeom prst="ellipse">
@@ -9006,8 +9006,8 @@
         </p:nvSpPr>
         <p:spPr>
           <a:xfrm>
-            <a:off x="1097280" y="3867912"/>
-            <a:ext cx="10607040" cy="813816"/>
+            <a:off x="1097280" y="3596640"/>
+            <a:ext cx="10607040" cy="678180"/>
           </a:xfrm>
           <a:prstGeom prst="rect">
             <a:avLst/>
@@ -9050,7 +9050,7 @@
         </p:nvSpPr>
         <p:spPr>
           <a:xfrm>
-            <a:off x="640080" y="4773168"/>
+            <a:off x="640080" y="4366260"/>
             <a:ext cx="201168" cy="201168"/>
           </a:xfrm>
           <a:prstGeom prst="ellipse">
@@ -9070,8 +9070,8 @@
         </p:nvSpPr>
         <p:spPr>
           <a:xfrm>
-            <a:off x="1097280" y="4681728"/>
-            <a:ext cx="10607040" cy="813816"/>
+            <a:off x="1097280" y="4274820"/>
+            <a:ext cx="10607040" cy="678180"/>
           </a:xfrm>
           <a:prstGeom prst="rect">
             <a:avLst/>
@@ -9114,7 +9114,7 @@
         </p:nvSpPr>
         <p:spPr>
           <a:xfrm>
-            <a:off x="640080" y="5586984"/>
+            <a:off x="640080" y="5044440"/>
             <a:ext cx="201168" cy="201168"/>
           </a:xfrm>
           <a:prstGeom prst="ellipse">
@@ -9134,8 +9134,8 @@
         </p:nvSpPr>
         <p:spPr>
           <a:xfrm>
-            <a:off x="1097280" y="5495544"/>
-            <a:ext cx="10607040" cy="813816"/>
+            <a:off x="1097280" y="4953000"/>
+            <a:ext cx="10607040" cy="678180"/>
           </a:xfrm>
           <a:prstGeom prst="rect">
             <a:avLst/>
@@ -9165,6 +9165,70 @@
                 <a:cs typeface="Calibri" pitchFamily="34" charset="-120"/>
               </a:rPr>
               <a:t>The hard version, in the go-further: r/sandiego against r/SanDiegan, one city, two communities. Clustering barely beats a coin flip, and even Week 3's supervised classifier reaches only about 60 percent. Topic is easy; community-within-topic is hard.</a:t>
+            </a:r>
+            <a:endParaRPr lang="en-US" sz="1500" dirty="0"/>
+          </a:p>
+        </p:txBody>
+      </p:sp>
+      <p:sp>
+        <p:nvSpPr>
+          <p:cNvPr id="15" name="Shape 13"/>
+          <p:cNvSpPr/>
+          <p:nvPr/>
+        </p:nvSpPr>
+        <p:spPr>
+          <a:xfrm>
+            <a:off x="640080" y="5722620"/>
+            <a:ext cx="201168" cy="201168"/>
+          </a:xfrm>
+          <a:prstGeom prst="ellipse">
+            <a:avLst/>
+          </a:prstGeom>
+          <a:solidFill>
+            <a:srgbClr val="B9852F"/>
+          </a:solidFill>
+          <a:ln/>
+        </p:spPr>
+      </p:sp>
+      <p:sp>
+        <p:nvSpPr>
+          <p:cNvPr id="16" name="Text 14"/>
+          <p:cNvSpPr/>
+          <p:nvPr/>
+        </p:nvSpPr>
+        <p:spPr>
+          <a:xfrm>
+            <a:off x="1097280" y="5631180"/>
+            <a:ext cx="10607040" cy="678180"/>
+          </a:xfrm>
+          <a:prstGeom prst="rect">
+            <a:avLst/>
+          </a:prstGeom>
+          <a:noFill/>
+          <a:ln/>
+        </p:spPr>
+        <p:txBody>
+          <a:bodyPr wrap="square" rtlCol="0" anchor="t">
+            <a:spAutoFit/>
+          </a:bodyPr>
+          <a:lstStyle/>
+          <a:p>
+            <a:pPr indent="0" marL="0">
+              <a:lnSpc>
+                <a:spcPct val="112000"/>
+              </a:lnSpc>
+              <a:buNone/>
+            </a:pPr>
+            <a:r>
+              <a:rPr lang="en-US" sz="1500" dirty="0">
+                <a:solidFill>
+                  <a:srgbClr val="1A1A1A"/>
+                </a:solidFill>
+                <a:latin typeface="Calibri" pitchFamily="34" charset="0"/>
+                <a:ea typeface="Calibri" pitchFamily="34" charset="-122"/>
+                <a:cs typeface="Calibri" pitchFamily="34" charset="-120"/>
+              </a:rPr>
+              <a:t>And the same move for pictures: twenty Met paintings counted into 27 color buckets, k-means, no labels. Portraits sort from landscapes three in four, and the stragglers (a brown winter landscape counts like a portrait) are the discussion.</a:t>
             </a:r>
             <a:endParaRPr lang="en-US" sz="1500" dirty="0"/>
           </a:p>

--- a/slides/pptx/week-02.pptx
+++ b/slides/pptx/week-02.pptx
@@ -4769,7 +4769,7 @@
                 <a:ea typeface="Calibri" pitchFamily="34" charset="-122"/>
                 <a:cs typeface="Calibri" pitchFamily="34" charset="-120"/>
               </a:rPr>
-              <a:t>N-grams and statistics, hands-on: bigrams across three corpora, distributions and mean-versus-median on real counts, rates per 1,000 words. Then tf-idf ("common here, rare overall") and k-means on 360 live Reddit comments from three subreddits: raw counts give a blob, tf-idf plus 60 dimensions sorts six in seven comments with their community. The representation, not the algorithm, does the work. Closer: the same k-means on twenty Met paintings counted into 27 color buckets sorts portraits from landscapes, three in four.</a:t>
+              <a:t>N-grams and statistics, hands-on: bigrams across three corpora, distributions and mean-versus-median on real counts, rates per 1,000 words. Then tf-idf at two scales, sonnets as documents and Dracula's 27 chapters as documents (the plot skimmed from each chapter's distinctive words; the cast's arcs counted chapter by chapter), and k-means on 360 live Reddit comments from three subreddits: raw counts give a blob, tf-idf plus 60 dimensions sorts six in seven comments with their community. The representation, not the algorithm, does the work. Closer: the same k-means on twenty Met paintings counted into 27 color buckets sorts portraits from landscapes, three in four.</a:t>
             </a:r>
             <a:endParaRPr lang="en-US" sz="1100" dirty="0"/>
           </a:p>

--- a/slides/pptx/week-02.pptx
+++ b/slides/pptx/week-02.pptx
@@ -4769,7 +4769,7 @@
                 <a:ea typeface="Calibri" pitchFamily="34" charset="-122"/>
                 <a:cs typeface="Calibri" pitchFamily="34" charset="-120"/>
               </a:rPr>
-              <a:t>N-grams and statistics, hands-on: bigrams across three corpora, distributions and mean-versus-median on real counts, rates per 1,000 words. Then tf-idf at two scales, sonnets as documents and Dracula's 27 chapters as documents (the plot skimmed from each chapter's distinctive words; the cast's arcs counted chapter by chapter), and k-means on 360 live Reddit comments from three subreddits: raw counts give a blob, tf-idf plus 60 dimensions sorts six in seven comments with their community. The representation, not the algorithm, does the work. Closer: the same k-means on twenty Met paintings counted into 27 color buckets sorts portraits from landscapes, three in four.</a:t>
+              <a:t>N-grams and statistics, hands-on: bigrams across three corpora, distributions and mean-versus-median on real counts, rates per 1,000 words. Then tf-idf at two scales, sonnets as documents and twelve whole subreddits as documents, each community sight-read from its distinctive words (cpu and coolers, roth and rates, puts and bears), and k-means on 360 live Reddit comments from three subreddits: raw counts give a blob, tf-idf plus 60 dimensions sorts six in seven comments with their community. The representation, not the algorithm, does the work. Closer: the same k-means on twenty Met paintings counted into 27 color buckets sorts portraits from landscapes, three in four.</a:t>
             </a:r>
             <a:endParaRPr lang="en-US" sz="1100" dirty="0"/>
           </a:p>

--- a/slides/pptx/week-02.pptx
+++ b/slides/pptx/week-02.pptx
@@ -4463,7 +4463,7 @@
                 <a:ea typeface="Calibri" pitchFamily="34" charset="-122"/>
                 <a:cs typeface="Calibri" pitchFamily="34" charset="-120"/>
               </a:rPr>
-              <a:t>Hand-built bag-of-words: two authors, highlighters, argue about merging run/running. Counting requires defining.</a:t>
+              <a:t>Hand-built bag-of-words: two communities, highlighters, argue about merging run/running. Counting requires defining.</a:t>
             </a:r>
             <a:endParaRPr lang="en-US" sz="1100" dirty="0"/>
           </a:p>
@@ -4769,7 +4769,7 @@
                 <a:ea typeface="Calibri" pitchFamily="34" charset="-122"/>
                 <a:cs typeface="Calibri" pitchFamily="34" charset="-120"/>
               </a:rPr>
-              <a:t>N-grams and statistics, hands-on: bigrams across three corpora, distributions and mean-versus-median on real counts, rates per 1,000 words. Then tf-idf at two scales, sonnets as documents and twelve whole subreddits as documents, each community sight-read from its distinctive words (cpu and coolers, roth and rates, puts and bears), and k-means on 360 live Reddit comments from three subreddits: raw counts give a blob, tf-idf plus 60 dimensions sorts six in seven comments with their community. The representation, not the algorithm, does the work. Closer: the same k-means on twenty Met paintings counted into 27 color buckets sorts portraits from landscapes, three in four.</a:t>
+              <a:t>N-grams and statistics, hands-on: bigrams across three corpora, distributions and mean-versus-median on real counts, rates per 1,000 words. Then tf-idf at two scales, single comments as documents and twelve whole subreddits as documents, each community sight-read from its distinctive words (cpu and coolers, roth and rates, puts and bears), and k-means on 360 live Reddit comments from three subreddits: raw counts give a blob, tf-idf plus 60 dimensions sorts six in seven comments with their community. The representation, not the algorithm, does the work. Closer: the same k-means on twenty Met paintings counted into 27 color buckets sorts portraits from landscapes, three in four.</a:t>
             </a:r>
             <a:endParaRPr lang="en-US" sz="1100" dirty="0"/>
           </a:p>
@@ -8132,7 +8132,7 @@
                 <a:ea typeface="Calibri" pitchFamily="34" charset="-122"/>
                 <a:cs typeface="Calibri" pitchFamily="34" charset="-120"/>
               </a:rPr>
-              <a:t>A bigram is two words in a row. Week 1 counted the sonnets' pairs; this week counts pairs across three corpora, and each book's top bigrams are already a fingerprint.</a:t>
+              <a:t>A bigram is two words in a row. Week 1 counted one corpus's pairs; this week counts pairs across three communities, and each subreddit's top bigrams are already a fingerprint.</a:t>
             </a:r>
             <a:endParaRPr lang="en-US" sz="1650" dirty="0"/>
           </a:p>
@@ -8520,7 +8520,7 @@
                 <a:ea typeface="Calibri" pitchFamily="34" charset="-122"/>
                 <a:cs typeface="Calibri" pitchFamily="34" charset="-120"/>
               </a:rPr>
-              <a:t>Habit one: look at the distribution before the mean. Count data is skewed: most paragraphs of Dracula contain "night" zero times, a few contain many. Mean and median disagree, and the mean alone misleads.</a:t>
+              <a:t>Habit one: look at the distribution before the mean. Count data is skewed: most r/gardening comments mention plants zero or one time, a few mention many. Mean and median disagree, and the mean alone misleads.</a:t>
             </a:r>
             <a:endParaRPr lang="en-US" sz="1650" dirty="0"/>
           </a:p>
@@ -8584,7 +8584,7 @@
                 <a:ea typeface="Calibri" pitchFamily="34" charset="-122"/>
                 <a:cs typeface="Calibri" pitchFamily="34" charset="-120"/>
               </a:rPr>
-              <a:t>Habit two: divide by a denominator. The novels outweigh all 154 sonnets combined, so raw totals always vote for the novels. Rates per 1,000 words: "love" is 10.8 in the sonnets, 0.7 in Frankenstein.</a:t>
+              <a:t>Habit two: divide by a denominator. Communities differ in how much they write, so raw totals mislead. Rates per 1,000 words: "water" is 3.9 in r/gardening and 0.1 elsewhere; "feel" is 1.8 in r/relationship_advice.</a:t>
             </a:r>
             <a:endParaRPr lang="en-US" sz="1650" dirty="0"/>
           </a:p>

--- a/slides/pptx/week-02.pptx
+++ b/slides/pptx/week-02.pptx
@@ -2890,7 +2890,7 @@
         <p:spPr>
           <a:xfrm>
             <a:off x="1097280" y="2240280"/>
-            <a:ext cx="10607040" cy="1017270"/>
+            <a:ext cx="10607040" cy="813816"/>
           </a:xfrm>
           <a:prstGeom prst="rect">
             <a:avLst/>
@@ -2911,7 +2911,7 @@
               <a:buNone/>
             </a:pPr>
             <a:r>
-              <a:rPr lang="en-US" sz="1650" dirty="0">
+              <a:rPr lang="en-US" sz="1500" dirty="0">
                 <a:solidFill>
                   <a:srgbClr val="1A1A1A"/>
                 </a:solidFill>
@@ -2921,7 +2921,7 @@
               </a:rPr>
               <a:t>For every word: how much likelier is it in corpus A than corpus B? A log-odds ratio, smoothed so rare words don't explode.</a:t>
             </a:r>
-            <a:endParaRPr lang="en-US" sz="1650" dirty="0"/>
+            <a:endParaRPr lang="en-US" sz="1500" dirty="0"/>
           </a:p>
         </p:txBody>
       </p:sp>
@@ -2933,7 +2933,7 @@
         </p:nvSpPr>
         <p:spPr>
           <a:xfrm>
-            <a:off x="640080" y="3348990"/>
+            <a:off x="640080" y="3145536"/>
             <a:ext cx="201168" cy="201168"/>
           </a:xfrm>
           <a:prstGeom prst="ellipse">
@@ -2953,8 +2953,8 @@
         </p:nvSpPr>
         <p:spPr>
           <a:xfrm>
-            <a:off x="1097280" y="3257550"/>
-            <a:ext cx="10607040" cy="1017270"/>
+            <a:off x="1097280" y="3054096"/>
+            <a:ext cx="10607040" cy="813816"/>
           </a:xfrm>
           <a:prstGeom prst="rect">
             <a:avLst/>
@@ -2975,7 +2975,7 @@
               <a:buNone/>
             </a:pPr>
             <a:r>
-              <a:rPr lang="en-US" sz="1650" dirty="0">
+              <a:rPr lang="en-US" sz="1500" dirty="0">
                 <a:solidFill>
                   <a:srgbClr val="1A1A1A"/>
                 </a:solidFill>
@@ -2985,7 +2985,7 @@
               </a:rPr>
               <a:t>Strongly positive = distinctively A. Strongly negative = distinctively B. The middle is shared language.</a:t>
             </a:r>
-            <a:endParaRPr lang="en-US" sz="1650" dirty="0"/>
+            <a:endParaRPr lang="en-US" sz="1500" dirty="0"/>
           </a:p>
         </p:txBody>
       </p:sp>
@@ -2997,7 +2997,7 @@
         </p:nvSpPr>
         <p:spPr>
           <a:xfrm>
-            <a:off x="640080" y="4366260"/>
+            <a:off x="640080" y="3959352"/>
             <a:ext cx="201168" cy="201168"/>
           </a:xfrm>
           <a:prstGeom prst="ellipse">
@@ -3017,8 +3017,8 @@
         </p:nvSpPr>
         <p:spPr>
           <a:xfrm>
-            <a:off x="1097280" y="4274820"/>
-            <a:ext cx="10607040" cy="1017270"/>
+            <a:off x="1097280" y="3867912"/>
+            <a:ext cx="10607040" cy="813816"/>
           </a:xfrm>
           <a:prstGeom prst="rect">
             <a:avLst/>
@@ -3039,7 +3039,7 @@
               <a:buNone/>
             </a:pPr>
             <a:r>
-              <a:rPr lang="en-US" sz="1650" dirty="0">
+              <a:rPr lang="en-US" sz="1500" dirty="0">
                 <a:solidFill>
                   <a:srgbClr val="1A1A1A"/>
                 </a:solidFill>
@@ -3049,7 +3049,7 @@
               </a:rPr>
               <a:t>She Giggles, He Gallops is exactly this method: verbs after "she" vs. "he" in 2,000 screenplays. Women snuggle, giggle, squeal; men gallop, strap, shoot.</a:t>
             </a:r>
-            <a:endParaRPr lang="en-US" sz="1650" dirty="0"/>
+            <a:endParaRPr lang="en-US" sz="1500" dirty="0"/>
           </a:p>
         </p:txBody>
       </p:sp>
@@ -3061,7 +3061,7 @@
         </p:nvSpPr>
         <p:spPr>
           <a:xfrm>
-            <a:off x="640080" y="5383530"/>
+            <a:off x="640080" y="4773168"/>
             <a:ext cx="201168" cy="201168"/>
           </a:xfrm>
           <a:prstGeom prst="ellipse">
@@ -3081,8 +3081,8 @@
         </p:nvSpPr>
         <p:spPr>
           <a:xfrm>
-            <a:off x="1097280" y="5292090"/>
-            <a:ext cx="10607040" cy="1017270"/>
+            <a:off x="1097280" y="4681728"/>
+            <a:ext cx="10607040" cy="813816"/>
           </a:xfrm>
           <a:prstGeom prst="rect">
             <a:avLst/>
@@ -3103,7 +3103,7 @@
               <a:buNone/>
             </a:pPr>
             <a:r>
-              <a:rPr lang="en-US" sz="1650" dirty="0">
+              <a:rPr lang="en-US" sz="1500" dirty="0">
                 <a:solidFill>
                   <a:srgbClr val="1A1A1A"/>
                 </a:solidFill>
@@ -3111,9 +3111,73 @@
                 <a:ea typeface="Calibri" pitchFamily="34" charset="-122"/>
                 <a:cs typeface="Calibri" pitchFamily="34" charset="-120"/>
               </a:rPr>
+              <a:t>Standardize the log-odds by their variance (Monroe et al.'s Fightin' Words) and the lists change character: topic words sink, register surfaces. r/buildapc's strongest markers become you/your (an advice room), r/gardening's i/we/them (a stories room).</a:t>
+            </a:r>
+            <a:endParaRPr lang="en-US" sz="1500" dirty="0"/>
+          </a:p>
+        </p:txBody>
+      </p:sp>
+      <p:sp>
+        <p:nvSpPr>
+          <p:cNvPr id="13" name="Shape 11"/>
+          <p:cNvSpPr/>
+          <p:nvPr/>
+        </p:nvSpPr>
+        <p:spPr>
+          <a:xfrm>
+            <a:off x="640080" y="5586984"/>
+            <a:ext cx="201168" cy="201168"/>
+          </a:xfrm>
+          <a:prstGeom prst="ellipse">
+            <a:avLst/>
+          </a:prstGeom>
+          <a:solidFill>
+            <a:srgbClr val="3F6F5F"/>
+          </a:solidFill>
+          <a:ln/>
+        </p:spPr>
+      </p:sp>
+      <p:sp>
+        <p:nvSpPr>
+          <p:cNvPr id="14" name="Text 12"/>
+          <p:cNvSpPr/>
+          <p:nvPr/>
+        </p:nvSpPr>
+        <p:spPr>
+          <a:xfrm>
+            <a:off x="1097280" y="5495544"/>
+            <a:ext cx="10607040" cy="813816"/>
+          </a:xfrm>
+          <a:prstGeom prst="rect">
+            <a:avLst/>
+          </a:prstGeom>
+          <a:noFill/>
+          <a:ln/>
+        </p:spPr>
+        <p:txBody>
+          <a:bodyPr wrap="square" rtlCol="0" anchor="t">
+            <a:spAutoFit/>
+          </a:bodyPr>
+          <a:lstStyle/>
+          <a:p>
+            <a:pPr indent="0" marL="0">
+              <a:lnSpc>
+                <a:spcPct val="112000"/>
+              </a:lnSpc>
+              <a:buNone/>
+            </a:pPr>
+            <a:r>
+              <a:rPr lang="en-US" sz="1500" dirty="0">
+                <a:solidFill>
+                  <a:srgbClr val="1A1A1A"/>
+                </a:solidFill>
+                <a:latin typeface="Calibri" pitchFamily="34" charset="0"/>
+                <a:ea typeface="Calibri" pitchFamily="34" charset="-122"/>
+                <a:cs typeface="Calibri" pitchFamily="34" charset="-120"/>
+              </a:rPr>
               <a:t>The corpus pair is a choice: this artist against pop, this subreddit against a novel. Different pair, different "distinctive."</a:t>
             </a:r>
-            <a:endParaRPr lang="en-US" sz="1650" dirty="0"/>
+            <a:endParaRPr lang="en-US" sz="1500" dirty="0"/>
           </a:p>
         </p:txBody>
       </p:sp>
@@ -4769,7 +4833,7 @@
                 <a:ea typeface="Calibri" pitchFamily="34" charset="-122"/>
                 <a:cs typeface="Calibri" pitchFamily="34" charset="-120"/>
               </a:rPr>
-              <a:t>N-grams and statistics, hands-on: bigrams across three corpora, distributions and mean-versus-median on real counts, rates per 1,000 words. Then tf-idf at two scales, single comments as documents and twelve whole subreddits as documents, each community sight-read from its distinctive words (cpu and coolers, roth and rates, puts and bears), and k-means on 360 live Reddit comments from three subreddits: raw counts give a blob, tf-idf plus 60 dimensions sorts six in seven comments with their community. The representation, not the algorithm, does the work. Closer: the same k-means on twenty Met paintings counted into 27 color buckets sorts portraits from landscapes, three in four.</a:t>
+              <a:t>N-grams and statistics, hands-on: bigrams across three corpora, distributions and mean-versus-median on real counts, rates per 1,000 words, z-scores as the common scale. Then tf-idf at two scales, single comments as documents and twelve whole subreddits as documents, each community sight-read from its distinctive words (cpu and coolers, roth and rates, puts and bears), and k-means on 360 live Reddit comments from three subreddits: raw counts give a blob, tf-idf plus 60 dimensions sorts six in seven comments with their community. The representation, not the algorithm, does the work. Closer: the same k-means on twenty Met paintings counted into 27 color buckets sorts portraits from landscapes, three in four.</a:t>
             </a:r>
             <a:endParaRPr lang="en-US" sz="1100" dirty="0"/>
           </a:p>
@@ -8491,7 +8555,7 @@
         <p:spPr>
           <a:xfrm>
             <a:off x="1097280" y="2240280"/>
-            <a:ext cx="10607040" cy="1017270"/>
+            <a:ext cx="10607040" cy="813816"/>
           </a:xfrm>
           <a:prstGeom prst="rect">
             <a:avLst/>
@@ -8512,7 +8576,7 @@
               <a:buNone/>
             </a:pPr>
             <a:r>
-              <a:rPr lang="en-US" sz="1650" dirty="0">
+              <a:rPr lang="en-US" sz="1500" dirty="0">
                 <a:solidFill>
                   <a:srgbClr val="1A1A1A"/>
                 </a:solidFill>
@@ -8522,7 +8586,7 @@
               </a:rPr>
               <a:t>Habit one: look at the distribution before the mean. Count data is skewed: most r/gardening comments mention plants zero or one time, a few mention many. Mean and median disagree, and the mean alone misleads.</a:t>
             </a:r>
-            <a:endParaRPr lang="en-US" sz="1650" dirty="0"/>
+            <a:endParaRPr lang="en-US" sz="1500" dirty="0"/>
           </a:p>
         </p:txBody>
       </p:sp>
@@ -8534,7 +8598,7 @@
         </p:nvSpPr>
         <p:spPr>
           <a:xfrm>
-            <a:off x="640080" y="3348990"/>
+            <a:off x="640080" y="3145536"/>
             <a:ext cx="201168" cy="201168"/>
           </a:xfrm>
           <a:prstGeom prst="ellipse">
@@ -8554,8 +8618,8 @@
         </p:nvSpPr>
         <p:spPr>
           <a:xfrm>
-            <a:off x="1097280" y="3257550"/>
-            <a:ext cx="10607040" cy="1017270"/>
+            <a:off x="1097280" y="3054096"/>
+            <a:ext cx="10607040" cy="813816"/>
           </a:xfrm>
           <a:prstGeom prst="rect">
             <a:avLst/>
@@ -8576,7 +8640,7 @@
               <a:buNone/>
             </a:pPr>
             <a:r>
-              <a:rPr lang="en-US" sz="1650" dirty="0">
+              <a:rPr lang="en-US" sz="1500" dirty="0">
                 <a:solidFill>
                   <a:srgbClr val="1A1A1A"/>
                 </a:solidFill>
@@ -8586,7 +8650,7 @@
               </a:rPr>
               <a:t>Habit two: divide by a denominator. Communities differ in how much they write, so raw totals mislead. Rates per 1,000 words: "water" is 3.9 in r/gardening and 0.1 elsewhere; "feel" is 1.8 in r/relationship_advice.</a:t>
             </a:r>
-            <a:endParaRPr lang="en-US" sz="1650" dirty="0"/>
+            <a:endParaRPr lang="en-US" sz="1500" dirty="0"/>
           </a:p>
         </p:txBody>
       </p:sp>
@@ -8598,7 +8662,7 @@
         </p:nvSpPr>
         <p:spPr>
           <a:xfrm>
-            <a:off x="640080" y="4366260"/>
+            <a:off x="640080" y="3959352"/>
             <a:ext cx="201168" cy="201168"/>
           </a:xfrm>
           <a:prstGeom prst="ellipse">
@@ -8618,8 +8682,8 @@
         </p:nvSpPr>
         <p:spPr>
           <a:xfrm>
-            <a:off x="1097280" y="4274820"/>
-            <a:ext cx="10607040" cy="1017270"/>
+            <a:off x="1097280" y="3867912"/>
+            <a:ext cx="10607040" cy="813816"/>
           </a:xfrm>
           <a:prstGeom prst="rect">
             <a:avLst/>
@@ -8640,7 +8704,7 @@
               <a:buNone/>
             </a:pPr>
             <a:r>
-              <a:rPr lang="en-US" sz="1650" dirty="0">
+              <a:rPr lang="en-US" sz="1500" dirty="0">
                 <a:solidFill>
                   <a:srgbClr val="1A1A1A"/>
                 </a:solidFill>
@@ -8648,9 +8712,9 @@
                 <a:ea typeface="Calibri" pitchFamily="34" charset="-122"/>
                 <a:cs typeface="Calibri" pitchFamily="34" charset="-120"/>
               </a:rPr>
-              <a:t>Habit three: a gap between rates can still be luck. That is the shuffle test's question, and it closes the session.</a:t>
-            </a:r>
-            <a:endParaRPr lang="en-US" sz="1650" dirty="0"/>
+              <a:t>Habit three: standardize. A z-score rescales any number as distance from typical in units of spread: a comment with three plant mentions sits at z = +4.7, its 73-word length at +1.2. Unlike scales become comparable. Lemmatization is the same idea for word forms; the shuffle test is the same idea for gaps.</a:t>
+            </a:r>
+            <a:endParaRPr lang="en-US" sz="1500" dirty="0"/>
           </a:p>
         </p:txBody>
       </p:sp>
@@ -8662,7 +8726,7 @@
         </p:nvSpPr>
         <p:spPr>
           <a:xfrm>
-            <a:off x="640080" y="5383530"/>
+            <a:off x="640080" y="4773168"/>
             <a:ext cx="201168" cy="201168"/>
           </a:xfrm>
           <a:prstGeom prst="ellipse">
@@ -8682,8 +8746,8 @@
         </p:nvSpPr>
         <p:spPr>
           <a:xfrm>
-            <a:off x="1097280" y="5292090"/>
-            <a:ext cx="10607040" cy="1017270"/>
+            <a:off x="1097280" y="4681728"/>
+            <a:ext cx="10607040" cy="813816"/>
           </a:xfrm>
           <a:prstGeom prst="rect">
             <a:avLst/>
@@ -8704,7 +8768,7 @@
               <a:buNone/>
             </a:pPr>
             <a:r>
-              <a:rPr lang="en-US" sz="1650" dirty="0">
+              <a:rPr lang="en-US" sz="1500" dirty="0">
                 <a:solidFill>
                   <a:srgbClr val="1A1A1A"/>
                 </a:solidFill>
@@ -8712,9 +8776,73 @@
                 <a:ea typeface="Calibri" pitchFamily="34" charset="-122"/>
                 <a:cs typeface="Calibri" pitchFamily="34" charset="-120"/>
               </a:rPr>
+              <a:t>Habit four: a gap between rates can still be luck. That is the shuffle test's question, and it closes the session.</a:t>
+            </a:r>
+            <a:endParaRPr lang="en-US" sz="1500" dirty="0"/>
+          </a:p>
+        </p:txBody>
+      </p:sp>
+      <p:sp>
+        <p:nvSpPr>
+          <p:cNvPr id="13" name="Shape 11"/>
+          <p:cNvSpPr/>
+          <p:nvPr/>
+        </p:nvSpPr>
+        <p:spPr>
+          <a:xfrm>
+            <a:off x="640080" y="5586984"/>
+            <a:ext cx="201168" cy="201168"/>
+          </a:xfrm>
+          <a:prstGeom prst="ellipse">
+            <a:avLst/>
+          </a:prstGeom>
+          <a:solidFill>
+            <a:srgbClr val="3F6F5F"/>
+          </a:solidFill>
+          <a:ln/>
+        </p:spPr>
+      </p:sp>
+      <p:sp>
+        <p:nvSpPr>
+          <p:cNvPr id="14" name="Text 12"/>
+          <p:cNvSpPr/>
+          <p:nvPr/>
+        </p:nvSpPr>
+        <p:spPr>
+          <a:xfrm>
+            <a:off x="1097280" y="5495544"/>
+            <a:ext cx="10607040" cy="813816"/>
+          </a:xfrm>
+          <a:prstGeom prst="rect">
+            <a:avLst/>
+          </a:prstGeom>
+          <a:noFill/>
+          <a:ln/>
+        </p:spPr>
+        <p:txBody>
+          <a:bodyPr wrap="square" rtlCol="0" anchor="t">
+            <a:spAutoFit/>
+          </a:bodyPr>
+          <a:lstStyle/>
+          <a:p>
+            <a:pPr indent="0" marL="0">
+              <a:lnSpc>
+                <a:spcPct val="112000"/>
+              </a:lnSpc>
+              <a:buNone/>
+            </a:pPr>
+            <a:r>
+              <a:rPr lang="en-US" sz="1500" dirty="0">
+                <a:solidFill>
+                  <a:srgbClr val="1A1A1A"/>
+                </a:solidFill>
+                <a:latin typeface="Calibri" pitchFamily="34" charset="0"/>
+                <a:ea typeface="Calibri" pitchFamily="34" charset="-122"/>
+                <a:cs typeface="Calibri" pitchFamily="34" charset="-120"/>
+              </a:rPr>
               <a:t>A difference can be real and still small; a big difference can be an artifact of the denominator. Say which you have.</a:t>
             </a:r>
-            <a:endParaRPr lang="en-US" sz="1650" dirty="0"/>
+            <a:endParaRPr lang="en-US" sz="1500" dirty="0"/>
           </a:p>
         </p:txBody>
       </p:sp>

--- a/slides/pptx/week-02.pptx
+++ b/slides/pptx/week-02.pptx
@@ -21,9 +21,10 @@
     <p:sldId id="269" r:id="rId15"/>
     <p:sldId id="270" r:id="rId16"/>
     <p:sldId id="271" r:id="rId17"/>
+    <p:sldId id="272" r:id="rId18"/>
   </p:sldIdLst>
   <p:notesMasterIdLst>
-    <p:notesMasterId r:id="rId18"/>
+    <p:notesMasterId r:id="rId19"/>
   </p:notesMasterIdLst>
   <p:sldSz cx="12191695" cy="6858000"/>
   <p:notesSz cx="6858000" cy="12191695"/>
@@ -1175,6 +1176,94 @@
 </p:notes>
 </file>
 
+<file path=ppt/notesSlides/notesSlide17.xml><?xml version="1.0" encoding="utf-8"?>
+<p:notes xmlns:a="http://schemas.openxmlformats.org/drawingml/2006/main" xmlns:r="http://schemas.openxmlformats.org/officeDocument/2006/relationships" xmlns:p="http://schemas.openxmlformats.org/presentationml/2006/main">
+  <p:cSld>
+    <p:spTree>
+      <p:nvGrpSpPr>
+        <p:cNvPr id="1" name=""/>
+        <p:cNvGrpSpPr/>
+        <p:nvPr/>
+      </p:nvGrpSpPr>
+      <p:grpSpPr>
+        <a:xfrm>
+          <a:off x="0" y="0"/>
+          <a:ext cx="0" cy="0"/>
+          <a:chOff x="0" y="0"/>
+          <a:chExt cx="0" cy="0"/>
+        </a:xfrm>
+      </p:grpSpPr>
+      <p:sp>
+        <p:nvSpPr>
+          <p:cNvPr id="2" name="Slide Image Placeholder 1"/>
+          <p:cNvSpPr>
+            <a:spLocks noGrp="1" noRot="1" noChangeAspect="1"/>
+          </p:cNvSpPr>
+          <p:nvPr>
+            <p:ph type="sldImg"/>
+          </p:nvPr>
+        </p:nvSpPr>
+        <p:spPr/>
+      </p:sp>
+      <p:sp>
+        <p:nvSpPr>
+          <p:cNvPr id="3" name="Notes Placeholder 2"/>
+          <p:cNvSpPr>
+            <a:spLocks noGrp="1"/>
+          </p:cNvSpPr>
+          <p:nvPr>
+            <p:ph type="body" idx="1"/>
+          </p:nvPr>
+        </p:nvSpPr>
+        <p:spPr/>
+        <p:txBody>
+          <a:bodyPr/>
+          <a:lstStyle/>
+          <a:p>
+            <a:r>
+              <a:rPr lang="en-US" dirty="0"/>
+              <a:t/>
+            </a:r>
+            <a:endParaRPr lang="en-US" dirty="0"/>
+          </a:p>
+        </p:txBody>
+      </p:sp>
+      <p:sp>
+        <p:nvSpPr>
+          <p:cNvPr id="4" name="Slide Number Placeholder 3"/>
+          <p:cNvSpPr>
+            <a:spLocks noGrp="1"/>
+          </p:cNvSpPr>
+          <p:nvPr>
+            <p:ph type="sldNum" sz="quarter" idx="10"/>
+          </p:nvPr>
+        </p:nvSpPr>
+        <p:spPr/>
+        <p:txBody>
+          <a:bodyPr/>
+          <a:lstStyle/>
+          <a:p>
+            <a:fld id="{F7021451-1387-4CA6-816F-3879F97B5CBC}" type="slidenum">
+              <a:rPr lang="en-US"/>
+              <a:t>17</a:t>
+            </a:fld>
+            <a:endParaRPr lang="en-US"/>
+          </a:p>
+        </p:txBody>
+      </p:sp>
+    </p:spTree>
+    <p:extLst>
+      <p:ext uri="{BB962C8B-B14F-4D97-AF65-F5344CB8AC3E}">
+        <p14:creationId xmlns:p14="http://schemas.microsoft.com/office/powerpoint/2010/main" val="1024086991"/>
+      </p:ext>
+    </p:extLst>
+  </p:cSld>
+  <p:clrMapOvr>
+    <a:masterClrMapping/>
+  </p:clrMapOvr>
+</p:notes>
+</file>
+
 <file path=ppt/notesSlides/notesSlide2.xml><?xml version="1.0" encoding="utf-8"?>
 <p:notes xmlns:a="http://schemas.openxmlformats.org/drawingml/2006/main" xmlns:r="http://schemas.openxmlformats.org/officeDocument/2006/relationships" xmlns:p="http://schemas.openxmlformats.org/presentationml/2006/main">
   <p:cSld>
@@ -2855,7 +2944,7 @@
                 <a:ea typeface="Cambria" pitchFamily="34" charset="-122"/>
                 <a:cs typeface="Cambria" pitchFamily="34" charset="-120"/>
               </a:rPr>
-              <a:t>Keyness: what makes a voice distinctive</a:t>
+              <a:t>Where counting fails</a:t>
             </a:r>
             <a:endParaRPr lang="en-US" sz="3000" dirty="0"/>
           </a:p>
@@ -2890,7 +2979,7 @@
         <p:spPr>
           <a:xfrm>
             <a:off x="1097280" y="2240280"/>
-            <a:ext cx="10607040" cy="813816"/>
+            <a:ext cx="10607040" cy="1017270"/>
           </a:xfrm>
           <a:prstGeom prst="rect">
             <a:avLst/>
@@ -2911,7 +3000,7 @@
               <a:buNone/>
             </a:pPr>
             <a:r>
-              <a:rPr lang="en-US" sz="1500" dirty="0">
+              <a:rPr lang="en-US" sz="1650" dirty="0">
                 <a:solidFill>
                   <a:srgbClr val="1A1A1A"/>
                 </a:solidFill>
@@ -2919,9 +3008,9 @@
                 <a:ea typeface="Calibri" pitchFamily="34" charset="-122"/>
                 <a:cs typeface="Calibri" pitchFamily="34" charset="-120"/>
               </a:rPr>
-              <a:t>For every word: how much likelier is it in corpus A than corpus B? A log-odds ratio, smoothed so rare words don't explode.</a:t>
-            </a:r>
-            <a:endParaRPr lang="en-US" sz="1500" dirty="0"/>
+              <a:t>Negation: "I am not happy" adds one to the happy count. Bigrams catch a little of this; most context is invisible to a counter.</a:t>
+            </a:r>
+            <a:endParaRPr lang="en-US" sz="1650" dirty="0"/>
           </a:p>
         </p:txBody>
       </p:sp>
@@ -2933,7 +3022,7 @@
         </p:nvSpPr>
         <p:spPr>
           <a:xfrm>
-            <a:off x="640080" y="3145536"/>
+            <a:off x="640080" y="3348990"/>
             <a:ext cx="201168" cy="201168"/>
           </a:xfrm>
           <a:prstGeom prst="ellipse">
@@ -2953,8 +3042,8 @@
         </p:nvSpPr>
         <p:spPr>
           <a:xfrm>
-            <a:off x="1097280" y="3054096"/>
-            <a:ext cx="10607040" cy="813816"/>
+            <a:off x="1097280" y="3257550"/>
+            <a:ext cx="10607040" cy="1017270"/>
           </a:xfrm>
           <a:prstGeom prst="rect">
             <a:avLst/>
@@ -2975,7 +3064,7 @@
               <a:buNone/>
             </a:pPr>
             <a:r>
-              <a:rPr lang="en-US" sz="1500" dirty="0">
+              <a:rPr lang="en-US" sz="1650" dirty="0">
                 <a:solidFill>
                   <a:srgbClr val="1A1A1A"/>
                 </a:solidFill>
@@ -2983,9 +3072,9 @@
                 <a:ea typeface="Calibri" pitchFamily="34" charset="-122"/>
                 <a:cs typeface="Calibri" pitchFamily="34" charset="-120"/>
               </a:rPr>
-              <a:t>Strongly positive = distinctively A. Strongly negative = distinctively B. The middle is shared language.</a:t>
-            </a:r>
-            <a:endParaRPr lang="en-US" sz="1500" dirty="0"/>
+              <a:t>The stemmer is rules without a dictionary: universal, university, and universe all become "univers".</a:t>
+            </a:r>
+            <a:endParaRPr lang="en-US" sz="1650" dirty="0"/>
           </a:p>
         </p:txBody>
       </p:sp>
@@ -2997,7 +3086,7 @@
         </p:nvSpPr>
         <p:spPr>
           <a:xfrm>
-            <a:off x="640080" y="3959352"/>
+            <a:off x="640080" y="4366260"/>
             <a:ext cx="201168" cy="201168"/>
           </a:xfrm>
           <a:prstGeom prst="ellipse">
@@ -3017,8 +3106,8 @@
         </p:nvSpPr>
         <p:spPr>
           <a:xfrm>
-            <a:off x="1097280" y="3867912"/>
-            <a:ext cx="10607040" cy="813816"/>
+            <a:off x="1097280" y="4274820"/>
+            <a:ext cx="10607040" cy="1017270"/>
           </a:xfrm>
           <a:prstGeom prst="rect">
             <a:avLst/>
@@ -3039,7 +3128,7 @@
               <a:buNone/>
             </a:pPr>
             <a:r>
-              <a:rPr lang="en-US" sz="1500" dirty="0">
+              <a:rPr lang="en-US" sz="1650" dirty="0">
                 <a:solidFill>
                   <a:srgbClr val="1A1A1A"/>
                 </a:solidFill>
@@ -3047,9 +3136,9 @@
                 <a:ea typeface="Calibri" pitchFamily="34" charset="-122"/>
                 <a:cs typeface="Calibri" pitchFamily="34" charset="-120"/>
               </a:rPr>
-              <a:t>She Giggles, He Gallops is exactly this method: verbs after "she" vs. "he" in 2,000 screenplays. Women snuggle, giggle, squeal; men gallop, strap, shoot.</a:t>
-            </a:r>
-            <a:endParaRPr lang="en-US" sz="1500" dirty="0"/>
+              <a:t>The lemmatizer needs the part of speech: "saw" is a tool as a noun and the past of see as a verb; told nothing, it guesses.</a:t>
+            </a:r>
+            <a:endParaRPr lang="en-US" sz="1650" dirty="0"/>
           </a:p>
         </p:txBody>
       </p:sp>
@@ -3061,7 +3150,7 @@
         </p:nvSpPr>
         <p:spPr>
           <a:xfrm>
-            <a:off x="640080" y="4773168"/>
+            <a:off x="640080" y="5383530"/>
             <a:ext cx="201168" cy="201168"/>
           </a:xfrm>
           <a:prstGeom prst="ellipse">
@@ -3081,8 +3170,8 @@
         </p:nvSpPr>
         <p:spPr>
           <a:xfrm>
-            <a:off x="1097280" y="4681728"/>
-            <a:ext cx="10607040" cy="813816"/>
+            <a:off x="1097280" y="5292090"/>
+            <a:ext cx="10607040" cy="1017270"/>
           </a:xfrm>
           <a:prstGeom prst="rect">
             <a:avLst/>
@@ -3103,7 +3192,7 @@
               <a:buNone/>
             </a:pPr>
             <a:r>
-              <a:rPr lang="en-US" sz="1500" dirty="0">
+              <a:rPr lang="en-US" sz="1650" dirty="0">
                 <a:solidFill>
                   <a:srgbClr val="1A1A1A"/>
                 </a:solidFill>
@@ -3111,73 +3200,9 @@
                 <a:ea typeface="Calibri" pitchFamily="34" charset="-122"/>
                 <a:cs typeface="Calibri" pitchFamily="34" charset="-120"/>
               </a:rPr>
-              <a:t>Standardize the log-odds by their variance (Monroe et al.'s Fightin' Words) and the lists change character: topic words sink, register surfaces. r/buildapc's strongest markers become you/your (an advice room), r/gardening's i/we/them (a stories room).</a:t>
-            </a:r>
-            <a:endParaRPr lang="en-US" sz="1500" dirty="0"/>
-          </a:p>
-        </p:txBody>
-      </p:sp>
-      <p:sp>
-        <p:nvSpPr>
-          <p:cNvPr id="13" name="Shape 11"/>
-          <p:cNvSpPr/>
-          <p:nvPr/>
-        </p:nvSpPr>
-        <p:spPr>
-          <a:xfrm>
-            <a:off x="640080" y="5586984"/>
-            <a:ext cx="201168" cy="201168"/>
-          </a:xfrm>
-          <a:prstGeom prst="ellipse">
-            <a:avLst/>
-          </a:prstGeom>
-          <a:solidFill>
-            <a:srgbClr val="3F6F5F"/>
-          </a:solidFill>
-          <a:ln/>
-        </p:spPr>
-      </p:sp>
-      <p:sp>
-        <p:nvSpPr>
-          <p:cNvPr id="14" name="Text 12"/>
-          <p:cNvSpPr/>
-          <p:nvPr/>
-        </p:nvSpPr>
-        <p:spPr>
-          <a:xfrm>
-            <a:off x="1097280" y="5495544"/>
-            <a:ext cx="10607040" cy="813816"/>
-          </a:xfrm>
-          <a:prstGeom prst="rect">
-            <a:avLst/>
-          </a:prstGeom>
-          <a:noFill/>
-          <a:ln/>
-        </p:spPr>
-        <p:txBody>
-          <a:bodyPr wrap="square" rtlCol="0" anchor="t">
-            <a:spAutoFit/>
-          </a:bodyPr>
-          <a:lstStyle/>
-          <a:p>
-            <a:pPr indent="0" marL="0">
-              <a:lnSpc>
-                <a:spcPct val="112000"/>
-              </a:lnSpc>
-              <a:buNone/>
-            </a:pPr>
-            <a:r>
-              <a:rPr lang="en-US" sz="1500" dirty="0">
-                <a:solidFill>
-                  <a:srgbClr val="1A1A1A"/>
-                </a:solidFill>
-                <a:latin typeface="Calibri" pitchFamily="34" charset="0"/>
-                <a:ea typeface="Calibri" pitchFamily="34" charset="-122"/>
-                <a:cs typeface="Calibri" pitchFamily="34" charset="-120"/>
-              </a:rPr>
-              <a:t>The corpus pair is a choice: this artist against pop, this subreddit against a novel. Different pair, different "distinctive."</a:t>
-            </a:r>
-            <a:endParaRPr lang="en-US" sz="1500" dirty="0"/>
+              <a:t>Polysemy: "sick beat" and "sick child" add to the same count. A word type is not a meaning. Week 5's embeddings exist for these holes, and bring their own.</a:t>
+            </a:r>
+            <a:endParaRPr lang="en-US" sz="1650" dirty="0"/>
           </a:p>
         </p:txBody>
       </p:sp>
@@ -3307,7 +3332,7 @@
                 <a:ea typeface="Cambria" pitchFamily="34" charset="-122"/>
                 <a:cs typeface="Cambria" pitchFamily="34" charset="-120"/>
               </a:rPr>
-              <a:t>The shuffle test: is the gap real?</a:t>
+              <a:t>Keyness: what makes a voice distinctive</a:t>
             </a:r>
             <a:endParaRPr lang="en-US" sz="3000" dirty="0"/>
           </a:p>
@@ -3342,7 +3367,7 @@
         <p:spPr>
           <a:xfrm>
             <a:off x="1097280" y="2240280"/>
-            <a:ext cx="10607040" cy="1017270"/>
+            <a:ext cx="10607040" cy="813816"/>
           </a:xfrm>
           <a:prstGeom prst="rect">
             <a:avLst/>
@@ -3363,7 +3388,7 @@
               <a:buNone/>
             </a:pPr>
             <a:r>
-              <a:rPr lang="en-US" sz="1650" dirty="0">
+              <a:rPr lang="en-US" sz="1500" dirty="0">
                 <a:solidFill>
                   <a:srgbClr val="1A1A1A"/>
                 </a:solidFill>
@@ -3371,9 +3396,9 @@
                 <a:ea typeface="Calibri" pitchFamily="34" charset="-122"/>
                 <a:cs typeface="Calibri" pitchFamily="34" charset="-120"/>
               </a:rPr>
-              <a:t>The question: could randomly dealt labels produce a gap this large?</a:t>
-            </a:r>
-            <a:endParaRPr lang="en-US" sz="1650" dirty="0"/>
+              <a:t>For every word: how much likelier is it in corpus A than corpus B? A log-odds ratio, smoothed so rare words don't explode.</a:t>
+            </a:r>
+            <a:endParaRPr lang="en-US" sz="1500" dirty="0"/>
           </a:p>
         </p:txBody>
       </p:sp>
@@ -3385,7 +3410,7 @@
         </p:nvSpPr>
         <p:spPr>
           <a:xfrm>
-            <a:off x="640080" y="3348990"/>
+            <a:off x="640080" y="3145536"/>
             <a:ext cx="201168" cy="201168"/>
           </a:xfrm>
           <a:prstGeom prst="ellipse">
@@ -3405,8 +3430,8 @@
         </p:nvSpPr>
         <p:spPr>
           <a:xfrm>
-            <a:off x="1097280" y="3257550"/>
-            <a:ext cx="10607040" cy="1017270"/>
+            <a:off x="1097280" y="3054096"/>
+            <a:ext cx="10607040" cy="813816"/>
           </a:xfrm>
           <a:prstGeom prst="rect">
             <a:avLst/>
@@ -3427,7 +3452,7 @@
               <a:buNone/>
             </a:pPr>
             <a:r>
-              <a:rPr lang="en-US" sz="1650" dirty="0">
+              <a:rPr lang="en-US" sz="1500" dirty="0">
                 <a:solidFill>
                   <a:srgbClr val="1A1A1A"/>
                 </a:solidFill>
@@ -3435,9 +3460,9 @@
                 <a:ea typeface="Calibri" pitchFamily="34" charset="-122"/>
                 <a:cs typeface="Calibri" pitchFamily="34" charset="-120"/>
               </a:rPr>
-              <a:t>Shuffle the labels, recount, 1,000 times. Mark where the real gap lands in that pile.</a:t>
-            </a:r>
-            <a:endParaRPr lang="en-US" sz="1650" dirty="0"/>
+              <a:t>Strongly positive = distinctively A. Strongly negative = distinctively B. The middle is shared language.</a:t>
+            </a:r>
+            <a:endParaRPr lang="en-US" sz="1500" dirty="0"/>
           </a:p>
         </p:txBody>
       </p:sp>
@@ -3449,7 +3474,7 @@
         </p:nvSpPr>
         <p:spPr>
           <a:xfrm>
-            <a:off x="640080" y="4366260"/>
+            <a:off x="640080" y="3959352"/>
             <a:ext cx="201168" cy="201168"/>
           </a:xfrm>
           <a:prstGeom prst="ellipse">
@@ -3469,8 +3494,8 @@
         </p:nvSpPr>
         <p:spPr>
           <a:xfrm>
-            <a:off x="1097280" y="4274820"/>
-            <a:ext cx="10607040" cy="1017270"/>
+            <a:off x="1097280" y="3867912"/>
+            <a:ext cx="10607040" cy="813816"/>
           </a:xfrm>
           <a:prstGeom prst="rect">
             <a:avLst/>
@@ -3491,7 +3516,7 @@
               <a:buNone/>
             </a:pPr>
             <a:r>
-              <a:rPr lang="en-US" sz="1650" dirty="0">
+              <a:rPr lang="en-US" sz="1500" dirty="0">
                 <a:solidFill>
                   <a:srgbClr val="1A1A1A"/>
                 </a:solidFill>
@@ -3499,9 +3524,9 @@
                 <a:ea typeface="Calibri" pitchFamily="34" charset="-122"/>
                 <a:cs typeface="Calibri" pitchFamily="34" charset="-120"/>
               </a:rPr>
-              <a:t>Chance rarely matches it: a finding. Chance matches it often: a coincidence.</a:t>
-            </a:r>
-            <a:endParaRPr lang="en-US" sz="1650" dirty="0"/>
+              <a:t>She Giggles, He Gallops is exactly this method: verbs after "she" vs. "he" in 2,000 screenplays. Women snuggle, giggle, squeal; men gallop, strap, shoot.</a:t>
+            </a:r>
+            <a:endParaRPr lang="en-US" sz="1500" dirty="0"/>
           </a:p>
         </p:txBody>
       </p:sp>
@@ -3513,7 +3538,7 @@
         </p:nvSpPr>
         <p:spPr>
           <a:xfrm>
-            <a:off x="640080" y="5383530"/>
+            <a:off x="640080" y="4773168"/>
             <a:ext cx="201168" cy="201168"/>
           </a:xfrm>
           <a:prstGeom prst="ellipse">
@@ -3533,8 +3558,8 @@
         </p:nvSpPr>
         <p:spPr>
           <a:xfrm>
-            <a:off x="1097280" y="5292090"/>
-            <a:ext cx="10607040" cy="1017270"/>
+            <a:off x="1097280" y="4681728"/>
+            <a:ext cx="10607040" cy="813816"/>
           </a:xfrm>
           <a:prstGeom prst="rect">
             <a:avLst/>
@@ -3555,7 +3580,7 @@
               <a:buNone/>
             </a:pPr>
             <a:r>
-              <a:rPr lang="en-US" sz="1650" dirty="0">
+              <a:rPr lang="en-US" sz="1500" dirty="0">
                 <a:solidFill>
                   <a:srgbClr val="1A1A1A"/>
                 </a:solidFill>
@@ -3563,9 +3588,73 @@
                 <a:ea typeface="Calibri" pitchFamily="34" charset="-122"/>
                 <a:cs typeface="Calibri" pitchFamily="34" charset="-120"/>
               </a:rPr>
-              <a:t>It says "probably not chance." It never says "big enough to matter." Effect size is your argument to make.</a:t>
-            </a:r>
-            <a:endParaRPr lang="en-US" sz="1650" dirty="0"/>
+              <a:t>Standardize the log-odds by their variance (Monroe et al.'s Fightin' Words) and the lists change character: topic words sink, register surfaces. r/buildapc's strongest markers become you/your (an advice room), r/gardening's i/we/them (a stories room).</a:t>
+            </a:r>
+            <a:endParaRPr lang="en-US" sz="1500" dirty="0"/>
+          </a:p>
+        </p:txBody>
+      </p:sp>
+      <p:sp>
+        <p:nvSpPr>
+          <p:cNvPr id="13" name="Shape 11"/>
+          <p:cNvSpPr/>
+          <p:nvPr/>
+        </p:nvSpPr>
+        <p:spPr>
+          <a:xfrm>
+            <a:off x="640080" y="5586984"/>
+            <a:ext cx="201168" cy="201168"/>
+          </a:xfrm>
+          <a:prstGeom prst="ellipse">
+            <a:avLst/>
+          </a:prstGeom>
+          <a:solidFill>
+            <a:srgbClr val="3F6F5F"/>
+          </a:solidFill>
+          <a:ln/>
+        </p:spPr>
+      </p:sp>
+      <p:sp>
+        <p:nvSpPr>
+          <p:cNvPr id="14" name="Text 12"/>
+          <p:cNvSpPr/>
+          <p:nvPr/>
+        </p:nvSpPr>
+        <p:spPr>
+          <a:xfrm>
+            <a:off x="1097280" y="5495544"/>
+            <a:ext cx="10607040" cy="813816"/>
+          </a:xfrm>
+          <a:prstGeom prst="rect">
+            <a:avLst/>
+          </a:prstGeom>
+          <a:noFill/>
+          <a:ln/>
+        </p:spPr>
+        <p:txBody>
+          <a:bodyPr wrap="square" rtlCol="0" anchor="t">
+            <a:spAutoFit/>
+          </a:bodyPr>
+          <a:lstStyle/>
+          <a:p>
+            <a:pPr indent="0" marL="0">
+              <a:lnSpc>
+                <a:spcPct val="112000"/>
+              </a:lnSpc>
+              <a:buNone/>
+            </a:pPr>
+            <a:r>
+              <a:rPr lang="en-US" sz="1500" dirty="0">
+                <a:solidFill>
+                  <a:srgbClr val="1A1A1A"/>
+                </a:solidFill>
+                <a:latin typeface="Calibri" pitchFamily="34" charset="0"/>
+                <a:ea typeface="Calibri" pitchFamily="34" charset="-122"/>
+                <a:cs typeface="Calibri" pitchFamily="34" charset="-120"/>
+              </a:rPr>
+              <a:t>The corpus pair is a choice: this artist against pop, this subreddit against a novel. Different pair, different "distinctive."</a:t>
+            </a:r>
+            <a:endParaRPr lang="en-US" sz="1500" dirty="0"/>
           </a:p>
         </p:txBody>
       </p:sp>
@@ -3603,14 +3692,34 @@
       </p:grpSpPr>
       <p:sp>
         <p:nvSpPr>
-          <p:cNvPr id="2" name="Text 0"/>
-          <p:cNvSpPr/>
-          <p:nvPr/>
-        </p:nvSpPr>
-        <p:spPr>
-          <a:xfrm>
-            <a:off x="640080" y="731520"/>
-            <a:ext cx="10058400" cy="731520"/>
+          <p:cNvPr id="2" name="Shape 0"/>
+          <p:cNvSpPr/>
+          <p:nvPr/>
+        </p:nvSpPr>
+        <p:spPr>
+          <a:xfrm>
+            <a:off x="0" y="0"/>
+            <a:ext cx="164592" cy="6858000"/>
+          </a:xfrm>
+          <a:prstGeom prst="rect">
+            <a:avLst/>
+          </a:prstGeom>
+          <a:solidFill>
+            <a:srgbClr val="B9852F"/>
+          </a:solidFill>
+          <a:ln/>
+        </p:spPr>
+      </p:sp>
+      <p:sp>
+        <p:nvSpPr>
+          <p:cNvPr id="3" name="Text 1"/>
+          <p:cNvSpPr/>
+          <p:nvPr/>
+        </p:nvSpPr>
+        <p:spPr>
+          <a:xfrm>
+            <a:off x="640080" y="640080"/>
+            <a:ext cx="10058400" cy="320040"/>
           </a:xfrm>
           <a:prstGeom prst="rect">
             <a:avLst/>
@@ -3620,6 +3729,47 @@
         </p:spPr>
         <p:txBody>
           <a:bodyPr wrap="square" rtlCol="0" anchor="ctr"/>
+          <a:lstStyle/>
+          <a:p>
+            <a:pPr indent="0" marL="0">
+              <a:buNone/>
+            </a:pPr>
+            <a:r>
+              <a:rPr lang="en-US" sz="1200" b="1" spc="300" kern="0" dirty="0">
+                <a:solidFill>
+                  <a:srgbClr val="B9852F"/>
+                </a:solidFill>
+                <a:latin typeface="Calibri" pitchFamily="34" charset="0"/>
+                <a:ea typeface="Calibri" pitchFamily="34" charset="-122"/>
+                <a:cs typeface="Calibri" pitchFamily="34" charset="-120"/>
+              </a:rPr>
+              <a:t>WEEK 2 · KEY POINTS</a:t>
+            </a:r>
+            <a:endParaRPr lang="en-US" sz="1200" dirty="0"/>
+          </a:p>
+        </p:txBody>
+      </p:sp>
+      <p:sp>
+        <p:nvSpPr>
+          <p:cNvPr id="4" name="Text 2"/>
+          <p:cNvSpPr/>
+          <p:nvPr/>
+        </p:nvSpPr>
+        <p:spPr>
+          <a:xfrm>
+            <a:off x="640080" y="1005840"/>
+            <a:ext cx="10881360" cy="914400"/>
+          </a:xfrm>
+          <a:prstGeom prst="rect">
+            <a:avLst/>
+          </a:prstGeom>
+          <a:noFill/>
+          <a:ln/>
+        </p:spPr>
+        <p:txBody>
+          <a:bodyPr wrap="square" rtlCol="0" anchor="t">
+            <a:spAutoFit/>
+          </a:bodyPr>
           <a:lstStyle/>
           <a:p>
             <a:pPr indent="0" marL="0">
@@ -3634,7 +3784,7 @@
                 <a:ea typeface="Cambria" pitchFamily="34" charset="-122"/>
                 <a:cs typeface="Cambria" pitchFamily="34" charset="-120"/>
               </a:rPr>
-              <a:t>Three modes today</a:t>
+              <a:t>The shuffle test: is the gap real?</a:t>
             </a:r>
             <a:endParaRPr lang="en-US" sz="3000" dirty="0"/>
           </a:p>
@@ -3642,134 +3792,98 @@
       </p:sp>
       <p:sp>
         <p:nvSpPr>
-          <p:cNvPr id="3" name="Text 1"/>
-          <p:cNvSpPr/>
-          <p:nvPr/>
-        </p:nvSpPr>
-        <p:spPr>
-          <a:xfrm>
-            <a:off x="640080" y="1417320"/>
-            <a:ext cx="10058400" cy="365760"/>
-          </a:xfrm>
-          <a:prstGeom prst="rect">
-            <a:avLst/>
-          </a:prstGeom>
-          <a:noFill/>
-          <a:ln/>
-        </p:spPr>
-        <p:txBody>
-          <a:bodyPr wrap="square" rtlCol="0" anchor="ctr"/>
-          <a:lstStyle/>
-          <a:p>
-            <a:pPr indent="0" marL="0">
-              <a:buNone/>
-            </a:pPr>
-            <a:r>
-              <a:rPr lang="en-US" sz="1400" i="1" dirty="0">
-                <a:solidFill>
-                  <a:srgbClr val="6B6B63"/>
+          <p:cNvPr id="5" name="Shape 3"/>
+          <p:cNvSpPr/>
+          <p:nvPr/>
+        </p:nvSpPr>
+        <p:spPr>
+          <a:xfrm>
+            <a:off x="640080" y="2331720"/>
+            <a:ext cx="201168" cy="201168"/>
+          </a:xfrm>
+          <a:prstGeom prst="ellipse">
+            <a:avLst/>
+          </a:prstGeom>
+          <a:solidFill>
+            <a:srgbClr val="7A3B2E"/>
+          </a:solidFill>
+          <a:ln/>
+        </p:spPr>
+      </p:sp>
+      <p:sp>
+        <p:nvSpPr>
+          <p:cNvPr id="6" name="Text 4"/>
+          <p:cNvSpPr/>
+          <p:nvPr/>
+        </p:nvSpPr>
+        <p:spPr>
+          <a:xfrm>
+            <a:off x="1097280" y="2240280"/>
+            <a:ext cx="10607040" cy="1017270"/>
+          </a:xfrm>
+          <a:prstGeom prst="rect">
+            <a:avLst/>
+          </a:prstGeom>
+          <a:noFill/>
+          <a:ln/>
+        </p:spPr>
+        <p:txBody>
+          <a:bodyPr wrap="square" rtlCol="0" anchor="t">
+            <a:spAutoFit/>
+          </a:bodyPr>
+          <a:lstStyle/>
+          <a:p>
+            <a:pPr indent="0" marL="0">
+              <a:lnSpc>
+                <a:spcPct val="112000"/>
+              </a:lnSpc>
+              <a:buNone/>
+            </a:pPr>
+            <a:r>
+              <a:rPr lang="en-US" sz="1650" dirty="0">
+                <a:solidFill>
+                  <a:srgbClr val="1A1A1A"/>
                 </a:solidFill>
                 <a:latin typeface="Calibri" pitchFamily="34" charset="0"/>
                 <a:ea typeface="Calibri" pitchFamily="34" charset="-122"/>
                 <a:cs typeface="Calibri" pitchFamily="34" charset="-120"/>
               </a:rPr>
-              <a:t>about a third of the session each</a:t>
-            </a:r>
-            <a:endParaRPr lang="en-US" sz="1400" dirty="0"/>
-          </a:p>
-        </p:txBody>
-      </p:sp>
-      <p:sp>
-        <p:nvSpPr>
-          <p:cNvPr id="4" name="Shape 2"/>
-          <p:cNvSpPr/>
-          <p:nvPr/>
-        </p:nvSpPr>
-        <p:spPr>
-          <a:xfrm>
-            <a:off x="640080" y="2194560"/>
-            <a:ext cx="3383280" cy="3291840"/>
-          </a:xfrm>
-          <a:prstGeom prst="roundRect">
-            <a:avLst>
-              <a:gd name="adj" fmla="val 3333"/>
-            </a:avLst>
-          </a:prstGeom>
-          <a:solidFill>
-            <a:srgbClr val="F4EEE8"/>
-          </a:solidFill>
-          <a:ln/>
-        </p:spPr>
-      </p:sp>
-      <p:sp>
-        <p:nvSpPr>
-          <p:cNvPr id="5" name="Shape 3"/>
-          <p:cNvSpPr/>
-          <p:nvPr/>
-        </p:nvSpPr>
-        <p:spPr>
-          <a:xfrm>
-            <a:off x="1051560" y="2606040"/>
-            <a:ext cx="548640" cy="548640"/>
+              <a:t>The question: could randomly dealt labels produce a gap this large?</a:t>
+            </a:r>
+            <a:endParaRPr lang="en-US" sz="1650" dirty="0"/>
+          </a:p>
+        </p:txBody>
+      </p:sp>
+      <p:sp>
+        <p:nvSpPr>
+          <p:cNvPr id="7" name="Shape 5"/>
+          <p:cNvSpPr/>
+          <p:nvPr/>
+        </p:nvSpPr>
+        <p:spPr>
+          <a:xfrm>
+            <a:off x="640080" y="3348990"/>
+            <a:ext cx="201168" cy="201168"/>
           </a:xfrm>
           <a:prstGeom prst="ellipse">
             <a:avLst/>
           </a:prstGeom>
           <a:solidFill>
-            <a:srgbClr val="7A3B2E"/>
-          </a:solidFill>
-          <a:ln/>
-        </p:spPr>
-      </p:sp>
-      <p:sp>
-        <p:nvSpPr>
-          <p:cNvPr id="6" name="Text 4"/>
-          <p:cNvSpPr/>
-          <p:nvPr/>
-        </p:nvSpPr>
-        <p:spPr>
-          <a:xfrm>
-            <a:off x="1005840" y="3383280"/>
-            <a:ext cx="2651760" cy="548640"/>
-          </a:xfrm>
-          <a:prstGeom prst="rect">
-            <a:avLst/>
-          </a:prstGeom>
-          <a:noFill/>
-          <a:ln/>
-        </p:spPr>
-        <p:txBody>
-          <a:bodyPr wrap="square" rtlCol="0" anchor="ctr"/>
-          <a:lstStyle/>
-          <a:p>
-            <a:pPr indent="0" marL="0">
-              <a:buNone/>
-            </a:pPr>
-            <a:r>
-              <a:rPr lang="en-US" sz="2100" b="1" dirty="0">
-                <a:solidFill>
-                  <a:srgbClr val="1A1A1A"/>
-                </a:solidFill>
-                <a:latin typeface="Cambria" pitchFamily="34" charset="0"/>
-                <a:ea typeface="Cambria" pitchFamily="34" charset="-122"/>
-                <a:cs typeface="Cambria" pitchFamily="34" charset="-120"/>
-              </a:rPr>
-              <a:t>Lecture / demo</a:t>
-            </a:r>
-            <a:endParaRPr lang="en-US" sz="2100" dirty="0"/>
-          </a:p>
-        </p:txBody>
-      </p:sp>
-      <p:sp>
-        <p:nvSpPr>
-          <p:cNvPr id="7" name="Text 5"/>
-          <p:cNvSpPr/>
-          <p:nvPr/>
-        </p:nvSpPr>
-        <p:spPr>
-          <a:xfrm>
-            <a:off x="1005840" y="3977640"/>
-            <a:ext cx="2651760" cy="1371600"/>
+            <a:srgbClr val="3F6F5F"/>
+          </a:solidFill>
+          <a:ln/>
+        </p:spPr>
+      </p:sp>
+      <p:sp>
+        <p:nvSpPr>
+          <p:cNvPr id="8" name="Text 6"/>
+          <p:cNvSpPr/>
+          <p:nvPr/>
+        </p:nvSpPr>
+        <p:spPr>
+          <a:xfrm>
+            <a:off x="1097280" y="3257550"/>
+            <a:ext cx="10607040" cy="1017270"/>
           </a:xfrm>
           <a:prstGeom prst="rect">
             <a:avLst/>
@@ -3785,12 +3899,12 @@
           <a:p>
             <a:pPr indent="0" marL="0">
               <a:lnSpc>
-                <a:spcPct val="115000"/>
+                <a:spcPct val="112000"/>
               </a:lnSpc>
               <a:buNone/>
             </a:pPr>
             <a:r>
-              <a:rPr lang="en-US" sz="1500" dirty="0">
+              <a:rPr lang="en-US" sz="1650" dirty="0">
                 <a:solidFill>
                   <a:srgbClr val="1A1A1A"/>
                 </a:solidFill>
@@ -3798,33 +3912,11 @@
                 <a:ea typeface="Calibri" pitchFamily="34" charset="-122"/>
                 <a:cs typeface="Calibri" pitchFamily="34" charset="-120"/>
               </a:rPr>
-              <a:t>Advanced counting: baselines, keyness, and the shuffle test</a:t>
-            </a:r>
-            <a:endParaRPr lang="en-US" sz="1500" dirty="0"/>
-          </a:p>
-        </p:txBody>
-      </p:sp>
-      <p:sp>
-        <p:nvSpPr>
-          <p:cNvPr id="8" name="Shape 6"/>
-          <p:cNvSpPr/>
-          <p:nvPr/>
-        </p:nvSpPr>
-        <p:spPr>
-          <a:xfrm>
-            <a:off x="4526280" y="2194560"/>
-            <a:ext cx="3383280" cy="3291840"/>
-          </a:xfrm>
-          <a:prstGeom prst="roundRect">
-            <a:avLst>
-              <a:gd name="adj" fmla="val 3333"/>
-            </a:avLst>
-          </a:prstGeom>
-          <a:solidFill>
-            <a:srgbClr val="F4EEE8"/>
-          </a:solidFill>
-          <a:ln/>
-        </p:spPr>
+              <a:t>Shuffle the labels, recount, 1,000 times. Mark where the real gap lands in that pile. The fraction of shuffles that match it is the p-value, the number inside every "p &lt; .05" you will ever read.</a:t>
+            </a:r>
+            <a:endParaRPr lang="en-US" sz="1650" dirty="0"/>
+          </a:p>
+        </p:txBody>
       </p:sp>
       <p:sp>
         <p:nvSpPr>
@@ -3834,14 +3926,14 @@
         </p:nvSpPr>
         <p:spPr>
           <a:xfrm>
-            <a:off x="4937760" y="2606040"/>
-            <a:ext cx="548640" cy="548640"/>
+            <a:off x="640080" y="4366260"/>
+            <a:ext cx="201168" cy="201168"/>
           </a:xfrm>
           <a:prstGeom prst="ellipse">
             <a:avLst/>
           </a:prstGeom>
           <a:solidFill>
-            <a:srgbClr val="3F6F5F"/>
+            <a:srgbClr val="B9852F"/>
           </a:solidFill>
           <a:ln/>
         </p:spPr>
@@ -3854,47 +3946,8 @@
         </p:nvSpPr>
         <p:spPr>
           <a:xfrm>
-            <a:off x="4892040" y="3383280"/>
-            <a:ext cx="2651760" cy="548640"/>
-          </a:xfrm>
-          <a:prstGeom prst="rect">
-            <a:avLst/>
-          </a:prstGeom>
-          <a:noFill/>
-          <a:ln/>
-        </p:spPr>
-        <p:txBody>
-          <a:bodyPr wrap="square" rtlCol="0" anchor="ctr"/>
-          <a:lstStyle/>
-          <a:p>
-            <a:pPr indent="0" marL="0">
-              <a:buNone/>
-            </a:pPr>
-            <a:r>
-              <a:rPr lang="en-US" sz="2100" b="1" dirty="0">
-                <a:solidFill>
-                  <a:srgbClr val="1A1A1A"/>
-                </a:solidFill>
-                <a:latin typeface="Cambria" pitchFamily="34" charset="0"/>
-                <a:ea typeface="Cambria" pitchFamily="34" charset="-122"/>
-                <a:cs typeface="Cambria" pitchFamily="34" charset="-120"/>
-              </a:rPr>
-              <a:t>Workshop</a:t>
-            </a:r>
-            <a:endParaRPr lang="en-US" sz="2100" dirty="0"/>
-          </a:p>
-        </p:txBody>
-      </p:sp>
-      <p:sp>
-        <p:nvSpPr>
-          <p:cNvPr id="11" name="Text 9"/>
-          <p:cNvSpPr/>
-          <p:nvPr/>
-        </p:nvSpPr>
-        <p:spPr>
-          <a:xfrm>
-            <a:off x="4892040" y="3977640"/>
-            <a:ext cx="2651760" cy="1371600"/>
+            <a:off x="1097280" y="4274820"/>
+            <a:ext cx="10607040" cy="1017270"/>
           </a:xfrm>
           <a:prstGeom prst="rect">
             <a:avLst/>
@@ -3910,12 +3963,12 @@
           <a:p>
             <a:pPr indent="0" marL="0">
               <a:lnSpc>
-                <a:spcPct val="115000"/>
+                <a:spcPct val="112000"/>
               </a:lnSpc>
               <a:buNone/>
             </a:pPr>
             <a:r>
-              <a:rPr lang="en-US" sz="1500" dirty="0">
+              <a:rPr lang="en-US" sz="1650" dirty="0">
                 <a:solidFill>
                   <a:srgbClr val="1A1A1A"/>
                 </a:solidFill>
@@ -3923,103 +3976,42 @@
                 <a:ea typeface="Calibri" pitchFamily="34" charset="-122"/>
                 <a:cs typeface="Calibri" pitchFamily="34" charset="-120"/>
               </a:rPr>
-              <a:t>Build hands-on on your own data.</a:t>
-            </a:r>
-            <a:endParaRPr lang="en-US" sz="1500" dirty="0"/>
-          </a:p>
-        </p:txBody>
-      </p:sp>
-      <p:sp>
-        <p:nvSpPr>
-          <p:cNvPr id="12" name="Shape 10"/>
-          <p:cNvSpPr/>
-          <p:nvPr/>
-        </p:nvSpPr>
-        <p:spPr>
-          <a:xfrm>
-            <a:off x="8412480" y="2194560"/>
-            <a:ext cx="3383280" cy="3291840"/>
-          </a:xfrm>
-          <a:prstGeom prst="roundRect">
-            <a:avLst>
-              <a:gd name="adj" fmla="val 3333"/>
-            </a:avLst>
-          </a:prstGeom>
-          <a:solidFill>
-            <a:srgbClr val="F4EEE8"/>
-          </a:solidFill>
-          <a:ln/>
-        </p:spPr>
-      </p:sp>
-      <p:sp>
-        <p:nvSpPr>
-          <p:cNvPr id="13" name="Shape 11"/>
-          <p:cNvSpPr/>
-          <p:nvPr/>
-        </p:nvSpPr>
-        <p:spPr>
-          <a:xfrm>
-            <a:off x="8823960" y="2606040"/>
-            <a:ext cx="548640" cy="548640"/>
+              <a:t>Chance rarely matches it: a finding. Chance matches it often: a coincidence. Pre-registered in the notebook: "gardeners say water more" (gap +3.3 per 1,000 words, p &lt; .001); "money" between buildapc and advice fails (p = .17) and even flips sign between pulls.</a:t>
+            </a:r>
+            <a:endParaRPr lang="en-US" sz="1650" dirty="0"/>
+          </a:p>
+        </p:txBody>
+      </p:sp>
+      <p:sp>
+        <p:nvSpPr>
+          <p:cNvPr id="11" name="Shape 9"/>
+          <p:cNvSpPr/>
+          <p:nvPr/>
+        </p:nvSpPr>
+        <p:spPr>
+          <a:xfrm>
+            <a:off x="640080" y="5383530"/>
+            <a:ext cx="201168" cy="201168"/>
           </a:xfrm>
           <a:prstGeom prst="ellipse">
             <a:avLst/>
           </a:prstGeom>
           <a:solidFill>
-            <a:srgbClr val="B9852F"/>
-          </a:solidFill>
-          <a:ln/>
-        </p:spPr>
-      </p:sp>
-      <p:sp>
-        <p:nvSpPr>
-          <p:cNvPr id="14" name="Text 12"/>
-          <p:cNvSpPr/>
-          <p:nvPr/>
-        </p:nvSpPr>
-        <p:spPr>
-          <a:xfrm>
-            <a:off x="8778240" y="3383280"/>
-            <a:ext cx="2651760" cy="548640"/>
-          </a:xfrm>
-          <a:prstGeom prst="rect">
-            <a:avLst/>
-          </a:prstGeom>
-          <a:noFill/>
-          <a:ln/>
-        </p:spPr>
-        <p:txBody>
-          <a:bodyPr wrap="square" rtlCol="0" anchor="ctr"/>
-          <a:lstStyle/>
-          <a:p>
-            <a:pPr indent="0" marL="0">
-              <a:buNone/>
-            </a:pPr>
-            <a:r>
-              <a:rPr lang="en-US" sz="2100" b="1" dirty="0">
-                <a:solidFill>
-                  <a:srgbClr val="1A1A1A"/>
-                </a:solidFill>
-                <a:latin typeface="Cambria" pitchFamily="34" charset="0"/>
-                <a:ea typeface="Cambria" pitchFamily="34" charset="-122"/>
-                <a:cs typeface="Cambria" pitchFamily="34" charset="-120"/>
-              </a:rPr>
-              <a:t>Discussion</a:t>
-            </a:r>
-            <a:endParaRPr lang="en-US" sz="2100" dirty="0"/>
-          </a:p>
-        </p:txBody>
-      </p:sp>
-      <p:sp>
-        <p:nvSpPr>
-          <p:cNvPr id="15" name="Text 13"/>
-          <p:cNvSpPr/>
-          <p:nvPr/>
-        </p:nvSpPr>
-        <p:spPr>
-          <a:xfrm>
-            <a:off x="8778240" y="3977640"/>
-            <a:ext cx="2651760" cy="1371600"/>
+            <a:srgbClr val="7A3B2E"/>
+          </a:solidFill>
+          <a:ln/>
+        </p:spPr>
+      </p:sp>
+      <p:sp>
+        <p:nvSpPr>
+          <p:cNvPr id="12" name="Text 10"/>
+          <p:cNvSpPr/>
+          <p:nvPr/>
+        </p:nvSpPr>
+        <p:spPr>
+          <a:xfrm>
+            <a:off x="1097280" y="5292090"/>
+            <a:ext cx="10607040" cy="1017270"/>
           </a:xfrm>
           <a:prstGeom prst="rect">
             <a:avLst/>
@@ -4035,12 +4027,12 @@
           <a:p>
             <a:pPr indent="0" marL="0">
               <a:lnSpc>
-                <a:spcPct val="115000"/>
+                <a:spcPct val="112000"/>
               </a:lnSpc>
               <a:buNone/>
             </a:pPr>
             <a:r>
-              <a:rPr lang="en-US" sz="1500" dirty="0">
+              <a:rPr lang="en-US" sz="1650" dirty="0">
                 <a:solidFill>
                   <a:srgbClr val="1A1A1A"/>
                 </a:solidFill>
@@ -4048,9 +4040,9 @@
                 <a:ea typeface="Calibri" pitchFamily="34" charset="-122"/>
                 <a:cs typeface="Calibri" pitchFamily="34" charset="-120"/>
               </a:rPr>
-              <a:t>Interrogate the study, debate it, or critique each other's work.</a:t>
-            </a:r>
-            <a:endParaRPr lang="en-US" sz="1500" dirty="0"/>
+              <a:t>It says "probably not chance." It never says "big enough to matter." Effect size is your argument to make.</a:t>
+            </a:r>
+            <a:endParaRPr lang="en-US" sz="1650" dirty="0"/>
           </a:p>
         </p:txBody>
       </p:sp>
@@ -4094,7 +4086,7 @@
         </p:nvSpPr>
         <p:spPr>
           <a:xfrm>
-            <a:off x="640080" y="640080"/>
+            <a:off x="640080" y="731520"/>
             <a:ext cx="10058400" cy="731520"/>
           </a:xfrm>
           <a:prstGeom prst="rect">
@@ -4119,7 +4111,7 @@
                 <a:ea typeface="Cambria" pitchFamily="34" charset="-122"/>
                 <a:cs typeface="Cambria" pitchFamily="34" charset="-120"/>
               </a:rPr>
-              <a:t>The session</a:t>
+              <a:t>Three modes today</a:t>
             </a:r>
             <a:endParaRPr lang="en-US" sz="3000" dirty="0"/>
           </a:p>
@@ -4127,36 +4119,14 @@
       </p:sp>
       <p:sp>
         <p:nvSpPr>
-          <p:cNvPr id="3" name="Shape 1"/>
-          <p:cNvSpPr/>
-          <p:nvPr/>
-        </p:nvSpPr>
-        <p:spPr>
-          <a:xfrm>
-            <a:off x="640080" y="1572768"/>
-            <a:ext cx="868680" cy="338328"/>
-          </a:xfrm>
-          <a:prstGeom prst="roundRect">
-            <a:avLst>
-              <a:gd name="adj" fmla="val 16216"/>
-            </a:avLst>
-          </a:prstGeom>
-          <a:solidFill>
-            <a:srgbClr val="7A3B2E"/>
-          </a:solidFill>
-          <a:ln/>
-        </p:spPr>
-      </p:sp>
-      <p:sp>
-        <p:nvSpPr>
-          <p:cNvPr id="4" name="Text 2"/>
-          <p:cNvSpPr/>
-          <p:nvPr/>
-        </p:nvSpPr>
-        <p:spPr>
-          <a:xfrm>
-            <a:off x="640080" y="1572768"/>
-            <a:ext cx="868680" cy="338328"/>
+          <p:cNvPr id="3" name="Text 1"/>
+          <p:cNvSpPr/>
+          <p:nvPr/>
+        </p:nvSpPr>
+        <p:spPr>
+          <a:xfrm>
+            <a:off x="640080" y="1417320"/>
+            <a:ext cx="10058400" cy="365760"/>
           </a:xfrm>
           <a:prstGeom prst="rect">
             <a:avLst/>
@@ -4168,52 +4138,136 @@
           <a:bodyPr wrap="square" rtlCol="0" anchor="ctr"/>
           <a:lstStyle/>
           <a:p>
-            <a:pPr algn="ctr" indent="0" marL="0">
-              <a:buNone/>
-            </a:pPr>
-            <a:r>
-              <a:rPr lang="en-US" sz="1100" b="1" dirty="0">
-                <a:solidFill>
-                  <a:srgbClr val="FFFFFF"/>
+            <a:pPr indent="0" marL="0">
+              <a:buNone/>
+            </a:pPr>
+            <a:r>
+              <a:rPr lang="en-US" sz="1400" i="1" dirty="0">
+                <a:solidFill>
+                  <a:srgbClr val="6B6B63"/>
                 </a:solidFill>
                 <a:latin typeface="Calibri" pitchFamily="34" charset="0"/>
                 <a:ea typeface="Calibri" pitchFamily="34" charset="-122"/>
                 <a:cs typeface="Calibri" pitchFamily="34" charset="-120"/>
               </a:rPr>
-              <a:t>0:00</a:t>
-            </a:r>
-            <a:endParaRPr lang="en-US" sz="1100" dirty="0"/>
-          </a:p>
-        </p:txBody>
-      </p:sp>
-      <p:sp>
-        <p:nvSpPr>
-          <p:cNvPr id="5" name="Text 3"/>
-          <p:cNvSpPr/>
-          <p:nvPr/>
-        </p:nvSpPr>
-        <p:spPr>
-          <a:xfrm>
-            <a:off x="1691640" y="1554480"/>
-            <a:ext cx="9646920" cy="448056"/>
-          </a:xfrm>
-          <a:prstGeom prst="rect">
-            <a:avLst/>
-          </a:prstGeom>
-          <a:noFill/>
-          <a:ln/>
-        </p:spPr>
-        <p:txBody>
-          <a:bodyPr wrap="square" rtlCol="0" anchor="ctr">
+              <a:t>about a third of the session each</a:t>
+            </a:r>
+            <a:endParaRPr lang="en-US" sz="1400" dirty="0"/>
+          </a:p>
+        </p:txBody>
+      </p:sp>
+      <p:sp>
+        <p:nvSpPr>
+          <p:cNvPr id="4" name="Shape 2"/>
+          <p:cNvSpPr/>
+          <p:nvPr/>
+        </p:nvSpPr>
+        <p:spPr>
+          <a:xfrm>
+            <a:off x="640080" y="2194560"/>
+            <a:ext cx="3383280" cy="3291840"/>
+          </a:xfrm>
+          <a:prstGeom prst="roundRect">
+            <a:avLst>
+              <a:gd name="adj" fmla="val 3333"/>
+            </a:avLst>
+          </a:prstGeom>
+          <a:solidFill>
+            <a:srgbClr val="F4EEE8"/>
+          </a:solidFill>
+          <a:ln/>
+        </p:spPr>
+      </p:sp>
+      <p:sp>
+        <p:nvSpPr>
+          <p:cNvPr id="5" name="Shape 3"/>
+          <p:cNvSpPr/>
+          <p:nvPr/>
+        </p:nvSpPr>
+        <p:spPr>
+          <a:xfrm>
+            <a:off x="1051560" y="2606040"/>
+            <a:ext cx="548640" cy="548640"/>
+          </a:xfrm>
+          <a:prstGeom prst="ellipse">
+            <a:avLst/>
+          </a:prstGeom>
+          <a:solidFill>
+            <a:srgbClr val="7A3B2E"/>
+          </a:solidFill>
+          <a:ln/>
+        </p:spPr>
+      </p:sp>
+      <p:sp>
+        <p:nvSpPr>
+          <p:cNvPr id="6" name="Text 4"/>
+          <p:cNvSpPr/>
+          <p:nvPr/>
+        </p:nvSpPr>
+        <p:spPr>
+          <a:xfrm>
+            <a:off x="1005840" y="3383280"/>
+            <a:ext cx="2651760" cy="548640"/>
+          </a:xfrm>
+          <a:prstGeom prst="rect">
+            <a:avLst/>
+          </a:prstGeom>
+          <a:noFill/>
+          <a:ln/>
+        </p:spPr>
+        <p:txBody>
+          <a:bodyPr wrap="square" rtlCol="0" anchor="ctr"/>
+          <a:lstStyle/>
+          <a:p>
+            <a:pPr indent="0" marL="0">
+              <a:buNone/>
+            </a:pPr>
+            <a:r>
+              <a:rPr lang="en-US" sz="2100" b="1" dirty="0">
+                <a:solidFill>
+                  <a:srgbClr val="1A1A1A"/>
+                </a:solidFill>
+                <a:latin typeface="Cambria" pitchFamily="34" charset="0"/>
+                <a:ea typeface="Cambria" pitchFamily="34" charset="-122"/>
+                <a:cs typeface="Cambria" pitchFamily="34" charset="-120"/>
+              </a:rPr>
+              <a:t>Lecture / demo</a:t>
+            </a:r>
+            <a:endParaRPr lang="en-US" sz="2100" dirty="0"/>
+          </a:p>
+        </p:txBody>
+      </p:sp>
+      <p:sp>
+        <p:nvSpPr>
+          <p:cNvPr id="7" name="Text 5"/>
+          <p:cNvSpPr/>
+          <p:nvPr/>
+        </p:nvSpPr>
+        <p:spPr>
+          <a:xfrm>
+            <a:off x="1005840" y="3977640"/>
+            <a:ext cx="2651760" cy="1371600"/>
+          </a:xfrm>
+          <a:prstGeom prst="rect">
+            <a:avLst/>
+          </a:prstGeom>
+          <a:noFill/>
+          <a:ln/>
+        </p:spPr>
+        <p:txBody>
+          <a:bodyPr wrap="square" rtlCol="0" anchor="t">
             <a:spAutoFit/>
           </a:bodyPr>
           <a:lstStyle/>
           <a:p>
             <a:pPr indent="0" marL="0">
-              <a:buNone/>
-            </a:pPr>
-            <a:r>
-              <a:rPr lang="en-US" sz="1100" dirty="0">
+              <a:lnSpc>
+                <a:spcPct val="115000"/>
+              </a:lnSpc>
+              <a:buNone/>
+            </a:pPr>
+            <a:r>
+              <a:rPr lang="en-US" sz="1500" dirty="0">
                 <a:solidFill>
                   <a:srgbClr val="1A1A1A"/>
                 </a:solidFill>
@@ -4221,44 +4275,64 @@
                 <a:ea typeface="Calibri" pitchFamily="34" charset="-122"/>
                 <a:cs typeface="Calibri" pitchFamily="34" charset="-120"/>
               </a:rPr>
-              <a:t>Warm-up: favorite Pudding pieces from the sketch, what did yours count, and one choice its makers made. Then retrieval.</a:t>
-            </a:r>
-            <a:endParaRPr lang="en-US" sz="1100" dirty="0"/>
-          </a:p>
-        </p:txBody>
-      </p:sp>
-      <p:sp>
-        <p:nvSpPr>
-          <p:cNvPr id="6" name="Shape 4"/>
-          <p:cNvSpPr/>
-          <p:nvPr/>
-        </p:nvSpPr>
-        <p:spPr>
-          <a:xfrm>
-            <a:off x="640080" y="2020824"/>
-            <a:ext cx="868680" cy="338328"/>
+              <a:t>Advanced counting: baselines, keyness, and the shuffle test</a:t>
+            </a:r>
+            <a:endParaRPr lang="en-US" sz="1500" dirty="0"/>
+          </a:p>
+        </p:txBody>
+      </p:sp>
+      <p:sp>
+        <p:nvSpPr>
+          <p:cNvPr id="8" name="Shape 6"/>
+          <p:cNvSpPr/>
+          <p:nvPr/>
+        </p:nvSpPr>
+        <p:spPr>
+          <a:xfrm>
+            <a:off x="4526280" y="2194560"/>
+            <a:ext cx="3383280" cy="3291840"/>
           </a:xfrm>
           <a:prstGeom prst="roundRect">
             <a:avLst>
-              <a:gd name="adj" fmla="val 16216"/>
+              <a:gd name="adj" fmla="val 3333"/>
             </a:avLst>
           </a:prstGeom>
           <a:solidFill>
-            <a:srgbClr val="7A3B2E"/>
-          </a:solidFill>
-          <a:ln/>
-        </p:spPr>
-      </p:sp>
-      <p:sp>
-        <p:nvSpPr>
-          <p:cNvPr id="7" name="Text 5"/>
-          <p:cNvSpPr/>
-          <p:nvPr/>
-        </p:nvSpPr>
-        <p:spPr>
-          <a:xfrm>
-            <a:off x="640080" y="2020824"/>
-            <a:ext cx="868680" cy="338328"/>
+            <a:srgbClr val="F4EEE8"/>
+          </a:solidFill>
+          <a:ln/>
+        </p:spPr>
+      </p:sp>
+      <p:sp>
+        <p:nvSpPr>
+          <p:cNvPr id="9" name="Shape 7"/>
+          <p:cNvSpPr/>
+          <p:nvPr/>
+        </p:nvSpPr>
+        <p:spPr>
+          <a:xfrm>
+            <a:off x="4937760" y="2606040"/>
+            <a:ext cx="548640" cy="548640"/>
+          </a:xfrm>
+          <a:prstGeom prst="ellipse">
+            <a:avLst/>
+          </a:prstGeom>
+          <a:solidFill>
+            <a:srgbClr val="3F6F5F"/>
+          </a:solidFill>
+          <a:ln/>
+        </p:spPr>
+      </p:sp>
+      <p:sp>
+        <p:nvSpPr>
+          <p:cNvPr id="10" name="Text 8"/>
+          <p:cNvSpPr/>
+          <p:nvPr/>
+        </p:nvSpPr>
+        <p:spPr>
+          <a:xfrm>
+            <a:off x="4892040" y="3383280"/>
+            <a:ext cx="2651760" cy="548640"/>
           </a:xfrm>
           <a:prstGeom prst="rect">
             <a:avLst/>
@@ -4270,52 +4344,180 @@
           <a:bodyPr wrap="square" rtlCol="0" anchor="ctr"/>
           <a:lstStyle/>
           <a:p>
-            <a:pPr algn="ctr" indent="0" marL="0">
-              <a:buNone/>
-            </a:pPr>
-            <a:r>
-              <a:rPr lang="en-US" sz="1100" b="1" dirty="0">
-                <a:solidFill>
-                  <a:srgbClr val="FFFFFF"/>
+            <a:pPr indent="0" marL="0">
+              <a:buNone/>
+            </a:pPr>
+            <a:r>
+              <a:rPr lang="en-US" sz="2100" b="1" dirty="0">
+                <a:solidFill>
+                  <a:srgbClr val="1A1A1A"/>
+                </a:solidFill>
+                <a:latin typeface="Cambria" pitchFamily="34" charset="0"/>
+                <a:ea typeface="Cambria" pitchFamily="34" charset="-122"/>
+                <a:cs typeface="Cambria" pitchFamily="34" charset="-120"/>
+              </a:rPr>
+              <a:t>Workshop</a:t>
+            </a:r>
+            <a:endParaRPr lang="en-US" sz="2100" dirty="0"/>
+          </a:p>
+        </p:txBody>
+      </p:sp>
+      <p:sp>
+        <p:nvSpPr>
+          <p:cNvPr id="11" name="Text 9"/>
+          <p:cNvSpPr/>
+          <p:nvPr/>
+        </p:nvSpPr>
+        <p:spPr>
+          <a:xfrm>
+            <a:off x="4892040" y="3977640"/>
+            <a:ext cx="2651760" cy="1371600"/>
+          </a:xfrm>
+          <a:prstGeom prst="rect">
+            <a:avLst/>
+          </a:prstGeom>
+          <a:noFill/>
+          <a:ln/>
+        </p:spPr>
+        <p:txBody>
+          <a:bodyPr wrap="square" rtlCol="0" anchor="t">
+            <a:spAutoFit/>
+          </a:bodyPr>
+          <a:lstStyle/>
+          <a:p>
+            <a:pPr indent="0" marL="0">
+              <a:lnSpc>
+                <a:spcPct val="115000"/>
+              </a:lnSpc>
+              <a:buNone/>
+            </a:pPr>
+            <a:r>
+              <a:rPr lang="en-US" sz="1500" dirty="0">
+                <a:solidFill>
+                  <a:srgbClr val="1A1A1A"/>
                 </a:solidFill>
                 <a:latin typeface="Calibri" pitchFamily="34" charset="0"/>
                 <a:ea typeface="Calibri" pitchFamily="34" charset="-122"/>
                 <a:cs typeface="Calibri" pitchFamily="34" charset="-120"/>
               </a:rPr>
-              <a:t>0:05</a:t>
-            </a:r>
-            <a:endParaRPr lang="en-US" sz="1100" dirty="0"/>
-          </a:p>
-        </p:txBody>
-      </p:sp>
-      <p:sp>
-        <p:nvSpPr>
-          <p:cNvPr id="8" name="Text 6"/>
-          <p:cNvSpPr/>
-          <p:nvPr/>
-        </p:nvSpPr>
-        <p:spPr>
-          <a:xfrm>
-            <a:off x="1691640" y="2002536"/>
-            <a:ext cx="9646920" cy="448056"/>
-          </a:xfrm>
-          <a:prstGeom prst="rect">
-            <a:avLst/>
-          </a:prstGeom>
-          <a:noFill/>
-          <a:ln/>
-        </p:spPr>
-        <p:txBody>
-          <a:bodyPr wrap="square" rtlCol="0" anchor="ctr">
+              <a:t>Build hands-on on your own data.</a:t>
+            </a:r>
+            <a:endParaRPr lang="en-US" sz="1500" dirty="0"/>
+          </a:p>
+        </p:txBody>
+      </p:sp>
+      <p:sp>
+        <p:nvSpPr>
+          <p:cNvPr id="12" name="Shape 10"/>
+          <p:cNvSpPr/>
+          <p:nvPr/>
+        </p:nvSpPr>
+        <p:spPr>
+          <a:xfrm>
+            <a:off x="8412480" y="2194560"/>
+            <a:ext cx="3383280" cy="3291840"/>
+          </a:xfrm>
+          <a:prstGeom prst="roundRect">
+            <a:avLst>
+              <a:gd name="adj" fmla="val 3333"/>
+            </a:avLst>
+          </a:prstGeom>
+          <a:solidFill>
+            <a:srgbClr val="F4EEE8"/>
+          </a:solidFill>
+          <a:ln/>
+        </p:spPr>
+      </p:sp>
+      <p:sp>
+        <p:nvSpPr>
+          <p:cNvPr id="13" name="Shape 11"/>
+          <p:cNvSpPr/>
+          <p:nvPr/>
+        </p:nvSpPr>
+        <p:spPr>
+          <a:xfrm>
+            <a:off x="8823960" y="2606040"/>
+            <a:ext cx="548640" cy="548640"/>
+          </a:xfrm>
+          <a:prstGeom prst="ellipse">
+            <a:avLst/>
+          </a:prstGeom>
+          <a:solidFill>
+            <a:srgbClr val="B9852F"/>
+          </a:solidFill>
+          <a:ln/>
+        </p:spPr>
+      </p:sp>
+      <p:sp>
+        <p:nvSpPr>
+          <p:cNvPr id="14" name="Text 12"/>
+          <p:cNvSpPr/>
+          <p:nvPr/>
+        </p:nvSpPr>
+        <p:spPr>
+          <a:xfrm>
+            <a:off x="8778240" y="3383280"/>
+            <a:ext cx="2651760" cy="548640"/>
+          </a:xfrm>
+          <a:prstGeom prst="rect">
+            <a:avLst/>
+          </a:prstGeom>
+          <a:noFill/>
+          <a:ln/>
+        </p:spPr>
+        <p:txBody>
+          <a:bodyPr wrap="square" rtlCol="0" anchor="ctr"/>
+          <a:lstStyle/>
+          <a:p>
+            <a:pPr indent="0" marL="0">
+              <a:buNone/>
+            </a:pPr>
+            <a:r>
+              <a:rPr lang="en-US" sz="2100" b="1" dirty="0">
+                <a:solidFill>
+                  <a:srgbClr val="1A1A1A"/>
+                </a:solidFill>
+                <a:latin typeface="Cambria" pitchFamily="34" charset="0"/>
+                <a:ea typeface="Cambria" pitchFamily="34" charset="-122"/>
+                <a:cs typeface="Cambria" pitchFamily="34" charset="-120"/>
+              </a:rPr>
+              <a:t>Discussion</a:t>
+            </a:r>
+            <a:endParaRPr lang="en-US" sz="2100" dirty="0"/>
+          </a:p>
+        </p:txBody>
+      </p:sp>
+      <p:sp>
+        <p:nvSpPr>
+          <p:cNvPr id="15" name="Text 13"/>
+          <p:cNvSpPr/>
+          <p:nvPr/>
+        </p:nvSpPr>
+        <p:spPr>
+          <a:xfrm>
+            <a:off x="8778240" y="3977640"/>
+            <a:ext cx="2651760" cy="1371600"/>
+          </a:xfrm>
+          <a:prstGeom prst="rect">
+            <a:avLst/>
+          </a:prstGeom>
+          <a:noFill/>
+          <a:ln/>
+        </p:spPr>
+        <p:txBody>
+          <a:bodyPr wrap="square" rtlCol="0" anchor="t">
             <a:spAutoFit/>
           </a:bodyPr>
           <a:lstStyle/>
           <a:p>
             <a:pPr indent="0" marL="0">
-              <a:buNone/>
-            </a:pPr>
-            <a:r>
-              <a:rPr lang="en-US" sz="1100" dirty="0">
+              <a:lnSpc>
+                <a:spcPct val="115000"/>
+              </a:lnSpc>
+              <a:buNone/>
+            </a:pPr>
+            <a:r>
+              <a:rPr lang="en-US" sz="1500" dirty="0">
                 <a:solidFill>
                   <a:srgbClr val="1A1A1A"/>
                 </a:solidFill>
@@ -4323,825 +4525,9 @@
                 <a:ea typeface="Calibri" pitchFamily="34" charset="-122"/>
                 <a:cs typeface="Calibri" pitchFamily="34" charset="-120"/>
               </a:rPr>
-              <a:t>The trial: claim, objection, re-run-without-fiction rebuttal, "interpret with care." One named choice is the chart: the hockey-stick shape depends on its y-axis and smoothing. The notebook pulls the paper's own phrases live from Google Books and probes the fiction objection with fiction-marker phrases.</a:t>
-            </a:r>
-            <a:endParaRPr lang="en-US" sz="1100" dirty="0"/>
-          </a:p>
-        </p:txBody>
-      </p:sp>
-      <p:sp>
-        <p:nvSpPr>
-          <p:cNvPr id="9" name="Shape 7"/>
-          <p:cNvSpPr/>
-          <p:nvPr/>
-        </p:nvSpPr>
-        <p:spPr>
-          <a:xfrm>
-            <a:off x="640080" y="2468880"/>
-            <a:ext cx="868680" cy="338328"/>
-          </a:xfrm>
-          <a:prstGeom prst="roundRect">
-            <a:avLst>
-              <a:gd name="adj" fmla="val 16216"/>
-            </a:avLst>
-          </a:prstGeom>
-          <a:solidFill>
-            <a:srgbClr val="7A3B2E"/>
-          </a:solidFill>
-          <a:ln/>
-        </p:spPr>
-      </p:sp>
-      <p:sp>
-        <p:nvSpPr>
-          <p:cNvPr id="10" name="Text 8"/>
-          <p:cNvSpPr/>
-          <p:nvPr/>
-        </p:nvSpPr>
-        <p:spPr>
-          <a:xfrm>
-            <a:off x="640080" y="2468880"/>
-            <a:ext cx="868680" cy="338328"/>
-          </a:xfrm>
-          <a:prstGeom prst="rect">
-            <a:avLst/>
-          </a:prstGeom>
-          <a:noFill/>
-          <a:ln/>
-        </p:spPr>
-        <p:txBody>
-          <a:bodyPr wrap="square" rtlCol="0" anchor="ctr"/>
-          <a:lstStyle/>
-          <a:p>
-            <a:pPr algn="ctr" indent="0" marL="0">
-              <a:buNone/>
-            </a:pPr>
-            <a:r>
-              <a:rPr lang="en-US" sz="1100" b="1" dirty="0">
-                <a:solidFill>
-                  <a:srgbClr val="FFFFFF"/>
-                </a:solidFill>
-                <a:latin typeface="Calibri" pitchFamily="34" charset="0"/>
-                <a:ea typeface="Calibri" pitchFamily="34" charset="-122"/>
-                <a:cs typeface="Calibri" pitchFamily="34" charset="-120"/>
-              </a:rPr>
-              <a:t>0:25</a:t>
-            </a:r>
-            <a:endParaRPr lang="en-US" sz="1100" dirty="0"/>
-          </a:p>
-        </p:txBody>
-      </p:sp>
-      <p:sp>
-        <p:nvSpPr>
-          <p:cNvPr id="11" name="Text 9"/>
-          <p:cNvSpPr/>
-          <p:nvPr/>
-        </p:nvSpPr>
-        <p:spPr>
-          <a:xfrm>
-            <a:off x="1691640" y="2450592"/>
-            <a:ext cx="9646920" cy="448056"/>
-          </a:xfrm>
-          <a:prstGeom prst="rect">
-            <a:avLst/>
-          </a:prstGeom>
-          <a:noFill/>
-          <a:ln/>
-        </p:spPr>
-        <p:txBody>
-          <a:bodyPr wrap="square" rtlCol="0" anchor="ctr">
-            <a:spAutoFit/>
-          </a:bodyPr>
-          <a:lstStyle/>
-          <a:p>
-            <a:pPr indent="0" marL="0">
-              <a:buNone/>
-            </a:pPr>
-            <a:r>
-              <a:rPr lang="en-US" sz="1100" dirty="0">
-                <a:solidFill>
-                  <a:srgbClr val="1A1A1A"/>
-                </a:solidFill>
-                <a:latin typeface="Calibri" pitchFamily="34" charset="0"/>
-                <a:ea typeface="Calibri" pitchFamily="34" charset="-122"/>
-                <a:cs typeface="Calibri" pitchFamily="34" charset="-120"/>
-              </a:rPr>
-              <a:t>A brief demonstration before the complications: the words one artist uses far more than everyone else, a signature vocabulary measured against a pop baseline.</a:t>
-            </a:r>
-            <a:endParaRPr lang="en-US" sz="1100" dirty="0"/>
-          </a:p>
-        </p:txBody>
-      </p:sp>
-      <p:sp>
-        <p:nvSpPr>
-          <p:cNvPr id="12" name="Shape 10"/>
-          <p:cNvSpPr/>
-          <p:nvPr/>
-        </p:nvSpPr>
-        <p:spPr>
-          <a:xfrm>
-            <a:off x="640080" y="2916936"/>
-            <a:ext cx="868680" cy="338328"/>
-          </a:xfrm>
-          <a:prstGeom prst="roundRect">
-            <a:avLst>
-              <a:gd name="adj" fmla="val 16216"/>
-            </a:avLst>
-          </a:prstGeom>
-          <a:solidFill>
-            <a:srgbClr val="7A3B2E"/>
-          </a:solidFill>
-          <a:ln/>
-        </p:spPr>
-      </p:sp>
-      <p:sp>
-        <p:nvSpPr>
-          <p:cNvPr id="13" name="Text 11"/>
-          <p:cNvSpPr/>
-          <p:nvPr/>
-        </p:nvSpPr>
-        <p:spPr>
-          <a:xfrm>
-            <a:off x="640080" y="2916936"/>
-            <a:ext cx="868680" cy="338328"/>
-          </a:xfrm>
-          <a:prstGeom prst="rect">
-            <a:avLst/>
-          </a:prstGeom>
-          <a:noFill/>
-          <a:ln/>
-        </p:spPr>
-        <p:txBody>
-          <a:bodyPr wrap="square" rtlCol="0" anchor="ctr"/>
-          <a:lstStyle/>
-          <a:p>
-            <a:pPr algn="ctr" indent="0" marL="0">
-              <a:buNone/>
-            </a:pPr>
-            <a:r>
-              <a:rPr lang="en-US" sz="1100" b="1" dirty="0">
-                <a:solidFill>
-                  <a:srgbClr val="FFFFFF"/>
-                </a:solidFill>
-                <a:latin typeface="Calibri" pitchFamily="34" charset="0"/>
-                <a:ea typeface="Calibri" pitchFamily="34" charset="-122"/>
-                <a:cs typeface="Calibri" pitchFamily="34" charset="-120"/>
-              </a:rPr>
-              <a:t>0:30</a:t>
-            </a:r>
-            <a:endParaRPr lang="en-US" sz="1100" dirty="0"/>
-          </a:p>
-        </p:txBody>
-      </p:sp>
-      <p:sp>
-        <p:nvSpPr>
-          <p:cNvPr id="14" name="Text 12"/>
-          <p:cNvSpPr/>
-          <p:nvPr/>
-        </p:nvSpPr>
-        <p:spPr>
-          <a:xfrm>
-            <a:off x="1691640" y="2898648"/>
-            <a:ext cx="9646920" cy="448056"/>
-          </a:xfrm>
-          <a:prstGeom prst="rect">
-            <a:avLst/>
-          </a:prstGeom>
-          <a:noFill/>
-          <a:ln/>
-        </p:spPr>
-        <p:txBody>
-          <a:bodyPr wrap="square" rtlCol="0" anchor="ctr">
-            <a:spAutoFit/>
-          </a:bodyPr>
-          <a:lstStyle/>
-          <a:p>
-            <a:pPr indent="0" marL="0">
-              <a:buNone/>
-            </a:pPr>
-            <a:r>
-              <a:rPr lang="en-US" sz="1100" dirty="0">
-                <a:solidFill>
-                  <a:srgbClr val="1A1A1A"/>
-                </a:solidFill>
-                <a:latin typeface="Calibri" pitchFamily="34" charset="0"/>
-                <a:ea typeface="Calibri" pitchFamily="34" charset="-122"/>
-                <a:cs typeface="Calibri" pitchFamily="34" charset="-120"/>
-              </a:rPr>
-              <a:t>Hand-built bag-of-words: two communities, highlighters, argue about merging run/running. Counting requires defining.</a:t>
-            </a:r>
-            <a:endParaRPr lang="en-US" sz="1100" dirty="0"/>
-          </a:p>
-        </p:txBody>
-      </p:sp>
-      <p:sp>
-        <p:nvSpPr>
-          <p:cNvPr id="15" name="Shape 13"/>
-          <p:cNvSpPr/>
-          <p:nvPr/>
-        </p:nvSpPr>
-        <p:spPr>
-          <a:xfrm>
-            <a:off x="640080" y="3364992"/>
-            <a:ext cx="868680" cy="338328"/>
-          </a:xfrm>
-          <a:prstGeom prst="roundRect">
-            <a:avLst>
-              <a:gd name="adj" fmla="val 16216"/>
-            </a:avLst>
-          </a:prstGeom>
-          <a:solidFill>
-            <a:srgbClr val="7A3B2E"/>
-          </a:solidFill>
-          <a:ln/>
-        </p:spPr>
-      </p:sp>
-      <p:sp>
-        <p:nvSpPr>
-          <p:cNvPr id="16" name="Text 14"/>
-          <p:cNvSpPr/>
-          <p:nvPr/>
-        </p:nvSpPr>
-        <p:spPr>
-          <a:xfrm>
-            <a:off x="640080" y="3364992"/>
-            <a:ext cx="868680" cy="338328"/>
-          </a:xfrm>
-          <a:prstGeom prst="rect">
-            <a:avLst/>
-          </a:prstGeom>
-          <a:noFill/>
-          <a:ln/>
-        </p:spPr>
-        <p:txBody>
-          <a:bodyPr wrap="square" rtlCol="0" anchor="ctr"/>
-          <a:lstStyle/>
-          <a:p>
-            <a:pPr algn="ctr" indent="0" marL="0">
-              <a:buNone/>
-            </a:pPr>
-            <a:r>
-              <a:rPr lang="en-US" sz="1100" b="1" dirty="0">
-                <a:solidFill>
-                  <a:srgbClr val="FFFFFF"/>
-                </a:solidFill>
-                <a:latin typeface="Calibri" pitchFamily="34" charset="0"/>
-                <a:ea typeface="Calibri" pitchFamily="34" charset="-122"/>
-                <a:cs typeface="Calibri" pitchFamily="34" charset="-120"/>
-              </a:rPr>
-              <a:t>0:55</a:t>
-            </a:r>
-            <a:endParaRPr lang="en-US" sz="1100" dirty="0"/>
-          </a:p>
-        </p:txBody>
-      </p:sp>
-      <p:sp>
-        <p:nvSpPr>
-          <p:cNvPr id="17" name="Text 15"/>
-          <p:cNvSpPr/>
-          <p:nvPr/>
-        </p:nvSpPr>
-        <p:spPr>
-          <a:xfrm>
-            <a:off x="1691640" y="3346704"/>
-            <a:ext cx="9646920" cy="448056"/>
-          </a:xfrm>
-          <a:prstGeom prst="rect">
-            <a:avLst/>
-          </a:prstGeom>
-          <a:noFill/>
-          <a:ln/>
-        </p:spPr>
-        <p:txBody>
-          <a:bodyPr wrap="square" rtlCol="0" anchor="ctr">
-            <a:spAutoFit/>
-          </a:bodyPr>
-          <a:lstStyle/>
-          <a:p>
-            <a:pPr indent="0" marL="0">
-              <a:buNone/>
-            </a:pPr>
-            <a:r>
-              <a:rPr lang="en-US" sz="1100" dirty="0">
-                <a:solidFill>
-                  <a:srgbClr val="1A1A1A"/>
-                </a:solidFill>
-                <a:latin typeface="Calibri" pitchFamily="34" charset="0"/>
-                <a:ea typeface="Calibri" pitchFamily="34" charset="-122"/>
-                <a:cs typeface="Calibri" pitchFamily="34" charset="-120"/>
-              </a:rPr>
-              <a:t>What counts as a word? Paste a sentence into two tokenizer playgrounds and watch it shatter differently. Models see tokens, not words. Then the standard tools for the run/running decision: NLTK stemming and lemmatization, a real stop list, and Zipf's law, the curve that explains why stop lists exist.</a:t>
-            </a:r>
-            <a:endParaRPr lang="en-US" sz="1100" dirty="0"/>
-          </a:p>
-        </p:txBody>
-      </p:sp>
-      <p:sp>
-        <p:nvSpPr>
-          <p:cNvPr id="18" name="Shape 16"/>
-          <p:cNvSpPr/>
-          <p:nvPr/>
-        </p:nvSpPr>
-        <p:spPr>
-          <a:xfrm>
-            <a:off x="640080" y="3813048"/>
-            <a:ext cx="868680" cy="338328"/>
-          </a:xfrm>
-          <a:prstGeom prst="roundRect">
-            <a:avLst>
-              <a:gd name="adj" fmla="val 16216"/>
-            </a:avLst>
-          </a:prstGeom>
-          <a:solidFill>
-            <a:srgbClr val="7A3B2E"/>
-          </a:solidFill>
-          <a:ln/>
-        </p:spPr>
-      </p:sp>
-      <p:sp>
-        <p:nvSpPr>
-          <p:cNvPr id="19" name="Text 17"/>
-          <p:cNvSpPr/>
-          <p:nvPr/>
-        </p:nvSpPr>
-        <p:spPr>
-          <a:xfrm>
-            <a:off x="640080" y="3813048"/>
-            <a:ext cx="868680" cy="338328"/>
-          </a:xfrm>
-          <a:prstGeom prst="rect">
-            <a:avLst/>
-          </a:prstGeom>
-          <a:noFill/>
-          <a:ln/>
-        </p:spPr>
-        <p:txBody>
-          <a:bodyPr wrap="square" rtlCol="0" anchor="ctr"/>
-          <a:lstStyle/>
-          <a:p>
-            <a:pPr algn="ctr" indent="0" marL="0">
-              <a:buNone/>
-            </a:pPr>
-            <a:r>
-              <a:rPr lang="en-US" sz="1100" b="1" dirty="0">
-                <a:solidFill>
-                  <a:srgbClr val="FFFFFF"/>
-                </a:solidFill>
-                <a:latin typeface="Calibri" pitchFamily="34" charset="0"/>
-                <a:ea typeface="Calibri" pitchFamily="34" charset="-122"/>
-                <a:cs typeface="Calibri" pitchFamily="34" charset="-120"/>
-              </a:rPr>
-              <a:t>1:05</a:t>
-            </a:r>
-            <a:endParaRPr lang="en-US" sz="1100" dirty="0"/>
-          </a:p>
-        </p:txBody>
-      </p:sp>
-      <p:sp>
-        <p:nvSpPr>
-          <p:cNvPr id="20" name="Text 18"/>
-          <p:cNvSpPr/>
-          <p:nvPr/>
-        </p:nvSpPr>
-        <p:spPr>
-          <a:xfrm>
-            <a:off x="1691640" y="3794760"/>
-            <a:ext cx="9646920" cy="448056"/>
-          </a:xfrm>
-          <a:prstGeom prst="rect">
-            <a:avLst/>
-          </a:prstGeom>
-          <a:noFill/>
-          <a:ln/>
-        </p:spPr>
-        <p:txBody>
-          <a:bodyPr wrap="square" rtlCol="0" anchor="ctr">
-            <a:spAutoFit/>
-          </a:bodyPr>
-          <a:lstStyle/>
-          <a:p>
-            <a:pPr indent="0" marL="0">
-              <a:buNone/>
-            </a:pPr>
-            <a:r>
-              <a:rPr lang="en-US" sz="1100" dirty="0">
-                <a:solidFill>
-                  <a:srgbClr val="1A1A1A"/>
-                </a:solidFill>
-                <a:latin typeface="Calibri" pitchFamily="34" charset="0"/>
-                <a:ea typeface="Calibri" pitchFamily="34" charset="-122"/>
-                <a:cs typeface="Calibri" pitchFamily="34" charset="-120"/>
-              </a:rPr>
-              <a:t>Break</a:t>
-            </a:r>
-            <a:endParaRPr lang="en-US" sz="1100" dirty="0"/>
-          </a:p>
-        </p:txBody>
-      </p:sp>
-      <p:sp>
-        <p:nvSpPr>
-          <p:cNvPr id="21" name="Shape 19"/>
-          <p:cNvSpPr/>
-          <p:nvPr/>
-        </p:nvSpPr>
-        <p:spPr>
-          <a:xfrm>
-            <a:off x="640080" y="4261104"/>
-            <a:ext cx="868680" cy="338328"/>
-          </a:xfrm>
-          <a:prstGeom prst="roundRect">
-            <a:avLst>
-              <a:gd name="adj" fmla="val 16216"/>
-            </a:avLst>
-          </a:prstGeom>
-          <a:solidFill>
-            <a:srgbClr val="7A3B2E"/>
-          </a:solidFill>
-          <a:ln/>
-        </p:spPr>
-      </p:sp>
-      <p:sp>
-        <p:nvSpPr>
-          <p:cNvPr id="22" name="Text 20"/>
-          <p:cNvSpPr/>
-          <p:nvPr/>
-        </p:nvSpPr>
-        <p:spPr>
-          <a:xfrm>
-            <a:off x="640080" y="4261104"/>
-            <a:ext cx="868680" cy="338328"/>
-          </a:xfrm>
-          <a:prstGeom prst="rect">
-            <a:avLst/>
-          </a:prstGeom>
-          <a:noFill/>
-          <a:ln/>
-        </p:spPr>
-        <p:txBody>
-          <a:bodyPr wrap="square" rtlCol="0" anchor="ctr"/>
-          <a:lstStyle/>
-          <a:p>
-            <a:pPr algn="ctr" indent="0" marL="0">
-              <a:buNone/>
-            </a:pPr>
-            <a:r>
-              <a:rPr lang="en-US" sz="1100" b="1" dirty="0">
-                <a:solidFill>
-                  <a:srgbClr val="FFFFFF"/>
-                </a:solidFill>
-                <a:latin typeface="Calibri" pitchFamily="34" charset="0"/>
-                <a:ea typeface="Calibri" pitchFamily="34" charset="-122"/>
-                <a:cs typeface="Calibri" pitchFamily="34" charset="-120"/>
-              </a:rPr>
-              <a:t>1:15</a:t>
-            </a:r>
-            <a:endParaRPr lang="en-US" sz="1100" dirty="0"/>
-          </a:p>
-        </p:txBody>
-      </p:sp>
-      <p:sp>
-        <p:nvSpPr>
-          <p:cNvPr id="23" name="Text 21"/>
-          <p:cNvSpPr/>
-          <p:nvPr/>
-        </p:nvSpPr>
-        <p:spPr>
-          <a:xfrm>
-            <a:off x="1691640" y="4242816"/>
-            <a:ext cx="9646920" cy="448056"/>
-          </a:xfrm>
-          <a:prstGeom prst="rect">
-            <a:avLst/>
-          </a:prstGeom>
-          <a:noFill/>
-          <a:ln/>
-        </p:spPr>
-        <p:txBody>
-          <a:bodyPr wrap="square" rtlCol="0" anchor="ctr">
-            <a:spAutoFit/>
-          </a:bodyPr>
-          <a:lstStyle/>
-          <a:p>
-            <a:pPr indent="0" marL="0">
-              <a:buNone/>
-            </a:pPr>
-            <a:r>
-              <a:rPr lang="en-US" sz="1100" dirty="0">
-                <a:solidFill>
-                  <a:srgbClr val="1A1A1A"/>
-                </a:solidFill>
-                <a:latin typeface="Calibri" pitchFamily="34" charset="0"/>
-                <a:ea typeface="Calibri" pitchFamily="34" charset="-122"/>
-                <a:cs typeface="Calibri" pitchFamily="34" charset="-120"/>
-              </a:rPr>
-              <a:t>N-grams and statistics, hands-on: bigrams across three corpora, distributions and mean-versus-median on real counts, rates per 1,000 words, z-scores as the common scale. Then tf-idf at two scales, single comments as documents and twelve whole subreddits as documents, each community sight-read from its distinctive words (cpu and coolers, roth and rates, puts and bears), and k-means on 360 live Reddit comments from three subreddits: raw counts give a blob, tf-idf plus 60 dimensions sorts six in seven comments with their community. The representation, not the algorithm, does the work. Closer: the same k-means on twenty Met paintings counted into 27 color buckets sorts portraits from landscapes, three in four.</a:t>
-            </a:r>
-            <a:endParaRPr lang="en-US" sz="1100" dirty="0"/>
-          </a:p>
-        </p:txBody>
-      </p:sp>
-      <p:sp>
-        <p:nvSpPr>
-          <p:cNvPr id="24" name="Shape 22"/>
-          <p:cNvSpPr/>
-          <p:nvPr/>
-        </p:nvSpPr>
-        <p:spPr>
-          <a:xfrm>
-            <a:off x="640080" y="4709160"/>
-            <a:ext cx="868680" cy="338328"/>
-          </a:xfrm>
-          <a:prstGeom prst="roundRect">
-            <a:avLst>
-              <a:gd name="adj" fmla="val 16216"/>
-            </a:avLst>
-          </a:prstGeom>
-          <a:solidFill>
-            <a:srgbClr val="7A3B2E"/>
-          </a:solidFill>
-          <a:ln/>
-        </p:spPr>
-      </p:sp>
-      <p:sp>
-        <p:nvSpPr>
-          <p:cNvPr id="25" name="Text 23"/>
-          <p:cNvSpPr/>
-          <p:nvPr/>
-        </p:nvSpPr>
-        <p:spPr>
-          <a:xfrm>
-            <a:off x="640080" y="4709160"/>
-            <a:ext cx="868680" cy="338328"/>
-          </a:xfrm>
-          <a:prstGeom prst="rect">
-            <a:avLst/>
-          </a:prstGeom>
-          <a:noFill/>
-          <a:ln/>
-        </p:spPr>
-        <p:txBody>
-          <a:bodyPr wrap="square" rtlCol="0" anchor="ctr"/>
-          <a:lstStyle/>
-          <a:p>
-            <a:pPr algn="ctr" indent="0" marL="0">
-              <a:buNone/>
-            </a:pPr>
-            <a:r>
-              <a:rPr lang="en-US" sz="1100" b="1" dirty="0">
-                <a:solidFill>
-                  <a:srgbClr val="FFFFFF"/>
-                </a:solidFill>
-                <a:latin typeface="Calibri" pitchFamily="34" charset="0"/>
-                <a:ea typeface="Calibri" pitchFamily="34" charset="-122"/>
-                <a:cs typeface="Calibri" pitchFamily="34" charset="-120"/>
-              </a:rPr>
-              <a:t>1:30</a:t>
-            </a:r>
-            <a:endParaRPr lang="en-US" sz="1100" dirty="0"/>
-          </a:p>
-        </p:txBody>
-      </p:sp>
-      <p:sp>
-        <p:nvSpPr>
-          <p:cNvPr id="26" name="Text 24"/>
-          <p:cNvSpPr/>
-          <p:nvPr/>
-        </p:nvSpPr>
-        <p:spPr>
-          <a:xfrm>
-            <a:off x="1691640" y="4690872"/>
-            <a:ext cx="9646920" cy="448056"/>
-          </a:xfrm>
-          <a:prstGeom prst="rect">
-            <a:avLst/>
-          </a:prstGeom>
-          <a:noFill/>
-          <a:ln/>
-        </p:spPr>
-        <p:txBody>
-          <a:bodyPr wrap="square" rtlCol="0" anchor="ctr">
-            <a:spAutoFit/>
-          </a:bodyPr>
-          <a:lstStyle/>
-          <a:p>
-            <a:pPr indent="0" marL="0">
-              <a:buNone/>
-            </a:pPr>
-            <a:r>
-              <a:rPr lang="en-US" sz="1100" dirty="0">
-                <a:solidFill>
-                  <a:srgbClr val="1A1A1A"/>
-                </a:solidFill>
-                <a:latin typeface="Calibri" pitchFamily="34" charset="0"/>
-                <a:ea typeface="Calibri" pitchFamily="34" charset="-122"/>
-                <a:cs typeface="Calibri" pitchFamily="34" charset="-120"/>
-              </a:rPr>
-              <a:t>Keyness, the She Giggles, He Gallops move: a log-odds ratio between two corpora finds the words one voice uses far more than a baseline, exactly the method behind Week 1's featured piece. The corpus pair is a choice too: artist vs. pop, lyrics vs. subreddit vs. novel.</a:t>
-            </a:r>
-            <a:endParaRPr lang="en-US" sz="1100" dirty="0"/>
-          </a:p>
-        </p:txBody>
-      </p:sp>
-      <p:sp>
-        <p:nvSpPr>
-          <p:cNvPr id="27" name="Shape 25"/>
-          <p:cNvSpPr/>
-          <p:nvPr/>
-        </p:nvSpPr>
-        <p:spPr>
-          <a:xfrm>
-            <a:off x="640080" y="5157216"/>
-            <a:ext cx="868680" cy="338328"/>
-          </a:xfrm>
-          <a:prstGeom prst="roundRect">
-            <a:avLst>
-              <a:gd name="adj" fmla="val 16216"/>
-            </a:avLst>
-          </a:prstGeom>
-          <a:solidFill>
-            <a:srgbClr val="7A3B2E"/>
-          </a:solidFill>
-          <a:ln/>
-        </p:spPr>
-      </p:sp>
-      <p:sp>
-        <p:nvSpPr>
-          <p:cNvPr id="28" name="Text 26"/>
-          <p:cNvSpPr/>
-          <p:nvPr/>
-        </p:nvSpPr>
-        <p:spPr>
-          <a:xfrm>
-            <a:off x="640080" y="5157216"/>
-            <a:ext cx="868680" cy="338328"/>
-          </a:xfrm>
-          <a:prstGeom prst="rect">
-            <a:avLst/>
-          </a:prstGeom>
-          <a:noFill/>
-          <a:ln/>
-        </p:spPr>
-        <p:txBody>
-          <a:bodyPr wrap="square" rtlCol="0" anchor="ctr"/>
-          <a:lstStyle/>
-          <a:p>
-            <a:pPr algn="ctr" indent="0" marL="0">
-              <a:buNone/>
-            </a:pPr>
-            <a:r>
-              <a:rPr lang="en-US" sz="1100" b="1" dirty="0">
-                <a:solidFill>
-                  <a:srgbClr val="FFFFFF"/>
-                </a:solidFill>
-                <a:latin typeface="Calibri" pitchFamily="34" charset="0"/>
-                <a:ea typeface="Calibri" pitchFamily="34" charset="-122"/>
-                <a:cs typeface="Calibri" pitchFamily="34" charset="-120"/>
-              </a:rPr>
-              <a:t>1:42</a:t>
-            </a:r>
-            <a:endParaRPr lang="en-US" sz="1100" dirty="0"/>
-          </a:p>
-        </p:txBody>
-      </p:sp>
-      <p:sp>
-        <p:nvSpPr>
-          <p:cNvPr id="29" name="Text 27"/>
-          <p:cNvSpPr/>
-          <p:nvPr/>
-        </p:nvSpPr>
-        <p:spPr>
-          <a:xfrm>
-            <a:off x="1691640" y="5138928"/>
-            <a:ext cx="9646920" cy="448056"/>
-          </a:xfrm>
-          <a:prstGeom prst="rect">
-            <a:avLst/>
-          </a:prstGeom>
-          <a:noFill/>
-          <a:ln/>
-        </p:spPr>
-        <p:txBody>
-          <a:bodyPr wrap="square" rtlCol="0" anchor="ctr">
-            <a:spAutoFit/>
-          </a:bodyPr>
-          <a:lstStyle/>
-          <a:p>
-            <a:pPr indent="0" marL="0">
-              <a:buNone/>
-            </a:pPr>
-            <a:r>
-              <a:rPr lang="en-US" sz="1100" dirty="0">
-                <a:solidFill>
-                  <a:srgbClr val="1A1A1A"/>
-                </a:solidFill>
-                <a:latin typeface="Calibri" pitchFamily="34" charset="0"/>
-                <a:ea typeface="Calibri" pitchFamily="34" charset="-122"/>
-                <a:cs typeface="Calibri" pitchFamily="34" charset="-120"/>
-              </a:rPr>
-              <a:t>Is the difference real? The shuffle test: shuffle the labels and recount, one thousand times. If chance alone frequently produces a gap this large, the difference should not be trusted; if it almost never does, the finding stands. A difference can be real and still small.</a:t>
-            </a:r>
-            <a:endParaRPr lang="en-US" sz="1100" dirty="0"/>
-          </a:p>
-        </p:txBody>
-      </p:sp>
-      <p:sp>
-        <p:nvSpPr>
-          <p:cNvPr id="30" name="Shape 28"/>
-          <p:cNvSpPr/>
-          <p:nvPr/>
-        </p:nvSpPr>
-        <p:spPr>
-          <a:xfrm>
-            <a:off x="640080" y="5605272"/>
-            <a:ext cx="868680" cy="338328"/>
-          </a:xfrm>
-          <a:prstGeom prst="roundRect">
-            <a:avLst>
-              <a:gd name="adj" fmla="val 16216"/>
-            </a:avLst>
-          </a:prstGeom>
-          <a:solidFill>
-            <a:srgbClr val="7A3B2E"/>
-          </a:solidFill>
-          <a:ln/>
-        </p:spPr>
-      </p:sp>
-      <p:sp>
-        <p:nvSpPr>
-          <p:cNvPr id="31" name="Text 29"/>
-          <p:cNvSpPr/>
-          <p:nvPr/>
-        </p:nvSpPr>
-        <p:spPr>
-          <a:xfrm>
-            <a:off x="640080" y="5605272"/>
-            <a:ext cx="868680" cy="338328"/>
-          </a:xfrm>
-          <a:prstGeom prst="rect">
-            <a:avLst/>
-          </a:prstGeom>
-          <a:noFill/>
-          <a:ln/>
-        </p:spPr>
-        <p:txBody>
-          <a:bodyPr wrap="square" rtlCol="0" anchor="ctr"/>
-          <a:lstStyle/>
-          <a:p>
-            <a:pPr algn="ctr" indent="0" marL="0">
-              <a:buNone/>
-            </a:pPr>
-            <a:r>
-              <a:rPr lang="en-US" sz="1100" b="1" dirty="0">
-                <a:solidFill>
-                  <a:srgbClr val="FFFFFF"/>
-                </a:solidFill>
-                <a:latin typeface="Calibri" pitchFamily="34" charset="0"/>
-                <a:ea typeface="Calibri" pitchFamily="34" charset="-122"/>
-                <a:cs typeface="Calibri" pitchFamily="34" charset="-120"/>
-              </a:rPr>
-              <a:t>1:50</a:t>
-            </a:r>
-            <a:endParaRPr lang="en-US" sz="1100" dirty="0"/>
-          </a:p>
-        </p:txBody>
-      </p:sp>
-      <p:sp>
-        <p:nvSpPr>
-          <p:cNvPr id="32" name="Text 30"/>
-          <p:cNvSpPr/>
-          <p:nvPr/>
-        </p:nvSpPr>
-        <p:spPr>
-          <a:xfrm>
-            <a:off x="1691640" y="5586984"/>
-            <a:ext cx="9646920" cy="448056"/>
-          </a:xfrm>
-          <a:prstGeom prst="rect">
-            <a:avLst/>
-          </a:prstGeom>
-          <a:noFill/>
-          <a:ln/>
-        </p:spPr>
-        <p:txBody>
-          <a:bodyPr wrap="square" rtlCol="0" anchor="ctr">
-            <a:spAutoFit/>
-          </a:bodyPr>
-          <a:lstStyle/>
-          <a:p>
-            <a:pPr indent="0" marL="0">
-              <a:buNone/>
-            </a:pPr>
-            <a:r>
-              <a:rPr lang="en-US" sz="1100" dirty="0">
-                <a:solidFill>
-                  <a:srgbClr val="1A1A1A"/>
-                </a:solidFill>
-                <a:latin typeface="Calibri" pitchFamily="34" charset="0"/>
-                <a:ea typeface="Calibri" pitchFamily="34" charset="-122"/>
-                <a:cs typeface="Calibri" pitchFamily="34" charset="-120"/>
-              </a:rPr>
-              <a:t>Gemini-free check and check-out.</a:t>
-            </a:r>
-            <a:endParaRPr lang="en-US" sz="1100" dirty="0"/>
+              <a:t>Interrogate the study, debate it, or critique each other's work.</a:t>
+            </a:r>
+            <a:endParaRPr lang="en-US" sz="1500" dirty="0"/>
           </a:p>
         </p:txBody>
       </p:sp>
@@ -5210,7 +4596,7 @@
                 <a:ea typeface="Cambria" pitchFamily="34" charset="-122"/>
                 <a:cs typeface="Cambria" pitchFamily="34" charset="-120"/>
               </a:rPr>
-              <a:t>Reading &amp; homework</a:t>
+              <a:t>The session</a:t>
             </a:r>
             <a:endParaRPr lang="en-US" sz="3000" dirty="0"/>
           </a:p>
@@ -5224,11 +4610,13 @@
         </p:nvSpPr>
         <p:spPr>
           <a:xfrm>
-            <a:off x="640080" y="1673352"/>
-            <a:ext cx="219456" cy="219456"/>
-          </a:xfrm>
-          <a:prstGeom prst="ellipse">
-            <a:avLst/>
+            <a:off x="640080" y="1572768"/>
+            <a:ext cx="868680" cy="338328"/>
+          </a:xfrm>
+          <a:prstGeom prst="roundRect">
+            <a:avLst>
+              <a:gd name="adj" fmla="val 16216"/>
+            </a:avLst>
           </a:prstGeom>
           <a:solidFill>
             <a:srgbClr val="7A3B2E"/>
@@ -5244,8 +4632,8 @@
         </p:nvSpPr>
         <p:spPr>
           <a:xfrm>
-            <a:off x="1051560" y="1600200"/>
-            <a:ext cx="10424160" cy="365760"/>
+            <a:off x="640080" y="1572768"/>
+            <a:ext cx="868680" cy="338328"/>
           </a:xfrm>
           <a:prstGeom prst="rect">
             <a:avLst/>
@@ -5257,21 +4645,21 @@
           <a:bodyPr wrap="square" rtlCol="0" anchor="ctr"/>
           <a:lstStyle/>
           <a:p>
-            <a:pPr indent="0" marL="0">
-              <a:buNone/>
-            </a:pPr>
-            <a:r>
-              <a:rPr lang="en-US" sz="1500" b="1" dirty="0">
-                <a:solidFill>
-                  <a:srgbClr val="7A3B2E"/>
+            <a:pPr algn="ctr" indent="0" marL="0">
+              <a:buNone/>
+            </a:pPr>
+            <a:r>
+              <a:rPr lang="en-US" sz="1100" b="1" dirty="0">
+                <a:solidFill>
+                  <a:srgbClr val="FFFFFF"/>
                 </a:solidFill>
                 <a:latin typeface="Calibri" pitchFamily="34" charset="0"/>
                 <a:ea typeface="Calibri" pitchFamily="34" charset="-122"/>
                 <a:cs typeface="Calibri" pitchFamily="34" charset="-120"/>
               </a:rPr>
-              <a:t>Reading</a:t>
-            </a:r>
-            <a:endParaRPr lang="en-US" sz="1500" dirty="0"/>
+              <a:t>0:00</a:t>
+            </a:r>
+            <a:endParaRPr lang="en-US" sz="1100" dirty="0"/>
           </a:p>
         </p:txBody>
       </p:sp>
@@ -5283,17 +4671,17 @@
         </p:nvSpPr>
         <p:spPr>
           <a:xfrm>
-            <a:off x="1051560" y="1984248"/>
-            <a:ext cx="10424160" cy="731520"/>
-          </a:xfrm>
-          <a:prstGeom prst="rect">
-            <a:avLst/>
-          </a:prstGeom>
-          <a:noFill/>
-          <a:ln/>
-        </p:spPr>
-        <p:txBody>
-          <a:bodyPr wrap="square" rtlCol="0" anchor="t">
+            <a:off x="1691640" y="1554480"/>
+            <a:ext cx="9646920" cy="448056"/>
+          </a:xfrm>
+          <a:prstGeom prst="rect">
+            <a:avLst/>
+          </a:prstGeom>
+          <a:noFill/>
+          <a:ln/>
+        </p:spPr>
+        <p:txBody>
+          <a:bodyPr wrap="square" rtlCol="0" anchor="ctr">
             <a:spAutoFit/>
           </a:bodyPr>
           <a:lstStyle/>
@@ -5302,7 +4690,7 @@
               <a:buNone/>
             </a:pPr>
             <a:r>
-              <a:rPr lang="en-US" sz="1400" dirty="0">
+              <a:rPr lang="en-US" sz="1100" dirty="0">
                 <a:solidFill>
                   <a:srgbClr val="1A1A1A"/>
                 </a:solidFill>
@@ -5310,9 +4698,9 @@
                 <a:ea typeface="Calibri" pitchFamily="34" charset="-122"/>
                 <a:cs typeface="Calibri" pitchFamily="34" charset="-120"/>
               </a:rPr>
-              <a:t>Wolfram, What Is ChatGPT Doing (opening sections only)</a:t>
-            </a:r>
-            <a:endParaRPr lang="en-US" sz="1400" dirty="0"/>
+              <a:t>Warm-up: favorite Pudding pieces from the sketch, what did yours count, and one choice its makers made. Then retrieval.</a:t>
+            </a:r>
+            <a:endParaRPr lang="en-US" sz="1100" dirty="0"/>
           </a:p>
         </p:txBody>
       </p:sp>
@@ -5324,14 +4712,16 @@
         </p:nvSpPr>
         <p:spPr>
           <a:xfrm>
-            <a:off x="640080" y="2633472"/>
-            <a:ext cx="219456" cy="219456"/>
-          </a:xfrm>
-          <a:prstGeom prst="ellipse">
-            <a:avLst/>
-          </a:prstGeom>
-          <a:solidFill>
-            <a:srgbClr val="3F6F5F"/>
+            <a:off x="640080" y="2020824"/>
+            <a:ext cx="868680" cy="338328"/>
+          </a:xfrm>
+          <a:prstGeom prst="roundRect">
+            <a:avLst>
+              <a:gd name="adj" fmla="val 16216"/>
+            </a:avLst>
+          </a:prstGeom>
+          <a:solidFill>
+            <a:srgbClr val="7A3B2E"/>
           </a:solidFill>
           <a:ln/>
         </p:spPr>
@@ -5344,8 +4734,8 @@
         </p:nvSpPr>
         <p:spPr>
           <a:xfrm>
-            <a:off x="1051560" y="2560320"/>
-            <a:ext cx="10424160" cy="365760"/>
+            <a:off x="640080" y="2020824"/>
+            <a:ext cx="868680" cy="338328"/>
           </a:xfrm>
           <a:prstGeom prst="rect">
             <a:avLst/>
@@ -5357,21 +4747,21 @@
           <a:bodyPr wrap="square" rtlCol="0" anchor="ctr"/>
           <a:lstStyle/>
           <a:p>
-            <a:pPr indent="0" marL="0">
-              <a:buNone/>
-            </a:pPr>
-            <a:r>
-              <a:rPr lang="en-US" sz="1500" b="1" dirty="0">
-                <a:solidFill>
-                  <a:srgbClr val="3F6F5F"/>
+            <a:pPr algn="ctr" indent="0" marL="0">
+              <a:buNone/>
+            </a:pPr>
+            <a:r>
+              <a:rPr lang="en-US" sz="1100" b="1" dirty="0">
+                <a:solidFill>
+                  <a:srgbClr val="FFFFFF"/>
                 </a:solidFill>
                 <a:latin typeface="Calibri" pitchFamily="34" charset="0"/>
                 <a:ea typeface="Calibri" pitchFamily="34" charset="-122"/>
                 <a:cs typeface="Calibri" pitchFamily="34" charset="-120"/>
               </a:rPr>
-              <a:t>Supplement</a:t>
-            </a:r>
-            <a:endParaRPr lang="en-US" sz="1500" dirty="0"/>
+              <a:t>0:05</a:t>
+            </a:r>
+            <a:endParaRPr lang="en-US" sz="1100" dirty="0"/>
           </a:p>
         </p:txBody>
       </p:sp>
@@ -5383,17 +4773,17 @@
         </p:nvSpPr>
         <p:spPr>
           <a:xfrm>
-            <a:off x="1051560" y="2944368"/>
-            <a:ext cx="10424160" cy="731520"/>
-          </a:xfrm>
-          <a:prstGeom prst="rect">
-            <a:avLst/>
-          </a:prstGeom>
-          <a:noFill/>
-          <a:ln/>
-        </p:spPr>
-        <p:txBody>
-          <a:bodyPr wrap="square" rtlCol="0" anchor="t">
+            <a:off x="1691640" y="2002536"/>
+            <a:ext cx="9646920" cy="448056"/>
+          </a:xfrm>
+          <a:prstGeom prst="rect">
+            <a:avLst/>
+          </a:prstGeom>
+          <a:noFill/>
+          <a:ln/>
+        </p:spPr>
+        <p:txBody>
+          <a:bodyPr wrap="square" rtlCol="0" anchor="ctr">
             <a:spAutoFit/>
           </a:bodyPr>
           <a:lstStyle/>
@@ -5402,7 +4792,7 @@
               <a:buNone/>
             </a:pPr>
             <a:r>
-              <a:rPr lang="en-US" sz="1400" dirty="0">
+              <a:rPr lang="en-US" sz="1100" dirty="0">
                 <a:solidFill>
                   <a:srgbClr val="1A1A1A"/>
                 </a:solidFill>
@@ -5410,9 +4800,9 @@
                 <a:ea typeface="Calibri" pitchFamily="34" charset="-122"/>
                 <a:cs typeface="Calibri" pitchFamily="34" charset="-120"/>
               </a:rPr>
-              <a:t>Zipf's law, the straight line in every text</a:t>
-            </a:r>
-            <a:endParaRPr lang="en-US" sz="1400" dirty="0"/>
+              <a:t>The trial: claim, objection, re-run-without-fiction rebuttal, "interpret with care." One named choice is the chart: the hockey-stick shape depends on its y-axis and smoothing. The notebook pulls the paper's own phrases live from Google Books and probes the fiction objection with fiction-marker phrases.</a:t>
+            </a:r>
+            <a:endParaRPr lang="en-US" sz="1100" dirty="0"/>
           </a:p>
         </p:txBody>
       </p:sp>
@@ -5424,14 +4814,16 @@
         </p:nvSpPr>
         <p:spPr>
           <a:xfrm>
-            <a:off x="640080" y="3593592"/>
-            <a:ext cx="219456" cy="219456"/>
-          </a:xfrm>
-          <a:prstGeom prst="ellipse">
-            <a:avLst/>
-          </a:prstGeom>
-          <a:solidFill>
-            <a:srgbClr val="B9852F"/>
+            <a:off x="640080" y="2468880"/>
+            <a:ext cx="868680" cy="338328"/>
+          </a:xfrm>
+          <a:prstGeom prst="roundRect">
+            <a:avLst>
+              <a:gd name="adj" fmla="val 16216"/>
+            </a:avLst>
+          </a:prstGeom>
+          <a:solidFill>
+            <a:srgbClr val="7A3B2E"/>
           </a:solidFill>
           <a:ln/>
         </p:spPr>
@@ -5444,8 +4836,8 @@
         </p:nvSpPr>
         <p:spPr>
           <a:xfrm>
-            <a:off x="1051560" y="3520440"/>
-            <a:ext cx="10424160" cy="365760"/>
+            <a:off x="640080" y="2468880"/>
+            <a:ext cx="868680" cy="338328"/>
           </a:xfrm>
           <a:prstGeom prst="rect">
             <a:avLst/>
@@ -5457,21 +4849,21 @@
           <a:bodyPr wrap="square" rtlCol="0" anchor="ctr"/>
           <a:lstStyle/>
           <a:p>
-            <a:pPr indent="0" marL="0">
-              <a:buNone/>
-            </a:pPr>
-            <a:r>
-              <a:rPr lang="en-US" sz="1500" b="1" dirty="0">
-                <a:solidFill>
-                  <a:srgbClr val="B9852F"/>
+            <a:pPr algn="ctr" indent="0" marL="0">
+              <a:buNone/>
+            </a:pPr>
+            <a:r>
+              <a:rPr lang="en-US" sz="1100" b="1" dirty="0">
+                <a:solidFill>
+                  <a:srgbClr val="FFFFFF"/>
                 </a:solidFill>
                 <a:latin typeface="Calibri" pitchFamily="34" charset="0"/>
                 <a:ea typeface="Calibri" pitchFamily="34" charset="-122"/>
                 <a:cs typeface="Calibri" pitchFamily="34" charset="-120"/>
               </a:rPr>
-              <a:t>Deeper (optional)</a:t>
-            </a:r>
-            <a:endParaRPr lang="en-US" sz="1500" dirty="0"/>
+              <a:t>0:25</a:t>
+            </a:r>
+            <a:endParaRPr lang="en-US" sz="1100" dirty="0"/>
           </a:p>
         </p:txBody>
       </p:sp>
@@ -5483,17 +4875,17 @@
         </p:nvSpPr>
         <p:spPr>
           <a:xfrm>
-            <a:off x="1051560" y="3904488"/>
-            <a:ext cx="10424160" cy="731520"/>
-          </a:xfrm>
-          <a:prstGeom prst="rect">
-            <a:avLst/>
-          </a:prstGeom>
-          <a:noFill/>
-          <a:ln/>
-        </p:spPr>
-        <p:txBody>
-          <a:bodyPr wrap="square" rtlCol="0" anchor="t">
+            <a:off x="1691640" y="2450592"/>
+            <a:ext cx="9646920" cy="448056"/>
+          </a:xfrm>
+          <a:prstGeom prst="rect">
+            <a:avLst/>
+          </a:prstGeom>
+          <a:noFill/>
+          <a:ln/>
+        </p:spPr>
+        <p:txBody>
+          <a:bodyPr wrap="square" rtlCol="0" anchor="ctr">
             <a:spAutoFit/>
           </a:bodyPr>
           <a:lstStyle/>
@@ -5502,7 +4894,7 @@
               <a:buNone/>
             </a:pPr>
             <a:r>
-              <a:rPr lang="en-US" sz="1400" dirty="0">
+              <a:rPr lang="en-US" sz="1100" dirty="0">
                 <a:solidFill>
                   <a:srgbClr val="1A1A1A"/>
                 </a:solidFill>
@@ -5510,9 +4902,9 @@
                 <a:ea typeface="Calibri" pitchFamily="34" charset="-122"/>
                 <a:cs typeface="Calibri" pitchFamily="34" charset="-120"/>
               </a:rPr>
-              <a:t>Grimmer &amp;amp; Stewart, Text as Data (2013), §1–4: all quantitative models of language are wrong, but some are useful</a:t>
-            </a:r>
-            <a:endParaRPr lang="en-US" sz="1400" dirty="0"/>
+              <a:t>A brief demonstration before the complications: the words one artist uses far more than everyone else, a signature vocabulary measured against a pop baseline.</a:t>
+            </a:r>
+            <a:endParaRPr lang="en-US" sz="1100" dirty="0"/>
           </a:p>
         </p:txBody>
       </p:sp>
@@ -5524,14 +4916,16 @@
         </p:nvSpPr>
         <p:spPr>
           <a:xfrm>
-            <a:off x="640080" y="4553712"/>
-            <a:ext cx="219456" cy="219456"/>
-          </a:xfrm>
-          <a:prstGeom prst="ellipse">
-            <a:avLst/>
-          </a:prstGeom>
-          <a:solidFill>
-            <a:srgbClr val="3F6F5F"/>
+            <a:off x="640080" y="2916936"/>
+            <a:ext cx="868680" cy="338328"/>
+          </a:xfrm>
+          <a:prstGeom prst="roundRect">
+            <a:avLst>
+              <a:gd name="adj" fmla="val 16216"/>
+            </a:avLst>
+          </a:prstGeom>
+          <a:solidFill>
+            <a:srgbClr val="7A3B2E"/>
           </a:solidFill>
           <a:ln/>
         </p:spPr>
@@ -5544,8 +4938,8 @@
         </p:nvSpPr>
         <p:spPr>
           <a:xfrm>
-            <a:off x="1051560" y="4480560"/>
-            <a:ext cx="10424160" cy="365760"/>
+            <a:off x="640080" y="2916936"/>
+            <a:ext cx="868680" cy="338328"/>
           </a:xfrm>
           <a:prstGeom prst="rect">
             <a:avLst/>
@@ -5557,21 +4951,21 @@
           <a:bodyPr wrap="square" rtlCol="0" anchor="ctr"/>
           <a:lstStyle/>
           <a:p>
-            <a:pPr indent="0" marL="0">
-              <a:buNone/>
-            </a:pPr>
-            <a:r>
-              <a:rPr lang="en-US" sz="1500" b="1" dirty="0">
-                <a:solidFill>
-                  <a:srgbClr val="3F6F5F"/>
+            <a:pPr algn="ctr" indent="0" marL="0">
+              <a:buNone/>
+            </a:pPr>
+            <a:r>
+              <a:rPr lang="en-US" sz="1100" b="1" dirty="0">
+                <a:solidFill>
+                  <a:srgbClr val="FFFFFF"/>
                 </a:solidFill>
                 <a:latin typeface="Calibri" pitchFamily="34" charset="0"/>
                 <a:ea typeface="Calibri" pitchFamily="34" charset="-122"/>
                 <a:cs typeface="Calibri" pitchFamily="34" charset="-120"/>
               </a:rPr>
-              <a:t>Sketch</a:t>
-            </a:r>
-            <a:endParaRPr lang="en-US" sz="1500" dirty="0"/>
+              <a:t>0:30</a:t>
+            </a:r>
+            <a:endParaRPr lang="en-US" sz="1100" dirty="0"/>
           </a:p>
         </p:txBody>
       </p:sp>
@@ -5583,17 +4977,17 @@
         </p:nvSpPr>
         <p:spPr>
           <a:xfrm>
-            <a:off x="1051560" y="4864608"/>
-            <a:ext cx="10424160" cy="731520"/>
-          </a:xfrm>
-          <a:prstGeom prst="rect">
-            <a:avLst/>
-          </a:prstGeom>
-          <a:noFill/>
-          <a:ln/>
-        </p:spPr>
-        <p:txBody>
-          <a:bodyPr wrap="square" rtlCol="0" anchor="t">
+            <a:off x="1691640" y="2898648"/>
+            <a:ext cx="9646920" cy="448056"/>
+          </a:xfrm>
+          <a:prstGeom prst="rect">
+            <a:avLst/>
+          </a:prstGeom>
+          <a:noFill/>
+          <a:ln/>
+        </p:spPr>
+        <p:txBody>
+          <a:bodyPr wrap="square" rtlCol="0" anchor="ctr">
             <a:spAutoFit/>
           </a:bodyPr>
           <a:lstStyle/>
@@ -5602,7 +4996,7 @@
               <a:buNone/>
             </a:pPr>
             <a:r>
-              <a:rPr lang="en-US" sz="1400" dirty="0">
+              <a:rPr lang="en-US" sz="1100" dirty="0">
                 <a:solidFill>
                   <a:srgbClr val="1A1A1A"/>
                 </a:solidFill>
@@ -5610,9 +5004,9 @@
                 <a:ea typeface="Calibri" pitchFamily="34" charset="-122"/>
                 <a:cs typeface="Calibri" pitchFamily="34" charset="-120"/>
               </a:rPr>
-              <a:t>Count something in a text you care about; one chart; one sentence naming a choice. If the count compares two things, shuffle-test the gap.</a:t>
-            </a:r>
-            <a:endParaRPr lang="en-US" sz="1400" dirty="0"/>
+              <a:t>Hand-built bag-of-words: two communities, highlighters, argue about merging run/running. Counting requires defining.</a:t>
+            </a:r>
+            <a:endParaRPr lang="en-US" sz="1100" dirty="0"/>
           </a:p>
         </p:txBody>
       </p:sp>
@@ -5624,11 +5018,13 @@
         </p:nvSpPr>
         <p:spPr>
           <a:xfrm>
-            <a:off x="640080" y="5513832"/>
-            <a:ext cx="219456" cy="219456"/>
-          </a:xfrm>
-          <a:prstGeom prst="ellipse">
-            <a:avLst/>
+            <a:off x="640080" y="3364992"/>
+            <a:ext cx="868680" cy="338328"/>
+          </a:xfrm>
+          <a:prstGeom prst="roundRect">
+            <a:avLst>
+              <a:gd name="adj" fmla="val 16216"/>
+            </a:avLst>
           </a:prstGeom>
           <a:solidFill>
             <a:srgbClr val="7A3B2E"/>
@@ -5644,8 +5040,8 @@
         </p:nvSpPr>
         <p:spPr>
           <a:xfrm>
-            <a:off x="1051560" y="5440680"/>
-            <a:ext cx="10424160" cy="365760"/>
+            <a:off x="640080" y="3364992"/>
+            <a:ext cx="868680" cy="338328"/>
           </a:xfrm>
           <a:prstGeom prst="rect">
             <a:avLst/>
@@ -5657,21 +5053,21 @@
           <a:bodyPr wrap="square" rtlCol="0" anchor="ctr"/>
           <a:lstStyle/>
           <a:p>
-            <a:pPr indent="0" marL="0">
-              <a:buNone/>
-            </a:pPr>
-            <a:r>
-              <a:rPr lang="en-US" sz="1500" b="1" dirty="0">
-                <a:solidFill>
-                  <a:srgbClr val="7A3B2E"/>
+            <a:pPr algn="ctr" indent="0" marL="0">
+              <a:buNone/>
+            </a:pPr>
+            <a:r>
+              <a:rPr lang="en-US" sz="1100" b="1" dirty="0">
+                <a:solidFill>
+                  <a:srgbClr val="FFFFFF"/>
                 </a:solidFill>
                 <a:latin typeface="Calibri" pitchFamily="34" charset="0"/>
                 <a:ea typeface="Calibri" pitchFamily="34" charset="-122"/>
                 <a:cs typeface="Calibri" pitchFamily="34" charset="-120"/>
               </a:rPr>
-              <a:t>Check (AI closed)</a:t>
-            </a:r>
-            <a:endParaRPr lang="en-US" sz="1500" dirty="0"/>
+              <a:t>0:55</a:t>
+            </a:r>
+            <a:endParaRPr lang="en-US" sz="1100" dirty="0"/>
           </a:p>
         </p:txBody>
       </p:sp>
@@ -5683,17 +5079,17 @@
         </p:nvSpPr>
         <p:spPr>
           <a:xfrm>
-            <a:off x="1051560" y="5824728"/>
-            <a:ext cx="10424160" cy="731520"/>
-          </a:xfrm>
-          <a:prstGeom prst="rect">
-            <a:avLst/>
-          </a:prstGeom>
-          <a:noFill/>
-          <a:ln/>
-        </p:spPr>
-        <p:txBody>
-          <a:bodyPr wrap="square" rtlCol="0" anchor="t">
+            <a:off x="1691640" y="3346704"/>
+            <a:ext cx="9646920" cy="448056"/>
+          </a:xfrm>
+          <a:prstGeom prst="rect">
+            <a:avLst/>
+          </a:prstGeom>
+          <a:noFill/>
+          <a:ln/>
+        </p:spPr>
+        <p:txBody>
+          <a:bodyPr wrap="square" rtlCol="0" anchor="ctr">
             <a:spAutoFit/>
           </a:bodyPr>
           <a:lstStyle/>
@@ -5702,7 +5098,7 @@
               <a:buNone/>
             </a:pPr>
             <a:r>
-              <a:rPr lang="en-US" sz="1400" dirty="0">
+              <a:rPr lang="en-US" sz="1100" dirty="0">
                 <a:solidFill>
                   <a:srgbClr val="1A1A1A"/>
                 </a:solidFill>
@@ -5710,9 +5106,519 @@
                 <a:ea typeface="Calibri" pitchFamily="34" charset="-122"/>
                 <a:cs typeface="Calibri" pitchFamily="34" charset="-120"/>
               </a:rPr>
-              <a:t>Explain it: why two tokenizers split a sentence differently, and what your stemming choice changed. (Competencies 3, 5.)</a:t>
-            </a:r>
-            <a:endParaRPr lang="en-US" sz="1400" dirty="0"/>
+              <a:t>What counts as a word? Paste a sentence into two tokenizer playgrounds and watch it shatter differently. Models see tokens, not words. Then the standard tools for the run/running decision: NLTK stemming and lemmatization, a real stop list, and Zipf's law, the curve that explains why stop lists exist.</a:t>
+            </a:r>
+            <a:endParaRPr lang="en-US" sz="1100" dirty="0"/>
+          </a:p>
+        </p:txBody>
+      </p:sp>
+      <p:sp>
+        <p:nvSpPr>
+          <p:cNvPr id="18" name="Shape 16"/>
+          <p:cNvSpPr/>
+          <p:nvPr/>
+        </p:nvSpPr>
+        <p:spPr>
+          <a:xfrm>
+            <a:off x="640080" y="3813048"/>
+            <a:ext cx="868680" cy="338328"/>
+          </a:xfrm>
+          <a:prstGeom prst="roundRect">
+            <a:avLst>
+              <a:gd name="adj" fmla="val 16216"/>
+            </a:avLst>
+          </a:prstGeom>
+          <a:solidFill>
+            <a:srgbClr val="7A3B2E"/>
+          </a:solidFill>
+          <a:ln/>
+        </p:spPr>
+      </p:sp>
+      <p:sp>
+        <p:nvSpPr>
+          <p:cNvPr id="19" name="Text 17"/>
+          <p:cNvSpPr/>
+          <p:nvPr/>
+        </p:nvSpPr>
+        <p:spPr>
+          <a:xfrm>
+            <a:off x="640080" y="3813048"/>
+            <a:ext cx="868680" cy="338328"/>
+          </a:xfrm>
+          <a:prstGeom prst="rect">
+            <a:avLst/>
+          </a:prstGeom>
+          <a:noFill/>
+          <a:ln/>
+        </p:spPr>
+        <p:txBody>
+          <a:bodyPr wrap="square" rtlCol="0" anchor="ctr"/>
+          <a:lstStyle/>
+          <a:p>
+            <a:pPr algn="ctr" indent="0" marL="0">
+              <a:buNone/>
+            </a:pPr>
+            <a:r>
+              <a:rPr lang="en-US" sz="1100" b="1" dirty="0">
+                <a:solidFill>
+                  <a:srgbClr val="FFFFFF"/>
+                </a:solidFill>
+                <a:latin typeface="Calibri" pitchFamily="34" charset="0"/>
+                <a:ea typeface="Calibri" pitchFamily="34" charset="-122"/>
+                <a:cs typeface="Calibri" pitchFamily="34" charset="-120"/>
+              </a:rPr>
+              <a:t>1:05</a:t>
+            </a:r>
+            <a:endParaRPr lang="en-US" sz="1100" dirty="0"/>
+          </a:p>
+        </p:txBody>
+      </p:sp>
+      <p:sp>
+        <p:nvSpPr>
+          <p:cNvPr id="20" name="Text 18"/>
+          <p:cNvSpPr/>
+          <p:nvPr/>
+        </p:nvSpPr>
+        <p:spPr>
+          <a:xfrm>
+            <a:off x="1691640" y="3794760"/>
+            <a:ext cx="9646920" cy="448056"/>
+          </a:xfrm>
+          <a:prstGeom prst="rect">
+            <a:avLst/>
+          </a:prstGeom>
+          <a:noFill/>
+          <a:ln/>
+        </p:spPr>
+        <p:txBody>
+          <a:bodyPr wrap="square" rtlCol="0" anchor="ctr">
+            <a:spAutoFit/>
+          </a:bodyPr>
+          <a:lstStyle/>
+          <a:p>
+            <a:pPr indent="0" marL="0">
+              <a:buNone/>
+            </a:pPr>
+            <a:r>
+              <a:rPr lang="en-US" sz="1100" dirty="0">
+                <a:solidFill>
+                  <a:srgbClr val="1A1A1A"/>
+                </a:solidFill>
+                <a:latin typeface="Calibri" pitchFamily="34" charset="0"/>
+                <a:ea typeface="Calibri" pitchFamily="34" charset="-122"/>
+                <a:cs typeface="Calibri" pitchFamily="34" charset="-120"/>
+              </a:rPr>
+              <a:t>Break</a:t>
+            </a:r>
+            <a:endParaRPr lang="en-US" sz="1100" dirty="0"/>
+          </a:p>
+        </p:txBody>
+      </p:sp>
+      <p:sp>
+        <p:nvSpPr>
+          <p:cNvPr id="21" name="Shape 19"/>
+          <p:cNvSpPr/>
+          <p:nvPr/>
+        </p:nvSpPr>
+        <p:spPr>
+          <a:xfrm>
+            <a:off x="640080" y="4261104"/>
+            <a:ext cx="868680" cy="338328"/>
+          </a:xfrm>
+          <a:prstGeom prst="roundRect">
+            <a:avLst>
+              <a:gd name="adj" fmla="val 16216"/>
+            </a:avLst>
+          </a:prstGeom>
+          <a:solidFill>
+            <a:srgbClr val="7A3B2E"/>
+          </a:solidFill>
+          <a:ln/>
+        </p:spPr>
+      </p:sp>
+      <p:sp>
+        <p:nvSpPr>
+          <p:cNvPr id="22" name="Text 20"/>
+          <p:cNvSpPr/>
+          <p:nvPr/>
+        </p:nvSpPr>
+        <p:spPr>
+          <a:xfrm>
+            <a:off x="640080" y="4261104"/>
+            <a:ext cx="868680" cy="338328"/>
+          </a:xfrm>
+          <a:prstGeom prst="rect">
+            <a:avLst/>
+          </a:prstGeom>
+          <a:noFill/>
+          <a:ln/>
+        </p:spPr>
+        <p:txBody>
+          <a:bodyPr wrap="square" rtlCol="0" anchor="ctr"/>
+          <a:lstStyle/>
+          <a:p>
+            <a:pPr algn="ctr" indent="0" marL="0">
+              <a:buNone/>
+            </a:pPr>
+            <a:r>
+              <a:rPr lang="en-US" sz="1100" b="1" dirty="0">
+                <a:solidFill>
+                  <a:srgbClr val="FFFFFF"/>
+                </a:solidFill>
+                <a:latin typeface="Calibri" pitchFamily="34" charset="0"/>
+                <a:ea typeface="Calibri" pitchFamily="34" charset="-122"/>
+                <a:cs typeface="Calibri" pitchFamily="34" charset="-120"/>
+              </a:rPr>
+              <a:t>1:15</a:t>
+            </a:r>
+            <a:endParaRPr lang="en-US" sz="1100" dirty="0"/>
+          </a:p>
+        </p:txBody>
+      </p:sp>
+      <p:sp>
+        <p:nvSpPr>
+          <p:cNvPr id="23" name="Text 21"/>
+          <p:cNvSpPr/>
+          <p:nvPr/>
+        </p:nvSpPr>
+        <p:spPr>
+          <a:xfrm>
+            <a:off x="1691640" y="4242816"/>
+            <a:ext cx="9646920" cy="448056"/>
+          </a:xfrm>
+          <a:prstGeom prst="rect">
+            <a:avLst/>
+          </a:prstGeom>
+          <a:noFill/>
+          <a:ln/>
+        </p:spPr>
+        <p:txBody>
+          <a:bodyPr wrap="square" rtlCol="0" anchor="ctr">
+            <a:spAutoFit/>
+          </a:bodyPr>
+          <a:lstStyle/>
+          <a:p>
+            <a:pPr indent="0" marL="0">
+              <a:buNone/>
+            </a:pPr>
+            <a:r>
+              <a:rPr lang="en-US" sz="1100" dirty="0">
+                <a:solidFill>
+                  <a:srgbClr val="1A1A1A"/>
+                </a:solidFill>
+                <a:latin typeface="Calibri" pitchFamily="34" charset="0"/>
+                <a:ea typeface="Calibri" pitchFamily="34" charset="-122"/>
+                <a:cs typeface="Calibri" pitchFamily="34" charset="-120"/>
+              </a:rPr>
+              <a:t>N-grams and statistics, hands-on: bigrams across three corpora, distributions and mean-versus-median on real counts, rates per 1,000 words, z-scores as the common scale. Then tf-idf at two scales, single comments as documents and twelve whole subreddits as documents, each community sight-read from its distinctive words (cpu and coolers, roth and rates, puts and bears), and k-means on 360 live Reddit comments from three subreddits: raw counts give a blob, tf-idf plus 60 dimensions sorts six in seven comments with their community. The representation, not the algorithm, does the work. Closer: the same k-means on twenty Met paintings counted into 27 color buckets sorts portraits from landscapes, three in four.</a:t>
+            </a:r>
+            <a:endParaRPr lang="en-US" sz="1100" dirty="0"/>
+          </a:p>
+        </p:txBody>
+      </p:sp>
+      <p:sp>
+        <p:nvSpPr>
+          <p:cNvPr id="24" name="Shape 22"/>
+          <p:cNvSpPr/>
+          <p:nvPr/>
+        </p:nvSpPr>
+        <p:spPr>
+          <a:xfrm>
+            <a:off x="640080" y="4709160"/>
+            <a:ext cx="868680" cy="338328"/>
+          </a:xfrm>
+          <a:prstGeom prst="roundRect">
+            <a:avLst>
+              <a:gd name="adj" fmla="val 16216"/>
+            </a:avLst>
+          </a:prstGeom>
+          <a:solidFill>
+            <a:srgbClr val="7A3B2E"/>
+          </a:solidFill>
+          <a:ln/>
+        </p:spPr>
+      </p:sp>
+      <p:sp>
+        <p:nvSpPr>
+          <p:cNvPr id="25" name="Text 23"/>
+          <p:cNvSpPr/>
+          <p:nvPr/>
+        </p:nvSpPr>
+        <p:spPr>
+          <a:xfrm>
+            <a:off x="640080" y="4709160"/>
+            <a:ext cx="868680" cy="338328"/>
+          </a:xfrm>
+          <a:prstGeom prst="rect">
+            <a:avLst/>
+          </a:prstGeom>
+          <a:noFill/>
+          <a:ln/>
+        </p:spPr>
+        <p:txBody>
+          <a:bodyPr wrap="square" rtlCol="0" anchor="ctr"/>
+          <a:lstStyle/>
+          <a:p>
+            <a:pPr algn="ctr" indent="0" marL="0">
+              <a:buNone/>
+            </a:pPr>
+            <a:r>
+              <a:rPr lang="en-US" sz="1100" b="1" dirty="0">
+                <a:solidFill>
+                  <a:srgbClr val="FFFFFF"/>
+                </a:solidFill>
+                <a:latin typeface="Calibri" pitchFamily="34" charset="0"/>
+                <a:ea typeface="Calibri" pitchFamily="34" charset="-122"/>
+                <a:cs typeface="Calibri" pitchFamily="34" charset="-120"/>
+              </a:rPr>
+              <a:t>1:30</a:t>
+            </a:r>
+            <a:endParaRPr lang="en-US" sz="1100" dirty="0"/>
+          </a:p>
+        </p:txBody>
+      </p:sp>
+      <p:sp>
+        <p:nvSpPr>
+          <p:cNvPr id="26" name="Text 24"/>
+          <p:cNvSpPr/>
+          <p:nvPr/>
+        </p:nvSpPr>
+        <p:spPr>
+          <a:xfrm>
+            <a:off x="1691640" y="4690872"/>
+            <a:ext cx="9646920" cy="448056"/>
+          </a:xfrm>
+          <a:prstGeom prst="rect">
+            <a:avLst/>
+          </a:prstGeom>
+          <a:noFill/>
+          <a:ln/>
+        </p:spPr>
+        <p:txBody>
+          <a:bodyPr wrap="square" rtlCol="0" anchor="ctr">
+            <a:spAutoFit/>
+          </a:bodyPr>
+          <a:lstStyle/>
+          <a:p>
+            <a:pPr indent="0" marL="0">
+              <a:buNone/>
+            </a:pPr>
+            <a:r>
+              <a:rPr lang="en-US" sz="1100" dirty="0">
+                <a:solidFill>
+                  <a:srgbClr val="1A1A1A"/>
+                </a:solidFill>
+                <a:latin typeface="Calibri" pitchFamily="34" charset="0"/>
+                <a:ea typeface="Calibri" pitchFamily="34" charset="-122"/>
+                <a:cs typeface="Calibri" pitchFamily="34" charset="-120"/>
+              </a:rPr>
+              <a:t>Keyness, the She Giggles, He Gallops move: a log-odds ratio between two corpora finds the words one voice uses far more than a baseline, exactly the method behind Week 1's featured piece. The corpus pair is a choice too: artist vs. pop, lyrics vs. subreddit vs. novel.</a:t>
+            </a:r>
+            <a:endParaRPr lang="en-US" sz="1100" dirty="0"/>
+          </a:p>
+        </p:txBody>
+      </p:sp>
+      <p:sp>
+        <p:nvSpPr>
+          <p:cNvPr id="27" name="Shape 25"/>
+          <p:cNvSpPr/>
+          <p:nvPr/>
+        </p:nvSpPr>
+        <p:spPr>
+          <a:xfrm>
+            <a:off x="640080" y="5157216"/>
+            <a:ext cx="868680" cy="338328"/>
+          </a:xfrm>
+          <a:prstGeom prst="roundRect">
+            <a:avLst>
+              <a:gd name="adj" fmla="val 16216"/>
+            </a:avLst>
+          </a:prstGeom>
+          <a:solidFill>
+            <a:srgbClr val="7A3B2E"/>
+          </a:solidFill>
+          <a:ln/>
+        </p:spPr>
+      </p:sp>
+      <p:sp>
+        <p:nvSpPr>
+          <p:cNvPr id="28" name="Text 26"/>
+          <p:cNvSpPr/>
+          <p:nvPr/>
+        </p:nvSpPr>
+        <p:spPr>
+          <a:xfrm>
+            <a:off x="640080" y="5157216"/>
+            <a:ext cx="868680" cy="338328"/>
+          </a:xfrm>
+          <a:prstGeom prst="rect">
+            <a:avLst/>
+          </a:prstGeom>
+          <a:noFill/>
+          <a:ln/>
+        </p:spPr>
+        <p:txBody>
+          <a:bodyPr wrap="square" rtlCol="0" anchor="ctr"/>
+          <a:lstStyle/>
+          <a:p>
+            <a:pPr algn="ctr" indent="0" marL="0">
+              <a:buNone/>
+            </a:pPr>
+            <a:r>
+              <a:rPr lang="en-US" sz="1100" b="1" dirty="0">
+                <a:solidFill>
+                  <a:srgbClr val="FFFFFF"/>
+                </a:solidFill>
+                <a:latin typeface="Calibri" pitchFamily="34" charset="0"/>
+                <a:ea typeface="Calibri" pitchFamily="34" charset="-122"/>
+                <a:cs typeface="Calibri" pitchFamily="34" charset="-120"/>
+              </a:rPr>
+              <a:t>1:42</a:t>
+            </a:r>
+            <a:endParaRPr lang="en-US" sz="1100" dirty="0"/>
+          </a:p>
+        </p:txBody>
+      </p:sp>
+      <p:sp>
+        <p:nvSpPr>
+          <p:cNvPr id="29" name="Text 27"/>
+          <p:cNvSpPr/>
+          <p:nvPr/>
+        </p:nvSpPr>
+        <p:spPr>
+          <a:xfrm>
+            <a:off x="1691640" y="5138928"/>
+            <a:ext cx="9646920" cy="448056"/>
+          </a:xfrm>
+          <a:prstGeom prst="rect">
+            <a:avLst/>
+          </a:prstGeom>
+          <a:noFill/>
+          <a:ln/>
+        </p:spPr>
+        <p:txBody>
+          <a:bodyPr wrap="square" rtlCol="0" anchor="ctr">
+            <a:spAutoFit/>
+          </a:bodyPr>
+          <a:lstStyle/>
+          <a:p>
+            <a:pPr indent="0" marL="0">
+              <a:buNone/>
+            </a:pPr>
+            <a:r>
+              <a:rPr lang="en-US" sz="1100" dirty="0">
+                <a:solidFill>
+                  <a:srgbClr val="1A1A1A"/>
+                </a:solidFill>
+                <a:latin typeface="Calibri" pitchFamily="34" charset="0"/>
+                <a:ea typeface="Calibri" pitchFamily="34" charset="-122"/>
+                <a:cs typeface="Calibri" pitchFamily="34" charset="-120"/>
+              </a:rPr>
+              <a:t>Is the difference real? The shuffle test names the p-value, then the three traps: selection (testing the word you picked for its extremity), multiplicity (random halves of one community yield a convincing fake vocabulary; ~75 of 1,500 words pass by luck), and size (significant is not big; report effect and p together, with a bootstrap interval for the size).</a:t>
+            </a:r>
+            <a:endParaRPr lang="en-US" sz="1100" dirty="0"/>
+          </a:p>
+        </p:txBody>
+      </p:sp>
+      <p:sp>
+        <p:nvSpPr>
+          <p:cNvPr id="30" name="Shape 28"/>
+          <p:cNvSpPr/>
+          <p:nvPr/>
+        </p:nvSpPr>
+        <p:spPr>
+          <a:xfrm>
+            <a:off x="640080" y="5605272"/>
+            <a:ext cx="868680" cy="338328"/>
+          </a:xfrm>
+          <a:prstGeom prst="roundRect">
+            <a:avLst>
+              <a:gd name="adj" fmla="val 16216"/>
+            </a:avLst>
+          </a:prstGeom>
+          <a:solidFill>
+            <a:srgbClr val="7A3B2E"/>
+          </a:solidFill>
+          <a:ln/>
+        </p:spPr>
+      </p:sp>
+      <p:sp>
+        <p:nvSpPr>
+          <p:cNvPr id="31" name="Text 29"/>
+          <p:cNvSpPr/>
+          <p:nvPr/>
+        </p:nvSpPr>
+        <p:spPr>
+          <a:xfrm>
+            <a:off x="640080" y="5605272"/>
+            <a:ext cx="868680" cy="338328"/>
+          </a:xfrm>
+          <a:prstGeom prst="rect">
+            <a:avLst/>
+          </a:prstGeom>
+          <a:noFill/>
+          <a:ln/>
+        </p:spPr>
+        <p:txBody>
+          <a:bodyPr wrap="square" rtlCol="0" anchor="ctr"/>
+          <a:lstStyle/>
+          <a:p>
+            <a:pPr algn="ctr" indent="0" marL="0">
+              <a:buNone/>
+            </a:pPr>
+            <a:r>
+              <a:rPr lang="en-US" sz="1100" b="1" dirty="0">
+                <a:solidFill>
+                  <a:srgbClr val="FFFFFF"/>
+                </a:solidFill>
+                <a:latin typeface="Calibri" pitchFamily="34" charset="0"/>
+                <a:ea typeface="Calibri" pitchFamily="34" charset="-122"/>
+                <a:cs typeface="Calibri" pitchFamily="34" charset="-120"/>
+              </a:rPr>
+              <a:t>1:50</a:t>
+            </a:r>
+            <a:endParaRPr lang="en-US" sz="1100" dirty="0"/>
+          </a:p>
+        </p:txBody>
+      </p:sp>
+      <p:sp>
+        <p:nvSpPr>
+          <p:cNvPr id="32" name="Text 30"/>
+          <p:cNvSpPr/>
+          <p:nvPr/>
+        </p:nvSpPr>
+        <p:spPr>
+          <a:xfrm>
+            <a:off x="1691640" y="5586984"/>
+            <a:ext cx="9646920" cy="448056"/>
+          </a:xfrm>
+          <a:prstGeom prst="rect">
+            <a:avLst/>
+          </a:prstGeom>
+          <a:noFill/>
+          <a:ln/>
+        </p:spPr>
+        <p:txBody>
+          <a:bodyPr wrap="square" rtlCol="0" anchor="ctr">
+            <a:spAutoFit/>
+          </a:bodyPr>
+          <a:lstStyle/>
+          <a:p>
+            <a:pPr indent="0" marL="0">
+              <a:buNone/>
+            </a:pPr>
+            <a:r>
+              <a:rPr lang="en-US" sz="1100" dirty="0">
+                <a:solidFill>
+                  <a:srgbClr val="1A1A1A"/>
+                </a:solidFill>
+                <a:latin typeface="Calibri" pitchFamily="34" charset="0"/>
+                <a:ea typeface="Calibri" pitchFamily="34" charset="-122"/>
+                <a:cs typeface="Calibri" pitchFamily="34" charset="-120"/>
+              </a:rPr>
+              <a:t>Gemini-free check and check-out.</a:t>
+            </a:r>
+            <a:endParaRPr lang="en-US" sz="1100" dirty="0"/>
           </a:p>
         </p:txBody>
       </p:sp>
@@ -5757,7 +5663,7 @@
         <p:spPr>
           <a:xfrm>
             <a:off x="640080" y="640080"/>
-            <a:ext cx="10058400" cy="320040"/>
+            <a:ext cx="10058400" cy="731520"/>
           </a:xfrm>
           <a:prstGeom prst="rect">
             <a:avLst/>
@@ -5773,7 +5679,66 @@
               <a:buNone/>
             </a:pPr>
             <a:r>
-              <a:rPr lang="en-US" sz="1300" b="1" spc="300" kern="0" dirty="0">
+              <a:rPr lang="en-US" sz="3000" b="1" dirty="0">
+                <a:solidFill>
+                  <a:srgbClr val="1A1A1A"/>
+                </a:solidFill>
+                <a:latin typeface="Cambria" pitchFamily="34" charset="0"/>
+                <a:ea typeface="Cambria" pitchFamily="34" charset="-122"/>
+                <a:cs typeface="Cambria" pitchFamily="34" charset="-120"/>
+              </a:rPr>
+              <a:t>Reading &amp; homework</a:t>
+            </a:r>
+            <a:endParaRPr lang="en-US" sz="3000" dirty="0"/>
+          </a:p>
+        </p:txBody>
+      </p:sp>
+      <p:sp>
+        <p:nvSpPr>
+          <p:cNvPr id="3" name="Shape 1"/>
+          <p:cNvSpPr/>
+          <p:nvPr/>
+        </p:nvSpPr>
+        <p:spPr>
+          <a:xfrm>
+            <a:off x="640080" y="1673352"/>
+            <a:ext cx="219456" cy="219456"/>
+          </a:xfrm>
+          <a:prstGeom prst="ellipse">
+            <a:avLst/>
+          </a:prstGeom>
+          <a:solidFill>
+            <a:srgbClr val="7A3B2E"/>
+          </a:solidFill>
+          <a:ln/>
+        </p:spPr>
+      </p:sp>
+      <p:sp>
+        <p:nvSpPr>
+          <p:cNvPr id="4" name="Text 2"/>
+          <p:cNvSpPr/>
+          <p:nvPr/>
+        </p:nvSpPr>
+        <p:spPr>
+          <a:xfrm>
+            <a:off x="1051560" y="1600200"/>
+            <a:ext cx="10424160" cy="365760"/>
+          </a:xfrm>
+          <a:prstGeom prst="rect">
+            <a:avLst/>
+          </a:prstGeom>
+          <a:noFill/>
+          <a:ln/>
+        </p:spPr>
+        <p:txBody>
+          <a:bodyPr wrap="square" rtlCol="0" anchor="ctr"/>
+          <a:lstStyle/>
+          <a:p>
+            <a:pPr indent="0" marL="0">
+              <a:buNone/>
+            </a:pPr>
+            <a:r>
+              <a:rPr lang="en-US" sz="1500" b="1" dirty="0">
                 <a:solidFill>
                   <a:srgbClr val="7A3B2E"/>
                 </a:solidFill>
@@ -5781,72 +5746,11 @@
                 <a:ea typeface="Calibri" pitchFamily="34" charset="-122"/>
                 <a:cs typeface="Calibri" pitchFamily="34" charset="-120"/>
               </a:rPr>
-              <a:t>HOW THIS WEEK CONNECTS</a:t>
-            </a:r>
-            <a:endParaRPr lang="en-US" sz="1300" dirty="0"/>
-          </a:p>
-        </p:txBody>
-      </p:sp>
-      <p:sp>
-        <p:nvSpPr>
-          <p:cNvPr id="3" name="Text 1"/>
-          <p:cNvSpPr/>
-          <p:nvPr/>
-        </p:nvSpPr>
-        <p:spPr>
-          <a:xfrm>
-            <a:off x="640080" y="987552"/>
-            <a:ext cx="10058400" cy="640080"/>
-          </a:xfrm>
-          <a:prstGeom prst="rect">
-            <a:avLst/>
-          </a:prstGeom>
-          <a:noFill/>
-          <a:ln/>
-        </p:spPr>
-        <p:txBody>
-          <a:bodyPr wrap="square" rtlCol="0" anchor="ctr"/>
-          <a:lstStyle/>
-          <a:p>
-            <a:pPr indent="0" marL="0">
-              <a:buNone/>
-            </a:pPr>
-            <a:r>
-              <a:rPr lang="en-US" sz="2800" b="1" dirty="0">
-                <a:solidFill>
-                  <a:srgbClr val="1A1A1A"/>
-                </a:solidFill>
-                <a:latin typeface="Cambria" pitchFamily="34" charset="0"/>
-                <a:ea typeface="Cambria" pitchFamily="34" charset="-122"/>
-                <a:cs typeface="Cambria" pitchFamily="34" charset="-120"/>
-              </a:rPr>
-              <a:t>The course's through-lines</a:t>
-            </a:r>
-            <a:endParaRPr lang="en-US" sz="2800" dirty="0"/>
-          </a:p>
-        </p:txBody>
-      </p:sp>
-      <p:sp>
-        <p:nvSpPr>
-          <p:cNvPr id="4" name="Shape 2"/>
-          <p:cNvSpPr/>
-          <p:nvPr/>
-        </p:nvSpPr>
-        <p:spPr>
-          <a:xfrm>
-            <a:off x="640080" y="2057400"/>
-            <a:ext cx="457200" cy="457200"/>
-          </a:xfrm>
-          <a:prstGeom prst="roundRect">
-            <a:avLst>
-              <a:gd name="adj" fmla="val 16000"/>
-            </a:avLst>
-          </a:prstGeom>
-          <a:solidFill>
-            <a:srgbClr val="7A3B2E"/>
-          </a:solidFill>
-          <a:ln/>
-        </p:spPr>
+              <a:t>Reading</a:t>
+            </a:r>
+            <a:endParaRPr lang="en-US" sz="1500" dirty="0"/>
+          </a:p>
+        </p:txBody>
       </p:sp>
       <p:sp>
         <p:nvSpPr>
@@ -5856,86 +5760,8 @@
         </p:nvSpPr>
         <p:spPr>
           <a:xfrm>
-            <a:off x="640080" y="2057400"/>
-            <a:ext cx="457200" cy="457200"/>
-          </a:xfrm>
-          <a:prstGeom prst="rect">
-            <a:avLst/>
-          </a:prstGeom>
-          <a:noFill/>
-          <a:ln/>
-        </p:spPr>
-        <p:txBody>
-          <a:bodyPr wrap="square" rtlCol="0" anchor="ctr"/>
-          <a:lstStyle/>
-          <a:p>
-            <a:pPr algn="ctr" indent="0" marL="0">
-              <a:buNone/>
-            </a:pPr>
-            <a:r>
-              <a:rPr lang="en-US" sz="2000" b="1" dirty="0">
-                <a:solidFill>
-                  <a:srgbClr val="FFFFFF"/>
-                </a:solidFill>
-                <a:latin typeface="Cambria" pitchFamily="34" charset="0"/>
-                <a:ea typeface="Cambria" pitchFamily="34" charset="-122"/>
-                <a:cs typeface="Cambria" pitchFamily="34" charset="-120"/>
-              </a:rPr>
-              <a:t>1</a:t>
-            </a:r>
-            <a:endParaRPr lang="en-US" sz="2000" dirty="0"/>
-          </a:p>
-        </p:txBody>
-      </p:sp>
-      <p:sp>
-        <p:nvSpPr>
-          <p:cNvPr id="6" name="Text 4"/>
-          <p:cNvSpPr/>
-          <p:nvPr/>
-        </p:nvSpPr>
-        <p:spPr>
-          <a:xfrm>
-            <a:off x="1371600" y="2020824"/>
-            <a:ext cx="10332720" cy="411480"/>
-          </a:xfrm>
-          <a:prstGeom prst="rect">
-            <a:avLst/>
-          </a:prstGeom>
-          <a:noFill/>
-          <a:ln/>
-        </p:spPr>
-        <p:txBody>
-          <a:bodyPr wrap="square" rtlCol="0" anchor="ctr"/>
-          <a:lstStyle/>
-          <a:p>
-            <a:pPr indent="0" marL="0">
-              <a:buNone/>
-            </a:pPr>
-            <a:r>
-              <a:rPr lang="en-US" sz="1900" b="1" dirty="0">
-                <a:solidFill>
-                  <a:srgbClr val="7A3B2E"/>
-                </a:solidFill>
-                <a:latin typeface="Cambria" pitchFamily="34" charset="0"/>
-                <a:ea typeface="Cambria" pitchFamily="34" charset="-122"/>
-                <a:cs typeface="Cambria" pitchFamily="34" charset="-120"/>
-              </a:rPr>
-              <a:t>Beyond counting</a:t>
-            </a:r>
-            <a:endParaRPr lang="en-US" sz="1900" dirty="0"/>
-          </a:p>
-        </p:txBody>
-      </p:sp>
-      <p:sp>
-        <p:nvSpPr>
-          <p:cNvPr id="7" name="Text 5"/>
-          <p:cNvSpPr/>
-          <p:nvPr/>
-        </p:nvSpPr>
-        <p:spPr>
-          <a:xfrm>
-            <a:off x="1371600" y="2441448"/>
-            <a:ext cx="10332720" cy="914400"/>
+            <a:off x="1051560" y="1984248"/>
+            <a:ext cx="10424160" cy="731520"/>
           </a:xfrm>
           <a:prstGeom prst="rect">
             <a:avLst/>
@@ -5950,13 +5776,10 @@
           <a:lstStyle/>
           <a:p>
             <a:pPr indent="0" marL="0">
-              <a:lnSpc>
-                <a:spcPct val="112000"/>
-              </a:lnSpc>
-              <a:buNone/>
-            </a:pPr>
-            <a:r>
-              <a:rPr lang="en-US" sz="1450" dirty="0">
+              <a:buNone/>
+            </a:pPr>
+            <a:r>
+              <a:rPr lang="en-US" sz="1400" dirty="0">
                 <a:solidFill>
                   <a:srgbClr val="1A1A1A"/>
                 </a:solidFill>
@@ -5964,27 +5787,25 @@
                 <a:ea typeface="Calibri" pitchFamily="34" charset="-122"/>
                 <a:cs typeface="Calibri" pitchFamily="34" charset="-120"/>
               </a:rPr>
-              <a:t>Counting is the simplest tool and has no notion of meaning. Week 5 addresses that limit.</a:t>
-            </a:r>
-            <a:endParaRPr lang="en-US" sz="1450" dirty="0"/>
-          </a:p>
-        </p:txBody>
-      </p:sp>
-      <p:sp>
-        <p:nvSpPr>
-          <p:cNvPr id="8" name="Shape 6"/>
-          <p:cNvSpPr/>
-          <p:nvPr/>
-        </p:nvSpPr>
-        <p:spPr>
-          <a:xfrm>
-            <a:off x="640080" y="3520440"/>
-            <a:ext cx="457200" cy="457200"/>
-          </a:xfrm>
-          <a:prstGeom prst="roundRect">
-            <a:avLst>
-              <a:gd name="adj" fmla="val 16000"/>
-            </a:avLst>
+              <a:t>Wolfram, What Is ChatGPT Doing (opening sections only)</a:t>
+            </a:r>
+            <a:endParaRPr lang="en-US" sz="1400" dirty="0"/>
+          </a:p>
+        </p:txBody>
+      </p:sp>
+      <p:sp>
+        <p:nvSpPr>
+          <p:cNvPr id="6" name="Shape 4"/>
+          <p:cNvSpPr/>
+          <p:nvPr/>
+        </p:nvSpPr>
+        <p:spPr>
+          <a:xfrm>
+            <a:off x="640080" y="2633472"/>
+            <a:ext cx="219456" cy="219456"/>
+          </a:xfrm>
+          <a:prstGeom prst="ellipse">
+            <a:avLst/>
           </a:prstGeom>
           <a:solidFill>
             <a:srgbClr val="3F6F5F"/>
@@ -5994,14 +5815,14 @@
       </p:sp>
       <p:sp>
         <p:nvSpPr>
-          <p:cNvPr id="9" name="Text 7"/>
-          <p:cNvSpPr/>
-          <p:nvPr/>
-        </p:nvSpPr>
-        <p:spPr>
-          <a:xfrm>
-            <a:off x="640080" y="3520440"/>
-            <a:ext cx="457200" cy="457200"/>
+          <p:cNvPr id="7" name="Text 5"/>
+          <p:cNvSpPr/>
+          <p:nvPr/>
+        </p:nvSpPr>
+        <p:spPr>
+          <a:xfrm>
+            <a:off x="1051560" y="2560320"/>
+            <a:ext cx="10424160" cy="365760"/>
           </a:xfrm>
           <a:prstGeom prst="rect">
             <a:avLst/>
@@ -6013,73 +5834,34 @@
           <a:bodyPr wrap="square" rtlCol="0" anchor="ctr"/>
           <a:lstStyle/>
           <a:p>
-            <a:pPr algn="ctr" indent="0" marL="0">
-              <a:buNone/>
-            </a:pPr>
-            <a:r>
-              <a:rPr lang="en-US" sz="2000" b="1" dirty="0">
-                <a:solidFill>
-                  <a:srgbClr val="FFFFFF"/>
-                </a:solidFill>
-                <a:latin typeface="Cambria" pitchFamily="34" charset="0"/>
-                <a:ea typeface="Cambria" pitchFamily="34" charset="-122"/>
-                <a:cs typeface="Cambria" pitchFamily="34" charset="-120"/>
-              </a:rPr>
-              <a:t>2</a:t>
-            </a:r>
-            <a:endParaRPr lang="en-US" sz="2000" dirty="0"/>
-          </a:p>
-        </p:txBody>
-      </p:sp>
-      <p:sp>
-        <p:nvSpPr>
-          <p:cNvPr id="10" name="Text 8"/>
-          <p:cNvSpPr/>
-          <p:nvPr/>
-        </p:nvSpPr>
-        <p:spPr>
-          <a:xfrm>
-            <a:off x="1371600" y="3483864"/>
-            <a:ext cx="10332720" cy="411480"/>
-          </a:xfrm>
-          <a:prstGeom prst="rect">
-            <a:avLst/>
-          </a:prstGeom>
-          <a:noFill/>
-          <a:ln/>
-        </p:spPr>
-        <p:txBody>
-          <a:bodyPr wrap="square" rtlCol="0" anchor="ctr"/>
-          <a:lstStyle/>
-          <a:p>
-            <a:pPr indent="0" marL="0">
-              <a:buNone/>
-            </a:pPr>
-            <a:r>
-              <a:rPr lang="en-US" sz="1900" b="1" dirty="0">
+            <a:pPr indent="0" marL="0">
+              <a:buNone/>
+            </a:pPr>
+            <a:r>
+              <a:rPr lang="en-US" sz="1500" b="1" dirty="0">
                 <a:solidFill>
                   <a:srgbClr val="3F6F5F"/>
                 </a:solidFill>
-                <a:latin typeface="Cambria" pitchFamily="34" charset="0"/>
-                <a:ea typeface="Cambria" pitchFamily="34" charset="-122"/>
-                <a:cs typeface="Cambria" pitchFamily="34" charset="-120"/>
-              </a:rPr>
-              <a:t>Every count is a choice</a:t>
-            </a:r>
-            <a:endParaRPr lang="en-US" sz="1900" dirty="0"/>
-          </a:p>
-        </p:txBody>
-      </p:sp>
-      <p:sp>
-        <p:nvSpPr>
-          <p:cNvPr id="11" name="Text 9"/>
-          <p:cNvSpPr/>
-          <p:nvPr/>
-        </p:nvSpPr>
-        <p:spPr>
-          <a:xfrm>
-            <a:off x="1371600" y="3904488"/>
-            <a:ext cx="10332720" cy="914400"/>
+                <a:latin typeface="Calibri" pitchFamily="34" charset="0"/>
+                <a:ea typeface="Calibri" pitchFamily="34" charset="-122"/>
+                <a:cs typeface="Calibri" pitchFamily="34" charset="-120"/>
+              </a:rPr>
+              <a:t>Supplement</a:t>
+            </a:r>
+            <a:endParaRPr lang="en-US" sz="1500" dirty="0"/>
+          </a:p>
+        </p:txBody>
+      </p:sp>
+      <p:sp>
+        <p:nvSpPr>
+          <p:cNvPr id="8" name="Text 6"/>
+          <p:cNvSpPr/>
+          <p:nvPr/>
+        </p:nvSpPr>
+        <p:spPr>
+          <a:xfrm>
+            <a:off x="1051560" y="2944368"/>
+            <a:ext cx="10424160" cy="731520"/>
           </a:xfrm>
           <a:prstGeom prst="rect">
             <a:avLst/>
@@ -6094,13 +5876,10 @@
           <a:lstStyle/>
           <a:p>
             <a:pPr indent="0" marL="0">
-              <a:lnSpc>
-                <a:spcPct val="112000"/>
-              </a:lnSpc>
-              <a:buNone/>
-            </a:pPr>
-            <a:r>
-              <a:rPr lang="en-US" sz="1450" dirty="0">
+              <a:buNone/>
+            </a:pPr>
+            <a:r>
+              <a:rPr lang="en-US" sz="1400" dirty="0">
                 <a:solidFill>
                   <a:srgbClr val="1A1A1A"/>
                 </a:solidFill>
@@ -6108,27 +5887,25 @@
                 <a:ea typeface="Calibri" pitchFamily="34" charset="-122"/>
                 <a:cs typeface="Calibri" pitchFamily="34" charset="-120"/>
               </a:rPr>
-              <a:t>Tokens, stemming, the corpus, the chart's axis, each hides a decision you made.</a:t>
-            </a:r>
-            <a:endParaRPr lang="en-US" sz="1450" dirty="0"/>
-          </a:p>
-        </p:txBody>
-      </p:sp>
-      <p:sp>
-        <p:nvSpPr>
-          <p:cNvPr id="12" name="Shape 10"/>
-          <p:cNvSpPr/>
-          <p:nvPr/>
-        </p:nvSpPr>
-        <p:spPr>
-          <a:xfrm>
-            <a:off x="640080" y="4983480"/>
-            <a:ext cx="457200" cy="457200"/>
-          </a:xfrm>
-          <a:prstGeom prst="roundRect">
-            <a:avLst>
-              <a:gd name="adj" fmla="val 16000"/>
-            </a:avLst>
+              <a:t>Zipf's law, the straight line in every text</a:t>
+            </a:r>
+            <a:endParaRPr lang="en-US" sz="1400" dirty="0"/>
+          </a:p>
+        </p:txBody>
+      </p:sp>
+      <p:sp>
+        <p:nvSpPr>
+          <p:cNvPr id="9" name="Shape 7"/>
+          <p:cNvSpPr/>
+          <p:nvPr/>
+        </p:nvSpPr>
+        <p:spPr>
+          <a:xfrm>
+            <a:off x="640080" y="3593592"/>
+            <a:ext cx="219456" cy="219456"/>
+          </a:xfrm>
+          <a:prstGeom prst="ellipse">
+            <a:avLst/>
           </a:prstGeom>
           <a:solidFill>
             <a:srgbClr val="B9852F"/>
@@ -6138,14 +5915,14 @@
       </p:sp>
       <p:sp>
         <p:nvSpPr>
-          <p:cNvPr id="13" name="Text 11"/>
-          <p:cNvSpPr/>
-          <p:nvPr/>
-        </p:nvSpPr>
-        <p:spPr>
-          <a:xfrm>
-            <a:off x="640080" y="4983480"/>
-            <a:ext cx="457200" cy="457200"/>
+          <p:cNvPr id="10" name="Text 8"/>
+          <p:cNvSpPr/>
+          <p:nvPr/>
+        </p:nvSpPr>
+        <p:spPr>
+          <a:xfrm>
+            <a:off x="1051560" y="3520440"/>
+            <a:ext cx="10424160" cy="365760"/>
           </a:xfrm>
           <a:prstGeom prst="rect">
             <a:avLst/>
@@ -6157,73 +5934,34 @@
           <a:bodyPr wrap="square" rtlCol="0" anchor="ctr"/>
           <a:lstStyle/>
           <a:p>
-            <a:pPr algn="ctr" indent="0" marL="0">
-              <a:buNone/>
-            </a:pPr>
-            <a:r>
-              <a:rPr lang="en-US" sz="2000" b="1" dirty="0">
-                <a:solidFill>
-                  <a:srgbClr val="FFFFFF"/>
-                </a:solidFill>
-                <a:latin typeface="Cambria" pitchFamily="34" charset="0"/>
-                <a:ea typeface="Cambria" pitchFamily="34" charset="-122"/>
-                <a:cs typeface="Cambria" pitchFamily="34" charset="-120"/>
-              </a:rPr>
-              <a:t>3</a:t>
-            </a:r>
-            <a:endParaRPr lang="en-US" sz="2000" dirty="0"/>
-          </a:p>
-        </p:txBody>
-      </p:sp>
-      <p:sp>
-        <p:nvSpPr>
-          <p:cNvPr id="14" name="Text 12"/>
-          <p:cNvSpPr/>
-          <p:nvPr/>
-        </p:nvSpPr>
-        <p:spPr>
-          <a:xfrm>
-            <a:off x="1371600" y="4946904"/>
-            <a:ext cx="10332720" cy="411480"/>
-          </a:xfrm>
-          <a:prstGeom prst="rect">
-            <a:avLst/>
-          </a:prstGeom>
-          <a:noFill/>
-          <a:ln/>
-        </p:spPr>
-        <p:txBody>
-          <a:bodyPr wrap="square" rtlCol="0" anchor="ctr"/>
-          <a:lstStyle/>
-          <a:p>
-            <a:pPr indent="0" marL="0">
-              <a:buNone/>
-            </a:pPr>
-            <a:r>
-              <a:rPr lang="en-US" sz="1900" b="1" dirty="0">
+            <a:pPr indent="0" marL="0">
+              <a:buNone/>
+            </a:pPr>
+            <a:r>
+              <a:rPr lang="en-US" sz="1500" b="1" dirty="0">
                 <a:solidFill>
                   <a:srgbClr val="B9852F"/>
                 </a:solidFill>
-                <a:latin typeface="Cambria" pitchFamily="34" charset="0"/>
-                <a:ea typeface="Cambria" pitchFamily="34" charset="-122"/>
-                <a:cs typeface="Cambria" pitchFamily="34" charset="-120"/>
-              </a:rPr>
-              <a:t>Is the difference real?</a:t>
-            </a:r>
-            <a:endParaRPr lang="en-US" sz="1900" dirty="0"/>
-          </a:p>
-        </p:txBody>
-      </p:sp>
-      <p:sp>
-        <p:nvSpPr>
-          <p:cNvPr id="15" name="Text 13"/>
-          <p:cNvSpPr/>
-          <p:nvPr/>
-        </p:nvSpPr>
-        <p:spPr>
-          <a:xfrm>
-            <a:off x="1371600" y="5367528"/>
-            <a:ext cx="10332720" cy="914400"/>
+                <a:latin typeface="Calibri" pitchFamily="34" charset="0"/>
+                <a:ea typeface="Calibri" pitchFamily="34" charset="-122"/>
+                <a:cs typeface="Calibri" pitchFamily="34" charset="-120"/>
+              </a:rPr>
+              <a:t>Deeper (optional)</a:t>
+            </a:r>
+            <a:endParaRPr lang="en-US" sz="1500" dirty="0"/>
+          </a:p>
+        </p:txBody>
+      </p:sp>
+      <p:sp>
+        <p:nvSpPr>
+          <p:cNvPr id="11" name="Text 9"/>
+          <p:cNvSpPr/>
+          <p:nvPr/>
+        </p:nvSpPr>
+        <p:spPr>
+          <a:xfrm>
+            <a:off x="1051560" y="3904488"/>
+            <a:ext cx="10424160" cy="731520"/>
           </a:xfrm>
           <a:prstGeom prst="rect">
             <a:avLst/>
@@ -6238,13 +5976,10 @@
           <a:lstStyle/>
           <a:p>
             <a:pPr indent="0" marL="0">
-              <a:lnSpc>
-                <a:spcPct val="112000"/>
-              </a:lnSpc>
-              <a:buNone/>
-            </a:pPr>
-            <a:r>
-              <a:rPr lang="en-US" sz="1450" dirty="0">
+              <a:buNone/>
+            </a:pPr>
+            <a:r>
+              <a:rPr lang="en-US" sz="1400" dirty="0">
                 <a:solidFill>
                   <a:srgbClr val="1A1A1A"/>
                 </a:solidFill>
@@ -6252,9 +5987,209 @@
                 <a:ea typeface="Calibri" pitchFamily="34" charset="-122"/>
                 <a:cs typeface="Calibri" pitchFamily="34" charset="-120"/>
               </a:rPr>
-              <a:t>Shuffle the labels and count again, one thousand times; if chance often matches your gap, do not trust it.</a:t>
-            </a:r>
-            <a:endParaRPr lang="en-US" sz="1450" dirty="0"/>
+              <a:t>Grimmer &amp;amp; Stewart, Text as Data (2013), §1–4: all quantitative models of language are wrong, but some are useful</a:t>
+            </a:r>
+            <a:endParaRPr lang="en-US" sz="1400" dirty="0"/>
+          </a:p>
+        </p:txBody>
+      </p:sp>
+      <p:sp>
+        <p:nvSpPr>
+          <p:cNvPr id="12" name="Shape 10"/>
+          <p:cNvSpPr/>
+          <p:nvPr/>
+        </p:nvSpPr>
+        <p:spPr>
+          <a:xfrm>
+            <a:off x="640080" y="4553712"/>
+            <a:ext cx="219456" cy="219456"/>
+          </a:xfrm>
+          <a:prstGeom prst="ellipse">
+            <a:avLst/>
+          </a:prstGeom>
+          <a:solidFill>
+            <a:srgbClr val="3F6F5F"/>
+          </a:solidFill>
+          <a:ln/>
+        </p:spPr>
+      </p:sp>
+      <p:sp>
+        <p:nvSpPr>
+          <p:cNvPr id="13" name="Text 11"/>
+          <p:cNvSpPr/>
+          <p:nvPr/>
+        </p:nvSpPr>
+        <p:spPr>
+          <a:xfrm>
+            <a:off x="1051560" y="4480560"/>
+            <a:ext cx="10424160" cy="365760"/>
+          </a:xfrm>
+          <a:prstGeom prst="rect">
+            <a:avLst/>
+          </a:prstGeom>
+          <a:noFill/>
+          <a:ln/>
+        </p:spPr>
+        <p:txBody>
+          <a:bodyPr wrap="square" rtlCol="0" anchor="ctr"/>
+          <a:lstStyle/>
+          <a:p>
+            <a:pPr indent="0" marL="0">
+              <a:buNone/>
+            </a:pPr>
+            <a:r>
+              <a:rPr lang="en-US" sz="1500" b="1" dirty="0">
+                <a:solidFill>
+                  <a:srgbClr val="3F6F5F"/>
+                </a:solidFill>
+                <a:latin typeface="Calibri" pitchFamily="34" charset="0"/>
+                <a:ea typeface="Calibri" pitchFamily="34" charset="-122"/>
+                <a:cs typeface="Calibri" pitchFamily="34" charset="-120"/>
+              </a:rPr>
+              <a:t>Sketch</a:t>
+            </a:r>
+            <a:endParaRPr lang="en-US" sz="1500" dirty="0"/>
+          </a:p>
+        </p:txBody>
+      </p:sp>
+      <p:sp>
+        <p:nvSpPr>
+          <p:cNvPr id="14" name="Text 12"/>
+          <p:cNvSpPr/>
+          <p:nvPr/>
+        </p:nvSpPr>
+        <p:spPr>
+          <a:xfrm>
+            <a:off x="1051560" y="4864608"/>
+            <a:ext cx="10424160" cy="731520"/>
+          </a:xfrm>
+          <a:prstGeom prst="rect">
+            <a:avLst/>
+          </a:prstGeom>
+          <a:noFill/>
+          <a:ln/>
+        </p:spPr>
+        <p:txBody>
+          <a:bodyPr wrap="square" rtlCol="0" anchor="t">
+            <a:spAutoFit/>
+          </a:bodyPr>
+          <a:lstStyle/>
+          <a:p>
+            <a:pPr indent="0" marL="0">
+              <a:buNone/>
+            </a:pPr>
+            <a:r>
+              <a:rPr lang="en-US" sz="1400" dirty="0">
+                <a:solidFill>
+                  <a:srgbClr val="1A1A1A"/>
+                </a:solidFill>
+                <a:latin typeface="Calibri" pitchFamily="34" charset="0"/>
+                <a:ea typeface="Calibri" pitchFamily="34" charset="-122"/>
+                <a:cs typeface="Calibri" pitchFamily="34" charset="-120"/>
+              </a:rPr>
+              <a:t>Count something in a text you care about; one chart; one sentence naming a choice. If the count compares two things, shuffle-test the gap.</a:t>
+            </a:r>
+            <a:endParaRPr lang="en-US" sz="1400" dirty="0"/>
+          </a:p>
+        </p:txBody>
+      </p:sp>
+      <p:sp>
+        <p:nvSpPr>
+          <p:cNvPr id="15" name="Shape 13"/>
+          <p:cNvSpPr/>
+          <p:nvPr/>
+        </p:nvSpPr>
+        <p:spPr>
+          <a:xfrm>
+            <a:off x="640080" y="5513832"/>
+            <a:ext cx="219456" cy="219456"/>
+          </a:xfrm>
+          <a:prstGeom prst="ellipse">
+            <a:avLst/>
+          </a:prstGeom>
+          <a:solidFill>
+            <a:srgbClr val="7A3B2E"/>
+          </a:solidFill>
+          <a:ln/>
+        </p:spPr>
+      </p:sp>
+      <p:sp>
+        <p:nvSpPr>
+          <p:cNvPr id="16" name="Text 14"/>
+          <p:cNvSpPr/>
+          <p:nvPr/>
+        </p:nvSpPr>
+        <p:spPr>
+          <a:xfrm>
+            <a:off x="1051560" y="5440680"/>
+            <a:ext cx="10424160" cy="365760"/>
+          </a:xfrm>
+          <a:prstGeom prst="rect">
+            <a:avLst/>
+          </a:prstGeom>
+          <a:noFill/>
+          <a:ln/>
+        </p:spPr>
+        <p:txBody>
+          <a:bodyPr wrap="square" rtlCol="0" anchor="ctr"/>
+          <a:lstStyle/>
+          <a:p>
+            <a:pPr indent="0" marL="0">
+              <a:buNone/>
+            </a:pPr>
+            <a:r>
+              <a:rPr lang="en-US" sz="1500" b="1" dirty="0">
+                <a:solidFill>
+                  <a:srgbClr val="7A3B2E"/>
+                </a:solidFill>
+                <a:latin typeface="Calibri" pitchFamily="34" charset="0"/>
+                <a:ea typeface="Calibri" pitchFamily="34" charset="-122"/>
+                <a:cs typeface="Calibri" pitchFamily="34" charset="-120"/>
+              </a:rPr>
+              <a:t>Check (AI closed)</a:t>
+            </a:r>
+            <a:endParaRPr lang="en-US" sz="1500" dirty="0"/>
+          </a:p>
+        </p:txBody>
+      </p:sp>
+      <p:sp>
+        <p:nvSpPr>
+          <p:cNvPr id="17" name="Text 15"/>
+          <p:cNvSpPr/>
+          <p:nvPr/>
+        </p:nvSpPr>
+        <p:spPr>
+          <a:xfrm>
+            <a:off x="1051560" y="5824728"/>
+            <a:ext cx="10424160" cy="731520"/>
+          </a:xfrm>
+          <a:prstGeom prst="rect">
+            <a:avLst/>
+          </a:prstGeom>
+          <a:noFill/>
+          <a:ln/>
+        </p:spPr>
+        <p:txBody>
+          <a:bodyPr wrap="square" rtlCol="0" anchor="t">
+            <a:spAutoFit/>
+          </a:bodyPr>
+          <a:lstStyle/>
+          <a:p>
+            <a:pPr indent="0" marL="0">
+              <a:buNone/>
+            </a:pPr>
+            <a:r>
+              <a:rPr lang="en-US" sz="1400" dirty="0">
+                <a:solidFill>
+                  <a:srgbClr val="1A1A1A"/>
+                </a:solidFill>
+                <a:latin typeface="Calibri" pitchFamily="34" charset="0"/>
+                <a:ea typeface="Calibri" pitchFamily="34" charset="-122"/>
+                <a:cs typeface="Calibri" pitchFamily="34" charset="-120"/>
+              </a:rPr>
+              <a:t>Explain it: why two tokenizers split a sentence differently, and what your stemming choice changed. (Competencies 3, 5.)</a:t>
+            </a:r>
+            <a:endParaRPr lang="en-US" sz="1400" dirty="0"/>
           </a:p>
         </p:txBody>
       </p:sp>
@@ -6269,6 +6204,548 @@
 <file path=ppt/slides/slide16.xml><?xml version="1.0" encoding="utf-8"?>
 <p:sld xmlns:a="http://schemas.openxmlformats.org/drawingml/2006/main" xmlns:r="http://schemas.openxmlformats.org/officeDocument/2006/relationships" xmlns:p="http://schemas.openxmlformats.org/presentationml/2006/main">
   <p:cSld name="Slide 16">
+    <p:bg>
+      <p:bgPr>
+        <a:solidFill>
+          <a:srgbClr val="FFFFFF"/>
+        </a:solidFill>
+      </p:bgPr>
+    </p:bg>
+    <p:spTree>
+      <p:nvGrpSpPr>
+        <p:cNvPr id="1" name=""/>
+        <p:cNvGrpSpPr/>
+        <p:nvPr/>
+      </p:nvGrpSpPr>
+      <p:grpSpPr>
+        <a:xfrm>
+          <a:off x="0" y="0"/>
+          <a:ext cx="0" cy="0"/>
+          <a:chOff x="0" y="0"/>
+          <a:chExt cx="0" cy="0"/>
+        </a:xfrm>
+      </p:grpSpPr>
+      <p:sp>
+        <p:nvSpPr>
+          <p:cNvPr id="2" name="Text 0"/>
+          <p:cNvSpPr/>
+          <p:nvPr/>
+        </p:nvSpPr>
+        <p:spPr>
+          <a:xfrm>
+            <a:off x="640080" y="640080"/>
+            <a:ext cx="10058400" cy="320040"/>
+          </a:xfrm>
+          <a:prstGeom prst="rect">
+            <a:avLst/>
+          </a:prstGeom>
+          <a:noFill/>
+          <a:ln/>
+        </p:spPr>
+        <p:txBody>
+          <a:bodyPr wrap="square" rtlCol="0" anchor="ctr"/>
+          <a:lstStyle/>
+          <a:p>
+            <a:pPr indent="0" marL="0">
+              <a:buNone/>
+            </a:pPr>
+            <a:r>
+              <a:rPr lang="en-US" sz="1300" b="1" spc="300" kern="0" dirty="0">
+                <a:solidFill>
+                  <a:srgbClr val="7A3B2E"/>
+                </a:solidFill>
+                <a:latin typeface="Calibri" pitchFamily="34" charset="0"/>
+                <a:ea typeface="Calibri" pitchFamily="34" charset="-122"/>
+                <a:cs typeface="Calibri" pitchFamily="34" charset="-120"/>
+              </a:rPr>
+              <a:t>HOW THIS WEEK CONNECTS</a:t>
+            </a:r>
+            <a:endParaRPr lang="en-US" sz="1300" dirty="0"/>
+          </a:p>
+        </p:txBody>
+      </p:sp>
+      <p:sp>
+        <p:nvSpPr>
+          <p:cNvPr id="3" name="Text 1"/>
+          <p:cNvSpPr/>
+          <p:nvPr/>
+        </p:nvSpPr>
+        <p:spPr>
+          <a:xfrm>
+            <a:off x="640080" y="987552"/>
+            <a:ext cx="10058400" cy="640080"/>
+          </a:xfrm>
+          <a:prstGeom prst="rect">
+            <a:avLst/>
+          </a:prstGeom>
+          <a:noFill/>
+          <a:ln/>
+        </p:spPr>
+        <p:txBody>
+          <a:bodyPr wrap="square" rtlCol="0" anchor="ctr"/>
+          <a:lstStyle/>
+          <a:p>
+            <a:pPr indent="0" marL="0">
+              <a:buNone/>
+            </a:pPr>
+            <a:r>
+              <a:rPr lang="en-US" sz="2800" b="1" dirty="0">
+                <a:solidFill>
+                  <a:srgbClr val="1A1A1A"/>
+                </a:solidFill>
+                <a:latin typeface="Cambria" pitchFamily="34" charset="0"/>
+                <a:ea typeface="Cambria" pitchFamily="34" charset="-122"/>
+                <a:cs typeface="Cambria" pitchFamily="34" charset="-120"/>
+              </a:rPr>
+              <a:t>The course's through-lines</a:t>
+            </a:r>
+            <a:endParaRPr lang="en-US" sz="2800" dirty="0"/>
+          </a:p>
+        </p:txBody>
+      </p:sp>
+      <p:sp>
+        <p:nvSpPr>
+          <p:cNvPr id="4" name="Shape 2"/>
+          <p:cNvSpPr/>
+          <p:nvPr/>
+        </p:nvSpPr>
+        <p:spPr>
+          <a:xfrm>
+            <a:off x="640080" y="2057400"/>
+            <a:ext cx="457200" cy="457200"/>
+          </a:xfrm>
+          <a:prstGeom prst="roundRect">
+            <a:avLst>
+              <a:gd name="adj" fmla="val 16000"/>
+            </a:avLst>
+          </a:prstGeom>
+          <a:solidFill>
+            <a:srgbClr val="7A3B2E"/>
+          </a:solidFill>
+          <a:ln/>
+        </p:spPr>
+      </p:sp>
+      <p:sp>
+        <p:nvSpPr>
+          <p:cNvPr id="5" name="Text 3"/>
+          <p:cNvSpPr/>
+          <p:nvPr/>
+        </p:nvSpPr>
+        <p:spPr>
+          <a:xfrm>
+            <a:off x="640080" y="2057400"/>
+            <a:ext cx="457200" cy="457200"/>
+          </a:xfrm>
+          <a:prstGeom prst="rect">
+            <a:avLst/>
+          </a:prstGeom>
+          <a:noFill/>
+          <a:ln/>
+        </p:spPr>
+        <p:txBody>
+          <a:bodyPr wrap="square" rtlCol="0" anchor="ctr"/>
+          <a:lstStyle/>
+          <a:p>
+            <a:pPr algn="ctr" indent="0" marL="0">
+              <a:buNone/>
+            </a:pPr>
+            <a:r>
+              <a:rPr lang="en-US" sz="2000" b="1" dirty="0">
+                <a:solidFill>
+                  <a:srgbClr val="FFFFFF"/>
+                </a:solidFill>
+                <a:latin typeface="Cambria" pitchFamily="34" charset="0"/>
+                <a:ea typeface="Cambria" pitchFamily="34" charset="-122"/>
+                <a:cs typeface="Cambria" pitchFamily="34" charset="-120"/>
+              </a:rPr>
+              <a:t>1</a:t>
+            </a:r>
+            <a:endParaRPr lang="en-US" sz="2000" dirty="0"/>
+          </a:p>
+        </p:txBody>
+      </p:sp>
+      <p:sp>
+        <p:nvSpPr>
+          <p:cNvPr id="6" name="Text 4"/>
+          <p:cNvSpPr/>
+          <p:nvPr/>
+        </p:nvSpPr>
+        <p:spPr>
+          <a:xfrm>
+            <a:off x="1371600" y="2020824"/>
+            <a:ext cx="10332720" cy="411480"/>
+          </a:xfrm>
+          <a:prstGeom prst="rect">
+            <a:avLst/>
+          </a:prstGeom>
+          <a:noFill/>
+          <a:ln/>
+        </p:spPr>
+        <p:txBody>
+          <a:bodyPr wrap="square" rtlCol="0" anchor="ctr"/>
+          <a:lstStyle/>
+          <a:p>
+            <a:pPr indent="0" marL="0">
+              <a:buNone/>
+            </a:pPr>
+            <a:r>
+              <a:rPr lang="en-US" sz="1900" b="1" dirty="0">
+                <a:solidFill>
+                  <a:srgbClr val="7A3B2E"/>
+                </a:solidFill>
+                <a:latin typeface="Cambria" pitchFamily="34" charset="0"/>
+                <a:ea typeface="Cambria" pitchFamily="34" charset="-122"/>
+                <a:cs typeface="Cambria" pitchFamily="34" charset="-120"/>
+              </a:rPr>
+              <a:t>Beyond counting</a:t>
+            </a:r>
+            <a:endParaRPr lang="en-US" sz="1900" dirty="0"/>
+          </a:p>
+        </p:txBody>
+      </p:sp>
+      <p:sp>
+        <p:nvSpPr>
+          <p:cNvPr id="7" name="Text 5"/>
+          <p:cNvSpPr/>
+          <p:nvPr/>
+        </p:nvSpPr>
+        <p:spPr>
+          <a:xfrm>
+            <a:off x="1371600" y="2441448"/>
+            <a:ext cx="10332720" cy="914400"/>
+          </a:xfrm>
+          <a:prstGeom prst="rect">
+            <a:avLst/>
+          </a:prstGeom>
+          <a:noFill/>
+          <a:ln/>
+        </p:spPr>
+        <p:txBody>
+          <a:bodyPr wrap="square" rtlCol="0" anchor="t">
+            <a:spAutoFit/>
+          </a:bodyPr>
+          <a:lstStyle/>
+          <a:p>
+            <a:pPr indent="0" marL="0">
+              <a:lnSpc>
+                <a:spcPct val="112000"/>
+              </a:lnSpc>
+              <a:buNone/>
+            </a:pPr>
+            <a:r>
+              <a:rPr lang="en-US" sz="1450" dirty="0">
+                <a:solidFill>
+                  <a:srgbClr val="1A1A1A"/>
+                </a:solidFill>
+                <a:latin typeface="Calibri" pitchFamily="34" charset="0"/>
+                <a:ea typeface="Calibri" pitchFamily="34" charset="-122"/>
+                <a:cs typeface="Calibri" pitchFamily="34" charset="-120"/>
+              </a:rPr>
+              <a:t>Counting is the simplest tool and has no notion of meaning. Week 5 addresses that limit.</a:t>
+            </a:r>
+            <a:endParaRPr lang="en-US" sz="1450" dirty="0"/>
+          </a:p>
+        </p:txBody>
+      </p:sp>
+      <p:sp>
+        <p:nvSpPr>
+          <p:cNvPr id="8" name="Shape 6"/>
+          <p:cNvSpPr/>
+          <p:nvPr/>
+        </p:nvSpPr>
+        <p:spPr>
+          <a:xfrm>
+            <a:off x="640080" y="3520440"/>
+            <a:ext cx="457200" cy="457200"/>
+          </a:xfrm>
+          <a:prstGeom prst="roundRect">
+            <a:avLst>
+              <a:gd name="adj" fmla="val 16000"/>
+            </a:avLst>
+          </a:prstGeom>
+          <a:solidFill>
+            <a:srgbClr val="3F6F5F"/>
+          </a:solidFill>
+          <a:ln/>
+        </p:spPr>
+      </p:sp>
+      <p:sp>
+        <p:nvSpPr>
+          <p:cNvPr id="9" name="Text 7"/>
+          <p:cNvSpPr/>
+          <p:nvPr/>
+        </p:nvSpPr>
+        <p:spPr>
+          <a:xfrm>
+            <a:off x="640080" y="3520440"/>
+            <a:ext cx="457200" cy="457200"/>
+          </a:xfrm>
+          <a:prstGeom prst="rect">
+            <a:avLst/>
+          </a:prstGeom>
+          <a:noFill/>
+          <a:ln/>
+        </p:spPr>
+        <p:txBody>
+          <a:bodyPr wrap="square" rtlCol="0" anchor="ctr"/>
+          <a:lstStyle/>
+          <a:p>
+            <a:pPr algn="ctr" indent="0" marL="0">
+              <a:buNone/>
+            </a:pPr>
+            <a:r>
+              <a:rPr lang="en-US" sz="2000" b="1" dirty="0">
+                <a:solidFill>
+                  <a:srgbClr val="FFFFFF"/>
+                </a:solidFill>
+                <a:latin typeface="Cambria" pitchFamily="34" charset="0"/>
+                <a:ea typeface="Cambria" pitchFamily="34" charset="-122"/>
+                <a:cs typeface="Cambria" pitchFamily="34" charset="-120"/>
+              </a:rPr>
+              <a:t>2</a:t>
+            </a:r>
+            <a:endParaRPr lang="en-US" sz="2000" dirty="0"/>
+          </a:p>
+        </p:txBody>
+      </p:sp>
+      <p:sp>
+        <p:nvSpPr>
+          <p:cNvPr id="10" name="Text 8"/>
+          <p:cNvSpPr/>
+          <p:nvPr/>
+        </p:nvSpPr>
+        <p:spPr>
+          <a:xfrm>
+            <a:off x="1371600" y="3483864"/>
+            <a:ext cx="10332720" cy="411480"/>
+          </a:xfrm>
+          <a:prstGeom prst="rect">
+            <a:avLst/>
+          </a:prstGeom>
+          <a:noFill/>
+          <a:ln/>
+        </p:spPr>
+        <p:txBody>
+          <a:bodyPr wrap="square" rtlCol="0" anchor="ctr"/>
+          <a:lstStyle/>
+          <a:p>
+            <a:pPr indent="0" marL="0">
+              <a:buNone/>
+            </a:pPr>
+            <a:r>
+              <a:rPr lang="en-US" sz="1900" b="1" dirty="0">
+                <a:solidFill>
+                  <a:srgbClr val="3F6F5F"/>
+                </a:solidFill>
+                <a:latin typeface="Cambria" pitchFamily="34" charset="0"/>
+                <a:ea typeface="Cambria" pitchFamily="34" charset="-122"/>
+                <a:cs typeface="Cambria" pitchFamily="34" charset="-120"/>
+              </a:rPr>
+              <a:t>Every count is a choice</a:t>
+            </a:r>
+            <a:endParaRPr lang="en-US" sz="1900" dirty="0"/>
+          </a:p>
+        </p:txBody>
+      </p:sp>
+      <p:sp>
+        <p:nvSpPr>
+          <p:cNvPr id="11" name="Text 9"/>
+          <p:cNvSpPr/>
+          <p:nvPr/>
+        </p:nvSpPr>
+        <p:spPr>
+          <a:xfrm>
+            <a:off x="1371600" y="3904488"/>
+            <a:ext cx="10332720" cy="914400"/>
+          </a:xfrm>
+          <a:prstGeom prst="rect">
+            <a:avLst/>
+          </a:prstGeom>
+          <a:noFill/>
+          <a:ln/>
+        </p:spPr>
+        <p:txBody>
+          <a:bodyPr wrap="square" rtlCol="0" anchor="t">
+            <a:spAutoFit/>
+          </a:bodyPr>
+          <a:lstStyle/>
+          <a:p>
+            <a:pPr indent="0" marL="0">
+              <a:lnSpc>
+                <a:spcPct val="112000"/>
+              </a:lnSpc>
+              <a:buNone/>
+            </a:pPr>
+            <a:r>
+              <a:rPr lang="en-US" sz="1450" dirty="0">
+                <a:solidFill>
+                  <a:srgbClr val="1A1A1A"/>
+                </a:solidFill>
+                <a:latin typeface="Calibri" pitchFamily="34" charset="0"/>
+                <a:ea typeface="Calibri" pitchFamily="34" charset="-122"/>
+                <a:cs typeface="Calibri" pitchFamily="34" charset="-120"/>
+              </a:rPr>
+              <a:t>Tokens, stemming, the corpus, the chart's axis, each hides a decision you made.</a:t>
+            </a:r>
+            <a:endParaRPr lang="en-US" sz="1450" dirty="0"/>
+          </a:p>
+        </p:txBody>
+      </p:sp>
+      <p:sp>
+        <p:nvSpPr>
+          <p:cNvPr id="12" name="Shape 10"/>
+          <p:cNvSpPr/>
+          <p:nvPr/>
+        </p:nvSpPr>
+        <p:spPr>
+          <a:xfrm>
+            <a:off x="640080" y="4983480"/>
+            <a:ext cx="457200" cy="457200"/>
+          </a:xfrm>
+          <a:prstGeom prst="roundRect">
+            <a:avLst>
+              <a:gd name="adj" fmla="val 16000"/>
+            </a:avLst>
+          </a:prstGeom>
+          <a:solidFill>
+            <a:srgbClr val="B9852F"/>
+          </a:solidFill>
+          <a:ln/>
+        </p:spPr>
+      </p:sp>
+      <p:sp>
+        <p:nvSpPr>
+          <p:cNvPr id="13" name="Text 11"/>
+          <p:cNvSpPr/>
+          <p:nvPr/>
+        </p:nvSpPr>
+        <p:spPr>
+          <a:xfrm>
+            <a:off x="640080" y="4983480"/>
+            <a:ext cx="457200" cy="457200"/>
+          </a:xfrm>
+          <a:prstGeom prst="rect">
+            <a:avLst/>
+          </a:prstGeom>
+          <a:noFill/>
+          <a:ln/>
+        </p:spPr>
+        <p:txBody>
+          <a:bodyPr wrap="square" rtlCol="0" anchor="ctr"/>
+          <a:lstStyle/>
+          <a:p>
+            <a:pPr algn="ctr" indent="0" marL="0">
+              <a:buNone/>
+            </a:pPr>
+            <a:r>
+              <a:rPr lang="en-US" sz="2000" b="1" dirty="0">
+                <a:solidFill>
+                  <a:srgbClr val="FFFFFF"/>
+                </a:solidFill>
+                <a:latin typeface="Cambria" pitchFamily="34" charset="0"/>
+                <a:ea typeface="Cambria" pitchFamily="34" charset="-122"/>
+                <a:cs typeface="Cambria" pitchFamily="34" charset="-120"/>
+              </a:rPr>
+              <a:t>3</a:t>
+            </a:r>
+            <a:endParaRPr lang="en-US" sz="2000" dirty="0"/>
+          </a:p>
+        </p:txBody>
+      </p:sp>
+      <p:sp>
+        <p:nvSpPr>
+          <p:cNvPr id="14" name="Text 12"/>
+          <p:cNvSpPr/>
+          <p:nvPr/>
+        </p:nvSpPr>
+        <p:spPr>
+          <a:xfrm>
+            <a:off x="1371600" y="4946904"/>
+            <a:ext cx="10332720" cy="411480"/>
+          </a:xfrm>
+          <a:prstGeom prst="rect">
+            <a:avLst/>
+          </a:prstGeom>
+          <a:noFill/>
+          <a:ln/>
+        </p:spPr>
+        <p:txBody>
+          <a:bodyPr wrap="square" rtlCol="0" anchor="ctr"/>
+          <a:lstStyle/>
+          <a:p>
+            <a:pPr indent="0" marL="0">
+              <a:buNone/>
+            </a:pPr>
+            <a:r>
+              <a:rPr lang="en-US" sz="1900" b="1" dirty="0">
+                <a:solidFill>
+                  <a:srgbClr val="B9852F"/>
+                </a:solidFill>
+                <a:latin typeface="Cambria" pitchFamily="34" charset="0"/>
+                <a:ea typeface="Cambria" pitchFamily="34" charset="-122"/>
+                <a:cs typeface="Cambria" pitchFamily="34" charset="-120"/>
+              </a:rPr>
+              <a:t>Is the difference real?</a:t>
+            </a:r>
+            <a:endParaRPr lang="en-US" sz="1900" dirty="0"/>
+          </a:p>
+        </p:txBody>
+      </p:sp>
+      <p:sp>
+        <p:nvSpPr>
+          <p:cNvPr id="15" name="Text 13"/>
+          <p:cNvSpPr/>
+          <p:nvPr/>
+        </p:nvSpPr>
+        <p:spPr>
+          <a:xfrm>
+            <a:off x="1371600" y="5367528"/>
+            <a:ext cx="10332720" cy="914400"/>
+          </a:xfrm>
+          <a:prstGeom prst="rect">
+            <a:avLst/>
+          </a:prstGeom>
+          <a:noFill/>
+          <a:ln/>
+        </p:spPr>
+        <p:txBody>
+          <a:bodyPr wrap="square" rtlCol="0" anchor="t">
+            <a:spAutoFit/>
+          </a:bodyPr>
+          <a:lstStyle/>
+          <a:p>
+            <a:pPr indent="0" marL="0">
+              <a:lnSpc>
+                <a:spcPct val="112000"/>
+              </a:lnSpc>
+              <a:buNone/>
+            </a:pPr>
+            <a:r>
+              <a:rPr lang="en-US" sz="1450" dirty="0">
+                <a:solidFill>
+                  <a:srgbClr val="1A1A1A"/>
+                </a:solidFill>
+                <a:latin typeface="Calibri" pitchFamily="34" charset="0"/>
+                <a:ea typeface="Calibri" pitchFamily="34" charset="-122"/>
+                <a:cs typeface="Calibri" pitchFamily="34" charset="-120"/>
+              </a:rPr>
+              <a:t>Shuffle the labels and count again, one thousand times; if chance often matches your gap, do not trust it.</a:t>
+            </a:r>
+            <a:endParaRPr lang="en-US" sz="1450" dirty="0"/>
+          </a:p>
+        </p:txBody>
+      </p:sp>
+    </p:spTree>
+  </p:cSld>
+  <p:clrMapOvr>
+    <a:masterClrMapping/>
+  </p:clrMapOvr>
+</p:sld>
+</file>
+
+<file path=ppt/slides/slide17.xml><?xml version="1.0" encoding="utf-8"?>
+<p:sld xmlns:a="http://schemas.openxmlformats.org/drawingml/2006/main" xmlns:r="http://schemas.openxmlformats.org/officeDocument/2006/relationships" xmlns:p="http://schemas.openxmlformats.org/presentationml/2006/main">
+  <p:cSld name="Slide 17">
     <p:bg>
       <p:bgPr>
         <a:solidFill>
@@ -9488,7 +9965,7 @@
                 <a:ea typeface="Cambria" pitchFamily="34" charset="-122"/>
                 <a:cs typeface="Cambria" pitchFamily="34" charset="-120"/>
               </a:rPr>
-              <a:t>Where counting fails</a:t>
+              <a:t>Three ways to fool yourself with significance</a:t>
             </a:r>
             <a:endParaRPr lang="en-US" sz="3000" dirty="0"/>
           </a:p>
@@ -9552,7 +10029,7 @@
                 <a:ea typeface="Calibri" pitchFamily="34" charset="-122"/>
                 <a:cs typeface="Calibri" pitchFamily="34" charset="-120"/>
               </a:rPr>
-              <a:t>Negation: "I am not happy" adds one to the happy count. Bigrams catch a little of this; most context is invisible to a counter.</a:t>
+              <a:t>Selection: we shuffle-tested our top keyness word and got p = 0. Of course: we picked it BECAUSE its gap was the most extreme of 1,500. State the hypothesis before looking, then test exactly that.</a:t>
             </a:r>
             <a:endParaRPr lang="en-US" sz="1650" dirty="0"/>
           </a:p>
@@ -9616,7 +10093,7 @@
                 <a:ea typeface="Calibri" pitchFamily="34" charset="-122"/>
                 <a:cs typeface="Calibri" pitchFamily="34" charset="-120"/>
               </a:rPr>
-              <a:t>The stemmer is rules without a dictionary: universal, university, and universe all become "univers".</a:t>
+              <a:t>Multiplicity: split one community's comments randomly in half and keyness still produces a convincing "distinctive vocabulary": pure noise. Test 1,500 words at p &lt; .05 and ~75 pass by luck. Bollen et al. counted 241 phrases. Defenses: correct the threshold, pre-register, or check winners on held-out data.</a:t>
             </a:r>
             <a:endParaRPr lang="en-US" sz="1650" dirty="0"/>
           </a:p>
@@ -9680,7 +10157,7 @@
                 <a:ea typeface="Calibri" pitchFamily="34" charset="-122"/>
                 <a:cs typeface="Calibri" pitchFamily="34" charset="-120"/>
               </a:rPr>
-              <a:t>The lemmatizer needs the part of speech: "saw" is a tool as a noun and the past of see as a verb; told nothing, it guesses.</a:t>
+              <a:t>Size: "significant" answers "is it chance?", never "does it matter?" With enough comments a microscopic gap passes. Report the effect and the p, both: "3.3 per 1,000 words more (p &lt; .001)".</a:t>
             </a:r>
             <a:endParaRPr lang="en-US" sz="1650" dirty="0"/>
           </a:p>
@@ -9744,7 +10221,7 @@
                 <a:ea typeface="Calibri" pitchFamily="34" charset="-122"/>
                 <a:cs typeface="Calibri" pitchFamily="34" charset="-120"/>
               </a:rPr>
-              <a:t>Polysemy: "sick beat" and "sick child" add to the same count. A word type is not a meaning. Week 5's embeddings exist for these holes, and bring their own.</a:t>
+              <a:t>The bootstrap closes the loop: resample your own comments 1,000 times for a confidence interval. The shuffle test asks "could it be zero?"; the bootstrap asks "what sizes are believable?" A publishable finding survives both.</a:t>
             </a:r>
             <a:endParaRPr lang="en-US" sz="1650" dirty="0"/>
           </a:p>

--- a/slides/pptx/week-02.pptx
+++ b/slides/pptx/week-02.pptx
@@ -8349,7 +8349,7 @@
                 <a:ea typeface="Calibri" pitchFamily="34" charset="-122"/>
                 <a:cs typeface="Calibri" pitchFamily="34" charset="-120"/>
               </a:rPr>
-              <a:t>Your hand-count argument about run/running is the same decision, made with highlighters. A stemmer makes it by rule (and produces "beauti"); a lemmatizer makes it by dictionary (and reads "was" as a noun unless told otherwise).</a:t>
+              <a:t>Your hand-count argument about run/running is the same decision, made with highlighters. A stemmer makes it by rule: r/gardening's own garden, gardener, gardening, and gardens all collapse to one stem, person lumped with activity. A lemmatizer consults a dictionary, but must be told the part of speech.</a:t>
             </a:r>
             <a:endParaRPr lang="en-US" sz="1500" dirty="0"/>
           </a:p>

--- a/slides/pptx/week-02.pptx
+++ b/slides/pptx/week-02.pptx
@@ -22,9 +22,10 @@
     <p:sldId id="270" r:id="rId16"/>
     <p:sldId id="271" r:id="rId17"/>
     <p:sldId id="272" r:id="rId18"/>
+    <p:sldId id="273" r:id="rId19"/>
   </p:sldIdLst>
   <p:notesMasterIdLst>
-    <p:notesMasterId r:id="rId19"/>
+    <p:notesMasterId r:id="rId20"/>
   </p:notesMasterIdLst>
   <p:sldSz cx="12191695" cy="6858000"/>
   <p:notesSz cx="6858000" cy="12191695"/>
@@ -1264,6 +1265,94 @@
 </p:notes>
 </file>
 
+<file path=ppt/notesSlides/notesSlide18.xml><?xml version="1.0" encoding="utf-8"?>
+<p:notes xmlns:a="http://schemas.openxmlformats.org/drawingml/2006/main" xmlns:r="http://schemas.openxmlformats.org/officeDocument/2006/relationships" xmlns:p="http://schemas.openxmlformats.org/presentationml/2006/main">
+  <p:cSld>
+    <p:spTree>
+      <p:nvGrpSpPr>
+        <p:cNvPr id="1" name=""/>
+        <p:cNvGrpSpPr/>
+        <p:nvPr/>
+      </p:nvGrpSpPr>
+      <p:grpSpPr>
+        <a:xfrm>
+          <a:off x="0" y="0"/>
+          <a:ext cx="0" cy="0"/>
+          <a:chOff x="0" y="0"/>
+          <a:chExt cx="0" cy="0"/>
+        </a:xfrm>
+      </p:grpSpPr>
+      <p:sp>
+        <p:nvSpPr>
+          <p:cNvPr id="2" name="Slide Image Placeholder 1"/>
+          <p:cNvSpPr>
+            <a:spLocks noGrp="1" noRot="1" noChangeAspect="1"/>
+          </p:cNvSpPr>
+          <p:nvPr>
+            <p:ph type="sldImg"/>
+          </p:nvPr>
+        </p:nvSpPr>
+        <p:spPr/>
+      </p:sp>
+      <p:sp>
+        <p:nvSpPr>
+          <p:cNvPr id="3" name="Notes Placeholder 2"/>
+          <p:cNvSpPr>
+            <a:spLocks noGrp="1"/>
+          </p:cNvSpPr>
+          <p:nvPr>
+            <p:ph type="body" idx="1"/>
+          </p:nvPr>
+        </p:nvSpPr>
+        <p:spPr/>
+        <p:txBody>
+          <a:bodyPr/>
+          <a:lstStyle/>
+          <a:p>
+            <a:r>
+              <a:rPr lang="en-US" dirty="0"/>
+              <a:t/>
+            </a:r>
+            <a:endParaRPr lang="en-US" dirty="0"/>
+          </a:p>
+        </p:txBody>
+      </p:sp>
+      <p:sp>
+        <p:nvSpPr>
+          <p:cNvPr id="4" name="Slide Number Placeholder 3"/>
+          <p:cNvSpPr>
+            <a:spLocks noGrp="1"/>
+          </p:cNvSpPr>
+          <p:nvPr>
+            <p:ph type="sldNum" sz="quarter" idx="10"/>
+          </p:nvPr>
+        </p:nvSpPr>
+        <p:spPr/>
+        <p:txBody>
+          <a:bodyPr/>
+          <a:lstStyle/>
+          <a:p>
+            <a:fld id="{F7021451-1387-4CA6-816F-3879F97B5CBC}" type="slidenum">
+              <a:rPr lang="en-US"/>
+              <a:t>18</a:t>
+            </a:fld>
+            <a:endParaRPr lang="en-US"/>
+          </a:p>
+        </p:txBody>
+      </p:sp>
+    </p:spTree>
+    <p:extLst>
+      <p:ext uri="{BB962C8B-B14F-4D97-AF65-F5344CB8AC3E}">
+        <p14:creationId xmlns:p14="http://schemas.microsoft.com/office/powerpoint/2010/main" val="1024086991"/>
+      </p:ext>
+    </p:extLst>
+  </p:cSld>
+  <p:clrMapOvr>
+    <a:masterClrMapping/>
+  </p:clrMapOvr>
+</p:notes>
+</file>
+
 <file path=ppt/notesSlides/notesSlide2.xml><?xml version="1.0" encoding="utf-8"?>
 <p:notes xmlns:a="http://schemas.openxmlformats.org/drawingml/2006/main" xmlns:r="http://schemas.openxmlformats.org/officeDocument/2006/relationships" xmlns:p="http://schemas.openxmlformats.org/presentationml/2006/main">
   <p:cSld>
@@ -2944,7 +3033,7 @@
                 <a:ea typeface="Cambria" pitchFamily="34" charset="-122"/>
                 <a:cs typeface="Cambria" pitchFamily="34" charset="-120"/>
               </a:rPr>
-              <a:t>Where counting fails</a:t>
+              <a:t>Three ways to fool yourself with significance</a:t>
             </a:r>
             <a:endParaRPr lang="en-US" sz="3000" dirty="0"/>
           </a:p>
@@ -3008,7 +3097,7 @@
                 <a:ea typeface="Calibri" pitchFamily="34" charset="-122"/>
                 <a:cs typeface="Calibri" pitchFamily="34" charset="-120"/>
               </a:rPr>
-              <a:t>Negation: "I am not happy" adds one to the happy count. Bigrams catch a little of this; most context is invisible to a counter.</a:t>
+              <a:t>Selection: we shuffle-tested our top keyness word and got p = 0. Of course: we picked it BECAUSE its gap was the most extreme of 1,500. State the hypothesis before looking, then test exactly that.</a:t>
             </a:r>
             <a:endParaRPr lang="en-US" sz="1650" dirty="0"/>
           </a:p>
@@ -3072,7 +3161,7 @@
                 <a:ea typeface="Calibri" pitchFamily="34" charset="-122"/>
                 <a:cs typeface="Calibri" pitchFamily="34" charset="-120"/>
               </a:rPr>
-              <a:t>The stemmer is rules without a dictionary: universal, university, and universe all become "univers".</a:t>
+              <a:t>Multiplicity: split one community's comments randomly in half and keyness still produces a convincing "distinctive vocabulary": pure noise. Test 1,500 words at p &lt; .05 and ~75 pass by luck. Bollen et al. counted 241 phrases. Defenses: correct the threshold, pre-register, or check winners on held-out data.</a:t>
             </a:r>
             <a:endParaRPr lang="en-US" sz="1650" dirty="0"/>
           </a:p>
@@ -3136,7 +3225,7 @@
                 <a:ea typeface="Calibri" pitchFamily="34" charset="-122"/>
                 <a:cs typeface="Calibri" pitchFamily="34" charset="-120"/>
               </a:rPr>
-              <a:t>The lemmatizer needs the part of speech: "saw" is a tool as a noun and the past of see as a verb; told nothing, it guesses.</a:t>
+              <a:t>Size: "significant" answers "is it chance?", never "does it matter?" With enough comments a microscopic gap passes. Report the effect and the p, both: "3.3 per 1,000 words more (p &lt; .001)".</a:t>
             </a:r>
             <a:endParaRPr lang="en-US" sz="1650" dirty="0"/>
           </a:p>
@@ -3200,7 +3289,7 @@
                 <a:ea typeface="Calibri" pitchFamily="34" charset="-122"/>
                 <a:cs typeface="Calibri" pitchFamily="34" charset="-120"/>
               </a:rPr>
-              <a:t>Polysemy: "sick beat" and "sick child" add to the same count. A word type is not a meaning. Week 5's embeddings exist for these holes, and bring their own.</a:t>
+              <a:t>The bootstrap closes the loop: resample your own comments 1,000 times for a confidence interval. The shuffle test asks "could it be zero?"; the bootstrap asks "what sizes are believable?" A publishable finding survives both.</a:t>
             </a:r>
             <a:endParaRPr lang="en-US" sz="1650" dirty="0"/>
           </a:p>
@@ -3332,7 +3421,7 @@
                 <a:ea typeface="Cambria" pitchFamily="34" charset="-122"/>
                 <a:cs typeface="Cambria" pitchFamily="34" charset="-120"/>
               </a:rPr>
-              <a:t>Keyness: what makes a voice distinctive</a:t>
+              <a:t>Where counting fails</a:t>
             </a:r>
             <a:endParaRPr lang="en-US" sz="3000" dirty="0"/>
           </a:p>
@@ -3367,7 +3456,7 @@
         <p:spPr>
           <a:xfrm>
             <a:off x="1097280" y="2240280"/>
-            <a:ext cx="10607040" cy="813816"/>
+            <a:ext cx="10607040" cy="1017270"/>
           </a:xfrm>
           <a:prstGeom prst="rect">
             <a:avLst/>
@@ -3388,7 +3477,7 @@
               <a:buNone/>
             </a:pPr>
             <a:r>
-              <a:rPr lang="en-US" sz="1500" dirty="0">
+              <a:rPr lang="en-US" sz="1650" dirty="0">
                 <a:solidFill>
                   <a:srgbClr val="1A1A1A"/>
                 </a:solidFill>
@@ -3396,9 +3485,9 @@
                 <a:ea typeface="Calibri" pitchFamily="34" charset="-122"/>
                 <a:cs typeface="Calibri" pitchFamily="34" charset="-120"/>
               </a:rPr>
-              <a:t>For every word: how much likelier is it in corpus A than corpus B? A log-odds ratio, smoothed so rare words don't explode.</a:t>
-            </a:r>
-            <a:endParaRPr lang="en-US" sz="1500" dirty="0"/>
+              <a:t>Negation: "I am not happy" adds one to the happy count. Bigrams catch a little of this; most context is invisible to a counter.</a:t>
+            </a:r>
+            <a:endParaRPr lang="en-US" sz="1650" dirty="0"/>
           </a:p>
         </p:txBody>
       </p:sp>
@@ -3410,7 +3499,7 @@
         </p:nvSpPr>
         <p:spPr>
           <a:xfrm>
-            <a:off x="640080" y="3145536"/>
+            <a:off x="640080" y="3348990"/>
             <a:ext cx="201168" cy="201168"/>
           </a:xfrm>
           <a:prstGeom prst="ellipse">
@@ -3430,8 +3519,8 @@
         </p:nvSpPr>
         <p:spPr>
           <a:xfrm>
-            <a:off x="1097280" y="3054096"/>
-            <a:ext cx="10607040" cy="813816"/>
+            <a:off x="1097280" y="3257550"/>
+            <a:ext cx="10607040" cy="1017270"/>
           </a:xfrm>
           <a:prstGeom prst="rect">
             <a:avLst/>
@@ -3452,7 +3541,7 @@
               <a:buNone/>
             </a:pPr>
             <a:r>
-              <a:rPr lang="en-US" sz="1500" dirty="0">
+              <a:rPr lang="en-US" sz="1650" dirty="0">
                 <a:solidFill>
                   <a:srgbClr val="1A1A1A"/>
                 </a:solidFill>
@@ -3460,9 +3549,9 @@
                 <a:ea typeface="Calibri" pitchFamily="34" charset="-122"/>
                 <a:cs typeface="Calibri" pitchFamily="34" charset="-120"/>
               </a:rPr>
-              <a:t>Strongly positive = distinctively A. Strongly negative = distinctively B. The middle is shared language.</a:t>
-            </a:r>
-            <a:endParaRPr lang="en-US" sz="1500" dirty="0"/>
+              <a:t>The stemmer is rules without a dictionary: universal, university, and universe all become "univers".</a:t>
+            </a:r>
+            <a:endParaRPr lang="en-US" sz="1650" dirty="0"/>
           </a:p>
         </p:txBody>
       </p:sp>
@@ -3474,7 +3563,7 @@
         </p:nvSpPr>
         <p:spPr>
           <a:xfrm>
-            <a:off x="640080" y="3959352"/>
+            <a:off x="640080" y="4366260"/>
             <a:ext cx="201168" cy="201168"/>
           </a:xfrm>
           <a:prstGeom prst="ellipse">
@@ -3494,8 +3583,8 @@
         </p:nvSpPr>
         <p:spPr>
           <a:xfrm>
-            <a:off x="1097280" y="3867912"/>
-            <a:ext cx="10607040" cy="813816"/>
+            <a:off x="1097280" y="4274820"/>
+            <a:ext cx="10607040" cy="1017270"/>
           </a:xfrm>
           <a:prstGeom prst="rect">
             <a:avLst/>
@@ -3516,7 +3605,7 @@
               <a:buNone/>
             </a:pPr>
             <a:r>
-              <a:rPr lang="en-US" sz="1500" dirty="0">
+              <a:rPr lang="en-US" sz="1650" dirty="0">
                 <a:solidFill>
                   <a:srgbClr val="1A1A1A"/>
                 </a:solidFill>
@@ -3524,9 +3613,9 @@
                 <a:ea typeface="Calibri" pitchFamily="34" charset="-122"/>
                 <a:cs typeface="Calibri" pitchFamily="34" charset="-120"/>
               </a:rPr>
-              <a:t>She Giggles, He Gallops is exactly this method: verbs after "she" vs. "he" in 2,000 screenplays. Women snuggle, giggle, squeal; men gallop, strap, shoot.</a:t>
-            </a:r>
-            <a:endParaRPr lang="en-US" sz="1500" dirty="0"/>
+              <a:t>The lemmatizer needs the part of speech: "saw" is a tool as a noun and the past of see as a verb; told nothing, it guesses.</a:t>
+            </a:r>
+            <a:endParaRPr lang="en-US" sz="1650" dirty="0"/>
           </a:p>
         </p:txBody>
       </p:sp>
@@ -3538,7 +3627,7 @@
         </p:nvSpPr>
         <p:spPr>
           <a:xfrm>
-            <a:off x="640080" y="4773168"/>
+            <a:off x="640080" y="5383530"/>
             <a:ext cx="201168" cy="201168"/>
           </a:xfrm>
           <a:prstGeom prst="ellipse">
@@ -3558,8 +3647,8 @@
         </p:nvSpPr>
         <p:spPr>
           <a:xfrm>
-            <a:off x="1097280" y="4681728"/>
-            <a:ext cx="10607040" cy="813816"/>
+            <a:off x="1097280" y="5292090"/>
+            <a:ext cx="10607040" cy="1017270"/>
           </a:xfrm>
           <a:prstGeom prst="rect">
             <a:avLst/>
@@ -3580,7 +3669,7 @@
               <a:buNone/>
             </a:pPr>
             <a:r>
-              <a:rPr lang="en-US" sz="1500" dirty="0">
+              <a:rPr lang="en-US" sz="1650" dirty="0">
                 <a:solidFill>
                   <a:srgbClr val="1A1A1A"/>
                 </a:solidFill>
@@ -3588,73 +3677,9 @@
                 <a:ea typeface="Calibri" pitchFamily="34" charset="-122"/>
                 <a:cs typeface="Calibri" pitchFamily="34" charset="-120"/>
               </a:rPr>
-              <a:t>Standardize the log-odds by their variance (Monroe et al.'s Fightin' Words) and the lists change character: topic words sink, register surfaces. r/buildapc's strongest markers become you/your (an advice room), r/gardening's i/we/them (a stories room).</a:t>
-            </a:r>
-            <a:endParaRPr lang="en-US" sz="1500" dirty="0"/>
-          </a:p>
-        </p:txBody>
-      </p:sp>
-      <p:sp>
-        <p:nvSpPr>
-          <p:cNvPr id="13" name="Shape 11"/>
-          <p:cNvSpPr/>
-          <p:nvPr/>
-        </p:nvSpPr>
-        <p:spPr>
-          <a:xfrm>
-            <a:off x="640080" y="5586984"/>
-            <a:ext cx="201168" cy="201168"/>
-          </a:xfrm>
-          <a:prstGeom prst="ellipse">
-            <a:avLst/>
-          </a:prstGeom>
-          <a:solidFill>
-            <a:srgbClr val="3F6F5F"/>
-          </a:solidFill>
-          <a:ln/>
-        </p:spPr>
-      </p:sp>
-      <p:sp>
-        <p:nvSpPr>
-          <p:cNvPr id="14" name="Text 12"/>
-          <p:cNvSpPr/>
-          <p:nvPr/>
-        </p:nvSpPr>
-        <p:spPr>
-          <a:xfrm>
-            <a:off x="1097280" y="5495544"/>
-            <a:ext cx="10607040" cy="813816"/>
-          </a:xfrm>
-          <a:prstGeom prst="rect">
-            <a:avLst/>
-          </a:prstGeom>
-          <a:noFill/>
-          <a:ln/>
-        </p:spPr>
-        <p:txBody>
-          <a:bodyPr wrap="square" rtlCol="0" anchor="t">
-            <a:spAutoFit/>
-          </a:bodyPr>
-          <a:lstStyle/>
-          <a:p>
-            <a:pPr indent="0" marL="0">
-              <a:lnSpc>
-                <a:spcPct val="112000"/>
-              </a:lnSpc>
-              <a:buNone/>
-            </a:pPr>
-            <a:r>
-              <a:rPr lang="en-US" sz="1500" dirty="0">
-                <a:solidFill>
-                  <a:srgbClr val="1A1A1A"/>
-                </a:solidFill>
-                <a:latin typeface="Calibri" pitchFamily="34" charset="0"/>
-                <a:ea typeface="Calibri" pitchFamily="34" charset="-122"/>
-                <a:cs typeface="Calibri" pitchFamily="34" charset="-120"/>
-              </a:rPr>
-              <a:t>The corpus pair is a choice: this artist against pop, this subreddit against a novel. Different pair, different "distinctive."</a:t>
-            </a:r>
-            <a:endParaRPr lang="en-US" sz="1500" dirty="0"/>
+              <a:t>Polysemy: "sick beat" and "sick child" add to the same count. A word type is not a meaning. Week 5's embeddings exist for these holes, and bring their own.</a:t>
+            </a:r>
+            <a:endParaRPr lang="en-US" sz="1650" dirty="0"/>
           </a:p>
         </p:txBody>
       </p:sp>
@@ -3784,7 +3809,7 @@
                 <a:ea typeface="Cambria" pitchFamily="34" charset="-122"/>
                 <a:cs typeface="Cambria" pitchFamily="34" charset="-120"/>
               </a:rPr>
-              <a:t>The shuffle test: is the gap real?</a:t>
+              <a:t>Keyness: what makes a voice distinctive</a:t>
             </a:r>
             <a:endParaRPr lang="en-US" sz="3000" dirty="0"/>
           </a:p>
@@ -3819,7 +3844,7 @@
         <p:spPr>
           <a:xfrm>
             <a:off x="1097280" y="2240280"/>
-            <a:ext cx="10607040" cy="1017270"/>
+            <a:ext cx="10607040" cy="813816"/>
           </a:xfrm>
           <a:prstGeom prst="rect">
             <a:avLst/>
@@ -3840,7 +3865,7 @@
               <a:buNone/>
             </a:pPr>
             <a:r>
-              <a:rPr lang="en-US" sz="1650" dirty="0">
+              <a:rPr lang="en-US" sz="1500" dirty="0">
                 <a:solidFill>
                   <a:srgbClr val="1A1A1A"/>
                 </a:solidFill>
@@ -3848,9 +3873,9 @@
                 <a:ea typeface="Calibri" pitchFamily="34" charset="-122"/>
                 <a:cs typeface="Calibri" pitchFamily="34" charset="-120"/>
               </a:rPr>
-              <a:t>The question: could randomly dealt labels produce a gap this large?</a:t>
-            </a:r>
-            <a:endParaRPr lang="en-US" sz="1650" dirty="0"/>
+              <a:t>For every word: how much likelier is it in corpus A than corpus B? A log-odds ratio, smoothed so rare words don't explode.</a:t>
+            </a:r>
+            <a:endParaRPr lang="en-US" sz="1500" dirty="0"/>
           </a:p>
         </p:txBody>
       </p:sp>
@@ -3862,7 +3887,7 @@
         </p:nvSpPr>
         <p:spPr>
           <a:xfrm>
-            <a:off x="640080" y="3348990"/>
+            <a:off x="640080" y="3145536"/>
             <a:ext cx="201168" cy="201168"/>
           </a:xfrm>
           <a:prstGeom prst="ellipse">
@@ -3882,8 +3907,8 @@
         </p:nvSpPr>
         <p:spPr>
           <a:xfrm>
-            <a:off x="1097280" y="3257550"/>
-            <a:ext cx="10607040" cy="1017270"/>
+            <a:off x="1097280" y="3054096"/>
+            <a:ext cx="10607040" cy="813816"/>
           </a:xfrm>
           <a:prstGeom prst="rect">
             <a:avLst/>
@@ -3904,7 +3929,7 @@
               <a:buNone/>
             </a:pPr>
             <a:r>
-              <a:rPr lang="en-US" sz="1650" dirty="0">
+              <a:rPr lang="en-US" sz="1500" dirty="0">
                 <a:solidFill>
                   <a:srgbClr val="1A1A1A"/>
                 </a:solidFill>
@@ -3912,9 +3937,9 @@
                 <a:ea typeface="Calibri" pitchFamily="34" charset="-122"/>
                 <a:cs typeface="Calibri" pitchFamily="34" charset="-120"/>
               </a:rPr>
-              <a:t>Shuffle the labels, recount, 1,000 times. Mark where the real gap lands in that pile. The fraction of shuffles that match it is the p-value, the number inside every "p &lt; .05" you will ever read.</a:t>
-            </a:r>
-            <a:endParaRPr lang="en-US" sz="1650" dirty="0"/>
+              <a:t>Strongly positive = distinctively A. Strongly negative = distinctively B. The middle is shared language.</a:t>
+            </a:r>
+            <a:endParaRPr lang="en-US" sz="1500" dirty="0"/>
           </a:p>
         </p:txBody>
       </p:sp>
@@ -3926,7 +3951,7 @@
         </p:nvSpPr>
         <p:spPr>
           <a:xfrm>
-            <a:off x="640080" y="4366260"/>
+            <a:off x="640080" y="3959352"/>
             <a:ext cx="201168" cy="201168"/>
           </a:xfrm>
           <a:prstGeom prst="ellipse">
@@ -3946,8 +3971,8 @@
         </p:nvSpPr>
         <p:spPr>
           <a:xfrm>
-            <a:off x="1097280" y="4274820"/>
-            <a:ext cx="10607040" cy="1017270"/>
+            <a:off x="1097280" y="3867912"/>
+            <a:ext cx="10607040" cy="813816"/>
           </a:xfrm>
           <a:prstGeom prst="rect">
             <a:avLst/>
@@ -3968,7 +3993,7 @@
               <a:buNone/>
             </a:pPr>
             <a:r>
-              <a:rPr lang="en-US" sz="1650" dirty="0">
+              <a:rPr lang="en-US" sz="1500" dirty="0">
                 <a:solidFill>
                   <a:srgbClr val="1A1A1A"/>
                 </a:solidFill>
@@ -3976,9 +4001,9 @@
                 <a:ea typeface="Calibri" pitchFamily="34" charset="-122"/>
                 <a:cs typeface="Calibri" pitchFamily="34" charset="-120"/>
               </a:rPr>
-              <a:t>Chance rarely matches it: a finding. Chance matches it often: a coincidence. Pre-registered in the notebook: "gardeners say water more" (gap +3.3 per 1,000 words, p &lt; .001); "money" between buildapc and advice fails (p = .17) and even flips sign between pulls.</a:t>
-            </a:r>
-            <a:endParaRPr lang="en-US" sz="1650" dirty="0"/>
+              <a:t>She Giggles, He Gallops is exactly this method: verbs after "she" vs. "he" in 2,000 screenplays. Women snuggle, giggle, squeal; men gallop, strap, shoot.</a:t>
+            </a:r>
+            <a:endParaRPr lang="en-US" sz="1500" dirty="0"/>
           </a:p>
         </p:txBody>
       </p:sp>
@@ -3990,7 +4015,7 @@
         </p:nvSpPr>
         <p:spPr>
           <a:xfrm>
-            <a:off x="640080" y="5383530"/>
+            <a:off x="640080" y="4773168"/>
             <a:ext cx="201168" cy="201168"/>
           </a:xfrm>
           <a:prstGeom prst="ellipse">
@@ -4010,8 +4035,8 @@
         </p:nvSpPr>
         <p:spPr>
           <a:xfrm>
-            <a:off x="1097280" y="5292090"/>
-            <a:ext cx="10607040" cy="1017270"/>
+            <a:off x="1097280" y="4681728"/>
+            <a:ext cx="10607040" cy="813816"/>
           </a:xfrm>
           <a:prstGeom prst="rect">
             <a:avLst/>
@@ -4032,7 +4057,7 @@
               <a:buNone/>
             </a:pPr>
             <a:r>
-              <a:rPr lang="en-US" sz="1650" dirty="0">
+              <a:rPr lang="en-US" sz="1500" dirty="0">
                 <a:solidFill>
                   <a:srgbClr val="1A1A1A"/>
                 </a:solidFill>
@@ -4040,9 +4065,73 @@
                 <a:ea typeface="Calibri" pitchFamily="34" charset="-122"/>
                 <a:cs typeface="Calibri" pitchFamily="34" charset="-120"/>
               </a:rPr>
-              <a:t>It says "probably not chance." It never says "big enough to matter." Effect size is your argument to make.</a:t>
-            </a:r>
-            <a:endParaRPr lang="en-US" sz="1650" dirty="0"/>
+              <a:t>Standardize the log-odds by their variance (Monroe et al.'s Fightin' Words) and the lists change character: topic words sink, register surfaces. r/buildapc's strongest markers become you/your (an advice room), r/gardening's i/we/them (a stories room).</a:t>
+            </a:r>
+            <a:endParaRPr lang="en-US" sz="1500" dirty="0"/>
+          </a:p>
+        </p:txBody>
+      </p:sp>
+      <p:sp>
+        <p:nvSpPr>
+          <p:cNvPr id="13" name="Shape 11"/>
+          <p:cNvSpPr/>
+          <p:nvPr/>
+        </p:nvSpPr>
+        <p:spPr>
+          <a:xfrm>
+            <a:off x="640080" y="5586984"/>
+            <a:ext cx="201168" cy="201168"/>
+          </a:xfrm>
+          <a:prstGeom prst="ellipse">
+            <a:avLst/>
+          </a:prstGeom>
+          <a:solidFill>
+            <a:srgbClr val="3F6F5F"/>
+          </a:solidFill>
+          <a:ln/>
+        </p:spPr>
+      </p:sp>
+      <p:sp>
+        <p:nvSpPr>
+          <p:cNvPr id="14" name="Text 12"/>
+          <p:cNvSpPr/>
+          <p:nvPr/>
+        </p:nvSpPr>
+        <p:spPr>
+          <a:xfrm>
+            <a:off x="1097280" y="5495544"/>
+            <a:ext cx="10607040" cy="813816"/>
+          </a:xfrm>
+          <a:prstGeom prst="rect">
+            <a:avLst/>
+          </a:prstGeom>
+          <a:noFill/>
+          <a:ln/>
+        </p:spPr>
+        <p:txBody>
+          <a:bodyPr wrap="square" rtlCol="0" anchor="t">
+            <a:spAutoFit/>
+          </a:bodyPr>
+          <a:lstStyle/>
+          <a:p>
+            <a:pPr indent="0" marL="0">
+              <a:lnSpc>
+                <a:spcPct val="112000"/>
+              </a:lnSpc>
+              <a:buNone/>
+            </a:pPr>
+            <a:r>
+              <a:rPr lang="en-US" sz="1500" dirty="0">
+                <a:solidFill>
+                  <a:srgbClr val="1A1A1A"/>
+                </a:solidFill>
+                <a:latin typeface="Calibri" pitchFamily="34" charset="0"/>
+                <a:ea typeface="Calibri" pitchFamily="34" charset="-122"/>
+                <a:cs typeface="Calibri" pitchFamily="34" charset="-120"/>
+              </a:rPr>
+              <a:t>The corpus pair is a choice: this artist against pop, this subreddit against a novel. Different pair, different "distinctive."</a:t>
+            </a:r>
+            <a:endParaRPr lang="en-US" sz="1500" dirty="0"/>
           </a:p>
         </p:txBody>
       </p:sp>
@@ -4080,14 +4169,34 @@
       </p:grpSpPr>
       <p:sp>
         <p:nvSpPr>
-          <p:cNvPr id="2" name="Text 0"/>
-          <p:cNvSpPr/>
-          <p:nvPr/>
-        </p:nvSpPr>
-        <p:spPr>
-          <a:xfrm>
-            <a:off x="640080" y="731520"/>
-            <a:ext cx="10058400" cy="731520"/>
+          <p:cNvPr id="2" name="Shape 0"/>
+          <p:cNvSpPr/>
+          <p:nvPr/>
+        </p:nvSpPr>
+        <p:spPr>
+          <a:xfrm>
+            <a:off x="0" y="0"/>
+            <a:ext cx="164592" cy="6858000"/>
+          </a:xfrm>
+          <a:prstGeom prst="rect">
+            <a:avLst/>
+          </a:prstGeom>
+          <a:solidFill>
+            <a:srgbClr val="7A3B2E"/>
+          </a:solidFill>
+          <a:ln/>
+        </p:spPr>
+      </p:sp>
+      <p:sp>
+        <p:nvSpPr>
+          <p:cNvPr id="3" name="Text 1"/>
+          <p:cNvSpPr/>
+          <p:nvPr/>
+        </p:nvSpPr>
+        <p:spPr>
+          <a:xfrm>
+            <a:off x="640080" y="640080"/>
+            <a:ext cx="10058400" cy="320040"/>
           </a:xfrm>
           <a:prstGeom prst="rect">
             <a:avLst/>
@@ -4097,6 +4206,47 @@
         </p:spPr>
         <p:txBody>
           <a:bodyPr wrap="square" rtlCol="0" anchor="ctr"/>
+          <a:lstStyle/>
+          <a:p>
+            <a:pPr indent="0" marL="0">
+              <a:buNone/>
+            </a:pPr>
+            <a:r>
+              <a:rPr lang="en-US" sz="1200" b="1" spc="300" kern="0" dirty="0">
+                <a:solidFill>
+                  <a:srgbClr val="7A3B2E"/>
+                </a:solidFill>
+                <a:latin typeface="Calibri" pitchFamily="34" charset="0"/>
+                <a:ea typeface="Calibri" pitchFamily="34" charset="-122"/>
+                <a:cs typeface="Calibri" pitchFamily="34" charset="-120"/>
+              </a:rPr>
+              <a:t>WEEK 2 · KEY POINTS</a:t>
+            </a:r>
+            <a:endParaRPr lang="en-US" sz="1200" dirty="0"/>
+          </a:p>
+        </p:txBody>
+      </p:sp>
+      <p:sp>
+        <p:nvSpPr>
+          <p:cNvPr id="4" name="Text 2"/>
+          <p:cNvSpPr/>
+          <p:nvPr/>
+        </p:nvSpPr>
+        <p:spPr>
+          <a:xfrm>
+            <a:off x="640080" y="1005840"/>
+            <a:ext cx="10881360" cy="914400"/>
+          </a:xfrm>
+          <a:prstGeom prst="rect">
+            <a:avLst/>
+          </a:prstGeom>
+          <a:noFill/>
+          <a:ln/>
+        </p:spPr>
+        <p:txBody>
+          <a:bodyPr wrap="square" rtlCol="0" anchor="t">
+            <a:spAutoFit/>
+          </a:bodyPr>
           <a:lstStyle/>
           <a:p>
             <a:pPr indent="0" marL="0">
@@ -4111,7 +4261,7 @@
                 <a:ea typeface="Cambria" pitchFamily="34" charset="-122"/>
                 <a:cs typeface="Cambria" pitchFamily="34" charset="-120"/>
               </a:rPr>
-              <a:t>Three modes today</a:t>
+              <a:t>The shuffle test: is the gap real?</a:t>
             </a:r>
             <a:endParaRPr lang="en-US" sz="3000" dirty="0"/>
           </a:p>
@@ -4119,134 +4269,98 @@
       </p:sp>
       <p:sp>
         <p:nvSpPr>
-          <p:cNvPr id="3" name="Text 1"/>
-          <p:cNvSpPr/>
-          <p:nvPr/>
-        </p:nvSpPr>
-        <p:spPr>
-          <a:xfrm>
-            <a:off x="640080" y="1417320"/>
-            <a:ext cx="10058400" cy="365760"/>
-          </a:xfrm>
-          <a:prstGeom prst="rect">
-            <a:avLst/>
-          </a:prstGeom>
-          <a:noFill/>
-          <a:ln/>
-        </p:spPr>
-        <p:txBody>
-          <a:bodyPr wrap="square" rtlCol="0" anchor="ctr"/>
-          <a:lstStyle/>
-          <a:p>
-            <a:pPr indent="0" marL="0">
-              <a:buNone/>
-            </a:pPr>
-            <a:r>
-              <a:rPr lang="en-US" sz="1400" i="1" dirty="0">
-                <a:solidFill>
-                  <a:srgbClr val="6B6B63"/>
+          <p:cNvPr id="5" name="Shape 3"/>
+          <p:cNvSpPr/>
+          <p:nvPr/>
+        </p:nvSpPr>
+        <p:spPr>
+          <a:xfrm>
+            <a:off x="640080" y="2331720"/>
+            <a:ext cx="201168" cy="201168"/>
+          </a:xfrm>
+          <a:prstGeom prst="ellipse">
+            <a:avLst/>
+          </a:prstGeom>
+          <a:solidFill>
+            <a:srgbClr val="7A3B2E"/>
+          </a:solidFill>
+          <a:ln/>
+        </p:spPr>
+      </p:sp>
+      <p:sp>
+        <p:nvSpPr>
+          <p:cNvPr id="6" name="Text 4"/>
+          <p:cNvSpPr/>
+          <p:nvPr/>
+        </p:nvSpPr>
+        <p:spPr>
+          <a:xfrm>
+            <a:off x="1097280" y="2240280"/>
+            <a:ext cx="10607040" cy="1017270"/>
+          </a:xfrm>
+          <a:prstGeom prst="rect">
+            <a:avLst/>
+          </a:prstGeom>
+          <a:noFill/>
+          <a:ln/>
+        </p:spPr>
+        <p:txBody>
+          <a:bodyPr wrap="square" rtlCol="0" anchor="t">
+            <a:spAutoFit/>
+          </a:bodyPr>
+          <a:lstStyle/>
+          <a:p>
+            <a:pPr indent="0" marL="0">
+              <a:lnSpc>
+                <a:spcPct val="112000"/>
+              </a:lnSpc>
+              <a:buNone/>
+            </a:pPr>
+            <a:r>
+              <a:rPr lang="en-US" sz="1650" dirty="0">
+                <a:solidFill>
+                  <a:srgbClr val="1A1A1A"/>
                 </a:solidFill>
                 <a:latin typeface="Calibri" pitchFamily="34" charset="0"/>
                 <a:ea typeface="Calibri" pitchFamily="34" charset="-122"/>
                 <a:cs typeface="Calibri" pitchFamily="34" charset="-120"/>
               </a:rPr>
-              <a:t>about a third of the session each</a:t>
-            </a:r>
-            <a:endParaRPr lang="en-US" sz="1400" dirty="0"/>
-          </a:p>
-        </p:txBody>
-      </p:sp>
-      <p:sp>
-        <p:nvSpPr>
-          <p:cNvPr id="4" name="Shape 2"/>
-          <p:cNvSpPr/>
-          <p:nvPr/>
-        </p:nvSpPr>
-        <p:spPr>
-          <a:xfrm>
-            <a:off x="640080" y="2194560"/>
-            <a:ext cx="3383280" cy="3291840"/>
-          </a:xfrm>
-          <a:prstGeom prst="roundRect">
-            <a:avLst>
-              <a:gd name="adj" fmla="val 3333"/>
-            </a:avLst>
-          </a:prstGeom>
-          <a:solidFill>
-            <a:srgbClr val="F4EEE8"/>
-          </a:solidFill>
-          <a:ln/>
-        </p:spPr>
-      </p:sp>
-      <p:sp>
-        <p:nvSpPr>
-          <p:cNvPr id="5" name="Shape 3"/>
-          <p:cNvSpPr/>
-          <p:nvPr/>
-        </p:nvSpPr>
-        <p:spPr>
-          <a:xfrm>
-            <a:off x="1051560" y="2606040"/>
-            <a:ext cx="548640" cy="548640"/>
+              <a:t>The question: could randomly dealt labels produce a gap this large?</a:t>
+            </a:r>
+            <a:endParaRPr lang="en-US" sz="1650" dirty="0"/>
+          </a:p>
+        </p:txBody>
+      </p:sp>
+      <p:sp>
+        <p:nvSpPr>
+          <p:cNvPr id="7" name="Shape 5"/>
+          <p:cNvSpPr/>
+          <p:nvPr/>
+        </p:nvSpPr>
+        <p:spPr>
+          <a:xfrm>
+            <a:off x="640080" y="3348990"/>
+            <a:ext cx="201168" cy="201168"/>
           </a:xfrm>
           <a:prstGeom prst="ellipse">
             <a:avLst/>
           </a:prstGeom>
           <a:solidFill>
-            <a:srgbClr val="7A3B2E"/>
-          </a:solidFill>
-          <a:ln/>
-        </p:spPr>
-      </p:sp>
-      <p:sp>
-        <p:nvSpPr>
-          <p:cNvPr id="6" name="Text 4"/>
-          <p:cNvSpPr/>
-          <p:nvPr/>
-        </p:nvSpPr>
-        <p:spPr>
-          <a:xfrm>
-            <a:off x="1005840" y="3383280"/>
-            <a:ext cx="2651760" cy="548640"/>
-          </a:xfrm>
-          <a:prstGeom prst="rect">
-            <a:avLst/>
-          </a:prstGeom>
-          <a:noFill/>
-          <a:ln/>
-        </p:spPr>
-        <p:txBody>
-          <a:bodyPr wrap="square" rtlCol="0" anchor="ctr"/>
-          <a:lstStyle/>
-          <a:p>
-            <a:pPr indent="0" marL="0">
-              <a:buNone/>
-            </a:pPr>
-            <a:r>
-              <a:rPr lang="en-US" sz="2100" b="1" dirty="0">
-                <a:solidFill>
-                  <a:srgbClr val="1A1A1A"/>
-                </a:solidFill>
-                <a:latin typeface="Cambria" pitchFamily="34" charset="0"/>
-                <a:ea typeface="Cambria" pitchFamily="34" charset="-122"/>
-                <a:cs typeface="Cambria" pitchFamily="34" charset="-120"/>
-              </a:rPr>
-              <a:t>Lecture / demo</a:t>
-            </a:r>
-            <a:endParaRPr lang="en-US" sz="2100" dirty="0"/>
-          </a:p>
-        </p:txBody>
-      </p:sp>
-      <p:sp>
-        <p:nvSpPr>
-          <p:cNvPr id="7" name="Text 5"/>
-          <p:cNvSpPr/>
-          <p:nvPr/>
-        </p:nvSpPr>
-        <p:spPr>
-          <a:xfrm>
-            <a:off x="1005840" y="3977640"/>
-            <a:ext cx="2651760" cy="1371600"/>
+            <a:srgbClr val="3F6F5F"/>
+          </a:solidFill>
+          <a:ln/>
+        </p:spPr>
+      </p:sp>
+      <p:sp>
+        <p:nvSpPr>
+          <p:cNvPr id="8" name="Text 6"/>
+          <p:cNvSpPr/>
+          <p:nvPr/>
+        </p:nvSpPr>
+        <p:spPr>
+          <a:xfrm>
+            <a:off x="1097280" y="3257550"/>
+            <a:ext cx="10607040" cy="1017270"/>
           </a:xfrm>
           <a:prstGeom prst="rect">
             <a:avLst/>
@@ -4262,12 +4376,12 @@
           <a:p>
             <a:pPr indent="0" marL="0">
               <a:lnSpc>
-                <a:spcPct val="115000"/>
+                <a:spcPct val="112000"/>
               </a:lnSpc>
               <a:buNone/>
             </a:pPr>
             <a:r>
-              <a:rPr lang="en-US" sz="1500" dirty="0">
+              <a:rPr lang="en-US" sz="1650" dirty="0">
                 <a:solidFill>
                   <a:srgbClr val="1A1A1A"/>
                 </a:solidFill>
@@ -4275,33 +4389,11 @@
                 <a:ea typeface="Calibri" pitchFamily="34" charset="-122"/>
                 <a:cs typeface="Calibri" pitchFamily="34" charset="-120"/>
               </a:rPr>
-              <a:t>Advanced counting: baselines, keyness, and the shuffle test</a:t>
-            </a:r>
-            <a:endParaRPr lang="en-US" sz="1500" dirty="0"/>
-          </a:p>
-        </p:txBody>
-      </p:sp>
-      <p:sp>
-        <p:nvSpPr>
-          <p:cNvPr id="8" name="Shape 6"/>
-          <p:cNvSpPr/>
-          <p:nvPr/>
-        </p:nvSpPr>
-        <p:spPr>
-          <a:xfrm>
-            <a:off x="4526280" y="2194560"/>
-            <a:ext cx="3383280" cy="3291840"/>
-          </a:xfrm>
-          <a:prstGeom prst="roundRect">
-            <a:avLst>
-              <a:gd name="adj" fmla="val 3333"/>
-            </a:avLst>
-          </a:prstGeom>
-          <a:solidFill>
-            <a:srgbClr val="F4EEE8"/>
-          </a:solidFill>
-          <a:ln/>
-        </p:spPr>
+              <a:t>Shuffle the labels, recount, 1,000 times. Mark where the real gap lands in that pile. The fraction of shuffles that match it is the p-value, the number inside every "p &lt; .05" you will ever read.</a:t>
+            </a:r>
+            <a:endParaRPr lang="en-US" sz="1650" dirty="0"/>
+          </a:p>
+        </p:txBody>
       </p:sp>
       <p:sp>
         <p:nvSpPr>
@@ -4311,14 +4403,14 @@
         </p:nvSpPr>
         <p:spPr>
           <a:xfrm>
-            <a:off x="4937760" y="2606040"/>
-            <a:ext cx="548640" cy="548640"/>
+            <a:off x="640080" y="4366260"/>
+            <a:ext cx="201168" cy="201168"/>
           </a:xfrm>
           <a:prstGeom prst="ellipse">
             <a:avLst/>
           </a:prstGeom>
           <a:solidFill>
-            <a:srgbClr val="3F6F5F"/>
+            <a:srgbClr val="B9852F"/>
           </a:solidFill>
           <a:ln/>
         </p:spPr>
@@ -4331,47 +4423,8 @@
         </p:nvSpPr>
         <p:spPr>
           <a:xfrm>
-            <a:off x="4892040" y="3383280"/>
-            <a:ext cx="2651760" cy="548640"/>
-          </a:xfrm>
-          <a:prstGeom prst="rect">
-            <a:avLst/>
-          </a:prstGeom>
-          <a:noFill/>
-          <a:ln/>
-        </p:spPr>
-        <p:txBody>
-          <a:bodyPr wrap="square" rtlCol="0" anchor="ctr"/>
-          <a:lstStyle/>
-          <a:p>
-            <a:pPr indent="0" marL="0">
-              <a:buNone/>
-            </a:pPr>
-            <a:r>
-              <a:rPr lang="en-US" sz="2100" b="1" dirty="0">
-                <a:solidFill>
-                  <a:srgbClr val="1A1A1A"/>
-                </a:solidFill>
-                <a:latin typeface="Cambria" pitchFamily="34" charset="0"/>
-                <a:ea typeface="Cambria" pitchFamily="34" charset="-122"/>
-                <a:cs typeface="Cambria" pitchFamily="34" charset="-120"/>
-              </a:rPr>
-              <a:t>Workshop</a:t>
-            </a:r>
-            <a:endParaRPr lang="en-US" sz="2100" dirty="0"/>
-          </a:p>
-        </p:txBody>
-      </p:sp>
-      <p:sp>
-        <p:nvSpPr>
-          <p:cNvPr id="11" name="Text 9"/>
-          <p:cNvSpPr/>
-          <p:nvPr/>
-        </p:nvSpPr>
-        <p:spPr>
-          <a:xfrm>
-            <a:off x="4892040" y="3977640"/>
-            <a:ext cx="2651760" cy="1371600"/>
+            <a:off x="1097280" y="4274820"/>
+            <a:ext cx="10607040" cy="1017270"/>
           </a:xfrm>
           <a:prstGeom prst="rect">
             <a:avLst/>
@@ -4387,12 +4440,12 @@
           <a:p>
             <a:pPr indent="0" marL="0">
               <a:lnSpc>
-                <a:spcPct val="115000"/>
+                <a:spcPct val="112000"/>
               </a:lnSpc>
               <a:buNone/>
             </a:pPr>
             <a:r>
-              <a:rPr lang="en-US" sz="1500" dirty="0">
+              <a:rPr lang="en-US" sz="1650" dirty="0">
                 <a:solidFill>
                   <a:srgbClr val="1A1A1A"/>
                 </a:solidFill>
@@ -4400,103 +4453,42 @@
                 <a:ea typeface="Calibri" pitchFamily="34" charset="-122"/>
                 <a:cs typeface="Calibri" pitchFamily="34" charset="-120"/>
               </a:rPr>
-              <a:t>Build hands-on on your own data.</a:t>
-            </a:r>
-            <a:endParaRPr lang="en-US" sz="1500" dirty="0"/>
-          </a:p>
-        </p:txBody>
-      </p:sp>
-      <p:sp>
-        <p:nvSpPr>
-          <p:cNvPr id="12" name="Shape 10"/>
-          <p:cNvSpPr/>
-          <p:nvPr/>
-        </p:nvSpPr>
-        <p:spPr>
-          <a:xfrm>
-            <a:off x="8412480" y="2194560"/>
-            <a:ext cx="3383280" cy="3291840"/>
-          </a:xfrm>
-          <a:prstGeom prst="roundRect">
-            <a:avLst>
-              <a:gd name="adj" fmla="val 3333"/>
-            </a:avLst>
-          </a:prstGeom>
-          <a:solidFill>
-            <a:srgbClr val="F4EEE8"/>
-          </a:solidFill>
-          <a:ln/>
-        </p:spPr>
-      </p:sp>
-      <p:sp>
-        <p:nvSpPr>
-          <p:cNvPr id="13" name="Shape 11"/>
-          <p:cNvSpPr/>
-          <p:nvPr/>
-        </p:nvSpPr>
-        <p:spPr>
-          <a:xfrm>
-            <a:off x="8823960" y="2606040"/>
-            <a:ext cx="548640" cy="548640"/>
+              <a:t>Chance rarely matches it: a finding. Chance matches it often: a coincidence. Pre-registered in the notebook: "gardeners say water more" (gap +3.3 per 1,000 words, p &lt; .001); "money" between buildapc and advice fails (p = .17) and even flips sign between pulls.</a:t>
+            </a:r>
+            <a:endParaRPr lang="en-US" sz="1650" dirty="0"/>
+          </a:p>
+        </p:txBody>
+      </p:sp>
+      <p:sp>
+        <p:nvSpPr>
+          <p:cNvPr id="11" name="Shape 9"/>
+          <p:cNvSpPr/>
+          <p:nvPr/>
+        </p:nvSpPr>
+        <p:spPr>
+          <a:xfrm>
+            <a:off x="640080" y="5383530"/>
+            <a:ext cx="201168" cy="201168"/>
           </a:xfrm>
           <a:prstGeom prst="ellipse">
             <a:avLst/>
           </a:prstGeom>
           <a:solidFill>
-            <a:srgbClr val="B9852F"/>
-          </a:solidFill>
-          <a:ln/>
-        </p:spPr>
-      </p:sp>
-      <p:sp>
-        <p:nvSpPr>
-          <p:cNvPr id="14" name="Text 12"/>
-          <p:cNvSpPr/>
-          <p:nvPr/>
-        </p:nvSpPr>
-        <p:spPr>
-          <a:xfrm>
-            <a:off x="8778240" y="3383280"/>
-            <a:ext cx="2651760" cy="548640"/>
-          </a:xfrm>
-          <a:prstGeom prst="rect">
-            <a:avLst/>
-          </a:prstGeom>
-          <a:noFill/>
-          <a:ln/>
-        </p:spPr>
-        <p:txBody>
-          <a:bodyPr wrap="square" rtlCol="0" anchor="ctr"/>
-          <a:lstStyle/>
-          <a:p>
-            <a:pPr indent="0" marL="0">
-              <a:buNone/>
-            </a:pPr>
-            <a:r>
-              <a:rPr lang="en-US" sz="2100" b="1" dirty="0">
-                <a:solidFill>
-                  <a:srgbClr val="1A1A1A"/>
-                </a:solidFill>
-                <a:latin typeface="Cambria" pitchFamily="34" charset="0"/>
-                <a:ea typeface="Cambria" pitchFamily="34" charset="-122"/>
-                <a:cs typeface="Cambria" pitchFamily="34" charset="-120"/>
-              </a:rPr>
-              <a:t>Discussion</a:t>
-            </a:r>
-            <a:endParaRPr lang="en-US" sz="2100" dirty="0"/>
-          </a:p>
-        </p:txBody>
-      </p:sp>
-      <p:sp>
-        <p:nvSpPr>
-          <p:cNvPr id="15" name="Text 13"/>
-          <p:cNvSpPr/>
-          <p:nvPr/>
-        </p:nvSpPr>
-        <p:spPr>
-          <a:xfrm>
-            <a:off x="8778240" y="3977640"/>
-            <a:ext cx="2651760" cy="1371600"/>
+            <a:srgbClr val="7A3B2E"/>
+          </a:solidFill>
+          <a:ln/>
+        </p:spPr>
+      </p:sp>
+      <p:sp>
+        <p:nvSpPr>
+          <p:cNvPr id="12" name="Text 10"/>
+          <p:cNvSpPr/>
+          <p:nvPr/>
+        </p:nvSpPr>
+        <p:spPr>
+          <a:xfrm>
+            <a:off x="1097280" y="5292090"/>
+            <a:ext cx="10607040" cy="1017270"/>
           </a:xfrm>
           <a:prstGeom prst="rect">
             <a:avLst/>
@@ -4512,12 +4504,12 @@
           <a:p>
             <a:pPr indent="0" marL="0">
               <a:lnSpc>
-                <a:spcPct val="115000"/>
+                <a:spcPct val="112000"/>
               </a:lnSpc>
               <a:buNone/>
             </a:pPr>
             <a:r>
-              <a:rPr lang="en-US" sz="1500" dirty="0">
+              <a:rPr lang="en-US" sz="1650" dirty="0">
                 <a:solidFill>
                   <a:srgbClr val="1A1A1A"/>
                 </a:solidFill>
@@ -4525,9 +4517,9 @@
                 <a:ea typeface="Calibri" pitchFamily="34" charset="-122"/>
                 <a:cs typeface="Calibri" pitchFamily="34" charset="-120"/>
               </a:rPr>
-              <a:t>Interrogate the study, debate it, or critique each other's work.</a:t>
-            </a:r>
-            <a:endParaRPr lang="en-US" sz="1500" dirty="0"/>
+              <a:t>It says "probably not chance." It never says "big enough to matter." Effect size is your argument to make.</a:t>
+            </a:r>
+            <a:endParaRPr lang="en-US" sz="1650" dirty="0"/>
           </a:p>
         </p:txBody>
       </p:sp>
@@ -4571,7 +4563,7 @@
         </p:nvSpPr>
         <p:spPr>
           <a:xfrm>
-            <a:off x="640080" y="640080"/>
+            <a:off x="640080" y="731520"/>
             <a:ext cx="10058400" cy="731520"/>
           </a:xfrm>
           <a:prstGeom prst="rect">
@@ -4596,7 +4588,7 @@
                 <a:ea typeface="Cambria" pitchFamily="34" charset="-122"/>
                 <a:cs typeface="Cambria" pitchFamily="34" charset="-120"/>
               </a:rPr>
-              <a:t>The session</a:t>
+              <a:t>Three modes today</a:t>
             </a:r>
             <a:endParaRPr lang="en-US" sz="3000" dirty="0"/>
           </a:p>
@@ -4604,36 +4596,14 @@
       </p:sp>
       <p:sp>
         <p:nvSpPr>
-          <p:cNvPr id="3" name="Shape 1"/>
-          <p:cNvSpPr/>
-          <p:nvPr/>
-        </p:nvSpPr>
-        <p:spPr>
-          <a:xfrm>
-            <a:off x="640080" y="1572768"/>
-            <a:ext cx="868680" cy="338328"/>
-          </a:xfrm>
-          <a:prstGeom prst="roundRect">
-            <a:avLst>
-              <a:gd name="adj" fmla="val 16216"/>
-            </a:avLst>
-          </a:prstGeom>
-          <a:solidFill>
-            <a:srgbClr val="7A3B2E"/>
-          </a:solidFill>
-          <a:ln/>
-        </p:spPr>
-      </p:sp>
-      <p:sp>
-        <p:nvSpPr>
-          <p:cNvPr id="4" name="Text 2"/>
-          <p:cNvSpPr/>
-          <p:nvPr/>
-        </p:nvSpPr>
-        <p:spPr>
-          <a:xfrm>
-            <a:off x="640080" y="1572768"/>
-            <a:ext cx="868680" cy="338328"/>
+          <p:cNvPr id="3" name="Text 1"/>
+          <p:cNvSpPr/>
+          <p:nvPr/>
+        </p:nvSpPr>
+        <p:spPr>
+          <a:xfrm>
+            <a:off x="640080" y="1417320"/>
+            <a:ext cx="10058400" cy="365760"/>
           </a:xfrm>
           <a:prstGeom prst="rect">
             <a:avLst/>
@@ -4645,52 +4615,136 @@
           <a:bodyPr wrap="square" rtlCol="0" anchor="ctr"/>
           <a:lstStyle/>
           <a:p>
-            <a:pPr algn="ctr" indent="0" marL="0">
-              <a:buNone/>
-            </a:pPr>
-            <a:r>
-              <a:rPr lang="en-US" sz="1100" b="1" dirty="0">
-                <a:solidFill>
-                  <a:srgbClr val="FFFFFF"/>
+            <a:pPr indent="0" marL="0">
+              <a:buNone/>
+            </a:pPr>
+            <a:r>
+              <a:rPr lang="en-US" sz="1400" i="1" dirty="0">
+                <a:solidFill>
+                  <a:srgbClr val="6B6B63"/>
                 </a:solidFill>
                 <a:latin typeface="Calibri" pitchFamily="34" charset="0"/>
                 <a:ea typeface="Calibri" pitchFamily="34" charset="-122"/>
                 <a:cs typeface="Calibri" pitchFamily="34" charset="-120"/>
               </a:rPr>
-              <a:t>0:00</a:t>
-            </a:r>
-            <a:endParaRPr lang="en-US" sz="1100" dirty="0"/>
-          </a:p>
-        </p:txBody>
-      </p:sp>
-      <p:sp>
-        <p:nvSpPr>
-          <p:cNvPr id="5" name="Text 3"/>
-          <p:cNvSpPr/>
-          <p:nvPr/>
-        </p:nvSpPr>
-        <p:spPr>
-          <a:xfrm>
-            <a:off x="1691640" y="1554480"/>
-            <a:ext cx="9646920" cy="448056"/>
-          </a:xfrm>
-          <a:prstGeom prst="rect">
-            <a:avLst/>
-          </a:prstGeom>
-          <a:noFill/>
-          <a:ln/>
-        </p:spPr>
-        <p:txBody>
-          <a:bodyPr wrap="square" rtlCol="0" anchor="ctr">
+              <a:t>about a third of the session each</a:t>
+            </a:r>
+            <a:endParaRPr lang="en-US" sz="1400" dirty="0"/>
+          </a:p>
+        </p:txBody>
+      </p:sp>
+      <p:sp>
+        <p:nvSpPr>
+          <p:cNvPr id="4" name="Shape 2"/>
+          <p:cNvSpPr/>
+          <p:nvPr/>
+        </p:nvSpPr>
+        <p:spPr>
+          <a:xfrm>
+            <a:off x="640080" y="2194560"/>
+            <a:ext cx="3383280" cy="3291840"/>
+          </a:xfrm>
+          <a:prstGeom prst="roundRect">
+            <a:avLst>
+              <a:gd name="adj" fmla="val 3333"/>
+            </a:avLst>
+          </a:prstGeom>
+          <a:solidFill>
+            <a:srgbClr val="F4EEE8"/>
+          </a:solidFill>
+          <a:ln/>
+        </p:spPr>
+      </p:sp>
+      <p:sp>
+        <p:nvSpPr>
+          <p:cNvPr id="5" name="Shape 3"/>
+          <p:cNvSpPr/>
+          <p:nvPr/>
+        </p:nvSpPr>
+        <p:spPr>
+          <a:xfrm>
+            <a:off x="1051560" y="2606040"/>
+            <a:ext cx="548640" cy="548640"/>
+          </a:xfrm>
+          <a:prstGeom prst="ellipse">
+            <a:avLst/>
+          </a:prstGeom>
+          <a:solidFill>
+            <a:srgbClr val="7A3B2E"/>
+          </a:solidFill>
+          <a:ln/>
+        </p:spPr>
+      </p:sp>
+      <p:sp>
+        <p:nvSpPr>
+          <p:cNvPr id="6" name="Text 4"/>
+          <p:cNvSpPr/>
+          <p:nvPr/>
+        </p:nvSpPr>
+        <p:spPr>
+          <a:xfrm>
+            <a:off x="1005840" y="3383280"/>
+            <a:ext cx="2651760" cy="548640"/>
+          </a:xfrm>
+          <a:prstGeom prst="rect">
+            <a:avLst/>
+          </a:prstGeom>
+          <a:noFill/>
+          <a:ln/>
+        </p:spPr>
+        <p:txBody>
+          <a:bodyPr wrap="square" rtlCol="0" anchor="ctr"/>
+          <a:lstStyle/>
+          <a:p>
+            <a:pPr indent="0" marL="0">
+              <a:buNone/>
+            </a:pPr>
+            <a:r>
+              <a:rPr lang="en-US" sz="2100" b="1" dirty="0">
+                <a:solidFill>
+                  <a:srgbClr val="1A1A1A"/>
+                </a:solidFill>
+                <a:latin typeface="Cambria" pitchFamily="34" charset="0"/>
+                <a:ea typeface="Cambria" pitchFamily="34" charset="-122"/>
+                <a:cs typeface="Cambria" pitchFamily="34" charset="-120"/>
+              </a:rPr>
+              <a:t>Lecture / demo</a:t>
+            </a:r>
+            <a:endParaRPr lang="en-US" sz="2100" dirty="0"/>
+          </a:p>
+        </p:txBody>
+      </p:sp>
+      <p:sp>
+        <p:nvSpPr>
+          <p:cNvPr id="7" name="Text 5"/>
+          <p:cNvSpPr/>
+          <p:nvPr/>
+        </p:nvSpPr>
+        <p:spPr>
+          <a:xfrm>
+            <a:off x="1005840" y="3977640"/>
+            <a:ext cx="2651760" cy="1371600"/>
+          </a:xfrm>
+          <a:prstGeom prst="rect">
+            <a:avLst/>
+          </a:prstGeom>
+          <a:noFill/>
+          <a:ln/>
+        </p:spPr>
+        <p:txBody>
+          <a:bodyPr wrap="square" rtlCol="0" anchor="t">
             <a:spAutoFit/>
           </a:bodyPr>
           <a:lstStyle/>
           <a:p>
             <a:pPr indent="0" marL="0">
-              <a:buNone/>
-            </a:pPr>
-            <a:r>
-              <a:rPr lang="en-US" sz="1100" dirty="0">
+              <a:lnSpc>
+                <a:spcPct val="115000"/>
+              </a:lnSpc>
+              <a:buNone/>
+            </a:pPr>
+            <a:r>
+              <a:rPr lang="en-US" sz="1500" dirty="0">
                 <a:solidFill>
                   <a:srgbClr val="1A1A1A"/>
                 </a:solidFill>
@@ -4698,44 +4752,64 @@
                 <a:ea typeface="Calibri" pitchFamily="34" charset="-122"/>
                 <a:cs typeface="Calibri" pitchFamily="34" charset="-120"/>
               </a:rPr>
-              <a:t>Warm-up: favorite Pudding pieces from the sketch, what did yours count, and one choice its makers made. Then retrieval.</a:t>
-            </a:r>
-            <a:endParaRPr lang="en-US" sz="1100" dirty="0"/>
-          </a:p>
-        </p:txBody>
-      </p:sp>
-      <p:sp>
-        <p:nvSpPr>
-          <p:cNvPr id="6" name="Shape 4"/>
-          <p:cNvSpPr/>
-          <p:nvPr/>
-        </p:nvSpPr>
-        <p:spPr>
-          <a:xfrm>
-            <a:off x="640080" y="2020824"/>
-            <a:ext cx="868680" cy="338328"/>
+              <a:t>Advanced counting: baselines, keyness, and the shuffle test</a:t>
+            </a:r>
+            <a:endParaRPr lang="en-US" sz="1500" dirty="0"/>
+          </a:p>
+        </p:txBody>
+      </p:sp>
+      <p:sp>
+        <p:nvSpPr>
+          <p:cNvPr id="8" name="Shape 6"/>
+          <p:cNvSpPr/>
+          <p:nvPr/>
+        </p:nvSpPr>
+        <p:spPr>
+          <a:xfrm>
+            <a:off x="4526280" y="2194560"/>
+            <a:ext cx="3383280" cy="3291840"/>
           </a:xfrm>
           <a:prstGeom prst="roundRect">
             <a:avLst>
-              <a:gd name="adj" fmla="val 16216"/>
+              <a:gd name="adj" fmla="val 3333"/>
             </a:avLst>
           </a:prstGeom>
           <a:solidFill>
-            <a:srgbClr val="7A3B2E"/>
-          </a:solidFill>
-          <a:ln/>
-        </p:spPr>
-      </p:sp>
-      <p:sp>
-        <p:nvSpPr>
-          <p:cNvPr id="7" name="Text 5"/>
-          <p:cNvSpPr/>
-          <p:nvPr/>
-        </p:nvSpPr>
-        <p:spPr>
-          <a:xfrm>
-            <a:off x="640080" y="2020824"/>
-            <a:ext cx="868680" cy="338328"/>
+            <a:srgbClr val="F4EEE8"/>
+          </a:solidFill>
+          <a:ln/>
+        </p:spPr>
+      </p:sp>
+      <p:sp>
+        <p:nvSpPr>
+          <p:cNvPr id="9" name="Shape 7"/>
+          <p:cNvSpPr/>
+          <p:nvPr/>
+        </p:nvSpPr>
+        <p:spPr>
+          <a:xfrm>
+            <a:off x="4937760" y="2606040"/>
+            <a:ext cx="548640" cy="548640"/>
+          </a:xfrm>
+          <a:prstGeom prst="ellipse">
+            <a:avLst/>
+          </a:prstGeom>
+          <a:solidFill>
+            <a:srgbClr val="3F6F5F"/>
+          </a:solidFill>
+          <a:ln/>
+        </p:spPr>
+      </p:sp>
+      <p:sp>
+        <p:nvSpPr>
+          <p:cNvPr id="10" name="Text 8"/>
+          <p:cNvSpPr/>
+          <p:nvPr/>
+        </p:nvSpPr>
+        <p:spPr>
+          <a:xfrm>
+            <a:off x="4892040" y="3383280"/>
+            <a:ext cx="2651760" cy="548640"/>
           </a:xfrm>
           <a:prstGeom prst="rect">
             <a:avLst/>
@@ -4747,52 +4821,180 @@
           <a:bodyPr wrap="square" rtlCol="0" anchor="ctr"/>
           <a:lstStyle/>
           <a:p>
-            <a:pPr algn="ctr" indent="0" marL="0">
-              <a:buNone/>
-            </a:pPr>
-            <a:r>
-              <a:rPr lang="en-US" sz="1100" b="1" dirty="0">
-                <a:solidFill>
-                  <a:srgbClr val="FFFFFF"/>
+            <a:pPr indent="0" marL="0">
+              <a:buNone/>
+            </a:pPr>
+            <a:r>
+              <a:rPr lang="en-US" sz="2100" b="1" dirty="0">
+                <a:solidFill>
+                  <a:srgbClr val="1A1A1A"/>
+                </a:solidFill>
+                <a:latin typeface="Cambria" pitchFamily="34" charset="0"/>
+                <a:ea typeface="Cambria" pitchFamily="34" charset="-122"/>
+                <a:cs typeface="Cambria" pitchFamily="34" charset="-120"/>
+              </a:rPr>
+              <a:t>Workshop</a:t>
+            </a:r>
+            <a:endParaRPr lang="en-US" sz="2100" dirty="0"/>
+          </a:p>
+        </p:txBody>
+      </p:sp>
+      <p:sp>
+        <p:nvSpPr>
+          <p:cNvPr id="11" name="Text 9"/>
+          <p:cNvSpPr/>
+          <p:nvPr/>
+        </p:nvSpPr>
+        <p:spPr>
+          <a:xfrm>
+            <a:off x="4892040" y="3977640"/>
+            <a:ext cx="2651760" cy="1371600"/>
+          </a:xfrm>
+          <a:prstGeom prst="rect">
+            <a:avLst/>
+          </a:prstGeom>
+          <a:noFill/>
+          <a:ln/>
+        </p:spPr>
+        <p:txBody>
+          <a:bodyPr wrap="square" rtlCol="0" anchor="t">
+            <a:spAutoFit/>
+          </a:bodyPr>
+          <a:lstStyle/>
+          <a:p>
+            <a:pPr indent="0" marL="0">
+              <a:lnSpc>
+                <a:spcPct val="115000"/>
+              </a:lnSpc>
+              <a:buNone/>
+            </a:pPr>
+            <a:r>
+              <a:rPr lang="en-US" sz="1500" dirty="0">
+                <a:solidFill>
+                  <a:srgbClr val="1A1A1A"/>
                 </a:solidFill>
                 <a:latin typeface="Calibri" pitchFamily="34" charset="0"/>
                 <a:ea typeface="Calibri" pitchFamily="34" charset="-122"/>
                 <a:cs typeface="Calibri" pitchFamily="34" charset="-120"/>
               </a:rPr>
-              <a:t>0:05</a:t>
-            </a:r>
-            <a:endParaRPr lang="en-US" sz="1100" dirty="0"/>
-          </a:p>
-        </p:txBody>
-      </p:sp>
-      <p:sp>
-        <p:nvSpPr>
-          <p:cNvPr id="8" name="Text 6"/>
-          <p:cNvSpPr/>
-          <p:nvPr/>
-        </p:nvSpPr>
-        <p:spPr>
-          <a:xfrm>
-            <a:off x="1691640" y="2002536"/>
-            <a:ext cx="9646920" cy="448056"/>
-          </a:xfrm>
-          <a:prstGeom prst="rect">
-            <a:avLst/>
-          </a:prstGeom>
-          <a:noFill/>
-          <a:ln/>
-        </p:spPr>
-        <p:txBody>
-          <a:bodyPr wrap="square" rtlCol="0" anchor="ctr">
+              <a:t>Build hands-on on your own data.</a:t>
+            </a:r>
+            <a:endParaRPr lang="en-US" sz="1500" dirty="0"/>
+          </a:p>
+        </p:txBody>
+      </p:sp>
+      <p:sp>
+        <p:nvSpPr>
+          <p:cNvPr id="12" name="Shape 10"/>
+          <p:cNvSpPr/>
+          <p:nvPr/>
+        </p:nvSpPr>
+        <p:spPr>
+          <a:xfrm>
+            <a:off x="8412480" y="2194560"/>
+            <a:ext cx="3383280" cy="3291840"/>
+          </a:xfrm>
+          <a:prstGeom prst="roundRect">
+            <a:avLst>
+              <a:gd name="adj" fmla="val 3333"/>
+            </a:avLst>
+          </a:prstGeom>
+          <a:solidFill>
+            <a:srgbClr val="F4EEE8"/>
+          </a:solidFill>
+          <a:ln/>
+        </p:spPr>
+      </p:sp>
+      <p:sp>
+        <p:nvSpPr>
+          <p:cNvPr id="13" name="Shape 11"/>
+          <p:cNvSpPr/>
+          <p:nvPr/>
+        </p:nvSpPr>
+        <p:spPr>
+          <a:xfrm>
+            <a:off x="8823960" y="2606040"/>
+            <a:ext cx="548640" cy="548640"/>
+          </a:xfrm>
+          <a:prstGeom prst="ellipse">
+            <a:avLst/>
+          </a:prstGeom>
+          <a:solidFill>
+            <a:srgbClr val="B9852F"/>
+          </a:solidFill>
+          <a:ln/>
+        </p:spPr>
+      </p:sp>
+      <p:sp>
+        <p:nvSpPr>
+          <p:cNvPr id="14" name="Text 12"/>
+          <p:cNvSpPr/>
+          <p:nvPr/>
+        </p:nvSpPr>
+        <p:spPr>
+          <a:xfrm>
+            <a:off x="8778240" y="3383280"/>
+            <a:ext cx="2651760" cy="548640"/>
+          </a:xfrm>
+          <a:prstGeom prst="rect">
+            <a:avLst/>
+          </a:prstGeom>
+          <a:noFill/>
+          <a:ln/>
+        </p:spPr>
+        <p:txBody>
+          <a:bodyPr wrap="square" rtlCol="0" anchor="ctr"/>
+          <a:lstStyle/>
+          <a:p>
+            <a:pPr indent="0" marL="0">
+              <a:buNone/>
+            </a:pPr>
+            <a:r>
+              <a:rPr lang="en-US" sz="2100" b="1" dirty="0">
+                <a:solidFill>
+                  <a:srgbClr val="1A1A1A"/>
+                </a:solidFill>
+                <a:latin typeface="Cambria" pitchFamily="34" charset="0"/>
+                <a:ea typeface="Cambria" pitchFamily="34" charset="-122"/>
+                <a:cs typeface="Cambria" pitchFamily="34" charset="-120"/>
+              </a:rPr>
+              <a:t>Discussion</a:t>
+            </a:r>
+            <a:endParaRPr lang="en-US" sz="2100" dirty="0"/>
+          </a:p>
+        </p:txBody>
+      </p:sp>
+      <p:sp>
+        <p:nvSpPr>
+          <p:cNvPr id="15" name="Text 13"/>
+          <p:cNvSpPr/>
+          <p:nvPr/>
+        </p:nvSpPr>
+        <p:spPr>
+          <a:xfrm>
+            <a:off x="8778240" y="3977640"/>
+            <a:ext cx="2651760" cy="1371600"/>
+          </a:xfrm>
+          <a:prstGeom prst="rect">
+            <a:avLst/>
+          </a:prstGeom>
+          <a:noFill/>
+          <a:ln/>
+        </p:spPr>
+        <p:txBody>
+          <a:bodyPr wrap="square" rtlCol="0" anchor="t">
             <a:spAutoFit/>
           </a:bodyPr>
           <a:lstStyle/>
           <a:p>
             <a:pPr indent="0" marL="0">
-              <a:buNone/>
-            </a:pPr>
-            <a:r>
-              <a:rPr lang="en-US" sz="1100" dirty="0">
+              <a:lnSpc>
+                <a:spcPct val="115000"/>
+              </a:lnSpc>
+              <a:buNone/>
+            </a:pPr>
+            <a:r>
+              <a:rPr lang="en-US" sz="1500" dirty="0">
                 <a:solidFill>
                   <a:srgbClr val="1A1A1A"/>
                 </a:solidFill>
@@ -4800,825 +5002,9 @@
                 <a:ea typeface="Calibri" pitchFamily="34" charset="-122"/>
                 <a:cs typeface="Calibri" pitchFamily="34" charset="-120"/>
               </a:rPr>
-              <a:t>The trial: claim, objection, re-run-without-fiction rebuttal, "interpret with care." One named choice is the chart: the hockey-stick shape depends on its y-axis and smoothing. The notebook pulls the paper's own phrases live from Google Books and probes the fiction objection with fiction-marker phrases.</a:t>
-            </a:r>
-            <a:endParaRPr lang="en-US" sz="1100" dirty="0"/>
-          </a:p>
-        </p:txBody>
-      </p:sp>
-      <p:sp>
-        <p:nvSpPr>
-          <p:cNvPr id="9" name="Shape 7"/>
-          <p:cNvSpPr/>
-          <p:nvPr/>
-        </p:nvSpPr>
-        <p:spPr>
-          <a:xfrm>
-            <a:off x="640080" y="2468880"/>
-            <a:ext cx="868680" cy="338328"/>
-          </a:xfrm>
-          <a:prstGeom prst="roundRect">
-            <a:avLst>
-              <a:gd name="adj" fmla="val 16216"/>
-            </a:avLst>
-          </a:prstGeom>
-          <a:solidFill>
-            <a:srgbClr val="7A3B2E"/>
-          </a:solidFill>
-          <a:ln/>
-        </p:spPr>
-      </p:sp>
-      <p:sp>
-        <p:nvSpPr>
-          <p:cNvPr id="10" name="Text 8"/>
-          <p:cNvSpPr/>
-          <p:nvPr/>
-        </p:nvSpPr>
-        <p:spPr>
-          <a:xfrm>
-            <a:off x="640080" y="2468880"/>
-            <a:ext cx="868680" cy="338328"/>
-          </a:xfrm>
-          <a:prstGeom prst="rect">
-            <a:avLst/>
-          </a:prstGeom>
-          <a:noFill/>
-          <a:ln/>
-        </p:spPr>
-        <p:txBody>
-          <a:bodyPr wrap="square" rtlCol="0" anchor="ctr"/>
-          <a:lstStyle/>
-          <a:p>
-            <a:pPr algn="ctr" indent="0" marL="0">
-              <a:buNone/>
-            </a:pPr>
-            <a:r>
-              <a:rPr lang="en-US" sz="1100" b="1" dirty="0">
-                <a:solidFill>
-                  <a:srgbClr val="FFFFFF"/>
-                </a:solidFill>
-                <a:latin typeface="Calibri" pitchFamily="34" charset="0"/>
-                <a:ea typeface="Calibri" pitchFamily="34" charset="-122"/>
-                <a:cs typeface="Calibri" pitchFamily="34" charset="-120"/>
-              </a:rPr>
-              <a:t>0:25</a:t>
-            </a:r>
-            <a:endParaRPr lang="en-US" sz="1100" dirty="0"/>
-          </a:p>
-        </p:txBody>
-      </p:sp>
-      <p:sp>
-        <p:nvSpPr>
-          <p:cNvPr id="11" name="Text 9"/>
-          <p:cNvSpPr/>
-          <p:nvPr/>
-        </p:nvSpPr>
-        <p:spPr>
-          <a:xfrm>
-            <a:off x="1691640" y="2450592"/>
-            <a:ext cx="9646920" cy="448056"/>
-          </a:xfrm>
-          <a:prstGeom prst="rect">
-            <a:avLst/>
-          </a:prstGeom>
-          <a:noFill/>
-          <a:ln/>
-        </p:spPr>
-        <p:txBody>
-          <a:bodyPr wrap="square" rtlCol="0" anchor="ctr">
-            <a:spAutoFit/>
-          </a:bodyPr>
-          <a:lstStyle/>
-          <a:p>
-            <a:pPr indent="0" marL="0">
-              <a:buNone/>
-            </a:pPr>
-            <a:r>
-              <a:rPr lang="en-US" sz="1100" dirty="0">
-                <a:solidFill>
-                  <a:srgbClr val="1A1A1A"/>
-                </a:solidFill>
-                <a:latin typeface="Calibri" pitchFamily="34" charset="0"/>
-                <a:ea typeface="Calibri" pitchFamily="34" charset="-122"/>
-                <a:cs typeface="Calibri" pitchFamily="34" charset="-120"/>
-              </a:rPr>
-              <a:t>A brief demonstration before the complications: the words one artist uses far more than everyone else, a signature vocabulary measured against a pop baseline.</a:t>
-            </a:r>
-            <a:endParaRPr lang="en-US" sz="1100" dirty="0"/>
-          </a:p>
-        </p:txBody>
-      </p:sp>
-      <p:sp>
-        <p:nvSpPr>
-          <p:cNvPr id="12" name="Shape 10"/>
-          <p:cNvSpPr/>
-          <p:nvPr/>
-        </p:nvSpPr>
-        <p:spPr>
-          <a:xfrm>
-            <a:off x="640080" y="2916936"/>
-            <a:ext cx="868680" cy="338328"/>
-          </a:xfrm>
-          <a:prstGeom prst="roundRect">
-            <a:avLst>
-              <a:gd name="adj" fmla="val 16216"/>
-            </a:avLst>
-          </a:prstGeom>
-          <a:solidFill>
-            <a:srgbClr val="7A3B2E"/>
-          </a:solidFill>
-          <a:ln/>
-        </p:spPr>
-      </p:sp>
-      <p:sp>
-        <p:nvSpPr>
-          <p:cNvPr id="13" name="Text 11"/>
-          <p:cNvSpPr/>
-          <p:nvPr/>
-        </p:nvSpPr>
-        <p:spPr>
-          <a:xfrm>
-            <a:off x="640080" y="2916936"/>
-            <a:ext cx="868680" cy="338328"/>
-          </a:xfrm>
-          <a:prstGeom prst="rect">
-            <a:avLst/>
-          </a:prstGeom>
-          <a:noFill/>
-          <a:ln/>
-        </p:spPr>
-        <p:txBody>
-          <a:bodyPr wrap="square" rtlCol="0" anchor="ctr"/>
-          <a:lstStyle/>
-          <a:p>
-            <a:pPr algn="ctr" indent="0" marL="0">
-              <a:buNone/>
-            </a:pPr>
-            <a:r>
-              <a:rPr lang="en-US" sz="1100" b="1" dirty="0">
-                <a:solidFill>
-                  <a:srgbClr val="FFFFFF"/>
-                </a:solidFill>
-                <a:latin typeface="Calibri" pitchFamily="34" charset="0"/>
-                <a:ea typeface="Calibri" pitchFamily="34" charset="-122"/>
-                <a:cs typeface="Calibri" pitchFamily="34" charset="-120"/>
-              </a:rPr>
-              <a:t>0:30</a:t>
-            </a:r>
-            <a:endParaRPr lang="en-US" sz="1100" dirty="0"/>
-          </a:p>
-        </p:txBody>
-      </p:sp>
-      <p:sp>
-        <p:nvSpPr>
-          <p:cNvPr id="14" name="Text 12"/>
-          <p:cNvSpPr/>
-          <p:nvPr/>
-        </p:nvSpPr>
-        <p:spPr>
-          <a:xfrm>
-            <a:off x="1691640" y="2898648"/>
-            <a:ext cx="9646920" cy="448056"/>
-          </a:xfrm>
-          <a:prstGeom prst="rect">
-            <a:avLst/>
-          </a:prstGeom>
-          <a:noFill/>
-          <a:ln/>
-        </p:spPr>
-        <p:txBody>
-          <a:bodyPr wrap="square" rtlCol="0" anchor="ctr">
-            <a:spAutoFit/>
-          </a:bodyPr>
-          <a:lstStyle/>
-          <a:p>
-            <a:pPr indent="0" marL="0">
-              <a:buNone/>
-            </a:pPr>
-            <a:r>
-              <a:rPr lang="en-US" sz="1100" dirty="0">
-                <a:solidFill>
-                  <a:srgbClr val="1A1A1A"/>
-                </a:solidFill>
-                <a:latin typeface="Calibri" pitchFamily="34" charset="0"/>
-                <a:ea typeface="Calibri" pitchFamily="34" charset="-122"/>
-                <a:cs typeface="Calibri" pitchFamily="34" charset="-120"/>
-              </a:rPr>
-              <a:t>Hand-built bag-of-words: two communities, highlighters, argue about merging run/running. Counting requires defining.</a:t>
-            </a:r>
-            <a:endParaRPr lang="en-US" sz="1100" dirty="0"/>
-          </a:p>
-        </p:txBody>
-      </p:sp>
-      <p:sp>
-        <p:nvSpPr>
-          <p:cNvPr id="15" name="Shape 13"/>
-          <p:cNvSpPr/>
-          <p:nvPr/>
-        </p:nvSpPr>
-        <p:spPr>
-          <a:xfrm>
-            <a:off x="640080" y="3364992"/>
-            <a:ext cx="868680" cy="338328"/>
-          </a:xfrm>
-          <a:prstGeom prst="roundRect">
-            <a:avLst>
-              <a:gd name="adj" fmla="val 16216"/>
-            </a:avLst>
-          </a:prstGeom>
-          <a:solidFill>
-            <a:srgbClr val="7A3B2E"/>
-          </a:solidFill>
-          <a:ln/>
-        </p:spPr>
-      </p:sp>
-      <p:sp>
-        <p:nvSpPr>
-          <p:cNvPr id="16" name="Text 14"/>
-          <p:cNvSpPr/>
-          <p:nvPr/>
-        </p:nvSpPr>
-        <p:spPr>
-          <a:xfrm>
-            <a:off x="640080" y="3364992"/>
-            <a:ext cx="868680" cy="338328"/>
-          </a:xfrm>
-          <a:prstGeom prst="rect">
-            <a:avLst/>
-          </a:prstGeom>
-          <a:noFill/>
-          <a:ln/>
-        </p:spPr>
-        <p:txBody>
-          <a:bodyPr wrap="square" rtlCol="0" anchor="ctr"/>
-          <a:lstStyle/>
-          <a:p>
-            <a:pPr algn="ctr" indent="0" marL="0">
-              <a:buNone/>
-            </a:pPr>
-            <a:r>
-              <a:rPr lang="en-US" sz="1100" b="1" dirty="0">
-                <a:solidFill>
-                  <a:srgbClr val="FFFFFF"/>
-                </a:solidFill>
-                <a:latin typeface="Calibri" pitchFamily="34" charset="0"/>
-                <a:ea typeface="Calibri" pitchFamily="34" charset="-122"/>
-                <a:cs typeface="Calibri" pitchFamily="34" charset="-120"/>
-              </a:rPr>
-              <a:t>0:55</a:t>
-            </a:r>
-            <a:endParaRPr lang="en-US" sz="1100" dirty="0"/>
-          </a:p>
-        </p:txBody>
-      </p:sp>
-      <p:sp>
-        <p:nvSpPr>
-          <p:cNvPr id="17" name="Text 15"/>
-          <p:cNvSpPr/>
-          <p:nvPr/>
-        </p:nvSpPr>
-        <p:spPr>
-          <a:xfrm>
-            <a:off x="1691640" y="3346704"/>
-            <a:ext cx="9646920" cy="448056"/>
-          </a:xfrm>
-          <a:prstGeom prst="rect">
-            <a:avLst/>
-          </a:prstGeom>
-          <a:noFill/>
-          <a:ln/>
-        </p:spPr>
-        <p:txBody>
-          <a:bodyPr wrap="square" rtlCol="0" anchor="ctr">
-            <a:spAutoFit/>
-          </a:bodyPr>
-          <a:lstStyle/>
-          <a:p>
-            <a:pPr indent="0" marL="0">
-              <a:buNone/>
-            </a:pPr>
-            <a:r>
-              <a:rPr lang="en-US" sz="1100" dirty="0">
-                <a:solidFill>
-                  <a:srgbClr val="1A1A1A"/>
-                </a:solidFill>
-                <a:latin typeface="Calibri" pitchFamily="34" charset="0"/>
-                <a:ea typeface="Calibri" pitchFamily="34" charset="-122"/>
-                <a:cs typeface="Calibri" pitchFamily="34" charset="-120"/>
-              </a:rPr>
-              <a:t>What counts as a word? Paste a sentence into two tokenizer playgrounds and watch it shatter differently. Models see tokens, not words. Then the standard tools for the run/running decision: NLTK stemming and lemmatization, a real stop list, and Zipf's law, the curve that explains why stop lists exist.</a:t>
-            </a:r>
-            <a:endParaRPr lang="en-US" sz="1100" dirty="0"/>
-          </a:p>
-        </p:txBody>
-      </p:sp>
-      <p:sp>
-        <p:nvSpPr>
-          <p:cNvPr id="18" name="Shape 16"/>
-          <p:cNvSpPr/>
-          <p:nvPr/>
-        </p:nvSpPr>
-        <p:spPr>
-          <a:xfrm>
-            <a:off x="640080" y="3813048"/>
-            <a:ext cx="868680" cy="338328"/>
-          </a:xfrm>
-          <a:prstGeom prst="roundRect">
-            <a:avLst>
-              <a:gd name="adj" fmla="val 16216"/>
-            </a:avLst>
-          </a:prstGeom>
-          <a:solidFill>
-            <a:srgbClr val="7A3B2E"/>
-          </a:solidFill>
-          <a:ln/>
-        </p:spPr>
-      </p:sp>
-      <p:sp>
-        <p:nvSpPr>
-          <p:cNvPr id="19" name="Text 17"/>
-          <p:cNvSpPr/>
-          <p:nvPr/>
-        </p:nvSpPr>
-        <p:spPr>
-          <a:xfrm>
-            <a:off x="640080" y="3813048"/>
-            <a:ext cx="868680" cy="338328"/>
-          </a:xfrm>
-          <a:prstGeom prst="rect">
-            <a:avLst/>
-          </a:prstGeom>
-          <a:noFill/>
-          <a:ln/>
-        </p:spPr>
-        <p:txBody>
-          <a:bodyPr wrap="square" rtlCol="0" anchor="ctr"/>
-          <a:lstStyle/>
-          <a:p>
-            <a:pPr algn="ctr" indent="0" marL="0">
-              <a:buNone/>
-            </a:pPr>
-            <a:r>
-              <a:rPr lang="en-US" sz="1100" b="1" dirty="0">
-                <a:solidFill>
-                  <a:srgbClr val="FFFFFF"/>
-                </a:solidFill>
-                <a:latin typeface="Calibri" pitchFamily="34" charset="0"/>
-                <a:ea typeface="Calibri" pitchFamily="34" charset="-122"/>
-                <a:cs typeface="Calibri" pitchFamily="34" charset="-120"/>
-              </a:rPr>
-              <a:t>1:05</a:t>
-            </a:r>
-            <a:endParaRPr lang="en-US" sz="1100" dirty="0"/>
-          </a:p>
-        </p:txBody>
-      </p:sp>
-      <p:sp>
-        <p:nvSpPr>
-          <p:cNvPr id="20" name="Text 18"/>
-          <p:cNvSpPr/>
-          <p:nvPr/>
-        </p:nvSpPr>
-        <p:spPr>
-          <a:xfrm>
-            <a:off x="1691640" y="3794760"/>
-            <a:ext cx="9646920" cy="448056"/>
-          </a:xfrm>
-          <a:prstGeom prst="rect">
-            <a:avLst/>
-          </a:prstGeom>
-          <a:noFill/>
-          <a:ln/>
-        </p:spPr>
-        <p:txBody>
-          <a:bodyPr wrap="square" rtlCol="0" anchor="ctr">
-            <a:spAutoFit/>
-          </a:bodyPr>
-          <a:lstStyle/>
-          <a:p>
-            <a:pPr indent="0" marL="0">
-              <a:buNone/>
-            </a:pPr>
-            <a:r>
-              <a:rPr lang="en-US" sz="1100" dirty="0">
-                <a:solidFill>
-                  <a:srgbClr val="1A1A1A"/>
-                </a:solidFill>
-                <a:latin typeface="Calibri" pitchFamily="34" charset="0"/>
-                <a:ea typeface="Calibri" pitchFamily="34" charset="-122"/>
-                <a:cs typeface="Calibri" pitchFamily="34" charset="-120"/>
-              </a:rPr>
-              <a:t>Break</a:t>
-            </a:r>
-            <a:endParaRPr lang="en-US" sz="1100" dirty="0"/>
-          </a:p>
-        </p:txBody>
-      </p:sp>
-      <p:sp>
-        <p:nvSpPr>
-          <p:cNvPr id="21" name="Shape 19"/>
-          <p:cNvSpPr/>
-          <p:nvPr/>
-        </p:nvSpPr>
-        <p:spPr>
-          <a:xfrm>
-            <a:off x="640080" y="4261104"/>
-            <a:ext cx="868680" cy="338328"/>
-          </a:xfrm>
-          <a:prstGeom prst="roundRect">
-            <a:avLst>
-              <a:gd name="adj" fmla="val 16216"/>
-            </a:avLst>
-          </a:prstGeom>
-          <a:solidFill>
-            <a:srgbClr val="7A3B2E"/>
-          </a:solidFill>
-          <a:ln/>
-        </p:spPr>
-      </p:sp>
-      <p:sp>
-        <p:nvSpPr>
-          <p:cNvPr id="22" name="Text 20"/>
-          <p:cNvSpPr/>
-          <p:nvPr/>
-        </p:nvSpPr>
-        <p:spPr>
-          <a:xfrm>
-            <a:off x="640080" y="4261104"/>
-            <a:ext cx="868680" cy="338328"/>
-          </a:xfrm>
-          <a:prstGeom prst="rect">
-            <a:avLst/>
-          </a:prstGeom>
-          <a:noFill/>
-          <a:ln/>
-        </p:spPr>
-        <p:txBody>
-          <a:bodyPr wrap="square" rtlCol="0" anchor="ctr"/>
-          <a:lstStyle/>
-          <a:p>
-            <a:pPr algn="ctr" indent="0" marL="0">
-              <a:buNone/>
-            </a:pPr>
-            <a:r>
-              <a:rPr lang="en-US" sz="1100" b="1" dirty="0">
-                <a:solidFill>
-                  <a:srgbClr val="FFFFFF"/>
-                </a:solidFill>
-                <a:latin typeface="Calibri" pitchFamily="34" charset="0"/>
-                <a:ea typeface="Calibri" pitchFamily="34" charset="-122"/>
-                <a:cs typeface="Calibri" pitchFamily="34" charset="-120"/>
-              </a:rPr>
-              <a:t>1:15</a:t>
-            </a:r>
-            <a:endParaRPr lang="en-US" sz="1100" dirty="0"/>
-          </a:p>
-        </p:txBody>
-      </p:sp>
-      <p:sp>
-        <p:nvSpPr>
-          <p:cNvPr id="23" name="Text 21"/>
-          <p:cNvSpPr/>
-          <p:nvPr/>
-        </p:nvSpPr>
-        <p:spPr>
-          <a:xfrm>
-            <a:off x="1691640" y="4242816"/>
-            <a:ext cx="9646920" cy="448056"/>
-          </a:xfrm>
-          <a:prstGeom prst="rect">
-            <a:avLst/>
-          </a:prstGeom>
-          <a:noFill/>
-          <a:ln/>
-        </p:spPr>
-        <p:txBody>
-          <a:bodyPr wrap="square" rtlCol="0" anchor="ctr">
-            <a:spAutoFit/>
-          </a:bodyPr>
-          <a:lstStyle/>
-          <a:p>
-            <a:pPr indent="0" marL="0">
-              <a:buNone/>
-            </a:pPr>
-            <a:r>
-              <a:rPr lang="en-US" sz="1100" dirty="0">
-                <a:solidFill>
-                  <a:srgbClr val="1A1A1A"/>
-                </a:solidFill>
-                <a:latin typeface="Calibri" pitchFamily="34" charset="0"/>
-                <a:ea typeface="Calibri" pitchFamily="34" charset="-122"/>
-                <a:cs typeface="Calibri" pitchFamily="34" charset="-120"/>
-              </a:rPr>
-              <a:t>N-grams and statistics, hands-on: bigrams across three corpora, distributions and mean-versus-median on real counts, rates per 1,000 words, z-scores as the common scale. Then tf-idf at two scales, single comments as documents and twelve whole subreddits as documents, each community sight-read from its distinctive words (cpu and coolers, roth and rates, puts and bears), and k-means on 360 live Reddit comments from three subreddits: raw counts give a blob, tf-idf plus 60 dimensions sorts six in seven comments with their community. The representation, not the algorithm, does the work. Closer: the same k-means on twenty Met paintings counted into 27 color buckets sorts portraits from landscapes, three in four.</a:t>
-            </a:r>
-            <a:endParaRPr lang="en-US" sz="1100" dirty="0"/>
-          </a:p>
-        </p:txBody>
-      </p:sp>
-      <p:sp>
-        <p:nvSpPr>
-          <p:cNvPr id="24" name="Shape 22"/>
-          <p:cNvSpPr/>
-          <p:nvPr/>
-        </p:nvSpPr>
-        <p:spPr>
-          <a:xfrm>
-            <a:off x="640080" y="4709160"/>
-            <a:ext cx="868680" cy="338328"/>
-          </a:xfrm>
-          <a:prstGeom prst="roundRect">
-            <a:avLst>
-              <a:gd name="adj" fmla="val 16216"/>
-            </a:avLst>
-          </a:prstGeom>
-          <a:solidFill>
-            <a:srgbClr val="7A3B2E"/>
-          </a:solidFill>
-          <a:ln/>
-        </p:spPr>
-      </p:sp>
-      <p:sp>
-        <p:nvSpPr>
-          <p:cNvPr id="25" name="Text 23"/>
-          <p:cNvSpPr/>
-          <p:nvPr/>
-        </p:nvSpPr>
-        <p:spPr>
-          <a:xfrm>
-            <a:off x="640080" y="4709160"/>
-            <a:ext cx="868680" cy="338328"/>
-          </a:xfrm>
-          <a:prstGeom prst="rect">
-            <a:avLst/>
-          </a:prstGeom>
-          <a:noFill/>
-          <a:ln/>
-        </p:spPr>
-        <p:txBody>
-          <a:bodyPr wrap="square" rtlCol="0" anchor="ctr"/>
-          <a:lstStyle/>
-          <a:p>
-            <a:pPr algn="ctr" indent="0" marL="0">
-              <a:buNone/>
-            </a:pPr>
-            <a:r>
-              <a:rPr lang="en-US" sz="1100" b="1" dirty="0">
-                <a:solidFill>
-                  <a:srgbClr val="FFFFFF"/>
-                </a:solidFill>
-                <a:latin typeface="Calibri" pitchFamily="34" charset="0"/>
-                <a:ea typeface="Calibri" pitchFamily="34" charset="-122"/>
-                <a:cs typeface="Calibri" pitchFamily="34" charset="-120"/>
-              </a:rPr>
-              <a:t>1:30</a:t>
-            </a:r>
-            <a:endParaRPr lang="en-US" sz="1100" dirty="0"/>
-          </a:p>
-        </p:txBody>
-      </p:sp>
-      <p:sp>
-        <p:nvSpPr>
-          <p:cNvPr id="26" name="Text 24"/>
-          <p:cNvSpPr/>
-          <p:nvPr/>
-        </p:nvSpPr>
-        <p:spPr>
-          <a:xfrm>
-            <a:off x="1691640" y="4690872"/>
-            <a:ext cx="9646920" cy="448056"/>
-          </a:xfrm>
-          <a:prstGeom prst="rect">
-            <a:avLst/>
-          </a:prstGeom>
-          <a:noFill/>
-          <a:ln/>
-        </p:spPr>
-        <p:txBody>
-          <a:bodyPr wrap="square" rtlCol="0" anchor="ctr">
-            <a:spAutoFit/>
-          </a:bodyPr>
-          <a:lstStyle/>
-          <a:p>
-            <a:pPr indent="0" marL="0">
-              <a:buNone/>
-            </a:pPr>
-            <a:r>
-              <a:rPr lang="en-US" sz="1100" dirty="0">
-                <a:solidFill>
-                  <a:srgbClr val="1A1A1A"/>
-                </a:solidFill>
-                <a:latin typeface="Calibri" pitchFamily="34" charset="0"/>
-                <a:ea typeface="Calibri" pitchFamily="34" charset="-122"/>
-                <a:cs typeface="Calibri" pitchFamily="34" charset="-120"/>
-              </a:rPr>
-              <a:t>Keyness, the She Giggles, He Gallops move: a log-odds ratio between two corpora finds the words one voice uses far more than a baseline, exactly the method behind Week 1's featured piece. The corpus pair is a choice too: artist vs. pop, lyrics vs. subreddit vs. novel.</a:t>
-            </a:r>
-            <a:endParaRPr lang="en-US" sz="1100" dirty="0"/>
-          </a:p>
-        </p:txBody>
-      </p:sp>
-      <p:sp>
-        <p:nvSpPr>
-          <p:cNvPr id="27" name="Shape 25"/>
-          <p:cNvSpPr/>
-          <p:nvPr/>
-        </p:nvSpPr>
-        <p:spPr>
-          <a:xfrm>
-            <a:off x="640080" y="5157216"/>
-            <a:ext cx="868680" cy="338328"/>
-          </a:xfrm>
-          <a:prstGeom prst="roundRect">
-            <a:avLst>
-              <a:gd name="adj" fmla="val 16216"/>
-            </a:avLst>
-          </a:prstGeom>
-          <a:solidFill>
-            <a:srgbClr val="7A3B2E"/>
-          </a:solidFill>
-          <a:ln/>
-        </p:spPr>
-      </p:sp>
-      <p:sp>
-        <p:nvSpPr>
-          <p:cNvPr id="28" name="Text 26"/>
-          <p:cNvSpPr/>
-          <p:nvPr/>
-        </p:nvSpPr>
-        <p:spPr>
-          <a:xfrm>
-            <a:off x="640080" y="5157216"/>
-            <a:ext cx="868680" cy="338328"/>
-          </a:xfrm>
-          <a:prstGeom prst="rect">
-            <a:avLst/>
-          </a:prstGeom>
-          <a:noFill/>
-          <a:ln/>
-        </p:spPr>
-        <p:txBody>
-          <a:bodyPr wrap="square" rtlCol="0" anchor="ctr"/>
-          <a:lstStyle/>
-          <a:p>
-            <a:pPr algn="ctr" indent="0" marL="0">
-              <a:buNone/>
-            </a:pPr>
-            <a:r>
-              <a:rPr lang="en-US" sz="1100" b="1" dirty="0">
-                <a:solidFill>
-                  <a:srgbClr val="FFFFFF"/>
-                </a:solidFill>
-                <a:latin typeface="Calibri" pitchFamily="34" charset="0"/>
-                <a:ea typeface="Calibri" pitchFamily="34" charset="-122"/>
-                <a:cs typeface="Calibri" pitchFamily="34" charset="-120"/>
-              </a:rPr>
-              <a:t>1:42</a:t>
-            </a:r>
-            <a:endParaRPr lang="en-US" sz="1100" dirty="0"/>
-          </a:p>
-        </p:txBody>
-      </p:sp>
-      <p:sp>
-        <p:nvSpPr>
-          <p:cNvPr id="29" name="Text 27"/>
-          <p:cNvSpPr/>
-          <p:nvPr/>
-        </p:nvSpPr>
-        <p:spPr>
-          <a:xfrm>
-            <a:off x="1691640" y="5138928"/>
-            <a:ext cx="9646920" cy="448056"/>
-          </a:xfrm>
-          <a:prstGeom prst="rect">
-            <a:avLst/>
-          </a:prstGeom>
-          <a:noFill/>
-          <a:ln/>
-        </p:spPr>
-        <p:txBody>
-          <a:bodyPr wrap="square" rtlCol="0" anchor="ctr">
-            <a:spAutoFit/>
-          </a:bodyPr>
-          <a:lstStyle/>
-          <a:p>
-            <a:pPr indent="0" marL="0">
-              <a:buNone/>
-            </a:pPr>
-            <a:r>
-              <a:rPr lang="en-US" sz="1100" dirty="0">
-                <a:solidFill>
-                  <a:srgbClr val="1A1A1A"/>
-                </a:solidFill>
-                <a:latin typeface="Calibri" pitchFamily="34" charset="0"/>
-                <a:ea typeface="Calibri" pitchFamily="34" charset="-122"/>
-                <a:cs typeface="Calibri" pitchFamily="34" charset="-120"/>
-              </a:rPr>
-              <a:t>Is the difference real? The shuffle test names the p-value, then the three traps: selection (testing the word you picked for its extremity), multiplicity (random halves of one community yield a convincing fake vocabulary; ~75 of 1,500 words pass by luck), and size (significant is not big; report effect and p together, with a bootstrap interval for the size).</a:t>
-            </a:r>
-            <a:endParaRPr lang="en-US" sz="1100" dirty="0"/>
-          </a:p>
-        </p:txBody>
-      </p:sp>
-      <p:sp>
-        <p:nvSpPr>
-          <p:cNvPr id="30" name="Shape 28"/>
-          <p:cNvSpPr/>
-          <p:nvPr/>
-        </p:nvSpPr>
-        <p:spPr>
-          <a:xfrm>
-            <a:off x="640080" y="5605272"/>
-            <a:ext cx="868680" cy="338328"/>
-          </a:xfrm>
-          <a:prstGeom prst="roundRect">
-            <a:avLst>
-              <a:gd name="adj" fmla="val 16216"/>
-            </a:avLst>
-          </a:prstGeom>
-          <a:solidFill>
-            <a:srgbClr val="7A3B2E"/>
-          </a:solidFill>
-          <a:ln/>
-        </p:spPr>
-      </p:sp>
-      <p:sp>
-        <p:nvSpPr>
-          <p:cNvPr id="31" name="Text 29"/>
-          <p:cNvSpPr/>
-          <p:nvPr/>
-        </p:nvSpPr>
-        <p:spPr>
-          <a:xfrm>
-            <a:off x="640080" y="5605272"/>
-            <a:ext cx="868680" cy="338328"/>
-          </a:xfrm>
-          <a:prstGeom prst="rect">
-            <a:avLst/>
-          </a:prstGeom>
-          <a:noFill/>
-          <a:ln/>
-        </p:spPr>
-        <p:txBody>
-          <a:bodyPr wrap="square" rtlCol="0" anchor="ctr"/>
-          <a:lstStyle/>
-          <a:p>
-            <a:pPr algn="ctr" indent="0" marL="0">
-              <a:buNone/>
-            </a:pPr>
-            <a:r>
-              <a:rPr lang="en-US" sz="1100" b="1" dirty="0">
-                <a:solidFill>
-                  <a:srgbClr val="FFFFFF"/>
-                </a:solidFill>
-                <a:latin typeface="Calibri" pitchFamily="34" charset="0"/>
-                <a:ea typeface="Calibri" pitchFamily="34" charset="-122"/>
-                <a:cs typeface="Calibri" pitchFamily="34" charset="-120"/>
-              </a:rPr>
-              <a:t>1:50</a:t>
-            </a:r>
-            <a:endParaRPr lang="en-US" sz="1100" dirty="0"/>
-          </a:p>
-        </p:txBody>
-      </p:sp>
-      <p:sp>
-        <p:nvSpPr>
-          <p:cNvPr id="32" name="Text 30"/>
-          <p:cNvSpPr/>
-          <p:nvPr/>
-        </p:nvSpPr>
-        <p:spPr>
-          <a:xfrm>
-            <a:off x="1691640" y="5586984"/>
-            <a:ext cx="9646920" cy="448056"/>
-          </a:xfrm>
-          <a:prstGeom prst="rect">
-            <a:avLst/>
-          </a:prstGeom>
-          <a:noFill/>
-          <a:ln/>
-        </p:spPr>
-        <p:txBody>
-          <a:bodyPr wrap="square" rtlCol="0" anchor="ctr">
-            <a:spAutoFit/>
-          </a:bodyPr>
-          <a:lstStyle/>
-          <a:p>
-            <a:pPr indent="0" marL="0">
-              <a:buNone/>
-            </a:pPr>
-            <a:r>
-              <a:rPr lang="en-US" sz="1100" dirty="0">
-                <a:solidFill>
-                  <a:srgbClr val="1A1A1A"/>
-                </a:solidFill>
-                <a:latin typeface="Calibri" pitchFamily="34" charset="0"/>
-                <a:ea typeface="Calibri" pitchFamily="34" charset="-122"/>
-                <a:cs typeface="Calibri" pitchFamily="34" charset="-120"/>
-              </a:rPr>
-              <a:t>Gemini-free check and check-out.</a:t>
-            </a:r>
-            <a:endParaRPr lang="en-US" sz="1100" dirty="0"/>
+              <a:t>Interrogate the study, debate it, or critique each other's work.</a:t>
+            </a:r>
+            <a:endParaRPr lang="en-US" sz="1500" dirty="0"/>
           </a:p>
         </p:txBody>
       </p:sp>
@@ -5687,7 +5073,7 @@
                 <a:ea typeface="Cambria" pitchFamily="34" charset="-122"/>
                 <a:cs typeface="Cambria" pitchFamily="34" charset="-120"/>
               </a:rPr>
-              <a:t>Reading &amp; homework</a:t>
+              <a:t>The session</a:t>
             </a:r>
             <a:endParaRPr lang="en-US" sz="3000" dirty="0"/>
           </a:p>
@@ -5701,11 +5087,13 @@
         </p:nvSpPr>
         <p:spPr>
           <a:xfrm>
-            <a:off x="640080" y="1673352"/>
-            <a:ext cx="219456" cy="219456"/>
-          </a:xfrm>
-          <a:prstGeom prst="ellipse">
-            <a:avLst/>
+            <a:off x="640080" y="1572768"/>
+            <a:ext cx="868680" cy="338328"/>
+          </a:xfrm>
+          <a:prstGeom prst="roundRect">
+            <a:avLst>
+              <a:gd name="adj" fmla="val 16216"/>
+            </a:avLst>
           </a:prstGeom>
           <a:solidFill>
             <a:srgbClr val="7A3B2E"/>
@@ -5721,8 +5109,8 @@
         </p:nvSpPr>
         <p:spPr>
           <a:xfrm>
-            <a:off x="1051560" y="1600200"/>
-            <a:ext cx="10424160" cy="365760"/>
+            <a:off x="640080" y="1572768"/>
+            <a:ext cx="868680" cy="338328"/>
           </a:xfrm>
           <a:prstGeom prst="rect">
             <a:avLst/>
@@ -5734,21 +5122,21 @@
           <a:bodyPr wrap="square" rtlCol="0" anchor="ctr"/>
           <a:lstStyle/>
           <a:p>
-            <a:pPr indent="0" marL="0">
-              <a:buNone/>
-            </a:pPr>
-            <a:r>
-              <a:rPr lang="en-US" sz="1500" b="1" dirty="0">
-                <a:solidFill>
-                  <a:srgbClr val="7A3B2E"/>
+            <a:pPr algn="ctr" indent="0" marL="0">
+              <a:buNone/>
+            </a:pPr>
+            <a:r>
+              <a:rPr lang="en-US" sz="1100" b="1" dirty="0">
+                <a:solidFill>
+                  <a:srgbClr val="FFFFFF"/>
                 </a:solidFill>
                 <a:latin typeface="Calibri" pitchFamily="34" charset="0"/>
                 <a:ea typeface="Calibri" pitchFamily="34" charset="-122"/>
                 <a:cs typeface="Calibri" pitchFamily="34" charset="-120"/>
               </a:rPr>
-              <a:t>Reading</a:t>
-            </a:r>
-            <a:endParaRPr lang="en-US" sz="1500" dirty="0"/>
+              <a:t>0:00</a:t>
+            </a:r>
+            <a:endParaRPr lang="en-US" sz="1100" dirty="0"/>
           </a:p>
         </p:txBody>
       </p:sp>
@@ -5760,17 +5148,17 @@
         </p:nvSpPr>
         <p:spPr>
           <a:xfrm>
-            <a:off x="1051560" y="1984248"/>
-            <a:ext cx="10424160" cy="731520"/>
-          </a:xfrm>
-          <a:prstGeom prst="rect">
-            <a:avLst/>
-          </a:prstGeom>
-          <a:noFill/>
-          <a:ln/>
-        </p:spPr>
-        <p:txBody>
-          <a:bodyPr wrap="square" rtlCol="0" anchor="t">
+            <a:off x="1691640" y="1554480"/>
+            <a:ext cx="9646920" cy="448056"/>
+          </a:xfrm>
+          <a:prstGeom prst="rect">
+            <a:avLst/>
+          </a:prstGeom>
+          <a:noFill/>
+          <a:ln/>
+        </p:spPr>
+        <p:txBody>
+          <a:bodyPr wrap="square" rtlCol="0" anchor="ctr">
             <a:spAutoFit/>
           </a:bodyPr>
           <a:lstStyle/>
@@ -5779,7 +5167,7 @@
               <a:buNone/>
             </a:pPr>
             <a:r>
-              <a:rPr lang="en-US" sz="1400" dirty="0">
+              <a:rPr lang="en-US" sz="1100" dirty="0">
                 <a:solidFill>
                   <a:srgbClr val="1A1A1A"/>
                 </a:solidFill>
@@ -5787,9 +5175,9 @@
                 <a:ea typeface="Calibri" pitchFamily="34" charset="-122"/>
                 <a:cs typeface="Calibri" pitchFamily="34" charset="-120"/>
               </a:rPr>
-              <a:t>Wolfram, What Is ChatGPT Doing (opening sections only)</a:t>
-            </a:r>
-            <a:endParaRPr lang="en-US" sz="1400" dirty="0"/>
+              <a:t>Warm-up: favorite Pudding pieces from the sketch, what did yours count, and one choice its makers made. Then retrieval.</a:t>
+            </a:r>
+            <a:endParaRPr lang="en-US" sz="1100" dirty="0"/>
           </a:p>
         </p:txBody>
       </p:sp>
@@ -5801,14 +5189,16 @@
         </p:nvSpPr>
         <p:spPr>
           <a:xfrm>
-            <a:off x="640080" y="2633472"/>
-            <a:ext cx="219456" cy="219456"/>
-          </a:xfrm>
-          <a:prstGeom prst="ellipse">
-            <a:avLst/>
-          </a:prstGeom>
-          <a:solidFill>
-            <a:srgbClr val="3F6F5F"/>
+            <a:off x="640080" y="2020824"/>
+            <a:ext cx="868680" cy="338328"/>
+          </a:xfrm>
+          <a:prstGeom prst="roundRect">
+            <a:avLst>
+              <a:gd name="adj" fmla="val 16216"/>
+            </a:avLst>
+          </a:prstGeom>
+          <a:solidFill>
+            <a:srgbClr val="7A3B2E"/>
           </a:solidFill>
           <a:ln/>
         </p:spPr>
@@ -5821,8 +5211,8 @@
         </p:nvSpPr>
         <p:spPr>
           <a:xfrm>
-            <a:off x="1051560" y="2560320"/>
-            <a:ext cx="10424160" cy="365760"/>
+            <a:off x="640080" y="2020824"/>
+            <a:ext cx="868680" cy="338328"/>
           </a:xfrm>
           <a:prstGeom prst="rect">
             <a:avLst/>
@@ -5834,21 +5224,21 @@
           <a:bodyPr wrap="square" rtlCol="0" anchor="ctr"/>
           <a:lstStyle/>
           <a:p>
-            <a:pPr indent="0" marL="0">
-              <a:buNone/>
-            </a:pPr>
-            <a:r>
-              <a:rPr lang="en-US" sz="1500" b="1" dirty="0">
-                <a:solidFill>
-                  <a:srgbClr val="3F6F5F"/>
+            <a:pPr algn="ctr" indent="0" marL="0">
+              <a:buNone/>
+            </a:pPr>
+            <a:r>
+              <a:rPr lang="en-US" sz="1100" b="1" dirty="0">
+                <a:solidFill>
+                  <a:srgbClr val="FFFFFF"/>
                 </a:solidFill>
                 <a:latin typeface="Calibri" pitchFamily="34" charset="0"/>
                 <a:ea typeface="Calibri" pitchFamily="34" charset="-122"/>
                 <a:cs typeface="Calibri" pitchFamily="34" charset="-120"/>
               </a:rPr>
-              <a:t>Supplement</a:t>
-            </a:r>
-            <a:endParaRPr lang="en-US" sz="1500" dirty="0"/>
+              <a:t>0:05</a:t>
+            </a:r>
+            <a:endParaRPr lang="en-US" sz="1100" dirty="0"/>
           </a:p>
         </p:txBody>
       </p:sp>
@@ -5860,17 +5250,17 @@
         </p:nvSpPr>
         <p:spPr>
           <a:xfrm>
-            <a:off x="1051560" y="2944368"/>
-            <a:ext cx="10424160" cy="731520"/>
-          </a:xfrm>
-          <a:prstGeom prst="rect">
-            <a:avLst/>
-          </a:prstGeom>
-          <a:noFill/>
-          <a:ln/>
-        </p:spPr>
-        <p:txBody>
-          <a:bodyPr wrap="square" rtlCol="0" anchor="t">
+            <a:off x="1691640" y="2002536"/>
+            <a:ext cx="9646920" cy="448056"/>
+          </a:xfrm>
+          <a:prstGeom prst="rect">
+            <a:avLst/>
+          </a:prstGeom>
+          <a:noFill/>
+          <a:ln/>
+        </p:spPr>
+        <p:txBody>
+          <a:bodyPr wrap="square" rtlCol="0" anchor="ctr">
             <a:spAutoFit/>
           </a:bodyPr>
           <a:lstStyle/>
@@ -5879,7 +5269,7 @@
               <a:buNone/>
             </a:pPr>
             <a:r>
-              <a:rPr lang="en-US" sz="1400" dirty="0">
+              <a:rPr lang="en-US" sz="1100" dirty="0">
                 <a:solidFill>
                   <a:srgbClr val="1A1A1A"/>
                 </a:solidFill>
@@ -5887,9 +5277,9 @@
                 <a:ea typeface="Calibri" pitchFamily="34" charset="-122"/>
                 <a:cs typeface="Calibri" pitchFamily="34" charset="-120"/>
               </a:rPr>
-              <a:t>Zipf's law, the straight line in every text</a:t>
-            </a:r>
-            <a:endParaRPr lang="en-US" sz="1400" dirty="0"/>
+              <a:t>The trial: claim, objection, re-run-without-fiction rebuttal, "interpret with care." One named choice is the chart: the hockey-stick shape depends on its y-axis and smoothing. The notebook pulls the paper's own phrases live from Google Books and probes the fiction objection with fiction-marker phrases.</a:t>
+            </a:r>
+            <a:endParaRPr lang="en-US" sz="1100" dirty="0"/>
           </a:p>
         </p:txBody>
       </p:sp>
@@ -5901,14 +5291,16 @@
         </p:nvSpPr>
         <p:spPr>
           <a:xfrm>
-            <a:off x="640080" y="3593592"/>
-            <a:ext cx="219456" cy="219456"/>
-          </a:xfrm>
-          <a:prstGeom prst="ellipse">
-            <a:avLst/>
-          </a:prstGeom>
-          <a:solidFill>
-            <a:srgbClr val="B9852F"/>
+            <a:off x="640080" y="2468880"/>
+            <a:ext cx="868680" cy="338328"/>
+          </a:xfrm>
+          <a:prstGeom prst="roundRect">
+            <a:avLst>
+              <a:gd name="adj" fmla="val 16216"/>
+            </a:avLst>
+          </a:prstGeom>
+          <a:solidFill>
+            <a:srgbClr val="7A3B2E"/>
           </a:solidFill>
           <a:ln/>
         </p:spPr>
@@ -5921,8 +5313,8 @@
         </p:nvSpPr>
         <p:spPr>
           <a:xfrm>
-            <a:off x="1051560" y="3520440"/>
-            <a:ext cx="10424160" cy="365760"/>
+            <a:off x="640080" y="2468880"/>
+            <a:ext cx="868680" cy="338328"/>
           </a:xfrm>
           <a:prstGeom prst="rect">
             <a:avLst/>
@@ -5934,21 +5326,21 @@
           <a:bodyPr wrap="square" rtlCol="0" anchor="ctr"/>
           <a:lstStyle/>
           <a:p>
-            <a:pPr indent="0" marL="0">
-              <a:buNone/>
-            </a:pPr>
-            <a:r>
-              <a:rPr lang="en-US" sz="1500" b="1" dirty="0">
-                <a:solidFill>
-                  <a:srgbClr val="B9852F"/>
+            <a:pPr algn="ctr" indent="0" marL="0">
+              <a:buNone/>
+            </a:pPr>
+            <a:r>
+              <a:rPr lang="en-US" sz="1100" b="1" dirty="0">
+                <a:solidFill>
+                  <a:srgbClr val="FFFFFF"/>
                 </a:solidFill>
                 <a:latin typeface="Calibri" pitchFamily="34" charset="0"/>
                 <a:ea typeface="Calibri" pitchFamily="34" charset="-122"/>
                 <a:cs typeface="Calibri" pitchFamily="34" charset="-120"/>
               </a:rPr>
-              <a:t>Deeper (optional)</a:t>
-            </a:r>
-            <a:endParaRPr lang="en-US" sz="1500" dirty="0"/>
+              <a:t>0:25</a:t>
+            </a:r>
+            <a:endParaRPr lang="en-US" sz="1100" dirty="0"/>
           </a:p>
         </p:txBody>
       </p:sp>
@@ -5960,17 +5352,17 @@
         </p:nvSpPr>
         <p:spPr>
           <a:xfrm>
-            <a:off x="1051560" y="3904488"/>
-            <a:ext cx="10424160" cy="731520"/>
-          </a:xfrm>
-          <a:prstGeom prst="rect">
-            <a:avLst/>
-          </a:prstGeom>
-          <a:noFill/>
-          <a:ln/>
-        </p:spPr>
-        <p:txBody>
-          <a:bodyPr wrap="square" rtlCol="0" anchor="t">
+            <a:off x="1691640" y="2450592"/>
+            <a:ext cx="9646920" cy="448056"/>
+          </a:xfrm>
+          <a:prstGeom prst="rect">
+            <a:avLst/>
+          </a:prstGeom>
+          <a:noFill/>
+          <a:ln/>
+        </p:spPr>
+        <p:txBody>
+          <a:bodyPr wrap="square" rtlCol="0" anchor="ctr">
             <a:spAutoFit/>
           </a:bodyPr>
           <a:lstStyle/>
@@ -5979,7 +5371,7 @@
               <a:buNone/>
             </a:pPr>
             <a:r>
-              <a:rPr lang="en-US" sz="1400" dirty="0">
+              <a:rPr lang="en-US" sz="1100" dirty="0">
                 <a:solidFill>
                   <a:srgbClr val="1A1A1A"/>
                 </a:solidFill>
@@ -5987,9 +5379,9 @@
                 <a:ea typeface="Calibri" pitchFamily="34" charset="-122"/>
                 <a:cs typeface="Calibri" pitchFamily="34" charset="-120"/>
               </a:rPr>
-              <a:t>Grimmer &amp;amp; Stewart, Text as Data (2013), §1–4: all quantitative models of language are wrong, but some are useful</a:t>
-            </a:r>
-            <a:endParaRPr lang="en-US" sz="1400" dirty="0"/>
+              <a:t>A brief demonstration before the complications: the words one artist uses far more than everyone else, a signature vocabulary measured against a pop baseline.</a:t>
+            </a:r>
+            <a:endParaRPr lang="en-US" sz="1100" dirty="0"/>
           </a:p>
         </p:txBody>
       </p:sp>
@@ -6001,14 +5393,16 @@
         </p:nvSpPr>
         <p:spPr>
           <a:xfrm>
-            <a:off x="640080" y="4553712"/>
-            <a:ext cx="219456" cy="219456"/>
-          </a:xfrm>
-          <a:prstGeom prst="ellipse">
-            <a:avLst/>
-          </a:prstGeom>
-          <a:solidFill>
-            <a:srgbClr val="3F6F5F"/>
+            <a:off x="640080" y="2916936"/>
+            <a:ext cx="868680" cy="338328"/>
+          </a:xfrm>
+          <a:prstGeom prst="roundRect">
+            <a:avLst>
+              <a:gd name="adj" fmla="val 16216"/>
+            </a:avLst>
+          </a:prstGeom>
+          <a:solidFill>
+            <a:srgbClr val="7A3B2E"/>
           </a:solidFill>
           <a:ln/>
         </p:spPr>
@@ -6021,8 +5415,8 @@
         </p:nvSpPr>
         <p:spPr>
           <a:xfrm>
-            <a:off x="1051560" y="4480560"/>
-            <a:ext cx="10424160" cy="365760"/>
+            <a:off x="640080" y="2916936"/>
+            <a:ext cx="868680" cy="338328"/>
           </a:xfrm>
           <a:prstGeom prst="rect">
             <a:avLst/>
@@ -6034,21 +5428,21 @@
           <a:bodyPr wrap="square" rtlCol="0" anchor="ctr"/>
           <a:lstStyle/>
           <a:p>
-            <a:pPr indent="0" marL="0">
-              <a:buNone/>
-            </a:pPr>
-            <a:r>
-              <a:rPr lang="en-US" sz="1500" b="1" dirty="0">
-                <a:solidFill>
-                  <a:srgbClr val="3F6F5F"/>
+            <a:pPr algn="ctr" indent="0" marL="0">
+              <a:buNone/>
+            </a:pPr>
+            <a:r>
+              <a:rPr lang="en-US" sz="1100" b="1" dirty="0">
+                <a:solidFill>
+                  <a:srgbClr val="FFFFFF"/>
                 </a:solidFill>
                 <a:latin typeface="Calibri" pitchFamily="34" charset="0"/>
                 <a:ea typeface="Calibri" pitchFamily="34" charset="-122"/>
                 <a:cs typeface="Calibri" pitchFamily="34" charset="-120"/>
               </a:rPr>
-              <a:t>Sketch</a:t>
-            </a:r>
-            <a:endParaRPr lang="en-US" sz="1500" dirty="0"/>
+              <a:t>0:30</a:t>
+            </a:r>
+            <a:endParaRPr lang="en-US" sz="1100" dirty="0"/>
           </a:p>
         </p:txBody>
       </p:sp>
@@ -6060,17 +5454,17 @@
         </p:nvSpPr>
         <p:spPr>
           <a:xfrm>
-            <a:off x="1051560" y="4864608"/>
-            <a:ext cx="10424160" cy="731520"/>
-          </a:xfrm>
-          <a:prstGeom prst="rect">
-            <a:avLst/>
-          </a:prstGeom>
-          <a:noFill/>
-          <a:ln/>
-        </p:spPr>
-        <p:txBody>
-          <a:bodyPr wrap="square" rtlCol="0" anchor="t">
+            <a:off x="1691640" y="2898648"/>
+            <a:ext cx="9646920" cy="448056"/>
+          </a:xfrm>
+          <a:prstGeom prst="rect">
+            <a:avLst/>
+          </a:prstGeom>
+          <a:noFill/>
+          <a:ln/>
+        </p:spPr>
+        <p:txBody>
+          <a:bodyPr wrap="square" rtlCol="0" anchor="ctr">
             <a:spAutoFit/>
           </a:bodyPr>
           <a:lstStyle/>
@@ -6079,7 +5473,7 @@
               <a:buNone/>
             </a:pPr>
             <a:r>
-              <a:rPr lang="en-US" sz="1400" dirty="0">
+              <a:rPr lang="en-US" sz="1100" dirty="0">
                 <a:solidFill>
                   <a:srgbClr val="1A1A1A"/>
                 </a:solidFill>
@@ -6087,9 +5481,9 @@
                 <a:ea typeface="Calibri" pitchFamily="34" charset="-122"/>
                 <a:cs typeface="Calibri" pitchFamily="34" charset="-120"/>
               </a:rPr>
-              <a:t>Count something in a text you care about; one chart; one sentence naming a choice. If the count compares two things, shuffle-test the gap.</a:t>
-            </a:r>
-            <a:endParaRPr lang="en-US" sz="1400" dirty="0"/>
+              <a:t>Hand-built bag-of-words: two communities, highlighters, argue about merging run/running. Counting requires defining.</a:t>
+            </a:r>
+            <a:endParaRPr lang="en-US" sz="1100" dirty="0"/>
           </a:p>
         </p:txBody>
       </p:sp>
@@ -6101,11 +5495,13 @@
         </p:nvSpPr>
         <p:spPr>
           <a:xfrm>
-            <a:off x="640080" y="5513832"/>
-            <a:ext cx="219456" cy="219456"/>
-          </a:xfrm>
-          <a:prstGeom prst="ellipse">
-            <a:avLst/>
+            <a:off x="640080" y="3364992"/>
+            <a:ext cx="868680" cy="338328"/>
+          </a:xfrm>
+          <a:prstGeom prst="roundRect">
+            <a:avLst>
+              <a:gd name="adj" fmla="val 16216"/>
+            </a:avLst>
           </a:prstGeom>
           <a:solidFill>
             <a:srgbClr val="7A3B2E"/>
@@ -6121,8 +5517,8 @@
         </p:nvSpPr>
         <p:spPr>
           <a:xfrm>
-            <a:off x="1051560" y="5440680"/>
-            <a:ext cx="10424160" cy="365760"/>
+            <a:off x="640080" y="3364992"/>
+            <a:ext cx="868680" cy="338328"/>
           </a:xfrm>
           <a:prstGeom prst="rect">
             <a:avLst/>
@@ -6134,21 +5530,21 @@
           <a:bodyPr wrap="square" rtlCol="0" anchor="ctr"/>
           <a:lstStyle/>
           <a:p>
-            <a:pPr indent="0" marL="0">
-              <a:buNone/>
-            </a:pPr>
-            <a:r>
-              <a:rPr lang="en-US" sz="1500" b="1" dirty="0">
-                <a:solidFill>
-                  <a:srgbClr val="7A3B2E"/>
+            <a:pPr algn="ctr" indent="0" marL="0">
+              <a:buNone/>
+            </a:pPr>
+            <a:r>
+              <a:rPr lang="en-US" sz="1100" b="1" dirty="0">
+                <a:solidFill>
+                  <a:srgbClr val="FFFFFF"/>
                 </a:solidFill>
                 <a:latin typeface="Calibri" pitchFamily="34" charset="0"/>
                 <a:ea typeface="Calibri" pitchFamily="34" charset="-122"/>
                 <a:cs typeface="Calibri" pitchFamily="34" charset="-120"/>
               </a:rPr>
-              <a:t>Check (AI closed)</a:t>
-            </a:r>
-            <a:endParaRPr lang="en-US" sz="1500" dirty="0"/>
+              <a:t>0:55</a:t>
+            </a:r>
+            <a:endParaRPr lang="en-US" sz="1100" dirty="0"/>
           </a:p>
         </p:txBody>
       </p:sp>
@@ -6160,17 +5556,17 @@
         </p:nvSpPr>
         <p:spPr>
           <a:xfrm>
-            <a:off x="1051560" y="5824728"/>
-            <a:ext cx="10424160" cy="731520"/>
-          </a:xfrm>
-          <a:prstGeom prst="rect">
-            <a:avLst/>
-          </a:prstGeom>
-          <a:noFill/>
-          <a:ln/>
-        </p:spPr>
-        <p:txBody>
-          <a:bodyPr wrap="square" rtlCol="0" anchor="t">
+            <a:off x="1691640" y="3346704"/>
+            <a:ext cx="9646920" cy="448056"/>
+          </a:xfrm>
+          <a:prstGeom prst="rect">
+            <a:avLst/>
+          </a:prstGeom>
+          <a:noFill/>
+          <a:ln/>
+        </p:spPr>
+        <p:txBody>
+          <a:bodyPr wrap="square" rtlCol="0" anchor="ctr">
             <a:spAutoFit/>
           </a:bodyPr>
           <a:lstStyle/>
@@ -6179,7 +5575,7 @@
               <a:buNone/>
             </a:pPr>
             <a:r>
-              <a:rPr lang="en-US" sz="1400" dirty="0">
+              <a:rPr lang="en-US" sz="1100" dirty="0">
                 <a:solidFill>
                   <a:srgbClr val="1A1A1A"/>
                 </a:solidFill>
@@ -6187,9 +5583,519 @@
                 <a:ea typeface="Calibri" pitchFamily="34" charset="-122"/>
                 <a:cs typeface="Calibri" pitchFamily="34" charset="-120"/>
               </a:rPr>
-              <a:t>Explain it: why two tokenizers split a sentence differently, and what your stemming choice changed. (Competencies 3, 5.)</a:t>
-            </a:r>
-            <a:endParaRPr lang="en-US" sz="1400" dirty="0"/>
+              <a:t>What counts as a word? Paste a sentence into two tokenizer playgrounds and watch it shatter differently. Models see tokens, not words. Then the standard tools for the run/running decision: NLTK stemming and lemmatization, a real stop list, and Zipf's law, the curve that explains why stop lists exist.</a:t>
+            </a:r>
+            <a:endParaRPr lang="en-US" sz="1100" dirty="0"/>
+          </a:p>
+        </p:txBody>
+      </p:sp>
+      <p:sp>
+        <p:nvSpPr>
+          <p:cNvPr id="18" name="Shape 16"/>
+          <p:cNvSpPr/>
+          <p:nvPr/>
+        </p:nvSpPr>
+        <p:spPr>
+          <a:xfrm>
+            <a:off x="640080" y="3813048"/>
+            <a:ext cx="868680" cy="338328"/>
+          </a:xfrm>
+          <a:prstGeom prst="roundRect">
+            <a:avLst>
+              <a:gd name="adj" fmla="val 16216"/>
+            </a:avLst>
+          </a:prstGeom>
+          <a:solidFill>
+            <a:srgbClr val="7A3B2E"/>
+          </a:solidFill>
+          <a:ln/>
+        </p:spPr>
+      </p:sp>
+      <p:sp>
+        <p:nvSpPr>
+          <p:cNvPr id="19" name="Text 17"/>
+          <p:cNvSpPr/>
+          <p:nvPr/>
+        </p:nvSpPr>
+        <p:spPr>
+          <a:xfrm>
+            <a:off x="640080" y="3813048"/>
+            <a:ext cx="868680" cy="338328"/>
+          </a:xfrm>
+          <a:prstGeom prst="rect">
+            <a:avLst/>
+          </a:prstGeom>
+          <a:noFill/>
+          <a:ln/>
+        </p:spPr>
+        <p:txBody>
+          <a:bodyPr wrap="square" rtlCol="0" anchor="ctr"/>
+          <a:lstStyle/>
+          <a:p>
+            <a:pPr algn="ctr" indent="0" marL="0">
+              <a:buNone/>
+            </a:pPr>
+            <a:r>
+              <a:rPr lang="en-US" sz="1100" b="1" dirty="0">
+                <a:solidFill>
+                  <a:srgbClr val="FFFFFF"/>
+                </a:solidFill>
+                <a:latin typeface="Calibri" pitchFamily="34" charset="0"/>
+                <a:ea typeface="Calibri" pitchFamily="34" charset="-122"/>
+                <a:cs typeface="Calibri" pitchFamily="34" charset="-120"/>
+              </a:rPr>
+              <a:t>1:05</a:t>
+            </a:r>
+            <a:endParaRPr lang="en-US" sz="1100" dirty="0"/>
+          </a:p>
+        </p:txBody>
+      </p:sp>
+      <p:sp>
+        <p:nvSpPr>
+          <p:cNvPr id="20" name="Text 18"/>
+          <p:cNvSpPr/>
+          <p:nvPr/>
+        </p:nvSpPr>
+        <p:spPr>
+          <a:xfrm>
+            <a:off x="1691640" y="3794760"/>
+            <a:ext cx="9646920" cy="448056"/>
+          </a:xfrm>
+          <a:prstGeom prst="rect">
+            <a:avLst/>
+          </a:prstGeom>
+          <a:noFill/>
+          <a:ln/>
+        </p:spPr>
+        <p:txBody>
+          <a:bodyPr wrap="square" rtlCol="0" anchor="ctr">
+            <a:spAutoFit/>
+          </a:bodyPr>
+          <a:lstStyle/>
+          <a:p>
+            <a:pPr indent="0" marL="0">
+              <a:buNone/>
+            </a:pPr>
+            <a:r>
+              <a:rPr lang="en-US" sz="1100" dirty="0">
+                <a:solidFill>
+                  <a:srgbClr val="1A1A1A"/>
+                </a:solidFill>
+                <a:latin typeface="Calibri" pitchFamily="34" charset="0"/>
+                <a:ea typeface="Calibri" pitchFamily="34" charset="-122"/>
+                <a:cs typeface="Calibri" pitchFamily="34" charset="-120"/>
+              </a:rPr>
+              <a:t>Break</a:t>
+            </a:r>
+            <a:endParaRPr lang="en-US" sz="1100" dirty="0"/>
+          </a:p>
+        </p:txBody>
+      </p:sp>
+      <p:sp>
+        <p:nvSpPr>
+          <p:cNvPr id="21" name="Shape 19"/>
+          <p:cNvSpPr/>
+          <p:nvPr/>
+        </p:nvSpPr>
+        <p:spPr>
+          <a:xfrm>
+            <a:off x="640080" y="4261104"/>
+            <a:ext cx="868680" cy="338328"/>
+          </a:xfrm>
+          <a:prstGeom prst="roundRect">
+            <a:avLst>
+              <a:gd name="adj" fmla="val 16216"/>
+            </a:avLst>
+          </a:prstGeom>
+          <a:solidFill>
+            <a:srgbClr val="7A3B2E"/>
+          </a:solidFill>
+          <a:ln/>
+        </p:spPr>
+      </p:sp>
+      <p:sp>
+        <p:nvSpPr>
+          <p:cNvPr id="22" name="Text 20"/>
+          <p:cNvSpPr/>
+          <p:nvPr/>
+        </p:nvSpPr>
+        <p:spPr>
+          <a:xfrm>
+            <a:off x="640080" y="4261104"/>
+            <a:ext cx="868680" cy="338328"/>
+          </a:xfrm>
+          <a:prstGeom prst="rect">
+            <a:avLst/>
+          </a:prstGeom>
+          <a:noFill/>
+          <a:ln/>
+        </p:spPr>
+        <p:txBody>
+          <a:bodyPr wrap="square" rtlCol="0" anchor="ctr"/>
+          <a:lstStyle/>
+          <a:p>
+            <a:pPr algn="ctr" indent="0" marL="0">
+              <a:buNone/>
+            </a:pPr>
+            <a:r>
+              <a:rPr lang="en-US" sz="1100" b="1" dirty="0">
+                <a:solidFill>
+                  <a:srgbClr val="FFFFFF"/>
+                </a:solidFill>
+                <a:latin typeface="Calibri" pitchFamily="34" charset="0"/>
+                <a:ea typeface="Calibri" pitchFamily="34" charset="-122"/>
+                <a:cs typeface="Calibri" pitchFamily="34" charset="-120"/>
+              </a:rPr>
+              <a:t>1:15</a:t>
+            </a:r>
+            <a:endParaRPr lang="en-US" sz="1100" dirty="0"/>
+          </a:p>
+        </p:txBody>
+      </p:sp>
+      <p:sp>
+        <p:nvSpPr>
+          <p:cNvPr id="23" name="Text 21"/>
+          <p:cNvSpPr/>
+          <p:nvPr/>
+        </p:nvSpPr>
+        <p:spPr>
+          <a:xfrm>
+            <a:off x="1691640" y="4242816"/>
+            <a:ext cx="9646920" cy="448056"/>
+          </a:xfrm>
+          <a:prstGeom prst="rect">
+            <a:avLst/>
+          </a:prstGeom>
+          <a:noFill/>
+          <a:ln/>
+        </p:spPr>
+        <p:txBody>
+          <a:bodyPr wrap="square" rtlCol="0" anchor="ctr">
+            <a:spAutoFit/>
+          </a:bodyPr>
+          <a:lstStyle/>
+          <a:p>
+            <a:pPr indent="0" marL="0">
+              <a:buNone/>
+            </a:pPr>
+            <a:r>
+              <a:rPr lang="en-US" sz="1100" dirty="0">
+                <a:solidFill>
+                  <a:srgbClr val="1A1A1A"/>
+                </a:solidFill>
+                <a:latin typeface="Calibri" pitchFamily="34" charset="0"/>
+                <a:ea typeface="Calibri" pitchFamily="34" charset="-122"/>
+                <a:cs typeface="Calibri" pitchFamily="34" charset="-120"/>
+              </a:rPr>
+              <a:t>N-grams and statistics, hands-on: bigrams across three corpora, distributions and mean-versus-median on real counts, rates per 1,000 words, z-scores as the common scale. Then tf-idf at two scales, single comments as documents and twelve whole subreddits as documents, each community sight-read from its distinctive words (cpu and coolers, roth and rates, puts and bears), then the idea of a space made explicit (documents as points, one axis per word, a two-word space drawn), and k-means on the live comments: raw counts give a blob, tf-idf plus 60 dimensions sorts six in seven comments with their community. The representation, not the algorithm, does the work. Closer: the same k-means on twenty Met paintings counted into 27 color buckets sorts portraits from landscapes, three in four.</a:t>
+            </a:r>
+            <a:endParaRPr lang="en-US" sz="1100" dirty="0"/>
+          </a:p>
+        </p:txBody>
+      </p:sp>
+      <p:sp>
+        <p:nvSpPr>
+          <p:cNvPr id="24" name="Shape 22"/>
+          <p:cNvSpPr/>
+          <p:nvPr/>
+        </p:nvSpPr>
+        <p:spPr>
+          <a:xfrm>
+            <a:off x="640080" y="4709160"/>
+            <a:ext cx="868680" cy="338328"/>
+          </a:xfrm>
+          <a:prstGeom prst="roundRect">
+            <a:avLst>
+              <a:gd name="adj" fmla="val 16216"/>
+            </a:avLst>
+          </a:prstGeom>
+          <a:solidFill>
+            <a:srgbClr val="7A3B2E"/>
+          </a:solidFill>
+          <a:ln/>
+        </p:spPr>
+      </p:sp>
+      <p:sp>
+        <p:nvSpPr>
+          <p:cNvPr id="25" name="Text 23"/>
+          <p:cNvSpPr/>
+          <p:nvPr/>
+        </p:nvSpPr>
+        <p:spPr>
+          <a:xfrm>
+            <a:off x="640080" y="4709160"/>
+            <a:ext cx="868680" cy="338328"/>
+          </a:xfrm>
+          <a:prstGeom prst="rect">
+            <a:avLst/>
+          </a:prstGeom>
+          <a:noFill/>
+          <a:ln/>
+        </p:spPr>
+        <p:txBody>
+          <a:bodyPr wrap="square" rtlCol="0" anchor="ctr"/>
+          <a:lstStyle/>
+          <a:p>
+            <a:pPr algn="ctr" indent="0" marL="0">
+              <a:buNone/>
+            </a:pPr>
+            <a:r>
+              <a:rPr lang="en-US" sz="1100" b="1" dirty="0">
+                <a:solidFill>
+                  <a:srgbClr val="FFFFFF"/>
+                </a:solidFill>
+                <a:latin typeface="Calibri" pitchFamily="34" charset="0"/>
+                <a:ea typeface="Calibri" pitchFamily="34" charset="-122"/>
+                <a:cs typeface="Calibri" pitchFamily="34" charset="-120"/>
+              </a:rPr>
+              <a:t>1:30</a:t>
+            </a:r>
+            <a:endParaRPr lang="en-US" sz="1100" dirty="0"/>
+          </a:p>
+        </p:txBody>
+      </p:sp>
+      <p:sp>
+        <p:nvSpPr>
+          <p:cNvPr id="26" name="Text 24"/>
+          <p:cNvSpPr/>
+          <p:nvPr/>
+        </p:nvSpPr>
+        <p:spPr>
+          <a:xfrm>
+            <a:off x="1691640" y="4690872"/>
+            <a:ext cx="9646920" cy="448056"/>
+          </a:xfrm>
+          <a:prstGeom prst="rect">
+            <a:avLst/>
+          </a:prstGeom>
+          <a:noFill/>
+          <a:ln/>
+        </p:spPr>
+        <p:txBody>
+          <a:bodyPr wrap="square" rtlCol="0" anchor="ctr">
+            <a:spAutoFit/>
+          </a:bodyPr>
+          <a:lstStyle/>
+          <a:p>
+            <a:pPr indent="0" marL="0">
+              <a:buNone/>
+            </a:pPr>
+            <a:r>
+              <a:rPr lang="en-US" sz="1100" dirty="0">
+                <a:solidFill>
+                  <a:srgbClr val="1A1A1A"/>
+                </a:solidFill>
+                <a:latin typeface="Calibri" pitchFamily="34" charset="0"/>
+                <a:ea typeface="Calibri" pitchFamily="34" charset="-122"/>
+                <a:cs typeface="Calibri" pitchFamily="34" charset="-120"/>
+              </a:rPr>
+              <a:t>Keyness, the She Giggles, He Gallops move: a log-odds ratio between two corpora finds the words one voice uses far more than a baseline, exactly the method behind Week 1's featured piece. The corpus pair is a choice too: artist vs. pop, lyrics vs. subreddit vs. novel.</a:t>
+            </a:r>
+            <a:endParaRPr lang="en-US" sz="1100" dirty="0"/>
+          </a:p>
+        </p:txBody>
+      </p:sp>
+      <p:sp>
+        <p:nvSpPr>
+          <p:cNvPr id="27" name="Shape 25"/>
+          <p:cNvSpPr/>
+          <p:nvPr/>
+        </p:nvSpPr>
+        <p:spPr>
+          <a:xfrm>
+            <a:off x="640080" y="5157216"/>
+            <a:ext cx="868680" cy="338328"/>
+          </a:xfrm>
+          <a:prstGeom prst="roundRect">
+            <a:avLst>
+              <a:gd name="adj" fmla="val 16216"/>
+            </a:avLst>
+          </a:prstGeom>
+          <a:solidFill>
+            <a:srgbClr val="7A3B2E"/>
+          </a:solidFill>
+          <a:ln/>
+        </p:spPr>
+      </p:sp>
+      <p:sp>
+        <p:nvSpPr>
+          <p:cNvPr id="28" name="Text 26"/>
+          <p:cNvSpPr/>
+          <p:nvPr/>
+        </p:nvSpPr>
+        <p:spPr>
+          <a:xfrm>
+            <a:off x="640080" y="5157216"/>
+            <a:ext cx="868680" cy="338328"/>
+          </a:xfrm>
+          <a:prstGeom prst="rect">
+            <a:avLst/>
+          </a:prstGeom>
+          <a:noFill/>
+          <a:ln/>
+        </p:spPr>
+        <p:txBody>
+          <a:bodyPr wrap="square" rtlCol="0" anchor="ctr"/>
+          <a:lstStyle/>
+          <a:p>
+            <a:pPr algn="ctr" indent="0" marL="0">
+              <a:buNone/>
+            </a:pPr>
+            <a:r>
+              <a:rPr lang="en-US" sz="1100" b="1" dirty="0">
+                <a:solidFill>
+                  <a:srgbClr val="FFFFFF"/>
+                </a:solidFill>
+                <a:latin typeface="Calibri" pitchFamily="34" charset="0"/>
+                <a:ea typeface="Calibri" pitchFamily="34" charset="-122"/>
+                <a:cs typeface="Calibri" pitchFamily="34" charset="-120"/>
+              </a:rPr>
+              <a:t>1:42</a:t>
+            </a:r>
+            <a:endParaRPr lang="en-US" sz="1100" dirty="0"/>
+          </a:p>
+        </p:txBody>
+      </p:sp>
+      <p:sp>
+        <p:nvSpPr>
+          <p:cNvPr id="29" name="Text 27"/>
+          <p:cNvSpPr/>
+          <p:nvPr/>
+        </p:nvSpPr>
+        <p:spPr>
+          <a:xfrm>
+            <a:off x="1691640" y="5138928"/>
+            <a:ext cx="9646920" cy="448056"/>
+          </a:xfrm>
+          <a:prstGeom prst="rect">
+            <a:avLst/>
+          </a:prstGeom>
+          <a:noFill/>
+          <a:ln/>
+        </p:spPr>
+        <p:txBody>
+          <a:bodyPr wrap="square" rtlCol="0" anchor="ctr">
+            <a:spAutoFit/>
+          </a:bodyPr>
+          <a:lstStyle/>
+          <a:p>
+            <a:pPr indent="0" marL="0">
+              <a:buNone/>
+            </a:pPr>
+            <a:r>
+              <a:rPr lang="en-US" sz="1100" dirty="0">
+                <a:solidFill>
+                  <a:srgbClr val="1A1A1A"/>
+                </a:solidFill>
+                <a:latin typeface="Calibri" pitchFamily="34" charset="0"/>
+                <a:ea typeface="Calibri" pitchFamily="34" charset="-122"/>
+                <a:cs typeface="Calibri" pitchFamily="34" charset="-120"/>
+              </a:rPr>
+              <a:t>Is the difference real? The shuffle test names the p-value, then the three traps: selection (testing the word you picked for its extremity), multiplicity (random halves of one community yield a convincing fake vocabulary; ~75 of 1,500 words pass by luck), and size (significant is not big; report effect and p together, with a bootstrap interval for the size).</a:t>
+            </a:r>
+            <a:endParaRPr lang="en-US" sz="1100" dirty="0"/>
+          </a:p>
+        </p:txBody>
+      </p:sp>
+      <p:sp>
+        <p:nvSpPr>
+          <p:cNvPr id="30" name="Shape 28"/>
+          <p:cNvSpPr/>
+          <p:nvPr/>
+        </p:nvSpPr>
+        <p:spPr>
+          <a:xfrm>
+            <a:off x="640080" y="5605272"/>
+            <a:ext cx="868680" cy="338328"/>
+          </a:xfrm>
+          <a:prstGeom prst="roundRect">
+            <a:avLst>
+              <a:gd name="adj" fmla="val 16216"/>
+            </a:avLst>
+          </a:prstGeom>
+          <a:solidFill>
+            <a:srgbClr val="7A3B2E"/>
+          </a:solidFill>
+          <a:ln/>
+        </p:spPr>
+      </p:sp>
+      <p:sp>
+        <p:nvSpPr>
+          <p:cNvPr id="31" name="Text 29"/>
+          <p:cNvSpPr/>
+          <p:nvPr/>
+        </p:nvSpPr>
+        <p:spPr>
+          <a:xfrm>
+            <a:off x="640080" y="5605272"/>
+            <a:ext cx="868680" cy="338328"/>
+          </a:xfrm>
+          <a:prstGeom prst="rect">
+            <a:avLst/>
+          </a:prstGeom>
+          <a:noFill/>
+          <a:ln/>
+        </p:spPr>
+        <p:txBody>
+          <a:bodyPr wrap="square" rtlCol="0" anchor="ctr"/>
+          <a:lstStyle/>
+          <a:p>
+            <a:pPr algn="ctr" indent="0" marL="0">
+              <a:buNone/>
+            </a:pPr>
+            <a:r>
+              <a:rPr lang="en-US" sz="1100" b="1" dirty="0">
+                <a:solidFill>
+                  <a:srgbClr val="FFFFFF"/>
+                </a:solidFill>
+                <a:latin typeface="Calibri" pitchFamily="34" charset="0"/>
+                <a:ea typeface="Calibri" pitchFamily="34" charset="-122"/>
+                <a:cs typeface="Calibri" pitchFamily="34" charset="-120"/>
+              </a:rPr>
+              <a:t>1:50</a:t>
+            </a:r>
+            <a:endParaRPr lang="en-US" sz="1100" dirty="0"/>
+          </a:p>
+        </p:txBody>
+      </p:sp>
+      <p:sp>
+        <p:nvSpPr>
+          <p:cNvPr id="32" name="Text 30"/>
+          <p:cNvSpPr/>
+          <p:nvPr/>
+        </p:nvSpPr>
+        <p:spPr>
+          <a:xfrm>
+            <a:off x="1691640" y="5586984"/>
+            <a:ext cx="9646920" cy="448056"/>
+          </a:xfrm>
+          <a:prstGeom prst="rect">
+            <a:avLst/>
+          </a:prstGeom>
+          <a:noFill/>
+          <a:ln/>
+        </p:spPr>
+        <p:txBody>
+          <a:bodyPr wrap="square" rtlCol="0" anchor="ctr">
+            <a:spAutoFit/>
+          </a:bodyPr>
+          <a:lstStyle/>
+          <a:p>
+            <a:pPr indent="0" marL="0">
+              <a:buNone/>
+            </a:pPr>
+            <a:r>
+              <a:rPr lang="en-US" sz="1100" dirty="0">
+                <a:solidFill>
+                  <a:srgbClr val="1A1A1A"/>
+                </a:solidFill>
+                <a:latin typeface="Calibri" pitchFamily="34" charset="0"/>
+                <a:ea typeface="Calibri" pitchFamily="34" charset="-122"/>
+                <a:cs typeface="Calibri" pitchFamily="34" charset="-120"/>
+              </a:rPr>
+              <a:t>Gemini-free check and check-out.</a:t>
+            </a:r>
+            <a:endParaRPr lang="en-US" sz="1100" dirty="0"/>
           </a:p>
         </p:txBody>
       </p:sp>
@@ -6234,7 +6140,7 @@
         <p:spPr>
           <a:xfrm>
             <a:off x="640080" y="640080"/>
-            <a:ext cx="10058400" cy="320040"/>
+            <a:ext cx="10058400" cy="731520"/>
           </a:xfrm>
           <a:prstGeom prst="rect">
             <a:avLst/>
@@ -6250,7 +6156,66 @@
               <a:buNone/>
             </a:pPr>
             <a:r>
-              <a:rPr lang="en-US" sz="1300" b="1" spc="300" kern="0" dirty="0">
+              <a:rPr lang="en-US" sz="3000" b="1" dirty="0">
+                <a:solidFill>
+                  <a:srgbClr val="1A1A1A"/>
+                </a:solidFill>
+                <a:latin typeface="Cambria" pitchFamily="34" charset="0"/>
+                <a:ea typeface="Cambria" pitchFamily="34" charset="-122"/>
+                <a:cs typeface="Cambria" pitchFamily="34" charset="-120"/>
+              </a:rPr>
+              <a:t>Reading &amp; homework</a:t>
+            </a:r>
+            <a:endParaRPr lang="en-US" sz="3000" dirty="0"/>
+          </a:p>
+        </p:txBody>
+      </p:sp>
+      <p:sp>
+        <p:nvSpPr>
+          <p:cNvPr id="3" name="Shape 1"/>
+          <p:cNvSpPr/>
+          <p:nvPr/>
+        </p:nvSpPr>
+        <p:spPr>
+          <a:xfrm>
+            <a:off x="640080" y="1673352"/>
+            <a:ext cx="219456" cy="219456"/>
+          </a:xfrm>
+          <a:prstGeom prst="ellipse">
+            <a:avLst/>
+          </a:prstGeom>
+          <a:solidFill>
+            <a:srgbClr val="7A3B2E"/>
+          </a:solidFill>
+          <a:ln/>
+        </p:spPr>
+      </p:sp>
+      <p:sp>
+        <p:nvSpPr>
+          <p:cNvPr id="4" name="Text 2"/>
+          <p:cNvSpPr/>
+          <p:nvPr/>
+        </p:nvSpPr>
+        <p:spPr>
+          <a:xfrm>
+            <a:off x="1051560" y="1600200"/>
+            <a:ext cx="10424160" cy="365760"/>
+          </a:xfrm>
+          <a:prstGeom prst="rect">
+            <a:avLst/>
+          </a:prstGeom>
+          <a:noFill/>
+          <a:ln/>
+        </p:spPr>
+        <p:txBody>
+          <a:bodyPr wrap="square" rtlCol="0" anchor="ctr"/>
+          <a:lstStyle/>
+          <a:p>
+            <a:pPr indent="0" marL="0">
+              <a:buNone/>
+            </a:pPr>
+            <a:r>
+              <a:rPr lang="en-US" sz="1500" b="1" dirty="0">
                 <a:solidFill>
                   <a:srgbClr val="7A3B2E"/>
                 </a:solidFill>
@@ -6258,72 +6223,11 @@
                 <a:ea typeface="Calibri" pitchFamily="34" charset="-122"/>
                 <a:cs typeface="Calibri" pitchFamily="34" charset="-120"/>
               </a:rPr>
-              <a:t>HOW THIS WEEK CONNECTS</a:t>
-            </a:r>
-            <a:endParaRPr lang="en-US" sz="1300" dirty="0"/>
-          </a:p>
-        </p:txBody>
-      </p:sp>
-      <p:sp>
-        <p:nvSpPr>
-          <p:cNvPr id="3" name="Text 1"/>
-          <p:cNvSpPr/>
-          <p:nvPr/>
-        </p:nvSpPr>
-        <p:spPr>
-          <a:xfrm>
-            <a:off x="640080" y="987552"/>
-            <a:ext cx="10058400" cy="640080"/>
-          </a:xfrm>
-          <a:prstGeom prst="rect">
-            <a:avLst/>
-          </a:prstGeom>
-          <a:noFill/>
-          <a:ln/>
-        </p:spPr>
-        <p:txBody>
-          <a:bodyPr wrap="square" rtlCol="0" anchor="ctr"/>
-          <a:lstStyle/>
-          <a:p>
-            <a:pPr indent="0" marL="0">
-              <a:buNone/>
-            </a:pPr>
-            <a:r>
-              <a:rPr lang="en-US" sz="2800" b="1" dirty="0">
-                <a:solidFill>
-                  <a:srgbClr val="1A1A1A"/>
-                </a:solidFill>
-                <a:latin typeface="Cambria" pitchFamily="34" charset="0"/>
-                <a:ea typeface="Cambria" pitchFamily="34" charset="-122"/>
-                <a:cs typeface="Cambria" pitchFamily="34" charset="-120"/>
-              </a:rPr>
-              <a:t>The course's through-lines</a:t>
-            </a:r>
-            <a:endParaRPr lang="en-US" sz="2800" dirty="0"/>
-          </a:p>
-        </p:txBody>
-      </p:sp>
-      <p:sp>
-        <p:nvSpPr>
-          <p:cNvPr id="4" name="Shape 2"/>
-          <p:cNvSpPr/>
-          <p:nvPr/>
-        </p:nvSpPr>
-        <p:spPr>
-          <a:xfrm>
-            <a:off x="640080" y="2057400"/>
-            <a:ext cx="457200" cy="457200"/>
-          </a:xfrm>
-          <a:prstGeom prst="roundRect">
-            <a:avLst>
-              <a:gd name="adj" fmla="val 16000"/>
-            </a:avLst>
-          </a:prstGeom>
-          <a:solidFill>
-            <a:srgbClr val="7A3B2E"/>
-          </a:solidFill>
-          <a:ln/>
-        </p:spPr>
+              <a:t>Reading</a:t>
+            </a:r>
+            <a:endParaRPr lang="en-US" sz="1500" dirty="0"/>
+          </a:p>
+        </p:txBody>
       </p:sp>
       <p:sp>
         <p:nvSpPr>
@@ -6333,86 +6237,8 @@
         </p:nvSpPr>
         <p:spPr>
           <a:xfrm>
-            <a:off x="640080" y="2057400"/>
-            <a:ext cx="457200" cy="457200"/>
-          </a:xfrm>
-          <a:prstGeom prst="rect">
-            <a:avLst/>
-          </a:prstGeom>
-          <a:noFill/>
-          <a:ln/>
-        </p:spPr>
-        <p:txBody>
-          <a:bodyPr wrap="square" rtlCol="0" anchor="ctr"/>
-          <a:lstStyle/>
-          <a:p>
-            <a:pPr algn="ctr" indent="0" marL="0">
-              <a:buNone/>
-            </a:pPr>
-            <a:r>
-              <a:rPr lang="en-US" sz="2000" b="1" dirty="0">
-                <a:solidFill>
-                  <a:srgbClr val="FFFFFF"/>
-                </a:solidFill>
-                <a:latin typeface="Cambria" pitchFamily="34" charset="0"/>
-                <a:ea typeface="Cambria" pitchFamily="34" charset="-122"/>
-                <a:cs typeface="Cambria" pitchFamily="34" charset="-120"/>
-              </a:rPr>
-              <a:t>1</a:t>
-            </a:r>
-            <a:endParaRPr lang="en-US" sz="2000" dirty="0"/>
-          </a:p>
-        </p:txBody>
-      </p:sp>
-      <p:sp>
-        <p:nvSpPr>
-          <p:cNvPr id="6" name="Text 4"/>
-          <p:cNvSpPr/>
-          <p:nvPr/>
-        </p:nvSpPr>
-        <p:spPr>
-          <a:xfrm>
-            <a:off x="1371600" y="2020824"/>
-            <a:ext cx="10332720" cy="411480"/>
-          </a:xfrm>
-          <a:prstGeom prst="rect">
-            <a:avLst/>
-          </a:prstGeom>
-          <a:noFill/>
-          <a:ln/>
-        </p:spPr>
-        <p:txBody>
-          <a:bodyPr wrap="square" rtlCol="0" anchor="ctr"/>
-          <a:lstStyle/>
-          <a:p>
-            <a:pPr indent="0" marL="0">
-              <a:buNone/>
-            </a:pPr>
-            <a:r>
-              <a:rPr lang="en-US" sz="1900" b="1" dirty="0">
-                <a:solidFill>
-                  <a:srgbClr val="7A3B2E"/>
-                </a:solidFill>
-                <a:latin typeface="Cambria" pitchFamily="34" charset="0"/>
-                <a:ea typeface="Cambria" pitchFamily="34" charset="-122"/>
-                <a:cs typeface="Cambria" pitchFamily="34" charset="-120"/>
-              </a:rPr>
-              <a:t>Beyond counting</a:t>
-            </a:r>
-            <a:endParaRPr lang="en-US" sz="1900" dirty="0"/>
-          </a:p>
-        </p:txBody>
-      </p:sp>
-      <p:sp>
-        <p:nvSpPr>
-          <p:cNvPr id="7" name="Text 5"/>
-          <p:cNvSpPr/>
-          <p:nvPr/>
-        </p:nvSpPr>
-        <p:spPr>
-          <a:xfrm>
-            <a:off x="1371600" y="2441448"/>
-            <a:ext cx="10332720" cy="914400"/>
+            <a:off x="1051560" y="1984248"/>
+            <a:ext cx="10424160" cy="731520"/>
           </a:xfrm>
           <a:prstGeom prst="rect">
             <a:avLst/>
@@ -6427,13 +6253,10 @@
           <a:lstStyle/>
           <a:p>
             <a:pPr indent="0" marL="0">
-              <a:lnSpc>
-                <a:spcPct val="112000"/>
-              </a:lnSpc>
-              <a:buNone/>
-            </a:pPr>
-            <a:r>
-              <a:rPr lang="en-US" sz="1450" dirty="0">
+              <a:buNone/>
+            </a:pPr>
+            <a:r>
+              <a:rPr lang="en-US" sz="1400" dirty="0">
                 <a:solidFill>
                   <a:srgbClr val="1A1A1A"/>
                 </a:solidFill>
@@ -6441,27 +6264,25 @@
                 <a:ea typeface="Calibri" pitchFamily="34" charset="-122"/>
                 <a:cs typeface="Calibri" pitchFamily="34" charset="-120"/>
               </a:rPr>
-              <a:t>Counting is the simplest tool and has no notion of meaning. Week 5 addresses that limit.</a:t>
-            </a:r>
-            <a:endParaRPr lang="en-US" sz="1450" dirty="0"/>
-          </a:p>
-        </p:txBody>
-      </p:sp>
-      <p:sp>
-        <p:nvSpPr>
-          <p:cNvPr id="8" name="Shape 6"/>
-          <p:cNvSpPr/>
-          <p:nvPr/>
-        </p:nvSpPr>
-        <p:spPr>
-          <a:xfrm>
-            <a:off x="640080" y="3520440"/>
-            <a:ext cx="457200" cy="457200"/>
-          </a:xfrm>
-          <a:prstGeom prst="roundRect">
-            <a:avLst>
-              <a:gd name="adj" fmla="val 16000"/>
-            </a:avLst>
+              <a:t>Wolfram, What Is ChatGPT Doing (opening sections only)</a:t>
+            </a:r>
+            <a:endParaRPr lang="en-US" sz="1400" dirty="0"/>
+          </a:p>
+        </p:txBody>
+      </p:sp>
+      <p:sp>
+        <p:nvSpPr>
+          <p:cNvPr id="6" name="Shape 4"/>
+          <p:cNvSpPr/>
+          <p:nvPr/>
+        </p:nvSpPr>
+        <p:spPr>
+          <a:xfrm>
+            <a:off x="640080" y="2633472"/>
+            <a:ext cx="219456" cy="219456"/>
+          </a:xfrm>
+          <a:prstGeom prst="ellipse">
+            <a:avLst/>
           </a:prstGeom>
           <a:solidFill>
             <a:srgbClr val="3F6F5F"/>
@@ -6471,14 +6292,14 @@
       </p:sp>
       <p:sp>
         <p:nvSpPr>
-          <p:cNvPr id="9" name="Text 7"/>
-          <p:cNvSpPr/>
-          <p:nvPr/>
-        </p:nvSpPr>
-        <p:spPr>
-          <a:xfrm>
-            <a:off x="640080" y="3520440"/>
-            <a:ext cx="457200" cy="457200"/>
+          <p:cNvPr id="7" name="Text 5"/>
+          <p:cNvSpPr/>
+          <p:nvPr/>
+        </p:nvSpPr>
+        <p:spPr>
+          <a:xfrm>
+            <a:off x="1051560" y="2560320"/>
+            <a:ext cx="10424160" cy="365760"/>
           </a:xfrm>
           <a:prstGeom prst="rect">
             <a:avLst/>
@@ -6490,73 +6311,34 @@
           <a:bodyPr wrap="square" rtlCol="0" anchor="ctr"/>
           <a:lstStyle/>
           <a:p>
-            <a:pPr algn="ctr" indent="0" marL="0">
-              <a:buNone/>
-            </a:pPr>
-            <a:r>
-              <a:rPr lang="en-US" sz="2000" b="1" dirty="0">
-                <a:solidFill>
-                  <a:srgbClr val="FFFFFF"/>
-                </a:solidFill>
-                <a:latin typeface="Cambria" pitchFamily="34" charset="0"/>
-                <a:ea typeface="Cambria" pitchFamily="34" charset="-122"/>
-                <a:cs typeface="Cambria" pitchFamily="34" charset="-120"/>
-              </a:rPr>
-              <a:t>2</a:t>
-            </a:r>
-            <a:endParaRPr lang="en-US" sz="2000" dirty="0"/>
-          </a:p>
-        </p:txBody>
-      </p:sp>
-      <p:sp>
-        <p:nvSpPr>
-          <p:cNvPr id="10" name="Text 8"/>
-          <p:cNvSpPr/>
-          <p:nvPr/>
-        </p:nvSpPr>
-        <p:spPr>
-          <a:xfrm>
-            <a:off x="1371600" y="3483864"/>
-            <a:ext cx="10332720" cy="411480"/>
-          </a:xfrm>
-          <a:prstGeom prst="rect">
-            <a:avLst/>
-          </a:prstGeom>
-          <a:noFill/>
-          <a:ln/>
-        </p:spPr>
-        <p:txBody>
-          <a:bodyPr wrap="square" rtlCol="0" anchor="ctr"/>
-          <a:lstStyle/>
-          <a:p>
-            <a:pPr indent="0" marL="0">
-              <a:buNone/>
-            </a:pPr>
-            <a:r>
-              <a:rPr lang="en-US" sz="1900" b="1" dirty="0">
+            <a:pPr indent="0" marL="0">
+              <a:buNone/>
+            </a:pPr>
+            <a:r>
+              <a:rPr lang="en-US" sz="1500" b="1" dirty="0">
                 <a:solidFill>
                   <a:srgbClr val="3F6F5F"/>
                 </a:solidFill>
-                <a:latin typeface="Cambria" pitchFamily="34" charset="0"/>
-                <a:ea typeface="Cambria" pitchFamily="34" charset="-122"/>
-                <a:cs typeface="Cambria" pitchFamily="34" charset="-120"/>
-              </a:rPr>
-              <a:t>Every count is a choice</a:t>
-            </a:r>
-            <a:endParaRPr lang="en-US" sz="1900" dirty="0"/>
-          </a:p>
-        </p:txBody>
-      </p:sp>
-      <p:sp>
-        <p:nvSpPr>
-          <p:cNvPr id="11" name="Text 9"/>
-          <p:cNvSpPr/>
-          <p:nvPr/>
-        </p:nvSpPr>
-        <p:spPr>
-          <a:xfrm>
-            <a:off x="1371600" y="3904488"/>
-            <a:ext cx="10332720" cy="914400"/>
+                <a:latin typeface="Calibri" pitchFamily="34" charset="0"/>
+                <a:ea typeface="Calibri" pitchFamily="34" charset="-122"/>
+                <a:cs typeface="Calibri" pitchFamily="34" charset="-120"/>
+              </a:rPr>
+              <a:t>Supplement</a:t>
+            </a:r>
+            <a:endParaRPr lang="en-US" sz="1500" dirty="0"/>
+          </a:p>
+        </p:txBody>
+      </p:sp>
+      <p:sp>
+        <p:nvSpPr>
+          <p:cNvPr id="8" name="Text 6"/>
+          <p:cNvSpPr/>
+          <p:nvPr/>
+        </p:nvSpPr>
+        <p:spPr>
+          <a:xfrm>
+            <a:off x="1051560" y="2944368"/>
+            <a:ext cx="10424160" cy="731520"/>
           </a:xfrm>
           <a:prstGeom prst="rect">
             <a:avLst/>
@@ -6571,13 +6353,10 @@
           <a:lstStyle/>
           <a:p>
             <a:pPr indent="0" marL="0">
-              <a:lnSpc>
-                <a:spcPct val="112000"/>
-              </a:lnSpc>
-              <a:buNone/>
-            </a:pPr>
-            <a:r>
-              <a:rPr lang="en-US" sz="1450" dirty="0">
+              <a:buNone/>
+            </a:pPr>
+            <a:r>
+              <a:rPr lang="en-US" sz="1400" dirty="0">
                 <a:solidFill>
                   <a:srgbClr val="1A1A1A"/>
                 </a:solidFill>
@@ -6585,27 +6364,25 @@
                 <a:ea typeface="Calibri" pitchFamily="34" charset="-122"/>
                 <a:cs typeface="Calibri" pitchFamily="34" charset="-120"/>
               </a:rPr>
-              <a:t>Tokens, stemming, the corpus, the chart's axis, each hides a decision you made.</a:t>
-            </a:r>
-            <a:endParaRPr lang="en-US" sz="1450" dirty="0"/>
-          </a:p>
-        </p:txBody>
-      </p:sp>
-      <p:sp>
-        <p:nvSpPr>
-          <p:cNvPr id="12" name="Shape 10"/>
-          <p:cNvSpPr/>
-          <p:nvPr/>
-        </p:nvSpPr>
-        <p:spPr>
-          <a:xfrm>
-            <a:off x="640080" y="4983480"/>
-            <a:ext cx="457200" cy="457200"/>
-          </a:xfrm>
-          <a:prstGeom prst="roundRect">
-            <a:avLst>
-              <a:gd name="adj" fmla="val 16000"/>
-            </a:avLst>
+              <a:t>Zipf's law, the straight line in every text</a:t>
+            </a:r>
+            <a:endParaRPr lang="en-US" sz="1400" dirty="0"/>
+          </a:p>
+        </p:txBody>
+      </p:sp>
+      <p:sp>
+        <p:nvSpPr>
+          <p:cNvPr id="9" name="Shape 7"/>
+          <p:cNvSpPr/>
+          <p:nvPr/>
+        </p:nvSpPr>
+        <p:spPr>
+          <a:xfrm>
+            <a:off x="640080" y="3593592"/>
+            <a:ext cx="219456" cy="219456"/>
+          </a:xfrm>
+          <a:prstGeom prst="ellipse">
+            <a:avLst/>
           </a:prstGeom>
           <a:solidFill>
             <a:srgbClr val="B9852F"/>
@@ -6615,14 +6392,14 @@
       </p:sp>
       <p:sp>
         <p:nvSpPr>
-          <p:cNvPr id="13" name="Text 11"/>
-          <p:cNvSpPr/>
-          <p:nvPr/>
-        </p:nvSpPr>
-        <p:spPr>
-          <a:xfrm>
-            <a:off x="640080" y="4983480"/>
-            <a:ext cx="457200" cy="457200"/>
+          <p:cNvPr id="10" name="Text 8"/>
+          <p:cNvSpPr/>
+          <p:nvPr/>
+        </p:nvSpPr>
+        <p:spPr>
+          <a:xfrm>
+            <a:off x="1051560" y="3520440"/>
+            <a:ext cx="10424160" cy="365760"/>
           </a:xfrm>
           <a:prstGeom prst="rect">
             <a:avLst/>
@@ -6634,73 +6411,34 @@
           <a:bodyPr wrap="square" rtlCol="0" anchor="ctr"/>
           <a:lstStyle/>
           <a:p>
-            <a:pPr algn="ctr" indent="0" marL="0">
-              <a:buNone/>
-            </a:pPr>
-            <a:r>
-              <a:rPr lang="en-US" sz="2000" b="1" dirty="0">
-                <a:solidFill>
-                  <a:srgbClr val="FFFFFF"/>
-                </a:solidFill>
-                <a:latin typeface="Cambria" pitchFamily="34" charset="0"/>
-                <a:ea typeface="Cambria" pitchFamily="34" charset="-122"/>
-                <a:cs typeface="Cambria" pitchFamily="34" charset="-120"/>
-              </a:rPr>
-              <a:t>3</a:t>
-            </a:r>
-            <a:endParaRPr lang="en-US" sz="2000" dirty="0"/>
-          </a:p>
-        </p:txBody>
-      </p:sp>
-      <p:sp>
-        <p:nvSpPr>
-          <p:cNvPr id="14" name="Text 12"/>
-          <p:cNvSpPr/>
-          <p:nvPr/>
-        </p:nvSpPr>
-        <p:spPr>
-          <a:xfrm>
-            <a:off x="1371600" y="4946904"/>
-            <a:ext cx="10332720" cy="411480"/>
-          </a:xfrm>
-          <a:prstGeom prst="rect">
-            <a:avLst/>
-          </a:prstGeom>
-          <a:noFill/>
-          <a:ln/>
-        </p:spPr>
-        <p:txBody>
-          <a:bodyPr wrap="square" rtlCol="0" anchor="ctr"/>
-          <a:lstStyle/>
-          <a:p>
-            <a:pPr indent="0" marL="0">
-              <a:buNone/>
-            </a:pPr>
-            <a:r>
-              <a:rPr lang="en-US" sz="1900" b="1" dirty="0">
+            <a:pPr indent="0" marL="0">
+              <a:buNone/>
+            </a:pPr>
+            <a:r>
+              <a:rPr lang="en-US" sz="1500" b="1" dirty="0">
                 <a:solidFill>
                   <a:srgbClr val="B9852F"/>
                 </a:solidFill>
-                <a:latin typeface="Cambria" pitchFamily="34" charset="0"/>
-                <a:ea typeface="Cambria" pitchFamily="34" charset="-122"/>
-                <a:cs typeface="Cambria" pitchFamily="34" charset="-120"/>
-              </a:rPr>
-              <a:t>Is the difference real?</a:t>
-            </a:r>
-            <a:endParaRPr lang="en-US" sz="1900" dirty="0"/>
-          </a:p>
-        </p:txBody>
-      </p:sp>
-      <p:sp>
-        <p:nvSpPr>
-          <p:cNvPr id="15" name="Text 13"/>
-          <p:cNvSpPr/>
-          <p:nvPr/>
-        </p:nvSpPr>
-        <p:spPr>
-          <a:xfrm>
-            <a:off x="1371600" y="5367528"/>
-            <a:ext cx="10332720" cy="914400"/>
+                <a:latin typeface="Calibri" pitchFamily="34" charset="0"/>
+                <a:ea typeface="Calibri" pitchFamily="34" charset="-122"/>
+                <a:cs typeface="Calibri" pitchFamily="34" charset="-120"/>
+              </a:rPr>
+              <a:t>Deeper (optional)</a:t>
+            </a:r>
+            <a:endParaRPr lang="en-US" sz="1500" dirty="0"/>
+          </a:p>
+        </p:txBody>
+      </p:sp>
+      <p:sp>
+        <p:nvSpPr>
+          <p:cNvPr id="11" name="Text 9"/>
+          <p:cNvSpPr/>
+          <p:nvPr/>
+        </p:nvSpPr>
+        <p:spPr>
+          <a:xfrm>
+            <a:off x="1051560" y="3904488"/>
+            <a:ext cx="10424160" cy="731520"/>
           </a:xfrm>
           <a:prstGeom prst="rect">
             <a:avLst/>
@@ -6715,13 +6453,10 @@
           <a:lstStyle/>
           <a:p>
             <a:pPr indent="0" marL="0">
-              <a:lnSpc>
-                <a:spcPct val="112000"/>
-              </a:lnSpc>
-              <a:buNone/>
-            </a:pPr>
-            <a:r>
-              <a:rPr lang="en-US" sz="1450" dirty="0">
+              <a:buNone/>
+            </a:pPr>
+            <a:r>
+              <a:rPr lang="en-US" sz="1400" dirty="0">
                 <a:solidFill>
                   <a:srgbClr val="1A1A1A"/>
                 </a:solidFill>
@@ -6729,9 +6464,209 @@
                 <a:ea typeface="Calibri" pitchFamily="34" charset="-122"/>
                 <a:cs typeface="Calibri" pitchFamily="34" charset="-120"/>
               </a:rPr>
-              <a:t>Shuffle the labels and count again, one thousand times; if chance often matches your gap, do not trust it.</a:t>
-            </a:r>
-            <a:endParaRPr lang="en-US" sz="1450" dirty="0"/>
+              <a:t>Grimmer &amp;amp; Stewart, Text as Data (2013), §1–4: all quantitative models of language are wrong, but some are useful</a:t>
+            </a:r>
+            <a:endParaRPr lang="en-US" sz="1400" dirty="0"/>
+          </a:p>
+        </p:txBody>
+      </p:sp>
+      <p:sp>
+        <p:nvSpPr>
+          <p:cNvPr id="12" name="Shape 10"/>
+          <p:cNvSpPr/>
+          <p:nvPr/>
+        </p:nvSpPr>
+        <p:spPr>
+          <a:xfrm>
+            <a:off x="640080" y="4553712"/>
+            <a:ext cx="219456" cy="219456"/>
+          </a:xfrm>
+          <a:prstGeom prst="ellipse">
+            <a:avLst/>
+          </a:prstGeom>
+          <a:solidFill>
+            <a:srgbClr val="3F6F5F"/>
+          </a:solidFill>
+          <a:ln/>
+        </p:spPr>
+      </p:sp>
+      <p:sp>
+        <p:nvSpPr>
+          <p:cNvPr id="13" name="Text 11"/>
+          <p:cNvSpPr/>
+          <p:nvPr/>
+        </p:nvSpPr>
+        <p:spPr>
+          <a:xfrm>
+            <a:off x="1051560" y="4480560"/>
+            <a:ext cx="10424160" cy="365760"/>
+          </a:xfrm>
+          <a:prstGeom prst="rect">
+            <a:avLst/>
+          </a:prstGeom>
+          <a:noFill/>
+          <a:ln/>
+        </p:spPr>
+        <p:txBody>
+          <a:bodyPr wrap="square" rtlCol="0" anchor="ctr"/>
+          <a:lstStyle/>
+          <a:p>
+            <a:pPr indent="0" marL="0">
+              <a:buNone/>
+            </a:pPr>
+            <a:r>
+              <a:rPr lang="en-US" sz="1500" b="1" dirty="0">
+                <a:solidFill>
+                  <a:srgbClr val="3F6F5F"/>
+                </a:solidFill>
+                <a:latin typeface="Calibri" pitchFamily="34" charset="0"/>
+                <a:ea typeface="Calibri" pitchFamily="34" charset="-122"/>
+                <a:cs typeface="Calibri" pitchFamily="34" charset="-120"/>
+              </a:rPr>
+              <a:t>Sketch</a:t>
+            </a:r>
+            <a:endParaRPr lang="en-US" sz="1500" dirty="0"/>
+          </a:p>
+        </p:txBody>
+      </p:sp>
+      <p:sp>
+        <p:nvSpPr>
+          <p:cNvPr id="14" name="Text 12"/>
+          <p:cNvSpPr/>
+          <p:nvPr/>
+        </p:nvSpPr>
+        <p:spPr>
+          <a:xfrm>
+            <a:off x="1051560" y="4864608"/>
+            <a:ext cx="10424160" cy="731520"/>
+          </a:xfrm>
+          <a:prstGeom prst="rect">
+            <a:avLst/>
+          </a:prstGeom>
+          <a:noFill/>
+          <a:ln/>
+        </p:spPr>
+        <p:txBody>
+          <a:bodyPr wrap="square" rtlCol="0" anchor="t">
+            <a:spAutoFit/>
+          </a:bodyPr>
+          <a:lstStyle/>
+          <a:p>
+            <a:pPr indent="0" marL="0">
+              <a:buNone/>
+            </a:pPr>
+            <a:r>
+              <a:rPr lang="en-US" sz="1400" dirty="0">
+                <a:solidFill>
+                  <a:srgbClr val="1A1A1A"/>
+                </a:solidFill>
+                <a:latin typeface="Calibri" pitchFamily="34" charset="0"/>
+                <a:ea typeface="Calibri" pitchFamily="34" charset="-122"/>
+                <a:cs typeface="Calibri" pitchFamily="34" charset="-120"/>
+              </a:rPr>
+              <a:t>Count something in a text you care about; one chart; one sentence naming a choice. If the count compares two things, shuffle-test the gap.</a:t>
+            </a:r>
+            <a:endParaRPr lang="en-US" sz="1400" dirty="0"/>
+          </a:p>
+        </p:txBody>
+      </p:sp>
+      <p:sp>
+        <p:nvSpPr>
+          <p:cNvPr id="15" name="Shape 13"/>
+          <p:cNvSpPr/>
+          <p:nvPr/>
+        </p:nvSpPr>
+        <p:spPr>
+          <a:xfrm>
+            <a:off x="640080" y="5513832"/>
+            <a:ext cx="219456" cy="219456"/>
+          </a:xfrm>
+          <a:prstGeom prst="ellipse">
+            <a:avLst/>
+          </a:prstGeom>
+          <a:solidFill>
+            <a:srgbClr val="7A3B2E"/>
+          </a:solidFill>
+          <a:ln/>
+        </p:spPr>
+      </p:sp>
+      <p:sp>
+        <p:nvSpPr>
+          <p:cNvPr id="16" name="Text 14"/>
+          <p:cNvSpPr/>
+          <p:nvPr/>
+        </p:nvSpPr>
+        <p:spPr>
+          <a:xfrm>
+            <a:off x="1051560" y="5440680"/>
+            <a:ext cx="10424160" cy="365760"/>
+          </a:xfrm>
+          <a:prstGeom prst="rect">
+            <a:avLst/>
+          </a:prstGeom>
+          <a:noFill/>
+          <a:ln/>
+        </p:spPr>
+        <p:txBody>
+          <a:bodyPr wrap="square" rtlCol="0" anchor="ctr"/>
+          <a:lstStyle/>
+          <a:p>
+            <a:pPr indent="0" marL="0">
+              <a:buNone/>
+            </a:pPr>
+            <a:r>
+              <a:rPr lang="en-US" sz="1500" b="1" dirty="0">
+                <a:solidFill>
+                  <a:srgbClr val="7A3B2E"/>
+                </a:solidFill>
+                <a:latin typeface="Calibri" pitchFamily="34" charset="0"/>
+                <a:ea typeface="Calibri" pitchFamily="34" charset="-122"/>
+                <a:cs typeface="Calibri" pitchFamily="34" charset="-120"/>
+              </a:rPr>
+              <a:t>Check (AI closed)</a:t>
+            </a:r>
+            <a:endParaRPr lang="en-US" sz="1500" dirty="0"/>
+          </a:p>
+        </p:txBody>
+      </p:sp>
+      <p:sp>
+        <p:nvSpPr>
+          <p:cNvPr id="17" name="Text 15"/>
+          <p:cNvSpPr/>
+          <p:nvPr/>
+        </p:nvSpPr>
+        <p:spPr>
+          <a:xfrm>
+            <a:off x="1051560" y="5824728"/>
+            <a:ext cx="10424160" cy="731520"/>
+          </a:xfrm>
+          <a:prstGeom prst="rect">
+            <a:avLst/>
+          </a:prstGeom>
+          <a:noFill/>
+          <a:ln/>
+        </p:spPr>
+        <p:txBody>
+          <a:bodyPr wrap="square" rtlCol="0" anchor="t">
+            <a:spAutoFit/>
+          </a:bodyPr>
+          <a:lstStyle/>
+          <a:p>
+            <a:pPr indent="0" marL="0">
+              <a:buNone/>
+            </a:pPr>
+            <a:r>
+              <a:rPr lang="en-US" sz="1400" dirty="0">
+                <a:solidFill>
+                  <a:srgbClr val="1A1A1A"/>
+                </a:solidFill>
+                <a:latin typeface="Calibri" pitchFamily="34" charset="0"/>
+                <a:ea typeface="Calibri" pitchFamily="34" charset="-122"/>
+                <a:cs typeface="Calibri" pitchFamily="34" charset="-120"/>
+              </a:rPr>
+              <a:t>Explain it: why two tokenizers split a sentence differently, and what your stemming choice changed. (Competencies 3, 5.)</a:t>
+            </a:r>
+            <a:endParaRPr lang="en-US" sz="1400" dirty="0"/>
           </a:p>
         </p:txBody>
       </p:sp>
@@ -6746,6 +6681,548 @@
 <file path=ppt/slides/slide17.xml><?xml version="1.0" encoding="utf-8"?>
 <p:sld xmlns:a="http://schemas.openxmlformats.org/drawingml/2006/main" xmlns:r="http://schemas.openxmlformats.org/officeDocument/2006/relationships" xmlns:p="http://schemas.openxmlformats.org/presentationml/2006/main">
   <p:cSld name="Slide 17">
+    <p:bg>
+      <p:bgPr>
+        <a:solidFill>
+          <a:srgbClr val="FFFFFF"/>
+        </a:solidFill>
+      </p:bgPr>
+    </p:bg>
+    <p:spTree>
+      <p:nvGrpSpPr>
+        <p:cNvPr id="1" name=""/>
+        <p:cNvGrpSpPr/>
+        <p:nvPr/>
+      </p:nvGrpSpPr>
+      <p:grpSpPr>
+        <a:xfrm>
+          <a:off x="0" y="0"/>
+          <a:ext cx="0" cy="0"/>
+          <a:chOff x="0" y="0"/>
+          <a:chExt cx="0" cy="0"/>
+        </a:xfrm>
+      </p:grpSpPr>
+      <p:sp>
+        <p:nvSpPr>
+          <p:cNvPr id="2" name="Text 0"/>
+          <p:cNvSpPr/>
+          <p:nvPr/>
+        </p:nvSpPr>
+        <p:spPr>
+          <a:xfrm>
+            <a:off x="640080" y="640080"/>
+            <a:ext cx="10058400" cy="320040"/>
+          </a:xfrm>
+          <a:prstGeom prst="rect">
+            <a:avLst/>
+          </a:prstGeom>
+          <a:noFill/>
+          <a:ln/>
+        </p:spPr>
+        <p:txBody>
+          <a:bodyPr wrap="square" rtlCol="0" anchor="ctr"/>
+          <a:lstStyle/>
+          <a:p>
+            <a:pPr indent="0" marL="0">
+              <a:buNone/>
+            </a:pPr>
+            <a:r>
+              <a:rPr lang="en-US" sz="1300" b="1" spc="300" kern="0" dirty="0">
+                <a:solidFill>
+                  <a:srgbClr val="7A3B2E"/>
+                </a:solidFill>
+                <a:latin typeface="Calibri" pitchFamily="34" charset="0"/>
+                <a:ea typeface="Calibri" pitchFamily="34" charset="-122"/>
+                <a:cs typeface="Calibri" pitchFamily="34" charset="-120"/>
+              </a:rPr>
+              <a:t>HOW THIS WEEK CONNECTS</a:t>
+            </a:r>
+            <a:endParaRPr lang="en-US" sz="1300" dirty="0"/>
+          </a:p>
+        </p:txBody>
+      </p:sp>
+      <p:sp>
+        <p:nvSpPr>
+          <p:cNvPr id="3" name="Text 1"/>
+          <p:cNvSpPr/>
+          <p:nvPr/>
+        </p:nvSpPr>
+        <p:spPr>
+          <a:xfrm>
+            <a:off x="640080" y="987552"/>
+            <a:ext cx="10058400" cy="640080"/>
+          </a:xfrm>
+          <a:prstGeom prst="rect">
+            <a:avLst/>
+          </a:prstGeom>
+          <a:noFill/>
+          <a:ln/>
+        </p:spPr>
+        <p:txBody>
+          <a:bodyPr wrap="square" rtlCol="0" anchor="ctr"/>
+          <a:lstStyle/>
+          <a:p>
+            <a:pPr indent="0" marL="0">
+              <a:buNone/>
+            </a:pPr>
+            <a:r>
+              <a:rPr lang="en-US" sz="2800" b="1" dirty="0">
+                <a:solidFill>
+                  <a:srgbClr val="1A1A1A"/>
+                </a:solidFill>
+                <a:latin typeface="Cambria" pitchFamily="34" charset="0"/>
+                <a:ea typeface="Cambria" pitchFamily="34" charset="-122"/>
+                <a:cs typeface="Cambria" pitchFamily="34" charset="-120"/>
+              </a:rPr>
+              <a:t>The course's through-lines</a:t>
+            </a:r>
+            <a:endParaRPr lang="en-US" sz="2800" dirty="0"/>
+          </a:p>
+        </p:txBody>
+      </p:sp>
+      <p:sp>
+        <p:nvSpPr>
+          <p:cNvPr id="4" name="Shape 2"/>
+          <p:cNvSpPr/>
+          <p:nvPr/>
+        </p:nvSpPr>
+        <p:spPr>
+          <a:xfrm>
+            <a:off x="640080" y="2057400"/>
+            <a:ext cx="457200" cy="457200"/>
+          </a:xfrm>
+          <a:prstGeom prst="roundRect">
+            <a:avLst>
+              <a:gd name="adj" fmla="val 16000"/>
+            </a:avLst>
+          </a:prstGeom>
+          <a:solidFill>
+            <a:srgbClr val="7A3B2E"/>
+          </a:solidFill>
+          <a:ln/>
+        </p:spPr>
+      </p:sp>
+      <p:sp>
+        <p:nvSpPr>
+          <p:cNvPr id="5" name="Text 3"/>
+          <p:cNvSpPr/>
+          <p:nvPr/>
+        </p:nvSpPr>
+        <p:spPr>
+          <a:xfrm>
+            <a:off x="640080" y="2057400"/>
+            <a:ext cx="457200" cy="457200"/>
+          </a:xfrm>
+          <a:prstGeom prst="rect">
+            <a:avLst/>
+          </a:prstGeom>
+          <a:noFill/>
+          <a:ln/>
+        </p:spPr>
+        <p:txBody>
+          <a:bodyPr wrap="square" rtlCol="0" anchor="ctr"/>
+          <a:lstStyle/>
+          <a:p>
+            <a:pPr algn="ctr" indent="0" marL="0">
+              <a:buNone/>
+            </a:pPr>
+            <a:r>
+              <a:rPr lang="en-US" sz="2000" b="1" dirty="0">
+                <a:solidFill>
+                  <a:srgbClr val="FFFFFF"/>
+                </a:solidFill>
+                <a:latin typeface="Cambria" pitchFamily="34" charset="0"/>
+                <a:ea typeface="Cambria" pitchFamily="34" charset="-122"/>
+                <a:cs typeface="Cambria" pitchFamily="34" charset="-120"/>
+              </a:rPr>
+              <a:t>1</a:t>
+            </a:r>
+            <a:endParaRPr lang="en-US" sz="2000" dirty="0"/>
+          </a:p>
+        </p:txBody>
+      </p:sp>
+      <p:sp>
+        <p:nvSpPr>
+          <p:cNvPr id="6" name="Text 4"/>
+          <p:cNvSpPr/>
+          <p:nvPr/>
+        </p:nvSpPr>
+        <p:spPr>
+          <a:xfrm>
+            <a:off x="1371600" y="2020824"/>
+            <a:ext cx="10332720" cy="411480"/>
+          </a:xfrm>
+          <a:prstGeom prst="rect">
+            <a:avLst/>
+          </a:prstGeom>
+          <a:noFill/>
+          <a:ln/>
+        </p:spPr>
+        <p:txBody>
+          <a:bodyPr wrap="square" rtlCol="0" anchor="ctr"/>
+          <a:lstStyle/>
+          <a:p>
+            <a:pPr indent="0" marL="0">
+              <a:buNone/>
+            </a:pPr>
+            <a:r>
+              <a:rPr lang="en-US" sz="1900" b="1" dirty="0">
+                <a:solidFill>
+                  <a:srgbClr val="7A3B2E"/>
+                </a:solidFill>
+                <a:latin typeface="Cambria" pitchFamily="34" charset="0"/>
+                <a:ea typeface="Cambria" pitchFamily="34" charset="-122"/>
+                <a:cs typeface="Cambria" pitchFamily="34" charset="-120"/>
+              </a:rPr>
+              <a:t>Beyond counting</a:t>
+            </a:r>
+            <a:endParaRPr lang="en-US" sz="1900" dirty="0"/>
+          </a:p>
+        </p:txBody>
+      </p:sp>
+      <p:sp>
+        <p:nvSpPr>
+          <p:cNvPr id="7" name="Text 5"/>
+          <p:cNvSpPr/>
+          <p:nvPr/>
+        </p:nvSpPr>
+        <p:spPr>
+          <a:xfrm>
+            <a:off x="1371600" y="2441448"/>
+            <a:ext cx="10332720" cy="914400"/>
+          </a:xfrm>
+          <a:prstGeom prst="rect">
+            <a:avLst/>
+          </a:prstGeom>
+          <a:noFill/>
+          <a:ln/>
+        </p:spPr>
+        <p:txBody>
+          <a:bodyPr wrap="square" rtlCol="0" anchor="t">
+            <a:spAutoFit/>
+          </a:bodyPr>
+          <a:lstStyle/>
+          <a:p>
+            <a:pPr indent="0" marL="0">
+              <a:lnSpc>
+                <a:spcPct val="112000"/>
+              </a:lnSpc>
+              <a:buNone/>
+            </a:pPr>
+            <a:r>
+              <a:rPr lang="en-US" sz="1450" dirty="0">
+                <a:solidFill>
+                  <a:srgbClr val="1A1A1A"/>
+                </a:solidFill>
+                <a:latin typeface="Calibri" pitchFamily="34" charset="0"/>
+                <a:ea typeface="Calibri" pitchFamily="34" charset="-122"/>
+                <a:cs typeface="Calibri" pitchFamily="34" charset="-120"/>
+              </a:rPr>
+              <a:t>Counting is the simplest tool and has no notion of meaning. Week 5 addresses that limit.</a:t>
+            </a:r>
+            <a:endParaRPr lang="en-US" sz="1450" dirty="0"/>
+          </a:p>
+        </p:txBody>
+      </p:sp>
+      <p:sp>
+        <p:nvSpPr>
+          <p:cNvPr id="8" name="Shape 6"/>
+          <p:cNvSpPr/>
+          <p:nvPr/>
+        </p:nvSpPr>
+        <p:spPr>
+          <a:xfrm>
+            <a:off x="640080" y="3520440"/>
+            <a:ext cx="457200" cy="457200"/>
+          </a:xfrm>
+          <a:prstGeom prst="roundRect">
+            <a:avLst>
+              <a:gd name="adj" fmla="val 16000"/>
+            </a:avLst>
+          </a:prstGeom>
+          <a:solidFill>
+            <a:srgbClr val="3F6F5F"/>
+          </a:solidFill>
+          <a:ln/>
+        </p:spPr>
+      </p:sp>
+      <p:sp>
+        <p:nvSpPr>
+          <p:cNvPr id="9" name="Text 7"/>
+          <p:cNvSpPr/>
+          <p:nvPr/>
+        </p:nvSpPr>
+        <p:spPr>
+          <a:xfrm>
+            <a:off x="640080" y="3520440"/>
+            <a:ext cx="457200" cy="457200"/>
+          </a:xfrm>
+          <a:prstGeom prst="rect">
+            <a:avLst/>
+          </a:prstGeom>
+          <a:noFill/>
+          <a:ln/>
+        </p:spPr>
+        <p:txBody>
+          <a:bodyPr wrap="square" rtlCol="0" anchor="ctr"/>
+          <a:lstStyle/>
+          <a:p>
+            <a:pPr algn="ctr" indent="0" marL="0">
+              <a:buNone/>
+            </a:pPr>
+            <a:r>
+              <a:rPr lang="en-US" sz="2000" b="1" dirty="0">
+                <a:solidFill>
+                  <a:srgbClr val="FFFFFF"/>
+                </a:solidFill>
+                <a:latin typeface="Cambria" pitchFamily="34" charset="0"/>
+                <a:ea typeface="Cambria" pitchFamily="34" charset="-122"/>
+                <a:cs typeface="Cambria" pitchFamily="34" charset="-120"/>
+              </a:rPr>
+              <a:t>2</a:t>
+            </a:r>
+            <a:endParaRPr lang="en-US" sz="2000" dirty="0"/>
+          </a:p>
+        </p:txBody>
+      </p:sp>
+      <p:sp>
+        <p:nvSpPr>
+          <p:cNvPr id="10" name="Text 8"/>
+          <p:cNvSpPr/>
+          <p:nvPr/>
+        </p:nvSpPr>
+        <p:spPr>
+          <a:xfrm>
+            <a:off x="1371600" y="3483864"/>
+            <a:ext cx="10332720" cy="411480"/>
+          </a:xfrm>
+          <a:prstGeom prst="rect">
+            <a:avLst/>
+          </a:prstGeom>
+          <a:noFill/>
+          <a:ln/>
+        </p:spPr>
+        <p:txBody>
+          <a:bodyPr wrap="square" rtlCol="0" anchor="ctr"/>
+          <a:lstStyle/>
+          <a:p>
+            <a:pPr indent="0" marL="0">
+              <a:buNone/>
+            </a:pPr>
+            <a:r>
+              <a:rPr lang="en-US" sz="1900" b="1" dirty="0">
+                <a:solidFill>
+                  <a:srgbClr val="3F6F5F"/>
+                </a:solidFill>
+                <a:latin typeface="Cambria" pitchFamily="34" charset="0"/>
+                <a:ea typeface="Cambria" pitchFamily="34" charset="-122"/>
+                <a:cs typeface="Cambria" pitchFamily="34" charset="-120"/>
+              </a:rPr>
+              <a:t>Every count is a choice</a:t>
+            </a:r>
+            <a:endParaRPr lang="en-US" sz="1900" dirty="0"/>
+          </a:p>
+        </p:txBody>
+      </p:sp>
+      <p:sp>
+        <p:nvSpPr>
+          <p:cNvPr id="11" name="Text 9"/>
+          <p:cNvSpPr/>
+          <p:nvPr/>
+        </p:nvSpPr>
+        <p:spPr>
+          <a:xfrm>
+            <a:off x="1371600" y="3904488"/>
+            <a:ext cx="10332720" cy="914400"/>
+          </a:xfrm>
+          <a:prstGeom prst="rect">
+            <a:avLst/>
+          </a:prstGeom>
+          <a:noFill/>
+          <a:ln/>
+        </p:spPr>
+        <p:txBody>
+          <a:bodyPr wrap="square" rtlCol="0" anchor="t">
+            <a:spAutoFit/>
+          </a:bodyPr>
+          <a:lstStyle/>
+          <a:p>
+            <a:pPr indent="0" marL="0">
+              <a:lnSpc>
+                <a:spcPct val="112000"/>
+              </a:lnSpc>
+              <a:buNone/>
+            </a:pPr>
+            <a:r>
+              <a:rPr lang="en-US" sz="1450" dirty="0">
+                <a:solidFill>
+                  <a:srgbClr val="1A1A1A"/>
+                </a:solidFill>
+                <a:latin typeface="Calibri" pitchFamily="34" charset="0"/>
+                <a:ea typeface="Calibri" pitchFamily="34" charset="-122"/>
+                <a:cs typeface="Calibri" pitchFamily="34" charset="-120"/>
+              </a:rPr>
+              <a:t>Tokens, stemming, the corpus, the chart's axis, each hides a decision you made.</a:t>
+            </a:r>
+            <a:endParaRPr lang="en-US" sz="1450" dirty="0"/>
+          </a:p>
+        </p:txBody>
+      </p:sp>
+      <p:sp>
+        <p:nvSpPr>
+          <p:cNvPr id="12" name="Shape 10"/>
+          <p:cNvSpPr/>
+          <p:nvPr/>
+        </p:nvSpPr>
+        <p:spPr>
+          <a:xfrm>
+            <a:off x="640080" y="4983480"/>
+            <a:ext cx="457200" cy="457200"/>
+          </a:xfrm>
+          <a:prstGeom prst="roundRect">
+            <a:avLst>
+              <a:gd name="adj" fmla="val 16000"/>
+            </a:avLst>
+          </a:prstGeom>
+          <a:solidFill>
+            <a:srgbClr val="B9852F"/>
+          </a:solidFill>
+          <a:ln/>
+        </p:spPr>
+      </p:sp>
+      <p:sp>
+        <p:nvSpPr>
+          <p:cNvPr id="13" name="Text 11"/>
+          <p:cNvSpPr/>
+          <p:nvPr/>
+        </p:nvSpPr>
+        <p:spPr>
+          <a:xfrm>
+            <a:off x="640080" y="4983480"/>
+            <a:ext cx="457200" cy="457200"/>
+          </a:xfrm>
+          <a:prstGeom prst="rect">
+            <a:avLst/>
+          </a:prstGeom>
+          <a:noFill/>
+          <a:ln/>
+        </p:spPr>
+        <p:txBody>
+          <a:bodyPr wrap="square" rtlCol="0" anchor="ctr"/>
+          <a:lstStyle/>
+          <a:p>
+            <a:pPr algn="ctr" indent="0" marL="0">
+              <a:buNone/>
+            </a:pPr>
+            <a:r>
+              <a:rPr lang="en-US" sz="2000" b="1" dirty="0">
+                <a:solidFill>
+                  <a:srgbClr val="FFFFFF"/>
+                </a:solidFill>
+                <a:latin typeface="Cambria" pitchFamily="34" charset="0"/>
+                <a:ea typeface="Cambria" pitchFamily="34" charset="-122"/>
+                <a:cs typeface="Cambria" pitchFamily="34" charset="-120"/>
+              </a:rPr>
+              <a:t>3</a:t>
+            </a:r>
+            <a:endParaRPr lang="en-US" sz="2000" dirty="0"/>
+          </a:p>
+        </p:txBody>
+      </p:sp>
+      <p:sp>
+        <p:nvSpPr>
+          <p:cNvPr id="14" name="Text 12"/>
+          <p:cNvSpPr/>
+          <p:nvPr/>
+        </p:nvSpPr>
+        <p:spPr>
+          <a:xfrm>
+            <a:off x="1371600" y="4946904"/>
+            <a:ext cx="10332720" cy="411480"/>
+          </a:xfrm>
+          <a:prstGeom prst="rect">
+            <a:avLst/>
+          </a:prstGeom>
+          <a:noFill/>
+          <a:ln/>
+        </p:spPr>
+        <p:txBody>
+          <a:bodyPr wrap="square" rtlCol="0" anchor="ctr"/>
+          <a:lstStyle/>
+          <a:p>
+            <a:pPr indent="0" marL="0">
+              <a:buNone/>
+            </a:pPr>
+            <a:r>
+              <a:rPr lang="en-US" sz="1900" b="1" dirty="0">
+                <a:solidFill>
+                  <a:srgbClr val="B9852F"/>
+                </a:solidFill>
+                <a:latin typeface="Cambria" pitchFamily="34" charset="0"/>
+                <a:ea typeface="Cambria" pitchFamily="34" charset="-122"/>
+                <a:cs typeface="Cambria" pitchFamily="34" charset="-120"/>
+              </a:rPr>
+              <a:t>Is the difference real?</a:t>
+            </a:r>
+            <a:endParaRPr lang="en-US" sz="1900" dirty="0"/>
+          </a:p>
+        </p:txBody>
+      </p:sp>
+      <p:sp>
+        <p:nvSpPr>
+          <p:cNvPr id="15" name="Text 13"/>
+          <p:cNvSpPr/>
+          <p:nvPr/>
+        </p:nvSpPr>
+        <p:spPr>
+          <a:xfrm>
+            <a:off x="1371600" y="5367528"/>
+            <a:ext cx="10332720" cy="914400"/>
+          </a:xfrm>
+          <a:prstGeom prst="rect">
+            <a:avLst/>
+          </a:prstGeom>
+          <a:noFill/>
+          <a:ln/>
+        </p:spPr>
+        <p:txBody>
+          <a:bodyPr wrap="square" rtlCol="0" anchor="t">
+            <a:spAutoFit/>
+          </a:bodyPr>
+          <a:lstStyle/>
+          <a:p>
+            <a:pPr indent="0" marL="0">
+              <a:lnSpc>
+                <a:spcPct val="112000"/>
+              </a:lnSpc>
+              <a:buNone/>
+            </a:pPr>
+            <a:r>
+              <a:rPr lang="en-US" sz="1450" dirty="0">
+                <a:solidFill>
+                  <a:srgbClr val="1A1A1A"/>
+                </a:solidFill>
+                <a:latin typeface="Calibri" pitchFamily="34" charset="0"/>
+                <a:ea typeface="Calibri" pitchFamily="34" charset="-122"/>
+                <a:cs typeface="Calibri" pitchFamily="34" charset="-120"/>
+              </a:rPr>
+              <a:t>Shuffle the labels and count again, one thousand times; if chance often matches your gap, do not trust it.</a:t>
+            </a:r>
+            <a:endParaRPr lang="en-US" sz="1450" dirty="0"/>
+          </a:p>
+        </p:txBody>
+      </p:sp>
+    </p:spTree>
+  </p:cSld>
+  <p:clrMapOvr>
+    <a:masterClrMapping/>
+  </p:clrMapOvr>
+</p:sld>
+</file>
+
+<file path=ppt/slides/slide18.xml><?xml version="1.0" encoding="utf-8"?>
+<p:sld xmlns:a="http://schemas.openxmlformats.org/drawingml/2006/main" xmlns:r="http://schemas.openxmlformats.org/officeDocument/2006/relationships" xmlns:p="http://schemas.openxmlformats.org/presentationml/2006/main">
+  <p:cSld name="Slide 18">
     <p:bg>
       <p:bgPr>
         <a:solidFill>
@@ -9449,7 +9926,7 @@
                 <a:ea typeface="Cambria" pitchFamily="34" charset="-122"/>
                 <a:cs typeface="Cambria" pitchFamily="34" charset="-120"/>
               </a:rPr>
-              <a:t>Clustering: three communities, separable from counts alone</a:t>
+              <a:t>Documents as points: the idea of a space</a:t>
             </a:r>
             <a:endParaRPr lang="en-US" sz="3000" dirty="0"/>
           </a:p>
@@ -9484,7 +9961,7 @@
         <p:spPr>
           <a:xfrm>
             <a:off x="1097280" y="2240280"/>
-            <a:ext cx="10607040" cy="678180"/>
+            <a:ext cx="10607040" cy="1017270"/>
           </a:xfrm>
           <a:prstGeom prst="rect">
             <a:avLst/>
@@ -9505,7 +9982,7 @@
               <a:buNone/>
             </a:pPr>
             <a:r>
-              <a:rPr lang="en-US" sz="1500" dirty="0">
+              <a:rPr lang="en-US" sz="1650" dirty="0">
                 <a:solidFill>
                   <a:srgbClr val="1A1A1A"/>
                 </a:solidFill>
@@ -9513,9 +9990,9 @@
                 <a:ea typeface="Calibri" pitchFamily="34" charset="-122"/>
                 <a:cs typeface="Calibri" pitchFamily="34" charset="-120"/>
               </a:rPr>
-              <a:t>360 Reddit comments from r/buildapc, r/gardening, and r/relationship_advice, streamed live (analyze-only: counts and findings are published, the text and usernames never are). k-means gets no labels.</a:t>
-            </a:r>
-            <a:endParaRPr lang="en-US" sz="1500" dirty="0"/>
+              <a:t>A document's counts are a list of numbers, and a list of numbers is a coordinate. One axis per word, and every document becomes a point; the corpus becomes a cloud. In that space, near means similar vocabulary.</a:t>
+            </a:r>
+            <a:endParaRPr lang="en-US" sz="1650" dirty="0"/>
           </a:p>
         </p:txBody>
       </p:sp>
@@ -9527,7 +10004,7 @@
         </p:nvSpPr>
         <p:spPr>
           <a:xfrm>
-            <a:off x="640080" y="3009900"/>
+            <a:off x="640080" y="3348990"/>
             <a:ext cx="201168" cy="201168"/>
           </a:xfrm>
           <a:prstGeom prst="ellipse">
@@ -9547,8 +10024,8 @@
         </p:nvSpPr>
         <p:spPr>
           <a:xfrm>
-            <a:off x="1097280" y="2918460"/>
-            <a:ext cx="10607040" cy="678180"/>
+            <a:off x="1097280" y="3257550"/>
+            <a:ext cx="10607040" cy="1017270"/>
           </a:xfrm>
           <a:prstGeom prst="rect">
             <a:avLst/>
@@ -9569,7 +10046,7 @@
               <a:buNone/>
             </a:pPr>
             <a:r>
-              <a:rPr lang="en-US" sz="1500" dirty="0">
+              <a:rPr lang="en-US" sz="1650" dirty="0">
                 <a:solidFill>
                   <a:srgbClr val="1A1A1A"/>
                 </a:solidFill>
@@ -9577,9 +10054,9 @@
                 <a:ea typeface="Calibri" pitchFamily="34" charset="-122"/>
                 <a:cs typeface="Calibri" pitchFamily="34" charset="-120"/>
               </a:rPr>
-              <a:t>Raw counts: one blob, the everywhere-words dominate. tf-idf: better, still smeared. tf-idf compressed to 60 dimensions: about six comments in seven land with their community.</a:t>
-            </a:r>
-            <a:endParaRPr lang="en-US" sz="1500" dirty="0"/>
+              <a:t>Seen in the only size that fits on a slide: a two-word space. Gardening comments live along the plant axis, buildapc along the cpu axis, relationship_advice at the origin, where neither word is its vocabulary.</a:t>
+            </a:r>
+            <a:endParaRPr lang="en-US" sz="1650" dirty="0"/>
           </a:p>
         </p:txBody>
       </p:sp>
@@ -9591,7 +10068,7 @@
         </p:nvSpPr>
         <p:spPr>
           <a:xfrm>
-            <a:off x="640080" y="3688080"/>
+            <a:off x="640080" y="4366260"/>
             <a:ext cx="201168" cy="201168"/>
           </a:xfrm>
           <a:prstGeom prst="ellipse">
@@ -9611,8 +10088,8 @@
         </p:nvSpPr>
         <p:spPr>
           <a:xfrm>
-            <a:off x="1097280" y="3596640"/>
-            <a:ext cx="10607040" cy="678180"/>
+            <a:off x="1097280" y="4274820"/>
+            <a:ext cx="10607040" cy="1017270"/>
           </a:xfrm>
           <a:prstGeom prst="rect">
             <a:avLst/>
@@ -9633,7 +10110,7 @@
               <a:buNone/>
             </a:pPr>
             <a:r>
-              <a:rPr lang="en-US" sz="1500" dirty="0">
+              <a:rPr lang="en-US" sz="1650" dirty="0">
                 <a:solidFill>
                   <a:srgbClr val="1A1A1A"/>
                 </a:solidFill>
@@ -9641,9 +10118,9 @@
                 <a:ea typeface="Calibri" pitchFamily="34" charset="-122"/>
                 <a:cs typeface="Calibri" pitchFamily="34" charset="-120"/>
               </a:rPr>
-              <a:t>The algorithm never changed; the representation did. Same data, same k-means, three answers, which previews Week 5's whole move: replace word columns with learned dimensions.</a:t>
-            </a:r>
-            <a:endParaRPr lang="en-US" sz="1500" dirty="0"/>
+              <a:t>The real space has one axis per vocabulary word, about five thousand. Unpicturable, but the arithmetic is identical. Clustering finds neighborhoods in the cloud; PCA is a camera angle that flattens it to two axes for viewing.</a:t>
+            </a:r>
+            <a:endParaRPr lang="en-US" sz="1650" dirty="0"/>
           </a:p>
         </p:txBody>
       </p:sp>
@@ -9655,7 +10132,7 @@
         </p:nvSpPr>
         <p:spPr>
           <a:xfrm>
-            <a:off x="640080" y="4366260"/>
+            <a:off x="640080" y="5383530"/>
             <a:ext cx="201168" cy="201168"/>
           </a:xfrm>
           <a:prstGeom prst="ellipse">
@@ -9675,8 +10152,8 @@
         </p:nvSpPr>
         <p:spPr>
           <a:xfrm>
-            <a:off x="1097280" y="4274820"/>
-            <a:ext cx="10607040" cy="678180"/>
+            <a:off x="1097280" y="5292090"/>
+            <a:ext cx="10607040" cy="1017270"/>
           </a:xfrm>
           <a:prstGeom prst="rect">
             <a:avLst/>
@@ -9697,7 +10174,7 @@
               <a:buNone/>
             </a:pPr>
             <a:r>
-              <a:rPr lang="en-US" sz="1500" dirty="0">
+              <a:rPr lang="en-US" sz="1650" dirty="0">
                 <a:solidFill>
                   <a:srgbClr val="1A1A1A"/>
                 </a:solidFill>
@@ -9705,137 +10182,9 @@
                 <a:ea typeface="Calibri" pitchFamily="34" charset="-122"/>
                 <a:cs typeface="Calibri" pitchFamily="34" charset="-120"/>
               </a:rPr>
-              <a:t>Read the stragglers: a gardening comment about a partner sorts with relationship_advice. The cluster found vocabulary; vocabulary mostly tracks community. Name what separated before you claim it.</a:t>
-            </a:r>
-            <a:endParaRPr lang="en-US" sz="1500" dirty="0"/>
-          </a:p>
-        </p:txBody>
-      </p:sp>
-      <p:sp>
-        <p:nvSpPr>
-          <p:cNvPr id="13" name="Shape 11"/>
-          <p:cNvSpPr/>
-          <p:nvPr/>
-        </p:nvSpPr>
-        <p:spPr>
-          <a:xfrm>
-            <a:off x="640080" y="5044440"/>
-            <a:ext cx="201168" cy="201168"/>
-          </a:xfrm>
-          <a:prstGeom prst="ellipse">
-            <a:avLst/>
-          </a:prstGeom>
-          <a:solidFill>
-            <a:srgbClr val="3F6F5F"/>
-          </a:solidFill>
-          <a:ln/>
-        </p:spPr>
-      </p:sp>
-      <p:sp>
-        <p:nvSpPr>
-          <p:cNvPr id="14" name="Text 12"/>
-          <p:cNvSpPr/>
-          <p:nvPr/>
-        </p:nvSpPr>
-        <p:spPr>
-          <a:xfrm>
-            <a:off x="1097280" y="4953000"/>
-            <a:ext cx="10607040" cy="678180"/>
-          </a:xfrm>
-          <a:prstGeom prst="rect">
-            <a:avLst/>
-          </a:prstGeom>
-          <a:noFill/>
-          <a:ln/>
-        </p:spPr>
-        <p:txBody>
-          <a:bodyPr wrap="square" rtlCol="0" anchor="t">
-            <a:spAutoFit/>
-          </a:bodyPr>
-          <a:lstStyle/>
-          <a:p>
-            <a:pPr indent="0" marL="0">
-              <a:lnSpc>
-                <a:spcPct val="112000"/>
-              </a:lnSpc>
-              <a:buNone/>
-            </a:pPr>
-            <a:r>
-              <a:rPr lang="en-US" sz="1500" dirty="0">
-                <a:solidFill>
-                  <a:srgbClr val="1A1A1A"/>
-                </a:solidFill>
-                <a:latin typeface="Calibri" pitchFamily="34" charset="0"/>
-                <a:ea typeface="Calibri" pitchFamily="34" charset="-122"/>
-                <a:cs typeface="Calibri" pitchFamily="34" charset="-120"/>
-              </a:rPr>
-              <a:t>The hard version, in the go-further: r/sandiego against r/SanDiegan, one city, two communities. Clustering barely beats a coin flip, and even Week 3's supervised classifier reaches only about 60 percent. Topic is easy; community-within-topic is hard.</a:t>
-            </a:r>
-            <a:endParaRPr lang="en-US" sz="1500" dirty="0"/>
-          </a:p>
-        </p:txBody>
-      </p:sp>
-      <p:sp>
-        <p:nvSpPr>
-          <p:cNvPr id="15" name="Shape 13"/>
-          <p:cNvSpPr/>
-          <p:nvPr/>
-        </p:nvSpPr>
-        <p:spPr>
-          <a:xfrm>
-            <a:off x="640080" y="5722620"/>
-            <a:ext cx="201168" cy="201168"/>
-          </a:xfrm>
-          <a:prstGeom prst="ellipse">
-            <a:avLst/>
-          </a:prstGeom>
-          <a:solidFill>
-            <a:srgbClr val="B9852F"/>
-          </a:solidFill>
-          <a:ln/>
-        </p:spPr>
-      </p:sp>
-      <p:sp>
-        <p:nvSpPr>
-          <p:cNvPr id="16" name="Text 14"/>
-          <p:cNvSpPr/>
-          <p:nvPr/>
-        </p:nvSpPr>
-        <p:spPr>
-          <a:xfrm>
-            <a:off x="1097280" y="5631180"/>
-            <a:ext cx="10607040" cy="678180"/>
-          </a:xfrm>
-          <a:prstGeom prst="rect">
-            <a:avLst/>
-          </a:prstGeom>
-          <a:noFill/>
-          <a:ln/>
-        </p:spPr>
-        <p:txBody>
-          <a:bodyPr wrap="square" rtlCol="0" anchor="t">
-            <a:spAutoFit/>
-          </a:bodyPr>
-          <a:lstStyle/>
-          <a:p>
-            <a:pPr indent="0" marL="0">
-              <a:lnSpc>
-                <a:spcPct val="112000"/>
-              </a:lnSpc>
-              <a:buNone/>
-            </a:pPr>
-            <a:r>
-              <a:rPr lang="en-US" sz="1500" dirty="0">
-                <a:solidFill>
-                  <a:srgbClr val="1A1A1A"/>
-                </a:solidFill>
-                <a:latin typeface="Calibri" pitchFamily="34" charset="0"/>
-                <a:ea typeface="Calibri" pitchFamily="34" charset="-122"/>
-                <a:cs typeface="Calibri" pitchFamily="34" charset="-120"/>
-              </a:rPr>
-              <a:t>And the same move for pictures: twenty Met paintings counted into 27 color buckets, k-means, no labels. Portraits sort from landscapes three in four, and the stragglers (a brown winter landscape counts like a portrait) are the discussion.</a:t>
-            </a:r>
-            <a:endParaRPr lang="en-US" sz="1500" dirty="0"/>
+              <a:t>Week 5's embeddings are this exact move with learned axes: near comes to mean similar meaning instead of shared vocabulary. Whenever you read "embedding": a placement of things into a space where distance is designed to mean something.</a:t>
+            </a:r>
+            <a:endParaRPr lang="en-US" sz="1650" dirty="0"/>
           </a:p>
         </p:txBody>
       </p:sp>
@@ -9965,7 +10314,7 @@
                 <a:ea typeface="Cambria" pitchFamily="34" charset="-122"/>
                 <a:cs typeface="Cambria" pitchFamily="34" charset="-120"/>
               </a:rPr>
-              <a:t>Three ways to fool yourself with significance</a:t>
+              <a:t>Clustering: three communities, separable from counts alone</a:t>
             </a:r>
             <a:endParaRPr lang="en-US" sz="3000" dirty="0"/>
           </a:p>
@@ -10000,7 +10349,7 @@
         <p:spPr>
           <a:xfrm>
             <a:off x="1097280" y="2240280"/>
-            <a:ext cx="10607040" cy="1017270"/>
+            <a:ext cx="10607040" cy="678180"/>
           </a:xfrm>
           <a:prstGeom prst="rect">
             <a:avLst/>
@@ -10021,7 +10370,7 @@
               <a:buNone/>
             </a:pPr>
             <a:r>
-              <a:rPr lang="en-US" sz="1650" dirty="0">
+              <a:rPr lang="en-US" sz="1500" dirty="0">
                 <a:solidFill>
                   <a:srgbClr val="1A1A1A"/>
                 </a:solidFill>
@@ -10029,9 +10378,9 @@
                 <a:ea typeface="Calibri" pitchFamily="34" charset="-122"/>
                 <a:cs typeface="Calibri" pitchFamily="34" charset="-120"/>
               </a:rPr>
-              <a:t>Selection: we shuffle-tested our top keyness word and got p = 0. Of course: we picked it BECAUSE its gap was the most extreme of 1,500. State the hypothesis before looking, then test exactly that.</a:t>
-            </a:r>
-            <a:endParaRPr lang="en-US" sz="1650" dirty="0"/>
+              <a:t>360 Reddit comments from r/buildapc, r/gardening, and r/relationship_advice, streamed live (analyze-only: counts and findings are published, the text and usernames never are). k-means gets no labels.</a:t>
+            </a:r>
+            <a:endParaRPr lang="en-US" sz="1500" dirty="0"/>
           </a:p>
         </p:txBody>
       </p:sp>
@@ -10043,7 +10392,7 @@
         </p:nvSpPr>
         <p:spPr>
           <a:xfrm>
-            <a:off x="640080" y="3348990"/>
+            <a:off x="640080" y="3009900"/>
             <a:ext cx="201168" cy="201168"/>
           </a:xfrm>
           <a:prstGeom prst="ellipse">
@@ -10063,8 +10412,8 @@
         </p:nvSpPr>
         <p:spPr>
           <a:xfrm>
-            <a:off x="1097280" y="3257550"/>
-            <a:ext cx="10607040" cy="1017270"/>
+            <a:off x="1097280" y="2918460"/>
+            <a:ext cx="10607040" cy="678180"/>
           </a:xfrm>
           <a:prstGeom prst="rect">
             <a:avLst/>
@@ -10085,7 +10434,7 @@
               <a:buNone/>
             </a:pPr>
             <a:r>
-              <a:rPr lang="en-US" sz="1650" dirty="0">
+              <a:rPr lang="en-US" sz="1500" dirty="0">
                 <a:solidFill>
                   <a:srgbClr val="1A1A1A"/>
                 </a:solidFill>
@@ -10093,9 +10442,9 @@
                 <a:ea typeface="Calibri" pitchFamily="34" charset="-122"/>
                 <a:cs typeface="Calibri" pitchFamily="34" charset="-120"/>
               </a:rPr>
-              <a:t>Multiplicity: split one community's comments randomly in half and keyness still produces a convincing "distinctive vocabulary": pure noise. Test 1,500 words at p &lt; .05 and ~75 pass by luck. Bollen et al. counted 241 phrases. Defenses: correct the threshold, pre-register, or check winners on held-out data.</a:t>
-            </a:r>
-            <a:endParaRPr lang="en-US" sz="1650" dirty="0"/>
+              <a:t>Raw counts: one blob, the everywhere-words dominate. tf-idf: better, still smeared. tf-idf compressed to 60 dimensions: about six comments in seven land with their community.</a:t>
+            </a:r>
+            <a:endParaRPr lang="en-US" sz="1500" dirty="0"/>
           </a:p>
         </p:txBody>
       </p:sp>
@@ -10107,7 +10456,7 @@
         </p:nvSpPr>
         <p:spPr>
           <a:xfrm>
-            <a:off x="640080" y="4366260"/>
+            <a:off x="640080" y="3688080"/>
             <a:ext cx="201168" cy="201168"/>
           </a:xfrm>
           <a:prstGeom prst="ellipse">
@@ -10127,8 +10476,8 @@
         </p:nvSpPr>
         <p:spPr>
           <a:xfrm>
-            <a:off x="1097280" y="4274820"/>
-            <a:ext cx="10607040" cy="1017270"/>
+            <a:off x="1097280" y="3596640"/>
+            <a:ext cx="10607040" cy="678180"/>
           </a:xfrm>
           <a:prstGeom prst="rect">
             <a:avLst/>
@@ -10149,7 +10498,7 @@
               <a:buNone/>
             </a:pPr>
             <a:r>
-              <a:rPr lang="en-US" sz="1650" dirty="0">
+              <a:rPr lang="en-US" sz="1500" dirty="0">
                 <a:solidFill>
                   <a:srgbClr val="1A1A1A"/>
                 </a:solidFill>
@@ -10157,9 +10506,9 @@
                 <a:ea typeface="Calibri" pitchFamily="34" charset="-122"/>
                 <a:cs typeface="Calibri" pitchFamily="34" charset="-120"/>
               </a:rPr>
-              <a:t>Size: "significant" answers "is it chance?", never "does it matter?" With enough comments a microscopic gap passes. Report the effect and the p, both: "3.3 per 1,000 words more (p &lt; .001)".</a:t>
-            </a:r>
-            <a:endParaRPr lang="en-US" sz="1650" dirty="0"/>
+              <a:t>The algorithm never changed; the representation did. Same data, same k-means, three answers, which previews Week 5's whole move: replace word columns with learned dimensions.</a:t>
+            </a:r>
+            <a:endParaRPr lang="en-US" sz="1500" dirty="0"/>
           </a:p>
         </p:txBody>
       </p:sp>
@@ -10171,7 +10520,7 @@
         </p:nvSpPr>
         <p:spPr>
           <a:xfrm>
-            <a:off x="640080" y="5383530"/>
+            <a:off x="640080" y="4366260"/>
             <a:ext cx="201168" cy="201168"/>
           </a:xfrm>
           <a:prstGeom prst="ellipse">
@@ -10191,8 +10540,8 @@
         </p:nvSpPr>
         <p:spPr>
           <a:xfrm>
-            <a:off x="1097280" y="5292090"/>
-            <a:ext cx="10607040" cy="1017270"/>
+            <a:off x="1097280" y="4274820"/>
+            <a:ext cx="10607040" cy="678180"/>
           </a:xfrm>
           <a:prstGeom prst="rect">
             <a:avLst/>
@@ -10213,7 +10562,7 @@
               <a:buNone/>
             </a:pPr>
             <a:r>
-              <a:rPr lang="en-US" sz="1650" dirty="0">
+              <a:rPr lang="en-US" sz="1500" dirty="0">
                 <a:solidFill>
                   <a:srgbClr val="1A1A1A"/>
                 </a:solidFill>
@@ -10221,9 +10570,137 @@
                 <a:ea typeface="Calibri" pitchFamily="34" charset="-122"/>
                 <a:cs typeface="Calibri" pitchFamily="34" charset="-120"/>
               </a:rPr>
-              <a:t>The bootstrap closes the loop: resample your own comments 1,000 times for a confidence interval. The shuffle test asks "could it be zero?"; the bootstrap asks "what sizes are believable?" A publishable finding survives both.</a:t>
-            </a:r>
-            <a:endParaRPr lang="en-US" sz="1650" dirty="0"/>
+              <a:t>Read the stragglers: a gardening comment about a partner sorts with relationship_advice. The cluster found vocabulary; vocabulary mostly tracks community. Name what separated before you claim it.</a:t>
+            </a:r>
+            <a:endParaRPr lang="en-US" sz="1500" dirty="0"/>
+          </a:p>
+        </p:txBody>
+      </p:sp>
+      <p:sp>
+        <p:nvSpPr>
+          <p:cNvPr id="13" name="Shape 11"/>
+          <p:cNvSpPr/>
+          <p:nvPr/>
+        </p:nvSpPr>
+        <p:spPr>
+          <a:xfrm>
+            <a:off x="640080" y="5044440"/>
+            <a:ext cx="201168" cy="201168"/>
+          </a:xfrm>
+          <a:prstGeom prst="ellipse">
+            <a:avLst/>
+          </a:prstGeom>
+          <a:solidFill>
+            <a:srgbClr val="3F6F5F"/>
+          </a:solidFill>
+          <a:ln/>
+        </p:spPr>
+      </p:sp>
+      <p:sp>
+        <p:nvSpPr>
+          <p:cNvPr id="14" name="Text 12"/>
+          <p:cNvSpPr/>
+          <p:nvPr/>
+        </p:nvSpPr>
+        <p:spPr>
+          <a:xfrm>
+            <a:off x="1097280" y="4953000"/>
+            <a:ext cx="10607040" cy="678180"/>
+          </a:xfrm>
+          <a:prstGeom prst="rect">
+            <a:avLst/>
+          </a:prstGeom>
+          <a:noFill/>
+          <a:ln/>
+        </p:spPr>
+        <p:txBody>
+          <a:bodyPr wrap="square" rtlCol="0" anchor="t">
+            <a:spAutoFit/>
+          </a:bodyPr>
+          <a:lstStyle/>
+          <a:p>
+            <a:pPr indent="0" marL="0">
+              <a:lnSpc>
+                <a:spcPct val="112000"/>
+              </a:lnSpc>
+              <a:buNone/>
+            </a:pPr>
+            <a:r>
+              <a:rPr lang="en-US" sz="1500" dirty="0">
+                <a:solidFill>
+                  <a:srgbClr val="1A1A1A"/>
+                </a:solidFill>
+                <a:latin typeface="Calibri" pitchFamily="34" charset="0"/>
+                <a:ea typeface="Calibri" pitchFamily="34" charset="-122"/>
+                <a:cs typeface="Calibri" pitchFamily="34" charset="-120"/>
+              </a:rPr>
+              <a:t>The hard version, in the go-further: r/sandiego against r/SanDiegan, one city, two communities. Clustering barely beats a coin flip, and even Week 3's supervised classifier reaches only about 60 percent. Topic is easy; community-within-topic is hard.</a:t>
+            </a:r>
+            <a:endParaRPr lang="en-US" sz="1500" dirty="0"/>
+          </a:p>
+        </p:txBody>
+      </p:sp>
+      <p:sp>
+        <p:nvSpPr>
+          <p:cNvPr id="15" name="Shape 13"/>
+          <p:cNvSpPr/>
+          <p:nvPr/>
+        </p:nvSpPr>
+        <p:spPr>
+          <a:xfrm>
+            <a:off x="640080" y="5722620"/>
+            <a:ext cx="201168" cy="201168"/>
+          </a:xfrm>
+          <a:prstGeom prst="ellipse">
+            <a:avLst/>
+          </a:prstGeom>
+          <a:solidFill>
+            <a:srgbClr val="B9852F"/>
+          </a:solidFill>
+          <a:ln/>
+        </p:spPr>
+      </p:sp>
+      <p:sp>
+        <p:nvSpPr>
+          <p:cNvPr id="16" name="Text 14"/>
+          <p:cNvSpPr/>
+          <p:nvPr/>
+        </p:nvSpPr>
+        <p:spPr>
+          <a:xfrm>
+            <a:off x="1097280" y="5631180"/>
+            <a:ext cx="10607040" cy="678180"/>
+          </a:xfrm>
+          <a:prstGeom prst="rect">
+            <a:avLst/>
+          </a:prstGeom>
+          <a:noFill/>
+          <a:ln/>
+        </p:spPr>
+        <p:txBody>
+          <a:bodyPr wrap="square" rtlCol="0" anchor="t">
+            <a:spAutoFit/>
+          </a:bodyPr>
+          <a:lstStyle/>
+          <a:p>
+            <a:pPr indent="0" marL="0">
+              <a:lnSpc>
+                <a:spcPct val="112000"/>
+              </a:lnSpc>
+              <a:buNone/>
+            </a:pPr>
+            <a:r>
+              <a:rPr lang="en-US" sz="1500" dirty="0">
+                <a:solidFill>
+                  <a:srgbClr val="1A1A1A"/>
+                </a:solidFill>
+                <a:latin typeface="Calibri" pitchFamily="34" charset="0"/>
+                <a:ea typeface="Calibri" pitchFamily="34" charset="-122"/>
+                <a:cs typeface="Calibri" pitchFamily="34" charset="-120"/>
+              </a:rPr>
+              <a:t>And the same move for pictures: twenty Met paintings counted into 27 color buckets, k-means, no labels. Portraits sort from landscapes three in four, and the stragglers (a brown winter landscape counts like a portrait) are the discussion.</a:t>
+            </a:r>
+            <a:endParaRPr lang="en-US" sz="1500" dirty="0"/>
           </a:p>
         </p:txBody>
       </p:sp>

--- a/slides/pptx/week-02.pptx
+++ b/slides/pptx/week-02.pptx
@@ -6264,7 +6264,7 @@
                 <a:ea typeface="Calibri" pitchFamily="34" charset="-122"/>
                 <a:cs typeface="Calibri" pitchFamily="34" charset="-120"/>
               </a:rPr>
-              <a:t>Wolfram, What Is ChatGPT Doing (opening sections only)</a:t>
+              <a:t>Underwood, The Historical Significance of Textual Distances (2018): does near-in-count-space mean near-in-culture?</a:t>
             </a:r>
             <a:endParaRPr lang="en-US" sz="1400" dirty="0"/>
           </a:p>
@@ -6364,7 +6364,7 @@
                 <a:ea typeface="Calibri" pitchFamily="34" charset="-122"/>
                 <a:cs typeface="Calibri" pitchFamily="34" charset="-120"/>
               </a:rPr>
-              <a:t>Zipf's law, the straight line in every text</a:t>
+              <a:t>Wolfram, What Is ChatGPT Doing (opening sections only), where even generation turns out to be counting</a:t>
             </a:r>
             <a:endParaRPr lang="en-US" sz="1400" dirty="0"/>
           </a:p>

--- a/slides/pptx/week-02.pptx
+++ b/slides/pptx/week-02.pptx
@@ -6264,7 +6264,7 @@
                 <a:ea typeface="Calibri" pitchFamily="34" charset="-122"/>
                 <a:cs typeface="Calibri" pitchFamily="34" charset="-120"/>
               </a:rPr>
-              <a:t>Underwood, The Historical Significance of Textual Distances (2018): does near-in-count-space mean near-in-culture?</a:t>
+              <a:t>The debate: Underwood, The Historical Significance of Textual Distances (2018) against Da, The Computational Case Against Computational Literary Studies (2019), introduction and one case study</a:t>
             </a:r>
             <a:endParaRPr lang="en-US" sz="1400" dirty="0"/>
           </a:p>
@@ -6364,7 +6364,7 @@
                 <a:ea typeface="Calibri" pitchFamily="34" charset="-122"/>
                 <a:cs typeface="Calibri" pitchFamily="34" charset="-120"/>
               </a:rPr>
-              <a:t>Wolfram, What Is ChatGPT Doing (opening sections only), where even generation turns out to be counting</a:t>
+              <a:t>the Critical Inquiry online forum (free): the field answers Da, Underwood included, and Da answers back</a:t>
             </a:r>
             <a:endParaRPr lang="en-US" sz="1400" dirty="0"/>
           </a:p>

--- a/slides/pptx/week-02.pptx
+++ b/slides/pptx/week-02.pptx
@@ -6264,7 +6264,7 @@
                 <a:ea typeface="Calibri" pitchFamily="34" charset="-122"/>
                 <a:cs typeface="Calibri" pitchFamily="34" charset="-120"/>
               </a:rPr>
-              <a:t>The debate: Underwood, The Historical Significance of Textual Distances (2018) against Da, The Computational Case Against Computational Literary Studies (2019), introduction and one case study</a:t>
+              <a:t>Matt Daniels, The Largest Vocabulary in Hip Hop (The Pudding): 150 rappers ranked by unique words, token analysis exactly as in today's session, caveats and all</a:t>
             </a:r>
             <a:endParaRPr lang="en-US" sz="1400" dirty="0"/>
           </a:p>
@@ -6364,7 +6364,7 @@
                 <a:ea typeface="Calibri" pitchFamily="34" charset="-122"/>
                 <a:cs typeface="Calibri" pitchFamily="34" charset="-120"/>
               </a:rPr>
-              <a:t>the Critical Inquiry online forum (free): the field answers Da, Underwood included, and Da answers back</a:t>
+              <a:t>For the curious, the field's own version of today's trial: Underwood, Textual Distances (2018) vs. Da, The Computational Case (2019), with the free forum where the field argues back</a:t>
             </a:r>
             <a:endParaRPr lang="en-US" sz="1400" dirty="0"/>
           </a:p>

--- a/slides/pptx/week-02.pptx
+++ b/slides/pptx/week-02.pptx
@@ -5787,7 +5787,7 @@
                 <a:ea typeface="Calibri" pitchFamily="34" charset="-122"/>
                 <a:cs typeface="Calibri" pitchFamily="34" charset="-120"/>
               </a:rPr>
-              <a:t>N-grams and statistics, hands-on: bigrams across three corpora, distributions and mean-versus-median on real counts, rates per 1,000 words, z-scores as the common scale. Then tf-idf at two scales, single comments as documents and twelve whole subreddits as documents, each community sight-read from its distinctive words (cpu and coolers, roth and rates, puts and bears), then the idea of a space made explicit (documents as points, one axis per word, a two-word space drawn), and k-means on the live comments: raw counts give a blob, tf-idf plus 60 dimensions sorts six in seven comments with their community. The representation, not the algorithm, does the work. Closer: the same k-means on twenty Met paintings counted into 27 color buckets sorts portraits from landscapes, three in four.</a:t>
+              <a:t>N-grams and statistics, hands-on: bigrams across three corpora, distributions and mean-versus-median on real counts, rates per 1,000 words, z-scores as the common scale. Then tf-idf at two scales, single comments as documents and twelve whole subreddits as documents, each community sight-read from its distinctive words (cpu and coolers, roth and rates, puts and bears), then the idea of a space made explicit (documents as points, one axis per word, a two-word space drawn), and k-means on the live comments: raw counts give a blob, tf-idf plus 60 dimensions sorts about four comments in five with their community. The representation, not the algorithm, does the work. Then the room drives: propose a question, pick three communities, everyone predicts which stands alone and which two blur, one call clusters them live, and the table scores the room. Closer: the same k-means on twenty Met paintings counted into 27 color buckets sorts portraits from landscapes, three in four.</a:t>
             </a:r>
             <a:endParaRPr lang="en-US" sz="1100" dirty="0"/>
           </a:p>
@@ -10442,7 +10442,7 @@
                 <a:ea typeface="Calibri" pitchFamily="34" charset="-122"/>
                 <a:cs typeface="Calibri" pitchFamily="34" charset="-120"/>
               </a:rPr>
-              <a:t>Raw counts: one blob, the everywhere-words dominate. tf-idf: better, still smeared. tf-idf compressed to 60 dimensions: about six comments in seven land with their community.</a:t>
+              <a:t>Raw counts: one blob, the everywhere-words dominate. tf-idf: better, still smeared. tf-idf compressed to 60 dimensions: about four comments in five land with their community.</a:t>
             </a:r>
             <a:endParaRPr lang="en-US" sz="1500" dirty="0"/>
           </a:p>

--- a/slides/pptx/week-02.pptx
+++ b/slides/pptx/week-02.pptx
@@ -5787,7 +5787,7 @@
                 <a:ea typeface="Calibri" pitchFamily="34" charset="-122"/>
                 <a:cs typeface="Calibri" pitchFamily="34" charset="-120"/>
               </a:rPr>
-              <a:t>N-grams and statistics, hands-on: bigrams across three corpora, distributions and mean-versus-median on real counts, rates per 1,000 words, z-scores as the common scale. Then tf-idf at two scales, single comments as documents and twelve whole subreddits as documents, each community sight-read from its distinctive words (cpu and coolers, roth and rates, puts and bears), then the idea of a space made explicit (documents as points, one axis per word, a two-word space drawn), and k-means on the live comments: raw counts give a blob, tf-idf plus 60 dimensions sorts about four comments in five with their community. The representation, not the algorithm, does the work. Then the room drives: propose a question, pick three communities, everyone predicts which stands alone and which two blur, one call clusters them live, and the table scores the room. Closer: the same k-means on twenty Met paintings counted into 27 color buckets sorts portraits from landscapes, three in four.</a:t>
+              <a:t>The focused lab: tf-idf at two scales (single comments, then twelve whole subreddits sight-read from their distinctive words), keyness raw and standardized (elevated words: topic and register), and the shuffle test with its traps (selection, multiplicity, effect size). Closer, together: the room picks a pair of communities, everyone predicts the elevated words, one call scores the room, the favorite word goes on trial, and a final call maps the pair as two clouds. N-grams, Zipf, stemming, statistics habits, clustering, the paintings, and a She Giggles replication on Reddit live in the notebook's appendix as after-class and project tools.</a:t>
             </a:r>
             <a:endParaRPr lang="en-US" sz="1100" dirty="0"/>
           </a:p>

--- a/slides/pptx/week-02.pptx
+++ b/slides/pptx/week-02.pptx
@@ -5787,7 +5787,7 @@
                 <a:ea typeface="Calibri" pitchFamily="34" charset="-122"/>
                 <a:cs typeface="Calibri" pitchFamily="34" charset="-120"/>
               </a:rPr>
-              <a:t>The focused lab: tf-idf at two scales (single comments, then twelve whole subreddits sight-read from their distinctive words), keyness raw and standardized (elevated words: topic and register), and the shuffle test with its traps (selection, multiplicity, effect size). Closer, together: the room picks a pair of communities, everyone predicts the elevated words, one call scores the room, the favorite word goes on trial, and a final call maps the pair as two clouds. N-grams, Zipf, stemming, statistics habits, clustering, the paintings, and a She Giggles replication on Reddit live in the notebook's appendix as after-class and project tools.</a:t>
+              <a:t>The focused lab: tf-idf at two scales (single comments, then twelve whole subreddits sight-read from their distinctive words), keyness raw and standardized (elevated words: topic and register), and the shuffle test with its traps (selection, multiplicity, effect size). Closer, together: the room picks a pair of communities, everyone predicts the elevated words, one call scores the room, the favorite word goes on trial, and a final call maps the pair as two clouds. N-grams, Zipf, stemming, statistics habits, clustering, the paintings, and a Bollen replication on Reddit (absolutist-language rates by year, community held fixed) live in the notebook's appendix as after-class and project tools.</a:t>
             </a:r>
             <a:endParaRPr lang="en-US" sz="1100" dirty="0"/>
           </a:p>

--- a/slides/pptx/week-02.pptx
+++ b/slides/pptx/week-02.pptx
@@ -5787,7 +5787,7 @@
                 <a:ea typeface="Calibri" pitchFamily="34" charset="-122"/>
                 <a:cs typeface="Calibri" pitchFamily="34" charset="-120"/>
               </a:rPr>
-              <a:t>The focused lab: tf-idf at two scales (single comments, then twelve whole subreddits sight-read from their distinctive words), keyness raw and standardized (elevated words: topic and register), and the shuffle test with its traps (selection, multiplicity, effect size). Closer, together: the room picks a pair of communities, everyone predicts the elevated words, one call scores the room, the favorite word goes on trial, and a final call maps the pair as two clouds. N-grams, Zipf, stemming, statistics habits, clustering, the paintings, and a Bollen replication on Reddit (absolutist-language rates by year, community held fixed) live in the notebook's appendix as after-class and project tools.</a:t>
+              <a:t>The lab, one case throughout: tf-idf sight-reads twelve communities, keyness finds elevated words (topic and register), z-scores and the shuffle test arrive with worked examples and YOUR-TURN blanks, the Bollen trial's evidence runs live from Google Books, and the session lands on the replication: absolutist-language rates by year in one community held fixed, trend put on trial against shuffled years. Each pair then reruns it on a community they know and brings the plot back: ten plots is a classroom replication study. Clustering, n-grams, Zipf, stemming, the paintings, and the elevated-words game live in the appendix.</a:t>
             </a:r>
             <a:endParaRPr lang="en-US" sz="1100" dirty="0"/>
           </a:p>

--- a/slides/pptx/week-02.pptx
+++ b/slides/pptx/week-02.pptx
@@ -5787,7 +5787,7 @@
                 <a:ea typeface="Calibri" pitchFamily="34" charset="-122"/>
                 <a:cs typeface="Calibri" pitchFamily="34" charset="-120"/>
               </a:rPr>
-              <a:t>The lab, one case throughout: tf-idf sight-reads twelve communities, keyness finds elevated words (topic and register), z-scores and the shuffle test arrive with worked examples and YOUR-TURN blanks, the Bollen trial's evidence runs live from Google Books, and the session lands on the replication: absolutist-language rates by year in one community held fixed, trend put on trial against shuffled years. Each pair then reruns it on a community they know and brings the plot back: ten plots is a classroom replication study. Clustering, n-grams, Zipf, stemming, the paintings, and the elevated-words game live in the appendix.</a:t>
+              <a:t>The lab, one case throughout: vectorization turns comments into rows of numbers and the corpus into a cloud of points, tf-idf sight-reads twelve communities, keyness finds elevated words (topic and register), z-scores and the shuffle test arrive with worked examples and YOUR-TURN blanks, the Bollen trial's evidence runs live from Google Books, and the session lands on the replication: absolutist-language rates by year in one community held fixed, trend put on trial against shuffled years. Each pair then reruns it on a community they know and brings the plot back: ten plots is a classroom replication study. Clustering, n-grams, Zipf, stemming, the paintings, and the elevated-words game live in the appendix.</a:t>
             </a:r>
             <a:endParaRPr lang="en-US" sz="1100" dirty="0"/>
           </a:p>
